--- a/Seminario de Sistemas/Clases/Clase 7 - Historias de usuario/Presentacion.pptx
+++ b/Seminario de Sistemas/Clases/Clase 7 - Historias de usuario/Presentacion.pptx
@@ -19,6 +19,12 @@
     <p:sldId id="267" r:id="rId18"/>
     <p:sldId id="268" r:id="rId19"/>
     <p:sldId id="269" r:id="rId20"/>
+    <p:sldId id="270" r:id="rId21"/>
+    <p:sldId id="271" r:id="rId22"/>
+    <p:sldId id="272" r:id="rId23"/>
+    <p:sldId id="273" r:id="rId24"/>
+    <p:sldId id="274" r:id="rId25"/>
+    <p:sldId id="275" r:id="rId26"/>
   </p:sldIdLst>
   <p:sldSz cx="12191695" cy="6858000" type="screen4x3"/>
   <p:notesSz cx="6858000" cy="9144000"/>
@@ -3619,111 +3625,21 @@
                 </a:solidFill>
                 <a:latin typeface="Calibri"/>
               </a:rPr>
-              <a:t>Taller PI — pasos guiados</a:t>
-            </a:r>
-          </a:p>
-        </p:txBody>
-      </p:sp>
-      <p:sp>
-        <p:nvSpPr>
-          <p:cNvPr id="5" name="Rounded Rectangle 4"/>
-          <p:cNvSpPr/>
-          <p:nvPr/>
-        </p:nvSpPr>
-        <p:spPr>
-          <a:xfrm>
-            <a:off x="457200" y="1234440"/>
-            <a:ext cx="11277295" cy="950976"/>
-          </a:xfrm>
-          <a:prstGeom prst="roundRect">
-            <a:avLst>
-              <a:gd name="adj" fmla="val 12000"/>
-            </a:avLst>
-          </a:prstGeom>
-          <a:solidFill>
-            <a:srgbClr val="F2F2F2"/>
-          </a:solidFill>
-          <a:ln>
-            <a:noFill/>
-          </a:ln>
-        </p:spPr>
-        <p:style>
-          <a:lnRef idx="1">
-            <a:schemeClr val="accent1"/>
-          </a:lnRef>
-          <a:fillRef idx="3">
-            <a:schemeClr val="accent1"/>
-          </a:fillRef>
-          <a:effectRef idx="2">
-            <a:schemeClr val="accent1"/>
-          </a:effectRef>
-          <a:fontRef idx="minor">
-            <a:schemeClr val="lt1"/>
-          </a:fontRef>
-        </p:style>
-        <p:txBody>
-          <a:bodyPr rtlCol="0" anchor="ctr"/>
-          <a:lstStyle/>
-          <a:p>
-            <a:pPr algn="ctr"/>
-          </a:p>
-        </p:txBody>
-      </p:sp>
-      <p:sp>
-        <p:nvSpPr>
-          <p:cNvPr id="6" name="Rounded Rectangle 5"/>
-          <p:cNvSpPr/>
-          <p:nvPr/>
-        </p:nvSpPr>
-        <p:spPr>
-          <a:xfrm>
-            <a:off x="594360" y="1490472"/>
-            <a:ext cx="438912" cy="438912"/>
-          </a:xfrm>
-          <a:prstGeom prst="roundRect">
-            <a:avLst>
-              <a:gd name="adj" fmla="val 12000"/>
-            </a:avLst>
-          </a:prstGeom>
-          <a:solidFill>
-            <a:srgbClr val="095292"/>
-          </a:solidFill>
-          <a:ln>
-            <a:noFill/>
-          </a:ln>
-        </p:spPr>
-        <p:style>
-          <a:lnRef idx="1">
-            <a:schemeClr val="accent1"/>
-          </a:lnRef>
-          <a:fillRef idx="3">
-            <a:schemeClr val="accent1"/>
-          </a:fillRef>
-          <a:effectRef idx="2">
-            <a:schemeClr val="accent1"/>
-          </a:effectRef>
-          <a:fontRef idx="minor">
-            <a:schemeClr val="lt1"/>
-          </a:fontRef>
-        </p:style>
-        <p:txBody>
-          <a:bodyPr rtlCol="0" anchor="ctr"/>
-          <a:lstStyle/>
-          <a:p>
-            <a:pPr algn="ctr"/>
-          </a:p>
-        </p:txBody>
-      </p:sp>
-      <p:sp>
-        <p:nvSpPr>
-          <p:cNvPr id="7" name="TextBox 6"/>
+              <a:t>Estimar en agil no es adivinar horas sino comparar tamanos, y esa es la... (2/2)</a:t>
+            </a:r>
+          </a:p>
+        </p:txBody>
+      </p:sp>
+      <p:sp>
+        <p:nvSpPr>
+          <p:cNvPr id="5" name="TextBox 4"/>
           <p:cNvSpPr txBox="1"/>
           <p:nvPr/>
         </p:nvSpPr>
         <p:spPr>
           <a:xfrm>
-            <a:off x="594360" y="1490472"/>
-            <a:ext cx="438912" cy="438912"/>
+            <a:off x="457200" y="1170432"/>
+            <a:ext cx="11277295" cy="5230368"/>
           </a:xfrm>
           <a:prstGeom prst="rect">
             <a:avLst/>
@@ -3731,677 +3647,63 @@
           <a:noFill/>
         </p:spPr>
         <p:txBody>
-          <a:bodyPr wrap="square" anchor="ctr"/>
-          <a:lstStyle/>
-          <a:p>
-            <a:pPr algn="ctr"/>
-            <a:r>
-              <a:rPr sz="1600" b="1" i="0">
-                <a:solidFill>
-                  <a:srgbClr val="FFFFFF"/>
-                </a:solidFill>
-                <a:latin typeface="Calibri"/>
-              </a:rPr>
-              <a:t>1</a:t>
-            </a:r>
-          </a:p>
-        </p:txBody>
-      </p:sp>
-      <p:sp>
-        <p:nvSpPr>
-          <p:cNvPr id="8" name="TextBox 7"/>
-          <p:cNvSpPr txBox="1"/>
-          <p:nvPr/>
-        </p:nvSpPr>
-        <p:spPr>
-          <a:xfrm>
-            <a:off x="1188720" y="1325880"/>
-            <a:ext cx="10271455" cy="786384"/>
-          </a:xfrm>
-          <a:prstGeom prst="rect">
-            <a:avLst/>
-          </a:prstGeom>
-          <a:noFill/>
-        </p:spPr>
-        <p:txBody>
-          <a:bodyPr wrap="square" anchor="ctr"/>
-          <a:lstStyle/>
-          <a:p>
-            <a:r>
-              <a:rPr sz="1500" b="1" i="0">
-                <a:solidFill>
-                  <a:srgbClr val="095292"/>
-                </a:solidFill>
-                <a:latin typeface="Calibri"/>
-              </a:rPr>
-              <a:t>Paso 1: agrupe los RF del catalogo de la clase 6 en dos epicas de VetCare (por ejemplo Gestion de pacientes e Historial y agenda) y escriba el nombre y el objetivo de cada epica en una linea.</a:t>
-            </a:r>
-          </a:p>
-        </p:txBody>
-      </p:sp>
-      <p:sp>
-        <p:nvSpPr>
-          <p:cNvPr id="9" name="Rounded Rectangle 8"/>
-          <p:cNvSpPr/>
-          <p:nvPr/>
-        </p:nvSpPr>
-        <p:spPr>
-          <a:xfrm>
-            <a:off x="457200" y="2276856"/>
-            <a:ext cx="11277295" cy="950976"/>
-          </a:xfrm>
-          <a:prstGeom prst="roundRect">
-            <a:avLst>
-              <a:gd name="adj" fmla="val 12000"/>
-            </a:avLst>
-          </a:prstGeom>
-          <a:solidFill>
-            <a:srgbClr val="E8F4FA"/>
-          </a:solidFill>
-          <a:ln>
-            <a:noFill/>
-          </a:ln>
-        </p:spPr>
-        <p:style>
-          <a:lnRef idx="1">
-            <a:schemeClr val="accent1"/>
-          </a:lnRef>
-          <a:fillRef idx="3">
-            <a:schemeClr val="accent1"/>
-          </a:fillRef>
-          <a:effectRef idx="2">
-            <a:schemeClr val="accent1"/>
-          </a:effectRef>
-          <a:fontRef idx="minor">
-            <a:schemeClr val="lt1"/>
-          </a:fontRef>
-        </p:style>
-        <p:txBody>
-          <a:bodyPr rtlCol="0" anchor="ctr"/>
-          <a:lstStyle/>
-          <a:p>
-            <a:pPr algn="ctr"/>
-          </a:p>
-        </p:txBody>
-      </p:sp>
-      <p:sp>
-        <p:nvSpPr>
-          <p:cNvPr id="10" name="Rounded Rectangle 9"/>
-          <p:cNvSpPr/>
-          <p:nvPr/>
-        </p:nvSpPr>
-        <p:spPr>
-          <a:xfrm>
-            <a:off x="594360" y="2532888"/>
-            <a:ext cx="438912" cy="438912"/>
-          </a:xfrm>
-          <a:prstGeom prst="roundRect">
-            <a:avLst>
-              <a:gd name="adj" fmla="val 12000"/>
-            </a:avLst>
-          </a:prstGeom>
-          <a:solidFill>
-            <a:srgbClr val="095292"/>
-          </a:solidFill>
-          <a:ln>
-            <a:noFill/>
-          </a:ln>
-        </p:spPr>
-        <p:style>
-          <a:lnRef idx="1">
-            <a:schemeClr val="accent1"/>
-          </a:lnRef>
-          <a:fillRef idx="3">
-            <a:schemeClr val="accent1"/>
-          </a:fillRef>
-          <a:effectRef idx="2">
-            <a:schemeClr val="accent1"/>
-          </a:effectRef>
-          <a:fontRef idx="minor">
-            <a:schemeClr val="lt1"/>
-          </a:fontRef>
-        </p:style>
-        <p:txBody>
-          <a:bodyPr rtlCol="0" anchor="ctr"/>
-          <a:lstStyle/>
-          <a:p>
-            <a:pPr algn="ctr"/>
-          </a:p>
-        </p:txBody>
-      </p:sp>
-      <p:sp>
-        <p:nvSpPr>
-          <p:cNvPr id="11" name="TextBox 10"/>
-          <p:cNvSpPr txBox="1"/>
-          <p:nvPr/>
-        </p:nvSpPr>
-        <p:spPr>
-          <a:xfrm>
-            <a:off x="594360" y="2532888"/>
-            <a:ext cx="438912" cy="438912"/>
-          </a:xfrm>
-          <a:prstGeom prst="rect">
-            <a:avLst/>
-          </a:prstGeom>
-          <a:noFill/>
-        </p:spPr>
-        <p:txBody>
-          <a:bodyPr wrap="square" anchor="ctr"/>
-          <a:lstStyle/>
-          <a:p>
-            <a:pPr algn="ctr"/>
-            <a:r>
-              <a:rPr sz="1600" b="1" i="0">
-                <a:solidFill>
-                  <a:srgbClr val="FFFFFF"/>
-                </a:solidFill>
-                <a:latin typeface="Calibri"/>
-              </a:rPr>
-              <a:t>2</a:t>
-            </a:r>
-          </a:p>
-        </p:txBody>
-      </p:sp>
-      <p:sp>
-        <p:nvSpPr>
-          <p:cNvPr id="12" name="TextBox 11"/>
-          <p:cNvSpPr txBox="1"/>
-          <p:nvPr/>
-        </p:nvSpPr>
-        <p:spPr>
-          <a:xfrm>
-            <a:off x="1188720" y="2368296"/>
-            <a:ext cx="10271455" cy="786384"/>
-          </a:xfrm>
-          <a:prstGeom prst="rect">
-            <a:avLst/>
-          </a:prstGeom>
-          <a:noFill/>
-        </p:spPr>
-        <p:txBody>
-          <a:bodyPr wrap="square" anchor="ctr"/>
-          <a:lstStyle/>
-          <a:p>
-            <a:r>
-              <a:rPr sz="1500" b="1" i="0">
-                <a:solidFill>
-                  <a:srgbClr val="095292"/>
-                </a:solidFill>
-                <a:latin typeface="Calibri"/>
-              </a:rPr>
-              <a:t>Paso 2: descomponga las dos epicas en 8 historias con el formato Como &lt;rol de la clinica Huellitas&gt; quiero &lt;accion&gt; para &lt;beneficio&gt;, usando roles concretos (auxiliar, veterinario, administrador) y nunca la palabra usuario.</a:t>
-            </a:r>
-          </a:p>
-        </p:txBody>
-      </p:sp>
-      <p:sp>
-        <p:nvSpPr>
-          <p:cNvPr id="13" name="Rounded Rectangle 12"/>
-          <p:cNvSpPr/>
-          <p:nvPr/>
-        </p:nvSpPr>
-        <p:spPr>
-          <a:xfrm>
-            <a:off x="457200" y="3319272"/>
-            <a:ext cx="11277295" cy="950976"/>
-          </a:xfrm>
-          <a:prstGeom prst="roundRect">
-            <a:avLst>
-              <a:gd name="adj" fmla="val 12000"/>
-            </a:avLst>
-          </a:prstGeom>
-          <a:solidFill>
-            <a:srgbClr val="F2F2F2"/>
-          </a:solidFill>
-          <a:ln>
-            <a:noFill/>
-          </a:ln>
-        </p:spPr>
-        <p:style>
-          <a:lnRef idx="1">
-            <a:schemeClr val="accent1"/>
-          </a:lnRef>
-          <a:fillRef idx="3">
-            <a:schemeClr val="accent1"/>
-          </a:fillRef>
-          <a:effectRef idx="2">
-            <a:schemeClr val="accent1"/>
-          </a:effectRef>
-          <a:fontRef idx="minor">
-            <a:schemeClr val="lt1"/>
-          </a:fontRef>
-        </p:style>
-        <p:txBody>
-          <a:bodyPr rtlCol="0" anchor="ctr"/>
-          <a:lstStyle/>
-          <a:p>
-            <a:pPr algn="ctr"/>
-          </a:p>
-        </p:txBody>
-      </p:sp>
-      <p:sp>
-        <p:nvSpPr>
-          <p:cNvPr id="14" name="Rounded Rectangle 13"/>
-          <p:cNvSpPr/>
-          <p:nvPr/>
-        </p:nvSpPr>
-        <p:spPr>
-          <a:xfrm>
-            <a:off x="594360" y="3575304"/>
-            <a:ext cx="438912" cy="438912"/>
-          </a:xfrm>
-          <a:prstGeom prst="roundRect">
-            <a:avLst>
-              <a:gd name="adj" fmla="val 12000"/>
-            </a:avLst>
-          </a:prstGeom>
-          <a:solidFill>
-            <a:srgbClr val="095292"/>
-          </a:solidFill>
-          <a:ln>
-            <a:noFill/>
-          </a:ln>
-        </p:spPr>
-        <p:style>
-          <a:lnRef idx="1">
-            <a:schemeClr val="accent1"/>
-          </a:lnRef>
-          <a:fillRef idx="3">
-            <a:schemeClr val="accent1"/>
-          </a:fillRef>
-          <a:effectRef idx="2">
-            <a:schemeClr val="accent1"/>
-          </a:effectRef>
-          <a:fontRef idx="minor">
-            <a:schemeClr val="lt1"/>
-          </a:fontRef>
-        </p:style>
-        <p:txBody>
-          <a:bodyPr rtlCol="0" anchor="ctr"/>
-          <a:lstStyle/>
-          <a:p>
-            <a:pPr algn="ctr"/>
-          </a:p>
-        </p:txBody>
-      </p:sp>
-      <p:sp>
-        <p:nvSpPr>
-          <p:cNvPr id="15" name="TextBox 14"/>
-          <p:cNvSpPr txBox="1"/>
-          <p:nvPr/>
-        </p:nvSpPr>
-        <p:spPr>
-          <a:xfrm>
-            <a:off x="594360" y="3575304"/>
-            <a:ext cx="438912" cy="438912"/>
-          </a:xfrm>
-          <a:prstGeom prst="rect">
-            <a:avLst/>
-          </a:prstGeom>
-          <a:noFill/>
-        </p:spPr>
-        <p:txBody>
-          <a:bodyPr wrap="square" anchor="ctr"/>
-          <a:lstStyle/>
-          <a:p>
-            <a:pPr algn="ctr"/>
-            <a:r>
-              <a:rPr sz="1600" b="1" i="0">
-                <a:solidFill>
-                  <a:srgbClr val="FFFFFF"/>
-                </a:solidFill>
-                <a:latin typeface="Calibri"/>
-              </a:rPr>
-              <a:t>3</a:t>
-            </a:r>
-          </a:p>
-        </p:txBody>
-      </p:sp>
-      <p:sp>
-        <p:nvSpPr>
-          <p:cNvPr id="16" name="TextBox 15"/>
-          <p:cNvSpPr txBox="1"/>
-          <p:nvPr/>
-        </p:nvSpPr>
-        <p:spPr>
-          <a:xfrm>
-            <a:off x="1188720" y="3410712"/>
-            <a:ext cx="10271455" cy="786384"/>
-          </a:xfrm>
-          <a:prstGeom prst="rect">
-            <a:avLst/>
-          </a:prstGeom>
-          <a:noFill/>
-        </p:spPr>
-        <p:txBody>
-          <a:bodyPr wrap="square" anchor="ctr"/>
-          <a:lstStyle/>
-          <a:p>
-            <a:r>
-              <a:rPr sz="1500" b="1" i="0">
-                <a:solidFill>
-                  <a:srgbClr val="095292"/>
-                </a:solidFill>
-                <a:latin typeface="Calibri"/>
-              </a:rPr>
-              <a:t>Paso 3: escriba 2 o 3 criterios de aceptacion por historia en Dado-Cuando-Entonces, e incluya obligatoriamente un criterio de camino alterno o de error en al menos cuatro de las ocho historias.</a:t>
-            </a:r>
-          </a:p>
-        </p:txBody>
-      </p:sp>
-      <p:sp>
-        <p:nvSpPr>
-          <p:cNvPr id="17" name="Rounded Rectangle 16"/>
-          <p:cNvSpPr/>
-          <p:nvPr/>
-        </p:nvSpPr>
-        <p:spPr>
-          <a:xfrm>
-            <a:off x="457200" y="4361688"/>
-            <a:ext cx="11277295" cy="950976"/>
-          </a:xfrm>
-          <a:prstGeom prst="roundRect">
-            <a:avLst>
-              <a:gd name="adj" fmla="val 12000"/>
-            </a:avLst>
-          </a:prstGeom>
-          <a:solidFill>
-            <a:srgbClr val="E8F4FA"/>
-          </a:solidFill>
-          <a:ln>
-            <a:noFill/>
-          </a:ln>
-        </p:spPr>
-        <p:style>
-          <a:lnRef idx="1">
-            <a:schemeClr val="accent1"/>
-          </a:lnRef>
-          <a:fillRef idx="3">
-            <a:schemeClr val="accent1"/>
-          </a:fillRef>
-          <a:effectRef idx="2">
-            <a:schemeClr val="accent1"/>
-          </a:effectRef>
-          <a:fontRef idx="minor">
-            <a:schemeClr val="lt1"/>
-          </a:fontRef>
-        </p:style>
-        <p:txBody>
-          <a:bodyPr rtlCol="0" anchor="ctr"/>
-          <a:lstStyle/>
-          <a:p>
-            <a:pPr algn="ctr"/>
-          </a:p>
-        </p:txBody>
-      </p:sp>
-      <p:sp>
-        <p:nvSpPr>
-          <p:cNvPr id="18" name="Rounded Rectangle 17"/>
-          <p:cNvSpPr/>
-          <p:nvPr/>
-        </p:nvSpPr>
-        <p:spPr>
-          <a:xfrm>
-            <a:off x="594360" y="4617720"/>
-            <a:ext cx="438912" cy="438912"/>
-          </a:xfrm>
-          <a:prstGeom prst="roundRect">
-            <a:avLst>
-              <a:gd name="adj" fmla="val 12000"/>
-            </a:avLst>
-          </a:prstGeom>
-          <a:solidFill>
-            <a:srgbClr val="095292"/>
-          </a:solidFill>
-          <a:ln>
-            <a:noFill/>
-          </a:ln>
-        </p:spPr>
-        <p:style>
-          <a:lnRef idx="1">
-            <a:schemeClr val="accent1"/>
-          </a:lnRef>
-          <a:fillRef idx="3">
-            <a:schemeClr val="accent1"/>
-          </a:fillRef>
-          <a:effectRef idx="2">
-            <a:schemeClr val="accent1"/>
-          </a:effectRef>
-          <a:fontRef idx="minor">
-            <a:schemeClr val="lt1"/>
-          </a:fontRef>
-        </p:style>
-        <p:txBody>
-          <a:bodyPr rtlCol="0" anchor="ctr"/>
-          <a:lstStyle/>
-          <a:p>
-            <a:pPr algn="ctr"/>
-          </a:p>
-        </p:txBody>
-      </p:sp>
-      <p:sp>
-        <p:nvSpPr>
-          <p:cNvPr id="19" name="TextBox 18"/>
-          <p:cNvSpPr txBox="1"/>
-          <p:nvPr/>
-        </p:nvSpPr>
-        <p:spPr>
-          <a:xfrm>
-            <a:off x="594360" y="4617720"/>
-            <a:ext cx="438912" cy="438912"/>
-          </a:xfrm>
-          <a:prstGeom prst="rect">
-            <a:avLst/>
-          </a:prstGeom>
-          <a:noFill/>
-        </p:spPr>
-        <p:txBody>
-          <a:bodyPr wrap="square" anchor="ctr"/>
-          <a:lstStyle/>
-          <a:p>
-            <a:pPr algn="ctr"/>
-            <a:r>
-              <a:rPr sz="1600" b="1" i="0">
-                <a:solidFill>
-                  <a:srgbClr val="FFFFFF"/>
-                </a:solidFill>
-                <a:latin typeface="Calibri"/>
-              </a:rPr>
-              <a:t>4</a:t>
-            </a:r>
-          </a:p>
-        </p:txBody>
-      </p:sp>
-      <p:sp>
-        <p:nvSpPr>
-          <p:cNvPr id="20" name="TextBox 19"/>
-          <p:cNvSpPr txBox="1"/>
-          <p:nvPr/>
-        </p:nvSpPr>
-        <p:spPr>
-          <a:xfrm>
-            <a:off x="1188720" y="4453128"/>
-            <a:ext cx="10271455" cy="786384"/>
-          </a:xfrm>
-          <a:prstGeom prst="rect">
-            <a:avLst/>
-          </a:prstGeom>
-          <a:noFill/>
-        </p:spPr>
-        <p:txBody>
-          <a:bodyPr wrap="square" anchor="ctr"/>
-          <a:lstStyle/>
-          <a:p>
-            <a:r>
-              <a:rPr sz="1500" b="1" i="0">
-                <a:solidFill>
-                  <a:srgbClr val="095292"/>
-                </a:solidFill>
-                <a:latin typeface="Calibri"/>
-              </a:rPr>
-              <a:t>Paso 4: revise cada historia contra INVEST marcando las seis letras con si o no; toda historia que falle dos o mas letras debe reescribirse o partirse antes de continuar.</a:t>
-            </a:r>
-          </a:p>
-        </p:txBody>
-      </p:sp>
-      <p:sp>
-        <p:nvSpPr>
-          <p:cNvPr id="21" name="Rounded Rectangle 20"/>
-          <p:cNvSpPr/>
-          <p:nvPr/>
-        </p:nvSpPr>
-        <p:spPr>
-          <a:xfrm>
-            <a:off x="457200" y="5404104"/>
-            <a:ext cx="11277295" cy="950976"/>
-          </a:xfrm>
-          <a:prstGeom prst="roundRect">
-            <a:avLst>
-              <a:gd name="adj" fmla="val 12000"/>
-            </a:avLst>
-          </a:prstGeom>
-          <a:solidFill>
-            <a:srgbClr val="F2F2F2"/>
-          </a:solidFill>
-          <a:ln>
-            <a:noFill/>
-          </a:ln>
-        </p:spPr>
-        <p:style>
-          <a:lnRef idx="1">
-            <a:schemeClr val="accent1"/>
-          </a:lnRef>
-          <a:fillRef idx="3">
-            <a:schemeClr val="accent1"/>
-          </a:fillRef>
-          <a:effectRef idx="2">
-            <a:schemeClr val="accent1"/>
-          </a:effectRef>
-          <a:fontRef idx="minor">
-            <a:schemeClr val="lt1"/>
-          </a:fontRef>
-        </p:style>
-        <p:txBody>
-          <a:bodyPr rtlCol="0" anchor="ctr"/>
-          <a:lstStyle/>
-          <a:p>
-            <a:pPr algn="ctr"/>
-          </a:p>
-        </p:txBody>
-      </p:sp>
-      <p:sp>
-        <p:nvSpPr>
-          <p:cNvPr id="22" name="Rounded Rectangle 21"/>
-          <p:cNvSpPr/>
-          <p:nvPr/>
-        </p:nvSpPr>
-        <p:spPr>
-          <a:xfrm>
-            <a:off x="594360" y="5660136"/>
-            <a:ext cx="438912" cy="438912"/>
-          </a:xfrm>
-          <a:prstGeom prst="roundRect">
-            <a:avLst>
-              <a:gd name="adj" fmla="val 12000"/>
-            </a:avLst>
-          </a:prstGeom>
-          <a:solidFill>
-            <a:srgbClr val="095292"/>
-          </a:solidFill>
-          <a:ln>
-            <a:noFill/>
-          </a:ln>
-        </p:spPr>
-        <p:style>
-          <a:lnRef idx="1">
-            <a:schemeClr val="accent1"/>
-          </a:lnRef>
-          <a:fillRef idx="3">
-            <a:schemeClr val="accent1"/>
-          </a:fillRef>
-          <a:effectRef idx="2">
-            <a:schemeClr val="accent1"/>
-          </a:effectRef>
-          <a:fontRef idx="minor">
-            <a:schemeClr val="lt1"/>
-          </a:fontRef>
-        </p:style>
-        <p:txBody>
-          <a:bodyPr rtlCol="0" anchor="ctr"/>
-          <a:lstStyle/>
-          <a:p>
-            <a:pPr algn="ctr"/>
-          </a:p>
-        </p:txBody>
-      </p:sp>
-      <p:sp>
-        <p:nvSpPr>
-          <p:cNvPr id="23" name="TextBox 22"/>
-          <p:cNvSpPr txBox="1"/>
-          <p:nvPr/>
-        </p:nvSpPr>
-        <p:spPr>
-          <a:xfrm>
-            <a:off x="594360" y="5660136"/>
-            <a:ext cx="438912" cy="438912"/>
-          </a:xfrm>
-          <a:prstGeom prst="rect">
-            <a:avLst/>
-          </a:prstGeom>
-          <a:noFill/>
-        </p:spPr>
-        <p:txBody>
-          <a:bodyPr wrap="square" anchor="ctr"/>
-          <a:lstStyle/>
-          <a:p>
-            <a:pPr algn="ctr"/>
-            <a:r>
-              <a:rPr sz="1600" b="1" i="0">
-                <a:solidFill>
-                  <a:srgbClr val="FFFFFF"/>
-                </a:solidFill>
-                <a:latin typeface="Calibri"/>
-              </a:rPr>
-              <a:t>5</a:t>
-            </a:r>
-          </a:p>
-        </p:txBody>
-      </p:sp>
-      <p:sp>
-        <p:nvSpPr>
-          <p:cNvPr id="24" name="TextBox 23"/>
-          <p:cNvSpPr txBox="1"/>
-          <p:nvPr/>
-        </p:nvSpPr>
-        <p:spPr>
-          <a:xfrm>
-            <a:off x="1188720" y="5495544"/>
-            <a:ext cx="10271455" cy="786384"/>
-          </a:xfrm>
-          <a:prstGeom prst="rect">
-            <a:avLst/>
-          </a:prstGeom>
-          <a:noFill/>
-        </p:spPr>
-        <p:txBody>
-          <a:bodyPr wrap="square" anchor="ctr"/>
-          <a:lstStyle/>
-          <a:p>
-            <a:r>
-              <a:rPr sz="1500" b="1" i="0">
-                <a:solidFill>
-                  <a:srgbClr val="095292"/>
-                </a:solidFill>
-                <a:latin typeface="Calibri"/>
-              </a:rPr>
-              <a:t>Paso 5: estime en puntos con la escala 1, 2, 3, 5, 8 tomando 'registrar un dueno = 3' como referencia, ordene el backlog de mayor a menor prioridad, agregue la columna de trazabilidad al RF de origen y suba el tablero a la plataforma del curso.</a:t>
-            </a:r>
-          </a:p>
-        </p:txBody>
-      </p:sp>
-      <p:sp>
-        <p:nvSpPr>
-          <p:cNvPr id="25" name="TextBox 24"/>
+          <a:bodyPr wrap="square">
+            <a:spAutoFit/>
+          </a:bodyPr>
+          <a:lstStyle/>
+          <a:p>
+            <a:pPr>
+              <a:spcAft>
+                <a:spcPts val="800"/>
+              </a:spcAft>
+            </a:pPr>
+            <a:r>
+              <a:rPr sz="2000" b="0" i="0">
+                <a:solidFill>
+                  <a:srgbClr val="333333"/>
+                </a:solidFill>
+                <a:latin typeface="Calibri"/>
+              </a:rPr>
+              <a:t>–   Con dos o tres iteraciones se conoce la velocidad del equipo y recien ahi se puede prometer fechas.</a:t>
+            </a:r>
+          </a:p>
+          <a:p>
+            <a:pPr>
+              <a:spcAft>
+                <a:spcPts val="800"/>
+              </a:spcAft>
+            </a:pPr>
+            <a:r>
+              <a:rPr sz="2000" b="0" i="0">
+                <a:solidFill>
+                  <a:srgbClr val="333333"/>
+                </a:solidFill>
+                <a:latin typeface="Calibri"/>
+              </a:rPr>
+              <a:t>–   En el Proyecto Integrador este backlog es la lista de trabajo que se le entrega al companero de Programacion II para que sepa por donde empezar</a:t>
+            </a:r>
+          </a:p>
+          <a:p>
+            <a:pPr>
+              <a:spcAft>
+                <a:spcPts val="800"/>
+              </a:spcAft>
+            </a:pPr>
+            <a:r>
+              <a:rPr sz="2000" b="0" i="0">
+                <a:solidFill>
+                  <a:srgbClr val="333333"/>
+                </a:solidFill>
+                <a:latin typeface="Calibri"/>
+              </a:rPr>
+              <a:t>–   Y quien solo cursa Seminario usa el mismo backlog para ordenar las pantallas de su prototipo navegable, en el mismo orden de prioridad.</a:t>
+            </a:r>
+          </a:p>
+        </p:txBody>
+      </p:sp>
+      <p:sp>
+        <p:nvSpPr>
+          <p:cNvPr id="6" name="TextBox 5"/>
           <p:cNvSpPr txBox="1"/>
           <p:nvPr/>
         </p:nvSpPr>
@@ -4575,7 +3877,7 @@
                 </a:solidFill>
                 <a:latin typeface="Calibri"/>
               </a:rPr>
-              <a:t>Antes de entregar — autochequeo</a:t>
+              <a:t>Historia HU-04 con criterios de aceptacion (artefacto proyectable)</a:t>
             </a:r>
           </a:p>
         </p:txBody>
@@ -4589,7 +3891,7 @@
         <p:spPr>
           <a:xfrm>
             <a:off x="457200" y="1261872"/>
-            <a:ext cx="11277295" cy="566928"/>
+            <a:ext cx="11277295" cy="4773168"/>
           </a:xfrm>
           <a:prstGeom prst="roundRect">
             <a:avLst>
@@ -4597,7 +3899,7 @@
             </a:avLst>
           </a:prstGeom>
           <a:solidFill>
-            <a:srgbClr val="F2F2F2"/>
+            <a:srgbClr val="1E2A38"/>
           </a:solidFill>
           <a:ln>
             <a:noFill/>
@@ -4633,19 +3935,17 @@
         </p:nvSpPr>
         <p:spPr>
           <a:xfrm>
-            <a:off x="640080" y="1408175"/>
-            <a:ext cx="274320" cy="274320"/>
+            <a:off x="457200" y="1261872"/>
+            <a:ext cx="11277295" cy="320040"/>
           </a:xfrm>
           <a:prstGeom prst="rect">
             <a:avLst/>
           </a:prstGeom>
           <a:solidFill>
-            <a:srgbClr val="FFFFFF"/>
+            <a:srgbClr val="095292"/>
           </a:solidFill>
           <a:ln>
-            <a:solidFill>
-              <a:srgbClr val="333333"/>
-            </a:solidFill>
+            <a:noFill/>
           </a:ln>
         </p:spPr>
         <p:style>
@@ -4672,44 +3972,33 @@
       </p:sp>
       <p:sp>
         <p:nvSpPr>
-          <p:cNvPr id="7" name="Rectangle 6"/>
-          <p:cNvSpPr/>
-          <p:nvPr/>
-        </p:nvSpPr>
-        <p:spPr>
-          <a:xfrm>
-            <a:off x="640080" y="1408175"/>
-            <a:ext cx="73152" cy="274320"/>
-          </a:xfrm>
-          <a:prstGeom prst="rect">
-            <a:avLst/>
-          </a:prstGeom>
-          <a:solidFill>
-            <a:srgbClr val="269CCB"/>
-          </a:solidFill>
-          <a:ln>
-            <a:noFill/>
-          </a:ln>
-        </p:spPr>
-        <p:style>
-          <a:lnRef idx="1">
-            <a:schemeClr val="accent1"/>
-          </a:lnRef>
-          <a:fillRef idx="3">
-            <a:schemeClr val="accent1"/>
-          </a:fillRef>
-          <a:effectRef idx="2">
-            <a:schemeClr val="accent1"/>
-          </a:effectRef>
-          <a:fontRef idx="minor">
-            <a:schemeClr val="lt1"/>
-          </a:fontRef>
-        </p:style>
-        <p:txBody>
-          <a:bodyPr rtlCol="0" anchor="ctr"/>
-          <a:lstStyle/>
-          <a:p>
-            <a:pPr algn="ctr"/>
+          <p:cNvPr id="7" name="TextBox 6"/>
+          <p:cNvSpPr txBox="1"/>
+          <p:nvPr/>
+        </p:nvSpPr>
+        <p:spPr>
+          <a:xfrm>
+            <a:off x="685800" y="1307592"/>
+            <a:ext cx="10820095" cy="256032"/>
+          </a:xfrm>
+          <a:prstGeom prst="rect">
+            <a:avLst/>
+          </a:prstGeom>
+          <a:noFill/>
+        </p:spPr>
+        <p:txBody>
+          <a:bodyPr wrap="square" anchor="ctr"/>
+          <a:lstStyle/>
+          <a:p>
+            <a:r>
+              <a:rPr sz="1000" b="1" i="0">
+                <a:solidFill>
+                  <a:srgbClr val="269CCB"/>
+                </a:solidFill>
+                <a:latin typeface="Calibri"/>
+              </a:rPr>
+              <a:t>● ● ●</a:t>
+            </a:r>
           </a:p>
         </p:txBody>
       </p:sp>
@@ -4721,8 +4010,8 @@
         </p:nvSpPr>
         <p:spPr>
           <a:xfrm>
-            <a:off x="1097280" y="1353312"/>
-            <a:ext cx="10362895" cy="402336"/>
+            <a:off x="777240" y="1719072"/>
+            <a:ext cx="10637215" cy="4133087"/>
           </a:xfrm>
           <a:prstGeom prst="rect">
             <a:avLst/>
@@ -4730,354 +4019,242 @@
           <a:noFill/>
         </p:spPr>
         <p:txBody>
-          <a:bodyPr wrap="square" anchor="ctr"/>
-          <a:lstStyle/>
-          <a:p>
-            <a:r>
-              <a:rPr sz="1500" b="0" i="0">
-                <a:solidFill>
-                  <a:srgbClr val="333333"/>
-                </a:solidFill>
-                <a:latin typeface="Calibri"/>
-              </a:rPr>
-              <a:t>Si le leo esta historia al Dr. Ramirez sin explicarle nada, entiende quien gana algo y que gana, o solo entiende que hay una pantalla nueva?</a:t>
-            </a:r>
-          </a:p>
-        </p:txBody>
-      </p:sp>
-      <p:sp>
-        <p:nvSpPr>
-          <p:cNvPr id="9" name="Rounded Rectangle 8"/>
-          <p:cNvSpPr/>
-          <p:nvPr/>
-        </p:nvSpPr>
-        <p:spPr>
-          <a:xfrm>
-            <a:off x="457200" y="1938528"/>
-            <a:ext cx="11277295" cy="566928"/>
-          </a:xfrm>
-          <a:prstGeom prst="roundRect">
-            <a:avLst>
-              <a:gd name="adj" fmla="val 12000"/>
-            </a:avLst>
-          </a:prstGeom>
-          <a:solidFill>
-            <a:srgbClr val="F2F2F2"/>
-          </a:solidFill>
-          <a:ln>
-            <a:noFill/>
-          </a:ln>
-        </p:spPr>
-        <p:style>
-          <a:lnRef idx="1">
-            <a:schemeClr val="accent1"/>
-          </a:lnRef>
-          <a:fillRef idx="3">
-            <a:schemeClr val="accent1"/>
-          </a:fillRef>
-          <a:effectRef idx="2">
-            <a:schemeClr val="accent1"/>
-          </a:effectRef>
-          <a:fontRef idx="minor">
-            <a:schemeClr val="lt1"/>
-          </a:fontRef>
-        </p:style>
-        <p:txBody>
-          <a:bodyPr rtlCol="0" anchor="ctr"/>
+          <a:bodyPr wrap="square">
+            <a:spAutoFit/>
+          </a:bodyPr>
+          <a:lstStyle/>
+          <a:p>
+            <a:pPr>
+              <a:spcAft>
+                <a:spcPts val="400"/>
+              </a:spcAft>
+            </a:pPr>
+            <a:r>
+              <a:rPr sz="1400" b="0" i="0">
+                <a:solidFill>
+                  <a:srgbClr val="FFFFFF"/>
+                </a:solidFill>
+                <a:latin typeface="Calibri"/>
+              </a:rPr>
+              <a:t>HU-04  [Epica: E-02 Historial y agenda]</a:t>
+            </a:r>
+          </a:p>
+          <a:p>
+            <a:pPr>
+              <a:spcAft>
+                <a:spcPts val="400"/>
+              </a:spcAft>
+            </a:pPr>
+            <a:r>
+              <a:rPr sz="1400" b="0" i="0">
+                <a:solidFill>
+                  <a:srgbClr val="FFFFFF"/>
+                </a:solidFill>
+                <a:latin typeface="Calibri"/>
+              </a:rPr>
+              <a:t>Como veterinario de la clinica Huellitas</a:t>
+            </a:r>
+          </a:p>
+          <a:p>
+            <a:pPr>
+              <a:spcAft>
+                <a:spcPts val="400"/>
+              </a:spcAft>
+            </a:pPr>
+            <a:r>
+              <a:rPr sz="1400" b="0" i="0">
+                <a:solidFill>
+                  <a:srgbClr val="FFFFFF"/>
+                </a:solidFill>
+                <a:latin typeface="Calibri"/>
+              </a:rPr>
+              <a:t>quiero consultar el historial de atenciones de una mascota por el documento del dueno</a:t>
+            </a:r>
+          </a:p>
+          <a:p>
+            <a:pPr>
+              <a:spcAft>
+                <a:spcPts val="400"/>
+              </a:spcAft>
+            </a:pPr>
+            <a:r>
+              <a:rPr sz="1400" b="0" i="0">
+                <a:solidFill>
+                  <a:srgbClr val="FFFFFF"/>
+                </a:solidFill>
+                <a:latin typeface="Calibri"/>
+              </a:rPr>
+              <a:t>para decidir el tratamiento sin depender de la carpeta fisica.</a:t>
+            </a:r>
+          </a:p>
+          <a:p>
+            <a:pPr>
+              <a:spcAft>
+                <a:spcPts val="400"/>
+              </a:spcAft>
+            </a:pPr>
+            <a:r>
+              <a:rPr sz="1400" b="0" i="0">
+                <a:solidFill>
+                  <a:srgbClr val="FFFFFF"/>
+                </a:solidFill>
+                <a:latin typeface="Calibri"/>
+              </a:rPr>
+              <a:t/>
+            </a:r>
+          </a:p>
+          <a:p>
+            <a:pPr>
+              <a:spcAft>
+                <a:spcPts val="400"/>
+              </a:spcAft>
+            </a:pPr>
+            <a:r>
+              <a:rPr sz="1400" b="0" i="0">
+                <a:solidFill>
+                  <a:srgbClr val="FFFFFF"/>
+                </a:solidFill>
+                <a:latin typeface="Calibri"/>
+              </a:rPr>
+              <a:t>Criterios de aceptacion</a:t>
+            </a:r>
+          </a:p>
+          <a:p>
+            <a:pPr>
+              <a:spcAft>
+                <a:spcPts val="400"/>
+              </a:spcAft>
+            </a:pPr>
+            <a:r>
+              <a:rPr sz="1400" b="0" i="0">
+                <a:solidFill>
+                  <a:srgbClr val="FFFFFF"/>
+                </a:solidFill>
+                <a:latin typeface="Calibri"/>
+              </a:rPr>
+              <a:t>CA-1  Dado un dueno con 3 mascotas registradas, cuando busco por su documento, entonces el sistema lista las 3 mascotas con nombre y especie.</a:t>
+            </a:r>
+          </a:p>
+          <a:p>
+            <a:pPr>
+              <a:spcAft>
+                <a:spcPts val="400"/>
+              </a:spcAft>
+            </a:pPr>
+            <a:r>
+              <a:rPr sz="1400" b="0" i="0">
+                <a:solidFill>
+                  <a:srgbClr val="FFFFFF"/>
+                </a:solidFill>
+                <a:latin typeface="Calibri"/>
+              </a:rPr>
+              <a:t>CA-2  Dado que selecciono la mascota Rocky, cuando abro su historial, entonces veo sus atenciones de la mas reciente a la mas antigua.</a:t>
+            </a:r>
+          </a:p>
+          <a:p>
+            <a:pPr>
+              <a:spcAft>
+                <a:spcPts val="400"/>
+              </a:spcAft>
+            </a:pPr>
+            <a:r>
+              <a:rPr sz="1400" b="0" i="0">
+                <a:solidFill>
+                  <a:srgbClr val="FFFFFF"/>
+                </a:solidFill>
+                <a:latin typeface="Calibri"/>
+              </a:rPr>
+              <a:t>CA-3  Dado un documento no registrado, cuando busco, entonces el sistema muestra 'No hay duenos con ese documento' y ofrece crear uno.</a:t>
+            </a:r>
+          </a:p>
+          <a:p>
+            <a:pPr>
+              <a:spcAft>
+                <a:spcPts val="400"/>
+              </a:spcAft>
+            </a:pPr>
+            <a:r>
+              <a:rPr sz="1400" b="0" i="0">
+                <a:solidFill>
+                  <a:srgbClr val="FFFFFF"/>
+                </a:solidFill>
+                <a:latin typeface="Calibri"/>
+              </a:rPr>
+              <a:t/>
+            </a:r>
+          </a:p>
+          <a:p>
+            <a:pPr>
+              <a:spcAft>
+                <a:spcPts val="400"/>
+              </a:spcAft>
+            </a:pPr>
+            <a:r>
+              <a:rPr sz="1400" b="0" i="0">
+                <a:solidFill>
+                  <a:srgbClr val="FFFFFF"/>
+                </a:solidFill>
+                <a:latin typeface="Calibri"/>
+              </a:rPr>
+              <a:t>Estimacion: 5 puntos   |   Prioridad: Must   |   Origen: RF-03 / NEC-02</a:t>
+            </a:r>
+          </a:p>
+          <a:p>
+            <a:pPr>
+              <a:spcAft>
+                <a:spcPts val="400"/>
+              </a:spcAft>
+            </a:pPr>
+            <a:r>
+              <a:rPr sz="1400" b="0" i="0">
+                <a:solidFill>
+                  <a:srgbClr val="FFFFFF"/>
+                </a:solidFill>
+                <a:latin typeface="Calibri"/>
+              </a:rPr>
+              <a:t>Definicion de terminado: mockup aprobado + los 3 criterios verificados en el prototipo navegable</a:t>
+            </a:r>
+          </a:p>
+        </p:txBody>
+      </p:sp>
+      <p:sp>
+        <p:nvSpPr>
+          <p:cNvPr id="9" name="TextBox 8"/>
+          <p:cNvSpPr txBox="1"/>
+          <p:nvPr/>
+        </p:nvSpPr>
+        <p:spPr>
+          <a:xfrm>
+            <a:off x="457200" y="6080760"/>
+            <a:ext cx="11277295" cy="320040"/>
+          </a:xfrm>
+          <a:prstGeom prst="rect">
+            <a:avLst/>
+          </a:prstGeom>
+          <a:noFill/>
+        </p:spPr>
+        <p:txBody>
+          <a:bodyPr wrap="square">
+            <a:spAutoFit/>
+          </a:bodyPr>
           <a:lstStyle/>
           <a:p>
             <a:pPr algn="ctr"/>
-          </a:p>
-        </p:txBody>
-      </p:sp>
-      <p:sp>
-        <p:nvSpPr>
-          <p:cNvPr id="10" name="Rectangle 9"/>
-          <p:cNvSpPr/>
-          <p:nvPr/>
-        </p:nvSpPr>
-        <p:spPr>
-          <a:xfrm>
-            <a:off x="640080" y="2084832"/>
-            <a:ext cx="274320" cy="274320"/>
-          </a:xfrm>
-          <a:prstGeom prst="rect">
-            <a:avLst/>
-          </a:prstGeom>
-          <a:solidFill>
-            <a:srgbClr val="FFFFFF"/>
-          </a:solidFill>
-          <a:ln>
-            <a:solidFill>
-              <a:srgbClr val="333333"/>
-            </a:solidFill>
-          </a:ln>
-        </p:spPr>
-        <p:style>
-          <a:lnRef idx="1">
-            <a:schemeClr val="accent1"/>
-          </a:lnRef>
-          <a:fillRef idx="3">
-            <a:schemeClr val="accent1"/>
-          </a:fillRef>
-          <a:effectRef idx="2">
-            <a:schemeClr val="accent1"/>
-          </a:effectRef>
-          <a:fontRef idx="minor">
-            <a:schemeClr val="lt1"/>
-          </a:fontRef>
-        </p:style>
-        <p:txBody>
-          <a:bodyPr rtlCol="0" anchor="ctr"/>
-          <a:lstStyle/>
-          <a:p>
-            <a:pPr algn="ctr"/>
-          </a:p>
-        </p:txBody>
-      </p:sp>
-      <p:sp>
-        <p:nvSpPr>
-          <p:cNvPr id="11" name="Rectangle 10"/>
-          <p:cNvSpPr/>
-          <p:nvPr/>
-        </p:nvSpPr>
-        <p:spPr>
-          <a:xfrm>
-            <a:off x="640080" y="2084832"/>
-            <a:ext cx="73152" cy="274320"/>
-          </a:xfrm>
-          <a:prstGeom prst="rect">
-            <a:avLst/>
-          </a:prstGeom>
-          <a:solidFill>
-            <a:srgbClr val="269CCB"/>
-          </a:solidFill>
-          <a:ln>
-            <a:noFill/>
-          </a:ln>
-        </p:spPr>
-        <p:style>
-          <a:lnRef idx="1">
-            <a:schemeClr val="accent1"/>
-          </a:lnRef>
-          <a:fillRef idx="3">
-            <a:schemeClr val="accent1"/>
-          </a:fillRef>
-          <a:effectRef idx="2">
-            <a:schemeClr val="accent1"/>
-          </a:effectRef>
-          <a:fontRef idx="minor">
-            <a:schemeClr val="lt1"/>
-          </a:fontRef>
-        </p:style>
-        <p:txBody>
-          <a:bodyPr rtlCol="0" anchor="ctr"/>
-          <a:lstStyle/>
-          <a:p>
-            <a:pPr algn="ctr"/>
-          </a:p>
-        </p:txBody>
-      </p:sp>
-      <p:sp>
-        <p:nvSpPr>
-          <p:cNvPr id="12" name="TextBox 11"/>
-          <p:cNvSpPr txBox="1"/>
-          <p:nvPr/>
-        </p:nvSpPr>
-        <p:spPr>
-          <a:xfrm>
-            <a:off x="1097280" y="2029968"/>
-            <a:ext cx="10362895" cy="402336"/>
-          </a:xfrm>
-          <a:prstGeom prst="rect">
-            <a:avLst/>
-          </a:prstGeom>
-          <a:noFill/>
-        </p:spPr>
-        <p:txBody>
-          <a:bodyPr wrap="square" anchor="ctr"/>
-          <a:lstStyle/>
-          <a:p>
-            <a:r>
-              <a:rPr sz="1500" b="0" i="0">
-                <a:solidFill>
-                  <a:srgbClr val="333333"/>
-                </a:solidFill>
-                <a:latin typeface="Calibri"/>
-              </a:rPr>
-              <a:t>El 'para' de mi historia esta repitiendo la accion con otras palabras, o dice de verdad el beneficio para la clinica?</a:t>
-            </a:r>
-          </a:p>
-        </p:txBody>
-      </p:sp>
-      <p:sp>
-        <p:nvSpPr>
-          <p:cNvPr id="13" name="Rounded Rectangle 12"/>
-          <p:cNvSpPr/>
-          <p:nvPr/>
-        </p:nvSpPr>
-        <p:spPr>
-          <a:xfrm>
-            <a:off x="457200" y="2615184"/>
-            <a:ext cx="11277295" cy="566928"/>
-          </a:xfrm>
-          <a:prstGeom prst="roundRect">
-            <a:avLst>
-              <a:gd name="adj" fmla="val 12000"/>
-            </a:avLst>
-          </a:prstGeom>
-          <a:solidFill>
-            <a:srgbClr val="F2F2F2"/>
-          </a:solidFill>
-          <a:ln>
-            <a:noFill/>
-          </a:ln>
-        </p:spPr>
-        <p:style>
-          <a:lnRef idx="1">
-            <a:schemeClr val="accent1"/>
-          </a:lnRef>
-          <a:fillRef idx="3">
-            <a:schemeClr val="accent1"/>
-          </a:fillRef>
-          <a:effectRef idx="2">
-            <a:schemeClr val="accent1"/>
-          </a:effectRef>
-          <a:fontRef idx="minor">
-            <a:schemeClr val="lt1"/>
-          </a:fontRef>
-        </p:style>
-        <p:txBody>
-          <a:bodyPr rtlCol="0" anchor="ctr"/>
-          <a:lstStyle/>
-          <a:p>
-            <a:pPr algn="ctr"/>
-          </a:p>
-        </p:txBody>
-      </p:sp>
-      <p:sp>
-        <p:nvSpPr>
-          <p:cNvPr id="14" name="Rectangle 13"/>
-          <p:cNvSpPr/>
-          <p:nvPr/>
-        </p:nvSpPr>
-        <p:spPr>
-          <a:xfrm>
-            <a:off x="640080" y="2761488"/>
-            <a:ext cx="274320" cy="274320"/>
-          </a:xfrm>
-          <a:prstGeom prst="rect">
-            <a:avLst/>
-          </a:prstGeom>
-          <a:solidFill>
-            <a:srgbClr val="FFFFFF"/>
-          </a:solidFill>
-          <a:ln>
-            <a:solidFill>
-              <a:srgbClr val="333333"/>
-            </a:solidFill>
-          </a:ln>
-        </p:spPr>
-        <p:style>
-          <a:lnRef idx="1">
-            <a:schemeClr val="accent1"/>
-          </a:lnRef>
-          <a:fillRef idx="3">
-            <a:schemeClr val="accent1"/>
-          </a:fillRef>
-          <a:effectRef idx="2">
-            <a:schemeClr val="accent1"/>
-          </a:effectRef>
-          <a:fontRef idx="minor">
-            <a:schemeClr val="lt1"/>
-          </a:fontRef>
-        </p:style>
-        <p:txBody>
-          <a:bodyPr rtlCol="0" anchor="ctr"/>
-          <a:lstStyle/>
-          <a:p>
-            <a:pPr algn="ctr"/>
-          </a:p>
-        </p:txBody>
-      </p:sp>
-      <p:sp>
-        <p:nvSpPr>
-          <p:cNvPr id="15" name="Rectangle 14"/>
-          <p:cNvSpPr/>
-          <p:nvPr/>
-        </p:nvSpPr>
-        <p:spPr>
-          <a:xfrm>
-            <a:off x="640080" y="2761488"/>
-            <a:ext cx="73152" cy="274320"/>
-          </a:xfrm>
-          <a:prstGeom prst="rect">
-            <a:avLst/>
-          </a:prstGeom>
-          <a:solidFill>
-            <a:srgbClr val="269CCB"/>
-          </a:solidFill>
-          <a:ln>
-            <a:noFill/>
-          </a:ln>
-        </p:spPr>
-        <p:style>
-          <a:lnRef idx="1">
-            <a:schemeClr val="accent1"/>
-          </a:lnRef>
-          <a:fillRef idx="3">
-            <a:schemeClr val="accent1"/>
-          </a:fillRef>
-          <a:effectRef idx="2">
-            <a:schemeClr val="accent1"/>
-          </a:effectRef>
-          <a:fontRef idx="minor">
-            <a:schemeClr val="lt1"/>
-          </a:fontRef>
-        </p:style>
-        <p:txBody>
-          <a:bodyPr rtlCol="0" anchor="ctr"/>
-          <a:lstStyle/>
-          <a:p>
-            <a:pPr algn="ctr"/>
-          </a:p>
-        </p:txBody>
-      </p:sp>
-      <p:sp>
-        <p:nvSpPr>
-          <p:cNvPr id="16" name="TextBox 15"/>
-          <p:cNvSpPr txBox="1"/>
-          <p:nvPr/>
-        </p:nvSpPr>
-        <p:spPr>
-          <a:xfrm>
-            <a:off x="1097280" y="2706624"/>
-            <a:ext cx="10362895" cy="402336"/>
-          </a:xfrm>
-          <a:prstGeom prst="rect">
-            <a:avLst/>
-          </a:prstGeom>
-          <a:noFill/>
-        </p:spPr>
-        <p:txBody>
-          <a:bodyPr wrap="square" anchor="ctr"/>
-          <a:lstStyle/>
-          <a:p>
-            <a:r>
-              <a:rPr sz="1500" b="0" i="0">
-                <a:solidFill>
-                  <a:srgbClr val="333333"/>
-                </a:solidFill>
-                <a:latin typeface="Calibri"/>
-              </a:rPr>
-              <a:t>Si esta historia se entregara sola, sin ninguna otra, el usuario podria hacer algo completo de principio a fin?</a:t>
-            </a:r>
-          </a:p>
-        </p:txBody>
-      </p:sp>
-      <p:sp>
-        <p:nvSpPr>
-          <p:cNvPr id="17" name="TextBox 16"/>
+            <a:r>
+              <a:rPr sz="1200" b="0" i="1">
+                <a:solidFill>
+                  <a:srgbClr val="666666"/>
+                </a:solidFill>
+                <a:latin typeface="Calibri"/>
+              </a:rPr>
+              <a:t>La historia dice a quien le sirve y para que; los criterios de aceptacion son la unica parte que se puede cobrar.</a:t>
+            </a:r>
+          </a:p>
+        </p:txBody>
+      </p:sp>
+      <p:sp>
+        <p:nvSpPr>
+          <p:cNvPr id="10" name="TextBox 9"/>
           <p:cNvSpPr txBox="1"/>
           <p:nvPr/>
         </p:nvSpPr>
@@ -5251,7 +4428,7 @@
                 </a:solidFill>
                 <a:latin typeface="Calibri"/>
               </a:rPr>
-              <a:t>Criterios de exito / entregable</a:t>
+              <a:t>Demo del dia</a:t>
             </a:r>
           </a:p>
         </p:txBody>
@@ -5299,7 +4476,7 @@
                 </a:solidFill>
                 <a:latin typeface="Calibri"/>
               </a:rPr>
-              <a:t>Entregable:</a:t>
+              <a:t>Herramienta:</a:t>
             </a:r>
             <a:r>
               <a:rPr sz="2000" b="0" i="0">
@@ -5308,7 +4485,7 @@
                 </a:solidFill>
                 <a:latin typeface="Calibri"/>
               </a:rPr>
-              <a:t> Tablero de backlog con 8 historias en formato Como/quiero/para, cada una con 2 o 3 criterios de aceptacion en Dado-Cuando-Entonces, estimacion en puntos y trazabilidad al RF de la clase 6, subido a la plataforma del curso.</a:t>
+              <a:t> Google Docs · Excalidraw</a:t>
             </a:r>
           </a:p>
           <a:p>
@@ -5333,7 +4510,7 @@
                 </a:solidFill>
                 <a:latin typeface="Calibri"/>
               </a:rPr>
-              <a:t>Exito:</a:t>
+              <a:t>Demo:</a:t>
             </a:r>
             <a:r>
               <a:rPr sz="2000" b="0" i="0">
@@ -5342,7 +4519,7 @@
                 </a:solidFill>
                 <a:latin typeface="Calibri"/>
               </a:rPr>
-              <a:t> Las 8 historias usan roles concretos de la clinica Huellitas y ninguna emplea el rol generico usuario.</a:t>
+              <a:t> El docente toma el RF-03 del catalogo, lo convierte en vivo en historia con criterios y luego muestra una historia partida por capas para tumbarla con INVEST.</a:t>
             </a:r>
           </a:p>
           <a:p>
@@ -5358,127 +4535,7 @@
                 </a:solidFill>
                 <a:latin typeface="Calibri"/>
               </a:rPr>
-              <a:t>–   </a:t>
-            </a:r>
-            <a:r>
-              <a:rPr sz="2000" b="1" i="0">
-                <a:solidFill>
-                  <a:srgbClr val="333333"/>
-                </a:solidFill>
-                <a:latin typeface="Calibri"/>
-              </a:rPr>
-              <a:t>Exito:</a:t>
-            </a:r>
-            <a:r>
-              <a:rPr sz="2000" b="0" i="0">
-                <a:solidFill>
-                  <a:srgbClr val="333333"/>
-                </a:solidFill>
-                <a:latin typeface="Calibri"/>
-              </a:rPr>
-              <a:t> Cada historia tiene minimo 2 criterios de aceptacion en Dado-Cuando-Entonces y al menos cuatro incluyen un camino alterno o de error.</a:t>
-            </a:r>
-          </a:p>
-          <a:p>
-            <a:pPr>
-              <a:spcAft>
-                <a:spcPts val="800"/>
-              </a:spcAft>
-            </a:pPr>
-            <a:r>
-              <a:rPr sz="2000" b="0" i="0">
-                <a:solidFill>
-                  <a:srgbClr val="333333"/>
-                </a:solidFill>
-                <a:latin typeface="Calibri"/>
-              </a:rPr>
-              <a:t>–   </a:t>
-            </a:r>
-            <a:r>
-              <a:rPr sz="2000" b="1" i="0">
-                <a:solidFill>
-                  <a:srgbClr val="333333"/>
-                </a:solidFill>
-                <a:latin typeface="Calibri"/>
-              </a:rPr>
-              <a:t>Exito:</a:t>
-            </a:r>
-            <a:r>
-              <a:rPr sz="2000" b="0" i="0">
-                <a:solidFill>
-                  <a:srgbClr val="333333"/>
-                </a:solidFill>
-                <a:latin typeface="Calibri"/>
-              </a:rPr>
-              <a:t> Todas las historias pasan INVEST con al menos cinco de las seis letras en si, y ninguna esta cortada por capas tecnicas.</a:t>
-            </a:r>
-          </a:p>
-          <a:p>
-            <a:pPr>
-              <a:spcAft>
-                <a:spcPts val="800"/>
-              </a:spcAft>
-            </a:pPr>
-            <a:r>
-              <a:rPr sz="2000" b="0" i="0">
-                <a:solidFill>
-                  <a:srgbClr val="333333"/>
-                </a:solidFill>
-                <a:latin typeface="Calibri"/>
-              </a:rPr>
-              <a:t>–   </a:t>
-            </a:r>
-            <a:r>
-              <a:rPr sz="2000" b="1" i="0">
-                <a:solidFill>
-                  <a:srgbClr val="333333"/>
-                </a:solidFill>
-                <a:latin typeface="Calibri"/>
-              </a:rPr>
-              <a:t>Exito:</a:t>
-            </a:r>
-            <a:r>
-              <a:rPr sz="2000" b="0" i="0">
-                <a:solidFill>
-                  <a:srgbClr val="333333"/>
-                </a:solidFill>
-                <a:latin typeface="Calibri"/>
-              </a:rPr>
-              <a:t> Cada historia trae estimacion en puntos, prioridad y el RF de origen; ninguna historia supera los 8 puntos sin partirse.</a:t>
-            </a:r>
-          </a:p>
-          <a:p>
-            <a:pPr>
-              <a:spcAft>
-                <a:spcPts val="800"/>
-              </a:spcAft>
-            </a:pPr>
-            <a:r>
-              <a:rPr sz="2000" b="0" i="0">
-                <a:solidFill>
-                  <a:srgbClr val="333333"/>
-                </a:solidFill>
-                <a:latin typeface="Calibri"/>
-              </a:rPr>
-              <a:t>–   </a:t>
-            </a:r>
-            <a:r>
-              <a:rPr sz="2000" b="1" i="0">
-                <a:solidFill>
-                  <a:srgbClr val="333333"/>
-                </a:solidFill>
-                <a:latin typeface="Calibri"/>
-              </a:rPr>
-              <a:t>Entrega en la plataforma del curso</a:t>
-            </a:r>
-            <a:r>
-              <a:rPr sz="2000" b="0" i="0">
-                <a:solidFill>
-                  <a:srgbClr val="333333"/>
-                </a:solidFill>
-                <a:latin typeface="Calibri"/>
-              </a:rPr>
-              <a:t> — en la fecha que indique el docente.</a:t>
+              <a:t>–   Mismo dominio VetCare — no otro ejemplo. Aqui se diseña, no se programa.</a:t>
             </a:r>
           </a:p>
         </p:txBody>
@@ -5553,7 +4610,7 @@
         <p:spPr>
           <a:xfrm>
             <a:off x="0" y="0"/>
-            <a:ext cx="12191695" cy="960120"/>
+            <a:ext cx="12191695" cy="1170432"/>
           </a:xfrm>
           <a:prstGeom prst="rect">
             <a:avLst/>
@@ -5595,7 +4652,7 @@
         </p:nvSpPr>
         <p:spPr>
           <a:xfrm>
-            <a:off x="0" y="960120"/>
+            <a:off x="0" y="1170432"/>
             <a:ext cx="12191695" cy="41148"/>
           </a:xfrm>
           <a:prstGeom prst="rect">
@@ -5639,7 +4696,7 @@
         <p:spPr>
           <a:xfrm>
             <a:off x="457200" y="164592"/>
-            <a:ext cx="11277295" cy="502920"/>
+            <a:ext cx="11277295" cy="384048"/>
           </a:xfrm>
           <a:prstGeom prst="rect">
             <a:avLst/>
@@ -5659,21 +4716,55 @@
                 </a:solidFill>
                 <a:latin typeface="Calibri"/>
               </a:rPr>
-              <a:t>Para el PI esta semana</a:t>
-            </a:r>
-          </a:p>
-        </p:txBody>
-      </p:sp>
-      <p:sp>
-        <p:nvSpPr>
-          <p:cNvPr id="5" name="Rounded Rectangle 4"/>
+              <a:t>Herramientas de hoy</a:t>
+            </a:r>
+          </a:p>
+        </p:txBody>
+      </p:sp>
+      <p:sp>
+        <p:nvSpPr>
+          <p:cNvPr id="5" name="TextBox 4"/>
+          <p:cNvSpPr txBox="1"/>
+          <p:nvPr/>
+        </p:nvSpPr>
+        <p:spPr>
+          <a:xfrm>
+            <a:off x="457200" y="566928"/>
+            <a:ext cx="11277295" cy="411480"/>
+          </a:xfrm>
+          <a:prstGeom prst="rect">
+            <a:avLst/>
+          </a:prstGeom>
+          <a:noFill/>
+        </p:spPr>
+        <p:txBody>
+          <a:bodyPr wrap="square">
+            <a:spAutoFit/>
+          </a:bodyPr>
+          <a:lstStyle/>
+          <a:p>
+            <a:r>
+              <a:rPr sz="1400" b="0" i="0">
+                <a:solidFill>
+                  <a:srgbClr val="B8D8EE"/>
+                </a:solidFill>
+                <a:latin typeface="Calibri"/>
+              </a:rPr>
+              <a:t>Gratis · funcionan en el navegador</a:t>
+            </a:r>
+          </a:p>
+        </p:txBody>
+      </p:sp>
+      <p:sp>
+        <p:nvSpPr>
+          <p:cNvPr id="6" name="Rounded Rectangle 5"/>
           <p:cNvSpPr/>
           <p:nvPr/>
         </p:nvSpPr>
         <p:spPr>
           <a:xfrm>
-            <a:off x="457200" y="1261872"/>
-            <a:ext cx="11277295" cy="1051560"/>
+            <a:off x="457200" y="1591056"/>
+            <a:ext cx="3624986" cy="2331720"/>
           </a:xfrm>
           <a:prstGeom prst="roundRect">
             <a:avLst>
@@ -5681,7 +4772,7 @@
             </a:avLst>
           </a:prstGeom>
           <a:solidFill>
-            <a:srgbClr val="E8F4FA"/>
+            <a:srgbClr val="F2F2F2"/>
           </a:solidFill>
           <a:ln>
             <a:noFill/>
@@ -5711,20 +4802,20 @@
       </p:sp>
       <p:sp>
         <p:nvSpPr>
-          <p:cNvPr id="6" name="Rectangle 5"/>
+          <p:cNvPr id="7" name="Rectangle 6"/>
           <p:cNvSpPr/>
           <p:nvPr/>
         </p:nvSpPr>
         <p:spPr>
           <a:xfrm>
-            <a:off x="457200" y="1261872"/>
-            <a:ext cx="128016" cy="1051560"/>
+            <a:off x="457200" y="1591056"/>
+            <a:ext cx="3624986" cy="64008"/>
           </a:xfrm>
           <a:prstGeom prst="rect">
             <a:avLst/>
           </a:prstGeom>
           <a:solidFill>
-            <a:srgbClr val="269CCB"/>
+            <a:srgbClr val="095292"/>
           </a:solidFill>
           <a:ln>
             <a:noFill/>
@@ -5754,109 +4845,14 @@
       </p:sp>
       <p:sp>
         <p:nvSpPr>
-          <p:cNvPr id="7" name="TextBox 6"/>
-          <p:cNvSpPr txBox="1"/>
-          <p:nvPr/>
-        </p:nvSpPr>
-        <p:spPr>
-          <a:xfrm>
-            <a:off x="777240" y="1399031"/>
-            <a:ext cx="10774375" cy="822959"/>
-          </a:xfrm>
-          <a:prstGeom prst="rect">
-            <a:avLst/>
-          </a:prstGeom>
-          <a:noFill/>
-        </p:spPr>
-        <p:txBody>
-          <a:bodyPr wrap="square">
-            <a:spAutoFit/>
-          </a:bodyPr>
-          <a:lstStyle/>
-          <a:p>
-            <a:r>
-              <a:rPr sz="1200" b="1" i="0">
-                <a:solidFill>
-                  <a:srgbClr val="269CCB"/>
-                </a:solidFill>
-                <a:latin typeface="Calibri"/>
-              </a:rPr>
-              <a:t>Info</a:t>
-            </a:r>
-          </a:p>
-          <a:p>
-            <a:pPr>
-              <a:spcBef>
-                <a:spcPts val="400"/>
-              </a:spcBef>
-            </a:pPr>
-            <a:r>
-              <a:rPr sz="1400" b="0" i="0">
-                <a:solidFill>
-                  <a:srgbClr val="333333"/>
-                </a:solidFill>
-                <a:latin typeface="Calibri"/>
-              </a:rPr>
-              <a:t>Hito: Queda listo el backlog inicial de VetCare: dos epicas descompuestas en ocho historias priorizadas, con criterios de aceptacion y talla en puntos.</a:t>
-            </a:r>
-          </a:p>
-        </p:txBody>
-      </p:sp>
-      <p:sp>
-        <p:nvSpPr>
-          <p:cNvPr id="8" name="Rounded Rectangle 7"/>
+          <p:cNvPr id="8" name="Rectangle 7"/>
           <p:cNvSpPr/>
           <p:nvPr/>
         </p:nvSpPr>
         <p:spPr>
           <a:xfrm>
-            <a:off x="457200" y="2478024"/>
-            <a:ext cx="11277295" cy="1051560"/>
-          </a:xfrm>
-          <a:prstGeom prst="roundRect">
-            <a:avLst>
-              <a:gd name="adj" fmla="val 12000"/>
-            </a:avLst>
-          </a:prstGeom>
-          <a:solidFill>
-            <a:srgbClr val="FFF8E1"/>
-          </a:solidFill>
-          <a:ln>
-            <a:noFill/>
-          </a:ln>
-        </p:spPr>
-        <p:style>
-          <a:lnRef idx="1">
-            <a:schemeClr val="accent1"/>
-          </a:lnRef>
-          <a:fillRef idx="3">
-            <a:schemeClr val="accent1"/>
-          </a:fillRef>
-          <a:effectRef idx="2">
-            <a:schemeClr val="accent1"/>
-          </a:effectRef>
-          <a:fontRef idx="minor">
-            <a:schemeClr val="lt1"/>
-          </a:fontRef>
-        </p:style>
-        <p:txBody>
-          <a:bodyPr rtlCol="0" anchor="ctr"/>
-          <a:lstStyle/>
-          <a:p>
-            <a:pPr algn="ctr"/>
-          </a:p>
-        </p:txBody>
-      </p:sp>
-      <p:sp>
-        <p:nvSpPr>
-          <p:cNvPr id="9" name="Rectangle 8"/>
-          <p:cNvSpPr/>
-          <p:nvPr/>
-        </p:nvSpPr>
-        <p:spPr>
-          <a:xfrm>
-            <a:off x="457200" y="2478024"/>
-            <a:ext cx="128016" cy="1051560"/>
+            <a:off x="457200" y="1655064"/>
+            <a:ext cx="3624986" cy="27432"/>
           </a:xfrm>
           <a:prstGeom prst="rect">
             <a:avLst/>
@@ -5890,6 +4886,30 @@
           </a:p>
         </p:txBody>
       </p:sp>
+      <p:pic>
+        <p:nvPicPr>
+          <p:cNvPr id="9" name="Picture 8" descr="excalidraw.png"/>
+          <p:cNvPicPr>
+            <a:picLocks noChangeAspect="1"/>
+          </p:cNvPicPr>
+          <p:nvPr/>
+        </p:nvPicPr>
+        <p:blipFill>
+          <a:blip r:embed="rId2"/>
+          <a:stretch>
+            <a:fillRect/>
+          </a:stretch>
+        </p:blipFill>
+        <p:spPr>
+          <a:xfrm>
+            <a:off x="1643329" y="1847087"/>
+            <a:ext cx="1252728" cy="1252728"/>
+          </a:xfrm>
+          <a:prstGeom prst="rect">
+            <a:avLst/>
+          </a:prstGeom>
+        </p:spPr>
+      </p:pic>
       <p:sp>
         <p:nvSpPr>
           <p:cNvPr id="10" name="TextBox 9"/>
@@ -5898,8 +4918,8 @@
         </p:nvSpPr>
         <p:spPr>
           <a:xfrm>
-            <a:off x="777240" y="2615184"/>
-            <a:ext cx="10774375" cy="822959"/>
+            <a:off x="530352" y="3191256"/>
+            <a:ext cx="3478682" cy="621792"/>
           </a:xfrm>
           <a:prstGeom prst="rect">
             <a:avLst/>
@@ -5907,35 +4927,34 @@
           <a:noFill/>
         </p:spPr>
         <p:txBody>
-          <a:bodyPr wrap="square">
-            <a:spAutoFit/>
-          </a:bodyPr>
-          <a:lstStyle/>
-          <a:p>
-            <a:r>
-              <a:rPr sz="1200" b="1" i="0">
-                <a:solidFill>
-                  <a:srgbClr val="FFD000"/>
-                </a:solidFill>
-                <a:latin typeface="Calibri"/>
-              </a:rPr>
-              <a:t>Aclaración</a:t>
-            </a:r>
-          </a:p>
-          <a:p>
-            <a:pPr>
+          <a:bodyPr wrap="square" anchor="t"/>
+          <a:lstStyle/>
+          <a:p>
+            <a:pPr algn="ctr"/>
+            <a:r>
+              <a:rPr sz="1300" b="1" i="0">
+                <a:solidFill>
+                  <a:srgbClr val="095292"/>
+                </a:solidFill>
+                <a:latin typeface="Calibri"/>
+              </a:rPr>
+              <a:t>Excalidraw</a:t>
+            </a:r>
+          </a:p>
+          <a:p>
+            <a:pPr algn="ctr">
               <a:spcBef>
-                <a:spcPts val="400"/>
+                <a:spcPts val="200"/>
               </a:spcBef>
             </a:pPr>
             <a:r>
-              <a:rPr sz="1400" b="0" i="0">
-                <a:solidFill>
-                  <a:srgbClr val="333333"/>
-                </a:solidFill>
-                <a:latin typeface="Calibri"/>
-              </a:rPr>
-              <a:t>Enunciado completo: Clases/Proyecto Integrador/ (VetCare).</a:t>
+              <a:rPr sz="1000" b="0" i="0">
+                <a:solidFill>
+                  <a:srgbClr val="666666"/>
+                </a:solidFill>
+                <a:latin typeface="Calibri"/>
+              </a:rPr>
+              <a:t>Bocetos rapidos a mano alzada</a:t>
             </a:r>
           </a:p>
         </p:txBody>
@@ -5948,8 +4967,8 @@
         </p:nvSpPr>
         <p:spPr>
           <a:xfrm>
-            <a:off x="457200" y="3694176"/>
-            <a:ext cx="11277295" cy="1051560"/>
+            <a:off x="4283354" y="1591056"/>
+            <a:ext cx="3624986" cy="2331720"/>
           </a:xfrm>
           <a:prstGeom prst="roundRect">
             <a:avLst>
@@ -5957,7 +4976,7 @@
             </a:avLst>
           </a:prstGeom>
           <a:solidFill>
-            <a:srgbClr val="FBE4E4"/>
+            <a:srgbClr val="F2F2F2"/>
           </a:solidFill>
           <a:ln>
             <a:noFill/>
@@ -5993,14 +5012,14 @@
         </p:nvSpPr>
         <p:spPr>
           <a:xfrm>
-            <a:off x="457200" y="3694176"/>
-            <a:ext cx="128016" cy="1051560"/>
+            <a:off x="4283354" y="1591056"/>
+            <a:ext cx="3624986" cy="64008"/>
           </a:xfrm>
           <a:prstGeom prst="rect">
             <a:avLst/>
           </a:prstGeom>
           <a:solidFill>
-            <a:srgbClr val="A02030"/>
+            <a:srgbClr val="095292"/>
           </a:solidFill>
           <a:ln>
             <a:noFill/>
@@ -6030,14 +5049,81 @@
       </p:sp>
       <p:sp>
         <p:nvSpPr>
-          <p:cNvPr id="13" name="TextBox 12"/>
+          <p:cNvPr id="13" name="Rectangle 12"/>
+          <p:cNvSpPr/>
+          <p:nvPr/>
+        </p:nvSpPr>
+        <p:spPr>
+          <a:xfrm>
+            <a:off x="4283354" y="1655064"/>
+            <a:ext cx="3624986" cy="27432"/>
+          </a:xfrm>
+          <a:prstGeom prst="rect">
+            <a:avLst/>
+          </a:prstGeom>
+          <a:solidFill>
+            <a:srgbClr val="FFD000"/>
+          </a:solidFill>
+          <a:ln>
+            <a:noFill/>
+          </a:ln>
+        </p:spPr>
+        <p:style>
+          <a:lnRef idx="1">
+            <a:schemeClr val="accent1"/>
+          </a:lnRef>
+          <a:fillRef idx="3">
+            <a:schemeClr val="accent1"/>
+          </a:fillRef>
+          <a:effectRef idx="2">
+            <a:schemeClr val="accent1"/>
+          </a:effectRef>
+          <a:fontRef idx="minor">
+            <a:schemeClr val="lt1"/>
+          </a:fontRef>
+        </p:style>
+        <p:txBody>
+          <a:bodyPr rtlCol="0" anchor="ctr"/>
+          <a:lstStyle/>
+          <a:p>
+            <a:pPr algn="ctr"/>
+          </a:p>
+        </p:txBody>
+      </p:sp>
+      <p:pic>
+        <p:nvPicPr>
+          <p:cNvPr id="14" name="Picture 13" descr="google_docs.png"/>
+          <p:cNvPicPr>
+            <a:picLocks noChangeAspect="1"/>
+          </p:cNvPicPr>
+          <p:nvPr/>
+        </p:nvPicPr>
+        <p:blipFill>
+          <a:blip r:embed="rId3"/>
+          <a:stretch>
+            <a:fillRect/>
+          </a:stretch>
+        </p:blipFill>
+        <p:spPr>
+          <a:xfrm>
+            <a:off x="5469483" y="1847087"/>
+            <a:ext cx="1252728" cy="1252728"/>
+          </a:xfrm>
+          <a:prstGeom prst="rect">
+            <a:avLst/>
+          </a:prstGeom>
+        </p:spPr>
+      </p:pic>
+      <p:sp>
+        <p:nvSpPr>
+          <p:cNvPr id="15" name="TextBox 14"/>
           <p:cNvSpPr txBox="1"/>
           <p:nvPr/>
         </p:nvSpPr>
         <p:spPr>
           <a:xfrm>
-            <a:off x="777240" y="3831336"/>
-            <a:ext cx="10774375" cy="822959"/>
+            <a:off x="4356506" y="3191256"/>
+            <a:ext cx="3478682" cy="621792"/>
           </a:xfrm>
           <a:prstGeom prst="rect">
             <a:avLst/>
@@ -6045,42 +5131,245 @@
           <a:noFill/>
         </p:spPr>
         <p:txBody>
-          <a:bodyPr wrap="square">
-            <a:spAutoFit/>
-          </a:bodyPr>
-          <a:lstStyle/>
-          <a:p>
-            <a:r>
-              <a:rPr sz="1200" b="1" i="0">
-                <a:solidFill>
-                  <a:srgbClr val="A02030"/>
-                </a:solidFill>
-                <a:latin typeface="Calibri"/>
-              </a:rPr>
-              <a:t>Atención</a:t>
-            </a:r>
-          </a:p>
-          <a:p>
-            <a:pPr>
+          <a:bodyPr wrap="square" anchor="t"/>
+          <a:lstStyle/>
+          <a:p>
+            <a:pPr algn="ctr"/>
+            <a:r>
+              <a:rPr sz="1300" b="1" i="0">
+                <a:solidFill>
+                  <a:srgbClr val="095292"/>
+                </a:solidFill>
+                <a:latin typeface="Calibri"/>
+              </a:rPr>
+              <a:t>google docs</a:t>
+            </a:r>
+          </a:p>
+          <a:p>
+            <a:pPr algn="ctr">
               <a:spcBef>
-                <a:spcPts val="400"/>
+                <a:spcPts val="200"/>
               </a:spcBef>
             </a:pPr>
             <a:r>
-              <a:rPr sz="1400" b="0" i="0">
-                <a:solidFill>
-                  <a:srgbClr val="333333"/>
-                </a:solidFill>
-                <a:latin typeface="Calibri"/>
-              </a:rPr>
-              <a:t>Entrega del taller, si el docente lo asigna · en la fecha que indique el docente.</a:t>
-            </a:r>
-          </a:p>
-        </p:txBody>
-      </p:sp>
-      <p:sp>
-        <p:nvSpPr>
-          <p:cNvPr id="14" name="TextBox 13"/>
+              <a:rPr sz="1000" b="0" i="0">
+                <a:solidFill>
+                  <a:srgbClr val="666666"/>
+                </a:solidFill>
+                <a:latin typeface="Calibri"/>
+              </a:rPr>
+              <a:t>Documentos del paquete de diseño</a:t>
+            </a:r>
+          </a:p>
+        </p:txBody>
+      </p:sp>
+      <p:sp>
+        <p:nvSpPr>
+          <p:cNvPr id="16" name="Rounded Rectangle 15"/>
+          <p:cNvSpPr/>
+          <p:nvPr/>
+        </p:nvSpPr>
+        <p:spPr>
+          <a:xfrm>
+            <a:off x="8109508" y="1591056"/>
+            <a:ext cx="3624986" cy="2331720"/>
+          </a:xfrm>
+          <a:prstGeom prst="roundRect">
+            <a:avLst>
+              <a:gd name="adj" fmla="val 12000"/>
+            </a:avLst>
+          </a:prstGeom>
+          <a:solidFill>
+            <a:srgbClr val="F2F2F2"/>
+          </a:solidFill>
+          <a:ln>
+            <a:noFill/>
+          </a:ln>
+        </p:spPr>
+        <p:style>
+          <a:lnRef idx="1">
+            <a:schemeClr val="accent1"/>
+          </a:lnRef>
+          <a:fillRef idx="3">
+            <a:schemeClr val="accent1"/>
+          </a:fillRef>
+          <a:effectRef idx="2">
+            <a:schemeClr val="accent1"/>
+          </a:effectRef>
+          <a:fontRef idx="minor">
+            <a:schemeClr val="lt1"/>
+          </a:fontRef>
+        </p:style>
+        <p:txBody>
+          <a:bodyPr rtlCol="0" anchor="ctr"/>
+          <a:lstStyle/>
+          <a:p>
+            <a:pPr algn="ctr"/>
+          </a:p>
+        </p:txBody>
+      </p:sp>
+      <p:sp>
+        <p:nvSpPr>
+          <p:cNvPr id="17" name="Rectangle 16"/>
+          <p:cNvSpPr/>
+          <p:nvPr/>
+        </p:nvSpPr>
+        <p:spPr>
+          <a:xfrm>
+            <a:off x="8109508" y="1591056"/>
+            <a:ext cx="3624986" cy="64008"/>
+          </a:xfrm>
+          <a:prstGeom prst="rect">
+            <a:avLst/>
+          </a:prstGeom>
+          <a:solidFill>
+            <a:srgbClr val="095292"/>
+          </a:solidFill>
+          <a:ln>
+            <a:noFill/>
+          </a:ln>
+        </p:spPr>
+        <p:style>
+          <a:lnRef idx="1">
+            <a:schemeClr val="accent1"/>
+          </a:lnRef>
+          <a:fillRef idx="3">
+            <a:schemeClr val="accent1"/>
+          </a:fillRef>
+          <a:effectRef idx="2">
+            <a:schemeClr val="accent1"/>
+          </a:effectRef>
+          <a:fontRef idx="minor">
+            <a:schemeClr val="lt1"/>
+          </a:fontRef>
+        </p:style>
+        <p:txBody>
+          <a:bodyPr rtlCol="0" anchor="ctr"/>
+          <a:lstStyle/>
+          <a:p>
+            <a:pPr algn="ctr"/>
+          </a:p>
+        </p:txBody>
+      </p:sp>
+      <p:sp>
+        <p:nvSpPr>
+          <p:cNvPr id="18" name="Rectangle 17"/>
+          <p:cNvSpPr/>
+          <p:nvPr/>
+        </p:nvSpPr>
+        <p:spPr>
+          <a:xfrm>
+            <a:off x="8109508" y="1655064"/>
+            <a:ext cx="3624986" cy="27432"/>
+          </a:xfrm>
+          <a:prstGeom prst="rect">
+            <a:avLst/>
+          </a:prstGeom>
+          <a:solidFill>
+            <a:srgbClr val="FFD000"/>
+          </a:solidFill>
+          <a:ln>
+            <a:noFill/>
+          </a:ln>
+        </p:spPr>
+        <p:style>
+          <a:lnRef idx="1">
+            <a:schemeClr val="accent1"/>
+          </a:lnRef>
+          <a:fillRef idx="3">
+            <a:schemeClr val="accent1"/>
+          </a:fillRef>
+          <a:effectRef idx="2">
+            <a:schemeClr val="accent1"/>
+          </a:effectRef>
+          <a:fontRef idx="minor">
+            <a:schemeClr val="lt1"/>
+          </a:fontRef>
+        </p:style>
+        <p:txBody>
+          <a:bodyPr rtlCol="0" anchor="ctr"/>
+          <a:lstStyle/>
+          <a:p>
+            <a:pPr algn="ctr"/>
+          </a:p>
+        </p:txBody>
+      </p:sp>
+      <p:pic>
+        <p:nvPicPr>
+          <p:cNvPr id="19" name="Picture 18" descr="examlab.png"/>
+          <p:cNvPicPr>
+            <a:picLocks noChangeAspect="1"/>
+          </p:cNvPicPr>
+          <p:nvPr/>
+        </p:nvPicPr>
+        <p:blipFill>
+          <a:blip r:embed="rId4"/>
+          <a:stretch>
+            <a:fillRect/>
+          </a:stretch>
+        </p:blipFill>
+        <p:spPr>
+          <a:xfrm>
+            <a:off x="9295638" y="1847087"/>
+            <a:ext cx="1252728" cy="1252728"/>
+          </a:xfrm>
+          <a:prstGeom prst="rect">
+            <a:avLst/>
+          </a:prstGeom>
+        </p:spPr>
+      </p:pic>
+      <p:sp>
+        <p:nvSpPr>
+          <p:cNvPr id="20" name="TextBox 19"/>
+          <p:cNvSpPr txBox="1"/>
+          <p:nvPr/>
+        </p:nvSpPr>
+        <p:spPr>
+          <a:xfrm>
+            <a:off x="8182660" y="3191256"/>
+            <a:ext cx="3478682" cy="621792"/>
+          </a:xfrm>
+          <a:prstGeom prst="rect">
+            <a:avLst/>
+          </a:prstGeom>
+          <a:noFill/>
+        </p:spPr>
+        <p:txBody>
+          <a:bodyPr wrap="square" anchor="t"/>
+          <a:lstStyle/>
+          <a:p>
+            <a:pPr algn="ctr"/>
+            <a:r>
+              <a:rPr sz="1300" b="1" i="0">
+                <a:solidFill>
+                  <a:srgbClr val="095292"/>
+                </a:solidFill>
+                <a:latin typeface="Calibri"/>
+              </a:rPr>
+              <a:t>la plataforma del curso</a:t>
+            </a:r>
+          </a:p>
+          <a:p>
+            <a:pPr algn="ctr">
+              <a:spcBef>
+                <a:spcPts val="200"/>
+              </a:spcBef>
+            </a:pPr>
+            <a:r>
+              <a:rPr sz="1000" b="0" i="0">
+                <a:solidFill>
+                  <a:srgbClr val="666666"/>
+                </a:solidFill>
+                <a:latin typeface="Calibri"/>
+              </a:rPr>
+              <a:t>Entrega del taller · en la fecha que indique el docente</a:t>
+            </a:r>
+          </a:p>
+        </p:txBody>
+      </p:sp>
+      <p:sp>
+        <p:nvSpPr>
+          <p:cNvPr id="21" name="TextBox 20"/>
           <p:cNvSpPr txBox="1"/>
           <p:nvPr/>
         </p:nvSpPr>
@@ -6148,7 +5437,1695 @@
         <p:spPr>
           <a:xfrm>
             <a:off x="0" y="0"/>
-            <a:ext cx="12191695" cy="164592"/>
+            <a:ext cx="12191695" cy="960120"/>
+          </a:xfrm>
+          <a:prstGeom prst="rect">
+            <a:avLst/>
+          </a:prstGeom>
+          <a:solidFill>
+            <a:srgbClr val="095292"/>
+          </a:solidFill>
+          <a:ln>
+            <a:noFill/>
+          </a:ln>
+        </p:spPr>
+        <p:style>
+          <a:lnRef idx="1">
+            <a:schemeClr val="accent1"/>
+          </a:lnRef>
+          <a:fillRef idx="3">
+            <a:schemeClr val="accent1"/>
+          </a:fillRef>
+          <a:effectRef idx="2">
+            <a:schemeClr val="accent1"/>
+          </a:effectRef>
+          <a:fontRef idx="minor">
+            <a:schemeClr val="lt1"/>
+          </a:fontRef>
+        </p:style>
+        <p:txBody>
+          <a:bodyPr rtlCol="0" anchor="ctr"/>
+          <a:lstStyle/>
+          <a:p>
+            <a:pPr algn="ctr"/>
+          </a:p>
+        </p:txBody>
+      </p:sp>
+      <p:sp>
+        <p:nvSpPr>
+          <p:cNvPr id="3" name="Rectangle 2"/>
+          <p:cNvSpPr/>
+          <p:nvPr/>
+        </p:nvSpPr>
+        <p:spPr>
+          <a:xfrm>
+            <a:off x="0" y="960120"/>
+            <a:ext cx="12191695" cy="41148"/>
+          </a:xfrm>
+          <a:prstGeom prst="rect">
+            <a:avLst/>
+          </a:prstGeom>
+          <a:solidFill>
+            <a:srgbClr val="FFD000"/>
+          </a:solidFill>
+          <a:ln>
+            <a:noFill/>
+          </a:ln>
+        </p:spPr>
+        <p:style>
+          <a:lnRef idx="1">
+            <a:schemeClr val="accent1"/>
+          </a:lnRef>
+          <a:fillRef idx="3">
+            <a:schemeClr val="accent1"/>
+          </a:fillRef>
+          <a:effectRef idx="2">
+            <a:schemeClr val="accent1"/>
+          </a:effectRef>
+          <a:fontRef idx="minor">
+            <a:schemeClr val="lt1"/>
+          </a:fontRef>
+        </p:style>
+        <p:txBody>
+          <a:bodyPr rtlCol="0" anchor="ctr"/>
+          <a:lstStyle/>
+          <a:p>
+            <a:pPr algn="ctr"/>
+          </a:p>
+        </p:txBody>
+      </p:sp>
+      <p:sp>
+        <p:nvSpPr>
+          <p:cNvPr id="4" name="TextBox 3"/>
+          <p:cNvSpPr txBox="1"/>
+          <p:nvPr/>
+        </p:nvSpPr>
+        <p:spPr>
+          <a:xfrm>
+            <a:off x="457200" y="164592"/>
+            <a:ext cx="11277295" cy="502920"/>
+          </a:xfrm>
+          <a:prstGeom prst="rect">
+            <a:avLst/>
+          </a:prstGeom>
+          <a:noFill/>
+        </p:spPr>
+        <p:txBody>
+          <a:bodyPr wrap="square">
+            <a:spAutoFit/>
+          </a:bodyPr>
+          <a:lstStyle/>
+          <a:p>
+            <a:r>
+              <a:rPr sz="2600" b="1" i="0">
+                <a:solidFill>
+                  <a:srgbClr val="FFFFFF"/>
+                </a:solidFill>
+                <a:latin typeface="Calibri"/>
+              </a:rPr>
+              <a:t>Taller PI — por que importa</a:t>
+            </a:r>
+          </a:p>
+        </p:txBody>
+      </p:sp>
+      <p:sp>
+        <p:nvSpPr>
+          <p:cNvPr id="5" name="TextBox 4"/>
+          <p:cNvSpPr txBox="1"/>
+          <p:nvPr/>
+        </p:nvSpPr>
+        <p:spPr>
+          <a:xfrm>
+            <a:off x="457200" y="1170432"/>
+            <a:ext cx="11277295" cy="5230368"/>
+          </a:xfrm>
+          <a:prstGeom prst="rect">
+            <a:avLst/>
+          </a:prstGeom>
+          <a:noFill/>
+        </p:spPr>
+        <p:txBody>
+          <a:bodyPr wrap="square">
+            <a:spAutoFit/>
+          </a:bodyPr>
+          <a:lstStyle/>
+          <a:p>
+            <a:pPr>
+              <a:spcAft>
+                <a:spcPts val="800"/>
+              </a:spcAft>
+            </a:pPr>
+            <a:r>
+              <a:rPr sz="2000" b="0" i="0">
+                <a:solidFill>
+                  <a:srgbClr val="333333"/>
+                </a:solidFill>
+                <a:latin typeface="Calibri"/>
+              </a:rPr>
+              <a:t>–   </a:t>
+            </a:r>
+            <a:r>
+              <a:rPr sz="2000" b="1" i="0">
+                <a:solidFill>
+                  <a:srgbClr val="333333"/>
+                </a:solidFill>
+                <a:latin typeface="Calibri"/>
+              </a:rPr>
+              <a:t>Por que importa al PI:</a:t>
+            </a:r>
+            <a:r>
+              <a:rPr sz="2000" b="0" i="0">
+                <a:solidFill>
+                  <a:srgbClr val="333333"/>
+                </a:solidFill>
+                <a:latin typeface="Calibri"/>
+              </a:rPr>
+              <a:t> el backlog es la version ejecutable del catalogo de requisitos; es la lista con la que se decide que se disena primero y, en Programacion II, que se codifica primero.</a:t>
+            </a:r>
+          </a:p>
+          <a:p>
+            <a:pPr>
+              <a:spcAft>
+                <a:spcPts val="800"/>
+              </a:spcAft>
+            </a:pPr>
+            <a:r>
+              <a:rPr sz="2000" b="0" i="0">
+                <a:solidFill>
+                  <a:srgbClr val="333333"/>
+                </a:solidFill>
+                <a:latin typeface="Calibri"/>
+              </a:rPr>
+              <a:t>–   Los criterios de aceptacion que escriba hoy se vuelven literalmente el guion de revision del prototipo navegable y de las pruebas del sistema.</a:t>
+            </a:r>
+          </a:p>
+          <a:p>
+            <a:pPr>
+              <a:spcAft>
+                <a:spcPts val="800"/>
+              </a:spcAft>
+            </a:pPr>
+            <a:r>
+              <a:rPr sz="2000" b="0" i="0">
+                <a:solidFill>
+                  <a:srgbClr val="333333"/>
+                </a:solidFill>
+                <a:latin typeface="Calibri"/>
+              </a:rPr>
+              <a:t>–   Una historia sin beneficio claro es una funcionalidad que nadie va a extranar si no se hace: aqui es donde se justifica cada pantalla de VetCare.</a:t>
+            </a:r>
+          </a:p>
+        </p:txBody>
+      </p:sp>
+      <p:sp>
+        <p:nvSpPr>
+          <p:cNvPr id="6" name="TextBox 5"/>
+          <p:cNvSpPr txBox="1"/>
+          <p:nvPr/>
+        </p:nvSpPr>
+        <p:spPr>
+          <a:xfrm>
+            <a:off x="11185855" y="6473952"/>
+            <a:ext cx="640080" cy="274320"/>
+          </a:xfrm>
+          <a:prstGeom prst="rect">
+            <a:avLst/>
+          </a:prstGeom>
+          <a:noFill/>
+        </p:spPr>
+        <p:txBody>
+          <a:bodyPr wrap="square">
+            <a:spAutoFit/>
+          </a:bodyPr>
+          <a:lstStyle/>
+          <a:p>
+            <a:pPr algn="r"/>
+            <a:r>
+              <a:rPr sz="1100" b="0" i="0">
+                <a:solidFill>
+                  <a:srgbClr val="666666"/>
+                </a:solidFill>
+                <a:latin typeface="Calibri"/>
+              </a:rPr>
+              <a:t>14</a:t>
+            </a:r>
+          </a:p>
+        </p:txBody>
+      </p:sp>
+    </p:spTree>
+  </p:cSld>
+  <p:clrMapOvr>
+    <a:masterClrMapping/>
+  </p:clrMapOvr>
+</p:sld>
+</file>
+
+<file path=ppt/slides/slide15.xml><?xml version="1.0" encoding="utf-8"?>
+<p:sld xmlns:a="http://schemas.openxmlformats.org/drawingml/2006/main" xmlns:p="http://schemas.openxmlformats.org/presentationml/2006/main" xmlns:r="http://schemas.openxmlformats.org/officeDocument/2006/relationships">
+  <p:cSld>
+    <p:bg>
+      <p:bgPr>
+        <a:solidFill>
+          <a:srgbClr val="FFFFFF"/>
+        </a:solidFill>
+        <a:effectLst/>
+      </p:bgPr>
+    </p:bg>
+    <p:spTree>
+      <p:nvGrpSpPr>
+        <p:cNvPr id="1" name=""/>
+        <p:cNvGrpSpPr/>
+        <p:nvPr/>
+      </p:nvGrpSpPr>
+      <p:grpSpPr/>
+      <p:sp>
+        <p:nvSpPr>
+          <p:cNvPr id="2" name="Rectangle 1"/>
+          <p:cNvSpPr/>
+          <p:nvPr/>
+        </p:nvSpPr>
+        <p:spPr>
+          <a:xfrm>
+            <a:off x="0" y="0"/>
+            <a:ext cx="12191695" cy="960120"/>
+          </a:xfrm>
+          <a:prstGeom prst="rect">
+            <a:avLst/>
+          </a:prstGeom>
+          <a:solidFill>
+            <a:srgbClr val="095292"/>
+          </a:solidFill>
+          <a:ln>
+            <a:noFill/>
+          </a:ln>
+        </p:spPr>
+        <p:style>
+          <a:lnRef idx="1">
+            <a:schemeClr val="accent1"/>
+          </a:lnRef>
+          <a:fillRef idx="3">
+            <a:schemeClr val="accent1"/>
+          </a:fillRef>
+          <a:effectRef idx="2">
+            <a:schemeClr val="accent1"/>
+          </a:effectRef>
+          <a:fontRef idx="minor">
+            <a:schemeClr val="lt1"/>
+          </a:fontRef>
+        </p:style>
+        <p:txBody>
+          <a:bodyPr rtlCol="0" anchor="ctr"/>
+          <a:lstStyle/>
+          <a:p>
+            <a:pPr algn="ctr"/>
+          </a:p>
+        </p:txBody>
+      </p:sp>
+      <p:sp>
+        <p:nvSpPr>
+          <p:cNvPr id="3" name="Rectangle 2"/>
+          <p:cNvSpPr/>
+          <p:nvPr/>
+        </p:nvSpPr>
+        <p:spPr>
+          <a:xfrm>
+            <a:off x="0" y="960120"/>
+            <a:ext cx="12191695" cy="41148"/>
+          </a:xfrm>
+          <a:prstGeom prst="rect">
+            <a:avLst/>
+          </a:prstGeom>
+          <a:solidFill>
+            <a:srgbClr val="FFD000"/>
+          </a:solidFill>
+          <a:ln>
+            <a:noFill/>
+          </a:ln>
+        </p:spPr>
+        <p:style>
+          <a:lnRef idx="1">
+            <a:schemeClr val="accent1"/>
+          </a:lnRef>
+          <a:fillRef idx="3">
+            <a:schemeClr val="accent1"/>
+          </a:fillRef>
+          <a:effectRef idx="2">
+            <a:schemeClr val="accent1"/>
+          </a:effectRef>
+          <a:fontRef idx="minor">
+            <a:schemeClr val="lt1"/>
+          </a:fontRef>
+        </p:style>
+        <p:txBody>
+          <a:bodyPr rtlCol="0" anchor="ctr"/>
+          <a:lstStyle/>
+          <a:p>
+            <a:pPr algn="ctr"/>
+          </a:p>
+        </p:txBody>
+      </p:sp>
+      <p:sp>
+        <p:nvSpPr>
+          <p:cNvPr id="4" name="TextBox 3"/>
+          <p:cNvSpPr txBox="1"/>
+          <p:nvPr/>
+        </p:nvSpPr>
+        <p:spPr>
+          <a:xfrm>
+            <a:off x="457200" y="164592"/>
+            <a:ext cx="11277295" cy="502920"/>
+          </a:xfrm>
+          <a:prstGeom prst="rect">
+            <a:avLst/>
+          </a:prstGeom>
+          <a:noFill/>
+        </p:spPr>
+        <p:txBody>
+          <a:bodyPr wrap="square">
+            <a:spAutoFit/>
+          </a:bodyPr>
+          <a:lstStyle/>
+          <a:p>
+            <a:r>
+              <a:rPr sz="2600" b="1" i="0">
+                <a:solidFill>
+                  <a:srgbClr val="FFFFFF"/>
+                </a:solidFill>
+                <a:latin typeface="Calibri"/>
+              </a:rPr>
+              <a:t>Taller PI — punto de partida</a:t>
+            </a:r>
+          </a:p>
+        </p:txBody>
+      </p:sp>
+      <p:sp>
+        <p:nvSpPr>
+          <p:cNvPr id="5" name="TextBox 4"/>
+          <p:cNvSpPr txBox="1"/>
+          <p:nvPr/>
+        </p:nvSpPr>
+        <p:spPr>
+          <a:xfrm>
+            <a:off x="457200" y="1170432"/>
+            <a:ext cx="11277295" cy="5230368"/>
+          </a:xfrm>
+          <a:prstGeom prst="rect">
+            <a:avLst/>
+          </a:prstGeom>
+          <a:noFill/>
+        </p:spPr>
+        <p:txBody>
+          <a:bodyPr wrap="square">
+            <a:spAutoFit/>
+          </a:bodyPr>
+          <a:lstStyle/>
+          <a:p>
+            <a:pPr>
+              <a:spcAft>
+                <a:spcPts val="800"/>
+              </a:spcAft>
+            </a:pPr>
+            <a:r>
+              <a:rPr sz="2000" b="0" i="0">
+                <a:solidFill>
+                  <a:srgbClr val="333333"/>
+                </a:solidFill>
+                <a:latin typeface="Calibri"/>
+              </a:rPr>
+              <a:t>–   Ya existe el catalogo de requisitos de VetCare con RF, RNF, prioridades MoSCoW y matriz de trazabilidad aprobados en la clase anterior.</a:t>
+            </a:r>
+          </a:p>
+          <a:p>
+            <a:pPr>
+              <a:spcAft>
+                <a:spcPts val="800"/>
+              </a:spcAft>
+            </a:pPr>
+            <a:r>
+              <a:rPr sz="2000" b="0" i="0">
+                <a:solidFill>
+                  <a:srgbClr val="333333"/>
+                </a:solidFill>
+                <a:latin typeface="Calibri"/>
+              </a:rPr>
+              <a:t>–   Ese catalogo esta escrito en lenguaje formal de analista y todavia no permite decidir por donde arrancar ni cuanto pesa cada pieza.</a:t>
+            </a:r>
+          </a:p>
+          <a:p>
+            <a:pPr>
+              <a:spcAft>
+                <a:spcPts val="800"/>
+              </a:spcAft>
+            </a:pPr>
+            <a:r>
+              <a:rPr sz="2000" b="0" i="0">
+                <a:solidFill>
+                  <a:srgbClr val="333333"/>
+                </a:solidFill>
+                <a:latin typeface="Calibri"/>
+              </a:rPr>
+              <a:t>–   El equipo del Proyecto Integrador necesita una lista ordenada de trabajo para poder repartirse las siguientes semanas entre diseno y construccion.</a:t>
+            </a:r>
+          </a:p>
+        </p:txBody>
+      </p:sp>
+      <p:sp>
+        <p:nvSpPr>
+          <p:cNvPr id="6" name="TextBox 5"/>
+          <p:cNvSpPr txBox="1"/>
+          <p:nvPr/>
+        </p:nvSpPr>
+        <p:spPr>
+          <a:xfrm>
+            <a:off x="11185855" y="6473952"/>
+            <a:ext cx="640080" cy="274320"/>
+          </a:xfrm>
+          <a:prstGeom prst="rect">
+            <a:avLst/>
+          </a:prstGeom>
+          <a:noFill/>
+        </p:spPr>
+        <p:txBody>
+          <a:bodyPr wrap="square">
+            <a:spAutoFit/>
+          </a:bodyPr>
+          <a:lstStyle/>
+          <a:p>
+            <a:pPr algn="r"/>
+            <a:r>
+              <a:rPr sz="1100" b="0" i="0">
+                <a:solidFill>
+                  <a:srgbClr val="666666"/>
+                </a:solidFill>
+                <a:latin typeface="Calibri"/>
+              </a:rPr>
+              <a:t>15</a:t>
+            </a:r>
+          </a:p>
+        </p:txBody>
+      </p:sp>
+    </p:spTree>
+  </p:cSld>
+  <p:clrMapOvr>
+    <a:masterClrMapping/>
+  </p:clrMapOvr>
+</p:sld>
+</file>
+
+<file path=ppt/slides/slide16.xml><?xml version="1.0" encoding="utf-8"?>
+<p:sld xmlns:a="http://schemas.openxmlformats.org/drawingml/2006/main" xmlns:p="http://schemas.openxmlformats.org/presentationml/2006/main" xmlns:r="http://schemas.openxmlformats.org/officeDocument/2006/relationships">
+  <p:cSld>
+    <p:bg>
+      <p:bgPr>
+        <a:solidFill>
+          <a:srgbClr val="FFFFFF"/>
+        </a:solidFill>
+        <a:effectLst/>
+      </p:bgPr>
+    </p:bg>
+    <p:spTree>
+      <p:nvGrpSpPr>
+        <p:cNvPr id="1" name=""/>
+        <p:cNvGrpSpPr/>
+        <p:nvPr/>
+      </p:nvGrpSpPr>
+      <p:grpSpPr/>
+      <p:sp>
+        <p:nvSpPr>
+          <p:cNvPr id="2" name="Rectangle 1"/>
+          <p:cNvSpPr/>
+          <p:nvPr/>
+        </p:nvSpPr>
+        <p:spPr>
+          <a:xfrm>
+            <a:off x="0" y="0"/>
+            <a:ext cx="12191695" cy="960120"/>
+          </a:xfrm>
+          <a:prstGeom prst="rect">
+            <a:avLst/>
+          </a:prstGeom>
+          <a:solidFill>
+            <a:srgbClr val="095292"/>
+          </a:solidFill>
+          <a:ln>
+            <a:noFill/>
+          </a:ln>
+        </p:spPr>
+        <p:style>
+          <a:lnRef idx="1">
+            <a:schemeClr val="accent1"/>
+          </a:lnRef>
+          <a:fillRef idx="3">
+            <a:schemeClr val="accent1"/>
+          </a:fillRef>
+          <a:effectRef idx="2">
+            <a:schemeClr val="accent1"/>
+          </a:effectRef>
+          <a:fontRef idx="minor">
+            <a:schemeClr val="lt1"/>
+          </a:fontRef>
+        </p:style>
+        <p:txBody>
+          <a:bodyPr rtlCol="0" anchor="ctr"/>
+          <a:lstStyle/>
+          <a:p>
+            <a:pPr algn="ctr"/>
+          </a:p>
+        </p:txBody>
+      </p:sp>
+      <p:sp>
+        <p:nvSpPr>
+          <p:cNvPr id="3" name="Rectangle 2"/>
+          <p:cNvSpPr/>
+          <p:nvPr/>
+        </p:nvSpPr>
+        <p:spPr>
+          <a:xfrm>
+            <a:off x="0" y="960120"/>
+            <a:ext cx="12191695" cy="41148"/>
+          </a:xfrm>
+          <a:prstGeom prst="rect">
+            <a:avLst/>
+          </a:prstGeom>
+          <a:solidFill>
+            <a:srgbClr val="FFD000"/>
+          </a:solidFill>
+          <a:ln>
+            <a:noFill/>
+          </a:ln>
+        </p:spPr>
+        <p:style>
+          <a:lnRef idx="1">
+            <a:schemeClr val="accent1"/>
+          </a:lnRef>
+          <a:fillRef idx="3">
+            <a:schemeClr val="accent1"/>
+          </a:fillRef>
+          <a:effectRef idx="2">
+            <a:schemeClr val="accent1"/>
+          </a:effectRef>
+          <a:fontRef idx="minor">
+            <a:schemeClr val="lt1"/>
+          </a:fontRef>
+        </p:style>
+        <p:txBody>
+          <a:bodyPr rtlCol="0" anchor="ctr"/>
+          <a:lstStyle/>
+          <a:p>
+            <a:pPr algn="ctr"/>
+          </a:p>
+        </p:txBody>
+      </p:sp>
+      <p:sp>
+        <p:nvSpPr>
+          <p:cNvPr id="4" name="TextBox 3"/>
+          <p:cNvSpPr txBox="1"/>
+          <p:nvPr/>
+        </p:nvSpPr>
+        <p:spPr>
+          <a:xfrm>
+            <a:off x="457200" y="164592"/>
+            <a:ext cx="11277295" cy="502920"/>
+          </a:xfrm>
+          <a:prstGeom prst="rect">
+            <a:avLst/>
+          </a:prstGeom>
+          <a:noFill/>
+        </p:spPr>
+        <p:txBody>
+          <a:bodyPr wrap="square">
+            <a:spAutoFit/>
+          </a:bodyPr>
+          <a:lstStyle/>
+          <a:p>
+            <a:r>
+              <a:rPr sz="2600" b="1" i="0">
+                <a:solidFill>
+                  <a:srgbClr val="FFFFFF"/>
+                </a:solidFill>
+                <a:latin typeface="Calibri"/>
+              </a:rPr>
+              <a:t>Taller PI — pasos guiados</a:t>
+            </a:r>
+          </a:p>
+        </p:txBody>
+      </p:sp>
+      <p:sp>
+        <p:nvSpPr>
+          <p:cNvPr id="5" name="Rounded Rectangle 4"/>
+          <p:cNvSpPr/>
+          <p:nvPr/>
+        </p:nvSpPr>
+        <p:spPr>
+          <a:xfrm>
+            <a:off x="457200" y="1234440"/>
+            <a:ext cx="11277295" cy="950976"/>
+          </a:xfrm>
+          <a:prstGeom prst="roundRect">
+            <a:avLst>
+              <a:gd name="adj" fmla="val 12000"/>
+            </a:avLst>
+          </a:prstGeom>
+          <a:solidFill>
+            <a:srgbClr val="F2F2F2"/>
+          </a:solidFill>
+          <a:ln>
+            <a:noFill/>
+          </a:ln>
+        </p:spPr>
+        <p:style>
+          <a:lnRef idx="1">
+            <a:schemeClr val="accent1"/>
+          </a:lnRef>
+          <a:fillRef idx="3">
+            <a:schemeClr val="accent1"/>
+          </a:fillRef>
+          <a:effectRef idx="2">
+            <a:schemeClr val="accent1"/>
+          </a:effectRef>
+          <a:fontRef idx="minor">
+            <a:schemeClr val="lt1"/>
+          </a:fontRef>
+        </p:style>
+        <p:txBody>
+          <a:bodyPr rtlCol="0" anchor="ctr"/>
+          <a:lstStyle/>
+          <a:p>
+            <a:pPr algn="ctr"/>
+          </a:p>
+        </p:txBody>
+      </p:sp>
+      <p:sp>
+        <p:nvSpPr>
+          <p:cNvPr id="6" name="Rounded Rectangle 5"/>
+          <p:cNvSpPr/>
+          <p:nvPr/>
+        </p:nvSpPr>
+        <p:spPr>
+          <a:xfrm>
+            <a:off x="594360" y="1490472"/>
+            <a:ext cx="438912" cy="438912"/>
+          </a:xfrm>
+          <a:prstGeom prst="roundRect">
+            <a:avLst>
+              <a:gd name="adj" fmla="val 12000"/>
+            </a:avLst>
+          </a:prstGeom>
+          <a:solidFill>
+            <a:srgbClr val="095292"/>
+          </a:solidFill>
+          <a:ln>
+            <a:noFill/>
+          </a:ln>
+        </p:spPr>
+        <p:style>
+          <a:lnRef idx="1">
+            <a:schemeClr val="accent1"/>
+          </a:lnRef>
+          <a:fillRef idx="3">
+            <a:schemeClr val="accent1"/>
+          </a:fillRef>
+          <a:effectRef idx="2">
+            <a:schemeClr val="accent1"/>
+          </a:effectRef>
+          <a:fontRef idx="minor">
+            <a:schemeClr val="lt1"/>
+          </a:fontRef>
+        </p:style>
+        <p:txBody>
+          <a:bodyPr rtlCol="0" anchor="ctr"/>
+          <a:lstStyle/>
+          <a:p>
+            <a:pPr algn="ctr"/>
+          </a:p>
+        </p:txBody>
+      </p:sp>
+      <p:sp>
+        <p:nvSpPr>
+          <p:cNvPr id="7" name="TextBox 6"/>
+          <p:cNvSpPr txBox="1"/>
+          <p:nvPr/>
+        </p:nvSpPr>
+        <p:spPr>
+          <a:xfrm>
+            <a:off x="594360" y="1490472"/>
+            <a:ext cx="438912" cy="438912"/>
+          </a:xfrm>
+          <a:prstGeom prst="rect">
+            <a:avLst/>
+          </a:prstGeom>
+          <a:noFill/>
+        </p:spPr>
+        <p:txBody>
+          <a:bodyPr wrap="square" anchor="ctr"/>
+          <a:lstStyle/>
+          <a:p>
+            <a:pPr algn="ctr"/>
+            <a:r>
+              <a:rPr sz="1600" b="1" i="0">
+                <a:solidFill>
+                  <a:srgbClr val="FFFFFF"/>
+                </a:solidFill>
+                <a:latin typeface="Calibri"/>
+              </a:rPr>
+              <a:t>1</a:t>
+            </a:r>
+          </a:p>
+        </p:txBody>
+      </p:sp>
+      <p:sp>
+        <p:nvSpPr>
+          <p:cNvPr id="8" name="TextBox 7"/>
+          <p:cNvSpPr txBox="1"/>
+          <p:nvPr/>
+        </p:nvSpPr>
+        <p:spPr>
+          <a:xfrm>
+            <a:off x="1188720" y="1325880"/>
+            <a:ext cx="10271455" cy="786384"/>
+          </a:xfrm>
+          <a:prstGeom prst="rect">
+            <a:avLst/>
+          </a:prstGeom>
+          <a:noFill/>
+        </p:spPr>
+        <p:txBody>
+          <a:bodyPr wrap="square" anchor="ctr"/>
+          <a:lstStyle/>
+          <a:p>
+            <a:r>
+              <a:rPr sz="1500" b="1" i="0">
+                <a:solidFill>
+                  <a:srgbClr val="095292"/>
+                </a:solidFill>
+                <a:latin typeface="Calibri"/>
+              </a:rPr>
+              <a:t>Paso 1: agrupe los RF del catalogo de la clase 6 en dos epicas de VetCare (por ejemplo Gestion de pacientes e Historial y agenda) y escriba el nombre y el objetivo de cada epica en una linea.</a:t>
+            </a:r>
+          </a:p>
+        </p:txBody>
+      </p:sp>
+      <p:sp>
+        <p:nvSpPr>
+          <p:cNvPr id="9" name="Rounded Rectangle 8"/>
+          <p:cNvSpPr/>
+          <p:nvPr/>
+        </p:nvSpPr>
+        <p:spPr>
+          <a:xfrm>
+            <a:off x="457200" y="2276856"/>
+            <a:ext cx="11277295" cy="950976"/>
+          </a:xfrm>
+          <a:prstGeom prst="roundRect">
+            <a:avLst>
+              <a:gd name="adj" fmla="val 12000"/>
+            </a:avLst>
+          </a:prstGeom>
+          <a:solidFill>
+            <a:srgbClr val="E8F4FA"/>
+          </a:solidFill>
+          <a:ln>
+            <a:noFill/>
+          </a:ln>
+        </p:spPr>
+        <p:style>
+          <a:lnRef idx="1">
+            <a:schemeClr val="accent1"/>
+          </a:lnRef>
+          <a:fillRef idx="3">
+            <a:schemeClr val="accent1"/>
+          </a:fillRef>
+          <a:effectRef idx="2">
+            <a:schemeClr val="accent1"/>
+          </a:effectRef>
+          <a:fontRef idx="minor">
+            <a:schemeClr val="lt1"/>
+          </a:fontRef>
+        </p:style>
+        <p:txBody>
+          <a:bodyPr rtlCol="0" anchor="ctr"/>
+          <a:lstStyle/>
+          <a:p>
+            <a:pPr algn="ctr"/>
+          </a:p>
+        </p:txBody>
+      </p:sp>
+      <p:sp>
+        <p:nvSpPr>
+          <p:cNvPr id="10" name="Rounded Rectangle 9"/>
+          <p:cNvSpPr/>
+          <p:nvPr/>
+        </p:nvSpPr>
+        <p:spPr>
+          <a:xfrm>
+            <a:off x="594360" y="2532888"/>
+            <a:ext cx="438912" cy="438912"/>
+          </a:xfrm>
+          <a:prstGeom prst="roundRect">
+            <a:avLst>
+              <a:gd name="adj" fmla="val 12000"/>
+            </a:avLst>
+          </a:prstGeom>
+          <a:solidFill>
+            <a:srgbClr val="095292"/>
+          </a:solidFill>
+          <a:ln>
+            <a:noFill/>
+          </a:ln>
+        </p:spPr>
+        <p:style>
+          <a:lnRef idx="1">
+            <a:schemeClr val="accent1"/>
+          </a:lnRef>
+          <a:fillRef idx="3">
+            <a:schemeClr val="accent1"/>
+          </a:fillRef>
+          <a:effectRef idx="2">
+            <a:schemeClr val="accent1"/>
+          </a:effectRef>
+          <a:fontRef idx="minor">
+            <a:schemeClr val="lt1"/>
+          </a:fontRef>
+        </p:style>
+        <p:txBody>
+          <a:bodyPr rtlCol="0" anchor="ctr"/>
+          <a:lstStyle/>
+          <a:p>
+            <a:pPr algn="ctr"/>
+          </a:p>
+        </p:txBody>
+      </p:sp>
+      <p:sp>
+        <p:nvSpPr>
+          <p:cNvPr id="11" name="TextBox 10"/>
+          <p:cNvSpPr txBox="1"/>
+          <p:nvPr/>
+        </p:nvSpPr>
+        <p:spPr>
+          <a:xfrm>
+            <a:off x="594360" y="2532888"/>
+            <a:ext cx="438912" cy="438912"/>
+          </a:xfrm>
+          <a:prstGeom prst="rect">
+            <a:avLst/>
+          </a:prstGeom>
+          <a:noFill/>
+        </p:spPr>
+        <p:txBody>
+          <a:bodyPr wrap="square" anchor="ctr"/>
+          <a:lstStyle/>
+          <a:p>
+            <a:pPr algn="ctr"/>
+            <a:r>
+              <a:rPr sz="1600" b="1" i="0">
+                <a:solidFill>
+                  <a:srgbClr val="FFFFFF"/>
+                </a:solidFill>
+                <a:latin typeface="Calibri"/>
+              </a:rPr>
+              <a:t>2</a:t>
+            </a:r>
+          </a:p>
+        </p:txBody>
+      </p:sp>
+      <p:sp>
+        <p:nvSpPr>
+          <p:cNvPr id="12" name="TextBox 11"/>
+          <p:cNvSpPr txBox="1"/>
+          <p:nvPr/>
+        </p:nvSpPr>
+        <p:spPr>
+          <a:xfrm>
+            <a:off x="1188720" y="2368296"/>
+            <a:ext cx="10271455" cy="786384"/>
+          </a:xfrm>
+          <a:prstGeom prst="rect">
+            <a:avLst/>
+          </a:prstGeom>
+          <a:noFill/>
+        </p:spPr>
+        <p:txBody>
+          <a:bodyPr wrap="square" anchor="ctr"/>
+          <a:lstStyle/>
+          <a:p>
+            <a:r>
+              <a:rPr sz="1500" b="1" i="0">
+                <a:solidFill>
+                  <a:srgbClr val="095292"/>
+                </a:solidFill>
+                <a:latin typeface="Calibri"/>
+              </a:rPr>
+              <a:t>Paso 2: descomponga las dos epicas en 8 historias con el formato Como &lt;rol de la clinica Huellitas&gt; quiero &lt;accion&gt; para &lt;beneficio&gt;, usando roles concretos (auxiliar, veterinario, administrador) y nunca la palabra usuario.</a:t>
+            </a:r>
+          </a:p>
+        </p:txBody>
+      </p:sp>
+      <p:sp>
+        <p:nvSpPr>
+          <p:cNvPr id="13" name="Rounded Rectangle 12"/>
+          <p:cNvSpPr/>
+          <p:nvPr/>
+        </p:nvSpPr>
+        <p:spPr>
+          <a:xfrm>
+            <a:off x="457200" y="3319272"/>
+            <a:ext cx="11277295" cy="950976"/>
+          </a:xfrm>
+          <a:prstGeom prst="roundRect">
+            <a:avLst>
+              <a:gd name="adj" fmla="val 12000"/>
+            </a:avLst>
+          </a:prstGeom>
+          <a:solidFill>
+            <a:srgbClr val="F2F2F2"/>
+          </a:solidFill>
+          <a:ln>
+            <a:noFill/>
+          </a:ln>
+        </p:spPr>
+        <p:style>
+          <a:lnRef idx="1">
+            <a:schemeClr val="accent1"/>
+          </a:lnRef>
+          <a:fillRef idx="3">
+            <a:schemeClr val="accent1"/>
+          </a:fillRef>
+          <a:effectRef idx="2">
+            <a:schemeClr val="accent1"/>
+          </a:effectRef>
+          <a:fontRef idx="minor">
+            <a:schemeClr val="lt1"/>
+          </a:fontRef>
+        </p:style>
+        <p:txBody>
+          <a:bodyPr rtlCol="0" anchor="ctr"/>
+          <a:lstStyle/>
+          <a:p>
+            <a:pPr algn="ctr"/>
+          </a:p>
+        </p:txBody>
+      </p:sp>
+      <p:sp>
+        <p:nvSpPr>
+          <p:cNvPr id="14" name="Rounded Rectangle 13"/>
+          <p:cNvSpPr/>
+          <p:nvPr/>
+        </p:nvSpPr>
+        <p:spPr>
+          <a:xfrm>
+            <a:off x="594360" y="3575304"/>
+            <a:ext cx="438912" cy="438912"/>
+          </a:xfrm>
+          <a:prstGeom prst="roundRect">
+            <a:avLst>
+              <a:gd name="adj" fmla="val 12000"/>
+            </a:avLst>
+          </a:prstGeom>
+          <a:solidFill>
+            <a:srgbClr val="095292"/>
+          </a:solidFill>
+          <a:ln>
+            <a:noFill/>
+          </a:ln>
+        </p:spPr>
+        <p:style>
+          <a:lnRef idx="1">
+            <a:schemeClr val="accent1"/>
+          </a:lnRef>
+          <a:fillRef idx="3">
+            <a:schemeClr val="accent1"/>
+          </a:fillRef>
+          <a:effectRef idx="2">
+            <a:schemeClr val="accent1"/>
+          </a:effectRef>
+          <a:fontRef idx="minor">
+            <a:schemeClr val="lt1"/>
+          </a:fontRef>
+        </p:style>
+        <p:txBody>
+          <a:bodyPr rtlCol="0" anchor="ctr"/>
+          <a:lstStyle/>
+          <a:p>
+            <a:pPr algn="ctr"/>
+          </a:p>
+        </p:txBody>
+      </p:sp>
+      <p:sp>
+        <p:nvSpPr>
+          <p:cNvPr id="15" name="TextBox 14"/>
+          <p:cNvSpPr txBox="1"/>
+          <p:nvPr/>
+        </p:nvSpPr>
+        <p:spPr>
+          <a:xfrm>
+            <a:off x="594360" y="3575304"/>
+            <a:ext cx="438912" cy="438912"/>
+          </a:xfrm>
+          <a:prstGeom prst="rect">
+            <a:avLst/>
+          </a:prstGeom>
+          <a:noFill/>
+        </p:spPr>
+        <p:txBody>
+          <a:bodyPr wrap="square" anchor="ctr"/>
+          <a:lstStyle/>
+          <a:p>
+            <a:pPr algn="ctr"/>
+            <a:r>
+              <a:rPr sz="1600" b="1" i="0">
+                <a:solidFill>
+                  <a:srgbClr val="FFFFFF"/>
+                </a:solidFill>
+                <a:latin typeface="Calibri"/>
+              </a:rPr>
+              <a:t>3</a:t>
+            </a:r>
+          </a:p>
+        </p:txBody>
+      </p:sp>
+      <p:sp>
+        <p:nvSpPr>
+          <p:cNvPr id="16" name="TextBox 15"/>
+          <p:cNvSpPr txBox="1"/>
+          <p:nvPr/>
+        </p:nvSpPr>
+        <p:spPr>
+          <a:xfrm>
+            <a:off x="1188720" y="3410712"/>
+            <a:ext cx="10271455" cy="786384"/>
+          </a:xfrm>
+          <a:prstGeom prst="rect">
+            <a:avLst/>
+          </a:prstGeom>
+          <a:noFill/>
+        </p:spPr>
+        <p:txBody>
+          <a:bodyPr wrap="square" anchor="ctr"/>
+          <a:lstStyle/>
+          <a:p>
+            <a:r>
+              <a:rPr sz="1500" b="1" i="0">
+                <a:solidFill>
+                  <a:srgbClr val="095292"/>
+                </a:solidFill>
+                <a:latin typeface="Calibri"/>
+              </a:rPr>
+              <a:t>Paso 3: escriba 2 o 3 criterios de aceptacion por historia en Dado-Cuando-Entonces, e incluya obligatoriamente un criterio de camino alterno o de error en al menos cuatro de las ocho historias.</a:t>
+            </a:r>
+          </a:p>
+        </p:txBody>
+      </p:sp>
+      <p:sp>
+        <p:nvSpPr>
+          <p:cNvPr id="17" name="Rounded Rectangle 16"/>
+          <p:cNvSpPr/>
+          <p:nvPr/>
+        </p:nvSpPr>
+        <p:spPr>
+          <a:xfrm>
+            <a:off x="457200" y="4361688"/>
+            <a:ext cx="11277295" cy="950976"/>
+          </a:xfrm>
+          <a:prstGeom prst="roundRect">
+            <a:avLst>
+              <a:gd name="adj" fmla="val 12000"/>
+            </a:avLst>
+          </a:prstGeom>
+          <a:solidFill>
+            <a:srgbClr val="E8F4FA"/>
+          </a:solidFill>
+          <a:ln>
+            <a:noFill/>
+          </a:ln>
+        </p:spPr>
+        <p:style>
+          <a:lnRef idx="1">
+            <a:schemeClr val="accent1"/>
+          </a:lnRef>
+          <a:fillRef idx="3">
+            <a:schemeClr val="accent1"/>
+          </a:fillRef>
+          <a:effectRef idx="2">
+            <a:schemeClr val="accent1"/>
+          </a:effectRef>
+          <a:fontRef idx="minor">
+            <a:schemeClr val="lt1"/>
+          </a:fontRef>
+        </p:style>
+        <p:txBody>
+          <a:bodyPr rtlCol="0" anchor="ctr"/>
+          <a:lstStyle/>
+          <a:p>
+            <a:pPr algn="ctr"/>
+          </a:p>
+        </p:txBody>
+      </p:sp>
+      <p:sp>
+        <p:nvSpPr>
+          <p:cNvPr id="18" name="Rounded Rectangle 17"/>
+          <p:cNvSpPr/>
+          <p:nvPr/>
+        </p:nvSpPr>
+        <p:spPr>
+          <a:xfrm>
+            <a:off x="594360" y="4617720"/>
+            <a:ext cx="438912" cy="438912"/>
+          </a:xfrm>
+          <a:prstGeom prst="roundRect">
+            <a:avLst>
+              <a:gd name="adj" fmla="val 12000"/>
+            </a:avLst>
+          </a:prstGeom>
+          <a:solidFill>
+            <a:srgbClr val="095292"/>
+          </a:solidFill>
+          <a:ln>
+            <a:noFill/>
+          </a:ln>
+        </p:spPr>
+        <p:style>
+          <a:lnRef idx="1">
+            <a:schemeClr val="accent1"/>
+          </a:lnRef>
+          <a:fillRef idx="3">
+            <a:schemeClr val="accent1"/>
+          </a:fillRef>
+          <a:effectRef idx="2">
+            <a:schemeClr val="accent1"/>
+          </a:effectRef>
+          <a:fontRef idx="minor">
+            <a:schemeClr val="lt1"/>
+          </a:fontRef>
+        </p:style>
+        <p:txBody>
+          <a:bodyPr rtlCol="0" anchor="ctr"/>
+          <a:lstStyle/>
+          <a:p>
+            <a:pPr algn="ctr"/>
+          </a:p>
+        </p:txBody>
+      </p:sp>
+      <p:sp>
+        <p:nvSpPr>
+          <p:cNvPr id="19" name="TextBox 18"/>
+          <p:cNvSpPr txBox="1"/>
+          <p:nvPr/>
+        </p:nvSpPr>
+        <p:spPr>
+          <a:xfrm>
+            <a:off x="594360" y="4617720"/>
+            <a:ext cx="438912" cy="438912"/>
+          </a:xfrm>
+          <a:prstGeom prst="rect">
+            <a:avLst/>
+          </a:prstGeom>
+          <a:noFill/>
+        </p:spPr>
+        <p:txBody>
+          <a:bodyPr wrap="square" anchor="ctr"/>
+          <a:lstStyle/>
+          <a:p>
+            <a:pPr algn="ctr"/>
+            <a:r>
+              <a:rPr sz="1600" b="1" i="0">
+                <a:solidFill>
+                  <a:srgbClr val="FFFFFF"/>
+                </a:solidFill>
+                <a:latin typeface="Calibri"/>
+              </a:rPr>
+              <a:t>4</a:t>
+            </a:r>
+          </a:p>
+        </p:txBody>
+      </p:sp>
+      <p:sp>
+        <p:nvSpPr>
+          <p:cNvPr id="20" name="TextBox 19"/>
+          <p:cNvSpPr txBox="1"/>
+          <p:nvPr/>
+        </p:nvSpPr>
+        <p:spPr>
+          <a:xfrm>
+            <a:off x="1188720" y="4453128"/>
+            <a:ext cx="10271455" cy="786384"/>
+          </a:xfrm>
+          <a:prstGeom prst="rect">
+            <a:avLst/>
+          </a:prstGeom>
+          <a:noFill/>
+        </p:spPr>
+        <p:txBody>
+          <a:bodyPr wrap="square" anchor="ctr"/>
+          <a:lstStyle/>
+          <a:p>
+            <a:r>
+              <a:rPr sz="1500" b="1" i="0">
+                <a:solidFill>
+                  <a:srgbClr val="095292"/>
+                </a:solidFill>
+                <a:latin typeface="Calibri"/>
+              </a:rPr>
+              <a:t>Paso 4: revise cada historia contra INVEST marcando las seis letras con si o no; toda historia que falle dos o mas letras debe reescribirse o partirse antes de continuar.</a:t>
+            </a:r>
+          </a:p>
+        </p:txBody>
+      </p:sp>
+      <p:sp>
+        <p:nvSpPr>
+          <p:cNvPr id="21" name="Rounded Rectangle 20"/>
+          <p:cNvSpPr/>
+          <p:nvPr/>
+        </p:nvSpPr>
+        <p:spPr>
+          <a:xfrm>
+            <a:off x="457200" y="5404104"/>
+            <a:ext cx="11277295" cy="950976"/>
+          </a:xfrm>
+          <a:prstGeom prst="roundRect">
+            <a:avLst>
+              <a:gd name="adj" fmla="val 12000"/>
+            </a:avLst>
+          </a:prstGeom>
+          <a:solidFill>
+            <a:srgbClr val="F2F2F2"/>
+          </a:solidFill>
+          <a:ln>
+            <a:noFill/>
+          </a:ln>
+        </p:spPr>
+        <p:style>
+          <a:lnRef idx="1">
+            <a:schemeClr val="accent1"/>
+          </a:lnRef>
+          <a:fillRef idx="3">
+            <a:schemeClr val="accent1"/>
+          </a:fillRef>
+          <a:effectRef idx="2">
+            <a:schemeClr val="accent1"/>
+          </a:effectRef>
+          <a:fontRef idx="minor">
+            <a:schemeClr val="lt1"/>
+          </a:fontRef>
+        </p:style>
+        <p:txBody>
+          <a:bodyPr rtlCol="0" anchor="ctr"/>
+          <a:lstStyle/>
+          <a:p>
+            <a:pPr algn="ctr"/>
+          </a:p>
+        </p:txBody>
+      </p:sp>
+      <p:sp>
+        <p:nvSpPr>
+          <p:cNvPr id="22" name="Rounded Rectangle 21"/>
+          <p:cNvSpPr/>
+          <p:nvPr/>
+        </p:nvSpPr>
+        <p:spPr>
+          <a:xfrm>
+            <a:off x="594360" y="5660136"/>
+            <a:ext cx="438912" cy="438912"/>
+          </a:xfrm>
+          <a:prstGeom prst="roundRect">
+            <a:avLst>
+              <a:gd name="adj" fmla="val 12000"/>
+            </a:avLst>
+          </a:prstGeom>
+          <a:solidFill>
+            <a:srgbClr val="095292"/>
+          </a:solidFill>
+          <a:ln>
+            <a:noFill/>
+          </a:ln>
+        </p:spPr>
+        <p:style>
+          <a:lnRef idx="1">
+            <a:schemeClr val="accent1"/>
+          </a:lnRef>
+          <a:fillRef idx="3">
+            <a:schemeClr val="accent1"/>
+          </a:fillRef>
+          <a:effectRef idx="2">
+            <a:schemeClr val="accent1"/>
+          </a:effectRef>
+          <a:fontRef idx="minor">
+            <a:schemeClr val="lt1"/>
+          </a:fontRef>
+        </p:style>
+        <p:txBody>
+          <a:bodyPr rtlCol="0" anchor="ctr"/>
+          <a:lstStyle/>
+          <a:p>
+            <a:pPr algn="ctr"/>
+          </a:p>
+        </p:txBody>
+      </p:sp>
+      <p:sp>
+        <p:nvSpPr>
+          <p:cNvPr id="23" name="TextBox 22"/>
+          <p:cNvSpPr txBox="1"/>
+          <p:nvPr/>
+        </p:nvSpPr>
+        <p:spPr>
+          <a:xfrm>
+            <a:off x="594360" y="5660136"/>
+            <a:ext cx="438912" cy="438912"/>
+          </a:xfrm>
+          <a:prstGeom prst="rect">
+            <a:avLst/>
+          </a:prstGeom>
+          <a:noFill/>
+        </p:spPr>
+        <p:txBody>
+          <a:bodyPr wrap="square" anchor="ctr"/>
+          <a:lstStyle/>
+          <a:p>
+            <a:pPr algn="ctr"/>
+            <a:r>
+              <a:rPr sz="1600" b="1" i="0">
+                <a:solidFill>
+                  <a:srgbClr val="FFFFFF"/>
+                </a:solidFill>
+                <a:latin typeface="Calibri"/>
+              </a:rPr>
+              <a:t>5</a:t>
+            </a:r>
+          </a:p>
+        </p:txBody>
+      </p:sp>
+      <p:sp>
+        <p:nvSpPr>
+          <p:cNvPr id="24" name="TextBox 23"/>
+          <p:cNvSpPr txBox="1"/>
+          <p:nvPr/>
+        </p:nvSpPr>
+        <p:spPr>
+          <a:xfrm>
+            <a:off x="1188720" y="5495544"/>
+            <a:ext cx="10271455" cy="786384"/>
+          </a:xfrm>
+          <a:prstGeom prst="rect">
+            <a:avLst/>
+          </a:prstGeom>
+          <a:noFill/>
+        </p:spPr>
+        <p:txBody>
+          <a:bodyPr wrap="square" anchor="ctr"/>
+          <a:lstStyle/>
+          <a:p>
+            <a:r>
+              <a:rPr sz="1500" b="1" i="0">
+                <a:solidFill>
+                  <a:srgbClr val="095292"/>
+                </a:solidFill>
+                <a:latin typeface="Calibri"/>
+              </a:rPr>
+              <a:t>Paso 5: estime en puntos con la escala 1, 2, 3, 5, 8 tomando 'registrar un dueno = 3' como referencia, ordene el backlog de mayor a menor prioridad, agregue la columna de trazabilidad al RF de origen y suba el tablero a la plataforma del curso.</a:t>
+            </a:r>
+          </a:p>
+        </p:txBody>
+      </p:sp>
+      <p:sp>
+        <p:nvSpPr>
+          <p:cNvPr id="25" name="TextBox 24"/>
+          <p:cNvSpPr txBox="1"/>
+          <p:nvPr/>
+        </p:nvSpPr>
+        <p:spPr>
+          <a:xfrm>
+            <a:off x="11185855" y="6473952"/>
+            <a:ext cx="640080" cy="274320"/>
+          </a:xfrm>
+          <a:prstGeom prst="rect">
+            <a:avLst/>
+          </a:prstGeom>
+          <a:noFill/>
+        </p:spPr>
+        <p:txBody>
+          <a:bodyPr wrap="square">
+            <a:spAutoFit/>
+          </a:bodyPr>
+          <a:lstStyle/>
+          <a:p>
+            <a:pPr algn="r"/>
+            <a:r>
+              <a:rPr sz="1100" b="0" i="0">
+                <a:solidFill>
+                  <a:srgbClr val="666666"/>
+                </a:solidFill>
+                <a:latin typeface="Calibri"/>
+              </a:rPr>
+              <a:t>16</a:t>
+            </a:r>
+          </a:p>
+        </p:txBody>
+      </p:sp>
+    </p:spTree>
+  </p:cSld>
+  <p:clrMapOvr>
+    <a:masterClrMapping/>
+  </p:clrMapOvr>
+</p:sld>
+</file>
+
+<file path=ppt/slides/slide17.xml><?xml version="1.0" encoding="utf-8"?>
+<p:sld xmlns:a="http://schemas.openxmlformats.org/drawingml/2006/main" xmlns:p="http://schemas.openxmlformats.org/presentationml/2006/main" xmlns:r="http://schemas.openxmlformats.org/officeDocument/2006/relationships">
+  <p:cSld>
+    <p:bg>
+      <p:bgPr>
+        <a:solidFill>
+          <a:srgbClr val="FFFFFF"/>
+        </a:solidFill>
+        <a:effectLst/>
+      </p:bgPr>
+    </p:bg>
+    <p:spTree>
+      <p:nvGrpSpPr>
+        <p:cNvPr id="1" name=""/>
+        <p:cNvGrpSpPr/>
+        <p:nvPr/>
+      </p:nvGrpSpPr>
+      <p:grpSpPr/>
+      <p:sp>
+        <p:nvSpPr>
+          <p:cNvPr id="2" name="Rectangle 1"/>
+          <p:cNvSpPr/>
+          <p:nvPr/>
+        </p:nvSpPr>
+        <p:spPr>
+          <a:xfrm>
+            <a:off x="0" y="0"/>
+            <a:ext cx="12191695" cy="960120"/>
+          </a:xfrm>
+          <a:prstGeom prst="rect">
+            <a:avLst/>
+          </a:prstGeom>
+          <a:solidFill>
+            <a:srgbClr val="095292"/>
+          </a:solidFill>
+          <a:ln>
+            <a:noFill/>
+          </a:ln>
+        </p:spPr>
+        <p:style>
+          <a:lnRef idx="1">
+            <a:schemeClr val="accent1"/>
+          </a:lnRef>
+          <a:fillRef idx="3">
+            <a:schemeClr val="accent1"/>
+          </a:fillRef>
+          <a:effectRef idx="2">
+            <a:schemeClr val="accent1"/>
+          </a:effectRef>
+          <a:fontRef idx="minor">
+            <a:schemeClr val="lt1"/>
+          </a:fontRef>
+        </p:style>
+        <p:txBody>
+          <a:bodyPr rtlCol="0" anchor="ctr"/>
+          <a:lstStyle/>
+          <a:p>
+            <a:pPr algn="ctr"/>
+          </a:p>
+        </p:txBody>
+      </p:sp>
+      <p:sp>
+        <p:nvSpPr>
+          <p:cNvPr id="3" name="Rectangle 2"/>
+          <p:cNvSpPr/>
+          <p:nvPr/>
+        </p:nvSpPr>
+        <p:spPr>
+          <a:xfrm>
+            <a:off x="0" y="960120"/>
+            <a:ext cx="12191695" cy="41148"/>
+          </a:xfrm>
+          <a:prstGeom prst="rect">
+            <a:avLst/>
+          </a:prstGeom>
+          <a:solidFill>
+            <a:srgbClr val="FFD000"/>
+          </a:solidFill>
+          <a:ln>
+            <a:noFill/>
+          </a:ln>
+        </p:spPr>
+        <p:style>
+          <a:lnRef idx="1">
+            <a:schemeClr val="accent1"/>
+          </a:lnRef>
+          <a:fillRef idx="3">
+            <a:schemeClr val="accent1"/>
+          </a:fillRef>
+          <a:effectRef idx="2">
+            <a:schemeClr val="accent1"/>
+          </a:effectRef>
+          <a:fontRef idx="minor">
+            <a:schemeClr val="lt1"/>
+          </a:fontRef>
+        </p:style>
+        <p:txBody>
+          <a:bodyPr rtlCol="0" anchor="ctr"/>
+          <a:lstStyle/>
+          <a:p>
+            <a:pPr algn="ctr"/>
+          </a:p>
+        </p:txBody>
+      </p:sp>
+      <p:sp>
+        <p:nvSpPr>
+          <p:cNvPr id="4" name="TextBox 3"/>
+          <p:cNvSpPr txBox="1"/>
+          <p:nvPr/>
+        </p:nvSpPr>
+        <p:spPr>
+          <a:xfrm>
+            <a:off x="457200" y="164592"/>
+            <a:ext cx="11277295" cy="502920"/>
+          </a:xfrm>
+          <a:prstGeom prst="rect">
+            <a:avLst/>
+          </a:prstGeom>
+          <a:noFill/>
+        </p:spPr>
+        <p:txBody>
+          <a:bodyPr wrap="square">
+            <a:spAutoFit/>
+          </a:bodyPr>
+          <a:lstStyle/>
+          <a:p>
+            <a:r>
+              <a:rPr sz="2600" b="1" i="0">
+                <a:solidFill>
+                  <a:srgbClr val="FFFFFF"/>
+                </a:solidFill>
+                <a:latin typeface="Calibri"/>
+              </a:rPr>
+              <a:t>Antes de entregar — autochequeo</a:t>
+            </a:r>
+          </a:p>
+        </p:txBody>
+      </p:sp>
+      <p:sp>
+        <p:nvSpPr>
+          <p:cNvPr id="5" name="Rounded Rectangle 4"/>
+          <p:cNvSpPr/>
+          <p:nvPr/>
+        </p:nvSpPr>
+        <p:spPr>
+          <a:xfrm>
+            <a:off x="457200" y="1261872"/>
+            <a:ext cx="11277295" cy="566928"/>
+          </a:xfrm>
+          <a:prstGeom prst="roundRect">
+            <a:avLst>
+              <a:gd name="adj" fmla="val 12000"/>
+            </a:avLst>
+          </a:prstGeom>
+          <a:solidFill>
+            <a:srgbClr val="F2F2F2"/>
+          </a:solidFill>
+          <a:ln>
+            <a:noFill/>
+          </a:ln>
+        </p:spPr>
+        <p:style>
+          <a:lnRef idx="1">
+            <a:schemeClr val="accent1"/>
+          </a:lnRef>
+          <a:fillRef idx="3">
+            <a:schemeClr val="accent1"/>
+          </a:fillRef>
+          <a:effectRef idx="2">
+            <a:schemeClr val="accent1"/>
+          </a:effectRef>
+          <a:fontRef idx="minor">
+            <a:schemeClr val="lt1"/>
+          </a:fontRef>
+        </p:style>
+        <p:txBody>
+          <a:bodyPr rtlCol="0" anchor="ctr"/>
+          <a:lstStyle/>
+          <a:p>
+            <a:pPr algn="ctr"/>
+          </a:p>
+        </p:txBody>
+      </p:sp>
+      <p:sp>
+        <p:nvSpPr>
+          <p:cNvPr id="6" name="Rectangle 5"/>
+          <p:cNvSpPr/>
+          <p:nvPr/>
+        </p:nvSpPr>
+        <p:spPr>
+          <a:xfrm>
+            <a:off x="640080" y="1408175"/>
+            <a:ext cx="274320" cy="274320"/>
+          </a:xfrm>
+          <a:prstGeom prst="rect">
+            <a:avLst/>
+          </a:prstGeom>
+          <a:solidFill>
+            <a:srgbClr val="FFFFFF"/>
+          </a:solidFill>
+          <a:ln>
+            <a:solidFill>
+              <a:srgbClr val="333333"/>
+            </a:solidFill>
+          </a:ln>
+        </p:spPr>
+        <p:style>
+          <a:lnRef idx="1">
+            <a:schemeClr val="accent1"/>
+          </a:lnRef>
+          <a:fillRef idx="3">
+            <a:schemeClr val="accent1"/>
+          </a:fillRef>
+          <a:effectRef idx="2">
+            <a:schemeClr val="accent1"/>
+          </a:effectRef>
+          <a:fontRef idx="minor">
+            <a:schemeClr val="lt1"/>
+          </a:fontRef>
+        </p:style>
+        <p:txBody>
+          <a:bodyPr rtlCol="0" anchor="ctr"/>
+          <a:lstStyle/>
+          <a:p>
+            <a:pPr algn="ctr"/>
+          </a:p>
+        </p:txBody>
+      </p:sp>
+      <p:sp>
+        <p:nvSpPr>
+          <p:cNvPr id="7" name="Rectangle 6"/>
+          <p:cNvSpPr/>
+          <p:nvPr/>
+        </p:nvSpPr>
+        <p:spPr>
+          <a:xfrm>
+            <a:off x="640080" y="1408175"/>
+            <a:ext cx="73152" cy="274320"/>
           </a:xfrm>
           <a:prstGeom prst="rect">
             <a:avLst/>
@@ -6182,40 +7159,16 @@
           </a:p>
         </p:txBody>
       </p:sp>
-      <p:pic>
-        <p:nvPicPr>
-          <p:cNvPr id="3" name="Picture 2" descr="logo_uniajc_color.png"/>
-          <p:cNvPicPr>
-            <a:picLocks noChangeAspect="1"/>
-          </p:cNvPicPr>
-          <p:nvPr/>
-        </p:nvPicPr>
-        <p:blipFill>
-          <a:blip r:embed="rId2"/>
-          <a:stretch>
-            <a:fillRect/>
-          </a:stretch>
-        </p:blipFill>
-        <p:spPr>
-          <a:xfrm>
-            <a:off x="10271455" y="5998464"/>
-            <a:ext cx="1463040" cy="643233"/>
-          </a:xfrm>
-          <a:prstGeom prst="rect">
-            <a:avLst/>
-          </a:prstGeom>
-        </p:spPr>
-      </p:pic>
-      <p:sp>
-        <p:nvSpPr>
-          <p:cNvPr id="4" name="TextBox 3"/>
+      <p:sp>
+        <p:nvSpPr>
+          <p:cNvPr id="8" name="TextBox 7"/>
           <p:cNvSpPr txBox="1"/>
           <p:nvPr/>
         </p:nvSpPr>
         <p:spPr>
           <a:xfrm>
-            <a:off x="457200" y="1737360"/>
-            <a:ext cx="11277295" cy="1097280"/>
+            <a:off x="1097280" y="1353312"/>
+            <a:ext cx="10362895" cy="402336"/>
           </a:xfrm>
           <a:prstGeom prst="rect">
             <a:avLst/>
@@ -6226,29 +7179,358 @@
           <a:bodyPr wrap="square" anchor="ctr"/>
           <a:lstStyle/>
           <a:p>
+            <a:r>
+              <a:rPr sz="1500" b="0" i="0">
+                <a:solidFill>
+                  <a:srgbClr val="333333"/>
+                </a:solidFill>
+                <a:latin typeface="Calibri"/>
+              </a:rPr>
+              <a:t>Si le leo esta historia al Dr. Ramirez sin explicarle nada, entiende quien gana algo y que gana, o solo entiende que hay una pantalla nueva?</a:t>
+            </a:r>
+          </a:p>
+        </p:txBody>
+      </p:sp>
+      <p:sp>
+        <p:nvSpPr>
+          <p:cNvPr id="9" name="Rounded Rectangle 8"/>
+          <p:cNvSpPr/>
+          <p:nvPr/>
+        </p:nvSpPr>
+        <p:spPr>
+          <a:xfrm>
+            <a:off x="457200" y="1938528"/>
+            <a:ext cx="11277295" cy="566928"/>
+          </a:xfrm>
+          <a:prstGeom prst="roundRect">
+            <a:avLst>
+              <a:gd name="adj" fmla="val 12000"/>
+            </a:avLst>
+          </a:prstGeom>
+          <a:solidFill>
+            <a:srgbClr val="F2F2F2"/>
+          </a:solidFill>
+          <a:ln>
+            <a:noFill/>
+          </a:ln>
+        </p:spPr>
+        <p:style>
+          <a:lnRef idx="1">
+            <a:schemeClr val="accent1"/>
+          </a:lnRef>
+          <a:fillRef idx="3">
+            <a:schemeClr val="accent1"/>
+          </a:fillRef>
+          <a:effectRef idx="2">
+            <a:schemeClr val="accent1"/>
+          </a:effectRef>
+          <a:fontRef idx="minor">
+            <a:schemeClr val="lt1"/>
+          </a:fontRef>
+        </p:style>
+        <p:txBody>
+          <a:bodyPr rtlCol="0" anchor="ctr"/>
+          <a:lstStyle/>
+          <a:p>
             <a:pPr algn="ctr"/>
-            <a:r>
-              <a:rPr sz="3400" b="1" i="0">
-                <a:solidFill>
-                  <a:srgbClr val="095292"/>
-                </a:solidFill>
-                <a:latin typeface="Calibri"/>
-              </a:rPr>
-              <a:t>Clase 7 · VetCare avanza</a:t>
-            </a:r>
-          </a:p>
-        </p:txBody>
-      </p:sp>
-      <p:sp>
-        <p:nvSpPr>
-          <p:cNvPr id="5" name="TextBox 4"/>
+          </a:p>
+        </p:txBody>
+      </p:sp>
+      <p:sp>
+        <p:nvSpPr>
+          <p:cNvPr id="10" name="Rectangle 9"/>
+          <p:cNvSpPr/>
+          <p:nvPr/>
+        </p:nvSpPr>
+        <p:spPr>
+          <a:xfrm>
+            <a:off x="640080" y="2084832"/>
+            <a:ext cx="274320" cy="274320"/>
+          </a:xfrm>
+          <a:prstGeom prst="rect">
+            <a:avLst/>
+          </a:prstGeom>
+          <a:solidFill>
+            <a:srgbClr val="FFFFFF"/>
+          </a:solidFill>
+          <a:ln>
+            <a:solidFill>
+              <a:srgbClr val="333333"/>
+            </a:solidFill>
+          </a:ln>
+        </p:spPr>
+        <p:style>
+          <a:lnRef idx="1">
+            <a:schemeClr val="accent1"/>
+          </a:lnRef>
+          <a:fillRef idx="3">
+            <a:schemeClr val="accent1"/>
+          </a:fillRef>
+          <a:effectRef idx="2">
+            <a:schemeClr val="accent1"/>
+          </a:effectRef>
+          <a:fontRef idx="minor">
+            <a:schemeClr val="lt1"/>
+          </a:fontRef>
+        </p:style>
+        <p:txBody>
+          <a:bodyPr rtlCol="0" anchor="ctr"/>
+          <a:lstStyle/>
+          <a:p>
+            <a:pPr algn="ctr"/>
+          </a:p>
+        </p:txBody>
+      </p:sp>
+      <p:sp>
+        <p:nvSpPr>
+          <p:cNvPr id="11" name="Rectangle 10"/>
+          <p:cNvSpPr/>
+          <p:nvPr/>
+        </p:nvSpPr>
+        <p:spPr>
+          <a:xfrm>
+            <a:off x="640080" y="2084832"/>
+            <a:ext cx="73152" cy="274320"/>
+          </a:xfrm>
+          <a:prstGeom prst="rect">
+            <a:avLst/>
+          </a:prstGeom>
+          <a:solidFill>
+            <a:srgbClr val="269CCB"/>
+          </a:solidFill>
+          <a:ln>
+            <a:noFill/>
+          </a:ln>
+        </p:spPr>
+        <p:style>
+          <a:lnRef idx="1">
+            <a:schemeClr val="accent1"/>
+          </a:lnRef>
+          <a:fillRef idx="3">
+            <a:schemeClr val="accent1"/>
+          </a:fillRef>
+          <a:effectRef idx="2">
+            <a:schemeClr val="accent1"/>
+          </a:effectRef>
+          <a:fontRef idx="minor">
+            <a:schemeClr val="lt1"/>
+          </a:fontRef>
+        </p:style>
+        <p:txBody>
+          <a:bodyPr rtlCol="0" anchor="ctr"/>
+          <a:lstStyle/>
+          <a:p>
+            <a:pPr algn="ctr"/>
+          </a:p>
+        </p:txBody>
+      </p:sp>
+      <p:sp>
+        <p:nvSpPr>
+          <p:cNvPr id="12" name="TextBox 11"/>
           <p:cNvSpPr txBox="1"/>
           <p:nvPr/>
         </p:nvSpPr>
         <p:spPr>
           <a:xfrm>
-            <a:off x="457200" y="3017520"/>
-            <a:ext cx="11277295" cy="1645920"/>
+            <a:off x="1097280" y="2029968"/>
+            <a:ext cx="10362895" cy="402336"/>
+          </a:xfrm>
+          <a:prstGeom prst="rect">
+            <a:avLst/>
+          </a:prstGeom>
+          <a:noFill/>
+        </p:spPr>
+        <p:txBody>
+          <a:bodyPr wrap="square" anchor="ctr"/>
+          <a:lstStyle/>
+          <a:p>
+            <a:r>
+              <a:rPr sz="1500" b="0" i="0">
+                <a:solidFill>
+                  <a:srgbClr val="333333"/>
+                </a:solidFill>
+                <a:latin typeface="Calibri"/>
+              </a:rPr>
+              <a:t>El 'para' de mi historia esta repitiendo la accion con otras palabras, o dice de verdad el beneficio para la clinica?</a:t>
+            </a:r>
+          </a:p>
+        </p:txBody>
+      </p:sp>
+      <p:sp>
+        <p:nvSpPr>
+          <p:cNvPr id="13" name="Rounded Rectangle 12"/>
+          <p:cNvSpPr/>
+          <p:nvPr/>
+        </p:nvSpPr>
+        <p:spPr>
+          <a:xfrm>
+            <a:off x="457200" y="2615184"/>
+            <a:ext cx="11277295" cy="566928"/>
+          </a:xfrm>
+          <a:prstGeom prst="roundRect">
+            <a:avLst>
+              <a:gd name="adj" fmla="val 12000"/>
+            </a:avLst>
+          </a:prstGeom>
+          <a:solidFill>
+            <a:srgbClr val="F2F2F2"/>
+          </a:solidFill>
+          <a:ln>
+            <a:noFill/>
+          </a:ln>
+        </p:spPr>
+        <p:style>
+          <a:lnRef idx="1">
+            <a:schemeClr val="accent1"/>
+          </a:lnRef>
+          <a:fillRef idx="3">
+            <a:schemeClr val="accent1"/>
+          </a:fillRef>
+          <a:effectRef idx="2">
+            <a:schemeClr val="accent1"/>
+          </a:effectRef>
+          <a:fontRef idx="minor">
+            <a:schemeClr val="lt1"/>
+          </a:fontRef>
+        </p:style>
+        <p:txBody>
+          <a:bodyPr rtlCol="0" anchor="ctr"/>
+          <a:lstStyle/>
+          <a:p>
+            <a:pPr algn="ctr"/>
+          </a:p>
+        </p:txBody>
+      </p:sp>
+      <p:sp>
+        <p:nvSpPr>
+          <p:cNvPr id="14" name="Rectangle 13"/>
+          <p:cNvSpPr/>
+          <p:nvPr/>
+        </p:nvSpPr>
+        <p:spPr>
+          <a:xfrm>
+            <a:off x="640080" y="2761488"/>
+            <a:ext cx="274320" cy="274320"/>
+          </a:xfrm>
+          <a:prstGeom prst="rect">
+            <a:avLst/>
+          </a:prstGeom>
+          <a:solidFill>
+            <a:srgbClr val="FFFFFF"/>
+          </a:solidFill>
+          <a:ln>
+            <a:solidFill>
+              <a:srgbClr val="333333"/>
+            </a:solidFill>
+          </a:ln>
+        </p:spPr>
+        <p:style>
+          <a:lnRef idx="1">
+            <a:schemeClr val="accent1"/>
+          </a:lnRef>
+          <a:fillRef idx="3">
+            <a:schemeClr val="accent1"/>
+          </a:fillRef>
+          <a:effectRef idx="2">
+            <a:schemeClr val="accent1"/>
+          </a:effectRef>
+          <a:fontRef idx="minor">
+            <a:schemeClr val="lt1"/>
+          </a:fontRef>
+        </p:style>
+        <p:txBody>
+          <a:bodyPr rtlCol="0" anchor="ctr"/>
+          <a:lstStyle/>
+          <a:p>
+            <a:pPr algn="ctr"/>
+          </a:p>
+        </p:txBody>
+      </p:sp>
+      <p:sp>
+        <p:nvSpPr>
+          <p:cNvPr id="15" name="Rectangle 14"/>
+          <p:cNvSpPr/>
+          <p:nvPr/>
+        </p:nvSpPr>
+        <p:spPr>
+          <a:xfrm>
+            <a:off x="640080" y="2761488"/>
+            <a:ext cx="73152" cy="274320"/>
+          </a:xfrm>
+          <a:prstGeom prst="rect">
+            <a:avLst/>
+          </a:prstGeom>
+          <a:solidFill>
+            <a:srgbClr val="269CCB"/>
+          </a:solidFill>
+          <a:ln>
+            <a:noFill/>
+          </a:ln>
+        </p:spPr>
+        <p:style>
+          <a:lnRef idx="1">
+            <a:schemeClr val="accent1"/>
+          </a:lnRef>
+          <a:fillRef idx="3">
+            <a:schemeClr val="accent1"/>
+          </a:fillRef>
+          <a:effectRef idx="2">
+            <a:schemeClr val="accent1"/>
+          </a:effectRef>
+          <a:fontRef idx="minor">
+            <a:schemeClr val="lt1"/>
+          </a:fontRef>
+        </p:style>
+        <p:txBody>
+          <a:bodyPr rtlCol="0" anchor="ctr"/>
+          <a:lstStyle/>
+          <a:p>
+            <a:pPr algn="ctr"/>
+          </a:p>
+        </p:txBody>
+      </p:sp>
+      <p:sp>
+        <p:nvSpPr>
+          <p:cNvPr id="16" name="TextBox 15"/>
+          <p:cNvSpPr txBox="1"/>
+          <p:nvPr/>
+        </p:nvSpPr>
+        <p:spPr>
+          <a:xfrm>
+            <a:off x="1097280" y="2706624"/>
+            <a:ext cx="10362895" cy="402336"/>
+          </a:xfrm>
+          <a:prstGeom prst="rect">
+            <a:avLst/>
+          </a:prstGeom>
+          <a:noFill/>
+        </p:spPr>
+        <p:txBody>
+          <a:bodyPr wrap="square" anchor="ctr"/>
+          <a:lstStyle/>
+          <a:p>
+            <a:r>
+              <a:rPr sz="1500" b="0" i="0">
+                <a:solidFill>
+                  <a:srgbClr val="333333"/>
+                </a:solidFill>
+                <a:latin typeface="Calibri"/>
+              </a:rPr>
+              <a:t>Si esta historia se entregara sola, sin ninguna otra, el usuario podria hacer algo completo de principio a fin?</a:t>
+            </a:r>
+          </a:p>
+        </p:txBody>
+      </p:sp>
+      <p:sp>
+        <p:nvSpPr>
+          <p:cNvPr id="17" name="TextBox 16"/>
+          <p:cNvSpPr txBox="1"/>
+          <p:nvPr/>
+        </p:nvSpPr>
+        <p:spPr>
+          <a:xfrm>
+            <a:off x="11185855" y="6473952"/>
+            <a:ext cx="640080" cy="274320"/>
           </a:xfrm>
           <a:prstGeom prst="rect">
             <a:avLst/>
@@ -6261,65 +7543,141 @@
           </a:bodyPr>
           <a:lstStyle/>
           <a:p>
-            <a:pPr algn="ctr">
-              <a:spcAft>
-                <a:spcPts val="600"/>
-              </a:spcAft>
-            </a:pPr>
-            <a:r>
-              <a:rPr sz="1600" b="0" i="0">
-                <a:solidFill>
-                  <a:srgbClr val="333333"/>
-                </a:solidFill>
-                <a:latin typeface="Calibri"/>
-              </a:rPr>
-              <a:t>Queda listo el backlog inicial de VetCare: dos epicas descompuestas en ocho historias priorizadas, con criterios de aceptacion y talla en puntos.</a:t>
-            </a:r>
-          </a:p>
-          <a:p>
-            <a:pPr algn="ctr">
-              <a:spcAft>
-                <a:spcPts val="600"/>
-              </a:spcAft>
-            </a:pPr>
-            <a:r>
-              <a:rPr sz="1600" b="0" i="0">
-                <a:solidFill>
-                  <a:srgbClr val="333333"/>
-                </a:solidFill>
-                <a:latin typeface="Calibri"/>
-              </a:rPr>
-              <a:t>Entregable: Tablero de backlog con 8 historias en formato Como/quiero/para, cada una con 2 o 3 criterios de aceptacion en Dado-Cuando-Entonces, estimacion en puntos y trazabilidad al RF de la clase 6, subido a la plataforma del curso.</a:t>
-            </a:r>
-          </a:p>
-          <a:p>
-            <a:pPr algn="ctr">
-              <a:spcAft>
-                <a:spcPts val="600"/>
-              </a:spcAft>
-            </a:pPr>
-            <a:r>
-              <a:rPr sz="1600" b="0" i="0">
-                <a:solidFill>
-                  <a:srgbClr val="333333"/>
-                </a:solidFill>
-                <a:latin typeface="Calibri"/>
-              </a:rPr>
-              <a:t>Siguiente clase: continuamos el hilo del PI</a:t>
-            </a:r>
-          </a:p>
-        </p:txBody>
-      </p:sp>
-      <p:sp>
-        <p:nvSpPr>
-          <p:cNvPr id="6" name="TextBox 5"/>
+            <a:pPr algn="r"/>
+            <a:r>
+              <a:rPr sz="1100" b="0" i="0">
+                <a:solidFill>
+                  <a:srgbClr val="666666"/>
+                </a:solidFill>
+                <a:latin typeface="Calibri"/>
+              </a:rPr>
+              <a:t>17</a:t>
+            </a:r>
+          </a:p>
+        </p:txBody>
+      </p:sp>
+    </p:spTree>
+  </p:cSld>
+  <p:clrMapOvr>
+    <a:masterClrMapping/>
+  </p:clrMapOvr>
+</p:sld>
+</file>
+
+<file path=ppt/slides/slide18.xml><?xml version="1.0" encoding="utf-8"?>
+<p:sld xmlns:a="http://schemas.openxmlformats.org/drawingml/2006/main" xmlns:p="http://schemas.openxmlformats.org/presentationml/2006/main" xmlns:r="http://schemas.openxmlformats.org/officeDocument/2006/relationships">
+  <p:cSld>
+    <p:bg>
+      <p:bgPr>
+        <a:solidFill>
+          <a:srgbClr val="FFFFFF"/>
+        </a:solidFill>
+        <a:effectLst/>
+      </p:bgPr>
+    </p:bg>
+    <p:spTree>
+      <p:nvGrpSpPr>
+        <p:cNvPr id="1" name=""/>
+        <p:cNvGrpSpPr/>
+        <p:nvPr/>
+      </p:nvGrpSpPr>
+      <p:grpSpPr/>
+      <p:sp>
+        <p:nvSpPr>
+          <p:cNvPr id="2" name="Rectangle 1"/>
+          <p:cNvSpPr/>
+          <p:nvPr/>
+        </p:nvSpPr>
+        <p:spPr>
+          <a:xfrm>
+            <a:off x="0" y="0"/>
+            <a:ext cx="12191695" cy="960120"/>
+          </a:xfrm>
+          <a:prstGeom prst="rect">
+            <a:avLst/>
+          </a:prstGeom>
+          <a:solidFill>
+            <a:srgbClr val="095292"/>
+          </a:solidFill>
+          <a:ln>
+            <a:noFill/>
+          </a:ln>
+        </p:spPr>
+        <p:style>
+          <a:lnRef idx="1">
+            <a:schemeClr val="accent1"/>
+          </a:lnRef>
+          <a:fillRef idx="3">
+            <a:schemeClr val="accent1"/>
+          </a:fillRef>
+          <a:effectRef idx="2">
+            <a:schemeClr val="accent1"/>
+          </a:effectRef>
+          <a:fontRef idx="minor">
+            <a:schemeClr val="lt1"/>
+          </a:fontRef>
+        </p:style>
+        <p:txBody>
+          <a:bodyPr rtlCol="0" anchor="ctr"/>
+          <a:lstStyle/>
+          <a:p>
+            <a:pPr algn="ctr"/>
+          </a:p>
+        </p:txBody>
+      </p:sp>
+      <p:sp>
+        <p:nvSpPr>
+          <p:cNvPr id="3" name="Rectangle 2"/>
+          <p:cNvSpPr/>
+          <p:nvPr/>
+        </p:nvSpPr>
+        <p:spPr>
+          <a:xfrm>
+            <a:off x="0" y="960120"/>
+            <a:ext cx="12191695" cy="41148"/>
+          </a:xfrm>
+          <a:prstGeom prst="rect">
+            <a:avLst/>
+          </a:prstGeom>
+          <a:solidFill>
+            <a:srgbClr val="FFD000"/>
+          </a:solidFill>
+          <a:ln>
+            <a:noFill/>
+          </a:ln>
+        </p:spPr>
+        <p:style>
+          <a:lnRef idx="1">
+            <a:schemeClr val="accent1"/>
+          </a:lnRef>
+          <a:fillRef idx="3">
+            <a:schemeClr val="accent1"/>
+          </a:fillRef>
+          <a:effectRef idx="2">
+            <a:schemeClr val="accent1"/>
+          </a:effectRef>
+          <a:fontRef idx="minor">
+            <a:schemeClr val="lt1"/>
+          </a:fontRef>
+        </p:style>
+        <p:txBody>
+          <a:bodyPr rtlCol="0" anchor="ctr"/>
+          <a:lstStyle/>
+          <a:p>
+            <a:pPr algn="ctr"/>
+          </a:p>
+        </p:txBody>
+      </p:sp>
+      <p:sp>
+        <p:nvSpPr>
+          <p:cNvPr id="4" name="TextBox 3"/>
           <p:cNvSpPr txBox="1"/>
           <p:nvPr/>
         </p:nvSpPr>
         <p:spPr>
           <a:xfrm>
-            <a:off x="457200" y="4754880"/>
-            <a:ext cx="11277295" cy="640080"/>
+            <a:off x="457200" y="164592"/>
+            <a:ext cx="11277295" cy="502920"/>
           </a:xfrm>
           <a:prstGeom prst="rect">
             <a:avLst/>
@@ -6332,15 +7690,871 @@
           </a:bodyPr>
           <a:lstStyle/>
           <a:p>
+            <a:r>
+              <a:rPr sz="2600" b="1" i="0">
+                <a:solidFill>
+                  <a:srgbClr val="FFFFFF"/>
+                </a:solidFill>
+                <a:latin typeface="Calibri"/>
+              </a:rPr>
+              <a:t>Criterios de exito / entregable</a:t>
+            </a:r>
+          </a:p>
+        </p:txBody>
+      </p:sp>
+      <p:sp>
+        <p:nvSpPr>
+          <p:cNvPr id="5" name="TextBox 4"/>
+          <p:cNvSpPr txBox="1"/>
+          <p:nvPr/>
+        </p:nvSpPr>
+        <p:spPr>
+          <a:xfrm>
+            <a:off x="457200" y="1170432"/>
+            <a:ext cx="11277295" cy="5230368"/>
+          </a:xfrm>
+          <a:prstGeom prst="rect">
+            <a:avLst/>
+          </a:prstGeom>
+          <a:noFill/>
+        </p:spPr>
+        <p:txBody>
+          <a:bodyPr wrap="square">
+            <a:spAutoFit/>
+          </a:bodyPr>
+          <a:lstStyle/>
+          <a:p>
+            <a:pPr>
+              <a:spcAft>
+                <a:spcPts val="800"/>
+              </a:spcAft>
+            </a:pPr>
+            <a:r>
+              <a:rPr sz="2000" b="0" i="0">
+                <a:solidFill>
+                  <a:srgbClr val="333333"/>
+                </a:solidFill>
+                <a:latin typeface="Calibri"/>
+              </a:rPr>
+              <a:t>–   </a:t>
+            </a:r>
+            <a:r>
+              <a:rPr sz="2000" b="1" i="0">
+                <a:solidFill>
+                  <a:srgbClr val="333333"/>
+                </a:solidFill>
+                <a:latin typeface="Calibri"/>
+              </a:rPr>
+              <a:t>Entregable:</a:t>
+            </a:r>
+            <a:r>
+              <a:rPr sz="2000" b="0" i="0">
+                <a:solidFill>
+                  <a:srgbClr val="333333"/>
+                </a:solidFill>
+                <a:latin typeface="Calibri"/>
+              </a:rPr>
+              <a:t> Tablero de backlog con 8 historias en formato Como/quiero/para, cada una con 2 o 3 criterios de aceptacion en Dado-Cuando-Entonces, estimacion en puntos y trazabilidad al RF de la clase 6, subido a la plataforma del curso.</a:t>
+            </a:r>
+          </a:p>
+          <a:p>
+            <a:pPr>
+              <a:spcAft>
+                <a:spcPts val="800"/>
+              </a:spcAft>
+            </a:pPr>
+            <a:r>
+              <a:rPr sz="2000" b="0" i="0">
+                <a:solidFill>
+                  <a:srgbClr val="333333"/>
+                </a:solidFill>
+                <a:latin typeface="Calibri"/>
+              </a:rPr>
+              <a:t>–   </a:t>
+            </a:r>
+            <a:r>
+              <a:rPr sz="2000" b="1" i="0">
+                <a:solidFill>
+                  <a:srgbClr val="333333"/>
+                </a:solidFill>
+                <a:latin typeface="Calibri"/>
+              </a:rPr>
+              <a:t>Exito:</a:t>
+            </a:r>
+            <a:r>
+              <a:rPr sz="2000" b="0" i="0">
+                <a:solidFill>
+                  <a:srgbClr val="333333"/>
+                </a:solidFill>
+                <a:latin typeface="Calibri"/>
+              </a:rPr>
+              <a:t> Las 8 historias usan roles concretos de la clinica Huellitas y ninguna emplea el rol generico usuario.</a:t>
+            </a:r>
+          </a:p>
+          <a:p>
+            <a:pPr>
+              <a:spcAft>
+                <a:spcPts val="800"/>
+              </a:spcAft>
+            </a:pPr>
+            <a:r>
+              <a:rPr sz="2000" b="0" i="0">
+                <a:solidFill>
+                  <a:srgbClr val="333333"/>
+                </a:solidFill>
+                <a:latin typeface="Calibri"/>
+              </a:rPr>
+              <a:t>–   </a:t>
+            </a:r>
+            <a:r>
+              <a:rPr sz="2000" b="1" i="0">
+                <a:solidFill>
+                  <a:srgbClr val="333333"/>
+                </a:solidFill>
+                <a:latin typeface="Calibri"/>
+              </a:rPr>
+              <a:t>Exito:</a:t>
+            </a:r>
+            <a:r>
+              <a:rPr sz="2000" b="0" i="0">
+                <a:solidFill>
+                  <a:srgbClr val="333333"/>
+                </a:solidFill>
+                <a:latin typeface="Calibri"/>
+              </a:rPr>
+              <a:t> Cada historia tiene minimo 2 criterios de aceptacion en Dado-Cuando-Entonces y al menos cuatro incluyen un camino alterno o de error.</a:t>
+            </a:r>
+          </a:p>
+          <a:p>
+            <a:pPr>
+              <a:spcAft>
+                <a:spcPts val="800"/>
+              </a:spcAft>
+            </a:pPr>
+            <a:r>
+              <a:rPr sz="2000" b="0" i="0">
+                <a:solidFill>
+                  <a:srgbClr val="333333"/>
+                </a:solidFill>
+                <a:latin typeface="Calibri"/>
+              </a:rPr>
+              <a:t>–   </a:t>
+            </a:r>
+            <a:r>
+              <a:rPr sz="2000" b="1" i="0">
+                <a:solidFill>
+                  <a:srgbClr val="333333"/>
+                </a:solidFill>
+                <a:latin typeface="Calibri"/>
+              </a:rPr>
+              <a:t>Exito:</a:t>
+            </a:r>
+            <a:r>
+              <a:rPr sz="2000" b="0" i="0">
+                <a:solidFill>
+                  <a:srgbClr val="333333"/>
+                </a:solidFill>
+                <a:latin typeface="Calibri"/>
+              </a:rPr>
+              <a:t> Todas las historias pasan INVEST con al menos cinco de las seis letras en si, y ninguna esta cortada por capas tecnicas.</a:t>
+            </a:r>
+          </a:p>
+          <a:p>
+            <a:pPr>
+              <a:spcAft>
+                <a:spcPts val="800"/>
+              </a:spcAft>
+            </a:pPr>
+            <a:r>
+              <a:rPr sz="2000" b="0" i="0">
+                <a:solidFill>
+                  <a:srgbClr val="333333"/>
+                </a:solidFill>
+                <a:latin typeface="Calibri"/>
+              </a:rPr>
+              <a:t>–   </a:t>
+            </a:r>
+            <a:r>
+              <a:rPr sz="2000" b="1" i="0">
+                <a:solidFill>
+                  <a:srgbClr val="333333"/>
+                </a:solidFill>
+                <a:latin typeface="Calibri"/>
+              </a:rPr>
+              <a:t>Exito:</a:t>
+            </a:r>
+            <a:r>
+              <a:rPr sz="2000" b="0" i="0">
+                <a:solidFill>
+                  <a:srgbClr val="333333"/>
+                </a:solidFill>
+                <a:latin typeface="Calibri"/>
+              </a:rPr>
+              <a:t> Cada historia trae estimacion en puntos, prioridad y el RF de origen; ninguna historia supera los 8 puntos sin partirse.</a:t>
+            </a:r>
+          </a:p>
+          <a:p>
+            <a:pPr>
+              <a:spcAft>
+                <a:spcPts val="800"/>
+              </a:spcAft>
+            </a:pPr>
+            <a:r>
+              <a:rPr sz="2000" b="0" i="0">
+                <a:solidFill>
+                  <a:srgbClr val="333333"/>
+                </a:solidFill>
+                <a:latin typeface="Calibri"/>
+              </a:rPr>
+              <a:t>–   </a:t>
+            </a:r>
+            <a:r>
+              <a:rPr sz="2000" b="1" i="0">
+                <a:solidFill>
+                  <a:srgbClr val="333333"/>
+                </a:solidFill>
+                <a:latin typeface="Calibri"/>
+              </a:rPr>
+              <a:t>Entrega en la plataforma del curso</a:t>
+            </a:r>
+            <a:r>
+              <a:rPr sz="2000" b="0" i="0">
+                <a:solidFill>
+                  <a:srgbClr val="333333"/>
+                </a:solidFill>
+                <a:latin typeface="Calibri"/>
+              </a:rPr>
+              <a:t> — en la fecha que indique el docente.</a:t>
+            </a:r>
+          </a:p>
+        </p:txBody>
+      </p:sp>
+      <p:sp>
+        <p:nvSpPr>
+          <p:cNvPr id="6" name="TextBox 5"/>
+          <p:cNvSpPr txBox="1"/>
+          <p:nvPr/>
+        </p:nvSpPr>
+        <p:spPr>
+          <a:xfrm>
+            <a:off x="11185855" y="6473952"/>
+            <a:ext cx="640080" cy="274320"/>
+          </a:xfrm>
+          <a:prstGeom prst="rect">
+            <a:avLst/>
+          </a:prstGeom>
+          <a:noFill/>
+        </p:spPr>
+        <p:txBody>
+          <a:bodyPr wrap="square">
+            <a:spAutoFit/>
+          </a:bodyPr>
+          <a:lstStyle/>
+          <a:p>
+            <a:pPr algn="r"/>
+            <a:r>
+              <a:rPr sz="1100" b="0" i="0">
+                <a:solidFill>
+                  <a:srgbClr val="666666"/>
+                </a:solidFill>
+                <a:latin typeface="Calibri"/>
+              </a:rPr>
+              <a:t>18</a:t>
+            </a:r>
+          </a:p>
+        </p:txBody>
+      </p:sp>
+    </p:spTree>
+  </p:cSld>
+  <p:clrMapOvr>
+    <a:masterClrMapping/>
+  </p:clrMapOvr>
+</p:sld>
+</file>
+
+<file path=ppt/slides/slide19.xml><?xml version="1.0" encoding="utf-8"?>
+<p:sld xmlns:a="http://schemas.openxmlformats.org/drawingml/2006/main" xmlns:p="http://schemas.openxmlformats.org/presentationml/2006/main" xmlns:r="http://schemas.openxmlformats.org/officeDocument/2006/relationships">
+  <p:cSld>
+    <p:bg>
+      <p:bgPr>
+        <a:solidFill>
+          <a:srgbClr val="FFFFFF"/>
+        </a:solidFill>
+        <a:effectLst/>
+      </p:bgPr>
+    </p:bg>
+    <p:spTree>
+      <p:nvGrpSpPr>
+        <p:cNvPr id="1" name=""/>
+        <p:cNvGrpSpPr/>
+        <p:nvPr/>
+      </p:nvGrpSpPr>
+      <p:grpSpPr/>
+      <p:sp>
+        <p:nvSpPr>
+          <p:cNvPr id="2" name="Rectangle 1"/>
+          <p:cNvSpPr/>
+          <p:nvPr/>
+        </p:nvSpPr>
+        <p:spPr>
+          <a:xfrm>
+            <a:off x="0" y="0"/>
+            <a:ext cx="12191695" cy="960120"/>
+          </a:xfrm>
+          <a:prstGeom prst="rect">
+            <a:avLst/>
+          </a:prstGeom>
+          <a:solidFill>
+            <a:srgbClr val="095292"/>
+          </a:solidFill>
+          <a:ln>
+            <a:noFill/>
+          </a:ln>
+        </p:spPr>
+        <p:style>
+          <a:lnRef idx="1">
+            <a:schemeClr val="accent1"/>
+          </a:lnRef>
+          <a:fillRef idx="3">
+            <a:schemeClr val="accent1"/>
+          </a:fillRef>
+          <a:effectRef idx="2">
+            <a:schemeClr val="accent1"/>
+          </a:effectRef>
+          <a:fontRef idx="minor">
+            <a:schemeClr val="lt1"/>
+          </a:fontRef>
+        </p:style>
+        <p:txBody>
+          <a:bodyPr rtlCol="0" anchor="ctr"/>
+          <a:lstStyle/>
+          <a:p>
             <a:pPr algn="ctr"/>
-            <a:r>
-              <a:rPr sz="2000" b="1" i="0">
+          </a:p>
+        </p:txBody>
+      </p:sp>
+      <p:sp>
+        <p:nvSpPr>
+          <p:cNvPr id="3" name="Rectangle 2"/>
+          <p:cNvSpPr/>
+          <p:nvPr/>
+        </p:nvSpPr>
+        <p:spPr>
+          <a:xfrm>
+            <a:off x="0" y="960120"/>
+            <a:ext cx="12191695" cy="41148"/>
+          </a:xfrm>
+          <a:prstGeom prst="rect">
+            <a:avLst/>
+          </a:prstGeom>
+          <a:solidFill>
+            <a:srgbClr val="FFD000"/>
+          </a:solidFill>
+          <a:ln>
+            <a:noFill/>
+          </a:ln>
+        </p:spPr>
+        <p:style>
+          <a:lnRef idx="1">
+            <a:schemeClr val="accent1"/>
+          </a:lnRef>
+          <a:fillRef idx="3">
+            <a:schemeClr val="accent1"/>
+          </a:fillRef>
+          <a:effectRef idx="2">
+            <a:schemeClr val="accent1"/>
+          </a:effectRef>
+          <a:fontRef idx="minor">
+            <a:schemeClr val="lt1"/>
+          </a:fontRef>
+        </p:style>
+        <p:txBody>
+          <a:bodyPr rtlCol="0" anchor="ctr"/>
+          <a:lstStyle/>
+          <a:p>
+            <a:pPr algn="ctr"/>
+          </a:p>
+        </p:txBody>
+      </p:sp>
+      <p:sp>
+        <p:nvSpPr>
+          <p:cNvPr id="4" name="TextBox 3"/>
+          <p:cNvSpPr txBox="1"/>
+          <p:nvPr/>
+        </p:nvSpPr>
+        <p:spPr>
+          <a:xfrm>
+            <a:off x="457200" y="164592"/>
+            <a:ext cx="11277295" cy="502920"/>
+          </a:xfrm>
+          <a:prstGeom prst="rect">
+            <a:avLst/>
+          </a:prstGeom>
+          <a:noFill/>
+        </p:spPr>
+        <p:txBody>
+          <a:bodyPr wrap="square">
+            <a:spAutoFit/>
+          </a:bodyPr>
+          <a:lstStyle/>
+          <a:p>
+            <a:r>
+              <a:rPr sz="2600" b="1" i="0">
+                <a:solidFill>
+                  <a:srgbClr val="FFFFFF"/>
+                </a:solidFill>
+                <a:latin typeface="Calibri"/>
+              </a:rPr>
+              <a:t>Para el PI esta semana</a:t>
+            </a:r>
+          </a:p>
+        </p:txBody>
+      </p:sp>
+      <p:sp>
+        <p:nvSpPr>
+          <p:cNvPr id="5" name="Rounded Rectangle 4"/>
+          <p:cNvSpPr/>
+          <p:nvPr/>
+        </p:nvSpPr>
+        <p:spPr>
+          <a:xfrm>
+            <a:off x="457200" y="1261872"/>
+            <a:ext cx="11277295" cy="1051560"/>
+          </a:xfrm>
+          <a:prstGeom prst="roundRect">
+            <a:avLst>
+              <a:gd name="adj" fmla="val 12000"/>
+            </a:avLst>
+          </a:prstGeom>
+          <a:solidFill>
+            <a:srgbClr val="E8F4FA"/>
+          </a:solidFill>
+          <a:ln>
+            <a:noFill/>
+          </a:ln>
+        </p:spPr>
+        <p:style>
+          <a:lnRef idx="1">
+            <a:schemeClr val="accent1"/>
+          </a:lnRef>
+          <a:fillRef idx="3">
+            <a:schemeClr val="accent1"/>
+          </a:fillRef>
+          <a:effectRef idx="2">
+            <a:schemeClr val="accent1"/>
+          </a:effectRef>
+          <a:fontRef idx="minor">
+            <a:schemeClr val="lt1"/>
+          </a:fontRef>
+        </p:style>
+        <p:txBody>
+          <a:bodyPr rtlCol="0" anchor="ctr"/>
+          <a:lstStyle/>
+          <a:p>
+            <a:pPr algn="ctr"/>
+          </a:p>
+        </p:txBody>
+      </p:sp>
+      <p:sp>
+        <p:nvSpPr>
+          <p:cNvPr id="6" name="Rectangle 5"/>
+          <p:cNvSpPr/>
+          <p:nvPr/>
+        </p:nvSpPr>
+        <p:spPr>
+          <a:xfrm>
+            <a:off x="457200" y="1261872"/>
+            <a:ext cx="128016" cy="1051560"/>
+          </a:xfrm>
+          <a:prstGeom prst="rect">
+            <a:avLst/>
+          </a:prstGeom>
+          <a:solidFill>
+            <a:srgbClr val="269CCB"/>
+          </a:solidFill>
+          <a:ln>
+            <a:noFill/>
+          </a:ln>
+        </p:spPr>
+        <p:style>
+          <a:lnRef idx="1">
+            <a:schemeClr val="accent1"/>
+          </a:lnRef>
+          <a:fillRef idx="3">
+            <a:schemeClr val="accent1"/>
+          </a:fillRef>
+          <a:effectRef idx="2">
+            <a:schemeClr val="accent1"/>
+          </a:effectRef>
+          <a:fontRef idx="minor">
+            <a:schemeClr val="lt1"/>
+          </a:fontRef>
+        </p:style>
+        <p:txBody>
+          <a:bodyPr rtlCol="0" anchor="ctr"/>
+          <a:lstStyle/>
+          <a:p>
+            <a:pPr algn="ctr"/>
+          </a:p>
+        </p:txBody>
+      </p:sp>
+      <p:sp>
+        <p:nvSpPr>
+          <p:cNvPr id="7" name="TextBox 6"/>
+          <p:cNvSpPr txBox="1"/>
+          <p:nvPr/>
+        </p:nvSpPr>
+        <p:spPr>
+          <a:xfrm>
+            <a:off x="777240" y="1399031"/>
+            <a:ext cx="10774375" cy="822959"/>
+          </a:xfrm>
+          <a:prstGeom prst="rect">
+            <a:avLst/>
+          </a:prstGeom>
+          <a:noFill/>
+        </p:spPr>
+        <p:txBody>
+          <a:bodyPr wrap="square">
+            <a:spAutoFit/>
+          </a:bodyPr>
+          <a:lstStyle/>
+          <a:p>
+            <a:r>
+              <a:rPr sz="1200" b="1" i="0">
                 <a:solidFill>
                   <a:srgbClr val="269CCB"/>
                 </a:solidFill>
                 <a:latin typeface="Calibri"/>
               </a:rPr>
-              <a:t>Teoria al servicio del proyecto</a:t>
+              <a:t>Info</a:t>
+            </a:r>
+          </a:p>
+          <a:p>
+            <a:pPr>
+              <a:spcBef>
+                <a:spcPts val="400"/>
+              </a:spcBef>
+            </a:pPr>
+            <a:r>
+              <a:rPr sz="1400" b="0" i="0">
+                <a:solidFill>
+                  <a:srgbClr val="333333"/>
+                </a:solidFill>
+                <a:latin typeface="Calibri"/>
+              </a:rPr>
+              <a:t>Hito: Queda listo el backlog inicial de VetCare: dos epicas descompuestas en ocho historias priorizadas, con criterios de aceptacion y talla en puntos.</a:t>
+            </a:r>
+          </a:p>
+        </p:txBody>
+      </p:sp>
+      <p:sp>
+        <p:nvSpPr>
+          <p:cNvPr id="8" name="Rounded Rectangle 7"/>
+          <p:cNvSpPr/>
+          <p:nvPr/>
+        </p:nvSpPr>
+        <p:spPr>
+          <a:xfrm>
+            <a:off x="457200" y="2478024"/>
+            <a:ext cx="11277295" cy="1051560"/>
+          </a:xfrm>
+          <a:prstGeom prst="roundRect">
+            <a:avLst>
+              <a:gd name="adj" fmla="val 12000"/>
+            </a:avLst>
+          </a:prstGeom>
+          <a:solidFill>
+            <a:srgbClr val="FFF8E1"/>
+          </a:solidFill>
+          <a:ln>
+            <a:noFill/>
+          </a:ln>
+        </p:spPr>
+        <p:style>
+          <a:lnRef idx="1">
+            <a:schemeClr val="accent1"/>
+          </a:lnRef>
+          <a:fillRef idx="3">
+            <a:schemeClr val="accent1"/>
+          </a:fillRef>
+          <a:effectRef idx="2">
+            <a:schemeClr val="accent1"/>
+          </a:effectRef>
+          <a:fontRef idx="minor">
+            <a:schemeClr val="lt1"/>
+          </a:fontRef>
+        </p:style>
+        <p:txBody>
+          <a:bodyPr rtlCol="0" anchor="ctr"/>
+          <a:lstStyle/>
+          <a:p>
+            <a:pPr algn="ctr"/>
+          </a:p>
+        </p:txBody>
+      </p:sp>
+      <p:sp>
+        <p:nvSpPr>
+          <p:cNvPr id="9" name="Rectangle 8"/>
+          <p:cNvSpPr/>
+          <p:nvPr/>
+        </p:nvSpPr>
+        <p:spPr>
+          <a:xfrm>
+            <a:off x="457200" y="2478024"/>
+            <a:ext cx="128016" cy="1051560"/>
+          </a:xfrm>
+          <a:prstGeom prst="rect">
+            <a:avLst/>
+          </a:prstGeom>
+          <a:solidFill>
+            <a:srgbClr val="FFD000"/>
+          </a:solidFill>
+          <a:ln>
+            <a:noFill/>
+          </a:ln>
+        </p:spPr>
+        <p:style>
+          <a:lnRef idx="1">
+            <a:schemeClr val="accent1"/>
+          </a:lnRef>
+          <a:fillRef idx="3">
+            <a:schemeClr val="accent1"/>
+          </a:fillRef>
+          <a:effectRef idx="2">
+            <a:schemeClr val="accent1"/>
+          </a:effectRef>
+          <a:fontRef idx="minor">
+            <a:schemeClr val="lt1"/>
+          </a:fontRef>
+        </p:style>
+        <p:txBody>
+          <a:bodyPr rtlCol="0" anchor="ctr"/>
+          <a:lstStyle/>
+          <a:p>
+            <a:pPr algn="ctr"/>
+          </a:p>
+        </p:txBody>
+      </p:sp>
+      <p:sp>
+        <p:nvSpPr>
+          <p:cNvPr id="10" name="TextBox 9"/>
+          <p:cNvSpPr txBox="1"/>
+          <p:nvPr/>
+        </p:nvSpPr>
+        <p:spPr>
+          <a:xfrm>
+            <a:off x="777240" y="2615184"/>
+            <a:ext cx="10774375" cy="822959"/>
+          </a:xfrm>
+          <a:prstGeom prst="rect">
+            <a:avLst/>
+          </a:prstGeom>
+          <a:noFill/>
+        </p:spPr>
+        <p:txBody>
+          <a:bodyPr wrap="square">
+            <a:spAutoFit/>
+          </a:bodyPr>
+          <a:lstStyle/>
+          <a:p>
+            <a:r>
+              <a:rPr sz="1200" b="1" i="0">
+                <a:solidFill>
+                  <a:srgbClr val="FFD000"/>
+                </a:solidFill>
+                <a:latin typeface="Calibri"/>
+              </a:rPr>
+              <a:t>Aclaración</a:t>
+            </a:r>
+          </a:p>
+          <a:p>
+            <a:pPr>
+              <a:spcBef>
+                <a:spcPts val="400"/>
+              </a:spcBef>
+            </a:pPr>
+            <a:r>
+              <a:rPr sz="1400" b="0" i="0">
+                <a:solidFill>
+                  <a:srgbClr val="333333"/>
+                </a:solidFill>
+                <a:latin typeface="Calibri"/>
+              </a:rPr>
+              <a:t>Enunciado completo: Clases/Proyecto Integrador/ (VetCare).</a:t>
+            </a:r>
+          </a:p>
+        </p:txBody>
+      </p:sp>
+      <p:sp>
+        <p:nvSpPr>
+          <p:cNvPr id="11" name="Rounded Rectangle 10"/>
+          <p:cNvSpPr/>
+          <p:nvPr/>
+        </p:nvSpPr>
+        <p:spPr>
+          <a:xfrm>
+            <a:off x="457200" y="3694176"/>
+            <a:ext cx="11277295" cy="1051560"/>
+          </a:xfrm>
+          <a:prstGeom prst="roundRect">
+            <a:avLst>
+              <a:gd name="adj" fmla="val 12000"/>
+            </a:avLst>
+          </a:prstGeom>
+          <a:solidFill>
+            <a:srgbClr val="FBE4E4"/>
+          </a:solidFill>
+          <a:ln>
+            <a:noFill/>
+          </a:ln>
+        </p:spPr>
+        <p:style>
+          <a:lnRef idx="1">
+            <a:schemeClr val="accent1"/>
+          </a:lnRef>
+          <a:fillRef idx="3">
+            <a:schemeClr val="accent1"/>
+          </a:fillRef>
+          <a:effectRef idx="2">
+            <a:schemeClr val="accent1"/>
+          </a:effectRef>
+          <a:fontRef idx="minor">
+            <a:schemeClr val="lt1"/>
+          </a:fontRef>
+        </p:style>
+        <p:txBody>
+          <a:bodyPr rtlCol="0" anchor="ctr"/>
+          <a:lstStyle/>
+          <a:p>
+            <a:pPr algn="ctr"/>
+          </a:p>
+        </p:txBody>
+      </p:sp>
+      <p:sp>
+        <p:nvSpPr>
+          <p:cNvPr id="12" name="Rectangle 11"/>
+          <p:cNvSpPr/>
+          <p:nvPr/>
+        </p:nvSpPr>
+        <p:spPr>
+          <a:xfrm>
+            <a:off x="457200" y="3694176"/>
+            <a:ext cx="128016" cy="1051560"/>
+          </a:xfrm>
+          <a:prstGeom prst="rect">
+            <a:avLst/>
+          </a:prstGeom>
+          <a:solidFill>
+            <a:srgbClr val="A02030"/>
+          </a:solidFill>
+          <a:ln>
+            <a:noFill/>
+          </a:ln>
+        </p:spPr>
+        <p:style>
+          <a:lnRef idx="1">
+            <a:schemeClr val="accent1"/>
+          </a:lnRef>
+          <a:fillRef idx="3">
+            <a:schemeClr val="accent1"/>
+          </a:fillRef>
+          <a:effectRef idx="2">
+            <a:schemeClr val="accent1"/>
+          </a:effectRef>
+          <a:fontRef idx="minor">
+            <a:schemeClr val="lt1"/>
+          </a:fontRef>
+        </p:style>
+        <p:txBody>
+          <a:bodyPr rtlCol="0" anchor="ctr"/>
+          <a:lstStyle/>
+          <a:p>
+            <a:pPr algn="ctr"/>
+          </a:p>
+        </p:txBody>
+      </p:sp>
+      <p:sp>
+        <p:nvSpPr>
+          <p:cNvPr id="13" name="TextBox 12"/>
+          <p:cNvSpPr txBox="1"/>
+          <p:nvPr/>
+        </p:nvSpPr>
+        <p:spPr>
+          <a:xfrm>
+            <a:off x="777240" y="3831336"/>
+            <a:ext cx="10774375" cy="822959"/>
+          </a:xfrm>
+          <a:prstGeom prst="rect">
+            <a:avLst/>
+          </a:prstGeom>
+          <a:noFill/>
+        </p:spPr>
+        <p:txBody>
+          <a:bodyPr wrap="square">
+            <a:spAutoFit/>
+          </a:bodyPr>
+          <a:lstStyle/>
+          <a:p>
+            <a:r>
+              <a:rPr sz="1200" b="1" i="0">
+                <a:solidFill>
+                  <a:srgbClr val="A02030"/>
+                </a:solidFill>
+                <a:latin typeface="Calibri"/>
+              </a:rPr>
+              <a:t>Atención</a:t>
+            </a:r>
+          </a:p>
+          <a:p>
+            <a:pPr>
+              <a:spcBef>
+                <a:spcPts val="400"/>
+              </a:spcBef>
+            </a:pPr>
+            <a:r>
+              <a:rPr sz="1400" b="0" i="0">
+                <a:solidFill>
+                  <a:srgbClr val="333333"/>
+                </a:solidFill>
+                <a:latin typeface="Calibri"/>
+              </a:rPr>
+              <a:t>Entrega del taller, si el docente lo asigna · en la fecha que indique el docente.</a:t>
+            </a:r>
+          </a:p>
+        </p:txBody>
+      </p:sp>
+      <p:sp>
+        <p:nvSpPr>
+          <p:cNvPr id="14" name="TextBox 13"/>
+          <p:cNvSpPr txBox="1"/>
+          <p:nvPr/>
+        </p:nvSpPr>
+        <p:spPr>
+          <a:xfrm>
+            <a:off x="11185855" y="6473952"/>
+            <a:ext cx="640080" cy="274320"/>
+          </a:xfrm>
+          <a:prstGeom prst="rect">
+            <a:avLst/>
+          </a:prstGeom>
+          <a:noFill/>
+        </p:spPr>
+        <p:txBody>
+          <a:bodyPr wrap="square">
+            <a:spAutoFit/>
+          </a:bodyPr>
+          <a:lstStyle/>
+          <a:p>
+            <a:pPr algn="r"/>
+            <a:r>
+              <a:rPr sz="1100" b="0" i="0">
+                <a:solidFill>
+                  <a:srgbClr val="666666"/>
+                </a:solidFill>
+                <a:latin typeface="Calibri"/>
+              </a:rPr>
+              <a:t>19</a:t>
             </a:r>
           </a:p>
         </p:txBody>
@@ -6684,6 +8898,238 @@
 </p:sld>
 </file>
 
+<file path=ppt/slides/slide20.xml><?xml version="1.0" encoding="utf-8"?>
+<p:sld xmlns:a="http://schemas.openxmlformats.org/drawingml/2006/main" xmlns:p="http://schemas.openxmlformats.org/presentationml/2006/main" xmlns:r="http://schemas.openxmlformats.org/officeDocument/2006/relationships">
+  <p:cSld>
+    <p:bg>
+      <p:bgPr>
+        <a:solidFill>
+          <a:srgbClr val="FFFFFF"/>
+        </a:solidFill>
+        <a:effectLst/>
+      </p:bgPr>
+    </p:bg>
+    <p:spTree>
+      <p:nvGrpSpPr>
+        <p:cNvPr id="1" name=""/>
+        <p:cNvGrpSpPr/>
+        <p:nvPr/>
+      </p:nvGrpSpPr>
+      <p:grpSpPr/>
+      <p:sp>
+        <p:nvSpPr>
+          <p:cNvPr id="2" name="Rectangle 1"/>
+          <p:cNvSpPr/>
+          <p:nvPr/>
+        </p:nvSpPr>
+        <p:spPr>
+          <a:xfrm>
+            <a:off x="0" y="0"/>
+            <a:ext cx="12191695" cy="164592"/>
+          </a:xfrm>
+          <a:prstGeom prst="rect">
+            <a:avLst/>
+          </a:prstGeom>
+          <a:solidFill>
+            <a:srgbClr val="269CCB"/>
+          </a:solidFill>
+          <a:ln>
+            <a:noFill/>
+          </a:ln>
+        </p:spPr>
+        <p:style>
+          <a:lnRef idx="1">
+            <a:schemeClr val="accent1"/>
+          </a:lnRef>
+          <a:fillRef idx="3">
+            <a:schemeClr val="accent1"/>
+          </a:fillRef>
+          <a:effectRef idx="2">
+            <a:schemeClr val="accent1"/>
+          </a:effectRef>
+          <a:fontRef idx="minor">
+            <a:schemeClr val="lt1"/>
+          </a:fontRef>
+        </p:style>
+        <p:txBody>
+          <a:bodyPr rtlCol="0" anchor="ctr"/>
+          <a:lstStyle/>
+          <a:p>
+            <a:pPr algn="ctr"/>
+          </a:p>
+        </p:txBody>
+      </p:sp>
+      <p:pic>
+        <p:nvPicPr>
+          <p:cNvPr id="3" name="Picture 2" descr="logo_uniajc_color.png"/>
+          <p:cNvPicPr>
+            <a:picLocks noChangeAspect="1"/>
+          </p:cNvPicPr>
+          <p:nvPr/>
+        </p:nvPicPr>
+        <p:blipFill>
+          <a:blip r:embed="rId2"/>
+          <a:stretch>
+            <a:fillRect/>
+          </a:stretch>
+        </p:blipFill>
+        <p:spPr>
+          <a:xfrm>
+            <a:off x="10271455" y="5998464"/>
+            <a:ext cx="1463040" cy="643233"/>
+          </a:xfrm>
+          <a:prstGeom prst="rect">
+            <a:avLst/>
+          </a:prstGeom>
+        </p:spPr>
+      </p:pic>
+      <p:sp>
+        <p:nvSpPr>
+          <p:cNvPr id="4" name="TextBox 3"/>
+          <p:cNvSpPr txBox="1"/>
+          <p:nvPr/>
+        </p:nvSpPr>
+        <p:spPr>
+          <a:xfrm>
+            <a:off x="457200" y="1737360"/>
+            <a:ext cx="11277295" cy="1097280"/>
+          </a:xfrm>
+          <a:prstGeom prst="rect">
+            <a:avLst/>
+          </a:prstGeom>
+          <a:noFill/>
+        </p:spPr>
+        <p:txBody>
+          <a:bodyPr wrap="square" anchor="ctr"/>
+          <a:lstStyle/>
+          <a:p>
+            <a:pPr algn="ctr"/>
+            <a:r>
+              <a:rPr sz="3400" b="1" i="0">
+                <a:solidFill>
+                  <a:srgbClr val="095292"/>
+                </a:solidFill>
+                <a:latin typeface="Calibri"/>
+              </a:rPr>
+              <a:t>Clase 7 · VetCare avanza</a:t>
+            </a:r>
+          </a:p>
+        </p:txBody>
+      </p:sp>
+      <p:sp>
+        <p:nvSpPr>
+          <p:cNvPr id="5" name="TextBox 4"/>
+          <p:cNvSpPr txBox="1"/>
+          <p:nvPr/>
+        </p:nvSpPr>
+        <p:spPr>
+          <a:xfrm>
+            <a:off x="457200" y="3017520"/>
+            <a:ext cx="11277295" cy="1645920"/>
+          </a:xfrm>
+          <a:prstGeom prst="rect">
+            <a:avLst/>
+          </a:prstGeom>
+          <a:noFill/>
+        </p:spPr>
+        <p:txBody>
+          <a:bodyPr wrap="square">
+            <a:spAutoFit/>
+          </a:bodyPr>
+          <a:lstStyle/>
+          <a:p>
+            <a:pPr algn="ctr">
+              <a:spcAft>
+                <a:spcPts val="600"/>
+              </a:spcAft>
+            </a:pPr>
+            <a:r>
+              <a:rPr sz="1600" b="0" i="0">
+                <a:solidFill>
+                  <a:srgbClr val="333333"/>
+                </a:solidFill>
+                <a:latin typeface="Calibri"/>
+              </a:rPr>
+              <a:t>Queda listo el backlog inicial de VetCare: dos epicas descompuestas en ocho historias priorizadas, con criterios de aceptacion y talla en puntos.</a:t>
+            </a:r>
+          </a:p>
+          <a:p>
+            <a:pPr algn="ctr">
+              <a:spcAft>
+                <a:spcPts val="600"/>
+              </a:spcAft>
+            </a:pPr>
+            <a:r>
+              <a:rPr sz="1600" b="0" i="0">
+                <a:solidFill>
+                  <a:srgbClr val="333333"/>
+                </a:solidFill>
+                <a:latin typeface="Calibri"/>
+              </a:rPr>
+              <a:t>Entregable: Tablero de backlog con 8 historias en formato Como/quiero/para, cada una con 2 o 3 criterios de aceptacion en Dado-Cuando-Entonces, estimacion en puntos y trazabilidad al RF de la clase 6, subido a la plataforma del curso.</a:t>
+            </a:r>
+          </a:p>
+          <a:p>
+            <a:pPr algn="ctr">
+              <a:spcAft>
+                <a:spcPts val="600"/>
+              </a:spcAft>
+            </a:pPr>
+            <a:r>
+              <a:rPr sz="1600" b="0" i="0">
+                <a:solidFill>
+                  <a:srgbClr val="333333"/>
+                </a:solidFill>
+                <a:latin typeface="Calibri"/>
+              </a:rPr>
+              <a:t>Siguiente clase: continuamos el hilo del PI</a:t>
+            </a:r>
+          </a:p>
+        </p:txBody>
+      </p:sp>
+      <p:sp>
+        <p:nvSpPr>
+          <p:cNvPr id="6" name="TextBox 5"/>
+          <p:cNvSpPr txBox="1"/>
+          <p:nvPr/>
+        </p:nvSpPr>
+        <p:spPr>
+          <a:xfrm>
+            <a:off x="457200" y="4754880"/>
+            <a:ext cx="11277295" cy="640080"/>
+          </a:xfrm>
+          <a:prstGeom prst="rect">
+            <a:avLst/>
+          </a:prstGeom>
+          <a:noFill/>
+        </p:spPr>
+        <p:txBody>
+          <a:bodyPr wrap="square">
+            <a:spAutoFit/>
+          </a:bodyPr>
+          <a:lstStyle/>
+          <a:p>
+            <a:pPr algn="ctr"/>
+            <a:r>
+              <a:rPr sz="2000" b="1" i="0">
+                <a:solidFill>
+                  <a:srgbClr val="269CCB"/>
+                </a:solidFill>
+                <a:latin typeface="Calibri"/>
+              </a:rPr>
+              <a:t>Teoria al servicio del proyecto</a:t>
+            </a:r>
+          </a:p>
+        </p:txBody>
+      </p:sp>
+    </p:spTree>
+  </p:cSld>
+  <p:clrMapOvr>
+    <a:masterClrMapping/>
+  </p:clrMapOvr>
+</p:sld>
+</file>
+
 <file path=ppt/slides/slide3.xml><?xml version="1.0" encoding="utf-8"?>
 <p:sld xmlns:a="http://schemas.openxmlformats.org/drawingml/2006/main" xmlns:p="http://schemas.openxmlformats.org/presentationml/2006/main" xmlns:r="http://schemas.openxmlformats.org/officeDocument/2006/relationships">
   <p:cSld>
@@ -7669,7 +10115,7 @@
                 </a:solidFill>
                 <a:latin typeface="Calibri"/>
               </a:rPr>
-              <a:t>Teoria Core</a:t>
+              <a:t>Una historia de usuario no es un requisito abreviado ni una moda de las... (1/2)</a:t>
             </a:r>
           </a:p>
         </p:txBody>
@@ -7708,7 +10154,7 @@
                 </a:solidFill>
                 <a:latin typeface="Calibri"/>
               </a:rPr>
-              <a:t>–   Una historia de usuario no es un requisito abreviado ni una moda de las metodologias agiles: es el recordatorio…</a:t>
+              <a:t>–   Una historia de usuario no es un requisito abreviado ni una moda de las metodologias agiles: es el recordatorio corto de una conversacion pendiente entre quien necesita el sistema y quien lo va a construir.</a:t>
             </a:r>
           </a:p>
           <a:p>
@@ -7724,7 +10170,7 @@
                 </a:solidFill>
                 <a:latin typeface="Calibri"/>
               </a:rPr>
-              <a:t>–   Los criterios de aceptacion son la parte que convierte una historia bonita en una historia entregable, y se…</a:t>
+              <a:t>–   Su formato canonico tiene tres partes: Como &lt;rol&gt; quiero &lt;accion&gt; para &lt;beneficio&gt;.</a:t>
             </a:r>
           </a:p>
           <a:p>
@@ -7740,7 +10186,7 @@
                 </a:solidFill>
                 <a:latin typeface="Calibri"/>
               </a:rPr>
-              <a:t>–   INVEST es la lista de chequeo para saber si una historia esta bien cortada, y conviene revisarla letra por letra…</a:t>
+              <a:t>–   El rol obliga a nombrar a alguien concreto (la auxiliar Marcela, el veterinario de turno, el dueno de la mascota) y no al generico usuario</a:t>
             </a:r>
           </a:p>
           <a:p>
@@ -7756,7 +10202,7 @@
                 </a:solidFill>
                 <a:latin typeface="Calibri"/>
               </a:rPr>
-              <a:t>–   Una epica es una historia grande que todavia no cabe en una iteracion, y descomponerla es una habilidad que se…</a:t>
+              <a:t>–   Que no existe en ninguna clinica del mundo; la accion describe algo que esa persona hace, no algo que hace la base de datos por dentro; y el para es la parte que casi todo el mundo borra por afan y es la mas valiosa</a:t>
             </a:r>
           </a:p>
           <a:p>
@@ -7772,7 +10218,23 @@
                 </a:solidFill>
                 <a:latin typeface="Calibri"/>
               </a:rPr>
-              <a:t>–   Estimar en agil no es adivinar horas sino comparar tamanos, y esa es la razon de los puntos de historia: son una…</a:t>
+              <a:t>–   Porque es la unica que explica por que vale la pena gastar tiempo y plata en eso.</a:t>
+            </a:r>
+          </a:p>
+          <a:p>
+            <a:pPr>
+              <a:spcAft>
+                <a:spcPts val="800"/>
+              </a:spcAft>
+            </a:pPr>
+            <a:r>
+              <a:rPr sz="2000" b="0" i="0">
+                <a:solidFill>
+                  <a:srgbClr val="333333"/>
+                </a:solidFill>
+                <a:latin typeface="Calibri"/>
+              </a:rPr>
+              <a:t>–   En VetCare, Como auxiliar quiero buscar la ficha de una mascota por el documento del dueno para no revolver la carpeta fisica mientras el paciente espera en el meson se entiende sin traduccion</a:t>
             </a:r>
           </a:p>
         </p:txBody>
@@ -7953,141 +10415,21 @@
                 </a:solidFill>
                 <a:latin typeface="Calibri"/>
               </a:rPr>
-              <a:t>Historia HU-04 con criterios de aceptacion (artefacto proyectable)</a:t>
-            </a:r>
-          </a:p>
-        </p:txBody>
-      </p:sp>
-      <p:sp>
-        <p:nvSpPr>
-          <p:cNvPr id="5" name="Rounded Rectangle 4"/>
-          <p:cNvSpPr/>
-          <p:nvPr/>
-        </p:nvSpPr>
-        <p:spPr>
-          <a:xfrm>
-            <a:off x="457200" y="1261872"/>
-            <a:ext cx="11277295" cy="4773168"/>
-          </a:xfrm>
-          <a:prstGeom prst="roundRect">
-            <a:avLst>
-              <a:gd name="adj" fmla="val 12000"/>
-            </a:avLst>
-          </a:prstGeom>
-          <a:solidFill>
-            <a:srgbClr val="1E2A38"/>
-          </a:solidFill>
-          <a:ln>
-            <a:noFill/>
-          </a:ln>
-        </p:spPr>
-        <p:style>
-          <a:lnRef idx="1">
-            <a:schemeClr val="accent1"/>
-          </a:lnRef>
-          <a:fillRef idx="3">
-            <a:schemeClr val="accent1"/>
-          </a:fillRef>
-          <a:effectRef idx="2">
-            <a:schemeClr val="accent1"/>
-          </a:effectRef>
-          <a:fontRef idx="minor">
-            <a:schemeClr val="lt1"/>
-          </a:fontRef>
-        </p:style>
-        <p:txBody>
-          <a:bodyPr rtlCol="0" anchor="ctr"/>
-          <a:lstStyle/>
-          <a:p>
-            <a:pPr algn="ctr"/>
-          </a:p>
-        </p:txBody>
-      </p:sp>
-      <p:sp>
-        <p:nvSpPr>
-          <p:cNvPr id="6" name="Rectangle 5"/>
-          <p:cNvSpPr/>
-          <p:nvPr/>
-        </p:nvSpPr>
-        <p:spPr>
-          <a:xfrm>
-            <a:off x="457200" y="1261872"/>
-            <a:ext cx="11277295" cy="320040"/>
-          </a:xfrm>
-          <a:prstGeom prst="rect">
-            <a:avLst/>
-          </a:prstGeom>
-          <a:solidFill>
-            <a:srgbClr val="095292"/>
-          </a:solidFill>
-          <a:ln>
-            <a:noFill/>
-          </a:ln>
-        </p:spPr>
-        <p:style>
-          <a:lnRef idx="1">
-            <a:schemeClr val="accent1"/>
-          </a:lnRef>
-          <a:fillRef idx="3">
-            <a:schemeClr val="accent1"/>
-          </a:fillRef>
-          <a:effectRef idx="2">
-            <a:schemeClr val="accent1"/>
-          </a:effectRef>
-          <a:fontRef idx="minor">
-            <a:schemeClr val="lt1"/>
-          </a:fontRef>
-        </p:style>
-        <p:txBody>
-          <a:bodyPr rtlCol="0" anchor="ctr"/>
-          <a:lstStyle/>
-          <a:p>
-            <a:pPr algn="ctr"/>
-          </a:p>
-        </p:txBody>
-      </p:sp>
-      <p:sp>
-        <p:nvSpPr>
-          <p:cNvPr id="7" name="TextBox 6"/>
+              <a:t>Una historia de usuario no es un requisito abreviado ni una moda de las... (2/2)</a:t>
+            </a:r>
+          </a:p>
+        </p:txBody>
+      </p:sp>
+      <p:sp>
+        <p:nvSpPr>
+          <p:cNvPr id="5" name="TextBox 4"/>
           <p:cNvSpPr txBox="1"/>
           <p:nvPr/>
         </p:nvSpPr>
         <p:spPr>
           <a:xfrm>
-            <a:off x="685800" y="1307592"/>
-            <a:ext cx="10820095" cy="256032"/>
-          </a:xfrm>
-          <a:prstGeom prst="rect">
-            <a:avLst/>
-          </a:prstGeom>
-          <a:noFill/>
-        </p:spPr>
-        <p:txBody>
-          <a:bodyPr wrap="square" anchor="ctr"/>
-          <a:lstStyle/>
-          <a:p>
-            <a:r>
-              <a:rPr sz="1000" b="1" i="0">
-                <a:solidFill>
-                  <a:srgbClr val="269CCB"/>
-                </a:solidFill>
-                <a:latin typeface="Calibri"/>
-              </a:rPr>
-              <a:t>● ● ●</a:t>
-            </a:r>
-          </a:p>
-        </p:txBody>
-      </p:sp>
-      <p:sp>
-        <p:nvSpPr>
-          <p:cNvPr id="8" name="TextBox 7"/>
-          <p:cNvSpPr txBox="1"/>
-          <p:nvPr/>
-        </p:nvSpPr>
-        <p:spPr>
-          <a:xfrm>
-            <a:off x="777240" y="1719072"/>
-            <a:ext cx="10637215" cy="4133087"/>
+            <a:off x="457200" y="1170432"/>
+            <a:ext cx="11277295" cy="5230368"/>
           </a:xfrm>
           <a:prstGeom prst="rect">
             <a:avLst/>
@@ -8102,235 +10444,88 @@
           <a:p>
             <a:pPr>
               <a:spcAft>
-                <a:spcPts val="400"/>
+                <a:spcPts val="800"/>
               </a:spcAft>
             </a:pPr>
             <a:r>
-              <a:rPr sz="1400" b="0" i="0">
-                <a:solidFill>
-                  <a:srgbClr val="FFFFFF"/>
-                </a:solidFill>
-                <a:latin typeface="Calibri"/>
-              </a:rPr>
-              <a:t>HU-04  [Epica: E-02 Historial y agenda]</a:t>
+              <a:rPr sz="2000" b="0" i="0">
+                <a:solidFill>
+                  <a:srgbClr val="333333"/>
+                </a:solidFill>
+                <a:latin typeface="Calibri"/>
+              </a:rPr>
+              <a:t>–   En cambio El sistema debe tener un buscador no dice a quien le sirve ni que dolor cura.</a:t>
             </a:r>
           </a:p>
           <a:p>
             <a:pPr>
               <a:spcAft>
-                <a:spcPts val="400"/>
+                <a:spcPts val="800"/>
               </a:spcAft>
             </a:pPr>
             <a:r>
-              <a:rPr sz="1400" b="0" i="0">
-                <a:solidFill>
-                  <a:srgbClr val="FFFFFF"/>
-                </a:solidFill>
-                <a:latin typeface="Calibri"/>
-              </a:rPr>
-              <a:t>Como veterinario de la clinica Huellitas</a:t>
+              <a:rPr sz="2000" b="0" i="0">
+                <a:solidFill>
+                  <a:srgbClr val="333333"/>
+                </a:solidFill>
+                <a:latin typeface="Calibri"/>
+              </a:rPr>
+              <a:t>–   Ron Jeffries lo resumio en tres C: Card, la tarjeta corta</a:t>
             </a:r>
           </a:p>
           <a:p>
             <a:pPr>
               <a:spcAft>
-                <a:spcPts val="400"/>
+                <a:spcPts val="800"/>
               </a:spcAft>
             </a:pPr>
             <a:r>
-              <a:rPr sz="1400" b="0" i="0">
-                <a:solidFill>
-                  <a:srgbClr val="FFFFFF"/>
-                </a:solidFill>
-                <a:latin typeface="Calibri"/>
-              </a:rPr>
-              <a:t>quiero consultar el historial de atenciones de una mascota por el documento del dueno</a:t>
+              <a:rPr sz="2000" b="0" i="0">
+                <a:solidFill>
+                  <a:srgbClr val="333333"/>
+                </a:solidFill>
+                <a:latin typeface="Calibri"/>
+              </a:rPr>
+              <a:t>–   Conversation, la charla que aclara los detalles; y Confirmation, los criterios de aceptacion.</a:t>
             </a:r>
           </a:p>
           <a:p>
             <a:pPr>
               <a:spcAft>
-                <a:spcPts val="400"/>
+                <a:spcPts val="800"/>
               </a:spcAft>
             </a:pPr>
             <a:r>
-              <a:rPr sz="1400" b="0" i="0">
-                <a:solidFill>
-                  <a:srgbClr val="FFFFFF"/>
-                </a:solidFill>
-                <a:latin typeface="Calibri"/>
-              </a:rPr>
-              <a:t>para decidir el tratamiento sin depender de la carpeta fisica.</a:t>
+              <a:rPr sz="2000" b="0" i="0">
+                <a:solidFill>
+                  <a:srgbClr val="333333"/>
+                </a:solidFill>
+                <a:latin typeface="Calibri"/>
+              </a:rPr>
+              <a:t>–   La tarjeta sin conversacion es un titulo huerfano, y la conversacion sin criterios es un acuerdo que nadie puede cobrar.</a:t>
             </a:r>
           </a:p>
           <a:p>
             <a:pPr>
               <a:spcAft>
-                <a:spcPts val="400"/>
+                <a:spcPts val="800"/>
               </a:spcAft>
             </a:pPr>
             <a:r>
-              <a:rPr sz="1400" b="0" i="0">
-                <a:solidFill>
-                  <a:srgbClr val="FFFFFF"/>
-                </a:solidFill>
-                <a:latin typeface="Calibri"/>
-              </a:rPr>
-              <a:t/>
-            </a:r>
-          </a:p>
-          <a:p>
-            <a:pPr>
-              <a:spcAft>
-                <a:spcPts val="400"/>
-              </a:spcAft>
-            </a:pPr>
-            <a:r>
-              <a:rPr sz="1400" b="0" i="0">
-                <a:solidFill>
-                  <a:srgbClr val="FFFFFF"/>
-                </a:solidFill>
-                <a:latin typeface="Calibri"/>
-              </a:rPr>
-              <a:t>Criterios de aceptacion</a:t>
-            </a:r>
-          </a:p>
-          <a:p>
-            <a:pPr>
-              <a:spcAft>
-                <a:spcPts val="400"/>
-              </a:spcAft>
-            </a:pPr>
-            <a:r>
-              <a:rPr sz="1400" b="0" i="0">
-                <a:solidFill>
-                  <a:srgbClr val="FFFFFF"/>
-                </a:solidFill>
-                <a:latin typeface="Calibri"/>
-              </a:rPr>
-              <a:t>CA-1  Dado un dueno con 3 mascotas registradas, cuando busco por su documento, entonces el sistema lista las 3 mascotas con nombre y especie.</a:t>
-            </a:r>
-          </a:p>
-          <a:p>
-            <a:pPr>
-              <a:spcAft>
-                <a:spcPts val="400"/>
-              </a:spcAft>
-            </a:pPr>
-            <a:r>
-              <a:rPr sz="1400" b="0" i="0">
-                <a:solidFill>
-                  <a:srgbClr val="FFFFFF"/>
-                </a:solidFill>
-                <a:latin typeface="Calibri"/>
-              </a:rPr>
-              <a:t>CA-2  Dado que selecciono la mascota Rocky, cuando abro su historial, entonces veo sus atenciones de la mas reciente a la mas antigua.</a:t>
-            </a:r>
-          </a:p>
-          <a:p>
-            <a:pPr>
-              <a:spcAft>
-                <a:spcPts val="400"/>
-              </a:spcAft>
-            </a:pPr>
-            <a:r>
-              <a:rPr sz="1400" b="0" i="0">
-                <a:solidFill>
-                  <a:srgbClr val="FFFFFF"/>
-                </a:solidFill>
-                <a:latin typeface="Calibri"/>
-              </a:rPr>
-              <a:t>CA-3  Dado un documento no registrado, cuando busco, entonces el sistema muestra 'No hay duenos con ese documento' y ofrece crear uno.</a:t>
-            </a:r>
-          </a:p>
-          <a:p>
-            <a:pPr>
-              <a:spcAft>
-                <a:spcPts val="400"/>
-              </a:spcAft>
-            </a:pPr>
-            <a:r>
-              <a:rPr sz="1400" b="0" i="0">
-                <a:solidFill>
-                  <a:srgbClr val="FFFFFF"/>
-                </a:solidFill>
-                <a:latin typeface="Calibri"/>
-              </a:rPr>
-              <a:t/>
-            </a:r>
-          </a:p>
-          <a:p>
-            <a:pPr>
-              <a:spcAft>
-                <a:spcPts val="400"/>
-              </a:spcAft>
-            </a:pPr>
-            <a:r>
-              <a:rPr sz="1400" b="0" i="0">
-                <a:solidFill>
-                  <a:srgbClr val="FFFFFF"/>
-                </a:solidFill>
-                <a:latin typeface="Calibri"/>
-              </a:rPr>
-              <a:t>Estimacion: 5 puntos   |   Prioridad: Must   |   Origen: RF-03 / NEC-02</a:t>
-            </a:r>
-          </a:p>
-          <a:p>
-            <a:pPr>
-              <a:spcAft>
-                <a:spcPts val="400"/>
-              </a:spcAft>
-            </a:pPr>
-            <a:r>
-              <a:rPr sz="1400" b="0" i="0">
-                <a:solidFill>
-                  <a:srgbClr val="FFFFFF"/>
-                </a:solidFill>
-                <a:latin typeface="Calibri"/>
-              </a:rPr>
-              <a:t>Definicion de terminado: mockup aprobado + los 3 criterios verificados en el prototipo navegable</a:t>
-            </a:r>
-          </a:p>
-        </p:txBody>
-      </p:sp>
-      <p:sp>
-        <p:nvSpPr>
-          <p:cNvPr id="9" name="TextBox 8"/>
-          <p:cNvSpPr txBox="1"/>
-          <p:nvPr/>
-        </p:nvSpPr>
-        <p:spPr>
-          <a:xfrm>
-            <a:off x="457200" y="6080760"/>
-            <a:ext cx="11277295" cy="320040"/>
-          </a:xfrm>
-          <a:prstGeom prst="rect">
-            <a:avLst/>
-          </a:prstGeom>
-          <a:noFill/>
-        </p:spPr>
-        <p:txBody>
-          <a:bodyPr wrap="square">
-            <a:spAutoFit/>
-          </a:bodyPr>
-          <a:lstStyle/>
-          <a:p>
-            <a:pPr algn="ctr"/>
-            <a:r>
-              <a:rPr sz="1200" b="0" i="1">
-                <a:solidFill>
-                  <a:srgbClr val="666666"/>
-                </a:solidFill>
-                <a:latin typeface="Calibri"/>
-              </a:rPr>
-              <a:t>La historia dice a quien le sirve y para que; los criterios de aceptacion son la unica parte que se puede cobrar.</a:t>
-            </a:r>
-          </a:p>
-        </p:txBody>
-      </p:sp>
-      <p:sp>
-        <p:nvSpPr>
-          <p:cNvPr id="10" name="TextBox 9"/>
+              <a:rPr sz="2000" b="0" i="0">
+                <a:solidFill>
+                  <a:srgbClr val="333333"/>
+                </a:solidFill>
+                <a:latin typeface="Calibri"/>
+              </a:rPr>
+              <a:t>–   Frente al requisito tradicional de la clase pasada, la historia no lo reemplaza: el requisito es el contrato formal y la historia es la unidad de trabajo con la que se planea la entrega.</a:t>
+            </a:r>
+          </a:p>
+        </p:txBody>
+      </p:sp>
+      <p:sp>
+        <p:nvSpPr>
+          <p:cNvPr id="6" name="TextBox 5"/>
           <p:cNvSpPr txBox="1"/>
           <p:nvPr/>
         </p:nvSpPr>
@@ -8504,7 +10699,7 @@
                 </a:solidFill>
                 <a:latin typeface="Calibri"/>
               </a:rPr>
-              <a:t>Demo del dia</a:t>
+              <a:t>Los criterios de aceptacion son la parte que convierte una historia...</a:t>
             </a:r>
           </a:p>
         </p:txBody>
@@ -8537,31 +10732,13 @@
               </a:spcAft>
             </a:pPr>
             <a:r>
-              <a:rPr sz="2000" b="0" i="0">
+              <a:rPr sz="1900" b="0" i="0">
                 <a:solidFill>
                   <a:srgbClr val="333333"/>
                 </a:solidFill>
                 <a:latin typeface="Calibri"/>
               </a:rPr>
-              <a:t>–   </a:t>
-            </a:r>
-            <a:r>
-              <a:rPr sz="2000" b="1" i="0">
-                <a:solidFill>
-                  <a:srgbClr val="333333"/>
-                </a:solidFill>
-                <a:latin typeface="Calibri"/>
-              </a:rPr>
-              <a:t>Herramienta:</a:t>
-            </a:r>
-            <a:r>
-              <a:rPr sz="2000" b="0" i="0">
-                <a:solidFill>
-                  <a:srgbClr val="333333"/>
-                </a:solidFill>
-                <a:latin typeface="Calibri"/>
-              </a:rPr>
-              <a:t> Google Docs · Excalidraw</a:t>
+              <a:t>–   Los criterios de aceptacion son la parte que convierte una historia bonita en una historia entregable, y se escriben en el patron Dado &lt;contexto inicial&gt; Cuando &lt;accion del usuario&gt; Entonces &lt;resultado observable&gt;.</a:t>
             </a:r>
           </a:p>
           <a:p>
@@ -8571,31 +10748,13 @@
               </a:spcAft>
             </a:pPr>
             <a:r>
-              <a:rPr sz="2000" b="0" i="0">
+              <a:rPr sz="1900" b="0" i="0">
                 <a:solidFill>
                   <a:srgbClr val="333333"/>
                 </a:solidFill>
                 <a:latin typeface="Calibri"/>
               </a:rPr>
-              <a:t>–   </a:t>
-            </a:r>
-            <a:r>
-              <a:rPr sz="2000" b="1" i="0">
-                <a:solidFill>
-                  <a:srgbClr val="333333"/>
-                </a:solidFill>
-                <a:latin typeface="Calibri"/>
-              </a:rPr>
-              <a:t>Demo:</a:t>
-            </a:r>
-            <a:r>
-              <a:rPr sz="2000" b="0" i="0">
-                <a:solidFill>
-                  <a:srgbClr val="333333"/>
-                </a:solidFill>
-                <a:latin typeface="Calibri"/>
-              </a:rPr>
-              <a:t> El docente toma el RF-03 del catalogo, lo convierte en vivo en historia con criterios y luego muestra una historia partida por capas para tumbarla con INVEST.</a:t>
+              <a:t>–   Cada criterio debe poder responderse con un si o un no mirando la pantalla, nunca con un depende.</a:t>
             </a:r>
           </a:p>
           <a:p>
@@ -8605,13 +10764,93 @@
               </a:spcAft>
             </a:pPr>
             <a:r>
-              <a:rPr sz="2000" b="0" i="0">
+              <a:rPr sz="1900" b="0" i="0">
                 <a:solidFill>
                   <a:srgbClr val="333333"/>
                 </a:solidFill>
                 <a:latin typeface="Calibri"/>
               </a:rPr>
-              <a:t>–   Mismo dominio VetCare — no otro ejemplo. Aqui se diseña, no se programa.</a:t>
+              <a:t>–   Para la historia de buscar el historial en VetCare los criterios serian: Dado un dueno con tres mascotas registradas, cuando busco por su documento, entonces el sistema lista las tres mascotas con nombre y especie</a:t>
+            </a:r>
+          </a:p>
+          <a:p>
+            <a:pPr>
+              <a:spcAft>
+                <a:spcPts val="800"/>
+              </a:spcAft>
+            </a:pPr>
+            <a:r>
+              <a:rPr sz="1900" b="0" i="0">
+                <a:solidFill>
+                  <a:srgbClr val="333333"/>
+                </a:solidFill>
+                <a:latin typeface="Calibri"/>
+              </a:rPr>
+              <a:t>–   Dado que selecciono la mascota Rocky, cuando abro su historial, entonces veo sus atenciones de la mas reciente a la mas antigua</a:t>
+            </a:r>
+          </a:p>
+          <a:p>
+            <a:pPr>
+              <a:spcAft>
+                <a:spcPts val="800"/>
+              </a:spcAft>
+            </a:pPr>
+            <a:r>
+              <a:rPr sz="1900" b="0" i="0">
+                <a:solidFill>
+                  <a:srgbClr val="333333"/>
+                </a:solidFill>
+                <a:latin typeface="Calibri"/>
+              </a:rPr>
+              <a:t>–   Dado un documento que no existe, cuando busco, entonces el sistema muestra un mensaje claro y ofrece crear el dueno.</a:t>
+            </a:r>
+          </a:p>
+          <a:p>
+            <a:pPr>
+              <a:spcAft>
+                <a:spcPts val="800"/>
+              </a:spcAft>
+            </a:pPr>
+            <a:r>
+              <a:rPr sz="1900" b="0" i="0">
+                <a:solidFill>
+                  <a:srgbClr val="333333"/>
+                </a:solidFill>
+                <a:latin typeface="Calibri"/>
+              </a:rPr>
+              <a:t>–   Fijense que el tercer criterio es el que casi siempre falta: el camino alterno, el caso feo, el error.</a:t>
+            </a:r>
+          </a:p>
+          <a:p>
+            <a:pPr>
+              <a:spcAft>
+                <a:spcPts val="800"/>
+              </a:spcAft>
+            </a:pPr>
+            <a:r>
+              <a:rPr sz="1900" b="0" i="0">
+                <a:solidFill>
+                  <a:srgbClr val="333333"/>
+                </a:solidFill>
+                <a:latin typeface="Calibri"/>
+              </a:rPr>
+              <a:t>–   Una historia con solo criterios felices es una historia a medio pensar.</a:t>
+            </a:r>
+          </a:p>
+          <a:p>
+            <a:pPr>
+              <a:spcAft>
+                <a:spcPts val="800"/>
+              </a:spcAft>
+            </a:pPr>
+            <a:r>
+              <a:rPr sz="1900" b="0" i="0">
+                <a:solidFill>
+                  <a:srgbClr val="333333"/>
+                </a:solidFill>
+                <a:latin typeface="Calibri"/>
+              </a:rPr>
+              <a:t>–   Ademas, los criterios de aceptacion son el puente directo con el prototipo navegable y con las pruebas que hara el companero de Programacion II, porque son literalmente el guion de lo que se va a revisar.</a:t>
             </a:r>
           </a:p>
         </p:txBody>
@@ -8686,7 +10925,7 @@
         <p:spPr>
           <a:xfrm>
             <a:off x="0" y="0"/>
-            <a:ext cx="12191695" cy="1170432"/>
+            <a:ext cx="12191695" cy="960120"/>
           </a:xfrm>
           <a:prstGeom prst="rect">
             <a:avLst/>
@@ -8728,7 +10967,7 @@
         </p:nvSpPr>
         <p:spPr>
           <a:xfrm>
-            <a:off x="0" y="1170432"/>
+            <a:off x="0" y="960120"/>
             <a:ext cx="12191695" cy="41148"/>
           </a:xfrm>
           <a:prstGeom prst="rect">
@@ -8772,7 +11011,7 @@
         <p:spPr>
           <a:xfrm>
             <a:off x="457200" y="164592"/>
-            <a:ext cx="11277295" cy="384048"/>
+            <a:ext cx="11277295" cy="502920"/>
           </a:xfrm>
           <a:prstGeom prst="rect">
             <a:avLst/>
@@ -8792,7 +11031,7 @@
                 </a:solidFill>
                 <a:latin typeface="Calibri"/>
               </a:rPr>
-              <a:t>Herramientas de hoy</a:t>
+              <a:t>INVEST es la lista de chequeo para saber si una historia esta bien...</a:t>
             </a:r>
           </a:p>
         </p:txBody>
@@ -8805,8 +11044,8 @@
         </p:nvSpPr>
         <p:spPr>
           <a:xfrm>
-            <a:off x="457200" y="566928"/>
-            <a:ext cx="11277295" cy="411480"/>
+            <a:off x="457200" y="1170432"/>
+            <a:ext cx="11277295" cy="5230368"/>
           </a:xfrm>
           <a:prstGeom prst="rect">
             <a:avLst/>
@@ -8819,633 +11058,138 @@
           </a:bodyPr>
           <a:lstStyle/>
           <a:p>
-            <a:r>
-              <a:rPr sz="1400" b="0" i="0">
-                <a:solidFill>
-                  <a:srgbClr val="B8D8EE"/>
-                </a:solidFill>
-                <a:latin typeface="Calibri"/>
-              </a:rPr>
-              <a:t>Gratis · funcionan en el navegador</a:t>
-            </a:r>
-          </a:p>
-        </p:txBody>
-      </p:sp>
-      <p:sp>
-        <p:nvSpPr>
-          <p:cNvPr id="6" name="Rounded Rectangle 5"/>
-          <p:cNvSpPr/>
-          <p:nvPr/>
-        </p:nvSpPr>
-        <p:spPr>
-          <a:xfrm>
-            <a:off x="457200" y="1591056"/>
-            <a:ext cx="3624986" cy="2331720"/>
-          </a:xfrm>
-          <a:prstGeom prst="roundRect">
-            <a:avLst>
-              <a:gd name="adj" fmla="val 12000"/>
-            </a:avLst>
-          </a:prstGeom>
-          <a:solidFill>
-            <a:srgbClr val="F2F2F2"/>
-          </a:solidFill>
-          <a:ln>
-            <a:noFill/>
-          </a:ln>
-        </p:spPr>
-        <p:style>
-          <a:lnRef idx="1">
-            <a:schemeClr val="accent1"/>
-          </a:lnRef>
-          <a:fillRef idx="3">
-            <a:schemeClr val="accent1"/>
-          </a:fillRef>
-          <a:effectRef idx="2">
-            <a:schemeClr val="accent1"/>
-          </a:effectRef>
-          <a:fontRef idx="minor">
-            <a:schemeClr val="lt1"/>
-          </a:fontRef>
-        </p:style>
-        <p:txBody>
-          <a:bodyPr rtlCol="0" anchor="ctr"/>
-          <a:lstStyle/>
-          <a:p>
-            <a:pPr algn="ctr"/>
-          </a:p>
-        </p:txBody>
-      </p:sp>
-      <p:sp>
-        <p:nvSpPr>
-          <p:cNvPr id="7" name="Rectangle 6"/>
-          <p:cNvSpPr/>
-          <p:nvPr/>
-        </p:nvSpPr>
-        <p:spPr>
-          <a:xfrm>
-            <a:off x="457200" y="1591056"/>
-            <a:ext cx="3624986" cy="64008"/>
-          </a:xfrm>
-          <a:prstGeom prst="rect">
-            <a:avLst/>
-          </a:prstGeom>
-          <a:solidFill>
-            <a:srgbClr val="095292"/>
-          </a:solidFill>
-          <a:ln>
-            <a:noFill/>
-          </a:ln>
-        </p:spPr>
-        <p:style>
-          <a:lnRef idx="1">
-            <a:schemeClr val="accent1"/>
-          </a:lnRef>
-          <a:fillRef idx="3">
-            <a:schemeClr val="accent1"/>
-          </a:fillRef>
-          <a:effectRef idx="2">
-            <a:schemeClr val="accent1"/>
-          </a:effectRef>
-          <a:fontRef idx="minor">
-            <a:schemeClr val="lt1"/>
-          </a:fontRef>
-        </p:style>
-        <p:txBody>
-          <a:bodyPr rtlCol="0" anchor="ctr"/>
-          <a:lstStyle/>
-          <a:p>
-            <a:pPr algn="ctr"/>
-          </a:p>
-        </p:txBody>
-      </p:sp>
-      <p:sp>
-        <p:nvSpPr>
-          <p:cNvPr id="8" name="Rectangle 7"/>
-          <p:cNvSpPr/>
-          <p:nvPr/>
-        </p:nvSpPr>
-        <p:spPr>
-          <a:xfrm>
-            <a:off x="457200" y="1655064"/>
-            <a:ext cx="3624986" cy="27432"/>
-          </a:xfrm>
-          <a:prstGeom prst="rect">
-            <a:avLst/>
-          </a:prstGeom>
-          <a:solidFill>
-            <a:srgbClr val="FFD000"/>
-          </a:solidFill>
-          <a:ln>
-            <a:noFill/>
-          </a:ln>
-        </p:spPr>
-        <p:style>
-          <a:lnRef idx="1">
-            <a:schemeClr val="accent1"/>
-          </a:lnRef>
-          <a:fillRef idx="3">
-            <a:schemeClr val="accent1"/>
-          </a:fillRef>
-          <a:effectRef idx="2">
-            <a:schemeClr val="accent1"/>
-          </a:effectRef>
-          <a:fontRef idx="minor">
-            <a:schemeClr val="lt1"/>
-          </a:fontRef>
-        </p:style>
-        <p:txBody>
-          <a:bodyPr rtlCol="0" anchor="ctr"/>
-          <a:lstStyle/>
-          <a:p>
-            <a:pPr algn="ctr"/>
-          </a:p>
-        </p:txBody>
-      </p:sp>
-      <p:pic>
-        <p:nvPicPr>
-          <p:cNvPr id="9" name="Picture 8" descr="excalidraw.png"/>
-          <p:cNvPicPr>
-            <a:picLocks noChangeAspect="1"/>
-          </p:cNvPicPr>
-          <p:nvPr/>
-        </p:nvPicPr>
-        <p:blipFill>
-          <a:blip r:embed="rId2"/>
-          <a:stretch>
-            <a:fillRect/>
-          </a:stretch>
-        </p:blipFill>
-        <p:spPr>
-          <a:xfrm>
-            <a:off x="1643329" y="1847087"/>
-            <a:ext cx="1252728" cy="1252728"/>
-          </a:xfrm>
-          <a:prstGeom prst="rect">
-            <a:avLst/>
-          </a:prstGeom>
-        </p:spPr>
-      </p:pic>
-      <p:sp>
-        <p:nvSpPr>
-          <p:cNvPr id="10" name="TextBox 9"/>
-          <p:cNvSpPr txBox="1"/>
-          <p:nvPr/>
-        </p:nvSpPr>
-        <p:spPr>
-          <a:xfrm>
-            <a:off x="530352" y="3191256"/>
-            <a:ext cx="3478682" cy="621792"/>
-          </a:xfrm>
-          <a:prstGeom prst="rect">
-            <a:avLst/>
-          </a:prstGeom>
-          <a:noFill/>
-        </p:spPr>
-        <p:txBody>
-          <a:bodyPr wrap="square" anchor="t"/>
-          <a:lstStyle/>
-          <a:p>
-            <a:pPr algn="ctr"/>
-            <a:r>
-              <a:rPr sz="1300" b="1" i="0">
-                <a:solidFill>
-                  <a:srgbClr val="095292"/>
-                </a:solidFill>
-                <a:latin typeface="Calibri"/>
-              </a:rPr>
-              <a:t>Excalidraw</a:t>
-            </a:r>
-          </a:p>
-          <a:p>
-            <a:pPr algn="ctr">
-              <a:spcBef>
-                <a:spcPts val="200"/>
-              </a:spcBef>
+            <a:pPr>
+              <a:spcAft>
+                <a:spcPts val="800"/>
+              </a:spcAft>
             </a:pPr>
             <a:r>
-              <a:rPr sz="1000" b="0" i="0">
-                <a:solidFill>
-                  <a:srgbClr val="666666"/>
-                </a:solidFill>
-                <a:latin typeface="Calibri"/>
-              </a:rPr>
-              <a:t>Bocetos rapidos a mano alzada</a:t>
-            </a:r>
-          </a:p>
-        </p:txBody>
-      </p:sp>
-      <p:sp>
-        <p:nvSpPr>
-          <p:cNvPr id="11" name="Rounded Rectangle 10"/>
-          <p:cNvSpPr/>
-          <p:nvPr/>
-        </p:nvSpPr>
-        <p:spPr>
-          <a:xfrm>
-            <a:off x="4283354" y="1591056"/>
-            <a:ext cx="3624986" cy="2331720"/>
-          </a:xfrm>
-          <a:prstGeom prst="roundRect">
-            <a:avLst>
-              <a:gd name="adj" fmla="val 12000"/>
-            </a:avLst>
-          </a:prstGeom>
-          <a:solidFill>
-            <a:srgbClr val="F2F2F2"/>
-          </a:solidFill>
-          <a:ln>
-            <a:noFill/>
-          </a:ln>
-        </p:spPr>
-        <p:style>
-          <a:lnRef idx="1">
-            <a:schemeClr val="accent1"/>
-          </a:lnRef>
-          <a:fillRef idx="3">
-            <a:schemeClr val="accent1"/>
-          </a:fillRef>
-          <a:effectRef idx="2">
-            <a:schemeClr val="accent1"/>
-          </a:effectRef>
-          <a:fontRef idx="minor">
-            <a:schemeClr val="lt1"/>
-          </a:fontRef>
-        </p:style>
-        <p:txBody>
-          <a:bodyPr rtlCol="0" anchor="ctr"/>
-          <a:lstStyle/>
-          <a:p>
-            <a:pPr algn="ctr"/>
-          </a:p>
-        </p:txBody>
-      </p:sp>
-      <p:sp>
-        <p:nvSpPr>
-          <p:cNvPr id="12" name="Rectangle 11"/>
-          <p:cNvSpPr/>
-          <p:nvPr/>
-        </p:nvSpPr>
-        <p:spPr>
-          <a:xfrm>
-            <a:off x="4283354" y="1591056"/>
-            <a:ext cx="3624986" cy="64008"/>
-          </a:xfrm>
-          <a:prstGeom prst="rect">
-            <a:avLst/>
-          </a:prstGeom>
-          <a:solidFill>
-            <a:srgbClr val="095292"/>
-          </a:solidFill>
-          <a:ln>
-            <a:noFill/>
-          </a:ln>
-        </p:spPr>
-        <p:style>
-          <a:lnRef idx="1">
-            <a:schemeClr val="accent1"/>
-          </a:lnRef>
-          <a:fillRef idx="3">
-            <a:schemeClr val="accent1"/>
-          </a:fillRef>
-          <a:effectRef idx="2">
-            <a:schemeClr val="accent1"/>
-          </a:effectRef>
-          <a:fontRef idx="minor">
-            <a:schemeClr val="lt1"/>
-          </a:fontRef>
-        </p:style>
-        <p:txBody>
-          <a:bodyPr rtlCol="0" anchor="ctr"/>
-          <a:lstStyle/>
-          <a:p>
-            <a:pPr algn="ctr"/>
-          </a:p>
-        </p:txBody>
-      </p:sp>
-      <p:sp>
-        <p:nvSpPr>
-          <p:cNvPr id="13" name="Rectangle 12"/>
-          <p:cNvSpPr/>
-          <p:nvPr/>
-        </p:nvSpPr>
-        <p:spPr>
-          <a:xfrm>
-            <a:off x="4283354" y="1655064"/>
-            <a:ext cx="3624986" cy="27432"/>
-          </a:xfrm>
-          <a:prstGeom prst="rect">
-            <a:avLst/>
-          </a:prstGeom>
-          <a:solidFill>
-            <a:srgbClr val="FFD000"/>
-          </a:solidFill>
-          <a:ln>
-            <a:noFill/>
-          </a:ln>
-        </p:spPr>
-        <p:style>
-          <a:lnRef idx="1">
-            <a:schemeClr val="accent1"/>
-          </a:lnRef>
-          <a:fillRef idx="3">
-            <a:schemeClr val="accent1"/>
-          </a:fillRef>
-          <a:effectRef idx="2">
-            <a:schemeClr val="accent1"/>
-          </a:effectRef>
-          <a:fontRef idx="minor">
-            <a:schemeClr val="lt1"/>
-          </a:fontRef>
-        </p:style>
-        <p:txBody>
-          <a:bodyPr rtlCol="0" anchor="ctr"/>
-          <a:lstStyle/>
-          <a:p>
-            <a:pPr algn="ctr"/>
-          </a:p>
-        </p:txBody>
-      </p:sp>
-      <p:pic>
-        <p:nvPicPr>
-          <p:cNvPr id="14" name="Picture 13" descr="google_docs.png"/>
-          <p:cNvPicPr>
-            <a:picLocks noChangeAspect="1"/>
-          </p:cNvPicPr>
-          <p:nvPr/>
-        </p:nvPicPr>
-        <p:blipFill>
-          <a:blip r:embed="rId3"/>
-          <a:stretch>
-            <a:fillRect/>
-          </a:stretch>
-        </p:blipFill>
-        <p:spPr>
-          <a:xfrm>
-            <a:off x="5469483" y="1847087"/>
-            <a:ext cx="1252728" cy="1252728"/>
-          </a:xfrm>
-          <a:prstGeom prst="rect">
-            <a:avLst/>
-          </a:prstGeom>
-        </p:spPr>
-      </p:pic>
-      <p:sp>
-        <p:nvSpPr>
-          <p:cNvPr id="15" name="TextBox 14"/>
-          <p:cNvSpPr txBox="1"/>
-          <p:nvPr/>
-        </p:nvSpPr>
-        <p:spPr>
-          <a:xfrm>
-            <a:off x="4356506" y="3191256"/>
-            <a:ext cx="3478682" cy="621792"/>
-          </a:xfrm>
-          <a:prstGeom prst="rect">
-            <a:avLst/>
-          </a:prstGeom>
-          <a:noFill/>
-        </p:spPr>
-        <p:txBody>
-          <a:bodyPr wrap="square" anchor="t"/>
-          <a:lstStyle/>
-          <a:p>
-            <a:pPr algn="ctr"/>
-            <a:r>
-              <a:rPr sz="1300" b="1" i="0">
-                <a:solidFill>
-                  <a:srgbClr val="095292"/>
-                </a:solidFill>
-                <a:latin typeface="Calibri"/>
-              </a:rPr>
-              <a:t>google docs</a:t>
-            </a:r>
-          </a:p>
-          <a:p>
-            <a:pPr algn="ctr">
-              <a:spcBef>
-                <a:spcPts val="200"/>
-              </a:spcBef>
+              <a:rPr sz="2000" b="0" i="0">
+                <a:solidFill>
+                  <a:srgbClr val="333333"/>
+                </a:solidFill>
+                <a:latin typeface="Calibri"/>
+              </a:rPr>
+              <a:t>–   INVEST es la lista de chequeo para saber si una historia esta bien cortada, y conviene revisarla letra por letra con VetCare en la mano.</a:t>
+            </a:r>
+          </a:p>
+          <a:p>
+            <a:pPr>
+              <a:spcAft>
+                <a:spcPts val="800"/>
+              </a:spcAft>
             </a:pPr>
             <a:r>
-              <a:rPr sz="1000" b="0" i="0">
-                <a:solidFill>
-                  <a:srgbClr val="666666"/>
-                </a:solidFill>
-                <a:latin typeface="Calibri"/>
-              </a:rPr>
-              <a:t>Documentos del paquete de diseño</a:t>
-            </a:r>
-          </a:p>
-        </p:txBody>
-      </p:sp>
-      <p:sp>
-        <p:nvSpPr>
-          <p:cNvPr id="16" name="Rounded Rectangle 15"/>
-          <p:cNvSpPr/>
-          <p:nvPr/>
-        </p:nvSpPr>
-        <p:spPr>
-          <a:xfrm>
-            <a:off x="8109508" y="1591056"/>
-            <a:ext cx="3624986" cy="2331720"/>
-          </a:xfrm>
-          <a:prstGeom prst="roundRect">
-            <a:avLst>
-              <a:gd name="adj" fmla="val 12000"/>
-            </a:avLst>
-          </a:prstGeom>
-          <a:solidFill>
-            <a:srgbClr val="F2F2F2"/>
-          </a:solidFill>
-          <a:ln>
-            <a:noFill/>
-          </a:ln>
-        </p:spPr>
-        <p:style>
-          <a:lnRef idx="1">
-            <a:schemeClr val="accent1"/>
-          </a:lnRef>
-          <a:fillRef idx="3">
-            <a:schemeClr val="accent1"/>
-          </a:fillRef>
-          <a:effectRef idx="2">
-            <a:schemeClr val="accent1"/>
-          </a:effectRef>
-          <a:fontRef idx="minor">
-            <a:schemeClr val="lt1"/>
-          </a:fontRef>
-        </p:style>
-        <p:txBody>
-          <a:bodyPr rtlCol="0" anchor="ctr"/>
-          <a:lstStyle/>
-          <a:p>
-            <a:pPr algn="ctr"/>
-          </a:p>
-        </p:txBody>
-      </p:sp>
-      <p:sp>
-        <p:nvSpPr>
-          <p:cNvPr id="17" name="Rectangle 16"/>
-          <p:cNvSpPr/>
-          <p:nvPr/>
-        </p:nvSpPr>
-        <p:spPr>
-          <a:xfrm>
-            <a:off x="8109508" y="1591056"/>
-            <a:ext cx="3624986" cy="64008"/>
-          </a:xfrm>
-          <a:prstGeom prst="rect">
-            <a:avLst/>
-          </a:prstGeom>
-          <a:solidFill>
-            <a:srgbClr val="095292"/>
-          </a:solidFill>
-          <a:ln>
-            <a:noFill/>
-          </a:ln>
-        </p:spPr>
-        <p:style>
-          <a:lnRef idx="1">
-            <a:schemeClr val="accent1"/>
-          </a:lnRef>
-          <a:fillRef idx="3">
-            <a:schemeClr val="accent1"/>
-          </a:fillRef>
-          <a:effectRef idx="2">
-            <a:schemeClr val="accent1"/>
-          </a:effectRef>
-          <a:fontRef idx="minor">
-            <a:schemeClr val="lt1"/>
-          </a:fontRef>
-        </p:style>
-        <p:txBody>
-          <a:bodyPr rtlCol="0" anchor="ctr"/>
-          <a:lstStyle/>
-          <a:p>
-            <a:pPr algn="ctr"/>
-          </a:p>
-        </p:txBody>
-      </p:sp>
-      <p:sp>
-        <p:nvSpPr>
-          <p:cNvPr id="18" name="Rectangle 17"/>
-          <p:cNvSpPr/>
-          <p:nvPr/>
-        </p:nvSpPr>
-        <p:spPr>
-          <a:xfrm>
-            <a:off x="8109508" y="1655064"/>
-            <a:ext cx="3624986" cy="27432"/>
-          </a:xfrm>
-          <a:prstGeom prst="rect">
-            <a:avLst/>
-          </a:prstGeom>
-          <a:solidFill>
-            <a:srgbClr val="FFD000"/>
-          </a:solidFill>
-          <a:ln>
-            <a:noFill/>
-          </a:ln>
-        </p:spPr>
-        <p:style>
-          <a:lnRef idx="1">
-            <a:schemeClr val="accent1"/>
-          </a:lnRef>
-          <a:fillRef idx="3">
-            <a:schemeClr val="accent1"/>
-          </a:fillRef>
-          <a:effectRef idx="2">
-            <a:schemeClr val="accent1"/>
-          </a:effectRef>
-          <a:fontRef idx="minor">
-            <a:schemeClr val="lt1"/>
-          </a:fontRef>
-        </p:style>
-        <p:txBody>
-          <a:bodyPr rtlCol="0" anchor="ctr"/>
-          <a:lstStyle/>
-          <a:p>
-            <a:pPr algn="ctr"/>
-          </a:p>
-        </p:txBody>
-      </p:sp>
-      <p:pic>
-        <p:nvPicPr>
-          <p:cNvPr id="19" name="Picture 18" descr="examlab.png"/>
-          <p:cNvPicPr>
-            <a:picLocks noChangeAspect="1"/>
-          </p:cNvPicPr>
-          <p:nvPr/>
-        </p:nvPicPr>
-        <p:blipFill>
-          <a:blip r:embed="rId4"/>
-          <a:stretch>
-            <a:fillRect/>
-          </a:stretch>
-        </p:blipFill>
-        <p:spPr>
-          <a:xfrm>
-            <a:off x="9295638" y="1847087"/>
-            <a:ext cx="1252728" cy="1252728"/>
-          </a:xfrm>
-          <a:prstGeom prst="rect">
-            <a:avLst/>
-          </a:prstGeom>
-        </p:spPr>
-      </p:pic>
-      <p:sp>
-        <p:nvSpPr>
-          <p:cNvPr id="20" name="TextBox 19"/>
-          <p:cNvSpPr txBox="1"/>
-          <p:nvPr/>
-        </p:nvSpPr>
-        <p:spPr>
-          <a:xfrm>
-            <a:off x="8182660" y="3191256"/>
-            <a:ext cx="3478682" cy="621792"/>
-          </a:xfrm>
-          <a:prstGeom prst="rect">
-            <a:avLst/>
-          </a:prstGeom>
-          <a:noFill/>
-        </p:spPr>
-        <p:txBody>
-          <a:bodyPr wrap="square" anchor="t"/>
-          <a:lstStyle/>
-          <a:p>
-            <a:pPr algn="ctr"/>
-            <a:r>
-              <a:rPr sz="1300" b="1" i="0">
-                <a:solidFill>
-                  <a:srgbClr val="095292"/>
-                </a:solidFill>
-                <a:latin typeface="Calibri"/>
-              </a:rPr>
-              <a:t>la plataforma del curso</a:t>
-            </a:r>
-          </a:p>
-          <a:p>
-            <a:pPr algn="ctr">
-              <a:spcBef>
-                <a:spcPts val="200"/>
-              </a:spcBef>
+              <a:rPr sz="2000" b="0" i="0">
+                <a:solidFill>
+                  <a:srgbClr val="333333"/>
+                </a:solidFill>
+                <a:latin typeface="Calibri"/>
+              </a:rPr>
+              <a:t>–   Independiente: se puede hacer sin esperar a otra; si la historia de agendar cita necesita obligatoriamente que exista la de registrar mascota, hay dependencia y toca ordenarlas.</a:t>
+            </a:r>
+          </a:p>
+          <a:p>
+            <a:pPr>
+              <a:spcAft>
+                <a:spcPts val="800"/>
+              </a:spcAft>
             </a:pPr>
             <a:r>
-              <a:rPr sz="1000" b="0" i="0">
-                <a:solidFill>
-                  <a:srgbClr val="666666"/>
-                </a:solidFill>
-                <a:latin typeface="Calibri"/>
-              </a:rPr>
-              <a:t>Entrega del taller · en la fecha que indique el docente</a:t>
-            </a:r>
-          </a:p>
-        </p:txBody>
-      </p:sp>
-      <p:sp>
-        <p:nvSpPr>
-          <p:cNvPr id="21" name="TextBox 20"/>
+              <a:rPr sz="2000" b="0" i="0">
+                <a:solidFill>
+                  <a:srgbClr val="333333"/>
+                </a:solidFill>
+                <a:latin typeface="Calibri"/>
+              </a:rPr>
+              <a:t>–   Negociable: la historia describe la necesidad, no la solucion tecnica; decir quiero un combo desplegable con autocompletar en JavaScript ya no es historia, es diseno impuesto.</a:t>
+            </a:r>
+          </a:p>
+          <a:p>
+            <a:pPr>
+              <a:spcAft>
+                <a:spcPts val="800"/>
+              </a:spcAft>
+            </a:pPr>
+            <a:r>
+              <a:rPr sz="2000" b="0" i="0">
+                <a:solidFill>
+                  <a:srgbClr val="333333"/>
+                </a:solidFill>
+                <a:latin typeface="Calibri"/>
+              </a:rPr>
+              <a:t>–   Valiosa: alguien de la clinica gana algo real; si nadie de Huellitas nota la diferencia, no es historia sino tarea interna.</a:t>
+            </a:r>
+          </a:p>
+          <a:p>
+            <a:pPr>
+              <a:spcAft>
+                <a:spcPts val="800"/>
+              </a:spcAft>
+            </a:pPr>
+            <a:r>
+              <a:rPr sz="2000" b="0" i="0">
+                <a:solidFill>
+                  <a:srgbClr val="333333"/>
+                </a:solidFill>
+                <a:latin typeface="Calibri"/>
+              </a:rPr>
+              <a:t>–   Estimable: el equipo entiende lo suficiente para tallarla; si nadie sabe cuanto pesa, falta conversacion o hace falta investigar aparte.</a:t>
+            </a:r>
+          </a:p>
+          <a:p>
+            <a:pPr>
+              <a:spcAft>
+                <a:spcPts val="800"/>
+              </a:spcAft>
+            </a:pPr>
+            <a:r>
+              <a:rPr sz="2000" b="0" i="0">
+                <a:solidFill>
+                  <a:srgbClr val="333333"/>
+                </a:solidFill>
+                <a:latin typeface="Calibri"/>
+              </a:rPr>
+              <a:t>–   Small o pequena: cabe en una iteracion; si toma tres semanas es una epica disfrazada.</a:t>
+            </a:r>
+          </a:p>
+          <a:p>
+            <a:pPr>
+              <a:spcAft>
+                <a:spcPts val="800"/>
+              </a:spcAft>
+            </a:pPr>
+            <a:r>
+              <a:rPr sz="2000" b="0" i="0">
+                <a:solidFill>
+                  <a:srgbClr val="333333"/>
+                </a:solidFill>
+                <a:latin typeface="Calibri"/>
+              </a:rPr>
+              <a:t>–   Testeable: tiene criterios verificables, que es exactamente la misma regla de oro de la clase pasada aplicada en formato agil.</a:t>
+            </a:r>
+          </a:p>
+          <a:p>
+            <a:pPr>
+              <a:spcAft>
+                <a:spcPts val="800"/>
+              </a:spcAft>
+            </a:pPr>
+            <a:r>
+              <a:rPr sz="2000" b="0" i="0">
+                <a:solidFill>
+                  <a:srgbClr val="333333"/>
+                </a:solidFill>
+                <a:latin typeface="Calibri"/>
+              </a:rPr>
+              <a:t>–   Una historia que falla dos letras de INVEST no se planea todavia, se vuelve a partir.</a:t>
+            </a:r>
+          </a:p>
+        </p:txBody>
+      </p:sp>
+      <p:sp>
+        <p:nvSpPr>
+          <p:cNvPr id="6" name="TextBox 5"/>
           <p:cNvSpPr txBox="1"/>
           <p:nvPr/>
         </p:nvSpPr>
@@ -9619,7 +11363,7 @@
                 </a:solidFill>
                 <a:latin typeface="Calibri"/>
               </a:rPr>
-              <a:t>Taller PI — por que importa</a:t>
+              <a:t>Una epica es una historia grande que todavia no cabe en una iteracion...</a:t>
             </a:r>
           </a:p>
         </p:txBody>
@@ -9658,25 +11402,7 @@
                 </a:solidFill>
                 <a:latin typeface="Calibri"/>
               </a:rPr>
-              <a:t>–   </a:t>
-            </a:r>
-            <a:r>
-              <a:rPr sz="2000" b="1" i="0">
-                <a:solidFill>
-                  <a:srgbClr val="333333"/>
-                </a:solidFill>
-                <a:latin typeface="Calibri"/>
-              </a:rPr>
-              <a:t>Por que importa al PI:</a:t>
-            </a:r>
-            <a:r>
-              <a:rPr sz="2000" b="0" i="0">
-                <a:solidFill>
-                  <a:srgbClr val="333333"/>
-                </a:solidFill>
-                <a:latin typeface="Calibri"/>
-              </a:rPr>
-              <a:t> el backlog es la version ejecutable del catalogo de requisitos; es la lista con la que se decide que se disena primero y, en Programacion II, que se codifica primero.</a:t>
+              <a:t>–   Una epica es una historia grande que todavia no cabe en una iteracion, y descomponerla es una habilidad que se aprende cortando mal varias veces.</a:t>
             </a:r>
           </a:p>
           <a:p>
@@ -9692,7 +11418,7 @@
                 </a:solidFill>
                 <a:latin typeface="Calibri"/>
               </a:rPr>
-              <a:t>–   Los criterios de aceptacion que escriba hoy se vuelven literalmente el guion de revision del prototipo navegable y de las pruebas del sistema.</a:t>
+              <a:t>–   El corte correcto es vertical, como una rebanada de pastel que trae bizcocho, crema y cubierta: cada historia atraviesa pantalla, logica y datos y deja algo que el usuario puede usar.</a:t>
             </a:r>
           </a:p>
           <a:p>
@@ -9708,7 +11434,55 @@
                 </a:solidFill>
                 <a:latin typeface="Calibri"/>
               </a:rPr>
-              <a:t>–   Una historia sin beneficio claro es una funcionalidad que nadie va a extranar si no se hace: aqui es donde se justifica cada pantalla de VetCare.</a:t>
+              <a:t>–   El corte equivocado es horizontal, por capas: una historia para la pantalla, otra para la logica y otra para la base de datos; asi ninguna de las tres sirve sola y el cliente no ve nada hasta que estan las tres.</a:t>
+            </a:r>
+          </a:p>
+          <a:p>
+            <a:pPr>
+              <a:spcAft>
+                <a:spcPts val="800"/>
+              </a:spcAft>
+            </a:pPr>
+            <a:r>
+              <a:rPr sz="2000" b="0" i="0">
+                <a:solidFill>
+                  <a:srgbClr val="333333"/>
+                </a:solidFill>
+                <a:latin typeface="Calibri"/>
+              </a:rPr>
+              <a:t>–   En VetCare la epica Historial clinico se parte en: consultar historial por documento del dueno, registrar una atencion nueva, adjuntar resultados de laboratorio y filtrar el historial por rango de fechas; cada una entregable y demostrable por separado.</a:t>
+            </a:r>
+          </a:p>
+          <a:p>
+            <a:pPr>
+              <a:spcAft>
+                <a:spcPts val="800"/>
+              </a:spcAft>
+            </a:pPr>
+            <a:r>
+              <a:rPr sz="2000" b="0" i="0">
+                <a:solidFill>
+                  <a:srgbClr val="333333"/>
+                </a:solidFill>
+                <a:latin typeface="Calibri"/>
+              </a:rPr>
+              <a:t>–   Otros ejes utiles para cortar son por tipo de dato (primero solo perros y gatos, despues otras especies), por regla de negocio (primero sin control de acceso, luego con perfiles) y por camino (primero el flujo feliz, luego los errores).</a:t>
+            </a:r>
+          </a:p>
+          <a:p>
+            <a:pPr>
+              <a:spcAft>
+                <a:spcPts val="800"/>
+              </a:spcAft>
+            </a:pPr>
+            <a:r>
+              <a:rPr sz="2000" b="0" i="0">
+                <a:solidFill>
+                  <a:srgbClr val="333333"/>
+                </a:solidFill>
+                <a:latin typeface="Calibri"/>
+              </a:rPr>
+              <a:t>–   El nombre de la epica se conserva como etiqueta en cada historia para no perder el hilo.</a:t>
             </a:r>
           </a:p>
         </p:txBody>
@@ -9889,7 +11663,7 @@
                 </a:solidFill>
                 <a:latin typeface="Calibri"/>
               </a:rPr>
-              <a:t>Taller PI — punto de partida</a:t>
+              <a:t>Estimar en agil no es adivinar horas sino comparar tamanos, y esa es la... (1/2)</a:t>
             </a:r>
           </a:p>
         </p:txBody>
@@ -9928,7 +11702,7 @@
                 </a:solidFill>
                 <a:latin typeface="Calibri"/>
               </a:rPr>
-              <a:t>–   Ya existe el catalogo de requisitos de VetCare con RF, RNF, prioridades MoSCoW y matriz de trazabilidad aprobados en la clase anterior.</a:t>
+              <a:t>–   Estimar en agil no es adivinar horas sino comparar tamanos, y esa es la razon de los puntos de historia: son una medida relativa que mezcla esfuerzo, complejidad e incertidumbre.</a:t>
             </a:r>
           </a:p>
           <a:p>
@@ -9944,7 +11718,7 @@
                 </a:solidFill>
                 <a:latin typeface="Calibri"/>
               </a:rPr>
-              <a:t>–   Ese catalogo esta escrito en lenguaje formal de analista y todavia no permite decidir por donde arrancar ni cuanto pesa cada pieza.</a:t>
+              <a:t>–   Se toma una historia mediana y conocida como referencia (por ejemplo registrar un dueno vale 3 puntos) y todas las demas se comparan contra ella usando una escala tipo Fibonacci 1, 2, 3, 5</a:t>
             </a:r>
           </a:p>
           <a:p>
@@ -9960,7 +11734,23 @@
                 </a:solidFill>
                 <a:latin typeface="Calibri"/>
               </a:rPr>
-              <a:t>–   El equipo del Proyecto Integrador necesita una lista ordenada de trabajo para poder repartirse las siguientes semanas entre diseno y construccion.</a:t>
+              <a:t>–   8, 13, donde el salto grande refleja que entre mas grande la historia, menos confiable la estimacion; si algo llega a 13 o mas, la senal no es de dificultad sino de que hay que partirla.</a:t>
+            </a:r>
+          </a:p>
+          <a:p>
+            <a:pPr>
+              <a:spcAft>
+                <a:spcPts val="800"/>
+              </a:spcAft>
+            </a:pPr>
+            <a:r>
+              <a:rPr sz="2000" b="0" i="0">
+                <a:solidFill>
+                  <a:srgbClr val="333333"/>
+                </a:solidFill>
+                <a:latin typeface="Calibri"/>
+              </a:rPr>
+              <a:t>–   La tecnica de sala es el planning poker: todos muestran su carta al tiempo y lo importante no es el numero sino la discusion cuando alguien dice 2 y otro dice 8, porque ahi aparece el requisito que unos entendieron y otros no.</a:t>
             </a:r>
           </a:p>
         </p:txBody>

--- a/Seminario de Sistemas/Clases/Clase 7 - Historias de usuario/Presentacion.pptx
+++ b/Seminario de Sistemas/Clases/Clase 7 - Historias de usuario/Presentacion.pptx
@@ -25,6 +25,9 @@
     <p:sldId id="273" r:id="rId24"/>
     <p:sldId id="274" r:id="rId25"/>
     <p:sldId id="275" r:id="rId26"/>
+    <p:sldId id="276" r:id="rId27"/>
+    <p:sldId id="277" r:id="rId28"/>
+    <p:sldId id="278" r:id="rId29"/>
   </p:sldIdLst>
   <p:sldSz cx="12191695" cy="6858000" type="screen4x3"/>
   <p:notesSz cx="6858000" cy="9144000"/>
@@ -3625,7 +3628,7 @@
                 </a:solidFill>
                 <a:latin typeface="Calibri"/>
               </a:rPr>
-              <a:t>Estimar en agil no es adivinar horas sino comparar tamanos, y esa es la... (2/2)</a:t>
+              <a:t>Una epica es una historia grande que todavia no cabe en una iteracion... (1/2)</a:t>
             </a:r>
           </a:p>
         </p:txBody>
@@ -3664,7 +3667,7 @@
                 </a:solidFill>
                 <a:latin typeface="Calibri"/>
               </a:rPr>
-              <a:t>–   Con dos o tres iteraciones se conoce la velocidad del equipo y recien ahi se puede prometer fechas.</a:t>
+              <a:t>–   Una epica es una historia grande que todavia no cabe en una iteracion, y descomponerla es una habilidad que se aprende cortando mal varias veces.</a:t>
             </a:r>
           </a:p>
           <a:p>
@@ -3680,7 +3683,7 @@
                 </a:solidFill>
                 <a:latin typeface="Calibri"/>
               </a:rPr>
-              <a:t>–   En el Proyecto Integrador este backlog es la lista de trabajo que se le entrega al companero de Programacion II para que sepa por donde empezar</a:t>
+              <a:t>–   El corte correcto es vertical, como una rebanada de pastel que trae bizcocho, crema y cubierta: cada historia atraviesa pantalla, logica y datos y deja algo que el usuario puede usar.</a:t>
             </a:r>
           </a:p>
           <a:p>
@@ -3696,7 +3699,7 @@
                 </a:solidFill>
                 <a:latin typeface="Calibri"/>
               </a:rPr>
-              <a:t>–   Y quien solo cursa Seminario usa el mismo backlog para ordenar las pantallas de su prototipo navegable, en el mismo orden de prioridad.</a:t>
+              <a:t>–   El corte equivocado es horizontal, por capas: una historia para la pantalla, otra para la logica y otra para la base de datos; asi ninguna de las tres sirve sola y el cliente no ve nada hasta que estan las tres.</a:t>
             </a:r>
           </a:p>
         </p:txBody>
@@ -3877,141 +3880,21 @@
                 </a:solidFill>
                 <a:latin typeface="Calibri"/>
               </a:rPr>
-              <a:t>Historia HU-04 con criterios de aceptacion (artefacto proyectable)</a:t>
-            </a:r>
-          </a:p>
-        </p:txBody>
-      </p:sp>
-      <p:sp>
-        <p:nvSpPr>
-          <p:cNvPr id="5" name="Rounded Rectangle 4"/>
-          <p:cNvSpPr/>
-          <p:nvPr/>
-        </p:nvSpPr>
-        <p:spPr>
-          <a:xfrm>
-            <a:off x="457200" y="1261872"/>
-            <a:ext cx="11277295" cy="4773168"/>
-          </a:xfrm>
-          <a:prstGeom prst="roundRect">
-            <a:avLst>
-              <a:gd name="adj" fmla="val 12000"/>
-            </a:avLst>
-          </a:prstGeom>
-          <a:solidFill>
-            <a:srgbClr val="1E2A38"/>
-          </a:solidFill>
-          <a:ln>
-            <a:noFill/>
-          </a:ln>
-        </p:spPr>
-        <p:style>
-          <a:lnRef idx="1">
-            <a:schemeClr val="accent1"/>
-          </a:lnRef>
-          <a:fillRef idx="3">
-            <a:schemeClr val="accent1"/>
-          </a:fillRef>
-          <a:effectRef idx="2">
-            <a:schemeClr val="accent1"/>
-          </a:effectRef>
-          <a:fontRef idx="minor">
-            <a:schemeClr val="lt1"/>
-          </a:fontRef>
-        </p:style>
-        <p:txBody>
-          <a:bodyPr rtlCol="0" anchor="ctr"/>
-          <a:lstStyle/>
-          <a:p>
-            <a:pPr algn="ctr"/>
-          </a:p>
-        </p:txBody>
-      </p:sp>
-      <p:sp>
-        <p:nvSpPr>
-          <p:cNvPr id="6" name="Rectangle 5"/>
-          <p:cNvSpPr/>
-          <p:nvPr/>
-        </p:nvSpPr>
-        <p:spPr>
-          <a:xfrm>
-            <a:off x="457200" y="1261872"/>
-            <a:ext cx="11277295" cy="320040"/>
-          </a:xfrm>
-          <a:prstGeom prst="rect">
-            <a:avLst/>
-          </a:prstGeom>
-          <a:solidFill>
-            <a:srgbClr val="095292"/>
-          </a:solidFill>
-          <a:ln>
-            <a:noFill/>
-          </a:ln>
-        </p:spPr>
-        <p:style>
-          <a:lnRef idx="1">
-            <a:schemeClr val="accent1"/>
-          </a:lnRef>
-          <a:fillRef idx="3">
-            <a:schemeClr val="accent1"/>
-          </a:fillRef>
-          <a:effectRef idx="2">
-            <a:schemeClr val="accent1"/>
-          </a:effectRef>
-          <a:fontRef idx="minor">
-            <a:schemeClr val="lt1"/>
-          </a:fontRef>
-        </p:style>
-        <p:txBody>
-          <a:bodyPr rtlCol="0" anchor="ctr"/>
-          <a:lstStyle/>
-          <a:p>
-            <a:pPr algn="ctr"/>
-          </a:p>
-        </p:txBody>
-      </p:sp>
-      <p:sp>
-        <p:nvSpPr>
-          <p:cNvPr id="7" name="TextBox 6"/>
+              <a:t>Una epica es una historia grande que todavia no cabe en una iteracion... (2/2)</a:t>
+            </a:r>
+          </a:p>
+        </p:txBody>
+      </p:sp>
+      <p:sp>
+        <p:nvSpPr>
+          <p:cNvPr id="5" name="TextBox 4"/>
           <p:cNvSpPr txBox="1"/>
           <p:nvPr/>
         </p:nvSpPr>
         <p:spPr>
           <a:xfrm>
-            <a:off x="685800" y="1307592"/>
-            <a:ext cx="10820095" cy="256032"/>
-          </a:xfrm>
-          <a:prstGeom prst="rect">
-            <a:avLst/>
-          </a:prstGeom>
-          <a:noFill/>
-        </p:spPr>
-        <p:txBody>
-          <a:bodyPr wrap="square" anchor="ctr"/>
-          <a:lstStyle/>
-          <a:p>
-            <a:r>
-              <a:rPr sz="1000" b="1" i="0">
-                <a:solidFill>
-                  <a:srgbClr val="269CCB"/>
-                </a:solidFill>
-                <a:latin typeface="Calibri"/>
-              </a:rPr>
-              <a:t>● ● ●</a:t>
-            </a:r>
-          </a:p>
-        </p:txBody>
-      </p:sp>
-      <p:sp>
-        <p:nvSpPr>
-          <p:cNvPr id="8" name="TextBox 7"/>
-          <p:cNvSpPr txBox="1"/>
-          <p:nvPr/>
-        </p:nvSpPr>
-        <p:spPr>
-          <a:xfrm>
-            <a:off x="777240" y="1719072"/>
-            <a:ext cx="10637215" cy="4133087"/>
+            <a:off x="457200" y="1170432"/>
+            <a:ext cx="11277295" cy="5230368"/>
           </a:xfrm>
           <a:prstGeom prst="rect">
             <a:avLst/>
@@ -4026,235 +3909,40 @@
           <a:p>
             <a:pPr>
               <a:spcAft>
-                <a:spcPts val="400"/>
+                <a:spcPts val="800"/>
               </a:spcAft>
             </a:pPr>
             <a:r>
-              <a:rPr sz="1400" b="0" i="0">
-                <a:solidFill>
-                  <a:srgbClr val="FFFFFF"/>
-                </a:solidFill>
-                <a:latin typeface="Calibri"/>
-              </a:rPr>
-              <a:t>HU-04  [Epica: E-02 Historial y agenda]</a:t>
+              <a:rPr sz="2000" b="0" i="0">
+                <a:solidFill>
+                  <a:srgbClr val="333333"/>
+                </a:solidFill>
+                <a:latin typeface="Calibri"/>
+              </a:rPr>
+              <a:t>–   En VetCare la epica Historial clinico se parte en: consultar historial por documento del dueno, registrar una atencion nueva, adjuntar resultados de laboratorio y filtrar el historial por rango de fechas; cada una entregable y demostrable por separado.</a:t>
             </a:r>
           </a:p>
           <a:p>
             <a:pPr>
               <a:spcAft>
-                <a:spcPts val="400"/>
+                <a:spcPts val="800"/>
               </a:spcAft>
             </a:pPr>
             <a:r>
-              <a:rPr sz="1400" b="0" i="0">
-                <a:solidFill>
-                  <a:srgbClr val="FFFFFF"/>
-                </a:solidFill>
-                <a:latin typeface="Calibri"/>
-              </a:rPr>
-              <a:t>Como veterinario de la clinica Huellitas</a:t>
-            </a:r>
-          </a:p>
-          <a:p>
-            <a:pPr>
-              <a:spcAft>
-                <a:spcPts val="400"/>
-              </a:spcAft>
-            </a:pPr>
-            <a:r>
-              <a:rPr sz="1400" b="0" i="0">
-                <a:solidFill>
-                  <a:srgbClr val="FFFFFF"/>
-                </a:solidFill>
-                <a:latin typeface="Calibri"/>
-              </a:rPr>
-              <a:t>quiero consultar el historial de atenciones de una mascota por el documento del dueno</a:t>
-            </a:r>
-          </a:p>
-          <a:p>
-            <a:pPr>
-              <a:spcAft>
-                <a:spcPts val="400"/>
-              </a:spcAft>
-            </a:pPr>
-            <a:r>
-              <a:rPr sz="1400" b="0" i="0">
-                <a:solidFill>
-                  <a:srgbClr val="FFFFFF"/>
-                </a:solidFill>
-                <a:latin typeface="Calibri"/>
-              </a:rPr>
-              <a:t>para decidir el tratamiento sin depender de la carpeta fisica.</a:t>
-            </a:r>
-          </a:p>
-          <a:p>
-            <a:pPr>
-              <a:spcAft>
-                <a:spcPts val="400"/>
-              </a:spcAft>
-            </a:pPr>
-            <a:r>
-              <a:rPr sz="1400" b="0" i="0">
-                <a:solidFill>
-                  <a:srgbClr val="FFFFFF"/>
-                </a:solidFill>
-                <a:latin typeface="Calibri"/>
-              </a:rPr>
-              <a:t/>
-            </a:r>
-          </a:p>
-          <a:p>
-            <a:pPr>
-              <a:spcAft>
-                <a:spcPts val="400"/>
-              </a:spcAft>
-            </a:pPr>
-            <a:r>
-              <a:rPr sz="1400" b="0" i="0">
-                <a:solidFill>
-                  <a:srgbClr val="FFFFFF"/>
-                </a:solidFill>
-                <a:latin typeface="Calibri"/>
-              </a:rPr>
-              <a:t>Criterios de aceptacion</a:t>
-            </a:r>
-          </a:p>
-          <a:p>
-            <a:pPr>
-              <a:spcAft>
-                <a:spcPts val="400"/>
-              </a:spcAft>
-            </a:pPr>
-            <a:r>
-              <a:rPr sz="1400" b="0" i="0">
-                <a:solidFill>
-                  <a:srgbClr val="FFFFFF"/>
-                </a:solidFill>
-                <a:latin typeface="Calibri"/>
-              </a:rPr>
-              <a:t>CA-1  Dado un dueno con 3 mascotas registradas, cuando busco por su documento, entonces el sistema lista las 3 mascotas con nombre y especie.</a:t>
-            </a:r>
-          </a:p>
-          <a:p>
-            <a:pPr>
-              <a:spcAft>
-                <a:spcPts val="400"/>
-              </a:spcAft>
-            </a:pPr>
-            <a:r>
-              <a:rPr sz="1400" b="0" i="0">
-                <a:solidFill>
-                  <a:srgbClr val="FFFFFF"/>
-                </a:solidFill>
-                <a:latin typeface="Calibri"/>
-              </a:rPr>
-              <a:t>CA-2  Dado que selecciono la mascota Rocky, cuando abro su historial, entonces veo sus atenciones de la mas reciente a la mas antigua.</a:t>
-            </a:r>
-          </a:p>
-          <a:p>
-            <a:pPr>
-              <a:spcAft>
-                <a:spcPts val="400"/>
-              </a:spcAft>
-            </a:pPr>
-            <a:r>
-              <a:rPr sz="1400" b="0" i="0">
-                <a:solidFill>
-                  <a:srgbClr val="FFFFFF"/>
-                </a:solidFill>
-                <a:latin typeface="Calibri"/>
-              </a:rPr>
-              <a:t>CA-3  Dado un documento no registrado, cuando busco, entonces el sistema muestra 'No hay duenos con ese documento' y ofrece crear uno.</a:t>
-            </a:r>
-          </a:p>
-          <a:p>
-            <a:pPr>
-              <a:spcAft>
-                <a:spcPts val="400"/>
-              </a:spcAft>
-            </a:pPr>
-            <a:r>
-              <a:rPr sz="1400" b="0" i="0">
-                <a:solidFill>
-                  <a:srgbClr val="FFFFFF"/>
-                </a:solidFill>
-                <a:latin typeface="Calibri"/>
-              </a:rPr>
-              <a:t/>
-            </a:r>
-          </a:p>
-          <a:p>
-            <a:pPr>
-              <a:spcAft>
-                <a:spcPts val="400"/>
-              </a:spcAft>
-            </a:pPr>
-            <a:r>
-              <a:rPr sz="1400" b="0" i="0">
-                <a:solidFill>
-                  <a:srgbClr val="FFFFFF"/>
-                </a:solidFill>
-                <a:latin typeface="Calibri"/>
-              </a:rPr>
-              <a:t>Estimacion: 5 puntos   |   Prioridad: Must   |   Origen: RF-03 / NEC-02</a:t>
-            </a:r>
-          </a:p>
-          <a:p>
-            <a:pPr>
-              <a:spcAft>
-                <a:spcPts val="400"/>
-              </a:spcAft>
-            </a:pPr>
-            <a:r>
-              <a:rPr sz="1400" b="0" i="0">
-                <a:solidFill>
-                  <a:srgbClr val="FFFFFF"/>
-                </a:solidFill>
-                <a:latin typeface="Calibri"/>
-              </a:rPr>
-              <a:t>Definicion de terminado: mockup aprobado + los 3 criterios verificados en el prototipo navegable</a:t>
-            </a:r>
-          </a:p>
-        </p:txBody>
-      </p:sp>
-      <p:sp>
-        <p:nvSpPr>
-          <p:cNvPr id="9" name="TextBox 8"/>
-          <p:cNvSpPr txBox="1"/>
-          <p:nvPr/>
-        </p:nvSpPr>
-        <p:spPr>
-          <a:xfrm>
-            <a:off x="457200" y="6080760"/>
-            <a:ext cx="11277295" cy="320040"/>
-          </a:xfrm>
-          <a:prstGeom prst="rect">
-            <a:avLst/>
-          </a:prstGeom>
-          <a:noFill/>
-        </p:spPr>
-        <p:txBody>
-          <a:bodyPr wrap="square">
-            <a:spAutoFit/>
-          </a:bodyPr>
-          <a:lstStyle/>
-          <a:p>
-            <a:pPr algn="ctr"/>
-            <a:r>
-              <a:rPr sz="1200" b="0" i="1">
-                <a:solidFill>
-                  <a:srgbClr val="666666"/>
-                </a:solidFill>
-                <a:latin typeface="Calibri"/>
-              </a:rPr>
-              <a:t>La historia dice a quien le sirve y para que; los criterios de aceptacion son la unica parte que se puede cobrar.</a:t>
-            </a:r>
-          </a:p>
-        </p:txBody>
-      </p:sp>
-      <p:sp>
-        <p:nvSpPr>
-          <p:cNvPr id="10" name="TextBox 9"/>
+              <a:rPr sz="2000" b="0" i="0">
+                <a:solidFill>
+                  <a:srgbClr val="333333"/>
+                </a:solidFill>
+                <a:latin typeface="Calibri"/>
+              </a:rPr>
+              <a:t>–   Otros ejes utiles para cortar son por tipo de dato (primero solo perros y gatos, despues otras especies), por regla de negocio (primero sin control de acceso, luego con perfiles) y por camino (primero el flujo feliz, luego los errores).</a:t>
+            </a:r>
+          </a:p>
+        </p:txBody>
+      </p:sp>
+      <p:sp>
+        <p:nvSpPr>
+          <p:cNvPr id="6" name="TextBox 5"/>
           <p:cNvSpPr txBox="1"/>
           <p:nvPr/>
         </p:nvSpPr>
@@ -4428,7 +4116,7 @@
                 </a:solidFill>
                 <a:latin typeface="Calibri"/>
               </a:rPr>
-              <a:t>Demo del dia</a:t>
+              <a:t>Estimar en agil no es adivinar horas sino comparar tamanos, y esa es la... (1/2)</a:t>
             </a:r>
           </a:p>
         </p:txBody>
@@ -4467,25 +4155,7 @@
                 </a:solidFill>
                 <a:latin typeface="Calibri"/>
               </a:rPr>
-              <a:t>–   </a:t>
-            </a:r>
-            <a:r>
-              <a:rPr sz="2000" b="1" i="0">
-                <a:solidFill>
-                  <a:srgbClr val="333333"/>
-                </a:solidFill>
-                <a:latin typeface="Calibri"/>
-              </a:rPr>
-              <a:t>Herramienta:</a:t>
-            </a:r>
-            <a:r>
-              <a:rPr sz="2000" b="0" i="0">
-                <a:solidFill>
-                  <a:srgbClr val="333333"/>
-                </a:solidFill>
-                <a:latin typeface="Calibri"/>
-              </a:rPr>
-              <a:t> Google Docs · Excalidraw</a:t>
+              <a:t>–   Estimar en agil no es adivinar horas sino comparar tamanos, y esa es la razon de los puntos de historia: son una medida relativa que mezcla esfuerzo, complejidad e incertidumbre.</a:t>
             </a:r>
           </a:p>
           <a:p>
@@ -4501,25 +4171,7 @@
                 </a:solidFill>
                 <a:latin typeface="Calibri"/>
               </a:rPr>
-              <a:t>–   </a:t>
-            </a:r>
-            <a:r>
-              <a:rPr sz="2000" b="1" i="0">
-                <a:solidFill>
-                  <a:srgbClr val="333333"/>
-                </a:solidFill>
-                <a:latin typeface="Calibri"/>
-              </a:rPr>
-              <a:t>Demo:</a:t>
-            </a:r>
-            <a:r>
-              <a:rPr sz="2000" b="0" i="0">
-                <a:solidFill>
-                  <a:srgbClr val="333333"/>
-                </a:solidFill>
-                <a:latin typeface="Calibri"/>
-              </a:rPr>
-              <a:t> El docente toma el RF-03 del catalogo, lo convierte en vivo en historia con criterios y luego muestra una historia partida por capas para tumbarla con INVEST.</a:t>
+              <a:t>–   Se toma una historia mediana y conocida como referencia (por ejemplo registrar un dueno vale 3 puntos) y todas las demas se comparan contra ella usando una escala tipo Fibonacci 1, 2, 3, 5</a:t>
             </a:r>
           </a:p>
           <a:p>
@@ -4535,7 +4187,7 @@
                 </a:solidFill>
                 <a:latin typeface="Calibri"/>
               </a:rPr>
-              <a:t>–   Mismo dominio VetCare — no otro ejemplo. Aqui se diseña, no se programa.</a:t>
+              <a:t>–   8, 13, donde el salto grande refleja que entre mas grande la historia, menos confiable la estimacion; si algo llega a 13 o mas, la senal no es de dificultad sino de que hay que partirla.</a:t>
             </a:r>
           </a:p>
         </p:txBody>
@@ -4610,7 +4262,7 @@
         <p:spPr>
           <a:xfrm>
             <a:off x="0" y="0"/>
-            <a:ext cx="12191695" cy="1170432"/>
+            <a:ext cx="12191695" cy="960120"/>
           </a:xfrm>
           <a:prstGeom prst="rect">
             <a:avLst/>
@@ -4652,7 +4304,7 @@
         </p:nvSpPr>
         <p:spPr>
           <a:xfrm>
-            <a:off x="0" y="1170432"/>
+            <a:off x="0" y="960120"/>
             <a:ext cx="12191695" cy="41148"/>
           </a:xfrm>
           <a:prstGeom prst="rect">
@@ -4696,7 +4348,7 @@
         <p:spPr>
           <a:xfrm>
             <a:off x="457200" y="164592"/>
-            <a:ext cx="11277295" cy="384048"/>
+            <a:ext cx="11277295" cy="502920"/>
           </a:xfrm>
           <a:prstGeom prst="rect">
             <a:avLst/>
@@ -4716,7 +4368,7 @@
                 </a:solidFill>
                 <a:latin typeface="Calibri"/>
               </a:rPr>
-              <a:t>Herramientas de hoy</a:t>
+              <a:t>Estimar en agil no es adivinar horas sino comparar tamanos, y esa es la... (2/2)</a:t>
             </a:r>
           </a:p>
         </p:txBody>
@@ -4729,8 +4381,8 @@
         </p:nvSpPr>
         <p:spPr>
           <a:xfrm>
-            <a:off x="457200" y="566928"/>
-            <a:ext cx="11277295" cy="411480"/>
+            <a:off x="457200" y="1170432"/>
+            <a:ext cx="11277295" cy="5230368"/>
           </a:xfrm>
           <a:prstGeom prst="rect">
             <a:avLst/>
@@ -4743,633 +4395,58 @@
           </a:bodyPr>
           <a:lstStyle/>
           <a:p>
-            <a:r>
-              <a:rPr sz="1400" b="0" i="0">
-                <a:solidFill>
-                  <a:srgbClr val="B8D8EE"/>
-                </a:solidFill>
-                <a:latin typeface="Calibri"/>
-              </a:rPr>
-              <a:t>Gratis · funcionan en el navegador</a:t>
-            </a:r>
-          </a:p>
-        </p:txBody>
-      </p:sp>
-      <p:sp>
-        <p:nvSpPr>
-          <p:cNvPr id="6" name="Rounded Rectangle 5"/>
-          <p:cNvSpPr/>
-          <p:nvPr/>
-        </p:nvSpPr>
-        <p:spPr>
-          <a:xfrm>
-            <a:off x="457200" y="1591056"/>
-            <a:ext cx="3624986" cy="2331720"/>
-          </a:xfrm>
-          <a:prstGeom prst="roundRect">
-            <a:avLst>
-              <a:gd name="adj" fmla="val 12000"/>
-            </a:avLst>
-          </a:prstGeom>
-          <a:solidFill>
-            <a:srgbClr val="F2F2F2"/>
-          </a:solidFill>
-          <a:ln>
-            <a:noFill/>
-          </a:ln>
-        </p:spPr>
-        <p:style>
-          <a:lnRef idx="1">
-            <a:schemeClr val="accent1"/>
-          </a:lnRef>
-          <a:fillRef idx="3">
-            <a:schemeClr val="accent1"/>
-          </a:fillRef>
-          <a:effectRef idx="2">
-            <a:schemeClr val="accent1"/>
-          </a:effectRef>
-          <a:fontRef idx="minor">
-            <a:schemeClr val="lt1"/>
-          </a:fontRef>
-        </p:style>
-        <p:txBody>
-          <a:bodyPr rtlCol="0" anchor="ctr"/>
-          <a:lstStyle/>
-          <a:p>
-            <a:pPr algn="ctr"/>
-          </a:p>
-        </p:txBody>
-      </p:sp>
-      <p:sp>
-        <p:nvSpPr>
-          <p:cNvPr id="7" name="Rectangle 6"/>
-          <p:cNvSpPr/>
-          <p:nvPr/>
-        </p:nvSpPr>
-        <p:spPr>
-          <a:xfrm>
-            <a:off x="457200" y="1591056"/>
-            <a:ext cx="3624986" cy="64008"/>
-          </a:xfrm>
-          <a:prstGeom prst="rect">
-            <a:avLst/>
-          </a:prstGeom>
-          <a:solidFill>
-            <a:srgbClr val="095292"/>
-          </a:solidFill>
-          <a:ln>
-            <a:noFill/>
-          </a:ln>
-        </p:spPr>
-        <p:style>
-          <a:lnRef idx="1">
-            <a:schemeClr val="accent1"/>
-          </a:lnRef>
-          <a:fillRef idx="3">
-            <a:schemeClr val="accent1"/>
-          </a:fillRef>
-          <a:effectRef idx="2">
-            <a:schemeClr val="accent1"/>
-          </a:effectRef>
-          <a:fontRef idx="minor">
-            <a:schemeClr val="lt1"/>
-          </a:fontRef>
-        </p:style>
-        <p:txBody>
-          <a:bodyPr rtlCol="0" anchor="ctr"/>
-          <a:lstStyle/>
-          <a:p>
-            <a:pPr algn="ctr"/>
-          </a:p>
-        </p:txBody>
-      </p:sp>
-      <p:sp>
-        <p:nvSpPr>
-          <p:cNvPr id="8" name="Rectangle 7"/>
-          <p:cNvSpPr/>
-          <p:nvPr/>
-        </p:nvSpPr>
-        <p:spPr>
-          <a:xfrm>
-            <a:off x="457200" y="1655064"/>
-            <a:ext cx="3624986" cy="27432"/>
-          </a:xfrm>
-          <a:prstGeom prst="rect">
-            <a:avLst/>
-          </a:prstGeom>
-          <a:solidFill>
-            <a:srgbClr val="FFD000"/>
-          </a:solidFill>
-          <a:ln>
-            <a:noFill/>
-          </a:ln>
-        </p:spPr>
-        <p:style>
-          <a:lnRef idx="1">
-            <a:schemeClr val="accent1"/>
-          </a:lnRef>
-          <a:fillRef idx="3">
-            <a:schemeClr val="accent1"/>
-          </a:fillRef>
-          <a:effectRef idx="2">
-            <a:schemeClr val="accent1"/>
-          </a:effectRef>
-          <a:fontRef idx="minor">
-            <a:schemeClr val="lt1"/>
-          </a:fontRef>
-        </p:style>
-        <p:txBody>
-          <a:bodyPr rtlCol="0" anchor="ctr"/>
-          <a:lstStyle/>
-          <a:p>
-            <a:pPr algn="ctr"/>
-          </a:p>
-        </p:txBody>
-      </p:sp>
-      <p:pic>
-        <p:nvPicPr>
-          <p:cNvPr id="9" name="Picture 8" descr="excalidraw.png"/>
-          <p:cNvPicPr>
-            <a:picLocks noChangeAspect="1"/>
-          </p:cNvPicPr>
-          <p:nvPr/>
-        </p:nvPicPr>
-        <p:blipFill>
-          <a:blip r:embed="rId2"/>
-          <a:stretch>
-            <a:fillRect/>
-          </a:stretch>
-        </p:blipFill>
-        <p:spPr>
-          <a:xfrm>
-            <a:off x="1643329" y="1847087"/>
-            <a:ext cx="1252728" cy="1252728"/>
-          </a:xfrm>
-          <a:prstGeom prst="rect">
-            <a:avLst/>
-          </a:prstGeom>
-        </p:spPr>
-      </p:pic>
-      <p:sp>
-        <p:nvSpPr>
-          <p:cNvPr id="10" name="TextBox 9"/>
-          <p:cNvSpPr txBox="1"/>
-          <p:nvPr/>
-        </p:nvSpPr>
-        <p:spPr>
-          <a:xfrm>
-            <a:off x="530352" y="3191256"/>
-            <a:ext cx="3478682" cy="621792"/>
-          </a:xfrm>
-          <a:prstGeom prst="rect">
-            <a:avLst/>
-          </a:prstGeom>
-          <a:noFill/>
-        </p:spPr>
-        <p:txBody>
-          <a:bodyPr wrap="square" anchor="t"/>
-          <a:lstStyle/>
-          <a:p>
-            <a:pPr algn="ctr"/>
-            <a:r>
-              <a:rPr sz="1300" b="1" i="0">
-                <a:solidFill>
-                  <a:srgbClr val="095292"/>
-                </a:solidFill>
-                <a:latin typeface="Calibri"/>
-              </a:rPr>
-              <a:t>Excalidraw</a:t>
-            </a:r>
-          </a:p>
-          <a:p>
-            <a:pPr algn="ctr">
-              <a:spcBef>
-                <a:spcPts val="200"/>
-              </a:spcBef>
+            <a:pPr>
+              <a:spcAft>
+                <a:spcPts val="800"/>
+              </a:spcAft>
             </a:pPr>
             <a:r>
-              <a:rPr sz="1000" b="0" i="0">
-                <a:solidFill>
-                  <a:srgbClr val="666666"/>
-                </a:solidFill>
-                <a:latin typeface="Calibri"/>
-              </a:rPr>
-              <a:t>Bocetos rapidos a mano alzada</a:t>
-            </a:r>
-          </a:p>
-        </p:txBody>
-      </p:sp>
-      <p:sp>
-        <p:nvSpPr>
-          <p:cNvPr id="11" name="Rounded Rectangle 10"/>
-          <p:cNvSpPr/>
-          <p:nvPr/>
-        </p:nvSpPr>
-        <p:spPr>
-          <a:xfrm>
-            <a:off x="4283354" y="1591056"/>
-            <a:ext cx="3624986" cy="2331720"/>
-          </a:xfrm>
-          <a:prstGeom prst="roundRect">
-            <a:avLst>
-              <a:gd name="adj" fmla="val 12000"/>
-            </a:avLst>
-          </a:prstGeom>
-          <a:solidFill>
-            <a:srgbClr val="F2F2F2"/>
-          </a:solidFill>
-          <a:ln>
-            <a:noFill/>
-          </a:ln>
-        </p:spPr>
-        <p:style>
-          <a:lnRef idx="1">
-            <a:schemeClr val="accent1"/>
-          </a:lnRef>
-          <a:fillRef idx="3">
-            <a:schemeClr val="accent1"/>
-          </a:fillRef>
-          <a:effectRef idx="2">
-            <a:schemeClr val="accent1"/>
-          </a:effectRef>
-          <a:fontRef idx="minor">
-            <a:schemeClr val="lt1"/>
-          </a:fontRef>
-        </p:style>
-        <p:txBody>
-          <a:bodyPr rtlCol="0" anchor="ctr"/>
-          <a:lstStyle/>
-          <a:p>
-            <a:pPr algn="ctr"/>
-          </a:p>
-        </p:txBody>
-      </p:sp>
-      <p:sp>
-        <p:nvSpPr>
-          <p:cNvPr id="12" name="Rectangle 11"/>
-          <p:cNvSpPr/>
-          <p:nvPr/>
-        </p:nvSpPr>
-        <p:spPr>
-          <a:xfrm>
-            <a:off x="4283354" y="1591056"/>
-            <a:ext cx="3624986" cy="64008"/>
-          </a:xfrm>
-          <a:prstGeom prst="rect">
-            <a:avLst/>
-          </a:prstGeom>
-          <a:solidFill>
-            <a:srgbClr val="095292"/>
-          </a:solidFill>
-          <a:ln>
-            <a:noFill/>
-          </a:ln>
-        </p:spPr>
-        <p:style>
-          <a:lnRef idx="1">
-            <a:schemeClr val="accent1"/>
-          </a:lnRef>
-          <a:fillRef idx="3">
-            <a:schemeClr val="accent1"/>
-          </a:fillRef>
-          <a:effectRef idx="2">
-            <a:schemeClr val="accent1"/>
-          </a:effectRef>
-          <a:fontRef idx="minor">
-            <a:schemeClr val="lt1"/>
-          </a:fontRef>
-        </p:style>
-        <p:txBody>
-          <a:bodyPr rtlCol="0" anchor="ctr"/>
-          <a:lstStyle/>
-          <a:p>
-            <a:pPr algn="ctr"/>
-          </a:p>
-        </p:txBody>
-      </p:sp>
-      <p:sp>
-        <p:nvSpPr>
-          <p:cNvPr id="13" name="Rectangle 12"/>
-          <p:cNvSpPr/>
-          <p:nvPr/>
-        </p:nvSpPr>
-        <p:spPr>
-          <a:xfrm>
-            <a:off x="4283354" y="1655064"/>
-            <a:ext cx="3624986" cy="27432"/>
-          </a:xfrm>
-          <a:prstGeom prst="rect">
-            <a:avLst/>
-          </a:prstGeom>
-          <a:solidFill>
-            <a:srgbClr val="FFD000"/>
-          </a:solidFill>
-          <a:ln>
-            <a:noFill/>
-          </a:ln>
-        </p:spPr>
-        <p:style>
-          <a:lnRef idx="1">
-            <a:schemeClr val="accent1"/>
-          </a:lnRef>
-          <a:fillRef idx="3">
-            <a:schemeClr val="accent1"/>
-          </a:fillRef>
-          <a:effectRef idx="2">
-            <a:schemeClr val="accent1"/>
-          </a:effectRef>
-          <a:fontRef idx="minor">
-            <a:schemeClr val="lt1"/>
-          </a:fontRef>
-        </p:style>
-        <p:txBody>
-          <a:bodyPr rtlCol="0" anchor="ctr"/>
-          <a:lstStyle/>
-          <a:p>
-            <a:pPr algn="ctr"/>
-          </a:p>
-        </p:txBody>
-      </p:sp>
-      <p:pic>
-        <p:nvPicPr>
-          <p:cNvPr id="14" name="Picture 13" descr="google_docs.png"/>
-          <p:cNvPicPr>
-            <a:picLocks noChangeAspect="1"/>
-          </p:cNvPicPr>
-          <p:nvPr/>
-        </p:nvPicPr>
-        <p:blipFill>
-          <a:blip r:embed="rId3"/>
-          <a:stretch>
-            <a:fillRect/>
-          </a:stretch>
-        </p:blipFill>
-        <p:spPr>
-          <a:xfrm>
-            <a:off x="5469483" y="1847087"/>
-            <a:ext cx="1252728" cy="1252728"/>
-          </a:xfrm>
-          <a:prstGeom prst="rect">
-            <a:avLst/>
-          </a:prstGeom>
-        </p:spPr>
-      </p:pic>
-      <p:sp>
-        <p:nvSpPr>
-          <p:cNvPr id="15" name="TextBox 14"/>
-          <p:cNvSpPr txBox="1"/>
-          <p:nvPr/>
-        </p:nvSpPr>
-        <p:spPr>
-          <a:xfrm>
-            <a:off x="4356506" y="3191256"/>
-            <a:ext cx="3478682" cy="621792"/>
-          </a:xfrm>
-          <a:prstGeom prst="rect">
-            <a:avLst/>
-          </a:prstGeom>
-          <a:noFill/>
-        </p:spPr>
-        <p:txBody>
-          <a:bodyPr wrap="square" anchor="t"/>
-          <a:lstStyle/>
-          <a:p>
-            <a:pPr algn="ctr"/>
-            <a:r>
-              <a:rPr sz="1300" b="1" i="0">
-                <a:solidFill>
-                  <a:srgbClr val="095292"/>
-                </a:solidFill>
-                <a:latin typeface="Calibri"/>
-              </a:rPr>
-              <a:t>google docs</a:t>
-            </a:r>
-          </a:p>
-          <a:p>
-            <a:pPr algn="ctr">
-              <a:spcBef>
-                <a:spcPts val="200"/>
-              </a:spcBef>
+              <a:rPr sz="2000" b="0" i="0">
+                <a:solidFill>
+                  <a:srgbClr val="333333"/>
+                </a:solidFill>
+                <a:latin typeface="Calibri"/>
+              </a:rPr>
+              <a:t>–   La tecnica de sala es el planning poker: todos muestran su carta al tiempo y lo importante no es el numero sino la discusion cuando alguien dice 2 y otro dice 8, porque ahi aparece el requisito que unos entendieron y otros no.</a:t>
+            </a:r>
+          </a:p>
+          <a:p>
+            <a:pPr>
+              <a:spcAft>
+                <a:spcPts val="800"/>
+              </a:spcAft>
             </a:pPr>
             <a:r>
-              <a:rPr sz="1000" b="0" i="0">
-                <a:solidFill>
-                  <a:srgbClr val="666666"/>
-                </a:solidFill>
-                <a:latin typeface="Calibri"/>
-              </a:rPr>
-              <a:t>Documentos del paquete de diseño</a:t>
-            </a:r>
-          </a:p>
-        </p:txBody>
-      </p:sp>
-      <p:sp>
-        <p:nvSpPr>
-          <p:cNvPr id="16" name="Rounded Rectangle 15"/>
-          <p:cNvSpPr/>
-          <p:nvPr/>
-        </p:nvSpPr>
-        <p:spPr>
-          <a:xfrm>
-            <a:off x="8109508" y="1591056"/>
-            <a:ext cx="3624986" cy="2331720"/>
-          </a:xfrm>
-          <a:prstGeom prst="roundRect">
-            <a:avLst>
-              <a:gd name="adj" fmla="val 12000"/>
-            </a:avLst>
-          </a:prstGeom>
-          <a:solidFill>
-            <a:srgbClr val="F2F2F2"/>
-          </a:solidFill>
-          <a:ln>
-            <a:noFill/>
-          </a:ln>
-        </p:spPr>
-        <p:style>
-          <a:lnRef idx="1">
-            <a:schemeClr val="accent1"/>
-          </a:lnRef>
-          <a:fillRef idx="3">
-            <a:schemeClr val="accent1"/>
-          </a:fillRef>
-          <a:effectRef idx="2">
-            <a:schemeClr val="accent1"/>
-          </a:effectRef>
-          <a:fontRef idx="minor">
-            <a:schemeClr val="lt1"/>
-          </a:fontRef>
-        </p:style>
-        <p:txBody>
-          <a:bodyPr rtlCol="0" anchor="ctr"/>
-          <a:lstStyle/>
-          <a:p>
-            <a:pPr algn="ctr"/>
-          </a:p>
-        </p:txBody>
-      </p:sp>
-      <p:sp>
-        <p:nvSpPr>
-          <p:cNvPr id="17" name="Rectangle 16"/>
-          <p:cNvSpPr/>
-          <p:nvPr/>
-        </p:nvSpPr>
-        <p:spPr>
-          <a:xfrm>
-            <a:off x="8109508" y="1591056"/>
-            <a:ext cx="3624986" cy="64008"/>
-          </a:xfrm>
-          <a:prstGeom prst="rect">
-            <a:avLst/>
-          </a:prstGeom>
-          <a:solidFill>
-            <a:srgbClr val="095292"/>
-          </a:solidFill>
-          <a:ln>
-            <a:noFill/>
-          </a:ln>
-        </p:spPr>
-        <p:style>
-          <a:lnRef idx="1">
-            <a:schemeClr val="accent1"/>
-          </a:lnRef>
-          <a:fillRef idx="3">
-            <a:schemeClr val="accent1"/>
-          </a:fillRef>
-          <a:effectRef idx="2">
-            <a:schemeClr val="accent1"/>
-          </a:effectRef>
-          <a:fontRef idx="minor">
-            <a:schemeClr val="lt1"/>
-          </a:fontRef>
-        </p:style>
-        <p:txBody>
-          <a:bodyPr rtlCol="0" anchor="ctr"/>
-          <a:lstStyle/>
-          <a:p>
-            <a:pPr algn="ctr"/>
-          </a:p>
-        </p:txBody>
-      </p:sp>
-      <p:sp>
-        <p:nvSpPr>
-          <p:cNvPr id="18" name="Rectangle 17"/>
-          <p:cNvSpPr/>
-          <p:nvPr/>
-        </p:nvSpPr>
-        <p:spPr>
-          <a:xfrm>
-            <a:off x="8109508" y="1655064"/>
-            <a:ext cx="3624986" cy="27432"/>
-          </a:xfrm>
-          <a:prstGeom prst="rect">
-            <a:avLst/>
-          </a:prstGeom>
-          <a:solidFill>
-            <a:srgbClr val="FFD000"/>
-          </a:solidFill>
-          <a:ln>
-            <a:noFill/>
-          </a:ln>
-        </p:spPr>
-        <p:style>
-          <a:lnRef idx="1">
-            <a:schemeClr val="accent1"/>
-          </a:lnRef>
-          <a:fillRef idx="3">
-            <a:schemeClr val="accent1"/>
-          </a:fillRef>
-          <a:effectRef idx="2">
-            <a:schemeClr val="accent1"/>
-          </a:effectRef>
-          <a:fontRef idx="minor">
-            <a:schemeClr val="lt1"/>
-          </a:fontRef>
-        </p:style>
-        <p:txBody>
-          <a:bodyPr rtlCol="0" anchor="ctr"/>
-          <a:lstStyle/>
-          <a:p>
-            <a:pPr algn="ctr"/>
-          </a:p>
-        </p:txBody>
-      </p:sp>
-      <p:pic>
-        <p:nvPicPr>
-          <p:cNvPr id="19" name="Picture 18" descr="examlab.png"/>
-          <p:cNvPicPr>
-            <a:picLocks noChangeAspect="1"/>
-          </p:cNvPicPr>
-          <p:nvPr/>
-        </p:nvPicPr>
-        <p:blipFill>
-          <a:blip r:embed="rId4"/>
-          <a:stretch>
-            <a:fillRect/>
-          </a:stretch>
-        </p:blipFill>
-        <p:spPr>
-          <a:xfrm>
-            <a:off x="9295638" y="1847087"/>
-            <a:ext cx="1252728" cy="1252728"/>
-          </a:xfrm>
-          <a:prstGeom prst="rect">
-            <a:avLst/>
-          </a:prstGeom>
-        </p:spPr>
-      </p:pic>
-      <p:sp>
-        <p:nvSpPr>
-          <p:cNvPr id="20" name="TextBox 19"/>
-          <p:cNvSpPr txBox="1"/>
-          <p:nvPr/>
-        </p:nvSpPr>
-        <p:spPr>
-          <a:xfrm>
-            <a:off x="8182660" y="3191256"/>
-            <a:ext cx="3478682" cy="621792"/>
-          </a:xfrm>
-          <a:prstGeom prst="rect">
-            <a:avLst/>
-          </a:prstGeom>
-          <a:noFill/>
-        </p:spPr>
-        <p:txBody>
-          <a:bodyPr wrap="square" anchor="t"/>
-          <a:lstStyle/>
-          <a:p>
-            <a:pPr algn="ctr"/>
-            <a:r>
-              <a:rPr sz="1300" b="1" i="0">
-                <a:solidFill>
-                  <a:srgbClr val="095292"/>
-                </a:solidFill>
-                <a:latin typeface="Calibri"/>
-              </a:rPr>
-              <a:t>la plataforma del curso</a:t>
-            </a:r>
-          </a:p>
-          <a:p>
-            <a:pPr algn="ctr">
-              <a:spcBef>
-                <a:spcPts val="200"/>
-              </a:spcBef>
+              <a:rPr sz="2000" b="0" i="0">
+                <a:solidFill>
+                  <a:srgbClr val="333333"/>
+                </a:solidFill>
+                <a:latin typeface="Calibri"/>
+              </a:rPr>
+              <a:t>–   En el Proyecto Integrador este backlog es la lista de trabajo que se le entrega al companero de Programacion II para que sepa por donde empezar</a:t>
+            </a:r>
+          </a:p>
+          <a:p>
+            <a:pPr>
+              <a:spcAft>
+                <a:spcPts val="800"/>
+              </a:spcAft>
             </a:pPr>
             <a:r>
-              <a:rPr sz="1000" b="0" i="0">
-                <a:solidFill>
-                  <a:srgbClr val="666666"/>
-                </a:solidFill>
-                <a:latin typeface="Calibri"/>
-              </a:rPr>
-              <a:t>Entrega del taller · en la fecha que indique el docente</a:t>
-            </a:r>
-          </a:p>
-        </p:txBody>
-      </p:sp>
-      <p:sp>
-        <p:nvSpPr>
-          <p:cNvPr id="21" name="TextBox 20"/>
+              <a:rPr sz="2000" b="0" i="0">
+                <a:solidFill>
+                  <a:srgbClr val="333333"/>
+                </a:solidFill>
+                <a:latin typeface="Calibri"/>
+              </a:rPr>
+              <a:t>–   Y quien solo cursa Seminario usa el mismo backlog para ordenar las pantallas de su prototipo navegable, en el mismo orden de prioridad.</a:t>
+            </a:r>
+          </a:p>
+        </p:txBody>
+      </p:sp>
+      <p:sp>
+        <p:nvSpPr>
+          <p:cNvPr id="6" name="TextBox 5"/>
           <p:cNvSpPr txBox="1"/>
           <p:nvPr/>
         </p:nvSpPr>
@@ -5543,21 +4620,141 @@
                 </a:solidFill>
                 <a:latin typeface="Calibri"/>
               </a:rPr>
-              <a:t>Taller PI — por que importa</a:t>
-            </a:r>
-          </a:p>
-        </p:txBody>
-      </p:sp>
-      <p:sp>
-        <p:nvSpPr>
-          <p:cNvPr id="5" name="TextBox 4"/>
+              <a:t>Historia HU-04 con criterios de aceptacion (artefacto proyectable)</a:t>
+            </a:r>
+          </a:p>
+        </p:txBody>
+      </p:sp>
+      <p:sp>
+        <p:nvSpPr>
+          <p:cNvPr id="5" name="Rounded Rectangle 4"/>
+          <p:cNvSpPr/>
+          <p:nvPr/>
+        </p:nvSpPr>
+        <p:spPr>
+          <a:xfrm>
+            <a:off x="457200" y="1261872"/>
+            <a:ext cx="11277295" cy="4773168"/>
+          </a:xfrm>
+          <a:prstGeom prst="roundRect">
+            <a:avLst>
+              <a:gd name="adj" fmla="val 12000"/>
+            </a:avLst>
+          </a:prstGeom>
+          <a:solidFill>
+            <a:srgbClr val="1E2A38"/>
+          </a:solidFill>
+          <a:ln>
+            <a:noFill/>
+          </a:ln>
+        </p:spPr>
+        <p:style>
+          <a:lnRef idx="1">
+            <a:schemeClr val="accent1"/>
+          </a:lnRef>
+          <a:fillRef idx="3">
+            <a:schemeClr val="accent1"/>
+          </a:fillRef>
+          <a:effectRef idx="2">
+            <a:schemeClr val="accent1"/>
+          </a:effectRef>
+          <a:fontRef idx="minor">
+            <a:schemeClr val="lt1"/>
+          </a:fontRef>
+        </p:style>
+        <p:txBody>
+          <a:bodyPr rtlCol="0" anchor="ctr"/>
+          <a:lstStyle/>
+          <a:p>
+            <a:pPr algn="ctr"/>
+          </a:p>
+        </p:txBody>
+      </p:sp>
+      <p:sp>
+        <p:nvSpPr>
+          <p:cNvPr id="6" name="Rectangle 5"/>
+          <p:cNvSpPr/>
+          <p:nvPr/>
+        </p:nvSpPr>
+        <p:spPr>
+          <a:xfrm>
+            <a:off x="457200" y="1261872"/>
+            <a:ext cx="11277295" cy="320040"/>
+          </a:xfrm>
+          <a:prstGeom prst="rect">
+            <a:avLst/>
+          </a:prstGeom>
+          <a:solidFill>
+            <a:srgbClr val="095292"/>
+          </a:solidFill>
+          <a:ln>
+            <a:noFill/>
+          </a:ln>
+        </p:spPr>
+        <p:style>
+          <a:lnRef idx="1">
+            <a:schemeClr val="accent1"/>
+          </a:lnRef>
+          <a:fillRef idx="3">
+            <a:schemeClr val="accent1"/>
+          </a:fillRef>
+          <a:effectRef idx="2">
+            <a:schemeClr val="accent1"/>
+          </a:effectRef>
+          <a:fontRef idx="minor">
+            <a:schemeClr val="lt1"/>
+          </a:fontRef>
+        </p:style>
+        <p:txBody>
+          <a:bodyPr rtlCol="0" anchor="ctr"/>
+          <a:lstStyle/>
+          <a:p>
+            <a:pPr algn="ctr"/>
+          </a:p>
+        </p:txBody>
+      </p:sp>
+      <p:sp>
+        <p:nvSpPr>
+          <p:cNvPr id="7" name="TextBox 6"/>
           <p:cNvSpPr txBox="1"/>
           <p:nvPr/>
         </p:nvSpPr>
         <p:spPr>
           <a:xfrm>
-            <a:off x="457200" y="1170432"/>
-            <a:ext cx="11277295" cy="5230368"/>
+            <a:off x="685800" y="1307592"/>
+            <a:ext cx="10820095" cy="256032"/>
+          </a:xfrm>
+          <a:prstGeom prst="rect">
+            <a:avLst/>
+          </a:prstGeom>
+          <a:noFill/>
+        </p:spPr>
+        <p:txBody>
+          <a:bodyPr wrap="square" anchor="ctr"/>
+          <a:lstStyle/>
+          <a:p>
+            <a:r>
+              <a:rPr sz="1000" b="1" i="0">
+                <a:solidFill>
+                  <a:srgbClr val="269CCB"/>
+                </a:solidFill>
+                <a:latin typeface="Calibri"/>
+              </a:rPr>
+              <a:t>● ● ●</a:t>
+            </a:r>
+          </a:p>
+        </p:txBody>
+      </p:sp>
+      <p:sp>
+        <p:nvSpPr>
+          <p:cNvPr id="8" name="TextBox 7"/>
+          <p:cNvSpPr txBox="1"/>
+          <p:nvPr/>
+        </p:nvSpPr>
+        <p:spPr>
+          <a:xfrm>
+            <a:off x="777240" y="1719072"/>
+            <a:ext cx="10637215" cy="4133087"/>
           </a:xfrm>
           <a:prstGeom prst="rect">
             <a:avLst/>
@@ -5572,74 +4769,235 @@
           <a:p>
             <a:pPr>
               <a:spcAft>
-                <a:spcPts val="800"/>
+                <a:spcPts val="400"/>
               </a:spcAft>
             </a:pPr>
             <a:r>
-              <a:rPr sz="2000" b="0" i="0">
-                <a:solidFill>
-                  <a:srgbClr val="333333"/>
-                </a:solidFill>
-                <a:latin typeface="Calibri"/>
-              </a:rPr>
-              <a:t>–   </a:t>
-            </a:r>
-            <a:r>
-              <a:rPr sz="2000" b="1" i="0">
-                <a:solidFill>
-                  <a:srgbClr val="333333"/>
-                </a:solidFill>
-                <a:latin typeface="Calibri"/>
-              </a:rPr>
-              <a:t>Por que importa al PI:</a:t>
-            </a:r>
-            <a:r>
-              <a:rPr sz="2000" b="0" i="0">
-                <a:solidFill>
-                  <a:srgbClr val="333333"/>
-                </a:solidFill>
-                <a:latin typeface="Calibri"/>
-              </a:rPr>
-              <a:t> el backlog es la version ejecutable del catalogo de requisitos; es la lista con la que se decide que se disena primero y, en Programacion II, que se codifica primero.</a:t>
+              <a:rPr sz="1400" b="0" i="0">
+                <a:solidFill>
+                  <a:srgbClr val="FFFFFF"/>
+                </a:solidFill>
+                <a:latin typeface="Calibri"/>
+              </a:rPr>
+              <a:t>HU-04  [Epica: E-02 Historial y agenda]</a:t>
             </a:r>
           </a:p>
           <a:p>
             <a:pPr>
               <a:spcAft>
-                <a:spcPts val="800"/>
+                <a:spcPts val="400"/>
               </a:spcAft>
             </a:pPr>
             <a:r>
-              <a:rPr sz="2000" b="0" i="0">
-                <a:solidFill>
-                  <a:srgbClr val="333333"/>
-                </a:solidFill>
-                <a:latin typeface="Calibri"/>
-              </a:rPr>
-              <a:t>–   Los criterios de aceptacion que escriba hoy se vuelven literalmente el guion de revision del prototipo navegable y de las pruebas del sistema.</a:t>
+              <a:rPr sz="1400" b="0" i="0">
+                <a:solidFill>
+                  <a:srgbClr val="FFFFFF"/>
+                </a:solidFill>
+                <a:latin typeface="Calibri"/>
+              </a:rPr>
+              <a:t>Como veterinario de la clinica Huellitas</a:t>
             </a:r>
           </a:p>
           <a:p>
             <a:pPr>
               <a:spcAft>
-                <a:spcPts val="800"/>
+                <a:spcPts val="400"/>
               </a:spcAft>
             </a:pPr>
             <a:r>
-              <a:rPr sz="2000" b="0" i="0">
-                <a:solidFill>
-                  <a:srgbClr val="333333"/>
-                </a:solidFill>
-                <a:latin typeface="Calibri"/>
-              </a:rPr>
-              <a:t>–   Una historia sin beneficio claro es una funcionalidad que nadie va a extranar si no se hace: aqui es donde se justifica cada pantalla de VetCare.</a:t>
-            </a:r>
-          </a:p>
-        </p:txBody>
-      </p:sp>
-      <p:sp>
-        <p:nvSpPr>
-          <p:cNvPr id="6" name="TextBox 5"/>
+              <a:rPr sz="1400" b="0" i="0">
+                <a:solidFill>
+                  <a:srgbClr val="FFFFFF"/>
+                </a:solidFill>
+                <a:latin typeface="Calibri"/>
+              </a:rPr>
+              <a:t>quiero consultar el historial de atenciones de una mascota por el documento del dueno</a:t>
+            </a:r>
+          </a:p>
+          <a:p>
+            <a:pPr>
+              <a:spcAft>
+                <a:spcPts val="400"/>
+              </a:spcAft>
+            </a:pPr>
+            <a:r>
+              <a:rPr sz="1400" b="0" i="0">
+                <a:solidFill>
+                  <a:srgbClr val="FFFFFF"/>
+                </a:solidFill>
+                <a:latin typeface="Calibri"/>
+              </a:rPr>
+              <a:t>para decidir el tratamiento sin depender de la carpeta fisica.</a:t>
+            </a:r>
+          </a:p>
+          <a:p>
+            <a:pPr>
+              <a:spcAft>
+                <a:spcPts val="400"/>
+              </a:spcAft>
+            </a:pPr>
+            <a:r>
+              <a:rPr sz="1400" b="0" i="0">
+                <a:solidFill>
+                  <a:srgbClr val="FFFFFF"/>
+                </a:solidFill>
+                <a:latin typeface="Calibri"/>
+              </a:rPr>
+              <a:t/>
+            </a:r>
+          </a:p>
+          <a:p>
+            <a:pPr>
+              <a:spcAft>
+                <a:spcPts val="400"/>
+              </a:spcAft>
+            </a:pPr>
+            <a:r>
+              <a:rPr sz="1400" b="0" i="0">
+                <a:solidFill>
+                  <a:srgbClr val="FFFFFF"/>
+                </a:solidFill>
+                <a:latin typeface="Calibri"/>
+              </a:rPr>
+              <a:t>Criterios de aceptacion</a:t>
+            </a:r>
+          </a:p>
+          <a:p>
+            <a:pPr>
+              <a:spcAft>
+                <a:spcPts val="400"/>
+              </a:spcAft>
+            </a:pPr>
+            <a:r>
+              <a:rPr sz="1400" b="0" i="0">
+                <a:solidFill>
+                  <a:srgbClr val="FFFFFF"/>
+                </a:solidFill>
+                <a:latin typeface="Calibri"/>
+              </a:rPr>
+              <a:t>CA-1  Dado un dueno con 3 mascotas registradas, cuando busco por su documento, entonces el sistema lista las 3 mascotas con nombre y especie.</a:t>
+            </a:r>
+          </a:p>
+          <a:p>
+            <a:pPr>
+              <a:spcAft>
+                <a:spcPts val="400"/>
+              </a:spcAft>
+            </a:pPr>
+            <a:r>
+              <a:rPr sz="1400" b="0" i="0">
+                <a:solidFill>
+                  <a:srgbClr val="FFFFFF"/>
+                </a:solidFill>
+                <a:latin typeface="Calibri"/>
+              </a:rPr>
+              <a:t>CA-2  Dado que selecciono la mascota Rocky, cuando abro su historial, entonces veo sus atenciones de la mas reciente a la mas antigua.</a:t>
+            </a:r>
+          </a:p>
+          <a:p>
+            <a:pPr>
+              <a:spcAft>
+                <a:spcPts val="400"/>
+              </a:spcAft>
+            </a:pPr>
+            <a:r>
+              <a:rPr sz="1400" b="0" i="0">
+                <a:solidFill>
+                  <a:srgbClr val="FFFFFF"/>
+                </a:solidFill>
+                <a:latin typeface="Calibri"/>
+              </a:rPr>
+              <a:t>CA-3  Dado un documento no registrado, cuando busco, entonces el sistema muestra 'No hay duenos con ese documento' y ofrece crear uno.</a:t>
+            </a:r>
+          </a:p>
+          <a:p>
+            <a:pPr>
+              <a:spcAft>
+                <a:spcPts val="400"/>
+              </a:spcAft>
+            </a:pPr>
+            <a:r>
+              <a:rPr sz="1400" b="0" i="0">
+                <a:solidFill>
+                  <a:srgbClr val="FFFFFF"/>
+                </a:solidFill>
+                <a:latin typeface="Calibri"/>
+              </a:rPr>
+              <a:t/>
+            </a:r>
+          </a:p>
+          <a:p>
+            <a:pPr>
+              <a:spcAft>
+                <a:spcPts val="400"/>
+              </a:spcAft>
+            </a:pPr>
+            <a:r>
+              <a:rPr sz="1400" b="0" i="0">
+                <a:solidFill>
+                  <a:srgbClr val="FFFFFF"/>
+                </a:solidFill>
+                <a:latin typeface="Calibri"/>
+              </a:rPr>
+              <a:t>Estimacion: 5 puntos   |   Prioridad: Must   |   Origen: RF-03 / NEC-02</a:t>
+            </a:r>
+          </a:p>
+          <a:p>
+            <a:pPr>
+              <a:spcAft>
+                <a:spcPts val="400"/>
+              </a:spcAft>
+            </a:pPr>
+            <a:r>
+              <a:rPr sz="1400" b="0" i="0">
+                <a:solidFill>
+                  <a:srgbClr val="FFFFFF"/>
+                </a:solidFill>
+                <a:latin typeface="Calibri"/>
+              </a:rPr>
+              <a:t>Definicion de terminado: mockup aprobado + los 3 criterios verificados en el prototipo navegable</a:t>
+            </a:r>
+          </a:p>
+        </p:txBody>
+      </p:sp>
+      <p:sp>
+        <p:nvSpPr>
+          <p:cNvPr id="9" name="TextBox 8"/>
+          <p:cNvSpPr txBox="1"/>
+          <p:nvPr/>
+        </p:nvSpPr>
+        <p:spPr>
+          <a:xfrm>
+            <a:off x="457200" y="6080760"/>
+            <a:ext cx="11277295" cy="320040"/>
+          </a:xfrm>
+          <a:prstGeom prst="rect">
+            <a:avLst/>
+          </a:prstGeom>
+          <a:noFill/>
+        </p:spPr>
+        <p:txBody>
+          <a:bodyPr wrap="square">
+            <a:spAutoFit/>
+          </a:bodyPr>
+          <a:lstStyle/>
+          <a:p>
+            <a:pPr algn="ctr"/>
+            <a:r>
+              <a:rPr sz="1200" b="0" i="1">
+                <a:solidFill>
+                  <a:srgbClr val="666666"/>
+                </a:solidFill>
+                <a:latin typeface="Calibri"/>
+              </a:rPr>
+              <a:t>La historia dice a quien le sirve y para que; los criterios de aceptacion son la unica parte que se puede cobrar.</a:t>
+            </a:r>
+          </a:p>
+        </p:txBody>
+      </p:sp>
+      <p:sp>
+        <p:nvSpPr>
+          <p:cNvPr id="10" name="TextBox 9"/>
           <p:cNvSpPr txBox="1"/>
           <p:nvPr/>
         </p:nvSpPr>
@@ -5813,7 +5171,7 @@
                 </a:solidFill>
                 <a:latin typeface="Calibri"/>
               </a:rPr>
-              <a:t>Taller PI — punto de partida</a:t>
+              <a:t>Demo del dia</a:t>
             </a:r>
           </a:p>
         </p:txBody>
@@ -5852,7 +5210,25 @@
                 </a:solidFill>
                 <a:latin typeface="Calibri"/>
               </a:rPr>
-              <a:t>–   Ya existe el catalogo de requisitos de VetCare con RF, RNF, prioridades MoSCoW y matriz de trazabilidad aprobados en la clase anterior.</a:t>
+              <a:t>–   </a:t>
+            </a:r>
+            <a:r>
+              <a:rPr sz="2000" b="1" i="0">
+                <a:solidFill>
+                  <a:srgbClr val="333333"/>
+                </a:solidFill>
+                <a:latin typeface="Calibri"/>
+              </a:rPr>
+              <a:t>Herramienta:</a:t>
+            </a:r>
+            <a:r>
+              <a:rPr sz="2000" b="0" i="0">
+                <a:solidFill>
+                  <a:srgbClr val="333333"/>
+                </a:solidFill>
+                <a:latin typeface="Calibri"/>
+              </a:rPr>
+              <a:t> Google Docs · Excalidraw</a:t>
             </a:r>
           </a:p>
           <a:p>
@@ -5868,7 +5244,25 @@
                 </a:solidFill>
                 <a:latin typeface="Calibri"/>
               </a:rPr>
-              <a:t>–   Ese catalogo esta escrito en lenguaje formal de analista y todavia no permite decidir por donde arrancar ni cuanto pesa cada pieza.</a:t>
+              <a:t>–   </a:t>
+            </a:r>
+            <a:r>
+              <a:rPr sz="2000" b="1" i="0">
+                <a:solidFill>
+                  <a:srgbClr val="333333"/>
+                </a:solidFill>
+                <a:latin typeface="Calibri"/>
+              </a:rPr>
+              <a:t>Demo:</a:t>
+            </a:r>
+            <a:r>
+              <a:rPr sz="2000" b="0" i="0">
+                <a:solidFill>
+                  <a:srgbClr val="333333"/>
+                </a:solidFill>
+                <a:latin typeface="Calibri"/>
+              </a:rPr>
+              <a:t> El docente toma el RF-03 del catalogo, lo convierte en vivo en historia con criterios y luego muestra una historia partida por capas para tumbarla con INVEST.</a:t>
             </a:r>
           </a:p>
           <a:p>
@@ -5884,7 +5278,7 @@
                 </a:solidFill>
                 <a:latin typeface="Calibri"/>
               </a:rPr>
-              <a:t>–   El equipo del Proyecto Integrador necesita una lista ordenada de trabajo para poder repartirse las siguientes semanas entre diseno y construccion.</a:t>
+              <a:t>–   Mismo dominio VetCare — no otro ejemplo. Aqui se diseña, no se programa.</a:t>
             </a:r>
           </a:p>
         </p:txBody>
@@ -5959,7 +5353,7 @@
         <p:spPr>
           <a:xfrm>
             <a:off x="0" y="0"/>
-            <a:ext cx="12191695" cy="960120"/>
+            <a:ext cx="12191695" cy="1170432"/>
           </a:xfrm>
           <a:prstGeom prst="rect">
             <a:avLst/>
@@ -6001,7 +5395,7 @@
         </p:nvSpPr>
         <p:spPr>
           <a:xfrm>
-            <a:off x="0" y="960120"/>
+            <a:off x="0" y="1170432"/>
             <a:ext cx="12191695" cy="41148"/>
           </a:xfrm>
           <a:prstGeom prst="rect">
@@ -6045,7 +5439,7 @@
         <p:spPr>
           <a:xfrm>
             <a:off x="457200" y="164592"/>
-            <a:ext cx="11277295" cy="502920"/>
+            <a:ext cx="11277295" cy="384048"/>
           </a:xfrm>
           <a:prstGeom prst="rect">
             <a:avLst/>
@@ -6065,21 +5459,55 @@
                 </a:solidFill>
                 <a:latin typeface="Calibri"/>
               </a:rPr>
-              <a:t>Taller PI — pasos guiados</a:t>
-            </a:r>
-          </a:p>
-        </p:txBody>
-      </p:sp>
-      <p:sp>
-        <p:nvSpPr>
-          <p:cNvPr id="5" name="Rounded Rectangle 4"/>
+              <a:t>Herramientas de hoy</a:t>
+            </a:r>
+          </a:p>
+        </p:txBody>
+      </p:sp>
+      <p:sp>
+        <p:nvSpPr>
+          <p:cNvPr id="5" name="TextBox 4"/>
+          <p:cNvSpPr txBox="1"/>
+          <p:nvPr/>
+        </p:nvSpPr>
+        <p:spPr>
+          <a:xfrm>
+            <a:off x="457200" y="566928"/>
+            <a:ext cx="11277295" cy="411480"/>
+          </a:xfrm>
+          <a:prstGeom prst="rect">
+            <a:avLst/>
+          </a:prstGeom>
+          <a:noFill/>
+        </p:spPr>
+        <p:txBody>
+          <a:bodyPr wrap="square">
+            <a:spAutoFit/>
+          </a:bodyPr>
+          <a:lstStyle/>
+          <a:p>
+            <a:r>
+              <a:rPr sz="1400" b="0" i="0">
+                <a:solidFill>
+                  <a:srgbClr val="B8D8EE"/>
+                </a:solidFill>
+                <a:latin typeface="Calibri"/>
+              </a:rPr>
+              <a:t>Gratis · funcionan en el navegador</a:t>
+            </a:r>
+          </a:p>
+        </p:txBody>
+      </p:sp>
+      <p:sp>
+        <p:nvSpPr>
+          <p:cNvPr id="6" name="Rounded Rectangle 5"/>
           <p:cNvSpPr/>
           <p:nvPr/>
         </p:nvSpPr>
         <p:spPr>
           <a:xfrm>
-            <a:off x="457200" y="1234440"/>
-            <a:ext cx="11277295" cy="950976"/>
+            <a:off x="457200" y="1591056"/>
+            <a:ext cx="3624986" cy="2331720"/>
           </a:xfrm>
           <a:prstGeom prst="roundRect">
             <a:avLst>
@@ -6117,19 +5545,17 @@
       </p:sp>
       <p:sp>
         <p:nvSpPr>
-          <p:cNvPr id="6" name="Rounded Rectangle 5"/>
+          <p:cNvPr id="7" name="Rectangle 6"/>
           <p:cNvSpPr/>
           <p:nvPr/>
         </p:nvSpPr>
         <p:spPr>
           <a:xfrm>
-            <a:off x="594360" y="1490472"/>
-            <a:ext cx="438912" cy="438912"/>
-          </a:xfrm>
-          <a:prstGeom prst="roundRect">
-            <a:avLst>
-              <a:gd name="adj" fmla="val 12000"/>
-            </a:avLst>
+            <a:off x="457200" y="1591056"/>
+            <a:ext cx="3624986" cy="64008"/>
+          </a:xfrm>
+          <a:prstGeom prst="rect">
+            <a:avLst/>
           </a:prstGeom>
           <a:solidFill>
             <a:srgbClr val="095292"/>
@@ -6162,87 +5588,20 @@
       </p:sp>
       <p:sp>
         <p:nvSpPr>
-          <p:cNvPr id="7" name="TextBox 6"/>
-          <p:cNvSpPr txBox="1"/>
-          <p:nvPr/>
-        </p:nvSpPr>
-        <p:spPr>
-          <a:xfrm>
-            <a:off x="594360" y="1490472"/>
-            <a:ext cx="438912" cy="438912"/>
-          </a:xfrm>
-          <a:prstGeom prst="rect">
-            <a:avLst/>
-          </a:prstGeom>
-          <a:noFill/>
-        </p:spPr>
-        <p:txBody>
-          <a:bodyPr wrap="square" anchor="ctr"/>
-          <a:lstStyle/>
-          <a:p>
-            <a:pPr algn="ctr"/>
-            <a:r>
-              <a:rPr sz="1600" b="1" i="0">
-                <a:solidFill>
-                  <a:srgbClr val="FFFFFF"/>
-                </a:solidFill>
-                <a:latin typeface="Calibri"/>
-              </a:rPr>
-              <a:t>1</a:t>
-            </a:r>
-          </a:p>
-        </p:txBody>
-      </p:sp>
-      <p:sp>
-        <p:nvSpPr>
-          <p:cNvPr id="8" name="TextBox 7"/>
-          <p:cNvSpPr txBox="1"/>
-          <p:nvPr/>
-        </p:nvSpPr>
-        <p:spPr>
-          <a:xfrm>
-            <a:off x="1188720" y="1325880"/>
-            <a:ext cx="10271455" cy="786384"/>
-          </a:xfrm>
-          <a:prstGeom prst="rect">
-            <a:avLst/>
-          </a:prstGeom>
-          <a:noFill/>
-        </p:spPr>
-        <p:txBody>
-          <a:bodyPr wrap="square" anchor="ctr"/>
-          <a:lstStyle/>
-          <a:p>
-            <a:r>
-              <a:rPr sz="1500" b="1" i="0">
-                <a:solidFill>
-                  <a:srgbClr val="095292"/>
-                </a:solidFill>
-                <a:latin typeface="Calibri"/>
-              </a:rPr>
-              <a:t>Paso 1: agrupe los RF del catalogo de la clase 6 en dos epicas de VetCare (por ejemplo Gestion de pacientes e Historial y agenda) y escriba el nombre y el objetivo de cada epica en una linea.</a:t>
-            </a:r>
-          </a:p>
-        </p:txBody>
-      </p:sp>
-      <p:sp>
-        <p:nvSpPr>
-          <p:cNvPr id="9" name="Rounded Rectangle 8"/>
+          <p:cNvPr id="8" name="Rectangle 7"/>
           <p:cNvSpPr/>
           <p:nvPr/>
         </p:nvSpPr>
         <p:spPr>
           <a:xfrm>
-            <a:off x="457200" y="2276856"/>
-            <a:ext cx="11277295" cy="950976"/>
-          </a:xfrm>
-          <a:prstGeom prst="roundRect">
-            <a:avLst>
-              <a:gd name="adj" fmla="val 12000"/>
-            </a:avLst>
+            <a:off x="457200" y="1655064"/>
+            <a:ext cx="3624986" cy="27432"/>
+          </a:xfrm>
+          <a:prstGeom prst="rect">
+            <a:avLst/>
           </a:prstGeom>
           <a:solidFill>
-            <a:srgbClr val="E8F4FA"/>
+            <a:srgbClr val="FFD000"/>
           </a:solidFill>
           <a:ln>
             <a:noFill/>
@@ -6270,21 +5629,137 @@
           </a:p>
         </p:txBody>
       </p:sp>
-      <p:sp>
-        <p:nvSpPr>
-          <p:cNvPr id="10" name="Rounded Rectangle 9"/>
+      <p:pic>
+        <p:nvPicPr>
+          <p:cNvPr id="9" name="Picture 8" descr="excalidraw.png"/>
+          <p:cNvPicPr>
+            <a:picLocks noChangeAspect="1"/>
+          </p:cNvPicPr>
+          <p:nvPr/>
+        </p:nvPicPr>
+        <p:blipFill>
+          <a:blip r:embed="rId2"/>
+          <a:stretch>
+            <a:fillRect/>
+          </a:stretch>
+        </p:blipFill>
+        <p:spPr>
+          <a:xfrm>
+            <a:off x="1643329" y="1847087"/>
+            <a:ext cx="1252728" cy="1252728"/>
+          </a:xfrm>
+          <a:prstGeom prst="rect">
+            <a:avLst/>
+          </a:prstGeom>
+        </p:spPr>
+      </p:pic>
+      <p:sp>
+        <p:nvSpPr>
+          <p:cNvPr id="10" name="TextBox 9"/>
+          <p:cNvSpPr txBox="1"/>
+          <p:nvPr/>
+        </p:nvSpPr>
+        <p:spPr>
+          <a:xfrm>
+            <a:off x="530352" y="3191256"/>
+            <a:ext cx="3478682" cy="621792"/>
+          </a:xfrm>
+          <a:prstGeom prst="rect">
+            <a:avLst/>
+          </a:prstGeom>
+          <a:noFill/>
+        </p:spPr>
+        <p:txBody>
+          <a:bodyPr wrap="square" anchor="t"/>
+          <a:lstStyle/>
+          <a:p>
+            <a:pPr algn="ctr"/>
+            <a:r>
+              <a:rPr sz="1300" b="1" i="0">
+                <a:solidFill>
+                  <a:srgbClr val="095292"/>
+                </a:solidFill>
+                <a:latin typeface="Calibri"/>
+              </a:rPr>
+              <a:t>Excalidraw</a:t>
+            </a:r>
+          </a:p>
+          <a:p>
+            <a:pPr algn="ctr">
+              <a:spcBef>
+                <a:spcPts val="200"/>
+              </a:spcBef>
+            </a:pPr>
+            <a:r>
+              <a:rPr sz="1000" b="0" i="0">
+                <a:solidFill>
+                  <a:srgbClr val="666666"/>
+                </a:solidFill>
+                <a:latin typeface="Calibri"/>
+              </a:rPr>
+              <a:t>Bocetos rapidos a mano alzada</a:t>
+            </a:r>
+          </a:p>
+        </p:txBody>
+      </p:sp>
+      <p:sp>
+        <p:nvSpPr>
+          <p:cNvPr id="11" name="Rounded Rectangle 10"/>
           <p:cNvSpPr/>
           <p:nvPr/>
         </p:nvSpPr>
         <p:spPr>
           <a:xfrm>
-            <a:off x="594360" y="2532888"/>
-            <a:ext cx="438912" cy="438912"/>
+            <a:off x="4283354" y="1591056"/>
+            <a:ext cx="3624986" cy="2331720"/>
           </a:xfrm>
           <a:prstGeom prst="roundRect">
             <a:avLst>
               <a:gd name="adj" fmla="val 12000"/>
             </a:avLst>
+          </a:prstGeom>
+          <a:solidFill>
+            <a:srgbClr val="F2F2F2"/>
+          </a:solidFill>
+          <a:ln>
+            <a:noFill/>
+          </a:ln>
+        </p:spPr>
+        <p:style>
+          <a:lnRef idx="1">
+            <a:schemeClr val="accent1"/>
+          </a:lnRef>
+          <a:fillRef idx="3">
+            <a:schemeClr val="accent1"/>
+          </a:fillRef>
+          <a:effectRef idx="2">
+            <a:schemeClr val="accent1"/>
+          </a:effectRef>
+          <a:fontRef idx="minor">
+            <a:schemeClr val="lt1"/>
+          </a:fontRef>
+        </p:style>
+        <p:txBody>
+          <a:bodyPr rtlCol="0" anchor="ctr"/>
+          <a:lstStyle/>
+          <a:p>
+            <a:pPr algn="ctr"/>
+          </a:p>
+        </p:txBody>
+      </p:sp>
+      <p:sp>
+        <p:nvSpPr>
+          <p:cNvPr id="12" name="Rectangle 11"/>
+          <p:cNvSpPr/>
+          <p:nvPr/>
+        </p:nvSpPr>
+        <p:spPr>
+          <a:xfrm>
+            <a:off x="4283354" y="1591056"/>
+            <a:ext cx="3624986" cy="64008"/>
+          </a:xfrm>
+          <a:prstGeom prst="rect">
+            <a:avLst/>
           </a:prstGeom>
           <a:solidFill>
             <a:srgbClr val="095292"/>
@@ -6317,14 +5792,81 @@
       </p:sp>
       <p:sp>
         <p:nvSpPr>
-          <p:cNvPr id="11" name="TextBox 10"/>
+          <p:cNvPr id="13" name="Rectangle 12"/>
+          <p:cNvSpPr/>
+          <p:nvPr/>
+        </p:nvSpPr>
+        <p:spPr>
+          <a:xfrm>
+            <a:off x="4283354" y="1655064"/>
+            <a:ext cx="3624986" cy="27432"/>
+          </a:xfrm>
+          <a:prstGeom prst="rect">
+            <a:avLst/>
+          </a:prstGeom>
+          <a:solidFill>
+            <a:srgbClr val="FFD000"/>
+          </a:solidFill>
+          <a:ln>
+            <a:noFill/>
+          </a:ln>
+        </p:spPr>
+        <p:style>
+          <a:lnRef idx="1">
+            <a:schemeClr val="accent1"/>
+          </a:lnRef>
+          <a:fillRef idx="3">
+            <a:schemeClr val="accent1"/>
+          </a:fillRef>
+          <a:effectRef idx="2">
+            <a:schemeClr val="accent1"/>
+          </a:effectRef>
+          <a:fontRef idx="minor">
+            <a:schemeClr val="lt1"/>
+          </a:fontRef>
+        </p:style>
+        <p:txBody>
+          <a:bodyPr rtlCol="0" anchor="ctr"/>
+          <a:lstStyle/>
+          <a:p>
+            <a:pPr algn="ctr"/>
+          </a:p>
+        </p:txBody>
+      </p:sp>
+      <p:pic>
+        <p:nvPicPr>
+          <p:cNvPr id="14" name="Picture 13" descr="google_docs.png"/>
+          <p:cNvPicPr>
+            <a:picLocks noChangeAspect="1"/>
+          </p:cNvPicPr>
+          <p:nvPr/>
+        </p:nvPicPr>
+        <p:blipFill>
+          <a:blip r:embed="rId3"/>
+          <a:stretch>
+            <a:fillRect/>
+          </a:stretch>
+        </p:blipFill>
+        <p:spPr>
+          <a:xfrm>
+            <a:off x="5469483" y="1847087"/>
+            <a:ext cx="1252728" cy="1252728"/>
+          </a:xfrm>
+          <a:prstGeom prst="rect">
+            <a:avLst/>
+          </a:prstGeom>
+        </p:spPr>
+      </p:pic>
+      <p:sp>
+        <p:nvSpPr>
+          <p:cNvPr id="15" name="TextBox 14"/>
           <p:cNvSpPr txBox="1"/>
           <p:nvPr/>
         </p:nvSpPr>
         <p:spPr>
           <a:xfrm>
-            <a:off x="594360" y="2532888"/>
-            <a:ext cx="438912" cy="438912"/>
+            <a:off x="4356506" y="3191256"/>
+            <a:ext cx="3478682" cy="621792"/>
           </a:xfrm>
           <a:prstGeom prst="rect">
             <a:avLst/>
@@ -6332,64 +5874,48 @@
           <a:noFill/>
         </p:spPr>
         <p:txBody>
-          <a:bodyPr wrap="square" anchor="ctr"/>
+          <a:bodyPr wrap="square" anchor="t"/>
           <a:lstStyle/>
           <a:p>
             <a:pPr algn="ctr"/>
             <a:r>
-              <a:rPr sz="1600" b="1" i="0">
-                <a:solidFill>
-                  <a:srgbClr val="FFFFFF"/>
-                </a:solidFill>
-                <a:latin typeface="Calibri"/>
-              </a:rPr>
-              <a:t>2</a:t>
-            </a:r>
-          </a:p>
-        </p:txBody>
-      </p:sp>
-      <p:sp>
-        <p:nvSpPr>
-          <p:cNvPr id="12" name="TextBox 11"/>
-          <p:cNvSpPr txBox="1"/>
-          <p:nvPr/>
-        </p:nvSpPr>
-        <p:spPr>
-          <a:xfrm>
-            <a:off x="1188720" y="2368296"/>
-            <a:ext cx="10271455" cy="786384"/>
-          </a:xfrm>
-          <a:prstGeom prst="rect">
-            <a:avLst/>
-          </a:prstGeom>
-          <a:noFill/>
-        </p:spPr>
-        <p:txBody>
-          <a:bodyPr wrap="square" anchor="ctr"/>
-          <a:lstStyle/>
-          <a:p>
-            <a:r>
-              <a:rPr sz="1500" b="1" i="0">
+              <a:rPr sz="1300" b="1" i="0">
                 <a:solidFill>
                   <a:srgbClr val="095292"/>
                 </a:solidFill>
                 <a:latin typeface="Calibri"/>
               </a:rPr>
-              <a:t>Paso 2: descomponga las dos epicas en 8 historias con el formato Como &lt;rol de la clinica Huellitas&gt; quiero &lt;accion&gt; para &lt;beneficio&gt;, usando roles concretos (auxiliar, veterinario, administrador) y nunca la palabra usuario.</a:t>
-            </a:r>
-          </a:p>
-        </p:txBody>
-      </p:sp>
-      <p:sp>
-        <p:nvSpPr>
-          <p:cNvPr id="13" name="Rounded Rectangle 12"/>
+              <a:t>google docs</a:t>
+            </a:r>
+          </a:p>
+          <a:p>
+            <a:pPr algn="ctr">
+              <a:spcBef>
+                <a:spcPts val="200"/>
+              </a:spcBef>
+            </a:pPr>
+            <a:r>
+              <a:rPr sz="1000" b="0" i="0">
+                <a:solidFill>
+                  <a:srgbClr val="666666"/>
+                </a:solidFill>
+                <a:latin typeface="Calibri"/>
+              </a:rPr>
+              <a:t>Documentos del paquete de diseño</a:t>
+            </a:r>
+          </a:p>
+        </p:txBody>
+      </p:sp>
+      <p:sp>
+        <p:nvSpPr>
+          <p:cNvPr id="16" name="Rounded Rectangle 15"/>
           <p:cNvSpPr/>
           <p:nvPr/>
         </p:nvSpPr>
         <p:spPr>
           <a:xfrm>
-            <a:off x="457200" y="3319272"/>
-            <a:ext cx="11277295" cy="950976"/>
+            <a:off x="8109508" y="1591056"/>
+            <a:ext cx="3624986" cy="2331720"/>
           </a:xfrm>
           <a:prstGeom prst="roundRect">
             <a:avLst>
@@ -6427,19 +5953,17 @@
       </p:sp>
       <p:sp>
         <p:nvSpPr>
-          <p:cNvPr id="14" name="Rounded Rectangle 13"/>
+          <p:cNvPr id="17" name="Rectangle 16"/>
           <p:cNvSpPr/>
           <p:nvPr/>
         </p:nvSpPr>
         <p:spPr>
           <a:xfrm>
-            <a:off x="594360" y="3575304"/>
-            <a:ext cx="438912" cy="438912"/>
-          </a:xfrm>
-          <a:prstGeom prst="roundRect">
-            <a:avLst>
-              <a:gd name="adj" fmla="val 12000"/>
-            </a:avLst>
+            <a:off x="8109508" y="1591056"/>
+            <a:ext cx="3624986" cy="64008"/>
+          </a:xfrm>
+          <a:prstGeom prst="rect">
+            <a:avLst/>
           </a:prstGeom>
           <a:solidFill>
             <a:srgbClr val="095292"/>
@@ -6472,87 +5996,20 @@
       </p:sp>
       <p:sp>
         <p:nvSpPr>
-          <p:cNvPr id="15" name="TextBox 14"/>
-          <p:cNvSpPr txBox="1"/>
-          <p:nvPr/>
-        </p:nvSpPr>
-        <p:spPr>
-          <a:xfrm>
-            <a:off x="594360" y="3575304"/>
-            <a:ext cx="438912" cy="438912"/>
-          </a:xfrm>
-          <a:prstGeom prst="rect">
-            <a:avLst/>
-          </a:prstGeom>
-          <a:noFill/>
-        </p:spPr>
-        <p:txBody>
-          <a:bodyPr wrap="square" anchor="ctr"/>
-          <a:lstStyle/>
-          <a:p>
-            <a:pPr algn="ctr"/>
-            <a:r>
-              <a:rPr sz="1600" b="1" i="0">
-                <a:solidFill>
-                  <a:srgbClr val="FFFFFF"/>
-                </a:solidFill>
-                <a:latin typeface="Calibri"/>
-              </a:rPr>
-              <a:t>3</a:t>
-            </a:r>
-          </a:p>
-        </p:txBody>
-      </p:sp>
-      <p:sp>
-        <p:nvSpPr>
-          <p:cNvPr id="16" name="TextBox 15"/>
-          <p:cNvSpPr txBox="1"/>
-          <p:nvPr/>
-        </p:nvSpPr>
-        <p:spPr>
-          <a:xfrm>
-            <a:off x="1188720" y="3410712"/>
-            <a:ext cx="10271455" cy="786384"/>
-          </a:xfrm>
-          <a:prstGeom prst="rect">
-            <a:avLst/>
-          </a:prstGeom>
-          <a:noFill/>
-        </p:spPr>
-        <p:txBody>
-          <a:bodyPr wrap="square" anchor="ctr"/>
-          <a:lstStyle/>
-          <a:p>
-            <a:r>
-              <a:rPr sz="1500" b="1" i="0">
-                <a:solidFill>
-                  <a:srgbClr val="095292"/>
-                </a:solidFill>
-                <a:latin typeface="Calibri"/>
-              </a:rPr>
-              <a:t>Paso 3: escriba 2 o 3 criterios de aceptacion por historia en Dado-Cuando-Entonces, e incluya obligatoriamente un criterio de camino alterno o de error en al menos cuatro de las ocho historias.</a:t>
-            </a:r>
-          </a:p>
-        </p:txBody>
-      </p:sp>
-      <p:sp>
-        <p:nvSpPr>
-          <p:cNvPr id="17" name="Rounded Rectangle 16"/>
+          <p:cNvPr id="18" name="Rectangle 17"/>
           <p:cNvSpPr/>
           <p:nvPr/>
         </p:nvSpPr>
         <p:spPr>
           <a:xfrm>
-            <a:off x="457200" y="4361688"/>
-            <a:ext cx="11277295" cy="950976"/>
-          </a:xfrm>
-          <a:prstGeom prst="roundRect">
-            <a:avLst>
-              <a:gd name="adj" fmla="val 12000"/>
-            </a:avLst>
+            <a:off x="8109508" y="1655064"/>
+            <a:ext cx="3624986" cy="27432"/>
+          </a:xfrm>
+          <a:prstGeom prst="rect">
+            <a:avLst/>
           </a:prstGeom>
           <a:solidFill>
-            <a:srgbClr val="E8F4FA"/>
+            <a:srgbClr val="FFD000"/>
           </a:solidFill>
           <a:ln>
             <a:noFill/>
@@ -6580,84 +6037,30 @@
           </a:p>
         </p:txBody>
       </p:sp>
-      <p:sp>
-        <p:nvSpPr>
-          <p:cNvPr id="18" name="Rounded Rectangle 17"/>
-          <p:cNvSpPr/>
-          <p:nvPr/>
-        </p:nvSpPr>
-        <p:spPr>
-          <a:xfrm>
-            <a:off x="594360" y="4617720"/>
-            <a:ext cx="438912" cy="438912"/>
-          </a:xfrm>
-          <a:prstGeom prst="roundRect">
-            <a:avLst>
-              <a:gd name="adj" fmla="val 12000"/>
-            </a:avLst>
-          </a:prstGeom>
-          <a:solidFill>
-            <a:srgbClr val="095292"/>
-          </a:solidFill>
-          <a:ln>
-            <a:noFill/>
-          </a:ln>
-        </p:spPr>
-        <p:style>
-          <a:lnRef idx="1">
-            <a:schemeClr val="accent1"/>
-          </a:lnRef>
-          <a:fillRef idx="3">
-            <a:schemeClr val="accent1"/>
-          </a:fillRef>
-          <a:effectRef idx="2">
-            <a:schemeClr val="accent1"/>
-          </a:effectRef>
-          <a:fontRef idx="minor">
-            <a:schemeClr val="lt1"/>
-          </a:fontRef>
-        </p:style>
-        <p:txBody>
-          <a:bodyPr rtlCol="0" anchor="ctr"/>
-          <a:lstStyle/>
-          <a:p>
-            <a:pPr algn="ctr"/>
-          </a:p>
-        </p:txBody>
-      </p:sp>
-      <p:sp>
-        <p:nvSpPr>
-          <p:cNvPr id="19" name="TextBox 18"/>
-          <p:cNvSpPr txBox="1"/>
-          <p:nvPr/>
-        </p:nvSpPr>
-        <p:spPr>
-          <a:xfrm>
-            <a:off x="594360" y="4617720"/>
-            <a:ext cx="438912" cy="438912"/>
-          </a:xfrm>
-          <a:prstGeom prst="rect">
-            <a:avLst/>
-          </a:prstGeom>
-          <a:noFill/>
-        </p:spPr>
-        <p:txBody>
-          <a:bodyPr wrap="square" anchor="ctr"/>
-          <a:lstStyle/>
-          <a:p>
-            <a:pPr algn="ctr"/>
-            <a:r>
-              <a:rPr sz="1600" b="1" i="0">
-                <a:solidFill>
-                  <a:srgbClr val="FFFFFF"/>
-                </a:solidFill>
-                <a:latin typeface="Calibri"/>
-              </a:rPr>
-              <a:t>4</a:t>
-            </a:r>
-          </a:p>
-        </p:txBody>
-      </p:sp>
+      <p:pic>
+        <p:nvPicPr>
+          <p:cNvPr id="19" name="Picture 18" descr="examlab.png"/>
+          <p:cNvPicPr>
+            <a:picLocks noChangeAspect="1"/>
+          </p:cNvPicPr>
+          <p:nvPr/>
+        </p:nvPicPr>
+        <p:blipFill>
+          <a:blip r:embed="rId4"/>
+          <a:stretch>
+            <a:fillRect/>
+          </a:stretch>
+        </p:blipFill>
+        <p:spPr>
+          <a:xfrm>
+            <a:off x="9295638" y="1847087"/>
+            <a:ext cx="1252728" cy="1252728"/>
+          </a:xfrm>
+          <a:prstGeom prst="rect">
+            <a:avLst/>
+          </a:prstGeom>
+        </p:spPr>
+      </p:pic>
       <p:sp>
         <p:nvSpPr>
           <p:cNvPr id="20" name="TextBox 19"/>
@@ -6666,8 +6069,8 @@
         </p:nvSpPr>
         <p:spPr>
           <a:xfrm>
-            <a:off x="1188720" y="4453128"/>
-            <a:ext cx="10271455" cy="786384"/>
+            <a:off x="8182660" y="3191256"/>
+            <a:ext cx="3478682" cy="621792"/>
           </a:xfrm>
           <a:prstGeom prst="rect">
             <a:avLst/>
@@ -6675,179 +6078,41 @@
           <a:noFill/>
         </p:spPr>
         <p:txBody>
-          <a:bodyPr wrap="square" anchor="ctr"/>
-          <a:lstStyle/>
-          <a:p>
-            <a:r>
-              <a:rPr sz="1500" b="1" i="0">
+          <a:bodyPr wrap="square" anchor="t"/>
+          <a:lstStyle/>
+          <a:p>
+            <a:pPr algn="ctr"/>
+            <a:r>
+              <a:rPr sz="1300" b="1" i="0">
                 <a:solidFill>
                   <a:srgbClr val="095292"/>
                 </a:solidFill>
                 <a:latin typeface="Calibri"/>
               </a:rPr>
-              <a:t>Paso 4: revise cada historia contra INVEST marcando las seis letras con si o no; toda historia que falle dos o mas letras debe reescribirse o partirse antes de continuar.</a:t>
-            </a:r>
-          </a:p>
-        </p:txBody>
-      </p:sp>
-      <p:sp>
-        <p:nvSpPr>
-          <p:cNvPr id="21" name="Rounded Rectangle 20"/>
-          <p:cNvSpPr/>
-          <p:nvPr/>
-        </p:nvSpPr>
-        <p:spPr>
-          <a:xfrm>
-            <a:off x="457200" y="5404104"/>
-            <a:ext cx="11277295" cy="950976"/>
-          </a:xfrm>
-          <a:prstGeom prst="roundRect">
-            <a:avLst>
-              <a:gd name="adj" fmla="val 12000"/>
-            </a:avLst>
-          </a:prstGeom>
-          <a:solidFill>
-            <a:srgbClr val="F2F2F2"/>
-          </a:solidFill>
-          <a:ln>
-            <a:noFill/>
-          </a:ln>
-        </p:spPr>
-        <p:style>
-          <a:lnRef idx="1">
-            <a:schemeClr val="accent1"/>
-          </a:lnRef>
-          <a:fillRef idx="3">
-            <a:schemeClr val="accent1"/>
-          </a:fillRef>
-          <a:effectRef idx="2">
-            <a:schemeClr val="accent1"/>
-          </a:effectRef>
-          <a:fontRef idx="minor">
-            <a:schemeClr val="lt1"/>
-          </a:fontRef>
-        </p:style>
-        <p:txBody>
-          <a:bodyPr rtlCol="0" anchor="ctr"/>
-          <a:lstStyle/>
-          <a:p>
-            <a:pPr algn="ctr"/>
-          </a:p>
-        </p:txBody>
-      </p:sp>
-      <p:sp>
-        <p:nvSpPr>
-          <p:cNvPr id="22" name="Rounded Rectangle 21"/>
-          <p:cNvSpPr/>
-          <p:nvPr/>
-        </p:nvSpPr>
-        <p:spPr>
-          <a:xfrm>
-            <a:off x="594360" y="5660136"/>
-            <a:ext cx="438912" cy="438912"/>
-          </a:xfrm>
-          <a:prstGeom prst="roundRect">
-            <a:avLst>
-              <a:gd name="adj" fmla="val 12000"/>
-            </a:avLst>
-          </a:prstGeom>
-          <a:solidFill>
-            <a:srgbClr val="095292"/>
-          </a:solidFill>
-          <a:ln>
-            <a:noFill/>
-          </a:ln>
-        </p:spPr>
-        <p:style>
-          <a:lnRef idx="1">
-            <a:schemeClr val="accent1"/>
-          </a:lnRef>
-          <a:fillRef idx="3">
-            <a:schemeClr val="accent1"/>
-          </a:fillRef>
-          <a:effectRef idx="2">
-            <a:schemeClr val="accent1"/>
-          </a:effectRef>
-          <a:fontRef idx="minor">
-            <a:schemeClr val="lt1"/>
-          </a:fontRef>
-        </p:style>
-        <p:txBody>
-          <a:bodyPr rtlCol="0" anchor="ctr"/>
-          <a:lstStyle/>
-          <a:p>
-            <a:pPr algn="ctr"/>
-          </a:p>
-        </p:txBody>
-      </p:sp>
-      <p:sp>
-        <p:nvSpPr>
-          <p:cNvPr id="23" name="TextBox 22"/>
-          <p:cNvSpPr txBox="1"/>
-          <p:nvPr/>
-        </p:nvSpPr>
-        <p:spPr>
-          <a:xfrm>
-            <a:off x="594360" y="5660136"/>
-            <a:ext cx="438912" cy="438912"/>
-          </a:xfrm>
-          <a:prstGeom prst="rect">
-            <a:avLst/>
-          </a:prstGeom>
-          <a:noFill/>
-        </p:spPr>
-        <p:txBody>
-          <a:bodyPr wrap="square" anchor="ctr"/>
-          <a:lstStyle/>
-          <a:p>
-            <a:pPr algn="ctr"/>
-            <a:r>
-              <a:rPr sz="1600" b="1" i="0">
-                <a:solidFill>
-                  <a:srgbClr val="FFFFFF"/>
-                </a:solidFill>
-                <a:latin typeface="Calibri"/>
-              </a:rPr>
-              <a:t>5</a:t>
-            </a:r>
-          </a:p>
-        </p:txBody>
-      </p:sp>
-      <p:sp>
-        <p:nvSpPr>
-          <p:cNvPr id="24" name="TextBox 23"/>
-          <p:cNvSpPr txBox="1"/>
-          <p:nvPr/>
-        </p:nvSpPr>
-        <p:spPr>
-          <a:xfrm>
-            <a:off x="1188720" y="5495544"/>
-            <a:ext cx="10271455" cy="786384"/>
-          </a:xfrm>
-          <a:prstGeom prst="rect">
-            <a:avLst/>
-          </a:prstGeom>
-          <a:noFill/>
-        </p:spPr>
-        <p:txBody>
-          <a:bodyPr wrap="square" anchor="ctr"/>
-          <a:lstStyle/>
-          <a:p>
-            <a:r>
-              <a:rPr sz="1500" b="1" i="0">
-                <a:solidFill>
-                  <a:srgbClr val="095292"/>
-                </a:solidFill>
-                <a:latin typeface="Calibri"/>
-              </a:rPr>
-              <a:t>Paso 5: estime en puntos con la escala 1, 2, 3, 5, 8 tomando 'registrar un dueno = 3' como referencia, ordene el backlog de mayor a menor prioridad, agregue la columna de trazabilidad al RF de origen y suba el tablero a la plataforma del curso.</a:t>
-            </a:r>
-          </a:p>
-        </p:txBody>
-      </p:sp>
-      <p:sp>
-        <p:nvSpPr>
-          <p:cNvPr id="25" name="TextBox 24"/>
+              <a:t>la plataforma del curso</a:t>
+            </a:r>
+          </a:p>
+          <a:p>
+            <a:pPr algn="ctr">
+              <a:spcBef>
+                <a:spcPts val="200"/>
+              </a:spcBef>
+            </a:pPr>
+            <a:r>
+              <a:rPr sz="1000" b="0" i="0">
+                <a:solidFill>
+                  <a:srgbClr val="666666"/>
+                </a:solidFill>
+                <a:latin typeface="Calibri"/>
+              </a:rPr>
+              <a:t>Entrega del taller · en la fecha que indique el docente</a:t>
+            </a:r>
+          </a:p>
+        </p:txBody>
+      </p:sp>
+      <p:sp>
+        <p:nvSpPr>
+          <p:cNvPr id="21" name="TextBox 20"/>
           <p:cNvSpPr txBox="1"/>
           <p:nvPr/>
         </p:nvSpPr>
@@ -7021,154 +6286,21 @@
                 </a:solidFill>
                 <a:latin typeface="Calibri"/>
               </a:rPr>
-              <a:t>Antes de entregar — autochequeo</a:t>
-            </a:r>
-          </a:p>
-        </p:txBody>
-      </p:sp>
-      <p:sp>
-        <p:nvSpPr>
-          <p:cNvPr id="5" name="Rounded Rectangle 4"/>
-          <p:cNvSpPr/>
-          <p:nvPr/>
-        </p:nvSpPr>
-        <p:spPr>
-          <a:xfrm>
-            <a:off x="457200" y="1261872"/>
-            <a:ext cx="11277295" cy="566928"/>
-          </a:xfrm>
-          <a:prstGeom prst="roundRect">
-            <a:avLst>
-              <a:gd name="adj" fmla="val 12000"/>
-            </a:avLst>
-          </a:prstGeom>
-          <a:solidFill>
-            <a:srgbClr val="F2F2F2"/>
-          </a:solidFill>
-          <a:ln>
-            <a:noFill/>
-          </a:ln>
-        </p:spPr>
-        <p:style>
-          <a:lnRef idx="1">
-            <a:schemeClr val="accent1"/>
-          </a:lnRef>
-          <a:fillRef idx="3">
-            <a:schemeClr val="accent1"/>
-          </a:fillRef>
-          <a:effectRef idx="2">
-            <a:schemeClr val="accent1"/>
-          </a:effectRef>
-          <a:fontRef idx="minor">
-            <a:schemeClr val="lt1"/>
-          </a:fontRef>
-        </p:style>
-        <p:txBody>
-          <a:bodyPr rtlCol="0" anchor="ctr"/>
-          <a:lstStyle/>
-          <a:p>
-            <a:pPr algn="ctr"/>
-          </a:p>
-        </p:txBody>
-      </p:sp>
-      <p:sp>
-        <p:nvSpPr>
-          <p:cNvPr id="6" name="Rectangle 5"/>
-          <p:cNvSpPr/>
-          <p:nvPr/>
-        </p:nvSpPr>
-        <p:spPr>
-          <a:xfrm>
-            <a:off x="640080" y="1408175"/>
-            <a:ext cx="274320" cy="274320"/>
-          </a:xfrm>
-          <a:prstGeom prst="rect">
-            <a:avLst/>
-          </a:prstGeom>
-          <a:solidFill>
-            <a:srgbClr val="FFFFFF"/>
-          </a:solidFill>
-          <a:ln>
-            <a:solidFill>
-              <a:srgbClr val="333333"/>
-            </a:solidFill>
-          </a:ln>
-        </p:spPr>
-        <p:style>
-          <a:lnRef idx="1">
-            <a:schemeClr val="accent1"/>
-          </a:lnRef>
-          <a:fillRef idx="3">
-            <a:schemeClr val="accent1"/>
-          </a:fillRef>
-          <a:effectRef idx="2">
-            <a:schemeClr val="accent1"/>
-          </a:effectRef>
-          <a:fontRef idx="minor">
-            <a:schemeClr val="lt1"/>
-          </a:fontRef>
-        </p:style>
-        <p:txBody>
-          <a:bodyPr rtlCol="0" anchor="ctr"/>
-          <a:lstStyle/>
-          <a:p>
-            <a:pPr algn="ctr"/>
-          </a:p>
-        </p:txBody>
-      </p:sp>
-      <p:sp>
-        <p:nvSpPr>
-          <p:cNvPr id="7" name="Rectangle 6"/>
-          <p:cNvSpPr/>
-          <p:nvPr/>
-        </p:nvSpPr>
-        <p:spPr>
-          <a:xfrm>
-            <a:off x="640080" y="1408175"/>
-            <a:ext cx="73152" cy="274320"/>
-          </a:xfrm>
-          <a:prstGeom prst="rect">
-            <a:avLst/>
-          </a:prstGeom>
-          <a:solidFill>
-            <a:srgbClr val="269CCB"/>
-          </a:solidFill>
-          <a:ln>
-            <a:noFill/>
-          </a:ln>
-        </p:spPr>
-        <p:style>
-          <a:lnRef idx="1">
-            <a:schemeClr val="accent1"/>
-          </a:lnRef>
-          <a:fillRef idx="3">
-            <a:schemeClr val="accent1"/>
-          </a:fillRef>
-          <a:effectRef idx="2">
-            <a:schemeClr val="accent1"/>
-          </a:effectRef>
-          <a:fontRef idx="minor">
-            <a:schemeClr val="lt1"/>
-          </a:fontRef>
-        </p:style>
-        <p:txBody>
-          <a:bodyPr rtlCol="0" anchor="ctr"/>
-          <a:lstStyle/>
-          <a:p>
-            <a:pPr algn="ctr"/>
-          </a:p>
-        </p:txBody>
-      </p:sp>
-      <p:sp>
-        <p:nvSpPr>
-          <p:cNvPr id="8" name="TextBox 7"/>
+              <a:t>Taller PI — por que importa</a:t>
+            </a:r>
+          </a:p>
+        </p:txBody>
+      </p:sp>
+      <p:sp>
+        <p:nvSpPr>
+          <p:cNvPr id="5" name="TextBox 4"/>
           <p:cNvSpPr txBox="1"/>
           <p:nvPr/>
         </p:nvSpPr>
         <p:spPr>
           <a:xfrm>
-            <a:off x="1097280" y="1353312"/>
-            <a:ext cx="10362895" cy="402336"/>
+            <a:off x="457200" y="1170432"/>
+            <a:ext cx="11277295" cy="5230368"/>
           </a:xfrm>
           <a:prstGeom prst="rect">
             <a:avLst/>
@@ -7176,354 +6308,81 @@
           <a:noFill/>
         </p:spPr>
         <p:txBody>
-          <a:bodyPr wrap="square" anchor="ctr"/>
-          <a:lstStyle/>
-          <a:p>
-            <a:r>
-              <a:rPr sz="1500" b="0" i="0">
+          <a:bodyPr wrap="square">
+            <a:spAutoFit/>
+          </a:bodyPr>
+          <a:lstStyle/>
+          <a:p>
+            <a:pPr>
+              <a:spcAft>
+                <a:spcPts val="800"/>
+              </a:spcAft>
+            </a:pPr>
+            <a:r>
+              <a:rPr sz="2000" b="0" i="0">
                 <a:solidFill>
                   <a:srgbClr val="333333"/>
                 </a:solidFill>
                 <a:latin typeface="Calibri"/>
               </a:rPr>
-              <a:t>Si le leo esta historia al Dr. Ramirez sin explicarle nada, entiende quien gana algo y que gana, o solo entiende que hay una pantalla nueva?</a:t>
-            </a:r>
-          </a:p>
-        </p:txBody>
-      </p:sp>
-      <p:sp>
-        <p:nvSpPr>
-          <p:cNvPr id="9" name="Rounded Rectangle 8"/>
-          <p:cNvSpPr/>
-          <p:nvPr/>
-        </p:nvSpPr>
-        <p:spPr>
-          <a:xfrm>
-            <a:off x="457200" y="1938528"/>
-            <a:ext cx="11277295" cy="566928"/>
-          </a:xfrm>
-          <a:prstGeom prst="roundRect">
-            <a:avLst>
-              <a:gd name="adj" fmla="val 12000"/>
-            </a:avLst>
-          </a:prstGeom>
-          <a:solidFill>
-            <a:srgbClr val="F2F2F2"/>
-          </a:solidFill>
-          <a:ln>
-            <a:noFill/>
-          </a:ln>
-        </p:spPr>
-        <p:style>
-          <a:lnRef idx="1">
-            <a:schemeClr val="accent1"/>
-          </a:lnRef>
-          <a:fillRef idx="3">
-            <a:schemeClr val="accent1"/>
-          </a:fillRef>
-          <a:effectRef idx="2">
-            <a:schemeClr val="accent1"/>
-          </a:effectRef>
-          <a:fontRef idx="minor">
-            <a:schemeClr val="lt1"/>
-          </a:fontRef>
-        </p:style>
-        <p:txBody>
-          <a:bodyPr rtlCol="0" anchor="ctr"/>
-          <a:lstStyle/>
-          <a:p>
-            <a:pPr algn="ctr"/>
-          </a:p>
-        </p:txBody>
-      </p:sp>
-      <p:sp>
-        <p:nvSpPr>
-          <p:cNvPr id="10" name="Rectangle 9"/>
-          <p:cNvSpPr/>
-          <p:nvPr/>
-        </p:nvSpPr>
-        <p:spPr>
-          <a:xfrm>
-            <a:off x="640080" y="2084832"/>
-            <a:ext cx="274320" cy="274320"/>
-          </a:xfrm>
-          <a:prstGeom prst="rect">
-            <a:avLst/>
-          </a:prstGeom>
-          <a:solidFill>
-            <a:srgbClr val="FFFFFF"/>
-          </a:solidFill>
-          <a:ln>
-            <a:solidFill>
-              <a:srgbClr val="333333"/>
-            </a:solidFill>
-          </a:ln>
-        </p:spPr>
-        <p:style>
-          <a:lnRef idx="1">
-            <a:schemeClr val="accent1"/>
-          </a:lnRef>
-          <a:fillRef idx="3">
-            <a:schemeClr val="accent1"/>
-          </a:fillRef>
-          <a:effectRef idx="2">
-            <a:schemeClr val="accent1"/>
-          </a:effectRef>
-          <a:fontRef idx="minor">
-            <a:schemeClr val="lt1"/>
-          </a:fontRef>
-        </p:style>
-        <p:txBody>
-          <a:bodyPr rtlCol="0" anchor="ctr"/>
-          <a:lstStyle/>
-          <a:p>
-            <a:pPr algn="ctr"/>
-          </a:p>
-        </p:txBody>
-      </p:sp>
-      <p:sp>
-        <p:nvSpPr>
-          <p:cNvPr id="11" name="Rectangle 10"/>
-          <p:cNvSpPr/>
-          <p:nvPr/>
-        </p:nvSpPr>
-        <p:spPr>
-          <a:xfrm>
-            <a:off x="640080" y="2084832"/>
-            <a:ext cx="73152" cy="274320"/>
-          </a:xfrm>
-          <a:prstGeom prst="rect">
-            <a:avLst/>
-          </a:prstGeom>
-          <a:solidFill>
-            <a:srgbClr val="269CCB"/>
-          </a:solidFill>
-          <a:ln>
-            <a:noFill/>
-          </a:ln>
-        </p:spPr>
-        <p:style>
-          <a:lnRef idx="1">
-            <a:schemeClr val="accent1"/>
-          </a:lnRef>
-          <a:fillRef idx="3">
-            <a:schemeClr val="accent1"/>
-          </a:fillRef>
-          <a:effectRef idx="2">
-            <a:schemeClr val="accent1"/>
-          </a:effectRef>
-          <a:fontRef idx="minor">
-            <a:schemeClr val="lt1"/>
-          </a:fontRef>
-        </p:style>
-        <p:txBody>
-          <a:bodyPr rtlCol="0" anchor="ctr"/>
-          <a:lstStyle/>
-          <a:p>
-            <a:pPr algn="ctr"/>
-          </a:p>
-        </p:txBody>
-      </p:sp>
-      <p:sp>
-        <p:nvSpPr>
-          <p:cNvPr id="12" name="TextBox 11"/>
-          <p:cNvSpPr txBox="1"/>
-          <p:nvPr/>
-        </p:nvSpPr>
-        <p:spPr>
-          <a:xfrm>
-            <a:off x="1097280" y="2029968"/>
-            <a:ext cx="10362895" cy="402336"/>
-          </a:xfrm>
-          <a:prstGeom prst="rect">
-            <a:avLst/>
-          </a:prstGeom>
-          <a:noFill/>
-        </p:spPr>
-        <p:txBody>
-          <a:bodyPr wrap="square" anchor="ctr"/>
-          <a:lstStyle/>
-          <a:p>
-            <a:r>
-              <a:rPr sz="1500" b="0" i="0">
+              <a:t>–   </a:t>
+            </a:r>
+            <a:r>
+              <a:rPr sz="2000" b="1" i="0">
                 <a:solidFill>
                   <a:srgbClr val="333333"/>
                 </a:solidFill>
                 <a:latin typeface="Calibri"/>
               </a:rPr>
-              <a:t>El 'para' de mi historia esta repitiendo la accion con otras palabras, o dice de verdad el beneficio para la clinica?</a:t>
-            </a:r>
-          </a:p>
-        </p:txBody>
-      </p:sp>
-      <p:sp>
-        <p:nvSpPr>
-          <p:cNvPr id="13" name="Rounded Rectangle 12"/>
-          <p:cNvSpPr/>
-          <p:nvPr/>
-        </p:nvSpPr>
-        <p:spPr>
-          <a:xfrm>
-            <a:off x="457200" y="2615184"/>
-            <a:ext cx="11277295" cy="566928"/>
-          </a:xfrm>
-          <a:prstGeom prst="roundRect">
-            <a:avLst>
-              <a:gd name="adj" fmla="val 12000"/>
-            </a:avLst>
-          </a:prstGeom>
-          <a:solidFill>
-            <a:srgbClr val="F2F2F2"/>
-          </a:solidFill>
-          <a:ln>
-            <a:noFill/>
-          </a:ln>
-        </p:spPr>
-        <p:style>
-          <a:lnRef idx="1">
-            <a:schemeClr val="accent1"/>
-          </a:lnRef>
-          <a:fillRef idx="3">
-            <a:schemeClr val="accent1"/>
-          </a:fillRef>
-          <a:effectRef idx="2">
-            <a:schemeClr val="accent1"/>
-          </a:effectRef>
-          <a:fontRef idx="minor">
-            <a:schemeClr val="lt1"/>
-          </a:fontRef>
-        </p:style>
-        <p:txBody>
-          <a:bodyPr rtlCol="0" anchor="ctr"/>
-          <a:lstStyle/>
-          <a:p>
-            <a:pPr algn="ctr"/>
-          </a:p>
-        </p:txBody>
-      </p:sp>
-      <p:sp>
-        <p:nvSpPr>
-          <p:cNvPr id="14" name="Rectangle 13"/>
-          <p:cNvSpPr/>
-          <p:nvPr/>
-        </p:nvSpPr>
-        <p:spPr>
-          <a:xfrm>
-            <a:off x="640080" y="2761488"/>
-            <a:ext cx="274320" cy="274320"/>
-          </a:xfrm>
-          <a:prstGeom prst="rect">
-            <a:avLst/>
-          </a:prstGeom>
-          <a:solidFill>
-            <a:srgbClr val="FFFFFF"/>
-          </a:solidFill>
-          <a:ln>
-            <a:solidFill>
-              <a:srgbClr val="333333"/>
-            </a:solidFill>
-          </a:ln>
-        </p:spPr>
-        <p:style>
-          <a:lnRef idx="1">
-            <a:schemeClr val="accent1"/>
-          </a:lnRef>
-          <a:fillRef idx="3">
-            <a:schemeClr val="accent1"/>
-          </a:fillRef>
-          <a:effectRef idx="2">
-            <a:schemeClr val="accent1"/>
-          </a:effectRef>
-          <a:fontRef idx="minor">
-            <a:schemeClr val="lt1"/>
-          </a:fontRef>
-        </p:style>
-        <p:txBody>
-          <a:bodyPr rtlCol="0" anchor="ctr"/>
-          <a:lstStyle/>
-          <a:p>
-            <a:pPr algn="ctr"/>
-          </a:p>
-        </p:txBody>
-      </p:sp>
-      <p:sp>
-        <p:nvSpPr>
-          <p:cNvPr id="15" name="Rectangle 14"/>
-          <p:cNvSpPr/>
-          <p:nvPr/>
-        </p:nvSpPr>
-        <p:spPr>
-          <a:xfrm>
-            <a:off x="640080" y="2761488"/>
-            <a:ext cx="73152" cy="274320"/>
-          </a:xfrm>
-          <a:prstGeom prst="rect">
-            <a:avLst/>
-          </a:prstGeom>
-          <a:solidFill>
-            <a:srgbClr val="269CCB"/>
-          </a:solidFill>
-          <a:ln>
-            <a:noFill/>
-          </a:ln>
-        </p:spPr>
-        <p:style>
-          <a:lnRef idx="1">
-            <a:schemeClr val="accent1"/>
-          </a:lnRef>
-          <a:fillRef idx="3">
-            <a:schemeClr val="accent1"/>
-          </a:fillRef>
-          <a:effectRef idx="2">
-            <a:schemeClr val="accent1"/>
-          </a:effectRef>
-          <a:fontRef idx="minor">
-            <a:schemeClr val="lt1"/>
-          </a:fontRef>
-        </p:style>
-        <p:txBody>
-          <a:bodyPr rtlCol="0" anchor="ctr"/>
-          <a:lstStyle/>
-          <a:p>
-            <a:pPr algn="ctr"/>
-          </a:p>
-        </p:txBody>
-      </p:sp>
-      <p:sp>
-        <p:nvSpPr>
-          <p:cNvPr id="16" name="TextBox 15"/>
-          <p:cNvSpPr txBox="1"/>
-          <p:nvPr/>
-        </p:nvSpPr>
-        <p:spPr>
-          <a:xfrm>
-            <a:off x="1097280" y="2706624"/>
-            <a:ext cx="10362895" cy="402336"/>
-          </a:xfrm>
-          <a:prstGeom prst="rect">
-            <a:avLst/>
-          </a:prstGeom>
-          <a:noFill/>
-        </p:spPr>
-        <p:txBody>
-          <a:bodyPr wrap="square" anchor="ctr"/>
-          <a:lstStyle/>
-          <a:p>
-            <a:r>
-              <a:rPr sz="1500" b="0" i="0">
+              <a:t>Por que importa al PI:</a:t>
+            </a:r>
+            <a:r>
+              <a:rPr sz="2000" b="0" i="0">
                 <a:solidFill>
                   <a:srgbClr val="333333"/>
                 </a:solidFill>
                 <a:latin typeface="Calibri"/>
               </a:rPr>
-              <a:t>Si esta historia se entregara sola, sin ninguna otra, el usuario podria hacer algo completo de principio a fin?</a:t>
-            </a:r>
-          </a:p>
-        </p:txBody>
-      </p:sp>
-      <p:sp>
-        <p:nvSpPr>
-          <p:cNvPr id="17" name="TextBox 16"/>
+              <a:t> el backlog es la version ejecutable del catalogo de requisitos; es la lista con la que se decide que se disena primero y, en Programacion II, que se codifica primero.</a:t>
+            </a:r>
+          </a:p>
+          <a:p>
+            <a:pPr>
+              <a:spcAft>
+                <a:spcPts val="800"/>
+              </a:spcAft>
+            </a:pPr>
+            <a:r>
+              <a:rPr sz="2000" b="0" i="0">
+                <a:solidFill>
+                  <a:srgbClr val="333333"/>
+                </a:solidFill>
+                <a:latin typeface="Calibri"/>
+              </a:rPr>
+              <a:t>–   Los criterios de aceptacion que escriba hoy se vuelven literalmente el guion de revision del prototipo navegable y de las pruebas del sistema.</a:t>
+            </a:r>
+          </a:p>
+          <a:p>
+            <a:pPr>
+              <a:spcAft>
+                <a:spcPts val="800"/>
+              </a:spcAft>
+            </a:pPr>
+            <a:r>
+              <a:rPr sz="2000" b="0" i="0">
+                <a:solidFill>
+                  <a:srgbClr val="333333"/>
+                </a:solidFill>
+                <a:latin typeface="Calibri"/>
+              </a:rPr>
+              <a:t>–   Una historia sin beneficio claro es una funcionalidad que nadie va a extranar si no se hace: aqui es donde se justifica cada pantalla de VetCare.</a:t>
+            </a:r>
+          </a:p>
+        </p:txBody>
+      </p:sp>
+      <p:sp>
+        <p:nvSpPr>
+          <p:cNvPr id="6" name="TextBox 5"/>
           <p:cNvSpPr txBox="1"/>
           <p:nvPr/>
         </p:nvSpPr>
@@ -7697,7 +6556,7 @@
                 </a:solidFill>
                 <a:latin typeface="Calibri"/>
               </a:rPr>
-              <a:t>Criterios de exito / entregable</a:t>
+              <a:t>Taller PI — punto de partida</a:t>
             </a:r>
           </a:p>
         </p:txBody>
@@ -7736,25 +6595,7 @@
                 </a:solidFill>
                 <a:latin typeface="Calibri"/>
               </a:rPr>
-              <a:t>–   </a:t>
-            </a:r>
-            <a:r>
-              <a:rPr sz="2000" b="1" i="0">
-                <a:solidFill>
-                  <a:srgbClr val="333333"/>
-                </a:solidFill>
-                <a:latin typeface="Calibri"/>
-              </a:rPr>
-              <a:t>Entregable:</a:t>
-            </a:r>
-            <a:r>
-              <a:rPr sz="2000" b="0" i="0">
-                <a:solidFill>
-                  <a:srgbClr val="333333"/>
-                </a:solidFill>
-                <a:latin typeface="Calibri"/>
-              </a:rPr>
-              <a:t> Tablero de backlog con 8 historias en formato Como/quiero/para, cada una con 2 o 3 criterios de aceptacion en Dado-Cuando-Entonces, estimacion en puntos y trazabilidad al RF de la clase 6, subido a la plataforma del curso.</a:t>
+              <a:t>–   Ya existe el catalogo de requisitos de VetCare con RF, RNF, prioridades MoSCoW y matriz de trazabilidad aprobados en la clase anterior.</a:t>
             </a:r>
           </a:p>
           <a:p>
@@ -7770,25 +6611,7 @@
                 </a:solidFill>
                 <a:latin typeface="Calibri"/>
               </a:rPr>
-              <a:t>–   </a:t>
-            </a:r>
-            <a:r>
-              <a:rPr sz="2000" b="1" i="0">
-                <a:solidFill>
-                  <a:srgbClr val="333333"/>
-                </a:solidFill>
-                <a:latin typeface="Calibri"/>
-              </a:rPr>
-              <a:t>Exito:</a:t>
-            </a:r>
-            <a:r>
-              <a:rPr sz="2000" b="0" i="0">
-                <a:solidFill>
-                  <a:srgbClr val="333333"/>
-                </a:solidFill>
-                <a:latin typeface="Calibri"/>
-              </a:rPr>
-              <a:t> Las 8 historias usan roles concretos de la clinica Huellitas y ninguna emplea el rol generico usuario.</a:t>
+              <a:t>–   Ese catalogo esta escrito en lenguaje formal de analista y todavia no permite decidir por donde arrancar ni cuanto pesa cada pieza.</a:t>
             </a:r>
           </a:p>
           <a:p>
@@ -7804,127 +6627,7 @@
                 </a:solidFill>
                 <a:latin typeface="Calibri"/>
               </a:rPr>
-              <a:t>–   </a:t>
-            </a:r>
-            <a:r>
-              <a:rPr sz="2000" b="1" i="0">
-                <a:solidFill>
-                  <a:srgbClr val="333333"/>
-                </a:solidFill>
-                <a:latin typeface="Calibri"/>
-              </a:rPr>
-              <a:t>Exito:</a:t>
-            </a:r>
-            <a:r>
-              <a:rPr sz="2000" b="0" i="0">
-                <a:solidFill>
-                  <a:srgbClr val="333333"/>
-                </a:solidFill>
-                <a:latin typeface="Calibri"/>
-              </a:rPr>
-              <a:t> Cada historia tiene minimo 2 criterios de aceptacion en Dado-Cuando-Entonces y al menos cuatro incluyen un camino alterno o de error.</a:t>
-            </a:r>
-          </a:p>
-          <a:p>
-            <a:pPr>
-              <a:spcAft>
-                <a:spcPts val="800"/>
-              </a:spcAft>
-            </a:pPr>
-            <a:r>
-              <a:rPr sz="2000" b="0" i="0">
-                <a:solidFill>
-                  <a:srgbClr val="333333"/>
-                </a:solidFill>
-                <a:latin typeface="Calibri"/>
-              </a:rPr>
-              <a:t>–   </a:t>
-            </a:r>
-            <a:r>
-              <a:rPr sz="2000" b="1" i="0">
-                <a:solidFill>
-                  <a:srgbClr val="333333"/>
-                </a:solidFill>
-                <a:latin typeface="Calibri"/>
-              </a:rPr>
-              <a:t>Exito:</a:t>
-            </a:r>
-            <a:r>
-              <a:rPr sz="2000" b="0" i="0">
-                <a:solidFill>
-                  <a:srgbClr val="333333"/>
-                </a:solidFill>
-                <a:latin typeface="Calibri"/>
-              </a:rPr>
-              <a:t> Todas las historias pasan INVEST con al menos cinco de las seis letras en si, y ninguna esta cortada por capas tecnicas.</a:t>
-            </a:r>
-          </a:p>
-          <a:p>
-            <a:pPr>
-              <a:spcAft>
-                <a:spcPts val="800"/>
-              </a:spcAft>
-            </a:pPr>
-            <a:r>
-              <a:rPr sz="2000" b="0" i="0">
-                <a:solidFill>
-                  <a:srgbClr val="333333"/>
-                </a:solidFill>
-                <a:latin typeface="Calibri"/>
-              </a:rPr>
-              <a:t>–   </a:t>
-            </a:r>
-            <a:r>
-              <a:rPr sz="2000" b="1" i="0">
-                <a:solidFill>
-                  <a:srgbClr val="333333"/>
-                </a:solidFill>
-                <a:latin typeface="Calibri"/>
-              </a:rPr>
-              <a:t>Exito:</a:t>
-            </a:r>
-            <a:r>
-              <a:rPr sz="2000" b="0" i="0">
-                <a:solidFill>
-                  <a:srgbClr val="333333"/>
-                </a:solidFill>
-                <a:latin typeface="Calibri"/>
-              </a:rPr>
-              <a:t> Cada historia trae estimacion en puntos, prioridad y el RF de origen; ninguna historia supera los 8 puntos sin partirse.</a:t>
-            </a:r>
-          </a:p>
-          <a:p>
-            <a:pPr>
-              <a:spcAft>
-                <a:spcPts val="800"/>
-              </a:spcAft>
-            </a:pPr>
-            <a:r>
-              <a:rPr sz="2000" b="0" i="0">
-                <a:solidFill>
-                  <a:srgbClr val="333333"/>
-                </a:solidFill>
-                <a:latin typeface="Calibri"/>
-              </a:rPr>
-              <a:t>–   </a:t>
-            </a:r>
-            <a:r>
-              <a:rPr sz="2000" b="1" i="0">
-                <a:solidFill>
-                  <a:srgbClr val="333333"/>
-                </a:solidFill>
-                <a:latin typeface="Calibri"/>
-              </a:rPr>
-              <a:t>Entrega en la plataforma del curso</a:t>
-            </a:r>
-            <a:r>
-              <a:rPr sz="2000" b="0" i="0">
-                <a:solidFill>
-                  <a:srgbClr val="333333"/>
-                </a:solidFill>
-                <a:latin typeface="Calibri"/>
-              </a:rPr>
-              <a:t> — en la fecha que indique el docente.</a:t>
+              <a:t>–   El equipo del Proyecto Integrador necesita una lista ordenada de trabajo para poder repartirse las siguientes semanas entre diseno y construccion.</a:t>
             </a:r>
           </a:p>
         </p:txBody>
@@ -8105,7 +6808,7 @@
                 </a:solidFill>
                 <a:latin typeface="Calibri"/>
               </a:rPr>
-              <a:t>Para el PI esta semana</a:t>
+              <a:t>Taller PI — pasos guiados</a:t>
             </a:r>
           </a:p>
         </p:txBody>
@@ -8118,8 +6821,163 @@
         </p:nvSpPr>
         <p:spPr>
           <a:xfrm>
-            <a:off x="457200" y="1261872"/>
-            <a:ext cx="11277295" cy="1051560"/>
+            <a:off x="457200" y="1234440"/>
+            <a:ext cx="11277295" cy="950976"/>
+          </a:xfrm>
+          <a:prstGeom prst="roundRect">
+            <a:avLst>
+              <a:gd name="adj" fmla="val 12000"/>
+            </a:avLst>
+          </a:prstGeom>
+          <a:solidFill>
+            <a:srgbClr val="F2F2F2"/>
+          </a:solidFill>
+          <a:ln>
+            <a:noFill/>
+          </a:ln>
+        </p:spPr>
+        <p:style>
+          <a:lnRef idx="1">
+            <a:schemeClr val="accent1"/>
+          </a:lnRef>
+          <a:fillRef idx="3">
+            <a:schemeClr val="accent1"/>
+          </a:fillRef>
+          <a:effectRef idx="2">
+            <a:schemeClr val="accent1"/>
+          </a:effectRef>
+          <a:fontRef idx="minor">
+            <a:schemeClr val="lt1"/>
+          </a:fontRef>
+        </p:style>
+        <p:txBody>
+          <a:bodyPr rtlCol="0" anchor="ctr"/>
+          <a:lstStyle/>
+          <a:p>
+            <a:pPr algn="ctr"/>
+          </a:p>
+        </p:txBody>
+      </p:sp>
+      <p:sp>
+        <p:nvSpPr>
+          <p:cNvPr id="6" name="Rounded Rectangle 5"/>
+          <p:cNvSpPr/>
+          <p:nvPr/>
+        </p:nvSpPr>
+        <p:spPr>
+          <a:xfrm>
+            <a:off x="594360" y="1490472"/>
+            <a:ext cx="438912" cy="438912"/>
+          </a:xfrm>
+          <a:prstGeom prst="roundRect">
+            <a:avLst>
+              <a:gd name="adj" fmla="val 12000"/>
+            </a:avLst>
+          </a:prstGeom>
+          <a:solidFill>
+            <a:srgbClr val="095292"/>
+          </a:solidFill>
+          <a:ln>
+            <a:noFill/>
+          </a:ln>
+        </p:spPr>
+        <p:style>
+          <a:lnRef idx="1">
+            <a:schemeClr val="accent1"/>
+          </a:lnRef>
+          <a:fillRef idx="3">
+            <a:schemeClr val="accent1"/>
+          </a:fillRef>
+          <a:effectRef idx="2">
+            <a:schemeClr val="accent1"/>
+          </a:effectRef>
+          <a:fontRef idx="minor">
+            <a:schemeClr val="lt1"/>
+          </a:fontRef>
+        </p:style>
+        <p:txBody>
+          <a:bodyPr rtlCol="0" anchor="ctr"/>
+          <a:lstStyle/>
+          <a:p>
+            <a:pPr algn="ctr"/>
+          </a:p>
+        </p:txBody>
+      </p:sp>
+      <p:sp>
+        <p:nvSpPr>
+          <p:cNvPr id="7" name="TextBox 6"/>
+          <p:cNvSpPr txBox="1"/>
+          <p:nvPr/>
+        </p:nvSpPr>
+        <p:spPr>
+          <a:xfrm>
+            <a:off x="594360" y="1490472"/>
+            <a:ext cx="438912" cy="438912"/>
+          </a:xfrm>
+          <a:prstGeom prst="rect">
+            <a:avLst/>
+          </a:prstGeom>
+          <a:noFill/>
+        </p:spPr>
+        <p:txBody>
+          <a:bodyPr wrap="square" anchor="ctr"/>
+          <a:lstStyle/>
+          <a:p>
+            <a:pPr algn="ctr"/>
+            <a:r>
+              <a:rPr sz="1600" b="1" i="0">
+                <a:solidFill>
+                  <a:srgbClr val="FFFFFF"/>
+                </a:solidFill>
+                <a:latin typeface="Calibri"/>
+              </a:rPr>
+              <a:t>1</a:t>
+            </a:r>
+          </a:p>
+        </p:txBody>
+      </p:sp>
+      <p:sp>
+        <p:nvSpPr>
+          <p:cNvPr id="8" name="TextBox 7"/>
+          <p:cNvSpPr txBox="1"/>
+          <p:nvPr/>
+        </p:nvSpPr>
+        <p:spPr>
+          <a:xfrm>
+            <a:off x="1188720" y="1325880"/>
+            <a:ext cx="10271455" cy="786384"/>
+          </a:xfrm>
+          <a:prstGeom prst="rect">
+            <a:avLst/>
+          </a:prstGeom>
+          <a:noFill/>
+        </p:spPr>
+        <p:txBody>
+          <a:bodyPr wrap="square" anchor="ctr"/>
+          <a:lstStyle/>
+          <a:p>
+            <a:r>
+              <a:rPr sz="1500" b="1" i="0">
+                <a:solidFill>
+                  <a:srgbClr val="095292"/>
+                </a:solidFill>
+                <a:latin typeface="Calibri"/>
+              </a:rPr>
+              <a:t>Paso 1: agrupe los RF del catalogo de la clase 6 en dos epicas de VetCare (por ejemplo Gestion de pacientes e Historial y agenda) y escriba el nombre y el objetivo de cada epica en una linea.</a:t>
+            </a:r>
+          </a:p>
+        </p:txBody>
+      </p:sp>
+      <p:sp>
+        <p:nvSpPr>
+          <p:cNvPr id="9" name="Rounded Rectangle 8"/>
+          <p:cNvSpPr/>
+          <p:nvPr/>
+        </p:nvSpPr>
+        <p:spPr>
+          <a:xfrm>
+            <a:off x="457200" y="2276856"/>
+            <a:ext cx="11277295" cy="950976"/>
           </a:xfrm>
           <a:prstGeom prst="roundRect">
             <a:avLst>
@@ -8157,20 +7015,22 @@
       </p:sp>
       <p:sp>
         <p:nvSpPr>
-          <p:cNvPr id="6" name="Rectangle 5"/>
+          <p:cNvPr id="10" name="Rounded Rectangle 9"/>
           <p:cNvSpPr/>
           <p:nvPr/>
         </p:nvSpPr>
         <p:spPr>
           <a:xfrm>
-            <a:off x="457200" y="1261872"/>
-            <a:ext cx="128016" cy="1051560"/>
-          </a:xfrm>
-          <a:prstGeom prst="rect">
-            <a:avLst/>
+            <a:off x="594360" y="2532888"/>
+            <a:ext cx="438912" cy="438912"/>
+          </a:xfrm>
+          <a:prstGeom prst="roundRect">
+            <a:avLst>
+              <a:gd name="adj" fmla="val 12000"/>
+            </a:avLst>
           </a:prstGeom>
           <a:solidFill>
-            <a:srgbClr val="269CCB"/>
+            <a:srgbClr val="095292"/>
           </a:solidFill>
           <a:ln>
             <a:noFill/>
@@ -8200,14 +7060,14 @@
       </p:sp>
       <p:sp>
         <p:nvSpPr>
-          <p:cNvPr id="7" name="TextBox 6"/>
+          <p:cNvPr id="11" name="TextBox 10"/>
           <p:cNvSpPr txBox="1"/>
           <p:nvPr/>
         </p:nvSpPr>
         <p:spPr>
           <a:xfrm>
-            <a:off x="777240" y="1399031"/>
-            <a:ext cx="10774375" cy="822959"/>
+            <a:off x="594360" y="2532888"/>
+            <a:ext cx="438912" cy="438912"/>
           </a:xfrm>
           <a:prstGeom prst="rect">
             <a:avLst/>
@@ -8215,49 +7075,64 @@
           <a:noFill/>
         </p:spPr>
         <p:txBody>
-          <a:bodyPr wrap="square">
-            <a:spAutoFit/>
-          </a:bodyPr>
-          <a:lstStyle/>
-          <a:p>
-            <a:r>
-              <a:rPr sz="1200" b="1" i="0">
-                <a:solidFill>
-                  <a:srgbClr val="269CCB"/>
-                </a:solidFill>
-                <a:latin typeface="Calibri"/>
-              </a:rPr>
-              <a:t>Info</a:t>
-            </a:r>
-          </a:p>
-          <a:p>
-            <a:pPr>
-              <a:spcBef>
-                <a:spcPts val="400"/>
-              </a:spcBef>
-            </a:pPr>
-            <a:r>
-              <a:rPr sz="1400" b="0" i="0">
-                <a:solidFill>
-                  <a:srgbClr val="333333"/>
-                </a:solidFill>
-                <a:latin typeface="Calibri"/>
-              </a:rPr>
-              <a:t>Hito: Queda listo el backlog inicial de VetCare: dos epicas descompuestas en ocho historias priorizadas, con criterios de aceptacion y talla en puntos.</a:t>
-            </a:r>
-          </a:p>
-        </p:txBody>
-      </p:sp>
-      <p:sp>
-        <p:nvSpPr>
-          <p:cNvPr id="8" name="Rounded Rectangle 7"/>
+          <a:bodyPr wrap="square" anchor="ctr"/>
+          <a:lstStyle/>
+          <a:p>
+            <a:pPr algn="ctr"/>
+            <a:r>
+              <a:rPr sz="1600" b="1" i="0">
+                <a:solidFill>
+                  <a:srgbClr val="FFFFFF"/>
+                </a:solidFill>
+                <a:latin typeface="Calibri"/>
+              </a:rPr>
+              <a:t>2</a:t>
+            </a:r>
+          </a:p>
+        </p:txBody>
+      </p:sp>
+      <p:sp>
+        <p:nvSpPr>
+          <p:cNvPr id="12" name="TextBox 11"/>
+          <p:cNvSpPr txBox="1"/>
+          <p:nvPr/>
+        </p:nvSpPr>
+        <p:spPr>
+          <a:xfrm>
+            <a:off x="1188720" y="2368296"/>
+            <a:ext cx="10271455" cy="786384"/>
+          </a:xfrm>
+          <a:prstGeom prst="rect">
+            <a:avLst/>
+          </a:prstGeom>
+          <a:noFill/>
+        </p:spPr>
+        <p:txBody>
+          <a:bodyPr wrap="square" anchor="ctr"/>
+          <a:lstStyle/>
+          <a:p>
+            <a:r>
+              <a:rPr sz="1500" b="1" i="0">
+                <a:solidFill>
+                  <a:srgbClr val="095292"/>
+                </a:solidFill>
+                <a:latin typeface="Calibri"/>
+              </a:rPr>
+              <a:t>Paso 2: descomponga las dos epicas en 8 historias con el formato Como &lt;rol de la clinica Huellitas&gt; quiero &lt;accion&gt; para &lt;beneficio&gt;, usando roles concretos (auxiliar, veterinario, administrador) y nunca la palabra usuario.</a:t>
+            </a:r>
+          </a:p>
+        </p:txBody>
+      </p:sp>
+      <p:sp>
+        <p:nvSpPr>
+          <p:cNvPr id="13" name="Rounded Rectangle 12"/>
           <p:cNvSpPr/>
           <p:nvPr/>
         </p:nvSpPr>
         <p:spPr>
           <a:xfrm>
-            <a:off x="457200" y="2478024"/>
-            <a:ext cx="11277295" cy="1051560"/>
+            <a:off x="457200" y="3319272"/>
+            <a:ext cx="11277295" cy="950976"/>
           </a:xfrm>
           <a:prstGeom prst="roundRect">
             <a:avLst>
@@ -8265,7 +7140,7 @@
             </a:avLst>
           </a:prstGeom>
           <a:solidFill>
-            <a:srgbClr val="FFF8E1"/>
+            <a:srgbClr val="F2F2F2"/>
           </a:solidFill>
           <a:ln>
             <a:noFill/>
@@ -8295,20 +7170,22 @@
       </p:sp>
       <p:sp>
         <p:nvSpPr>
-          <p:cNvPr id="9" name="Rectangle 8"/>
+          <p:cNvPr id="14" name="Rounded Rectangle 13"/>
           <p:cNvSpPr/>
           <p:nvPr/>
         </p:nvSpPr>
         <p:spPr>
           <a:xfrm>
-            <a:off x="457200" y="2478024"/>
-            <a:ext cx="128016" cy="1051560"/>
-          </a:xfrm>
-          <a:prstGeom prst="rect">
-            <a:avLst/>
+            <a:off x="594360" y="3575304"/>
+            <a:ext cx="438912" cy="438912"/>
+          </a:xfrm>
+          <a:prstGeom prst="roundRect">
+            <a:avLst>
+              <a:gd name="adj" fmla="val 12000"/>
+            </a:avLst>
           </a:prstGeom>
           <a:solidFill>
-            <a:srgbClr val="FFD000"/>
+            <a:srgbClr val="095292"/>
           </a:solidFill>
           <a:ln>
             <a:noFill/>
@@ -8338,14 +7215,14 @@
       </p:sp>
       <p:sp>
         <p:nvSpPr>
-          <p:cNvPr id="10" name="TextBox 9"/>
+          <p:cNvPr id="15" name="TextBox 14"/>
           <p:cNvSpPr txBox="1"/>
           <p:nvPr/>
         </p:nvSpPr>
         <p:spPr>
           <a:xfrm>
-            <a:off x="777240" y="2615184"/>
-            <a:ext cx="10774375" cy="822959"/>
+            <a:off x="594360" y="3575304"/>
+            <a:ext cx="438912" cy="438912"/>
           </a:xfrm>
           <a:prstGeom prst="rect">
             <a:avLst/>
@@ -8353,49 +7230,64 @@
           <a:noFill/>
         </p:spPr>
         <p:txBody>
-          <a:bodyPr wrap="square">
-            <a:spAutoFit/>
-          </a:bodyPr>
-          <a:lstStyle/>
-          <a:p>
-            <a:r>
-              <a:rPr sz="1200" b="1" i="0">
-                <a:solidFill>
-                  <a:srgbClr val="FFD000"/>
-                </a:solidFill>
-                <a:latin typeface="Calibri"/>
-              </a:rPr>
-              <a:t>Aclaración</a:t>
-            </a:r>
-          </a:p>
-          <a:p>
-            <a:pPr>
-              <a:spcBef>
-                <a:spcPts val="400"/>
-              </a:spcBef>
-            </a:pPr>
-            <a:r>
-              <a:rPr sz="1400" b="0" i="0">
-                <a:solidFill>
-                  <a:srgbClr val="333333"/>
-                </a:solidFill>
-                <a:latin typeface="Calibri"/>
-              </a:rPr>
-              <a:t>Enunciado completo: Clases/Proyecto Integrador/ (VetCare).</a:t>
-            </a:r>
-          </a:p>
-        </p:txBody>
-      </p:sp>
-      <p:sp>
-        <p:nvSpPr>
-          <p:cNvPr id="11" name="Rounded Rectangle 10"/>
+          <a:bodyPr wrap="square" anchor="ctr"/>
+          <a:lstStyle/>
+          <a:p>
+            <a:pPr algn="ctr"/>
+            <a:r>
+              <a:rPr sz="1600" b="1" i="0">
+                <a:solidFill>
+                  <a:srgbClr val="FFFFFF"/>
+                </a:solidFill>
+                <a:latin typeface="Calibri"/>
+              </a:rPr>
+              <a:t>3</a:t>
+            </a:r>
+          </a:p>
+        </p:txBody>
+      </p:sp>
+      <p:sp>
+        <p:nvSpPr>
+          <p:cNvPr id="16" name="TextBox 15"/>
+          <p:cNvSpPr txBox="1"/>
+          <p:nvPr/>
+        </p:nvSpPr>
+        <p:spPr>
+          <a:xfrm>
+            <a:off x="1188720" y="3410712"/>
+            <a:ext cx="10271455" cy="786384"/>
+          </a:xfrm>
+          <a:prstGeom prst="rect">
+            <a:avLst/>
+          </a:prstGeom>
+          <a:noFill/>
+        </p:spPr>
+        <p:txBody>
+          <a:bodyPr wrap="square" anchor="ctr"/>
+          <a:lstStyle/>
+          <a:p>
+            <a:r>
+              <a:rPr sz="1500" b="1" i="0">
+                <a:solidFill>
+                  <a:srgbClr val="095292"/>
+                </a:solidFill>
+                <a:latin typeface="Calibri"/>
+              </a:rPr>
+              <a:t>Paso 3: escriba 2 o 3 criterios de aceptacion por historia en Dado-Cuando-Entonces, e incluya obligatoriamente un criterio de camino alterno o de error en al menos cuatro de las ocho historias.</a:t>
+            </a:r>
+          </a:p>
+        </p:txBody>
+      </p:sp>
+      <p:sp>
+        <p:nvSpPr>
+          <p:cNvPr id="17" name="Rounded Rectangle 16"/>
           <p:cNvSpPr/>
           <p:nvPr/>
         </p:nvSpPr>
         <p:spPr>
           <a:xfrm>
-            <a:off x="457200" y="3694176"/>
-            <a:ext cx="11277295" cy="1051560"/>
+            <a:off x="457200" y="4361688"/>
+            <a:ext cx="11277295" cy="950976"/>
           </a:xfrm>
           <a:prstGeom prst="roundRect">
             <a:avLst>
@@ -8403,7 +7295,7 @@
             </a:avLst>
           </a:prstGeom>
           <a:solidFill>
-            <a:srgbClr val="FBE4E4"/>
+            <a:srgbClr val="E8F4FA"/>
           </a:solidFill>
           <a:ln>
             <a:noFill/>
@@ -8433,20 +7325,22 @@
       </p:sp>
       <p:sp>
         <p:nvSpPr>
-          <p:cNvPr id="12" name="Rectangle 11"/>
+          <p:cNvPr id="18" name="Rounded Rectangle 17"/>
           <p:cNvSpPr/>
           <p:nvPr/>
         </p:nvSpPr>
         <p:spPr>
           <a:xfrm>
-            <a:off x="457200" y="3694176"/>
-            <a:ext cx="128016" cy="1051560"/>
-          </a:xfrm>
-          <a:prstGeom prst="rect">
-            <a:avLst/>
+            <a:off x="594360" y="4617720"/>
+            <a:ext cx="438912" cy="438912"/>
+          </a:xfrm>
+          <a:prstGeom prst="roundRect">
+            <a:avLst>
+              <a:gd name="adj" fmla="val 12000"/>
+            </a:avLst>
           </a:prstGeom>
           <a:solidFill>
-            <a:srgbClr val="A02030"/>
+            <a:srgbClr val="095292"/>
           </a:solidFill>
           <a:ln>
             <a:noFill/>
@@ -8476,14 +7370,14 @@
       </p:sp>
       <p:sp>
         <p:nvSpPr>
-          <p:cNvPr id="13" name="TextBox 12"/>
+          <p:cNvPr id="19" name="TextBox 18"/>
           <p:cNvSpPr txBox="1"/>
           <p:nvPr/>
         </p:nvSpPr>
         <p:spPr>
           <a:xfrm>
-            <a:off x="777240" y="3831336"/>
-            <a:ext cx="10774375" cy="822959"/>
+            <a:off x="594360" y="4617720"/>
+            <a:ext cx="438912" cy="438912"/>
           </a:xfrm>
           <a:prstGeom prst="rect">
             <a:avLst/>
@@ -8491,42 +7385,212 @@
           <a:noFill/>
         </p:spPr>
         <p:txBody>
-          <a:bodyPr wrap="square">
-            <a:spAutoFit/>
-          </a:bodyPr>
-          <a:lstStyle/>
-          <a:p>
-            <a:r>
-              <a:rPr sz="1200" b="1" i="0">
-                <a:solidFill>
-                  <a:srgbClr val="A02030"/>
-                </a:solidFill>
-                <a:latin typeface="Calibri"/>
-              </a:rPr>
-              <a:t>Atención</a:t>
-            </a:r>
-          </a:p>
-          <a:p>
-            <a:pPr>
-              <a:spcBef>
-                <a:spcPts val="400"/>
-              </a:spcBef>
-            </a:pPr>
-            <a:r>
-              <a:rPr sz="1400" b="0" i="0">
-                <a:solidFill>
-                  <a:srgbClr val="333333"/>
-                </a:solidFill>
-                <a:latin typeface="Calibri"/>
-              </a:rPr>
-              <a:t>Entrega del taller, si el docente lo asigna · en la fecha que indique el docente.</a:t>
-            </a:r>
-          </a:p>
-        </p:txBody>
-      </p:sp>
-      <p:sp>
-        <p:nvSpPr>
-          <p:cNvPr id="14" name="TextBox 13"/>
+          <a:bodyPr wrap="square" anchor="ctr"/>
+          <a:lstStyle/>
+          <a:p>
+            <a:pPr algn="ctr"/>
+            <a:r>
+              <a:rPr sz="1600" b="1" i="0">
+                <a:solidFill>
+                  <a:srgbClr val="FFFFFF"/>
+                </a:solidFill>
+                <a:latin typeface="Calibri"/>
+              </a:rPr>
+              <a:t>4</a:t>
+            </a:r>
+          </a:p>
+        </p:txBody>
+      </p:sp>
+      <p:sp>
+        <p:nvSpPr>
+          <p:cNvPr id="20" name="TextBox 19"/>
+          <p:cNvSpPr txBox="1"/>
+          <p:nvPr/>
+        </p:nvSpPr>
+        <p:spPr>
+          <a:xfrm>
+            <a:off x="1188720" y="4453128"/>
+            <a:ext cx="10271455" cy="786384"/>
+          </a:xfrm>
+          <a:prstGeom prst="rect">
+            <a:avLst/>
+          </a:prstGeom>
+          <a:noFill/>
+        </p:spPr>
+        <p:txBody>
+          <a:bodyPr wrap="square" anchor="ctr"/>
+          <a:lstStyle/>
+          <a:p>
+            <a:r>
+              <a:rPr sz="1500" b="1" i="0">
+                <a:solidFill>
+                  <a:srgbClr val="095292"/>
+                </a:solidFill>
+                <a:latin typeface="Calibri"/>
+              </a:rPr>
+              <a:t>Paso 4: revise cada historia contra INVEST marcando las seis letras con si o no; toda historia que falle dos o mas letras debe reescribirse o partirse antes de continuar.</a:t>
+            </a:r>
+          </a:p>
+        </p:txBody>
+      </p:sp>
+      <p:sp>
+        <p:nvSpPr>
+          <p:cNvPr id="21" name="Rounded Rectangle 20"/>
+          <p:cNvSpPr/>
+          <p:nvPr/>
+        </p:nvSpPr>
+        <p:spPr>
+          <a:xfrm>
+            <a:off x="457200" y="5404104"/>
+            <a:ext cx="11277295" cy="950976"/>
+          </a:xfrm>
+          <a:prstGeom prst="roundRect">
+            <a:avLst>
+              <a:gd name="adj" fmla="val 12000"/>
+            </a:avLst>
+          </a:prstGeom>
+          <a:solidFill>
+            <a:srgbClr val="F2F2F2"/>
+          </a:solidFill>
+          <a:ln>
+            <a:noFill/>
+          </a:ln>
+        </p:spPr>
+        <p:style>
+          <a:lnRef idx="1">
+            <a:schemeClr val="accent1"/>
+          </a:lnRef>
+          <a:fillRef idx="3">
+            <a:schemeClr val="accent1"/>
+          </a:fillRef>
+          <a:effectRef idx="2">
+            <a:schemeClr val="accent1"/>
+          </a:effectRef>
+          <a:fontRef idx="minor">
+            <a:schemeClr val="lt1"/>
+          </a:fontRef>
+        </p:style>
+        <p:txBody>
+          <a:bodyPr rtlCol="0" anchor="ctr"/>
+          <a:lstStyle/>
+          <a:p>
+            <a:pPr algn="ctr"/>
+          </a:p>
+        </p:txBody>
+      </p:sp>
+      <p:sp>
+        <p:nvSpPr>
+          <p:cNvPr id="22" name="Rounded Rectangle 21"/>
+          <p:cNvSpPr/>
+          <p:nvPr/>
+        </p:nvSpPr>
+        <p:spPr>
+          <a:xfrm>
+            <a:off x="594360" y="5660136"/>
+            <a:ext cx="438912" cy="438912"/>
+          </a:xfrm>
+          <a:prstGeom prst="roundRect">
+            <a:avLst>
+              <a:gd name="adj" fmla="val 12000"/>
+            </a:avLst>
+          </a:prstGeom>
+          <a:solidFill>
+            <a:srgbClr val="095292"/>
+          </a:solidFill>
+          <a:ln>
+            <a:noFill/>
+          </a:ln>
+        </p:spPr>
+        <p:style>
+          <a:lnRef idx="1">
+            <a:schemeClr val="accent1"/>
+          </a:lnRef>
+          <a:fillRef idx="3">
+            <a:schemeClr val="accent1"/>
+          </a:fillRef>
+          <a:effectRef idx="2">
+            <a:schemeClr val="accent1"/>
+          </a:effectRef>
+          <a:fontRef idx="minor">
+            <a:schemeClr val="lt1"/>
+          </a:fontRef>
+        </p:style>
+        <p:txBody>
+          <a:bodyPr rtlCol="0" anchor="ctr"/>
+          <a:lstStyle/>
+          <a:p>
+            <a:pPr algn="ctr"/>
+          </a:p>
+        </p:txBody>
+      </p:sp>
+      <p:sp>
+        <p:nvSpPr>
+          <p:cNvPr id="23" name="TextBox 22"/>
+          <p:cNvSpPr txBox="1"/>
+          <p:nvPr/>
+        </p:nvSpPr>
+        <p:spPr>
+          <a:xfrm>
+            <a:off x="594360" y="5660136"/>
+            <a:ext cx="438912" cy="438912"/>
+          </a:xfrm>
+          <a:prstGeom prst="rect">
+            <a:avLst/>
+          </a:prstGeom>
+          <a:noFill/>
+        </p:spPr>
+        <p:txBody>
+          <a:bodyPr wrap="square" anchor="ctr"/>
+          <a:lstStyle/>
+          <a:p>
+            <a:pPr algn="ctr"/>
+            <a:r>
+              <a:rPr sz="1600" b="1" i="0">
+                <a:solidFill>
+                  <a:srgbClr val="FFFFFF"/>
+                </a:solidFill>
+                <a:latin typeface="Calibri"/>
+              </a:rPr>
+              <a:t>5</a:t>
+            </a:r>
+          </a:p>
+        </p:txBody>
+      </p:sp>
+      <p:sp>
+        <p:nvSpPr>
+          <p:cNvPr id="24" name="TextBox 23"/>
+          <p:cNvSpPr txBox="1"/>
+          <p:nvPr/>
+        </p:nvSpPr>
+        <p:spPr>
+          <a:xfrm>
+            <a:off x="1188720" y="5495544"/>
+            <a:ext cx="10271455" cy="786384"/>
+          </a:xfrm>
+          <a:prstGeom prst="rect">
+            <a:avLst/>
+          </a:prstGeom>
+          <a:noFill/>
+        </p:spPr>
+        <p:txBody>
+          <a:bodyPr wrap="square" anchor="ctr"/>
+          <a:lstStyle/>
+          <a:p>
+            <a:r>
+              <a:rPr sz="1500" b="1" i="0">
+                <a:solidFill>
+                  <a:srgbClr val="095292"/>
+                </a:solidFill>
+                <a:latin typeface="Calibri"/>
+              </a:rPr>
+              <a:t>Paso 5: estime en puntos con la escala 1, 2, 3, 5, 8 tomando 'registrar un dueno = 3' como referencia, ordene el backlog de mayor a menor prioridad, agregue la columna de trazabilidad al RF de origen y suba el tablero a la plataforma del curso.</a:t>
+            </a:r>
+          </a:p>
+        </p:txBody>
+      </p:sp>
+      <p:sp>
+        <p:nvSpPr>
+          <p:cNvPr id="25" name="TextBox 24"/>
           <p:cNvSpPr txBox="1"/>
           <p:nvPr/>
         </p:nvSpPr>
@@ -8925,6 +7989,1685 @@
         <p:spPr>
           <a:xfrm>
             <a:off x="0" y="0"/>
+            <a:ext cx="12191695" cy="960120"/>
+          </a:xfrm>
+          <a:prstGeom prst="rect">
+            <a:avLst/>
+          </a:prstGeom>
+          <a:solidFill>
+            <a:srgbClr val="095292"/>
+          </a:solidFill>
+          <a:ln>
+            <a:noFill/>
+          </a:ln>
+        </p:spPr>
+        <p:style>
+          <a:lnRef idx="1">
+            <a:schemeClr val="accent1"/>
+          </a:lnRef>
+          <a:fillRef idx="3">
+            <a:schemeClr val="accent1"/>
+          </a:fillRef>
+          <a:effectRef idx="2">
+            <a:schemeClr val="accent1"/>
+          </a:effectRef>
+          <a:fontRef idx="minor">
+            <a:schemeClr val="lt1"/>
+          </a:fontRef>
+        </p:style>
+        <p:txBody>
+          <a:bodyPr rtlCol="0" anchor="ctr"/>
+          <a:lstStyle/>
+          <a:p>
+            <a:pPr algn="ctr"/>
+          </a:p>
+        </p:txBody>
+      </p:sp>
+      <p:sp>
+        <p:nvSpPr>
+          <p:cNvPr id="3" name="Rectangle 2"/>
+          <p:cNvSpPr/>
+          <p:nvPr/>
+        </p:nvSpPr>
+        <p:spPr>
+          <a:xfrm>
+            <a:off x="0" y="960120"/>
+            <a:ext cx="12191695" cy="41148"/>
+          </a:xfrm>
+          <a:prstGeom prst="rect">
+            <a:avLst/>
+          </a:prstGeom>
+          <a:solidFill>
+            <a:srgbClr val="FFD000"/>
+          </a:solidFill>
+          <a:ln>
+            <a:noFill/>
+          </a:ln>
+        </p:spPr>
+        <p:style>
+          <a:lnRef idx="1">
+            <a:schemeClr val="accent1"/>
+          </a:lnRef>
+          <a:fillRef idx="3">
+            <a:schemeClr val="accent1"/>
+          </a:fillRef>
+          <a:effectRef idx="2">
+            <a:schemeClr val="accent1"/>
+          </a:effectRef>
+          <a:fontRef idx="minor">
+            <a:schemeClr val="lt1"/>
+          </a:fontRef>
+        </p:style>
+        <p:txBody>
+          <a:bodyPr rtlCol="0" anchor="ctr"/>
+          <a:lstStyle/>
+          <a:p>
+            <a:pPr algn="ctr"/>
+          </a:p>
+        </p:txBody>
+      </p:sp>
+      <p:sp>
+        <p:nvSpPr>
+          <p:cNvPr id="4" name="TextBox 3"/>
+          <p:cNvSpPr txBox="1"/>
+          <p:nvPr/>
+        </p:nvSpPr>
+        <p:spPr>
+          <a:xfrm>
+            <a:off x="457200" y="164592"/>
+            <a:ext cx="11277295" cy="502920"/>
+          </a:xfrm>
+          <a:prstGeom prst="rect">
+            <a:avLst/>
+          </a:prstGeom>
+          <a:noFill/>
+        </p:spPr>
+        <p:txBody>
+          <a:bodyPr wrap="square">
+            <a:spAutoFit/>
+          </a:bodyPr>
+          <a:lstStyle/>
+          <a:p>
+            <a:r>
+              <a:rPr sz="2600" b="1" i="0">
+                <a:solidFill>
+                  <a:srgbClr val="FFFFFF"/>
+                </a:solidFill>
+                <a:latin typeface="Calibri"/>
+              </a:rPr>
+              <a:t>Antes de entregar — autochequeo</a:t>
+            </a:r>
+          </a:p>
+        </p:txBody>
+      </p:sp>
+      <p:sp>
+        <p:nvSpPr>
+          <p:cNvPr id="5" name="Rounded Rectangle 4"/>
+          <p:cNvSpPr/>
+          <p:nvPr/>
+        </p:nvSpPr>
+        <p:spPr>
+          <a:xfrm>
+            <a:off x="457200" y="1261872"/>
+            <a:ext cx="11277295" cy="566928"/>
+          </a:xfrm>
+          <a:prstGeom prst="roundRect">
+            <a:avLst>
+              <a:gd name="adj" fmla="val 12000"/>
+            </a:avLst>
+          </a:prstGeom>
+          <a:solidFill>
+            <a:srgbClr val="F2F2F2"/>
+          </a:solidFill>
+          <a:ln>
+            <a:noFill/>
+          </a:ln>
+        </p:spPr>
+        <p:style>
+          <a:lnRef idx="1">
+            <a:schemeClr val="accent1"/>
+          </a:lnRef>
+          <a:fillRef idx="3">
+            <a:schemeClr val="accent1"/>
+          </a:fillRef>
+          <a:effectRef idx="2">
+            <a:schemeClr val="accent1"/>
+          </a:effectRef>
+          <a:fontRef idx="minor">
+            <a:schemeClr val="lt1"/>
+          </a:fontRef>
+        </p:style>
+        <p:txBody>
+          <a:bodyPr rtlCol="0" anchor="ctr"/>
+          <a:lstStyle/>
+          <a:p>
+            <a:pPr algn="ctr"/>
+          </a:p>
+        </p:txBody>
+      </p:sp>
+      <p:sp>
+        <p:nvSpPr>
+          <p:cNvPr id="6" name="Rectangle 5"/>
+          <p:cNvSpPr/>
+          <p:nvPr/>
+        </p:nvSpPr>
+        <p:spPr>
+          <a:xfrm>
+            <a:off x="640080" y="1408175"/>
+            <a:ext cx="274320" cy="274320"/>
+          </a:xfrm>
+          <a:prstGeom prst="rect">
+            <a:avLst/>
+          </a:prstGeom>
+          <a:solidFill>
+            <a:srgbClr val="FFFFFF"/>
+          </a:solidFill>
+          <a:ln>
+            <a:solidFill>
+              <a:srgbClr val="333333"/>
+            </a:solidFill>
+          </a:ln>
+        </p:spPr>
+        <p:style>
+          <a:lnRef idx="1">
+            <a:schemeClr val="accent1"/>
+          </a:lnRef>
+          <a:fillRef idx="3">
+            <a:schemeClr val="accent1"/>
+          </a:fillRef>
+          <a:effectRef idx="2">
+            <a:schemeClr val="accent1"/>
+          </a:effectRef>
+          <a:fontRef idx="minor">
+            <a:schemeClr val="lt1"/>
+          </a:fontRef>
+        </p:style>
+        <p:txBody>
+          <a:bodyPr rtlCol="0" anchor="ctr"/>
+          <a:lstStyle/>
+          <a:p>
+            <a:pPr algn="ctr"/>
+          </a:p>
+        </p:txBody>
+      </p:sp>
+      <p:sp>
+        <p:nvSpPr>
+          <p:cNvPr id="7" name="Rectangle 6"/>
+          <p:cNvSpPr/>
+          <p:nvPr/>
+        </p:nvSpPr>
+        <p:spPr>
+          <a:xfrm>
+            <a:off x="640080" y="1408175"/>
+            <a:ext cx="73152" cy="274320"/>
+          </a:xfrm>
+          <a:prstGeom prst="rect">
+            <a:avLst/>
+          </a:prstGeom>
+          <a:solidFill>
+            <a:srgbClr val="269CCB"/>
+          </a:solidFill>
+          <a:ln>
+            <a:noFill/>
+          </a:ln>
+        </p:spPr>
+        <p:style>
+          <a:lnRef idx="1">
+            <a:schemeClr val="accent1"/>
+          </a:lnRef>
+          <a:fillRef idx="3">
+            <a:schemeClr val="accent1"/>
+          </a:fillRef>
+          <a:effectRef idx="2">
+            <a:schemeClr val="accent1"/>
+          </a:effectRef>
+          <a:fontRef idx="minor">
+            <a:schemeClr val="lt1"/>
+          </a:fontRef>
+        </p:style>
+        <p:txBody>
+          <a:bodyPr rtlCol="0" anchor="ctr"/>
+          <a:lstStyle/>
+          <a:p>
+            <a:pPr algn="ctr"/>
+          </a:p>
+        </p:txBody>
+      </p:sp>
+      <p:sp>
+        <p:nvSpPr>
+          <p:cNvPr id="8" name="TextBox 7"/>
+          <p:cNvSpPr txBox="1"/>
+          <p:nvPr/>
+        </p:nvSpPr>
+        <p:spPr>
+          <a:xfrm>
+            <a:off x="1097280" y="1353312"/>
+            <a:ext cx="10362895" cy="402336"/>
+          </a:xfrm>
+          <a:prstGeom prst="rect">
+            <a:avLst/>
+          </a:prstGeom>
+          <a:noFill/>
+        </p:spPr>
+        <p:txBody>
+          <a:bodyPr wrap="square" anchor="ctr"/>
+          <a:lstStyle/>
+          <a:p>
+            <a:r>
+              <a:rPr sz="1500" b="0" i="0">
+                <a:solidFill>
+                  <a:srgbClr val="333333"/>
+                </a:solidFill>
+                <a:latin typeface="Calibri"/>
+              </a:rPr>
+              <a:t>Si le leo esta historia al Dr. Ramirez sin explicarle nada, entiende quien gana algo y que gana, o solo entiende que hay una pantalla nueva?</a:t>
+            </a:r>
+          </a:p>
+        </p:txBody>
+      </p:sp>
+      <p:sp>
+        <p:nvSpPr>
+          <p:cNvPr id="9" name="Rounded Rectangle 8"/>
+          <p:cNvSpPr/>
+          <p:nvPr/>
+        </p:nvSpPr>
+        <p:spPr>
+          <a:xfrm>
+            <a:off x="457200" y="1938528"/>
+            <a:ext cx="11277295" cy="566928"/>
+          </a:xfrm>
+          <a:prstGeom prst="roundRect">
+            <a:avLst>
+              <a:gd name="adj" fmla="val 12000"/>
+            </a:avLst>
+          </a:prstGeom>
+          <a:solidFill>
+            <a:srgbClr val="F2F2F2"/>
+          </a:solidFill>
+          <a:ln>
+            <a:noFill/>
+          </a:ln>
+        </p:spPr>
+        <p:style>
+          <a:lnRef idx="1">
+            <a:schemeClr val="accent1"/>
+          </a:lnRef>
+          <a:fillRef idx="3">
+            <a:schemeClr val="accent1"/>
+          </a:fillRef>
+          <a:effectRef idx="2">
+            <a:schemeClr val="accent1"/>
+          </a:effectRef>
+          <a:fontRef idx="minor">
+            <a:schemeClr val="lt1"/>
+          </a:fontRef>
+        </p:style>
+        <p:txBody>
+          <a:bodyPr rtlCol="0" anchor="ctr"/>
+          <a:lstStyle/>
+          <a:p>
+            <a:pPr algn="ctr"/>
+          </a:p>
+        </p:txBody>
+      </p:sp>
+      <p:sp>
+        <p:nvSpPr>
+          <p:cNvPr id="10" name="Rectangle 9"/>
+          <p:cNvSpPr/>
+          <p:nvPr/>
+        </p:nvSpPr>
+        <p:spPr>
+          <a:xfrm>
+            <a:off x="640080" y="2084832"/>
+            <a:ext cx="274320" cy="274320"/>
+          </a:xfrm>
+          <a:prstGeom prst="rect">
+            <a:avLst/>
+          </a:prstGeom>
+          <a:solidFill>
+            <a:srgbClr val="FFFFFF"/>
+          </a:solidFill>
+          <a:ln>
+            <a:solidFill>
+              <a:srgbClr val="333333"/>
+            </a:solidFill>
+          </a:ln>
+        </p:spPr>
+        <p:style>
+          <a:lnRef idx="1">
+            <a:schemeClr val="accent1"/>
+          </a:lnRef>
+          <a:fillRef idx="3">
+            <a:schemeClr val="accent1"/>
+          </a:fillRef>
+          <a:effectRef idx="2">
+            <a:schemeClr val="accent1"/>
+          </a:effectRef>
+          <a:fontRef idx="minor">
+            <a:schemeClr val="lt1"/>
+          </a:fontRef>
+        </p:style>
+        <p:txBody>
+          <a:bodyPr rtlCol="0" anchor="ctr"/>
+          <a:lstStyle/>
+          <a:p>
+            <a:pPr algn="ctr"/>
+          </a:p>
+        </p:txBody>
+      </p:sp>
+      <p:sp>
+        <p:nvSpPr>
+          <p:cNvPr id="11" name="Rectangle 10"/>
+          <p:cNvSpPr/>
+          <p:nvPr/>
+        </p:nvSpPr>
+        <p:spPr>
+          <a:xfrm>
+            <a:off x="640080" y="2084832"/>
+            <a:ext cx="73152" cy="274320"/>
+          </a:xfrm>
+          <a:prstGeom prst="rect">
+            <a:avLst/>
+          </a:prstGeom>
+          <a:solidFill>
+            <a:srgbClr val="269CCB"/>
+          </a:solidFill>
+          <a:ln>
+            <a:noFill/>
+          </a:ln>
+        </p:spPr>
+        <p:style>
+          <a:lnRef idx="1">
+            <a:schemeClr val="accent1"/>
+          </a:lnRef>
+          <a:fillRef idx="3">
+            <a:schemeClr val="accent1"/>
+          </a:fillRef>
+          <a:effectRef idx="2">
+            <a:schemeClr val="accent1"/>
+          </a:effectRef>
+          <a:fontRef idx="minor">
+            <a:schemeClr val="lt1"/>
+          </a:fontRef>
+        </p:style>
+        <p:txBody>
+          <a:bodyPr rtlCol="0" anchor="ctr"/>
+          <a:lstStyle/>
+          <a:p>
+            <a:pPr algn="ctr"/>
+          </a:p>
+        </p:txBody>
+      </p:sp>
+      <p:sp>
+        <p:nvSpPr>
+          <p:cNvPr id="12" name="TextBox 11"/>
+          <p:cNvSpPr txBox="1"/>
+          <p:nvPr/>
+        </p:nvSpPr>
+        <p:spPr>
+          <a:xfrm>
+            <a:off x="1097280" y="2029968"/>
+            <a:ext cx="10362895" cy="402336"/>
+          </a:xfrm>
+          <a:prstGeom prst="rect">
+            <a:avLst/>
+          </a:prstGeom>
+          <a:noFill/>
+        </p:spPr>
+        <p:txBody>
+          <a:bodyPr wrap="square" anchor="ctr"/>
+          <a:lstStyle/>
+          <a:p>
+            <a:r>
+              <a:rPr sz="1500" b="0" i="0">
+                <a:solidFill>
+                  <a:srgbClr val="333333"/>
+                </a:solidFill>
+                <a:latin typeface="Calibri"/>
+              </a:rPr>
+              <a:t>El 'para' de mi historia esta repitiendo la accion con otras palabras, o dice de verdad el beneficio para la clinica?</a:t>
+            </a:r>
+          </a:p>
+        </p:txBody>
+      </p:sp>
+      <p:sp>
+        <p:nvSpPr>
+          <p:cNvPr id="13" name="Rounded Rectangle 12"/>
+          <p:cNvSpPr/>
+          <p:nvPr/>
+        </p:nvSpPr>
+        <p:spPr>
+          <a:xfrm>
+            <a:off x="457200" y="2615184"/>
+            <a:ext cx="11277295" cy="566928"/>
+          </a:xfrm>
+          <a:prstGeom prst="roundRect">
+            <a:avLst>
+              <a:gd name="adj" fmla="val 12000"/>
+            </a:avLst>
+          </a:prstGeom>
+          <a:solidFill>
+            <a:srgbClr val="F2F2F2"/>
+          </a:solidFill>
+          <a:ln>
+            <a:noFill/>
+          </a:ln>
+        </p:spPr>
+        <p:style>
+          <a:lnRef idx="1">
+            <a:schemeClr val="accent1"/>
+          </a:lnRef>
+          <a:fillRef idx="3">
+            <a:schemeClr val="accent1"/>
+          </a:fillRef>
+          <a:effectRef idx="2">
+            <a:schemeClr val="accent1"/>
+          </a:effectRef>
+          <a:fontRef idx="minor">
+            <a:schemeClr val="lt1"/>
+          </a:fontRef>
+        </p:style>
+        <p:txBody>
+          <a:bodyPr rtlCol="0" anchor="ctr"/>
+          <a:lstStyle/>
+          <a:p>
+            <a:pPr algn="ctr"/>
+          </a:p>
+        </p:txBody>
+      </p:sp>
+      <p:sp>
+        <p:nvSpPr>
+          <p:cNvPr id="14" name="Rectangle 13"/>
+          <p:cNvSpPr/>
+          <p:nvPr/>
+        </p:nvSpPr>
+        <p:spPr>
+          <a:xfrm>
+            <a:off x="640080" y="2761488"/>
+            <a:ext cx="274320" cy="274320"/>
+          </a:xfrm>
+          <a:prstGeom prst="rect">
+            <a:avLst/>
+          </a:prstGeom>
+          <a:solidFill>
+            <a:srgbClr val="FFFFFF"/>
+          </a:solidFill>
+          <a:ln>
+            <a:solidFill>
+              <a:srgbClr val="333333"/>
+            </a:solidFill>
+          </a:ln>
+        </p:spPr>
+        <p:style>
+          <a:lnRef idx="1">
+            <a:schemeClr val="accent1"/>
+          </a:lnRef>
+          <a:fillRef idx="3">
+            <a:schemeClr val="accent1"/>
+          </a:fillRef>
+          <a:effectRef idx="2">
+            <a:schemeClr val="accent1"/>
+          </a:effectRef>
+          <a:fontRef idx="minor">
+            <a:schemeClr val="lt1"/>
+          </a:fontRef>
+        </p:style>
+        <p:txBody>
+          <a:bodyPr rtlCol="0" anchor="ctr"/>
+          <a:lstStyle/>
+          <a:p>
+            <a:pPr algn="ctr"/>
+          </a:p>
+        </p:txBody>
+      </p:sp>
+      <p:sp>
+        <p:nvSpPr>
+          <p:cNvPr id="15" name="Rectangle 14"/>
+          <p:cNvSpPr/>
+          <p:nvPr/>
+        </p:nvSpPr>
+        <p:spPr>
+          <a:xfrm>
+            <a:off x="640080" y="2761488"/>
+            <a:ext cx="73152" cy="274320"/>
+          </a:xfrm>
+          <a:prstGeom prst="rect">
+            <a:avLst/>
+          </a:prstGeom>
+          <a:solidFill>
+            <a:srgbClr val="269CCB"/>
+          </a:solidFill>
+          <a:ln>
+            <a:noFill/>
+          </a:ln>
+        </p:spPr>
+        <p:style>
+          <a:lnRef idx="1">
+            <a:schemeClr val="accent1"/>
+          </a:lnRef>
+          <a:fillRef idx="3">
+            <a:schemeClr val="accent1"/>
+          </a:fillRef>
+          <a:effectRef idx="2">
+            <a:schemeClr val="accent1"/>
+          </a:effectRef>
+          <a:fontRef idx="minor">
+            <a:schemeClr val="lt1"/>
+          </a:fontRef>
+        </p:style>
+        <p:txBody>
+          <a:bodyPr rtlCol="0" anchor="ctr"/>
+          <a:lstStyle/>
+          <a:p>
+            <a:pPr algn="ctr"/>
+          </a:p>
+        </p:txBody>
+      </p:sp>
+      <p:sp>
+        <p:nvSpPr>
+          <p:cNvPr id="16" name="TextBox 15"/>
+          <p:cNvSpPr txBox="1"/>
+          <p:nvPr/>
+        </p:nvSpPr>
+        <p:spPr>
+          <a:xfrm>
+            <a:off x="1097280" y="2706624"/>
+            <a:ext cx="10362895" cy="402336"/>
+          </a:xfrm>
+          <a:prstGeom prst="rect">
+            <a:avLst/>
+          </a:prstGeom>
+          <a:noFill/>
+        </p:spPr>
+        <p:txBody>
+          <a:bodyPr wrap="square" anchor="ctr"/>
+          <a:lstStyle/>
+          <a:p>
+            <a:r>
+              <a:rPr sz="1500" b="0" i="0">
+                <a:solidFill>
+                  <a:srgbClr val="333333"/>
+                </a:solidFill>
+                <a:latin typeface="Calibri"/>
+              </a:rPr>
+              <a:t>Si esta historia se entregara sola, sin ninguna otra, el usuario podria hacer algo completo de principio a fin?</a:t>
+            </a:r>
+          </a:p>
+        </p:txBody>
+      </p:sp>
+      <p:sp>
+        <p:nvSpPr>
+          <p:cNvPr id="17" name="TextBox 16"/>
+          <p:cNvSpPr txBox="1"/>
+          <p:nvPr/>
+        </p:nvSpPr>
+        <p:spPr>
+          <a:xfrm>
+            <a:off x="11185855" y="6473952"/>
+            <a:ext cx="640080" cy="274320"/>
+          </a:xfrm>
+          <a:prstGeom prst="rect">
+            <a:avLst/>
+          </a:prstGeom>
+          <a:noFill/>
+        </p:spPr>
+        <p:txBody>
+          <a:bodyPr wrap="square">
+            <a:spAutoFit/>
+          </a:bodyPr>
+          <a:lstStyle/>
+          <a:p>
+            <a:pPr algn="r"/>
+            <a:r>
+              <a:rPr sz="1100" b="0" i="0">
+                <a:solidFill>
+                  <a:srgbClr val="666666"/>
+                </a:solidFill>
+                <a:latin typeface="Calibri"/>
+              </a:rPr>
+              <a:t>20</a:t>
+            </a:r>
+          </a:p>
+        </p:txBody>
+      </p:sp>
+    </p:spTree>
+  </p:cSld>
+  <p:clrMapOvr>
+    <a:masterClrMapping/>
+  </p:clrMapOvr>
+</p:sld>
+</file>
+
+<file path=ppt/slides/slide21.xml><?xml version="1.0" encoding="utf-8"?>
+<p:sld xmlns:a="http://schemas.openxmlformats.org/drawingml/2006/main" xmlns:p="http://schemas.openxmlformats.org/presentationml/2006/main" xmlns:r="http://schemas.openxmlformats.org/officeDocument/2006/relationships">
+  <p:cSld>
+    <p:bg>
+      <p:bgPr>
+        <a:solidFill>
+          <a:srgbClr val="FFFFFF"/>
+        </a:solidFill>
+        <a:effectLst/>
+      </p:bgPr>
+    </p:bg>
+    <p:spTree>
+      <p:nvGrpSpPr>
+        <p:cNvPr id="1" name=""/>
+        <p:cNvGrpSpPr/>
+        <p:nvPr/>
+      </p:nvGrpSpPr>
+      <p:grpSpPr/>
+      <p:sp>
+        <p:nvSpPr>
+          <p:cNvPr id="2" name="Rectangle 1"/>
+          <p:cNvSpPr/>
+          <p:nvPr/>
+        </p:nvSpPr>
+        <p:spPr>
+          <a:xfrm>
+            <a:off x="0" y="0"/>
+            <a:ext cx="12191695" cy="960120"/>
+          </a:xfrm>
+          <a:prstGeom prst="rect">
+            <a:avLst/>
+          </a:prstGeom>
+          <a:solidFill>
+            <a:srgbClr val="095292"/>
+          </a:solidFill>
+          <a:ln>
+            <a:noFill/>
+          </a:ln>
+        </p:spPr>
+        <p:style>
+          <a:lnRef idx="1">
+            <a:schemeClr val="accent1"/>
+          </a:lnRef>
+          <a:fillRef idx="3">
+            <a:schemeClr val="accent1"/>
+          </a:fillRef>
+          <a:effectRef idx="2">
+            <a:schemeClr val="accent1"/>
+          </a:effectRef>
+          <a:fontRef idx="minor">
+            <a:schemeClr val="lt1"/>
+          </a:fontRef>
+        </p:style>
+        <p:txBody>
+          <a:bodyPr rtlCol="0" anchor="ctr"/>
+          <a:lstStyle/>
+          <a:p>
+            <a:pPr algn="ctr"/>
+          </a:p>
+        </p:txBody>
+      </p:sp>
+      <p:sp>
+        <p:nvSpPr>
+          <p:cNvPr id="3" name="Rectangle 2"/>
+          <p:cNvSpPr/>
+          <p:nvPr/>
+        </p:nvSpPr>
+        <p:spPr>
+          <a:xfrm>
+            <a:off x="0" y="960120"/>
+            <a:ext cx="12191695" cy="41148"/>
+          </a:xfrm>
+          <a:prstGeom prst="rect">
+            <a:avLst/>
+          </a:prstGeom>
+          <a:solidFill>
+            <a:srgbClr val="FFD000"/>
+          </a:solidFill>
+          <a:ln>
+            <a:noFill/>
+          </a:ln>
+        </p:spPr>
+        <p:style>
+          <a:lnRef idx="1">
+            <a:schemeClr val="accent1"/>
+          </a:lnRef>
+          <a:fillRef idx="3">
+            <a:schemeClr val="accent1"/>
+          </a:fillRef>
+          <a:effectRef idx="2">
+            <a:schemeClr val="accent1"/>
+          </a:effectRef>
+          <a:fontRef idx="minor">
+            <a:schemeClr val="lt1"/>
+          </a:fontRef>
+        </p:style>
+        <p:txBody>
+          <a:bodyPr rtlCol="0" anchor="ctr"/>
+          <a:lstStyle/>
+          <a:p>
+            <a:pPr algn="ctr"/>
+          </a:p>
+        </p:txBody>
+      </p:sp>
+      <p:sp>
+        <p:nvSpPr>
+          <p:cNvPr id="4" name="TextBox 3"/>
+          <p:cNvSpPr txBox="1"/>
+          <p:nvPr/>
+        </p:nvSpPr>
+        <p:spPr>
+          <a:xfrm>
+            <a:off x="457200" y="164592"/>
+            <a:ext cx="11277295" cy="502920"/>
+          </a:xfrm>
+          <a:prstGeom prst="rect">
+            <a:avLst/>
+          </a:prstGeom>
+          <a:noFill/>
+        </p:spPr>
+        <p:txBody>
+          <a:bodyPr wrap="square">
+            <a:spAutoFit/>
+          </a:bodyPr>
+          <a:lstStyle/>
+          <a:p>
+            <a:r>
+              <a:rPr sz="2600" b="1" i="0">
+                <a:solidFill>
+                  <a:srgbClr val="FFFFFF"/>
+                </a:solidFill>
+                <a:latin typeface="Calibri"/>
+              </a:rPr>
+              <a:t>Criterios de exito / entregable</a:t>
+            </a:r>
+          </a:p>
+        </p:txBody>
+      </p:sp>
+      <p:sp>
+        <p:nvSpPr>
+          <p:cNvPr id="5" name="TextBox 4"/>
+          <p:cNvSpPr txBox="1"/>
+          <p:nvPr/>
+        </p:nvSpPr>
+        <p:spPr>
+          <a:xfrm>
+            <a:off x="457200" y="1170432"/>
+            <a:ext cx="11277295" cy="5230368"/>
+          </a:xfrm>
+          <a:prstGeom prst="rect">
+            <a:avLst/>
+          </a:prstGeom>
+          <a:noFill/>
+        </p:spPr>
+        <p:txBody>
+          <a:bodyPr wrap="square">
+            <a:spAutoFit/>
+          </a:bodyPr>
+          <a:lstStyle/>
+          <a:p>
+            <a:pPr>
+              <a:spcAft>
+                <a:spcPts val="800"/>
+              </a:spcAft>
+            </a:pPr>
+            <a:r>
+              <a:rPr sz="2000" b="0" i="0">
+                <a:solidFill>
+                  <a:srgbClr val="333333"/>
+                </a:solidFill>
+                <a:latin typeface="Calibri"/>
+              </a:rPr>
+              <a:t>–   </a:t>
+            </a:r>
+            <a:r>
+              <a:rPr sz="2000" b="1" i="0">
+                <a:solidFill>
+                  <a:srgbClr val="333333"/>
+                </a:solidFill>
+                <a:latin typeface="Calibri"/>
+              </a:rPr>
+              <a:t>Entregable:</a:t>
+            </a:r>
+            <a:r>
+              <a:rPr sz="2000" b="0" i="0">
+                <a:solidFill>
+                  <a:srgbClr val="333333"/>
+                </a:solidFill>
+                <a:latin typeface="Calibri"/>
+              </a:rPr>
+              <a:t> Tablero de backlog con 8 historias en formato Como/quiero/para, cada una con 2 o 3 criterios de aceptacion en Dado-Cuando-Entonces, estimacion en puntos y trazabilidad al RF de la clase 6, subido a la plataforma del curso.</a:t>
+            </a:r>
+          </a:p>
+          <a:p>
+            <a:pPr>
+              <a:spcAft>
+                <a:spcPts val="800"/>
+              </a:spcAft>
+            </a:pPr>
+            <a:r>
+              <a:rPr sz="2000" b="0" i="0">
+                <a:solidFill>
+                  <a:srgbClr val="333333"/>
+                </a:solidFill>
+                <a:latin typeface="Calibri"/>
+              </a:rPr>
+              <a:t>–   </a:t>
+            </a:r>
+            <a:r>
+              <a:rPr sz="2000" b="1" i="0">
+                <a:solidFill>
+                  <a:srgbClr val="333333"/>
+                </a:solidFill>
+                <a:latin typeface="Calibri"/>
+              </a:rPr>
+              <a:t>Exito:</a:t>
+            </a:r>
+            <a:r>
+              <a:rPr sz="2000" b="0" i="0">
+                <a:solidFill>
+                  <a:srgbClr val="333333"/>
+                </a:solidFill>
+                <a:latin typeface="Calibri"/>
+              </a:rPr>
+              <a:t> Las 8 historias usan roles concretos de la clinica Huellitas y ninguna emplea el rol generico usuario.</a:t>
+            </a:r>
+          </a:p>
+          <a:p>
+            <a:pPr>
+              <a:spcAft>
+                <a:spcPts val="800"/>
+              </a:spcAft>
+            </a:pPr>
+            <a:r>
+              <a:rPr sz="2000" b="0" i="0">
+                <a:solidFill>
+                  <a:srgbClr val="333333"/>
+                </a:solidFill>
+                <a:latin typeface="Calibri"/>
+              </a:rPr>
+              <a:t>–   </a:t>
+            </a:r>
+            <a:r>
+              <a:rPr sz="2000" b="1" i="0">
+                <a:solidFill>
+                  <a:srgbClr val="333333"/>
+                </a:solidFill>
+                <a:latin typeface="Calibri"/>
+              </a:rPr>
+              <a:t>Exito:</a:t>
+            </a:r>
+            <a:r>
+              <a:rPr sz="2000" b="0" i="0">
+                <a:solidFill>
+                  <a:srgbClr val="333333"/>
+                </a:solidFill>
+                <a:latin typeface="Calibri"/>
+              </a:rPr>
+              <a:t> Cada historia tiene minimo 2 criterios de aceptacion en Dado-Cuando-Entonces y al menos cuatro incluyen un camino alterno o de error.</a:t>
+            </a:r>
+          </a:p>
+          <a:p>
+            <a:pPr>
+              <a:spcAft>
+                <a:spcPts val="800"/>
+              </a:spcAft>
+            </a:pPr>
+            <a:r>
+              <a:rPr sz="2000" b="0" i="0">
+                <a:solidFill>
+                  <a:srgbClr val="333333"/>
+                </a:solidFill>
+                <a:latin typeface="Calibri"/>
+              </a:rPr>
+              <a:t>–   </a:t>
+            </a:r>
+            <a:r>
+              <a:rPr sz="2000" b="1" i="0">
+                <a:solidFill>
+                  <a:srgbClr val="333333"/>
+                </a:solidFill>
+                <a:latin typeface="Calibri"/>
+              </a:rPr>
+              <a:t>Exito:</a:t>
+            </a:r>
+            <a:r>
+              <a:rPr sz="2000" b="0" i="0">
+                <a:solidFill>
+                  <a:srgbClr val="333333"/>
+                </a:solidFill>
+                <a:latin typeface="Calibri"/>
+              </a:rPr>
+              <a:t> Todas las historias pasan INVEST con al menos cinco de las seis letras en si, y ninguna esta cortada por capas tecnicas.</a:t>
+            </a:r>
+          </a:p>
+          <a:p>
+            <a:pPr>
+              <a:spcAft>
+                <a:spcPts val="800"/>
+              </a:spcAft>
+            </a:pPr>
+            <a:r>
+              <a:rPr sz="2000" b="0" i="0">
+                <a:solidFill>
+                  <a:srgbClr val="333333"/>
+                </a:solidFill>
+                <a:latin typeface="Calibri"/>
+              </a:rPr>
+              <a:t>–   </a:t>
+            </a:r>
+            <a:r>
+              <a:rPr sz="2000" b="1" i="0">
+                <a:solidFill>
+                  <a:srgbClr val="333333"/>
+                </a:solidFill>
+                <a:latin typeface="Calibri"/>
+              </a:rPr>
+              <a:t>Exito:</a:t>
+            </a:r>
+            <a:r>
+              <a:rPr sz="2000" b="0" i="0">
+                <a:solidFill>
+                  <a:srgbClr val="333333"/>
+                </a:solidFill>
+                <a:latin typeface="Calibri"/>
+              </a:rPr>
+              <a:t> Cada historia trae estimacion en puntos, prioridad y el RF de origen; ninguna historia supera los 8 puntos sin partirse.</a:t>
+            </a:r>
+          </a:p>
+          <a:p>
+            <a:pPr>
+              <a:spcAft>
+                <a:spcPts val="800"/>
+              </a:spcAft>
+            </a:pPr>
+            <a:r>
+              <a:rPr sz="2000" b="0" i="0">
+                <a:solidFill>
+                  <a:srgbClr val="333333"/>
+                </a:solidFill>
+                <a:latin typeface="Calibri"/>
+              </a:rPr>
+              <a:t>–   </a:t>
+            </a:r>
+            <a:r>
+              <a:rPr sz="2000" b="1" i="0">
+                <a:solidFill>
+                  <a:srgbClr val="333333"/>
+                </a:solidFill>
+                <a:latin typeface="Calibri"/>
+              </a:rPr>
+              <a:t>Entrega en la plataforma del curso</a:t>
+            </a:r>
+            <a:r>
+              <a:rPr sz="2000" b="0" i="0">
+                <a:solidFill>
+                  <a:srgbClr val="333333"/>
+                </a:solidFill>
+                <a:latin typeface="Calibri"/>
+              </a:rPr>
+              <a:t> — en la fecha que indique el docente.</a:t>
+            </a:r>
+          </a:p>
+        </p:txBody>
+      </p:sp>
+      <p:sp>
+        <p:nvSpPr>
+          <p:cNvPr id="6" name="TextBox 5"/>
+          <p:cNvSpPr txBox="1"/>
+          <p:nvPr/>
+        </p:nvSpPr>
+        <p:spPr>
+          <a:xfrm>
+            <a:off x="11185855" y="6473952"/>
+            <a:ext cx="640080" cy="274320"/>
+          </a:xfrm>
+          <a:prstGeom prst="rect">
+            <a:avLst/>
+          </a:prstGeom>
+          <a:noFill/>
+        </p:spPr>
+        <p:txBody>
+          <a:bodyPr wrap="square">
+            <a:spAutoFit/>
+          </a:bodyPr>
+          <a:lstStyle/>
+          <a:p>
+            <a:pPr algn="r"/>
+            <a:r>
+              <a:rPr sz="1100" b="0" i="0">
+                <a:solidFill>
+                  <a:srgbClr val="666666"/>
+                </a:solidFill>
+                <a:latin typeface="Calibri"/>
+              </a:rPr>
+              <a:t>21</a:t>
+            </a:r>
+          </a:p>
+        </p:txBody>
+      </p:sp>
+    </p:spTree>
+  </p:cSld>
+  <p:clrMapOvr>
+    <a:masterClrMapping/>
+  </p:clrMapOvr>
+</p:sld>
+</file>
+
+<file path=ppt/slides/slide22.xml><?xml version="1.0" encoding="utf-8"?>
+<p:sld xmlns:a="http://schemas.openxmlformats.org/drawingml/2006/main" xmlns:p="http://schemas.openxmlformats.org/presentationml/2006/main" xmlns:r="http://schemas.openxmlformats.org/officeDocument/2006/relationships">
+  <p:cSld>
+    <p:bg>
+      <p:bgPr>
+        <a:solidFill>
+          <a:srgbClr val="FFFFFF"/>
+        </a:solidFill>
+        <a:effectLst/>
+      </p:bgPr>
+    </p:bg>
+    <p:spTree>
+      <p:nvGrpSpPr>
+        <p:cNvPr id="1" name=""/>
+        <p:cNvGrpSpPr/>
+        <p:nvPr/>
+      </p:nvGrpSpPr>
+      <p:grpSpPr/>
+      <p:sp>
+        <p:nvSpPr>
+          <p:cNvPr id="2" name="Rectangle 1"/>
+          <p:cNvSpPr/>
+          <p:nvPr/>
+        </p:nvSpPr>
+        <p:spPr>
+          <a:xfrm>
+            <a:off x="0" y="0"/>
+            <a:ext cx="12191695" cy="960120"/>
+          </a:xfrm>
+          <a:prstGeom prst="rect">
+            <a:avLst/>
+          </a:prstGeom>
+          <a:solidFill>
+            <a:srgbClr val="095292"/>
+          </a:solidFill>
+          <a:ln>
+            <a:noFill/>
+          </a:ln>
+        </p:spPr>
+        <p:style>
+          <a:lnRef idx="1">
+            <a:schemeClr val="accent1"/>
+          </a:lnRef>
+          <a:fillRef idx="3">
+            <a:schemeClr val="accent1"/>
+          </a:fillRef>
+          <a:effectRef idx="2">
+            <a:schemeClr val="accent1"/>
+          </a:effectRef>
+          <a:fontRef idx="minor">
+            <a:schemeClr val="lt1"/>
+          </a:fontRef>
+        </p:style>
+        <p:txBody>
+          <a:bodyPr rtlCol="0" anchor="ctr"/>
+          <a:lstStyle/>
+          <a:p>
+            <a:pPr algn="ctr"/>
+          </a:p>
+        </p:txBody>
+      </p:sp>
+      <p:sp>
+        <p:nvSpPr>
+          <p:cNvPr id="3" name="Rectangle 2"/>
+          <p:cNvSpPr/>
+          <p:nvPr/>
+        </p:nvSpPr>
+        <p:spPr>
+          <a:xfrm>
+            <a:off x="0" y="960120"/>
+            <a:ext cx="12191695" cy="41148"/>
+          </a:xfrm>
+          <a:prstGeom prst="rect">
+            <a:avLst/>
+          </a:prstGeom>
+          <a:solidFill>
+            <a:srgbClr val="FFD000"/>
+          </a:solidFill>
+          <a:ln>
+            <a:noFill/>
+          </a:ln>
+        </p:spPr>
+        <p:style>
+          <a:lnRef idx="1">
+            <a:schemeClr val="accent1"/>
+          </a:lnRef>
+          <a:fillRef idx="3">
+            <a:schemeClr val="accent1"/>
+          </a:fillRef>
+          <a:effectRef idx="2">
+            <a:schemeClr val="accent1"/>
+          </a:effectRef>
+          <a:fontRef idx="minor">
+            <a:schemeClr val="lt1"/>
+          </a:fontRef>
+        </p:style>
+        <p:txBody>
+          <a:bodyPr rtlCol="0" anchor="ctr"/>
+          <a:lstStyle/>
+          <a:p>
+            <a:pPr algn="ctr"/>
+          </a:p>
+        </p:txBody>
+      </p:sp>
+      <p:sp>
+        <p:nvSpPr>
+          <p:cNvPr id="4" name="TextBox 3"/>
+          <p:cNvSpPr txBox="1"/>
+          <p:nvPr/>
+        </p:nvSpPr>
+        <p:spPr>
+          <a:xfrm>
+            <a:off x="457200" y="164592"/>
+            <a:ext cx="11277295" cy="502920"/>
+          </a:xfrm>
+          <a:prstGeom prst="rect">
+            <a:avLst/>
+          </a:prstGeom>
+          <a:noFill/>
+        </p:spPr>
+        <p:txBody>
+          <a:bodyPr wrap="square">
+            <a:spAutoFit/>
+          </a:bodyPr>
+          <a:lstStyle/>
+          <a:p>
+            <a:r>
+              <a:rPr sz="2600" b="1" i="0">
+                <a:solidFill>
+                  <a:srgbClr val="FFFFFF"/>
+                </a:solidFill>
+                <a:latin typeface="Calibri"/>
+              </a:rPr>
+              <a:t>Para el PI esta semana</a:t>
+            </a:r>
+          </a:p>
+        </p:txBody>
+      </p:sp>
+      <p:sp>
+        <p:nvSpPr>
+          <p:cNvPr id="5" name="Rounded Rectangle 4"/>
+          <p:cNvSpPr/>
+          <p:nvPr/>
+        </p:nvSpPr>
+        <p:spPr>
+          <a:xfrm>
+            <a:off x="457200" y="1261872"/>
+            <a:ext cx="11277295" cy="1051560"/>
+          </a:xfrm>
+          <a:prstGeom prst="roundRect">
+            <a:avLst>
+              <a:gd name="adj" fmla="val 12000"/>
+            </a:avLst>
+          </a:prstGeom>
+          <a:solidFill>
+            <a:srgbClr val="E8F4FA"/>
+          </a:solidFill>
+          <a:ln>
+            <a:noFill/>
+          </a:ln>
+        </p:spPr>
+        <p:style>
+          <a:lnRef idx="1">
+            <a:schemeClr val="accent1"/>
+          </a:lnRef>
+          <a:fillRef idx="3">
+            <a:schemeClr val="accent1"/>
+          </a:fillRef>
+          <a:effectRef idx="2">
+            <a:schemeClr val="accent1"/>
+          </a:effectRef>
+          <a:fontRef idx="minor">
+            <a:schemeClr val="lt1"/>
+          </a:fontRef>
+        </p:style>
+        <p:txBody>
+          <a:bodyPr rtlCol="0" anchor="ctr"/>
+          <a:lstStyle/>
+          <a:p>
+            <a:pPr algn="ctr"/>
+          </a:p>
+        </p:txBody>
+      </p:sp>
+      <p:sp>
+        <p:nvSpPr>
+          <p:cNvPr id="6" name="Rectangle 5"/>
+          <p:cNvSpPr/>
+          <p:nvPr/>
+        </p:nvSpPr>
+        <p:spPr>
+          <a:xfrm>
+            <a:off x="457200" y="1261872"/>
+            <a:ext cx="128016" cy="1051560"/>
+          </a:xfrm>
+          <a:prstGeom prst="rect">
+            <a:avLst/>
+          </a:prstGeom>
+          <a:solidFill>
+            <a:srgbClr val="269CCB"/>
+          </a:solidFill>
+          <a:ln>
+            <a:noFill/>
+          </a:ln>
+        </p:spPr>
+        <p:style>
+          <a:lnRef idx="1">
+            <a:schemeClr val="accent1"/>
+          </a:lnRef>
+          <a:fillRef idx="3">
+            <a:schemeClr val="accent1"/>
+          </a:fillRef>
+          <a:effectRef idx="2">
+            <a:schemeClr val="accent1"/>
+          </a:effectRef>
+          <a:fontRef idx="minor">
+            <a:schemeClr val="lt1"/>
+          </a:fontRef>
+        </p:style>
+        <p:txBody>
+          <a:bodyPr rtlCol="0" anchor="ctr"/>
+          <a:lstStyle/>
+          <a:p>
+            <a:pPr algn="ctr"/>
+          </a:p>
+        </p:txBody>
+      </p:sp>
+      <p:sp>
+        <p:nvSpPr>
+          <p:cNvPr id="7" name="TextBox 6"/>
+          <p:cNvSpPr txBox="1"/>
+          <p:nvPr/>
+        </p:nvSpPr>
+        <p:spPr>
+          <a:xfrm>
+            <a:off x="777240" y="1399031"/>
+            <a:ext cx="10774375" cy="822959"/>
+          </a:xfrm>
+          <a:prstGeom prst="rect">
+            <a:avLst/>
+          </a:prstGeom>
+          <a:noFill/>
+        </p:spPr>
+        <p:txBody>
+          <a:bodyPr wrap="square">
+            <a:spAutoFit/>
+          </a:bodyPr>
+          <a:lstStyle/>
+          <a:p>
+            <a:r>
+              <a:rPr sz="1200" b="1" i="0">
+                <a:solidFill>
+                  <a:srgbClr val="269CCB"/>
+                </a:solidFill>
+                <a:latin typeface="Calibri"/>
+              </a:rPr>
+              <a:t>Info</a:t>
+            </a:r>
+          </a:p>
+          <a:p>
+            <a:pPr>
+              <a:spcBef>
+                <a:spcPts val="400"/>
+              </a:spcBef>
+            </a:pPr>
+            <a:r>
+              <a:rPr sz="1400" b="0" i="0">
+                <a:solidFill>
+                  <a:srgbClr val="333333"/>
+                </a:solidFill>
+                <a:latin typeface="Calibri"/>
+              </a:rPr>
+              <a:t>Hito: Queda listo el backlog inicial de VetCare: dos epicas descompuestas en ocho historias priorizadas, con criterios de aceptacion y talla en puntos.</a:t>
+            </a:r>
+          </a:p>
+        </p:txBody>
+      </p:sp>
+      <p:sp>
+        <p:nvSpPr>
+          <p:cNvPr id="8" name="Rounded Rectangle 7"/>
+          <p:cNvSpPr/>
+          <p:nvPr/>
+        </p:nvSpPr>
+        <p:spPr>
+          <a:xfrm>
+            <a:off x="457200" y="2478024"/>
+            <a:ext cx="11277295" cy="1051560"/>
+          </a:xfrm>
+          <a:prstGeom prst="roundRect">
+            <a:avLst>
+              <a:gd name="adj" fmla="val 12000"/>
+            </a:avLst>
+          </a:prstGeom>
+          <a:solidFill>
+            <a:srgbClr val="FFF8E1"/>
+          </a:solidFill>
+          <a:ln>
+            <a:noFill/>
+          </a:ln>
+        </p:spPr>
+        <p:style>
+          <a:lnRef idx="1">
+            <a:schemeClr val="accent1"/>
+          </a:lnRef>
+          <a:fillRef idx="3">
+            <a:schemeClr val="accent1"/>
+          </a:fillRef>
+          <a:effectRef idx="2">
+            <a:schemeClr val="accent1"/>
+          </a:effectRef>
+          <a:fontRef idx="minor">
+            <a:schemeClr val="lt1"/>
+          </a:fontRef>
+        </p:style>
+        <p:txBody>
+          <a:bodyPr rtlCol="0" anchor="ctr"/>
+          <a:lstStyle/>
+          <a:p>
+            <a:pPr algn="ctr"/>
+          </a:p>
+        </p:txBody>
+      </p:sp>
+      <p:sp>
+        <p:nvSpPr>
+          <p:cNvPr id="9" name="Rectangle 8"/>
+          <p:cNvSpPr/>
+          <p:nvPr/>
+        </p:nvSpPr>
+        <p:spPr>
+          <a:xfrm>
+            <a:off x="457200" y="2478024"/>
+            <a:ext cx="128016" cy="1051560"/>
+          </a:xfrm>
+          <a:prstGeom prst="rect">
+            <a:avLst/>
+          </a:prstGeom>
+          <a:solidFill>
+            <a:srgbClr val="FFD000"/>
+          </a:solidFill>
+          <a:ln>
+            <a:noFill/>
+          </a:ln>
+        </p:spPr>
+        <p:style>
+          <a:lnRef idx="1">
+            <a:schemeClr val="accent1"/>
+          </a:lnRef>
+          <a:fillRef idx="3">
+            <a:schemeClr val="accent1"/>
+          </a:fillRef>
+          <a:effectRef idx="2">
+            <a:schemeClr val="accent1"/>
+          </a:effectRef>
+          <a:fontRef idx="minor">
+            <a:schemeClr val="lt1"/>
+          </a:fontRef>
+        </p:style>
+        <p:txBody>
+          <a:bodyPr rtlCol="0" anchor="ctr"/>
+          <a:lstStyle/>
+          <a:p>
+            <a:pPr algn="ctr"/>
+          </a:p>
+        </p:txBody>
+      </p:sp>
+      <p:sp>
+        <p:nvSpPr>
+          <p:cNvPr id="10" name="TextBox 9"/>
+          <p:cNvSpPr txBox="1"/>
+          <p:nvPr/>
+        </p:nvSpPr>
+        <p:spPr>
+          <a:xfrm>
+            <a:off x="777240" y="2615184"/>
+            <a:ext cx="10774375" cy="822959"/>
+          </a:xfrm>
+          <a:prstGeom prst="rect">
+            <a:avLst/>
+          </a:prstGeom>
+          <a:noFill/>
+        </p:spPr>
+        <p:txBody>
+          <a:bodyPr wrap="square">
+            <a:spAutoFit/>
+          </a:bodyPr>
+          <a:lstStyle/>
+          <a:p>
+            <a:r>
+              <a:rPr sz="1200" b="1" i="0">
+                <a:solidFill>
+                  <a:srgbClr val="FFD000"/>
+                </a:solidFill>
+                <a:latin typeface="Calibri"/>
+              </a:rPr>
+              <a:t>Aclaración</a:t>
+            </a:r>
+          </a:p>
+          <a:p>
+            <a:pPr>
+              <a:spcBef>
+                <a:spcPts val="400"/>
+              </a:spcBef>
+            </a:pPr>
+            <a:r>
+              <a:rPr sz="1400" b="0" i="0">
+                <a:solidFill>
+                  <a:srgbClr val="333333"/>
+                </a:solidFill>
+                <a:latin typeface="Calibri"/>
+              </a:rPr>
+              <a:t>Enunciado completo: Clases/Proyecto Integrador/ (VetCare).</a:t>
+            </a:r>
+          </a:p>
+        </p:txBody>
+      </p:sp>
+      <p:sp>
+        <p:nvSpPr>
+          <p:cNvPr id="11" name="Rounded Rectangle 10"/>
+          <p:cNvSpPr/>
+          <p:nvPr/>
+        </p:nvSpPr>
+        <p:spPr>
+          <a:xfrm>
+            <a:off x="457200" y="3694176"/>
+            <a:ext cx="11277295" cy="1051560"/>
+          </a:xfrm>
+          <a:prstGeom prst="roundRect">
+            <a:avLst>
+              <a:gd name="adj" fmla="val 12000"/>
+            </a:avLst>
+          </a:prstGeom>
+          <a:solidFill>
+            <a:srgbClr val="FBE4E4"/>
+          </a:solidFill>
+          <a:ln>
+            <a:noFill/>
+          </a:ln>
+        </p:spPr>
+        <p:style>
+          <a:lnRef idx="1">
+            <a:schemeClr val="accent1"/>
+          </a:lnRef>
+          <a:fillRef idx="3">
+            <a:schemeClr val="accent1"/>
+          </a:fillRef>
+          <a:effectRef idx="2">
+            <a:schemeClr val="accent1"/>
+          </a:effectRef>
+          <a:fontRef idx="minor">
+            <a:schemeClr val="lt1"/>
+          </a:fontRef>
+        </p:style>
+        <p:txBody>
+          <a:bodyPr rtlCol="0" anchor="ctr"/>
+          <a:lstStyle/>
+          <a:p>
+            <a:pPr algn="ctr"/>
+          </a:p>
+        </p:txBody>
+      </p:sp>
+      <p:sp>
+        <p:nvSpPr>
+          <p:cNvPr id="12" name="Rectangle 11"/>
+          <p:cNvSpPr/>
+          <p:nvPr/>
+        </p:nvSpPr>
+        <p:spPr>
+          <a:xfrm>
+            <a:off x="457200" y="3694176"/>
+            <a:ext cx="128016" cy="1051560"/>
+          </a:xfrm>
+          <a:prstGeom prst="rect">
+            <a:avLst/>
+          </a:prstGeom>
+          <a:solidFill>
+            <a:srgbClr val="A02030"/>
+          </a:solidFill>
+          <a:ln>
+            <a:noFill/>
+          </a:ln>
+        </p:spPr>
+        <p:style>
+          <a:lnRef idx="1">
+            <a:schemeClr val="accent1"/>
+          </a:lnRef>
+          <a:fillRef idx="3">
+            <a:schemeClr val="accent1"/>
+          </a:fillRef>
+          <a:effectRef idx="2">
+            <a:schemeClr val="accent1"/>
+          </a:effectRef>
+          <a:fontRef idx="minor">
+            <a:schemeClr val="lt1"/>
+          </a:fontRef>
+        </p:style>
+        <p:txBody>
+          <a:bodyPr rtlCol="0" anchor="ctr"/>
+          <a:lstStyle/>
+          <a:p>
+            <a:pPr algn="ctr"/>
+          </a:p>
+        </p:txBody>
+      </p:sp>
+      <p:sp>
+        <p:nvSpPr>
+          <p:cNvPr id="13" name="TextBox 12"/>
+          <p:cNvSpPr txBox="1"/>
+          <p:nvPr/>
+        </p:nvSpPr>
+        <p:spPr>
+          <a:xfrm>
+            <a:off x="777240" y="3831336"/>
+            <a:ext cx="10774375" cy="822959"/>
+          </a:xfrm>
+          <a:prstGeom prst="rect">
+            <a:avLst/>
+          </a:prstGeom>
+          <a:noFill/>
+        </p:spPr>
+        <p:txBody>
+          <a:bodyPr wrap="square">
+            <a:spAutoFit/>
+          </a:bodyPr>
+          <a:lstStyle/>
+          <a:p>
+            <a:r>
+              <a:rPr sz="1200" b="1" i="0">
+                <a:solidFill>
+                  <a:srgbClr val="A02030"/>
+                </a:solidFill>
+                <a:latin typeface="Calibri"/>
+              </a:rPr>
+              <a:t>Atención</a:t>
+            </a:r>
+          </a:p>
+          <a:p>
+            <a:pPr>
+              <a:spcBef>
+                <a:spcPts val="400"/>
+              </a:spcBef>
+            </a:pPr>
+            <a:r>
+              <a:rPr sz="1400" b="0" i="0">
+                <a:solidFill>
+                  <a:srgbClr val="333333"/>
+                </a:solidFill>
+                <a:latin typeface="Calibri"/>
+              </a:rPr>
+              <a:t>Entrega del taller, si el docente lo asigna · en la fecha que indique el docente.</a:t>
+            </a:r>
+          </a:p>
+        </p:txBody>
+      </p:sp>
+      <p:sp>
+        <p:nvSpPr>
+          <p:cNvPr id="14" name="TextBox 13"/>
+          <p:cNvSpPr txBox="1"/>
+          <p:nvPr/>
+        </p:nvSpPr>
+        <p:spPr>
+          <a:xfrm>
+            <a:off x="11185855" y="6473952"/>
+            <a:ext cx="640080" cy="274320"/>
+          </a:xfrm>
+          <a:prstGeom prst="rect">
+            <a:avLst/>
+          </a:prstGeom>
+          <a:noFill/>
+        </p:spPr>
+        <p:txBody>
+          <a:bodyPr wrap="square">
+            <a:spAutoFit/>
+          </a:bodyPr>
+          <a:lstStyle/>
+          <a:p>
+            <a:pPr algn="r"/>
+            <a:r>
+              <a:rPr sz="1100" b="0" i="0">
+                <a:solidFill>
+                  <a:srgbClr val="666666"/>
+                </a:solidFill>
+                <a:latin typeface="Calibri"/>
+              </a:rPr>
+              <a:t>22</a:t>
+            </a:r>
+          </a:p>
+        </p:txBody>
+      </p:sp>
+    </p:spTree>
+  </p:cSld>
+  <p:clrMapOvr>
+    <a:masterClrMapping/>
+  </p:clrMapOvr>
+</p:sld>
+</file>
+
+<file path=ppt/slides/slide23.xml><?xml version="1.0" encoding="utf-8"?>
+<p:sld xmlns:a="http://schemas.openxmlformats.org/drawingml/2006/main" xmlns:p="http://schemas.openxmlformats.org/presentationml/2006/main" xmlns:r="http://schemas.openxmlformats.org/officeDocument/2006/relationships">
+  <p:cSld>
+    <p:bg>
+      <p:bgPr>
+        <a:solidFill>
+          <a:srgbClr val="FFFFFF"/>
+        </a:solidFill>
+        <a:effectLst/>
+      </p:bgPr>
+    </p:bg>
+    <p:spTree>
+      <p:nvGrpSpPr>
+        <p:cNvPr id="1" name=""/>
+        <p:cNvGrpSpPr/>
+        <p:nvPr/>
+      </p:nvGrpSpPr>
+      <p:grpSpPr/>
+      <p:sp>
+        <p:nvSpPr>
+          <p:cNvPr id="2" name="Rectangle 1"/>
+          <p:cNvSpPr/>
+          <p:nvPr/>
+        </p:nvSpPr>
+        <p:spPr>
+          <a:xfrm>
+            <a:off x="0" y="0"/>
             <a:ext cx="12191695" cy="164592"/>
           </a:xfrm>
           <a:prstGeom prst="rect">
@@ -10221,22 +10964,6 @@
               <a:t>–   Porque es la unica que explica por que vale la pena gastar tiempo y plata en eso.</a:t>
             </a:r>
           </a:p>
-          <a:p>
-            <a:pPr>
-              <a:spcAft>
-                <a:spcPts val="800"/>
-              </a:spcAft>
-            </a:pPr>
-            <a:r>
-              <a:rPr sz="2000" b="0" i="0">
-                <a:solidFill>
-                  <a:srgbClr val="333333"/>
-                </a:solidFill>
-                <a:latin typeface="Calibri"/>
-              </a:rPr>
-              <a:t>–   En VetCare, Como auxiliar quiero buscar la ficha de una mascota por el documento del dueno para no revolver la carpeta fisica mientras el paciente espera en el meson se entiende sin traduccion</a:t>
-            </a:r>
-          </a:p>
         </p:txBody>
       </p:sp>
       <p:sp>
@@ -10454,7 +11181,7 @@
                 </a:solidFill>
                 <a:latin typeface="Calibri"/>
               </a:rPr>
-              <a:t>–   En cambio El sistema debe tener un buscador no dice a quien le sirve ni que dolor cura.</a:t>
+              <a:t>–   En VetCare, Como auxiliar quiero buscar la ficha de una mascota por el documento del dueno para no revolver la carpeta fisica mientras el paciente espera en el meson se entiende sin traduccion</a:t>
             </a:r>
           </a:p>
           <a:p>
@@ -10470,7 +11197,7 @@
                 </a:solidFill>
                 <a:latin typeface="Calibri"/>
               </a:rPr>
-              <a:t>–   Ron Jeffries lo resumio en tres C: Card, la tarjeta corta</a:t>
+              <a:t>–   En cambio El sistema debe tener un buscador no dice a quien le sirve ni que dolor cura.</a:t>
             </a:r>
           </a:p>
           <a:p>
@@ -10486,7 +11213,7 @@
                 </a:solidFill>
                 <a:latin typeface="Calibri"/>
               </a:rPr>
-              <a:t>–   Conversation, la charla que aclara los detalles; y Confirmation, los criterios de aceptacion.</a:t>
+              <a:t>–   Ron Jeffries lo resumio en tres C: Card, la tarjeta corta</a:t>
             </a:r>
           </a:p>
           <a:p>
@@ -10699,7 +11426,7 @@
                 </a:solidFill>
                 <a:latin typeface="Calibri"/>
               </a:rPr>
-              <a:t>Los criterios de aceptacion son la parte que convierte una historia...</a:t>
+              <a:t>Los criterios de aceptacion son la parte que convierte una historia... (1/2)</a:t>
             </a:r>
           </a:p>
         </p:txBody>
@@ -10732,7 +11459,7 @@
               </a:spcAft>
             </a:pPr>
             <a:r>
-              <a:rPr sz="1900" b="0" i="0">
+              <a:rPr sz="2000" b="0" i="0">
                 <a:solidFill>
                   <a:srgbClr val="333333"/>
                 </a:solidFill>
@@ -10748,7 +11475,7 @@
               </a:spcAft>
             </a:pPr>
             <a:r>
-              <a:rPr sz="1900" b="0" i="0">
+              <a:rPr sz="2000" b="0" i="0">
                 <a:solidFill>
                   <a:srgbClr val="333333"/>
                 </a:solidFill>
@@ -10764,93 +11491,13 @@
               </a:spcAft>
             </a:pPr>
             <a:r>
-              <a:rPr sz="1900" b="0" i="0">
+              <a:rPr sz="2000" b="0" i="0">
                 <a:solidFill>
                   <a:srgbClr val="333333"/>
                 </a:solidFill>
                 <a:latin typeface="Calibri"/>
               </a:rPr>
               <a:t>–   Para la historia de buscar el historial en VetCare los criterios serian: Dado un dueno con tres mascotas registradas, cuando busco por su documento, entonces el sistema lista las tres mascotas con nombre y especie</a:t>
-            </a:r>
-          </a:p>
-          <a:p>
-            <a:pPr>
-              <a:spcAft>
-                <a:spcPts val="800"/>
-              </a:spcAft>
-            </a:pPr>
-            <a:r>
-              <a:rPr sz="1900" b="0" i="0">
-                <a:solidFill>
-                  <a:srgbClr val="333333"/>
-                </a:solidFill>
-                <a:latin typeface="Calibri"/>
-              </a:rPr>
-              <a:t>–   Dado que selecciono la mascota Rocky, cuando abro su historial, entonces veo sus atenciones de la mas reciente a la mas antigua</a:t>
-            </a:r>
-          </a:p>
-          <a:p>
-            <a:pPr>
-              <a:spcAft>
-                <a:spcPts val="800"/>
-              </a:spcAft>
-            </a:pPr>
-            <a:r>
-              <a:rPr sz="1900" b="0" i="0">
-                <a:solidFill>
-                  <a:srgbClr val="333333"/>
-                </a:solidFill>
-                <a:latin typeface="Calibri"/>
-              </a:rPr>
-              <a:t>–   Dado un documento que no existe, cuando busco, entonces el sistema muestra un mensaje claro y ofrece crear el dueno.</a:t>
-            </a:r>
-          </a:p>
-          <a:p>
-            <a:pPr>
-              <a:spcAft>
-                <a:spcPts val="800"/>
-              </a:spcAft>
-            </a:pPr>
-            <a:r>
-              <a:rPr sz="1900" b="0" i="0">
-                <a:solidFill>
-                  <a:srgbClr val="333333"/>
-                </a:solidFill>
-                <a:latin typeface="Calibri"/>
-              </a:rPr>
-              <a:t>–   Fijense que el tercer criterio es el que casi siempre falta: el camino alterno, el caso feo, el error.</a:t>
-            </a:r>
-          </a:p>
-          <a:p>
-            <a:pPr>
-              <a:spcAft>
-                <a:spcPts val="800"/>
-              </a:spcAft>
-            </a:pPr>
-            <a:r>
-              <a:rPr sz="1900" b="0" i="0">
-                <a:solidFill>
-                  <a:srgbClr val="333333"/>
-                </a:solidFill>
-                <a:latin typeface="Calibri"/>
-              </a:rPr>
-              <a:t>–   Una historia con solo criterios felices es una historia a medio pensar.</a:t>
-            </a:r>
-          </a:p>
-          <a:p>
-            <a:pPr>
-              <a:spcAft>
-                <a:spcPts val="800"/>
-              </a:spcAft>
-            </a:pPr>
-            <a:r>
-              <a:rPr sz="1900" b="0" i="0">
-                <a:solidFill>
-                  <a:srgbClr val="333333"/>
-                </a:solidFill>
-                <a:latin typeface="Calibri"/>
-              </a:rPr>
-              <a:t>–   Ademas, los criterios de aceptacion son el puente directo con el prototipo navegable y con las pruebas que hara el companero de Programacion II, porque son literalmente el guion de lo que se va a revisar.</a:t>
             </a:r>
           </a:p>
         </p:txBody>
@@ -11031,7 +11678,7 @@
                 </a:solidFill>
                 <a:latin typeface="Calibri"/>
               </a:rPr>
-              <a:t>INVEST es la lista de chequeo para saber si una historia esta bien...</a:t>
+              <a:t>Los criterios de aceptacion son la parte que convierte una historia... (2/2)</a:t>
             </a:r>
           </a:p>
         </p:txBody>
@@ -11070,7 +11717,7 @@
                 </a:solidFill>
                 <a:latin typeface="Calibri"/>
               </a:rPr>
-              <a:t>–   INVEST es la lista de chequeo para saber si una historia esta bien cortada, y conviene revisarla letra por letra con VetCare en la mano.</a:t>
+              <a:t>–   Fijense que el tercer criterio es el que casi siempre falta: el camino alterno, el caso feo, el error.</a:t>
             </a:r>
           </a:p>
           <a:p>
@@ -11086,7 +11733,7 @@
                 </a:solidFill>
                 <a:latin typeface="Calibri"/>
               </a:rPr>
-              <a:t>–   Independiente: se puede hacer sin esperar a otra; si la historia de agendar cita necesita obligatoriamente que exista la de registrar mascota, hay dependencia y toca ordenarlas.</a:t>
+              <a:t>–   Una historia con solo criterios felices es una historia a medio pensar.</a:t>
             </a:r>
           </a:p>
           <a:p>
@@ -11102,87 +11749,7 @@
                 </a:solidFill>
                 <a:latin typeface="Calibri"/>
               </a:rPr>
-              <a:t>–   Negociable: la historia describe la necesidad, no la solucion tecnica; decir quiero un combo desplegable con autocompletar en JavaScript ya no es historia, es diseno impuesto.</a:t>
-            </a:r>
-          </a:p>
-          <a:p>
-            <a:pPr>
-              <a:spcAft>
-                <a:spcPts val="800"/>
-              </a:spcAft>
-            </a:pPr>
-            <a:r>
-              <a:rPr sz="2000" b="0" i="0">
-                <a:solidFill>
-                  <a:srgbClr val="333333"/>
-                </a:solidFill>
-                <a:latin typeface="Calibri"/>
-              </a:rPr>
-              <a:t>–   Valiosa: alguien de la clinica gana algo real; si nadie de Huellitas nota la diferencia, no es historia sino tarea interna.</a:t>
-            </a:r>
-          </a:p>
-          <a:p>
-            <a:pPr>
-              <a:spcAft>
-                <a:spcPts val="800"/>
-              </a:spcAft>
-            </a:pPr>
-            <a:r>
-              <a:rPr sz="2000" b="0" i="0">
-                <a:solidFill>
-                  <a:srgbClr val="333333"/>
-                </a:solidFill>
-                <a:latin typeface="Calibri"/>
-              </a:rPr>
-              <a:t>–   Estimable: el equipo entiende lo suficiente para tallarla; si nadie sabe cuanto pesa, falta conversacion o hace falta investigar aparte.</a:t>
-            </a:r>
-          </a:p>
-          <a:p>
-            <a:pPr>
-              <a:spcAft>
-                <a:spcPts val="800"/>
-              </a:spcAft>
-            </a:pPr>
-            <a:r>
-              <a:rPr sz="2000" b="0" i="0">
-                <a:solidFill>
-                  <a:srgbClr val="333333"/>
-                </a:solidFill>
-                <a:latin typeface="Calibri"/>
-              </a:rPr>
-              <a:t>–   Small o pequena: cabe en una iteracion; si toma tres semanas es una epica disfrazada.</a:t>
-            </a:r>
-          </a:p>
-          <a:p>
-            <a:pPr>
-              <a:spcAft>
-                <a:spcPts val="800"/>
-              </a:spcAft>
-            </a:pPr>
-            <a:r>
-              <a:rPr sz="2000" b="0" i="0">
-                <a:solidFill>
-                  <a:srgbClr val="333333"/>
-                </a:solidFill>
-                <a:latin typeface="Calibri"/>
-              </a:rPr>
-              <a:t>–   Testeable: tiene criterios verificables, que es exactamente la misma regla de oro de la clase pasada aplicada en formato agil.</a:t>
-            </a:r>
-          </a:p>
-          <a:p>
-            <a:pPr>
-              <a:spcAft>
-                <a:spcPts val="800"/>
-              </a:spcAft>
-            </a:pPr>
-            <a:r>
-              <a:rPr sz="2000" b="0" i="0">
-                <a:solidFill>
-                  <a:srgbClr val="333333"/>
-                </a:solidFill>
-                <a:latin typeface="Calibri"/>
-              </a:rPr>
-              <a:t>–   Una historia que falla dos letras de INVEST no se planea todavia, se vuelve a partir.</a:t>
+              <a:t>–   Ademas, los criterios de aceptacion son el puente directo con el prototipo navegable y con las pruebas que hara el companero de Programacion II, porque son literalmente el guion de lo que se va a revisar.</a:t>
             </a:r>
           </a:p>
         </p:txBody>
@@ -11363,7 +11930,7 @@
                 </a:solidFill>
                 <a:latin typeface="Calibri"/>
               </a:rPr>
-              <a:t>Una epica es una historia grande que todavia no cabe en una iteracion...</a:t>
+              <a:t>INVEST es la lista de chequeo para saber si una historia esta bien... (1/2)</a:t>
             </a:r>
           </a:p>
         </p:txBody>
@@ -11402,7 +11969,7 @@
                 </a:solidFill>
                 <a:latin typeface="Calibri"/>
               </a:rPr>
-              <a:t>–   Una epica es una historia grande que todavia no cabe en una iteracion, y descomponerla es una habilidad que se aprende cortando mal varias veces.</a:t>
+              <a:t>–   INVEST es la lista de chequeo para saber si una historia esta bien cortada, y conviene revisarla letra por letra con VetCare en la mano.</a:t>
             </a:r>
           </a:p>
           <a:p>
@@ -11418,7 +11985,7 @@
                 </a:solidFill>
                 <a:latin typeface="Calibri"/>
               </a:rPr>
-              <a:t>–   El corte correcto es vertical, como una rebanada de pastel que trae bizcocho, crema y cubierta: cada historia atraviesa pantalla, logica y datos y deja algo que el usuario puede usar.</a:t>
+              <a:t>–   Independiente: se puede hacer sin esperar a otra; si la historia de agendar cita necesita obligatoriamente que exista la de registrar mascota, hay dependencia y toca ordenarlas.</a:t>
             </a:r>
           </a:p>
           <a:p>
@@ -11434,7 +12001,7 @@
                 </a:solidFill>
                 <a:latin typeface="Calibri"/>
               </a:rPr>
-              <a:t>–   El corte equivocado es horizontal, por capas: una historia para la pantalla, otra para la logica y otra para la base de datos; asi ninguna de las tres sirve sola y el cliente no ve nada hasta que estan las tres.</a:t>
+              <a:t>–   Negociable: la historia describe la necesidad, no la solucion tecnica; decir quiero un combo desplegable con autocompletar en JavaScript ya no es historia, es diseno impuesto.</a:t>
             </a:r>
           </a:p>
           <a:p>
@@ -11450,39 +12017,7 @@
                 </a:solidFill>
                 <a:latin typeface="Calibri"/>
               </a:rPr>
-              <a:t>–   En VetCare la epica Historial clinico se parte en: consultar historial por documento del dueno, registrar una atencion nueva, adjuntar resultados de laboratorio y filtrar el historial por rango de fechas; cada una entregable y demostrable por separado.</a:t>
-            </a:r>
-          </a:p>
-          <a:p>
-            <a:pPr>
-              <a:spcAft>
-                <a:spcPts val="800"/>
-              </a:spcAft>
-            </a:pPr>
-            <a:r>
-              <a:rPr sz="2000" b="0" i="0">
-                <a:solidFill>
-                  <a:srgbClr val="333333"/>
-                </a:solidFill>
-                <a:latin typeface="Calibri"/>
-              </a:rPr>
-              <a:t>–   Otros ejes utiles para cortar son por tipo de dato (primero solo perros y gatos, despues otras especies), por regla de negocio (primero sin control de acceso, luego con perfiles) y por camino (primero el flujo feliz, luego los errores).</a:t>
-            </a:r>
-          </a:p>
-          <a:p>
-            <a:pPr>
-              <a:spcAft>
-                <a:spcPts val="800"/>
-              </a:spcAft>
-            </a:pPr>
-            <a:r>
-              <a:rPr sz="2000" b="0" i="0">
-                <a:solidFill>
-                  <a:srgbClr val="333333"/>
-                </a:solidFill>
-                <a:latin typeface="Calibri"/>
-              </a:rPr>
-              <a:t>–   El nombre de la epica se conserva como etiqueta en cada historia para no perder el hilo.</a:t>
+              <a:t>–   Valiosa: alguien de la clinica gana algo real; si nadie de Huellitas nota la diferencia, no es historia sino tarea interna.</a:t>
             </a:r>
           </a:p>
         </p:txBody>
@@ -11663,7 +12198,7 @@
                 </a:solidFill>
                 <a:latin typeface="Calibri"/>
               </a:rPr>
-              <a:t>Estimar en agil no es adivinar horas sino comparar tamanos, y esa es la... (1/2)</a:t>
+              <a:t>INVEST es la lista de chequeo para saber si una historia esta bien... (2/2)</a:t>
             </a:r>
           </a:p>
         </p:txBody>
@@ -11702,7 +12237,7 @@
                 </a:solidFill>
                 <a:latin typeface="Calibri"/>
               </a:rPr>
-              <a:t>–   Estimar en agil no es adivinar horas sino comparar tamanos, y esa es la razon de los puntos de historia: son una medida relativa que mezcla esfuerzo, complejidad e incertidumbre.</a:t>
+              <a:t>–   Estimable: el equipo entiende lo suficiente para tallarla; si nadie sabe cuanto pesa, falta conversacion o hace falta investigar aparte.</a:t>
             </a:r>
           </a:p>
           <a:p>
@@ -11718,7 +12253,7 @@
                 </a:solidFill>
                 <a:latin typeface="Calibri"/>
               </a:rPr>
-              <a:t>–   Se toma una historia mediana y conocida como referencia (por ejemplo registrar un dueno vale 3 puntos) y todas las demas se comparan contra ella usando una escala tipo Fibonacci 1, 2, 3, 5</a:t>
+              <a:t>–   Small o pequena: cabe en una iteracion; si toma tres semanas es una epica disfrazada.</a:t>
             </a:r>
           </a:p>
           <a:p>
@@ -11734,7 +12269,7 @@
                 </a:solidFill>
                 <a:latin typeface="Calibri"/>
               </a:rPr>
-              <a:t>–   8, 13, donde el salto grande refleja que entre mas grande la historia, menos confiable la estimacion; si algo llega a 13 o mas, la senal no es de dificultad sino de que hay que partirla.</a:t>
+              <a:t>–   Testeable: tiene criterios verificables, que es exactamente la misma regla de oro de la clase pasada aplicada en formato agil.</a:t>
             </a:r>
           </a:p>
           <a:p>
@@ -11750,7 +12285,7 @@
                 </a:solidFill>
                 <a:latin typeface="Calibri"/>
               </a:rPr>
-              <a:t>–   La tecnica de sala es el planning poker: todos muestran su carta al tiempo y lo importante no es el numero sino la discusion cuando alguien dice 2 y otro dice 8, porque ahi aparece el requisito que unos entendieron y otros no.</a:t>
+              <a:t>–   Una historia que falla dos letras de INVEST no se planea todavia, se vuelve a partir.</a:t>
             </a:r>
           </a:p>
         </p:txBody>

--- a/Seminario de Sistemas/Clases/Clase 7 - Historias de usuario/Presentacion.pptx
+++ b/Seminario de Sistemas/Clases/Clase 7 - Historias de usuario/Presentacion.pptx
@@ -28,6 +28,8 @@
     <p:sldId id="276" r:id="rId27"/>
     <p:sldId id="277" r:id="rId28"/>
     <p:sldId id="278" r:id="rId29"/>
+    <p:sldId id="279" r:id="rId30"/>
+    <p:sldId id="280" r:id="rId31"/>
   </p:sldIdLst>
   <p:sldSz cx="12191695" cy="6858000" type="screen4x3"/>
   <p:notesSz cx="6858000" cy="9144000"/>
@@ -4620,7 +4622,7 @@
                 </a:solidFill>
                 <a:latin typeface="Calibri"/>
               </a:rPr>
-              <a:t>Historia HU-04 con criterios de aceptacion (artefacto proyectable)</a:t>
+              <a:t>La historia y sus criterios en Dado-Cuando-Entonces</a:t>
             </a:r>
           </a:p>
         </p:txBody>
@@ -4634,7 +4636,7 @@
         <p:spPr>
           <a:xfrm>
             <a:off x="457200" y="1261872"/>
-            <a:ext cx="11277295" cy="4773168"/>
+            <a:ext cx="11277295" cy="5093208"/>
           </a:xfrm>
           <a:prstGeom prst="roundRect">
             <a:avLst>
@@ -4754,7 +4756,7 @@
         <p:spPr>
           <a:xfrm>
             <a:off x="777240" y="1719072"/>
-            <a:ext cx="10637215" cy="4133087"/>
+            <a:ext cx="10637215" cy="4453128"/>
           </a:xfrm>
           <a:prstGeom prst="rect">
             <a:avLst/>
@@ -4769,193 +4771,273 @@
           <a:p>
             <a:pPr>
               <a:spcAft>
-                <a:spcPts val="400"/>
+                <a:spcPts val="371"/>
               </a:spcAft>
             </a:pPr>
             <a:r>
-              <a:rPr sz="1400" b="0" i="0">
+              <a:rPr sz="1300" b="0" i="0">
                 <a:solidFill>
                   <a:srgbClr val="FFFFFF"/>
                 </a:solidFill>
                 <a:latin typeface="Calibri"/>
               </a:rPr>
-              <a:t>HU-04  [Epica: E-02 Historial y agenda]</a:t>
+              <a:t>HU-03  Agendar una cita</a:t>
             </a:r>
           </a:p>
           <a:p>
             <a:pPr>
               <a:spcAft>
-                <a:spcPts val="400"/>
+                <a:spcPts val="371"/>
               </a:spcAft>
             </a:pPr>
             <a:r>
-              <a:rPr sz="1400" b="0" i="0">
+              <a:rPr sz="1300" b="0" i="0">
                 <a:solidFill>
                   <a:srgbClr val="FFFFFF"/>
                 </a:solidFill>
                 <a:latin typeface="Calibri"/>
               </a:rPr>
-              <a:t>Como veterinario de la clinica Huellitas</a:t>
+              <a:t/>
             </a:r>
           </a:p>
           <a:p>
             <a:pPr>
               <a:spcAft>
-                <a:spcPts val="400"/>
+                <a:spcPts val="371"/>
               </a:spcAft>
             </a:pPr>
             <a:r>
-              <a:rPr sz="1400" b="0" i="0">
+              <a:rPr sz="1300" b="0" i="0">
                 <a:solidFill>
                   <a:srgbClr val="FFFFFF"/>
                 </a:solidFill>
                 <a:latin typeface="Calibri"/>
               </a:rPr>
-              <a:t>quiero consultar el historial de atenciones de una mascota por el documento del dueno</a:t>
+              <a:t>Como recepcionista</a:t>
             </a:r>
           </a:p>
           <a:p>
             <a:pPr>
               <a:spcAft>
-                <a:spcPts val="400"/>
+                <a:spcPts val="371"/>
               </a:spcAft>
             </a:pPr>
             <a:r>
-              <a:rPr sz="1400" b="0" i="0">
+              <a:rPr sz="1300" b="0" i="0">
                 <a:solidFill>
                   <a:srgbClr val="FFFFFF"/>
                 </a:solidFill>
                 <a:latin typeface="Calibri"/>
               </a:rPr>
-              <a:t>para decidir el tratamiento sin depender de la carpeta fisica.</a:t>
+              <a:t>quiero agendar una cita para una mascota registrada</a:t>
             </a:r>
           </a:p>
           <a:p>
             <a:pPr>
               <a:spcAft>
-                <a:spcPts val="400"/>
+                <a:spcPts val="371"/>
               </a:spcAft>
             </a:pPr>
             <a:r>
-              <a:rPr sz="1400" b="0" i="0">
+              <a:rPr sz="1300" b="0" i="0">
                 <a:solidFill>
                   <a:srgbClr val="FFFFFF"/>
                 </a:solidFill>
                 <a:latin typeface="Calibri"/>
               </a:rPr>
-              <a:t/>
+              <a:t>para que el veterinario tenga su agenda del dia ordenada.</a:t>
             </a:r>
           </a:p>
           <a:p>
             <a:pPr>
               <a:spcAft>
-                <a:spcPts val="400"/>
+                <a:spcPts val="371"/>
               </a:spcAft>
             </a:pPr>
             <a:r>
-              <a:rPr sz="1400" b="0" i="0">
+              <a:rPr sz="1300" b="0" i="0">
                 <a:solidFill>
                   <a:srgbClr val="FFFFFF"/>
                 </a:solidFill>
                 <a:latin typeface="Calibri"/>
               </a:rPr>
-              <a:t>Criterios de aceptacion</a:t>
+              <a:t/>
             </a:r>
           </a:p>
           <a:p>
             <a:pPr>
               <a:spcAft>
-                <a:spcPts val="400"/>
+                <a:spcPts val="371"/>
               </a:spcAft>
             </a:pPr>
             <a:r>
-              <a:rPr sz="1400" b="0" i="0">
+              <a:rPr sz="1300" b="0" i="0">
                 <a:solidFill>
                   <a:srgbClr val="FFFFFF"/>
                 </a:solidFill>
                 <a:latin typeface="Calibri"/>
               </a:rPr>
-              <a:t>CA-1  Dado un dueno con 3 mascotas registradas, cuando busco por su documento, entonces el sistema lista las 3 mascotas con nombre y especie.</a:t>
+              <a:t>Criterios de aceptacion</a:t>
             </a:r>
           </a:p>
           <a:p>
             <a:pPr>
               <a:spcAft>
-                <a:spcPts val="400"/>
+                <a:spcPts val="371"/>
               </a:spcAft>
             </a:pPr>
             <a:r>
-              <a:rPr sz="1400" b="0" i="0">
+              <a:rPr sz="1300" b="0" i="0">
                 <a:solidFill>
                   <a:srgbClr val="FFFFFF"/>
                 </a:solidFill>
                 <a:latin typeface="Calibri"/>
               </a:rPr>
-              <a:t>CA-2  Dado que selecciono la mascota Rocky, cuando abro su historial, entonces veo sus atenciones de la mas reciente a la mas antigua.</a:t>
+              <a:t/>
             </a:r>
           </a:p>
           <a:p>
             <a:pPr>
               <a:spcAft>
-                <a:spcPts val="400"/>
+                <a:spcPts val="371"/>
               </a:spcAft>
             </a:pPr>
             <a:r>
-              <a:rPr sz="1400" b="0" i="0">
+              <a:rPr sz="1300" b="0" i="0">
                 <a:solidFill>
                   <a:srgbClr val="FFFFFF"/>
                 </a:solidFill>
                 <a:latin typeface="Calibri"/>
               </a:rPr>
-              <a:t>CA-3  Dado un documento no registrado, cuando busco, entonces el sistema muestra 'No hay duenos con ese documento' y ofrece crear uno.</a:t>
+              <a:t>CA-1  Dado que la mascota esta activa</a:t>
             </a:r>
           </a:p>
           <a:p>
             <a:pPr>
               <a:spcAft>
-                <a:spcPts val="400"/>
+                <a:spcPts val="371"/>
               </a:spcAft>
             </a:pPr>
             <a:r>
-              <a:rPr sz="1400" b="0" i="0">
+              <a:rPr sz="1300" b="0" i="0">
                 <a:solidFill>
                   <a:srgbClr val="FFFFFF"/>
                 </a:solidFill>
                 <a:latin typeface="Calibri"/>
               </a:rPr>
-              <a:t/>
+              <a:t>      Cuando selecciono fecha y hora libres</a:t>
             </a:r>
           </a:p>
           <a:p>
             <a:pPr>
               <a:spcAft>
-                <a:spcPts val="400"/>
+                <a:spcPts val="371"/>
               </a:spcAft>
             </a:pPr>
             <a:r>
-              <a:rPr sz="1400" b="0" i="0">
+              <a:rPr sz="1300" b="0" i="0">
                 <a:solidFill>
                   <a:srgbClr val="FFFFFF"/>
                 </a:solidFill>
                 <a:latin typeface="Calibri"/>
               </a:rPr>
-              <a:t>Estimacion: 5 puntos   |   Prioridad: Must   |   Origen: RF-03 / NEC-02</a:t>
+              <a:t>      Entonces la cita queda en estado PROGRAMADA</a:t>
             </a:r>
           </a:p>
           <a:p>
             <a:pPr>
               <a:spcAft>
-                <a:spcPts val="400"/>
+                <a:spcPts val="371"/>
               </a:spcAft>
             </a:pPr>
             <a:r>
-              <a:rPr sz="1400" b="0" i="0">
+              <a:rPr sz="1300" b="0" i="0">
                 <a:solidFill>
                   <a:srgbClr val="FFFFFF"/>
                 </a:solidFill>
                 <a:latin typeface="Calibri"/>
               </a:rPr>
-              <a:t>Definicion de terminado: mockup aprobado + los 3 criterios verificados en el prototipo navegable</a:t>
+              <a:t/>
+            </a:r>
+          </a:p>
+          <a:p>
+            <a:pPr>
+              <a:spcAft>
+                <a:spcPts val="371"/>
+              </a:spcAft>
+            </a:pPr>
+            <a:r>
+              <a:rPr sz="1300" b="0" i="0">
+                <a:solidFill>
+                  <a:srgbClr val="FFFFFF"/>
+                </a:solidFill>
+                <a:latin typeface="Calibri"/>
+              </a:rPr>
+              <a:t>CA-2  Dado que la mascota esta inactiva</a:t>
+            </a:r>
+          </a:p>
+          <a:p>
+            <a:pPr>
+              <a:spcAft>
+                <a:spcPts val="371"/>
+              </a:spcAft>
+            </a:pPr>
+            <a:r>
+              <a:rPr sz="1300" b="0" i="0">
+                <a:solidFill>
+                  <a:srgbClr val="FFFFFF"/>
+                </a:solidFill>
+                <a:latin typeface="Calibri"/>
+              </a:rPr>
+              <a:t>      Cuando intento agendar</a:t>
+            </a:r>
+          </a:p>
+          <a:p>
+            <a:pPr>
+              <a:spcAft>
+                <a:spcPts val="371"/>
+              </a:spcAft>
+            </a:pPr>
+            <a:r>
+              <a:rPr sz="1300" b="0" i="0">
+                <a:solidFill>
+                  <a:srgbClr val="FFFFFF"/>
+                </a:solidFill>
+                <a:latin typeface="Calibri"/>
+              </a:rPr>
+              <a:t>      Entonces el sistema lo rechaza y explica por que</a:t>
+            </a:r>
+          </a:p>
+          <a:p>
+            <a:pPr>
+              <a:spcAft>
+                <a:spcPts val="371"/>
+              </a:spcAft>
+            </a:pPr>
+            <a:r>
+              <a:rPr sz="1300" b="0" i="0">
+                <a:solidFill>
+                  <a:srgbClr val="FFFFFF"/>
+                </a:solidFill>
+                <a:latin typeface="Calibri"/>
+              </a:rPr>
+              <a:t/>
+            </a:r>
+          </a:p>
+          <a:p>
+            <a:pPr>
+              <a:spcAft>
+                <a:spcPts val="371"/>
+              </a:spcAft>
+            </a:pPr>
+            <a:r>
+              <a:rPr sz="1300" b="0" i="0">
+                <a:solidFill>
+                  <a:srgbClr val="FFFFFF"/>
+                </a:solidFill>
+                <a:latin typeface="Calibri"/>
+              </a:rPr>
+              <a:t>-- Un criterio sin «Dado» no se puede probar: falta el estado inicial.</a:t>
             </a:r>
           </a:p>
         </p:txBody>
@@ -4963,41 +5045,6 @@
       <p:sp>
         <p:nvSpPr>
           <p:cNvPr id="9" name="TextBox 8"/>
-          <p:cNvSpPr txBox="1"/>
-          <p:nvPr/>
-        </p:nvSpPr>
-        <p:spPr>
-          <a:xfrm>
-            <a:off x="457200" y="6080760"/>
-            <a:ext cx="11277295" cy="320040"/>
-          </a:xfrm>
-          <a:prstGeom prst="rect">
-            <a:avLst/>
-          </a:prstGeom>
-          <a:noFill/>
-        </p:spPr>
-        <p:txBody>
-          <a:bodyPr wrap="square">
-            <a:spAutoFit/>
-          </a:bodyPr>
-          <a:lstStyle/>
-          <a:p>
-            <a:pPr algn="ctr"/>
-            <a:r>
-              <a:rPr sz="1200" b="0" i="1">
-                <a:solidFill>
-                  <a:srgbClr val="666666"/>
-                </a:solidFill>
-                <a:latin typeface="Calibri"/>
-              </a:rPr>
-              <a:t>La historia dice a quien le sirve y para que; los criterios de aceptacion son la unica parte que se puede cobrar.</a:t>
-            </a:r>
-          </a:p>
-        </p:txBody>
-      </p:sp>
-      <p:sp>
-        <p:nvSpPr>
-          <p:cNvPr id="10" name="TextBox 9"/>
           <p:cNvSpPr txBox="1"/>
           <p:nvPr/>
         </p:nvSpPr>
@@ -5171,21 +5218,141 @@
                 </a:solidFill>
                 <a:latin typeface="Calibri"/>
               </a:rPr>
-              <a:t>Demo del dia</a:t>
-            </a:r>
-          </a:p>
-        </p:txBody>
-      </p:sp>
-      <p:sp>
-        <p:nvSpPr>
-          <p:cNvPr id="5" name="TextBox 4"/>
+              <a:t>El mapa del backlog: epicas, historias y orden</a:t>
+            </a:r>
+          </a:p>
+        </p:txBody>
+      </p:sp>
+      <p:sp>
+        <p:nvSpPr>
+          <p:cNvPr id="5" name="Rounded Rectangle 4"/>
+          <p:cNvSpPr/>
+          <p:nvPr/>
+        </p:nvSpPr>
+        <p:spPr>
+          <a:xfrm>
+            <a:off x="457200" y="1261872"/>
+            <a:ext cx="11277295" cy="5093208"/>
+          </a:xfrm>
+          <a:prstGeom prst="roundRect">
+            <a:avLst>
+              <a:gd name="adj" fmla="val 12000"/>
+            </a:avLst>
+          </a:prstGeom>
+          <a:solidFill>
+            <a:srgbClr val="1E2A38"/>
+          </a:solidFill>
+          <a:ln>
+            <a:noFill/>
+          </a:ln>
+        </p:spPr>
+        <p:style>
+          <a:lnRef idx="1">
+            <a:schemeClr val="accent1"/>
+          </a:lnRef>
+          <a:fillRef idx="3">
+            <a:schemeClr val="accent1"/>
+          </a:fillRef>
+          <a:effectRef idx="2">
+            <a:schemeClr val="accent1"/>
+          </a:effectRef>
+          <a:fontRef idx="minor">
+            <a:schemeClr val="lt1"/>
+          </a:fontRef>
+        </p:style>
+        <p:txBody>
+          <a:bodyPr rtlCol="0" anchor="ctr"/>
+          <a:lstStyle/>
+          <a:p>
+            <a:pPr algn="ctr"/>
+          </a:p>
+        </p:txBody>
+      </p:sp>
+      <p:sp>
+        <p:nvSpPr>
+          <p:cNvPr id="6" name="Rectangle 5"/>
+          <p:cNvSpPr/>
+          <p:nvPr/>
+        </p:nvSpPr>
+        <p:spPr>
+          <a:xfrm>
+            <a:off x="457200" y="1261872"/>
+            <a:ext cx="11277295" cy="320040"/>
+          </a:xfrm>
+          <a:prstGeom prst="rect">
+            <a:avLst/>
+          </a:prstGeom>
+          <a:solidFill>
+            <a:srgbClr val="095292"/>
+          </a:solidFill>
+          <a:ln>
+            <a:noFill/>
+          </a:ln>
+        </p:spPr>
+        <p:style>
+          <a:lnRef idx="1">
+            <a:schemeClr val="accent1"/>
+          </a:lnRef>
+          <a:fillRef idx="3">
+            <a:schemeClr val="accent1"/>
+          </a:fillRef>
+          <a:effectRef idx="2">
+            <a:schemeClr val="accent1"/>
+          </a:effectRef>
+          <a:fontRef idx="minor">
+            <a:schemeClr val="lt1"/>
+          </a:fontRef>
+        </p:style>
+        <p:txBody>
+          <a:bodyPr rtlCol="0" anchor="ctr"/>
+          <a:lstStyle/>
+          <a:p>
+            <a:pPr algn="ctr"/>
+          </a:p>
+        </p:txBody>
+      </p:sp>
+      <p:sp>
+        <p:nvSpPr>
+          <p:cNvPr id="7" name="TextBox 6"/>
           <p:cNvSpPr txBox="1"/>
           <p:nvPr/>
         </p:nvSpPr>
         <p:spPr>
           <a:xfrm>
-            <a:off x="457200" y="1170432"/>
-            <a:ext cx="11277295" cy="5230368"/>
+            <a:off x="685800" y="1307592"/>
+            <a:ext cx="10820095" cy="256032"/>
+          </a:xfrm>
+          <a:prstGeom prst="rect">
+            <a:avLst/>
+          </a:prstGeom>
+          <a:noFill/>
+        </p:spPr>
+        <p:txBody>
+          <a:bodyPr wrap="square" anchor="ctr"/>
+          <a:lstStyle/>
+          <a:p>
+            <a:r>
+              <a:rPr sz="1000" b="1" i="0">
+                <a:solidFill>
+                  <a:srgbClr val="269CCB"/>
+                </a:solidFill>
+                <a:latin typeface="Calibri"/>
+              </a:rPr>
+              <a:t>● ● ●</a:t>
+            </a:r>
+          </a:p>
+        </p:txBody>
+      </p:sp>
+      <p:sp>
+        <p:nvSpPr>
+          <p:cNvPr id="8" name="TextBox 7"/>
+          <p:cNvSpPr txBox="1"/>
+          <p:nvPr/>
+        </p:nvSpPr>
+        <p:spPr>
+          <a:xfrm>
+            <a:off x="777240" y="1719072"/>
+            <a:ext cx="10637215" cy="4453128"/>
           </a:xfrm>
           <a:prstGeom prst="rect">
             <a:avLst/>
@@ -5200,92 +5367,200 @@
           <a:p>
             <a:pPr>
               <a:spcAft>
-                <a:spcPts val="800"/>
+                <a:spcPts val="400"/>
               </a:spcAft>
             </a:pPr>
             <a:r>
-              <a:rPr sz="2000" b="0" i="0">
-                <a:solidFill>
-                  <a:srgbClr val="333333"/>
-                </a:solidFill>
-                <a:latin typeface="Calibri"/>
-              </a:rPr>
-              <a:t>–   </a:t>
-            </a:r>
-            <a:r>
-              <a:rPr sz="2000" b="1" i="0">
-                <a:solidFill>
-                  <a:srgbClr val="333333"/>
-                </a:solidFill>
-                <a:latin typeface="Calibri"/>
-              </a:rPr>
-              <a:t>Herramienta:</a:t>
-            </a:r>
-            <a:r>
-              <a:rPr sz="2000" b="0" i="0">
-                <a:solidFill>
-                  <a:srgbClr val="333333"/>
-                </a:solidFill>
-                <a:latin typeface="Calibri"/>
-              </a:rPr>
-              <a:t> Google Docs · Excalidraw</a:t>
+              <a:rPr sz="1400" b="0" i="0">
+                <a:solidFill>
+                  <a:srgbClr val="FFFFFF"/>
+                </a:solidFill>
+                <a:latin typeface="Calibri"/>
+              </a:rPr>
+              <a:t>flowchart TB</a:t>
             </a:r>
           </a:p>
           <a:p>
             <a:pPr>
               <a:spcAft>
-                <a:spcPts val="800"/>
+                <a:spcPts val="400"/>
               </a:spcAft>
             </a:pPr>
             <a:r>
-              <a:rPr sz="2000" b="0" i="0">
-                <a:solidFill>
-                  <a:srgbClr val="333333"/>
-                </a:solidFill>
-                <a:latin typeface="Calibri"/>
-              </a:rPr>
-              <a:t>–   </a:t>
-            </a:r>
-            <a:r>
-              <a:rPr sz="2000" b="1" i="0">
-                <a:solidFill>
-                  <a:srgbClr val="333333"/>
-                </a:solidFill>
-                <a:latin typeface="Calibri"/>
-              </a:rPr>
-              <a:t>Demo:</a:t>
-            </a:r>
-            <a:r>
-              <a:rPr sz="2000" b="0" i="0">
-                <a:solidFill>
-                  <a:srgbClr val="333333"/>
-                </a:solidFill>
-                <a:latin typeface="Calibri"/>
-              </a:rPr>
-              <a:t> El docente toma el RF-03 del catalogo, lo convierte en vivo en historia con criterios y luego muestra una historia partida por capas para tumbarla con INVEST.</a:t>
+              <a:rPr sz="1400" b="0" i="0">
+                <a:solidFill>
+                  <a:srgbClr val="FFFFFF"/>
+                </a:solidFill>
+                <a:latin typeface="Calibri"/>
+              </a:rPr>
+              <a:t>  E1[EPICA 1 - Agenda]</a:t>
             </a:r>
           </a:p>
           <a:p>
             <a:pPr>
               <a:spcAft>
-                <a:spcPts val="800"/>
+                <a:spcPts val="400"/>
               </a:spcAft>
             </a:pPr>
             <a:r>
-              <a:rPr sz="2000" b="0" i="0">
-                <a:solidFill>
-                  <a:srgbClr val="333333"/>
-                </a:solidFill>
-                <a:latin typeface="Calibri"/>
-              </a:rPr>
-              <a:t>–   Mismo dominio VetCare — no otro ejemplo. Aqui se diseña, no se programa.</a:t>
-            </a:r>
-          </a:p>
-        </p:txBody>
-      </p:sp>
-      <p:sp>
-        <p:nvSpPr>
-          <p:cNvPr id="6" name="TextBox 5"/>
+              <a:rPr sz="1400" b="0" i="0">
+                <a:solidFill>
+                  <a:srgbClr val="FFFFFF"/>
+                </a:solidFill>
+                <a:latin typeface="Calibri"/>
+              </a:rPr>
+              <a:t>  E2[EPICA 2 - Expediente]</a:t>
+            </a:r>
+          </a:p>
+          <a:p>
+            <a:pPr>
+              <a:spcAft>
+                <a:spcPts val="400"/>
+              </a:spcAft>
+            </a:pPr>
+            <a:r>
+              <a:rPr sz="1400" b="0" i="0">
+                <a:solidFill>
+                  <a:srgbClr val="FFFFFF"/>
+                </a:solidFill>
+                <a:latin typeface="Calibri"/>
+              </a:rPr>
+              <a:t/>
+            </a:r>
+          </a:p>
+          <a:p>
+            <a:pPr>
+              <a:spcAft>
+                <a:spcPts val="400"/>
+              </a:spcAft>
+            </a:pPr>
+            <a:r>
+              <a:rPr sz="1400" b="0" i="0">
+                <a:solidFill>
+                  <a:srgbClr val="FFFFFF"/>
+                </a:solidFill>
+                <a:latin typeface="Calibri"/>
+              </a:rPr>
+              <a:t>  E1 --&gt; H1[HU-01 Registrar dueno&lt;br/&gt;3 pts]</a:t>
+            </a:r>
+          </a:p>
+          <a:p>
+            <a:pPr>
+              <a:spcAft>
+                <a:spcPts val="400"/>
+              </a:spcAft>
+            </a:pPr>
+            <a:r>
+              <a:rPr sz="1400" b="0" i="0">
+                <a:solidFill>
+                  <a:srgbClr val="FFFFFF"/>
+                </a:solidFill>
+                <a:latin typeface="Calibri"/>
+              </a:rPr>
+              <a:t>  E1 --&gt; H2[HU-02 Registrar mascota&lt;br/&gt;5 pts]</a:t>
+            </a:r>
+          </a:p>
+          <a:p>
+            <a:pPr>
+              <a:spcAft>
+                <a:spcPts val="400"/>
+              </a:spcAft>
+            </a:pPr>
+            <a:r>
+              <a:rPr sz="1400" b="0" i="0">
+                <a:solidFill>
+                  <a:srgbClr val="FFFFFF"/>
+                </a:solidFill>
+                <a:latin typeface="Calibri"/>
+              </a:rPr>
+              <a:t>  E1 --&gt; H3[HU-03 Agendar cita&lt;br/&gt;8 pts]</a:t>
+            </a:r>
+          </a:p>
+          <a:p>
+            <a:pPr>
+              <a:spcAft>
+                <a:spcPts val="400"/>
+              </a:spcAft>
+            </a:pPr>
+            <a:r>
+              <a:rPr sz="1400" b="0" i="0">
+                <a:solidFill>
+                  <a:srgbClr val="FFFFFF"/>
+                </a:solidFill>
+                <a:latin typeface="Calibri"/>
+              </a:rPr>
+              <a:t>  E2 --&gt; H4[HU-04 Abrir expediente&lt;br/&gt;5 pts]</a:t>
+            </a:r>
+          </a:p>
+          <a:p>
+            <a:pPr>
+              <a:spcAft>
+                <a:spcPts val="400"/>
+              </a:spcAft>
+            </a:pPr>
+            <a:r>
+              <a:rPr sz="1400" b="0" i="0">
+                <a:solidFill>
+                  <a:srgbClr val="FFFFFF"/>
+                </a:solidFill>
+                <a:latin typeface="Calibri"/>
+              </a:rPr>
+              <a:t/>
+            </a:r>
+          </a:p>
+          <a:p>
+            <a:pPr>
+              <a:spcAft>
+                <a:spcPts val="400"/>
+              </a:spcAft>
+            </a:pPr>
+            <a:r>
+              <a:rPr sz="1400" b="0" i="0">
+                <a:solidFill>
+                  <a:srgbClr val="FFFFFF"/>
+                </a:solidFill>
+                <a:latin typeface="Calibri"/>
+              </a:rPr>
+              <a:t>%% Los puntos son RELATIVOS, no horas: HU-03 es «como HU-02 pero mas»,</a:t>
+            </a:r>
+          </a:p>
+          <a:p>
+            <a:pPr>
+              <a:spcAft>
+                <a:spcPts val="400"/>
+              </a:spcAft>
+            </a:pPr>
+            <a:r>
+              <a:rPr sz="1400" b="0" i="0">
+                <a:solidFill>
+                  <a:srgbClr val="FFFFFF"/>
+                </a:solidFill>
+                <a:latin typeface="Calibri"/>
+              </a:rPr>
+              <a:t>%% y esa comparacion es toda la estimacion que se pide hoy.</a:t>
+            </a:r>
+          </a:p>
+          <a:p>
+            <a:pPr>
+              <a:spcAft>
+                <a:spcPts val="400"/>
+              </a:spcAft>
+            </a:pPr>
+            <a:r>
+              <a:rPr sz="1400" b="0" i="0">
+                <a:solidFill>
+                  <a:srgbClr val="FFFFFF"/>
+                </a:solidFill>
+                <a:latin typeface="Calibri"/>
+              </a:rPr>
+              <a:t>%% El orden del backlog sale del valor, no del numero de puntos.</a:t>
+            </a:r>
+          </a:p>
+        </p:txBody>
+      </p:sp>
+      <p:sp>
+        <p:nvSpPr>
+          <p:cNvPr id="9" name="TextBox 8"/>
           <p:cNvSpPr txBox="1"/>
           <p:nvPr/>
         </p:nvSpPr>
@@ -5353,7 +5628,7 @@
         <p:spPr>
           <a:xfrm>
             <a:off x="0" y="0"/>
-            <a:ext cx="12191695" cy="1170432"/>
+            <a:ext cx="12191695" cy="960120"/>
           </a:xfrm>
           <a:prstGeom prst="rect">
             <a:avLst/>
@@ -5395,7 +5670,7 @@
         </p:nvSpPr>
         <p:spPr>
           <a:xfrm>
-            <a:off x="0" y="1170432"/>
+            <a:off x="0" y="960120"/>
             <a:ext cx="12191695" cy="41148"/>
           </a:xfrm>
           <a:prstGeom prst="rect">
@@ -5439,7 +5714,7 @@
         <p:spPr>
           <a:xfrm>
             <a:off x="457200" y="164592"/>
-            <a:ext cx="11277295" cy="384048"/>
+            <a:ext cx="11277295" cy="502920"/>
           </a:xfrm>
           <a:prstGeom prst="rect">
             <a:avLst/>
@@ -5459,55 +5734,21 @@
                 </a:solidFill>
                 <a:latin typeface="Calibri"/>
               </a:rPr>
-              <a:t>Herramientas de hoy</a:t>
-            </a:r>
-          </a:p>
-        </p:txBody>
-      </p:sp>
-      <p:sp>
-        <p:nvSpPr>
-          <p:cNvPr id="5" name="TextBox 4"/>
-          <p:cNvSpPr txBox="1"/>
-          <p:nvPr/>
-        </p:nvSpPr>
-        <p:spPr>
-          <a:xfrm>
-            <a:off x="457200" y="566928"/>
-            <a:ext cx="11277295" cy="411480"/>
-          </a:xfrm>
-          <a:prstGeom prst="rect">
-            <a:avLst/>
-          </a:prstGeom>
-          <a:noFill/>
-        </p:spPr>
-        <p:txBody>
-          <a:bodyPr wrap="square">
-            <a:spAutoFit/>
-          </a:bodyPr>
-          <a:lstStyle/>
-          <a:p>
-            <a:r>
-              <a:rPr sz="1400" b="0" i="0">
-                <a:solidFill>
-                  <a:srgbClr val="B8D8EE"/>
-                </a:solidFill>
-                <a:latin typeface="Calibri"/>
-              </a:rPr>
-              <a:t>Gratis · funcionan en el navegador</a:t>
-            </a:r>
-          </a:p>
-        </p:txBody>
-      </p:sp>
-      <p:sp>
-        <p:nvSpPr>
-          <p:cNvPr id="6" name="Rounded Rectangle 5"/>
+              <a:t>Historia HU-04 con criterios de aceptacion (artefacto proyectable)</a:t>
+            </a:r>
+          </a:p>
+        </p:txBody>
+      </p:sp>
+      <p:sp>
+        <p:nvSpPr>
+          <p:cNvPr id="5" name="Rounded Rectangle 4"/>
           <p:cNvSpPr/>
           <p:nvPr/>
         </p:nvSpPr>
         <p:spPr>
           <a:xfrm>
-            <a:off x="457200" y="1591056"/>
-            <a:ext cx="3624986" cy="2331720"/>
+            <a:off x="457200" y="1261872"/>
+            <a:ext cx="11277295" cy="4773168"/>
           </a:xfrm>
           <a:prstGeom prst="roundRect">
             <a:avLst>
@@ -5515,7 +5756,7 @@
             </a:avLst>
           </a:prstGeom>
           <a:solidFill>
-            <a:srgbClr val="F2F2F2"/>
+            <a:srgbClr val="1E2A38"/>
           </a:solidFill>
           <a:ln>
             <a:noFill/>
@@ -5545,14 +5786,14 @@
       </p:sp>
       <p:sp>
         <p:nvSpPr>
-          <p:cNvPr id="7" name="Rectangle 6"/>
+          <p:cNvPr id="6" name="Rectangle 5"/>
           <p:cNvSpPr/>
           <p:nvPr/>
         </p:nvSpPr>
         <p:spPr>
           <a:xfrm>
-            <a:off x="457200" y="1591056"/>
-            <a:ext cx="3624986" cy="64008"/>
+            <a:off x="457200" y="1261872"/>
+            <a:ext cx="11277295" cy="320040"/>
           </a:xfrm>
           <a:prstGeom prst="rect">
             <a:avLst/>
@@ -5588,531 +5829,289 @@
       </p:sp>
       <p:sp>
         <p:nvSpPr>
-          <p:cNvPr id="8" name="Rectangle 7"/>
-          <p:cNvSpPr/>
-          <p:nvPr/>
-        </p:nvSpPr>
-        <p:spPr>
-          <a:xfrm>
-            <a:off x="457200" y="1655064"/>
-            <a:ext cx="3624986" cy="27432"/>
-          </a:xfrm>
-          <a:prstGeom prst="rect">
-            <a:avLst/>
-          </a:prstGeom>
-          <a:solidFill>
-            <a:srgbClr val="FFD000"/>
-          </a:solidFill>
-          <a:ln>
-            <a:noFill/>
-          </a:ln>
-        </p:spPr>
-        <p:style>
-          <a:lnRef idx="1">
-            <a:schemeClr val="accent1"/>
-          </a:lnRef>
-          <a:fillRef idx="3">
-            <a:schemeClr val="accent1"/>
-          </a:fillRef>
-          <a:effectRef idx="2">
-            <a:schemeClr val="accent1"/>
-          </a:effectRef>
-          <a:fontRef idx="minor">
-            <a:schemeClr val="lt1"/>
-          </a:fontRef>
-        </p:style>
-        <p:txBody>
-          <a:bodyPr rtlCol="0" anchor="ctr"/>
+          <p:cNvPr id="7" name="TextBox 6"/>
+          <p:cNvSpPr txBox="1"/>
+          <p:nvPr/>
+        </p:nvSpPr>
+        <p:spPr>
+          <a:xfrm>
+            <a:off x="685800" y="1307592"/>
+            <a:ext cx="10820095" cy="256032"/>
+          </a:xfrm>
+          <a:prstGeom prst="rect">
+            <a:avLst/>
+          </a:prstGeom>
+          <a:noFill/>
+        </p:spPr>
+        <p:txBody>
+          <a:bodyPr wrap="square" anchor="ctr"/>
+          <a:lstStyle/>
+          <a:p>
+            <a:r>
+              <a:rPr sz="1000" b="1" i="0">
+                <a:solidFill>
+                  <a:srgbClr val="269CCB"/>
+                </a:solidFill>
+                <a:latin typeface="Calibri"/>
+              </a:rPr>
+              <a:t>● ● ●</a:t>
+            </a:r>
+          </a:p>
+        </p:txBody>
+      </p:sp>
+      <p:sp>
+        <p:nvSpPr>
+          <p:cNvPr id="8" name="TextBox 7"/>
+          <p:cNvSpPr txBox="1"/>
+          <p:nvPr/>
+        </p:nvSpPr>
+        <p:spPr>
+          <a:xfrm>
+            <a:off x="777240" y="1719072"/>
+            <a:ext cx="10637215" cy="4133087"/>
+          </a:xfrm>
+          <a:prstGeom prst="rect">
+            <a:avLst/>
+          </a:prstGeom>
+          <a:noFill/>
+        </p:spPr>
+        <p:txBody>
+          <a:bodyPr wrap="square">
+            <a:spAutoFit/>
+          </a:bodyPr>
+          <a:lstStyle/>
+          <a:p>
+            <a:pPr>
+              <a:spcAft>
+                <a:spcPts val="400"/>
+              </a:spcAft>
+            </a:pPr>
+            <a:r>
+              <a:rPr sz="1400" b="0" i="0">
+                <a:solidFill>
+                  <a:srgbClr val="FFFFFF"/>
+                </a:solidFill>
+                <a:latin typeface="Calibri"/>
+              </a:rPr>
+              <a:t>HU-04  [Epica: E-02 Historial y agenda]</a:t>
+            </a:r>
+          </a:p>
+          <a:p>
+            <a:pPr>
+              <a:spcAft>
+                <a:spcPts val="400"/>
+              </a:spcAft>
+            </a:pPr>
+            <a:r>
+              <a:rPr sz="1400" b="0" i="0">
+                <a:solidFill>
+                  <a:srgbClr val="FFFFFF"/>
+                </a:solidFill>
+                <a:latin typeface="Calibri"/>
+              </a:rPr>
+              <a:t>Como veterinario de la clinica Huellitas</a:t>
+            </a:r>
+          </a:p>
+          <a:p>
+            <a:pPr>
+              <a:spcAft>
+                <a:spcPts val="400"/>
+              </a:spcAft>
+            </a:pPr>
+            <a:r>
+              <a:rPr sz="1400" b="0" i="0">
+                <a:solidFill>
+                  <a:srgbClr val="FFFFFF"/>
+                </a:solidFill>
+                <a:latin typeface="Calibri"/>
+              </a:rPr>
+              <a:t>quiero consultar el historial de atenciones de una mascota por el documento del dueno</a:t>
+            </a:r>
+          </a:p>
+          <a:p>
+            <a:pPr>
+              <a:spcAft>
+                <a:spcPts val="400"/>
+              </a:spcAft>
+            </a:pPr>
+            <a:r>
+              <a:rPr sz="1400" b="0" i="0">
+                <a:solidFill>
+                  <a:srgbClr val="FFFFFF"/>
+                </a:solidFill>
+                <a:latin typeface="Calibri"/>
+              </a:rPr>
+              <a:t>para decidir el tratamiento sin depender de la carpeta fisica.</a:t>
+            </a:r>
+          </a:p>
+          <a:p>
+            <a:pPr>
+              <a:spcAft>
+                <a:spcPts val="400"/>
+              </a:spcAft>
+            </a:pPr>
+            <a:r>
+              <a:rPr sz="1400" b="0" i="0">
+                <a:solidFill>
+                  <a:srgbClr val="FFFFFF"/>
+                </a:solidFill>
+                <a:latin typeface="Calibri"/>
+              </a:rPr>
+              <a:t/>
+            </a:r>
+          </a:p>
+          <a:p>
+            <a:pPr>
+              <a:spcAft>
+                <a:spcPts val="400"/>
+              </a:spcAft>
+            </a:pPr>
+            <a:r>
+              <a:rPr sz="1400" b="0" i="0">
+                <a:solidFill>
+                  <a:srgbClr val="FFFFFF"/>
+                </a:solidFill>
+                <a:latin typeface="Calibri"/>
+              </a:rPr>
+              <a:t>Criterios de aceptacion</a:t>
+            </a:r>
+          </a:p>
+          <a:p>
+            <a:pPr>
+              <a:spcAft>
+                <a:spcPts val="400"/>
+              </a:spcAft>
+            </a:pPr>
+            <a:r>
+              <a:rPr sz="1400" b="0" i="0">
+                <a:solidFill>
+                  <a:srgbClr val="FFFFFF"/>
+                </a:solidFill>
+                <a:latin typeface="Calibri"/>
+              </a:rPr>
+              <a:t>CA-1  Dado un dueno con 3 mascotas registradas, cuando busco por su documento, entonces el sistema lista las 3 mascotas con nombre y especie.</a:t>
+            </a:r>
+          </a:p>
+          <a:p>
+            <a:pPr>
+              <a:spcAft>
+                <a:spcPts val="400"/>
+              </a:spcAft>
+            </a:pPr>
+            <a:r>
+              <a:rPr sz="1400" b="0" i="0">
+                <a:solidFill>
+                  <a:srgbClr val="FFFFFF"/>
+                </a:solidFill>
+                <a:latin typeface="Calibri"/>
+              </a:rPr>
+              <a:t>CA-2  Dado que selecciono la mascota Rocky, cuando abro su historial, entonces veo sus atenciones de la mas reciente a la mas antigua.</a:t>
+            </a:r>
+          </a:p>
+          <a:p>
+            <a:pPr>
+              <a:spcAft>
+                <a:spcPts val="400"/>
+              </a:spcAft>
+            </a:pPr>
+            <a:r>
+              <a:rPr sz="1400" b="0" i="0">
+                <a:solidFill>
+                  <a:srgbClr val="FFFFFF"/>
+                </a:solidFill>
+                <a:latin typeface="Calibri"/>
+              </a:rPr>
+              <a:t>CA-3  Dado un documento no registrado, cuando busco, entonces el sistema muestra 'No hay duenos con ese documento' y ofrece crear uno.</a:t>
+            </a:r>
+          </a:p>
+          <a:p>
+            <a:pPr>
+              <a:spcAft>
+                <a:spcPts val="400"/>
+              </a:spcAft>
+            </a:pPr>
+            <a:r>
+              <a:rPr sz="1400" b="0" i="0">
+                <a:solidFill>
+                  <a:srgbClr val="FFFFFF"/>
+                </a:solidFill>
+                <a:latin typeface="Calibri"/>
+              </a:rPr>
+              <a:t/>
+            </a:r>
+          </a:p>
+          <a:p>
+            <a:pPr>
+              <a:spcAft>
+                <a:spcPts val="400"/>
+              </a:spcAft>
+            </a:pPr>
+            <a:r>
+              <a:rPr sz="1400" b="0" i="0">
+                <a:solidFill>
+                  <a:srgbClr val="FFFFFF"/>
+                </a:solidFill>
+                <a:latin typeface="Calibri"/>
+              </a:rPr>
+              <a:t>Estimacion: 5 puntos   |   Prioridad: Must   |   Origen: RF-03 / NEC-02</a:t>
+            </a:r>
+          </a:p>
+          <a:p>
+            <a:pPr>
+              <a:spcAft>
+                <a:spcPts val="400"/>
+              </a:spcAft>
+            </a:pPr>
+            <a:r>
+              <a:rPr sz="1400" b="0" i="0">
+                <a:solidFill>
+                  <a:srgbClr val="FFFFFF"/>
+                </a:solidFill>
+                <a:latin typeface="Calibri"/>
+              </a:rPr>
+              <a:t>Definicion de terminado: mockup aprobado + los 3 criterios verificados en el prototipo navegable</a:t>
+            </a:r>
+          </a:p>
+        </p:txBody>
+      </p:sp>
+      <p:sp>
+        <p:nvSpPr>
+          <p:cNvPr id="9" name="TextBox 8"/>
+          <p:cNvSpPr txBox="1"/>
+          <p:nvPr/>
+        </p:nvSpPr>
+        <p:spPr>
+          <a:xfrm>
+            <a:off x="457200" y="6080760"/>
+            <a:ext cx="11277295" cy="320040"/>
+          </a:xfrm>
+          <a:prstGeom prst="rect">
+            <a:avLst/>
+          </a:prstGeom>
+          <a:noFill/>
+        </p:spPr>
+        <p:txBody>
+          <a:bodyPr wrap="square">
+            <a:spAutoFit/>
+          </a:bodyPr>
           <a:lstStyle/>
           <a:p>
             <a:pPr algn="ctr"/>
-          </a:p>
-        </p:txBody>
-      </p:sp>
-      <p:pic>
-        <p:nvPicPr>
-          <p:cNvPr id="9" name="Picture 8" descr="excalidraw.png"/>
-          <p:cNvPicPr>
-            <a:picLocks noChangeAspect="1"/>
-          </p:cNvPicPr>
-          <p:nvPr/>
-        </p:nvPicPr>
-        <p:blipFill>
-          <a:blip r:embed="rId2"/>
-          <a:stretch>
-            <a:fillRect/>
-          </a:stretch>
-        </p:blipFill>
-        <p:spPr>
-          <a:xfrm>
-            <a:off x="1643329" y="1847087"/>
-            <a:ext cx="1252728" cy="1252728"/>
-          </a:xfrm>
-          <a:prstGeom prst="rect">
-            <a:avLst/>
-          </a:prstGeom>
-        </p:spPr>
-      </p:pic>
+            <a:r>
+              <a:rPr sz="1200" b="0" i="1">
+                <a:solidFill>
+                  <a:srgbClr val="666666"/>
+                </a:solidFill>
+                <a:latin typeface="Calibri"/>
+              </a:rPr>
+              <a:t>La historia dice a quien le sirve y para que; los criterios de aceptacion son la unica parte que se puede cobrar.</a:t>
+            </a:r>
+          </a:p>
+        </p:txBody>
+      </p:sp>
       <p:sp>
         <p:nvSpPr>
           <p:cNvPr id="10" name="TextBox 9"/>
-          <p:cNvSpPr txBox="1"/>
-          <p:nvPr/>
-        </p:nvSpPr>
-        <p:spPr>
-          <a:xfrm>
-            <a:off x="530352" y="3191256"/>
-            <a:ext cx="3478682" cy="621792"/>
-          </a:xfrm>
-          <a:prstGeom prst="rect">
-            <a:avLst/>
-          </a:prstGeom>
-          <a:noFill/>
-        </p:spPr>
-        <p:txBody>
-          <a:bodyPr wrap="square" anchor="t"/>
-          <a:lstStyle/>
-          <a:p>
-            <a:pPr algn="ctr"/>
-            <a:r>
-              <a:rPr sz="1300" b="1" i="0">
-                <a:solidFill>
-                  <a:srgbClr val="095292"/>
-                </a:solidFill>
-                <a:latin typeface="Calibri"/>
-              </a:rPr>
-              <a:t>Excalidraw</a:t>
-            </a:r>
-          </a:p>
-          <a:p>
-            <a:pPr algn="ctr">
-              <a:spcBef>
-                <a:spcPts val="200"/>
-              </a:spcBef>
-            </a:pPr>
-            <a:r>
-              <a:rPr sz="1000" b="0" i="0">
-                <a:solidFill>
-                  <a:srgbClr val="666666"/>
-                </a:solidFill>
-                <a:latin typeface="Calibri"/>
-              </a:rPr>
-              <a:t>Bocetos rapidos a mano alzada</a:t>
-            </a:r>
-          </a:p>
-        </p:txBody>
-      </p:sp>
-      <p:sp>
-        <p:nvSpPr>
-          <p:cNvPr id="11" name="Rounded Rectangle 10"/>
-          <p:cNvSpPr/>
-          <p:nvPr/>
-        </p:nvSpPr>
-        <p:spPr>
-          <a:xfrm>
-            <a:off x="4283354" y="1591056"/>
-            <a:ext cx="3624986" cy="2331720"/>
-          </a:xfrm>
-          <a:prstGeom prst="roundRect">
-            <a:avLst>
-              <a:gd name="adj" fmla="val 12000"/>
-            </a:avLst>
-          </a:prstGeom>
-          <a:solidFill>
-            <a:srgbClr val="F2F2F2"/>
-          </a:solidFill>
-          <a:ln>
-            <a:noFill/>
-          </a:ln>
-        </p:spPr>
-        <p:style>
-          <a:lnRef idx="1">
-            <a:schemeClr val="accent1"/>
-          </a:lnRef>
-          <a:fillRef idx="3">
-            <a:schemeClr val="accent1"/>
-          </a:fillRef>
-          <a:effectRef idx="2">
-            <a:schemeClr val="accent1"/>
-          </a:effectRef>
-          <a:fontRef idx="minor">
-            <a:schemeClr val="lt1"/>
-          </a:fontRef>
-        </p:style>
-        <p:txBody>
-          <a:bodyPr rtlCol="0" anchor="ctr"/>
-          <a:lstStyle/>
-          <a:p>
-            <a:pPr algn="ctr"/>
-          </a:p>
-        </p:txBody>
-      </p:sp>
-      <p:sp>
-        <p:nvSpPr>
-          <p:cNvPr id="12" name="Rectangle 11"/>
-          <p:cNvSpPr/>
-          <p:nvPr/>
-        </p:nvSpPr>
-        <p:spPr>
-          <a:xfrm>
-            <a:off x="4283354" y="1591056"/>
-            <a:ext cx="3624986" cy="64008"/>
-          </a:xfrm>
-          <a:prstGeom prst="rect">
-            <a:avLst/>
-          </a:prstGeom>
-          <a:solidFill>
-            <a:srgbClr val="095292"/>
-          </a:solidFill>
-          <a:ln>
-            <a:noFill/>
-          </a:ln>
-        </p:spPr>
-        <p:style>
-          <a:lnRef idx="1">
-            <a:schemeClr val="accent1"/>
-          </a:lnRef>
-          <a:fillRef idx="3">
-            <a:schemeClr val="accent1"/>
-          </a:fillRef>
-          <a:effectRef idx="2">
-            <a:schemeClr val="accent1"/>
-          </a:effectRef>
-          <a:fontRef idx="minor">
-            <a:schemeClr val="lt1"/>
-          </a:fontRef>
-        </p:style>
-        <p:txBody>
-          <a:bodyPr rtlCol="0" anchor="ctr"/>
-          <a:lstStyle/>
-          <a:p>
-            <a:pPr algn="ctr"/>
-          </a:p>
-        </p:txBody>
-      </p:sp>
-      <p:sp>
-        <p:nvSpPr>
-          <p:cNvPr id="13" name="Rectangle 12"/>
-          <p:cNvSpPr/>
-          <p:nvPr/>
-        </p:nvSpPr>
-        <p:spPr>
-          <a:xfrm>
-            <a:off x="4283354" y="1655064"/>
-            <a:ext cx="3624986" cy="27432"/>
-          </a:xfrm>
-          <a:prstGeom prst="rect">
-            <a:avLst/>
-          </a:prstGeom>
-          <a:solidFill>
-            <a:srgbClr val="FFD000"/>
-          </a:solidFill>
-          <a:ln>
-            <a:noFill/>
-          </a:ln>
-        </p:spPr>
-        <p:style>
-          <a:lnRef idx="1">
-            <a:schemeClr val="accent1"/>
-          </a:lnRef>
-          <a:fillRef idx="3">
-            <a:schemeClr val="accent1"/>
-          </a:fillRef>
-          <a:effectRef idx="2">
-            <a:schemeClr val="accent1"/>
-          </a:effectRef>
-          <a:fontRef idx="minor">
-            <a:schemeClr val="lt1"/>
-          </a:fontRef>
-        </p:style>
-        <p:txBody>
-          <a:bodyPr rtlCol="0" anchor="ctr"/>
-          <a:lstStyle/>
-          <a:p>
-            <a:pPr algn="ctr"/>
-          </a:p>
-        </p:txBody>
-      </p:sp>
-      <p:pic>
-        <p:nvPicPr>
-          <p:cNvPr id="14" name="Picture 13" descr="google_docs.png"/>
-          <p:cNvPicPr>
-            <a:picLocks noChangeAspect="1"/>
-          </p:cNvPicPr>
-          <p:nvPr/>
-        </p:nvPicPr>
-        <p:blipFill>
-          <a:blip r:embed="rId3"/>
-          <a:stretch>
-            <a:fillRect/>
-          </a:stretch>
-        </p:blipFill>
-        <p:spPr>
-          <a:xfrm>
-            <a:off x="5469483" y="1847087"/>
-            <a:ext cx="1252728" cy="1252728"/>
-          </a:xfrm>
-          <a:prstGeom prst="rect">
-            <a:avLst/>
-          </a:prstGeom>
-        </p:spPr>
-      </p:pic>
-      <p:sp>
-        <p:nvSpPr>
-          <p:cNvPr id="15" name="TextBox 14"/>
-          <p:cNvSpPr txBox="1"/>
-          <p:nvPr/>
-        </p:nvSpPr>
-        <p:spPr>
-          <a:xfrm>
-            <a:off x="4356506" y="3191256"/>
-            <a:ext cx="3478682" cy="621792"/>
-          </a:xfrm>
-          <a:prstGeom prst="rect">
-            <a:avLst/>
-          </a:prstGeom>
-          <a:noFill/>
-        </p:spPr>
-        <p:txBody>
-          <a:bodyPr wrap="square" anchor="t"/>
-          <a:lstStyle/>
-          <a:p>
-            <a:pPr algn="ctr"/>
-            <a:r>
-              <a:rPr sz="1300" b="1" i="0">
-                <a:solidFill>
-                  <a:srgbClr val="095292"/>
-                </a:solidFill>
-                <a:latin typeface="Calibri"/>
-              </a:rPr>
-              <a:t>google docs</a:t>
-            </a:r>
-          </a:p>
-          <a:p>
-            <a:pPr algn="ctr">
-              <a:spcBef>
-                <a:spcPts val="200"/>
-              </a:spcBef>
-            </a:pPr>
-            <a:r>
-              <a:rPr sz="1000" b="0" i="0">
-                <a:solidFill>
-                  <a:srgbClr val="666666"/>
-                </a:solidFill>
-                <a:latin typeface="Calibri"/>
-              </a:rPr>
-              <a:t>Documentos del paquete de diseño</a:t>
-            </a:r>
-          </a:p>
-        </p:txBody>
-      </p:sp>
-      <p:sp>
-        <p:nvSpPr>
-          <p:cNvPr id="16" name="Rounded Rectangle 15"/>
-          <p:cNvSpPr/>
-          <p:nvPr/>
-        </p:nvSpPr>
-        <p:spPr>
-          <a:xfrm>
-            <a:off x="8109508" y="1591056"/>
-            <a:ext cx="3624986" cy="2331720"/>
-          </a:xfrm>
-          <a:prstGeom prst="roundRect">
-            <a:avLst>
-              <a:gd name="adj" fmla="val 12000"/>
-            </a:avLst>
-          </a:prstGeom>
-          <a:solidFill>
-            <a:srgbClr val="F2F2F2"/>
-          </a:solidFill>
-          <a:ln>
-            <a:noFill/>
-          </a:ln>
-        </p:spPr>
-        <p:style>
-          <a:lnRef idx="1">
-            <a:schemeClr val="accent1"/>
-          </a:lnRef>
-          <a:fillRef idx="3">
-            <a:schemeClr val="accent1"/>
-          </a:fillRef>
-          <a:effectRef idx="2">
-            <a:schemeClr val="accent1"/>
-          </a:effectRef>
-          <a:fontRef idx="minor">
-            <a:schemeClr val="lt1"/>
-          </a:fontRef>
-        </p:style>
-        <p:txBody>
-          <a:bodyPr rtlCol="0" anchor="ctr"/>
-          <a:lstStyle/>
-          <a:p>
-            <a:pPr algn="ctr"/>
-          </a:p>
-        </p:txBody>
-      </p:sp>
-      <p:sp>
-        <p:nvSpPr>
-          <p:cNvPr id="17" name="Rectangle 16"/>
-          <p:cNvSpPr/>
-          <p:nvPr/>
-        </p:nvSpPr>
-        <p:spPr>
-          <a:xfrm>
-            <a:off x="8109508" y="1591056"/>
-            <a:ext cx="3624986" cy="64008"/>
-          </a:xfrm>
-          <a:prstGeom prst="rect">
-            <a:avLst/>
-          </a:prstGeom>
-          <a:solidFill>
-            <a:srgbClr val="095292"/>
-          </a:solidFill>
-          <a:ln>
-            <a:noFill/>
-          </a:ln>
-        </p:spPr>
-        <p:style>
-          <a:lnRef idx="1">
-            <a:schemeClr val="accent1"/>
-          </a:lnRef>
-          <a:fillRef idx="3">
-            <a:schemeClr val="accent1"/>
-          </a:fillRef>
-          <a:effectRef idx="2">
-            <a:schemeClr val="accent1"/>
-          </a:effectRef>
-          <a:fontRef idx="minor">
-            <a:schemeClr val="lt1"/>
-          </a:fontRef>
-        </p:style>
-        <p:txBody>
-          <a:bodyPr rtlCol="0" anchor="ctr"/>
-          <a:lstStyle/>
-          <a:p>
-            <a:pPr algn="ctr"/>
-          </a:p>
-        </p:txBody>
-      </p:sp>
-      <p:sp>
-        <p:nvSpPr>
-          <p:cNvPr id="18" name="Rectangle 17"/>
-          <p:cNvSpPr/>
-          <p:nvPr/>
-        </p:nvSpPr>
-        <p:spPr>
-          <a:xfrm>
-            <a:off x="8109508" y="1655064"/>
-            <a:ext cx="3624986" cy="27432"/>
-          </a:xfrm>
-          <a:prstGeom prst="rect">
-            <a:avLst/>
-          </a:prstGeom>
-          <a:solidFill>
-            <a:srgbClr val="FFD000"/>
-          </a:solidFill>
-          <a:ln>
-            <a:noFill/>
-          </a:ln>
-        </p:spPr>
-        <p:style>
-          <a:lnRef idx="1">
-            <a:schemeClr val="accent1"/>
-          </a:lnRef>
-          <a:fillRef idx="3">
-            <a:schemeClr val="accent1"/>
-          </a:fillRef>
-          <a:effectRef idx="2">
-            <a:schemeClr val="accent1"/>
-          </a:effectRef>
-          <a:fontRef idx="minor">
-            <a:schemeClr val="lt1"/>
-          </a:fontRef>
-        </p:style>
-        <p:txBody>
-          <a:bodyPr rtlCol="0" anchor="ctr"/>
-          <a:lstStyle/>
-          <a:p>
-            <a:pPr algn="ctr"/>
-          </a:p>
-        </p:txBody>
-      </p:sp>
-      <p:pic>
-        <p:nvPicPr>
-          <p:cNvPr id="19" name="Picture 18" descr="examlab.png"/>
-          <p:cNvPicPr>
-            <a:picLocks noChangeAspect="1"/>
-          </p:cNvPicPr>
-          <p:nvPr/>
-        </p:nvPicPr>
-        <p:blipFill>
-          <a:blip r:embed="rId4"/>
-          <a:stretch>
-            <a:fillRect/>
-          </a:stretch>
-        </p:blipFill>
-        <p:spPr>
-          <a:xfrm>
-            <a:off x="9295638" y="1847087"/>
-            <a:ext cx="1252728" cy="1252728"/>
-          </a:xfrm>
-          <a:prstGeom prst="rect">
-            <a:avLst/>
-          </a:prstGeom>
-        </p:spPr>
-      </p:pic>
-      <p:sp>
-        <p:nvSpPr>
-          <p:cNvPr id="20" name="TextBox 19"/>
-          <p:cNvSpPr txBox="1"/>
-          <p:nvPr/>
-        </p:nvSpPr>
-        <p:spPr>
-          <a:xfrm>
-            <a:off x="8182660" y="3191256"/>
-            <a:ext cx="3478682" cy="621792"/>
-          </a:xfrm>
-          <a:prstGeom prst="rect">
-            <a:avLst/>
-          </a:prstGeom>
-          <a:noFill/>
-        </p:spPr>
-        <p:txBody>
-          <a:bodyPr wrap="square" anchor="t"/>
-          <a:lstStyle/>
-          <a:p>
-            <a:pPr algn="ctr"/>
-            <a:r>
-              <a:rPr sz="1300" b="1" i="0">
-                <a:solidFill>
-                  <a:srgbClr val="095292"/>
-                </a:solidFill>
-                <a:latin typeface="Calibri"/>
-              </a:rPr>
-              <a:t>la plataforma del curso</a:t>
-            </a:r>
-          </a:p>
-          <a:p>
-            <a:pPr algn="ctr">
-              <a:spcBef>
-                <a:spcPts val="200"/>
-              </a:spcBef>
-            </a:pPr>
-            <a:r>
-              <a:rPr sz="1000" b="0" i="0">
-                <a:solidFill>
-                  <a:srgbClr val="666666"/>
-                </a:solidFill>
-                <a:latin typeface="Calibri"/>
-              </a:rPr>
-              <a:t>Entrega del taller · en la fecha que indique el docente</a:t>
-            </a:r>
-          </a:p>
-        </p:txBody>
-      </p:sp>
-      <p:sp>
-        <p:nvSpPr>
-          <p:cNvPr id="21" name="TextBox 20"/>
           <p:cNvSpPr txBox="1"/>
           <p:nvPr/>
         </p:nvSpPr>
@@ -6286,7 +6285,7 @@
                 </a:solidFill>
                 <a:latin typeface="Calibri"/>
               </a:rPr>
-              <a:t>Taller PI — por que importa</a:t>
+              <a:t>Demo del dia</a:t>
             </a:r>
           </a:p>
         </p:txBody>
@@ -6334,7 +6333,7 @@
                 </a:solidFill>
                 <a:latin typeface="Calibri"/>
               </a:rPr>
-              <a:t>Por que importa al PI:</a:t>
+              <a:t>Herramienta:</a:t>
             </a:r>
             <a:r>
               <a:rPr sz="2000" b="0" i="0">
@@ -6343,7 +6342,7 @@
                 </a:solidFill>
                 <a:latin typeface="Calibri"/>
               </a:rPr>
-              <a:t> el backlog es la version ejecutable del catalogo de requisitos; es la lista con la que se decide que se disena primero y, en Programacion II, que se codifica primero.</a:t>
+              <a:t> Google Docs · Excalidraw</a:t>
             </a:r>
           </a:p>
           <a:p>
@@ -6359,7 +6358,25 @@
                 </a:solidFill>
                 <a:latin typeface="Calibri"/>
               </a:rPr>
-              <a:t>–   Los criterios de aceptacion que escriba hoy se vuelven literalmente el guion de revision del prototipo navegable y de las pruebas del sistema.</a:t>
+              <a:t>–   </a:t>
+            </a:r>
+            <a:r>
+              <a:rPr sz="2000" b="1" i="0">
+                <a:solidFill>
+                  <a:srgbClr val="333333"/>
+                </a:solidFill>
+                <a:latin typeface="Calibri"/>
+              </a:rPr>
+              <a:t>Demo:</a:t>
+            </a:r>
+            <a:r>
+              <a:rPr sz="2000" b="0" i="0">
+                <a:solidFill>
+                  <a:srgbClr val="333333"/>
+                </a:solidFill>
+                <a:latin typeface="Calibri"/>
+              </a:rPr>
+              <a:t> El docente toma el RF-03 del catalogo, lo convierte en vivo en historia con criterios y luego muestra una historia partida por capas para tumbarla con INVEST.</a:t>
             </a:r>
           </a:p>
           <a:p>
@@ -6375,7 +6392,7 @@
                 </a:solidFill>
                 <a:latin typeface="Calibri"/>
               </a:rPr>
-              <a:t>–   Una historia sin beneficio claro es una funcionalidad que nadie va a extranar si no se hace: aqui es donde se justifica cada pantalla de VetCare.</a:t>
+              <a:t>–   Mismo dominio VetCare — no otro ejemplo. Aqui se diseña, no se programa.</a:t>
             </a:r>
           </a:p>
         </p:txBody>
@@ -6450,7 +6467,7 @@
         <p:spPr>
           <a:xfrm>
             <a:off x="0" y="0"/>
-            <a:ext cx="12191695" cy="960120"/>
+            <a:ext cx="12191695" cy="1170432"/>
           </a:xfrm>
           <a:prstGeom prst="rect">
             <a:avLst/>
@@ -6492,7 +6509,7 @@
         </p:nvSpPr>
         <p:spPr>
           <a:xfrm>
-            <a:off x="0" y="960120"/>
+            <a:off x="0" y="1170432"/>
             <a:ext cx="12191695" cy="41148"/>
           </a:xfrm>
           <a:prstGeom prst="rect">
@@ -6536,7 +6553,7 @@
         <p:spPr>
           <a:xfrm>
             <a:off x="457200" y="164592"/>
-            <a:ext cx="11277295" cy="502920"/>
+            <a:ext cx="11277295" cy="384048"/>
           </a:xfrm>
           <a:prstGeom prst="rect">
             <a:avLst/>
@@ -6556,7 +6573,7 @@
                 </a:solidFill>
                 <a:latin typeface="Calibri"/>
               </a:rPr>
-              <a:t>Taller PI — punto de partida</a:t>
+              <a:t>Herramientas de hoy</a:t>
             </a:r>
           </a:p>
         </p:txBody>
@@ -6569,8 +6586,8 @@
         </p:nvSpPr>
         <p:spPr>
           <a:xfrm>
-            <a:off x="457200" y="1170432"/>
-            <a:ext cx="11277295" cy="5230368"/>
+            <a:off x="457200" y="566928"/>
+            <a:ext cx="11277295" cy="411480"/>
           </a:xfrm>
           <a:prstGeom prst="rect">
             <a:avLst/>
@@ -6583,58 +6600,633 @@
           </a:bodyPr>
           <a:lstStyle/>
           <a:p>
-            <a:pPr>
-              <a:spcAft>
-                <a:spcPts val="800"/>
-              </a:spcAft>
+            <a:r>
+              <a:rPr sz="1400" b="0" i="0">
+                <a:solidFill>
+                  <a:srgbClr val="B8D8EE"/>
+                </a:solidFill>
+                <a:latin typeface="Calibri"/>
+              </a:rPr>
+              <a:t>Gratis · funcionan en el navegador</a:t>
+            </a:r>
+          </a:p>
+        </p:txBody>
+      </p:sp>
+      <p:sp>
+        <p:nvSpPr>
+          <p:cNvPr id="6" name="Rounded Rectangle 5"/>
+          <p:cNvSpPr/>
+          <p:nvPr/>
+        </p:nvSpPr>
+        <p:spPr>
+          <a:xfrm>
+            <a:off x="457200" y="1591056"/>
+            <a:ext cx="3624986" cy="2331720"/>
+          </a:xfrm>
+          <a:prstGeom prst="roundRect">
+            <a:avLst>
+              <a:gd name="adj" fmla="val 12000"/>
+            </a:avLst>
+          </a:prstGeom>
+          <a:solidFill>
+            <a:srgbClr val="F2F2F2"/>
+          </a:solidFill>
+          <a:ln>
+            <a:noFill/>
+          </a:ln>
+        </p:spPr>
+        <p:style>
+          <a:lnRef idx="1">
+            <a:schemeClr val="accent1"/>
+          </a:lnRef>
+          <a:fillRef idx="3">
+            <a:schemeClr val="accent1"/>
+          </a:fillRef>
+          <a:effectRef idx="2">
+            <a:schemeClr val="accent1"/>
+          </a:effectRef>
+          <a:fontRef idx="minor">
+            <a:schemeClr val="lt1"/>
+          </a:fontRef>
+        </p:style>
+        <p:txBody>
+          <a:bodyPr rtlCol="0" anchor="ctr"/>
+          <a:lstStyle/>
+          <a:p>
+            <a:pPr algn="ctr"/>
+          </a:p>
+        </p:txBody>
+      </p:sp>
+      <p:sp>
+        <p:nvSpPr>
+          <p:cNvPr id="7" name="Rectangle 6"/>
+          <p:cNvSpPr/>
+          <p:nvPr/>
+        </p:nvSpPr>
+        <p:spPr>
+          <a:xfrm>
+            <a:off x="457200" y="1591056"/>
+            <a:ext cx="3624986" cy="64008"/>
+          </a:xfrm>
+          <a:prstGeom prst="rect">
+            <a:avLst/>
+          </a:prstGeom>
+          <a:solidFill>
+            <a:srgbClr val="095292"/>
+          </a:solidFill>
+          <a:ln>
+            <a:noFill/>
+          </a:ln>
+        </p:spPr>
+        <p:style>
+          <a:lnRef idx="1">
+            <a:schemeClr val="accent1"/>
+          </a:lnRef>
+          <a:fillRef idx="3">
+            <a:schemeClr val="accent1"/>
+          </a:fillRef>
+          <a:effectRef idx="2">
+            <a:schemeClr val="accent1"/>
+          </a:effectRef>
+          <a:fontRef idx="minor">
+            <a:schemeClr val="lt1"/>
+          </a:fontRef>
+        </p:style>
+        <p:txBody>
+          <a:bodyPr rtlCol="0" anchor="ctr"/>
+          <a:lstStyle/>
+          <a:p>
+            <a:pPr algn="ctr"/>
+          </a:p>
+        </p:txBody>
+      </p:sp>
+      <p:sp>
+        <p:nvSpPr>
+          <p:cNvPr id="8" name="Rectangle 7"/>
+          <p:cNvSpPr/>
+          <p:nvPr/>
+        </p:nvSpPr>
+        <p:spPr>
+          <a:xfrm>
+            <a:off x="457200" y="1655064"/>
+            <a:ext cx="3624986" cy="27432"/>
+          </a:xfrm>
+          <a:prstGeom prst="rect">
+            <a:avLst/>
+          </a:prstGeom>
+          <a:solidFill>
+            <a:srgbClr val="FFD000"/>
+          </a:solidFill>
+          <a:ln>
+            <a:noFill/>
+          </a:ln>
+        </p:spPr>
+        <p:style>
+          <a:lnRef idx="1">
+            <a:schemeClr val="accent1"/>
+          </a:lnRef>
+          <a:fillRef idx="3">
+            <a:schemeClr val="accent1"/>
+          </a:fillRef>
+          <a:effectRef idx="2">
+            <a:schemeClr val="accent1"/>
+          </a:effectRef>
+          <a:fontRef idx="minor">
+            <a:schemeClr val="lt1"/>
+          </a:fontRef>
+        </p:style>
+        <p:txBody>
+          <a:bodyPr rtlCol="0" anchor="ctr"/>
+          <a:lstStyle/>
+          <a:p>
+            <a:pPr algn="ctr"/>
+          </a:p>
+        </p:txBody>
+      </p:sp>
+      <p:pic>
+        <p:nvPicPr>
+          <p:cNvPr id="9" name="Picture 8" descr="excalidraw.png"/>
+          <p:cNvPicPr>
+            <a:picLocks noChangeAspect="1"/>
+          </p:cNvPicPr>
+          <p:nvPr/>
+        </p:nvPicPr>
+        <p:blipFill>
+          <a:blip r:embed="rId2"/>
+          <a:stretch>
+            <a:fillRect/>
+          </a:stretch>
+        </p:blipFill>
+        <p:spPr>
+          <a:xfrm>
+            <a:off x="1643329" y="1847087"/>
+            <a:ext cx="1252728" cy="1252728"/>
+          </a:xfrm>
+          <a:prstGeom prst="rect">
+            <a:avLst/>
+          </a:prstGeom>
+        </p:spPr>
+      </p:pic>
+      <p:sp>
+        <p:nvSpPr>
+          <p:cNvPr id="10" name="TextBox 9"/>
+          <p:cNvSpPr txBox="1"/>
+          <p:nvPr/>
+        </p:nvSpPr>
+        <p:spPr>
+          <a:xfrm>
+            <a:off x="530352" y="3191256"/>
+            <a:ext cx="3478682" cy="621792"/>
+          </a:xfrm>
+          <a:prstGeom prst="rect">
+            <a:avLst/>
+          </a:prstGeom>
+          <a:noFill/>
+        </p:spPr>
+        <p:txBody>
+          <a:bodyPr wrap="square" anchor="t"/>
+          <a:lstStyle/>
+          <a:p>
+            <a:pPr algn="ctr"/>
+            <a:r>
+              <a:rPr sz="1300" b="1" i="0">
+                <a:solidFill>
+                  <a:srgbClr val="095292"/>
+                </a:solidFill>
+                <a:latin typeface="Calibri"/>
+              </a:rPr>
+              <a:t>Excalidraw</a:t>
+            </a:r>
+          </a:p>
+          <a:p>
+            <a:pPr algn="ctr">
+              <a:spcBef>
+                <a:spcPts val="200"/>
+              </a:spcBef>
             </a:pPr>
             <a:r>
-              <a:rPr sz="2000" b="0" i="0">
-                <a:solidFill>
-                  <a:srgbClr val="333333"/>
-                </a:solidFill>
-                <a:latin typeface="Calibri"/>
-              </a:rPr>
-              <a:t>–   Ya existe el catalogo de requisitos de VetCare con RF, RNF, prioridades MoSCoW y matriz de trazabilidad aprobados en la clase anterior.</a:t>
-            </a:r>
-          </a:p>
-          <a:p>
-            <a:pPr>
-              <a:spcAft>
-                <a:spcPts val="800"/>
-              </a:spcAft>
+              <a:rPr sz="1000" b="0" i="0">
+                <a:solidFill>
+                  <a:srgbClr val="666666"/>
+                </a:solidFill>
+                <a:latin typeface="Calibri"/>
+              </a:rPr>
+              <a:t>Bocetos rapidos a mano alzada</a:t>
+            </a:r>
+          </a:p>
+        </p:txBody>
+      </p:sp>
+      <p:sp>
+        <p:nvSpPr>
+          <p:cNvPr id="11" name="Rounded Rectangle 10"/>
+          <p:cNvSpPr/>
+          <p:nvPr/>
+        </p:nvSpPr>
+        <p:spPr>
+          <a:xfrm>
+            <a:off x="4283354" y="1591056"/>
+            <a:ext cx="3624986" cy="2331720"/>
+          </a:xfrm>
+          <a:prstGeom prst="roundRect">
+            <a:avLst>
+              <a:gd name="adj" fmla="val 12000"/>
+            </a:avLst>
+          </a:prstGeom>
+          <a:solidFill>
+            <a:srgbClr val="F2F2F2"/>
+          </a:solidFill>
+          <a:ln>
+            <a:noFill/>
+          </a:ln>
+        </p:spPr>
+        <p:style>
+          <a:lnRef idx="1">
+            <a:schemeClr val="accent1"/>
+          </a:lnRef>
+          <a:fillRef idx="3">
+            <a:schemeClr val="accent1"/>
+          </a:fillRef>
+          <a:effectRef idx="2">
+            <a:schemeClr val="accent1"/>
+          </a:effectRef>
+          <a:fontRef idx="minor">
+            <a:schemeClr val="lt1"/>
+          </a:fontRef>
+        </p:style>
+        <p:txBody>
+          <a:bodyPr rtlCol="0" anchor="ctr"/>
+          <a:lstStyle/>
+          <a:p>
+            <a:pPr algn="ctr"/>
+          </a:p>
+        </p:txBody>
+      </p:sp>
+      <p:sp>
+        <p:nvSpPr>
+          <p:cNvPr id="12" name="Rectangle 11"/>
+          <p:cNvSpPr/>
+          <p:nvPr/>
+        </p:nvSpPr>
+        <p:spPr>
+          <a:xfrm>
+            <a:off x="4283354" y="1591056"/>
+            <a:ext cx="3624986" cy="64008"/>
+          </a:xfrm>
+          <a:prstGeom prst="rect">
+            <a:avLst/>
+          </a:prstGeom>
+          <a:solidFill>
+            <a:srgbClr val="095292"/>
+          </a:solidFill>
+          <a:ln>
+            <a:noFill/>
+          </a:ln>
+        </p:spPr>
+        <p:style>
+          <a:lnRef idx="1">
+            <a:schemeClr val="accent1"/>
+          </a:lnRef>
+          <a:fillRef idx="3">
+            <a:schemeClr val="accent1"/>
+          </a:fillRef>
+          <a:effectRef idx="2">
+            <a:schemeClr val="accent1"/>
+          </a:effectRef>
+          <a:fontRef idx="minor">
+            <a:schemeClr val="lt1"/>
+          </a:fontRef>
+        </p:style>
+        <p:txBody>
+          <a:bodyPr rtlCol="0" anchor="ctr"/>
+          <a:lstStyle/>
+          <a:p>
+            <a:pPr algn="ctr"/>
+          </a:p>
+        </p:txBody>
+      </p:sp>
+      <p:sp>
+        <p:nvSpPr>
+          <p:cNvPr id="13" name="Rectangle 12"/>
+          <p:cNvSpPr/>
+          <p:nvPr/>
+        </p:nvSpPr>
+        <p:spPr>
+          <a:xfrm>
+            <a:off x="4283354" y="1655064"/>
+            <a:ext cx="3624986" cy="27432"/>
+          </a:xfrm>
+          <a:prstGeom prst="rect">
+            <a:avLst/>
+          </a:prstGeom>
+          <a:solidFill>
+            <a:srgbClr val="FFD000"/>
+          </a:solidFill>
+          <a:ln>
+            <a:noFill/>
+          </a:ln>
+        </p:spPr>
+        <p:style>
+          <a:lnRef idx="1">
+            <a:schemeClr val="accent1"/>
+          </a:lnRef>
+          <a:fillRef idx="3">
+            <a:schemeClr val="accent1"/>
+          </a:fillRef>
+          <a:effectRef idx="2">
+            <a:schemeClr val="accent1"/>
+          </a:effectRef>
+          <a:fontRef idx="minor">
+            <a:schemeClr val="lt1"/>
+          </a:fontRef>
+        </p:style>
+        <p:txBody>
+          <a:bodyPr rtlCol="0" anchor="ctr"/>
+          <a:lstStyle/>
+          <a:p>
+            <a:pPr algn="ctr"/>
+          </a:p>
+        </p:txBody>
+      </p:sp>
+      <p:pic>
+        <p:nvPicPr>
+          <p:cNvPr id="14" name="Picture 13" descr="google_docs.png"/>
+          <p:cNvPicPr>
+            <a:picLocks noChangeAspect="1"/>
+          </p:cNvPicPr>
+          <p:nvPr/>
+        </p:nvPicPr>
+        <p:blipFill>
+          <a:blip r:embed="rId3"/>
+          <a:stretch>
+            <a:fillRect/>
+          </a:stretch>
+        </p:blipFill>
+        <p:spPr>
+          <a:xfrm>
+            <a:off x="5469483" y="1847087"/>
+            <a:ext cx="1252728" cy="1252728"/>
+          </a:xfrm>
+          <a:prstGeom prst="rect">
+            <a:avLst/>
+          </a:prstGeom>
+        </p:spPr>
+      </p:pic>
+      <p:sp>
+        <p:nvSpPr>
+          <p:cNvPr id="15" name="TextBox 14"/>
+          <p:cNvSpPr txBox="1"/>
+          <p:nvPr/>
+        </p:nvSpPr>
+        <p:spPr>
+          <a:xfrm>
+            <a:off x="4356506" y="3191256"/>
+            <a:ext cx="3478682" cy="621792"/>
+          </a:xfrm>
+          <a:prstGeom prst="rect">
+            <a:avLst/>
+          </a:prstGeom>
+          <a:noFill/>
+        </p:spPr>
+        <p:txBody>
+          <a:bodyPr wrap="square" anchor="t"/>
+          <a:lstStyle/>
+          <a:p>
+            <a:pPr algn="ctr"/>
+            <a:r>
+              <a:rPr sz="1300" b="1" i="0">
+                <a:solidFill>
+                  <a:srgbClr val="095292"/>
+                </a:solidFill>
+                <a:latin typeface="Calibri"/>
+              </a:rPr>
+              <a:t>google docs</a:t>
+            </a:r>
+          </a:p>
+          <a:p>
+            <a:pPr algn="ctr">
+              <a:spcBef>
+                <a:spcPts val="200"/>
+              </a:spcBef>
             </a:pPr>
             <a:r>
-              <a:rPr sz="2000" b="0" i="0">
-                <a:solidFill>
-                  <a:srgbClr val="333333"/>
-                </a:solidFill>
-                <a:latin typeface="Calibri"/>
-              </a:rPr>
-              <a:t>–   Ese catalogo esta escrito en lenguaje formal de analista y todavia no permite decidir por donde arrancar ni cuanto pesa cada pieza.</a:t>
-            </a:r>
-          </a:p>
-          <a:p>
-            <a:pPr>
-              <a:spcAft>
-                <a:spcPts val="800"/>
-              </a:spcAft>
+              <a:rPr sz="1000" b="0" i="0">
+                <a:solidFill>
+                  <a:srgbClr val="666666"/>
+                </a:solidFill>
+                <a:latin typeface="Calibri"/>
+              </a:rPr>
+              <a:t>Documentos del paquete de diseño</a:t>
+            </a:r>
+          </a:p>
+        </p:txBody>
+      </p:sp>
+      <p:sp>
+        <p:nvSpPr>
+          <p:cNvPr id="16" name="Rounded Rectangle 15"/>
+          <p:cNvSpPr/>
+          <p:nvPr/>
+        </p:nvSpPr>
+        <p:spPr>
+          <a:xfrm>
+            <a:off x="8109508" y="1591056"/>
+            <a:ext cx="3624986" cy="2331720"/>
+          </a:xfrm>
+          <a:prstGeom prst="roundRect">
+            <a:avLst>
+              <a:gd name="adj" fmla="val 12000"/>
+            </a:avLst>
+          </a:prstGeom>
+          <a:solidFill>
+            <a:srgbClr val="F2F2F2"/>
+          </a:solidFill>
+          <a:ln>
+            <a:noFill/>
+          </a:ln>
+        </p:spPr>
+        <p:style>
+          <a:lnRef idx="1">
+            <a:schemeClr val="accent1"/>
+          </a:lnRef>
+          <a:fillRef idx="3">
+            <a:schemeClr val="accent1"/>
+          </a:fillRef>
+          <a:effectRef idx="2">
+            <a:schemeClr val="accent1"/>
+          </a:effectRef>
+          <a:fontRef idx="minor">
+            <a:schemeClr val="lt1"/>
+          </a:fontRef>
+        </p:style>
+        <p:txBody>
+          <a:bodyPr rtlCol="0" anchor="ctr"/>
+          <a:lstStyle/>
+          <a:p>
+            <a:pPr algn="ctr"/>
+          </a:p>
+        </p:txBody>
+      </p:sp>
+      <p:sp>
+        <p:nvSpPr>
+          <p:cNvPr id="17" name="Rectangle 16"/>
+          <p:cNvSpPr/>
+          <p:nvPr/>
+        </p:nvSpPr>
+        <p:spPr>
+          <a:xfrm>
+            <a:off x="8109508" y="1591056"/>
+            <a:ext cx="3624986" cy="64008"/>
+          </a:xfrm>
+          <a:prstGeom prst="rect">
+            <a:avLst/>
+          </a:prstGeom>
+          <a:solidFill>
+            <a:srgbClr val="095292"/>
+          </a:solidFill>
+          <a:ln>
+            <a:noFill/>
+          </a:ln>
+        </p:spPr>
+        <p:style>
+          <a:lnRef idx="1">
+            <a:schemeClr val="accent1"/>
+          </a:lnRef>
+          <a:fillRef idx="3">
+            <a:schemeClr val="accent1"/>
+          </a:fillRef>
+          <a:effectRef idx="2">
+            <a:schemeClr val="accent1"/>
+          </a:effectRef>
+          <a:fontRef idx="minor">
+            <a:schemeClr val="lt1"/>
+          </a:fontRef>
+        </p:style>
+        <p:txBody>
+          <a:bodyPr rtlCol="0" anchor="ctr"/>
+          <a:lstStyle/>
+          <a:p>
+            <a:pPr algn="ctr"/>
+          </a:p>
+        </p:txBody>
+      </p:sp>
+      <p:sp>
+        <p:nvSpPr>
+          <p:cNvPr id="18" name="Rectangle 17"/>
+          <p:cNvSpPr/>
+          <p:nvPr/>
+        </p:nvSpPr>
+        <p:spPr>
+          <a:xfrm>
+            <a:off x="8109508" y="1655064"/>
+            <a:ext cx="3624986" cy="27432"/>
+          </a:xfrm>
+          <a:prstGeom prst="rect">
+            <a:avLst/>
+          </a:prstGeom>
+          <a:solidFill>
+            <a:srgbClr val="FFD000"/>
+          </a:solidFill>
+          <a:ln>
+            <a:noFill/>
+          </a:ln>
+        </p:spPr>
+        <p:style>
+          <a:lnRef idx="1">
+            <a:schemeClr val="accent1"/>
+          </a:lnRef>
+          <a:fillRef idx="3">
+            <a:schemeClr val="accent1"/>
+          </a:fillRef>
+          <a:effectRef idx="2">
+            <a:schemeClr val="accent1"/>
+          </a:effectRef>
+          <a:fontRef idx="minor">
+            <a:schemeClr val="lt1"/>
+          </a:fontRef>
+        </p:style>
+        <p:txBody>
+          <a:bodyPr rtlCol="0" anchor="ctr"/>
+          <a:lstStyle/>
+          <a:p>
+            <a:pPr algn="ctr"/>
+          </a:p>
+        </p:txBody>
+      </p:sp>
+      <p:pic>
+        <p:nvPicPr>
+          <p:cNvPr id="19" name="Picture 18" descr="examlab.png"/>
+          <p:cNvPicPr>
+            <a:picLocks noChangeAspect="1"/>
+          </p:cNvPicPr>
+          <p:nvPr/>
+        </p:nvPicPr>
+        <p:blipFill>
+          <a:blip r:embed="rId4"/>
+          <a:stretch>
+            <a:fillRect/>
+          </a:stretch>
+        </p:blipFill>
+        <p:spPr>
+          <a:xfrm>
+            <a:off x="9295638" y="1847087"/>
+            <a:ext cx="1252728" cy="1252728"/>
+          </a:xfrm>
+          <a:prstGeom prst="rect">
+            <a:avLst/>
+          </a:prstGeom>
+        </p:spPr>
+      </p:pic>
+      <p:sp>
+        <p:nvSpPr>
+          <p:cNvPr id="20" name="TextBox 19"/>
+          <p:cNvSpPr txBox="1"/>
+          <p:nvPr/>
+        </p:nvSpPr>
+        <p:spPr>
+          <a:xfrm>
+            <a:off x="8182660" y="3191256"/>
+            <a:ext cx="3478682" cy="621792"/>
+          </a:xfrm>
+          <a:prstGeom prst="rect">
+            <a:avLst/>
+          </a:prstGeom>
+          <a:noFill/>
+        </p:spPr>
+        <p:txBody>
+          <a:bodyPr wrap="square" anchor="t"/>
+          <a:lstStyle/>
+          <a:p>
+            <a:pPr algn="ctr"/>
+            <a:r>
+              <a:rPr sz="1300" b="1" i="0">
+                <a:solidFill>
+                  <a:srgbClr val="095292"/>
+                </a:solidFill>
+                <a:latin typeface="Calibri"/>
+              </a:rPr>
+              <a:t>la plataforma del curso</a:t>
+            </a:r>
+          </a:p>
+          <a:p>
+            <a:pPr algn="ctr">
+              <a:spcBef>
+                <a:spcPts val="200"/>
+              </a:spcBef>
             </a:pPr>
             <a:r>
-              <a:rPr sz="2000" b="0" i="0">
-                <a:solidFill>
-                  <a:srgbClr val="333333"/>
-                </a:solidFill>
-                <a:latin typeface="Calibri"/>
-              </a:rPr>
-              <a:t>–   El equipo del Proyecto Integrador necesita una lista ordenada de trabajo para poder repartirse las siguientes semanas entre diseno y construccion.</a:t>
-            </a:r>
-          </a:p>
-        </p:txBody>
-      </p:sp>
-      <p:sp>
-        <p:nvSpPr>
-          <p:cNvPr id="6" name="TextBox 5"/>
+              <a:rPr sz="1000" b="0" i="0">
+                <a:solidFill>
+                  <a:srgbClr val="666666"/>
+                </a:solidFill>
+                <a:latin typeface="Calibri"/>
+              </a:rPr>
+              <a:t>Entrega del taller · en la fecha que indique el docente</a:t>
+            </a:r>
+          </a:p>
+        </p:txBody>
+      </p:sp>
+      <p:sp>
+        <p:nvSpPr>
+          <p:cNvPr id="21" name="TextBox 20"/>
           <p:cNvSpPr txBox="1"/>
           <p:nvPr/>
         </p:nvSpPr>
@@ -6808,111 +7400,21 @@
                 </a:solidFill>
                 <a:latin typeface="Calibri"/>
               </a:rPr>
-              <a:t>Taller PI — pasos guiados</a:t>
-            </a:r>
-          </a:p>
-        </p:txBody>
-      </p:sp>
-      <p:sp>
-        <p:nvSpPr>
-          <p:cNvPr id="5" name="Rounded Rectangle 4"/>
-          <p:cNvSpPr/>
-          <p:nvPr/>
-        </p:nvSpPr>
-        <p:spPr>
-          <a:xfrm>
-            <a:off x="457200" y="1234440"/>
-            <a:ext cx="11277295" cy="950976"/>
-          </a:xfrm>
-          <a:prstGeom prst="roundRect">
-            <a:avLst>
-              <a:gd name="adj" fmla="val 12000"/>
-            </a:avLst>
-          </a:prstGeom>
-          <a:solidFill>
-            <a:srgbClr val="F2F2F2"/>
-          </a:solidFill>
-          <a:ln>
-            <a:noFill/>
-          </a:ln>
-        </p:spPr>
-        <p:style>
-          <a:lnRef idx="1">
-            <a:schemeClr val="accent1"/>
-          </a:lnRef>
-          <a:fillRef idx="3">
-            <a:schemeClr val="accent1"/>
-          </a:fillRef>
-          <a:effectRef idx="2">
-            <a:schemeClr val="accent1"/>
-          </a:effectRef>
-          <a:fontRef idx="minor">
-            <a:schemeClr val="lt1"/>
-          </a:fontRef>
-        </p:style>
-        <p:txBody>
-          <a:bodyPr rtlCol="0" anchor="ctr"/>
-          <a:lstStyle/>
-          <a:p>
-            <a:pPr algn="ctr"/>
-          </a:p>
-        </p:txBody>
-      </p:sp>
-      <p:sp>
-        <p:nvSpPr>
-          <p:cNvPr id="6" name="Rounded Rectangle 5"/>
-          <p:cNvSpPr/>
-          <p:nvPr/>
-        </p:nvSpPr>
-        <p:spPr>
-          <a:xfrm>
-            <a:off x="594360" y="1490472"/>
-            <a:ext cx="438912" cy="438912"/>
-          </a:xfrm>
-          <a:prstGeom prst="roundRect">
-            <a:avLst>
-              <a:gd name="adj" fmla="val 12000"/>
-            </a:avLst>
-          </a:prstGeom>
-          <a:solidFill>
-            <a:srgbClr val="095292"/>
-          </a:solidFill>
-          <a:ln>
-            <a:noFill/>
-          </a:ln>
-        </p:spPr>
-        <p:style>
-          <a:lnRef idx="1">
-            <a:schemeClr val="accent1"/>
-          </a:lnRef>
-          <a:fillRef idx="3">
-            <a:schemeClr val="accent1"/>
-          </a:fillRef>
-          <a:effectRef idx="2">
-            <a:schemeClr val="accent1"/>
-          </a:effectRef>
-          <a:fontRef idx="minor">
-            <a:schemeClr val="lt1"/>
-          </a:fontRef>
-        </p:style>
-        <p:txBody>
-          <a:bodyPr rtlCol="0" anchor="ctr"/>
-          <a:lstStyle/>
-          <a:p>
-            <a:pPr algn="ctr"/>
-          </a:p>
-        </p:txBody>
-      </p:sp>
-      <p:sp>
-        <p:nvSpPr>
-          <p:cNvPr id="7" name="TextBox 6"/>
+              <a:t>Taller PI — por que importa</a:t>
+            </a:r>
+          </a:p>
+        </p:txBody>
+      </p:sp>
+      <p:sp>
+        <p:nvSpPr>
+          <p:cNvPr id="5" name="TextBox 4"/>
           <p:cNvSpPr txBox="1"/>
           <p:nvPr/>
         </p:nvSpPr>
         <p:spPr>
           <a:xfrm>
-            <a:off x="594360" y="1490472"/>
-            <a:ext cx="438912" cy="438912"/>
+            <a:off x="457200" y="1170432"/>
+            <a:ext cx="11277295" cy="5230368"/>
           </a:xfrm>
           <a:prstGeom prst="rect">
             <a:avLst/>
@@ -6920,677 +7422,81 @@
           <a:noFill/>
         </p:spPr>
         <p:txBody>
-          <a:bodyPr wrap="square" anchor="ctr"/>
-          <a:lstStyle/>
-          <a:p>
-            <a:pPr algn="ctr"/>
-            <a:r>
-              <a:rPr sz="1600" b="1" i="0">
-                <a:solidFill>
-                  <a:srgbClr val="FFFFFF"/>
-                </a:solidFill>
-                <a:latin typeface="Calibri"/>
-              </a:rPr>
-              <a:t>1</a:t>
-            </a:r>
-          </a:p>
-        </p:txBody>
-      </p:sp>
-      <p:sp>
-        <p:nvSpPr>
-          <p:cNvPr id="8" name="TextBox 7"/>
-          <p:cNvSpPr txBox="1"/>
-          <p:nvPr/>
-        </p:nvSpPr>
-        <p:spPr>
-          <a:xfrm>
-            <a:off x="1188720" y="1325880"/>
-            <a:ext cx="10271455" cy="786384"/>
-          </a:xfrm>
-          <a:prstGeom prst="rect">
-            <a:avLst/>
-          </a:prstGeom>
-          <a:noFill/>
-        </p:spPr>
-        <p:txBody>
-          <a:bodyPr wrap="square" anchor="ctr"/>
-          <a:lstStyle/>
-          <a:p>
-            <a:r>
-              <a:rPr sz="1500" b="1" i="0">
-                <a:solidFill>
-                  <a:srgbClr val="095292"/>
-                </a:solidFill>
-                <a:latin typeface="Calibri"/>
-              </a:rPr>
-              <a:t>Paso 1: agrupe los RF del catalogo de la clase 6 en dos epicas de VetCare (por ejemplo Gestion de pacientes e Historial y agenda) y escriba el nombre y el objetivo de cada epica en una linea.</a:t>
-            </a:r>
-          </a:p>
-        </p:txBody>
-      </p:sp>
-      <p:sp>
-        <p:nvSpPr>
-          <p:cNvPr id="9" name="Rounded Rectangle 8"/>
-          <p:cNvSpPr/>
-          <p:nvPr/>
-        </p:nvSpPr>
-        <p:spPr>
-          <a:xfrm>
-            <a:off x="457200" y="2276856"/>
-            <a:ext cx="11277295" cy="950976"/>
-          </a:xfrm>
-          <a:prstGeom prst="roundRect">
-            <a:avLst>
-              <a:gd name="adj" fmla="val 12000"/>
-            </a:avLst>
-          </a:prstGeom>
-          <a:solidFill>
-            <a:srgbClr val="E8F4FA"/>
-          </a:solidFill>
-          <a:ln>
-            <a:noFill/>
-          </a:ln>
-        </p:spPr>
-        <p:style>
-          <a:lnRef idx="1">
-            <a:schemeClr val="accent1"/>
-          </a:lnRef>
-          <a:fillRef idx="3">
-            <a:schemeClr val="accent1"/>
-          </a:fillRef>
-          <a:effectRef idx="2">
-            <a:schemeClr val="accent1"/>
-          </a:effectRef>
-          <a:fontRef idx="minor">
-            <a:schemeClr val="lt1"/>
-          </a:fontRef>
-        </p:style>
-        <p:txBody>
-          <a:bodyPr rtlCol="0" anchor="ctr"/>
-          <a:lstStyle/>
-          <a:p>
-            <a:pPr algn="ctr"/>
-          </a:p>
-        </p:txBody>
-      </p:sp>
-      <p:sp>
-        <p:nvSpPr>
-          <p:cNvPr id="10" name="Rounded Rectangle 9"/>
-          <p:cNvSpPr/>
-          <p:nvPr/>
-        </p:nvSpPr>
-        <p:spPr>
-          <a:xfrm>
-            <a:off x="594360" y="2532888"/>
-            <a:ext cx="438912" cy="438912"/>
-          </a:xfrm>
-          <a:prstGeom prst="roundRect">
-            <a:avLst>
-              <a:gd name="adj" fmla="val 12000"/>
-            </a:avLst>
-          </a:prstGeom>
-          <a:solidFill>
-            <a:srgbClr val="095292"/>
-          </a:solidFill>
-          <a:ln>
-            <a:noFill/>
-          </a:ln>
-        </p:spPr>
-        <p:style>
-          <a:lnRef idx="1">
-            <a:schemeClr val="accent1"/>
-          </a:lnRef>
-          <a:fillRef idx="3">
-            <a:schemeClr val="accent1"/>
-          </a:fillRef>
-          <a:effectRef idx="2">
-            <a:schemeClr val="accent1"/>
-          </a:effectRef>
-          <a:fontRef idx="minor">
-            <a:schemeClr val="lt1"/>
-          </a:fontRef>
-        </p:style>
-        <p:txBody>
-          <a:bodyPr rtlCol="0" anchor="ctr"/>
-          <a:lstStyle/>
-          <a:p>
-            <a:pPr algn="ctr"/>
-          </a:p>
-        </p:txBody>
-      </p:sp>
-      <p:sp>
-        <p:nvSpPr>
-          <p:cNvPr id="11" name="TextBox 10"/>
-          <p:cNvSpPr txBox="1"/>
-          <p:nvPr/>
-        </p:nvSpPr>
-        <p:spPr>
-          <a:xfrm>
-            <a:off x="594360" y="2532888"/>
-            <a:ext cx="438912" cy="438912"/>
-          </a:xfrm>
-          <a:prstGeom prst="rect">
-            <a:avLst/>
-          </a:prstGeom>
-          <a:noFill/>
-        </p:spPr>
-        <p:txBody>
-          <a:bodyPr wrap="square" anchor="ctr"/>
-          <a:lstStyle/>
-          <a:p>
-            <a:pPr algn="ctr"/>
-            <a:r>
-              <a:rPr sz="1600" b="1" i="0">
-                <a:solidFill>
-                  <a:srgbClr val="FFFFFF"/>
-                </a:solidFill>
-                <a:latin typeface="Calibri"/>
-              </a:rPr>
-              <a:t>2</a:t>
-            </a:r>
-          </a:p>
-        </p:txBody>
-      </p:sp>
-      <p:sp>
-        <p:nvSpPr>
-          <p:cNvPr id="12" name="TextBox 11"/>
-          <p:cNvSpPr txBox="1"/>
-          <p:nvPr/>
-        </p:nvSpPr>
-        <p:spPr>
-          <a:xfrm>
-            <a:off x="1188720" y="2368296"/>
-            <a:ext cx="10271455" cy="786384"/>
-          </a:xfrm>
-          <a:prstGeom prst="rect">
-            <a:avLst/>
-          </a:prstGeom>
-          <a:noFill/>
-        </p:spPr>
-        <p:txBody>
-          <a:bodyPr wrap="square" anchor="ctr"/>
-          <a:lstStyle/>
-          <a:p>
-            <a:r>
-              <a:rPr sz="1500" b="1" i="0">
-                <a:solidFill>
-                  <a:srgbClr val="095292"/>
-                </a:solidFill>
-                <a:latin typeface="Calibri"/>
-              </a:rPr>
-              <a:t>Paso 2: descomponga las dos epicas en 8 historias con el formato Como &lt;rol de la clinica Huellitas&gt; quiero &lt;accion&gt; para &lt;beneficio&gt;, usando roles concretos (auxiliar, veterinario, administrador) y nunca la palabra usuario.</a:t>
-            </a:r>
-          </a:p>
-        </p:txBody>
-      </p:sp>
-      <p:sp>
-        <p:nvSpPr>
-          <p:cNvPr id="13" name="Rounded Rectangle 12"/>
-          <p:cNvSpPr/>
-          <p:nvPr/>
-        </p:nvSpPr>
-        <p:spPr>
-          <a:xfrm>
-            <a:off x="457200" y="3319272"/>
-            <a:ext cx="11277295" cy="950976"/>
-          </a:xfrm>
-          <a:prstGeom prst="roundRect">
-            <a:avLst>
-              <a:gd name="adj" fmla="val 12000"/>
-            </a:avLst>
-          </a:prstGeom>
-          <a:solidFill>
-            <a:srgbClr val="F2F2F2"/>
-          </a:solidFill>
-          <a:ln>
-            <a:noFill/>
-          </a:ln>
-        </p:spPr>
-        <p:style>
-          <a:lnRef idx="1">
-            <a:schemeClr val="accent1"/>
-          </a:lnRef>
-          <a:fillRef idx="3">
-            <a:schemeClr val="accent1"/>
-          </a:fillRef>
-          <a:effectRef idx="2">
-            <a:schemeClr val="accent1"/>
-          </a:effectRef>
-          <a:fontRef idx="minor">
-            <a:schemeClr val="lt1"/>
-          </a:fontRef>
-        </p:style>
-        <p:txBody>
-          <a:bodyPr rtlCol="0" anchor="ctr"/>
-          <a:lstStyle/>
-          <a:p>
-            <a:pPr algn="ctr"/>
-          </a:p>
-        </p:txBody>
-      </p:sp>
-      <p:sp>
-        <p:nvSpPr>
-          <p:cNvPr id="14" name="Rounded Rectangle 13"/>
-          <p:cNvSpPr/>
-          <p:nvPr/>
-        </p:nvSpPr>
-        <p:spPr>
-          <a:xfrm>
-            <a:off x="594360" y="3575304"/>
-            <a:ext cx="438912" cy="438912"/>
-          </a:xfrm>
-          <a:prstGeom prst="roundRect">
-            <a:avLst>
-              <a:gd name="adj" fmla="val 12000"/>
-            </a:avLst>
-          </a:prstGeom>
-          <a:solidFill>
-            <a:srgbClr val="095292"/>
-          </a:solidFill>
-          <a:ln>
-            <a:noFill/>
-          </a:ln>
-        </p:spPr>
-        <p:style>
-          <a:lnRef idx="1">
-            <a:schemeClr val="accent1"/>
-          </a:lnRef>
-          <a:fillRef idx="3">
-            <a:schemeClr val="accent1"/>
-          </a:fillRef>
-          <a:effectRef idx="2">
-            <a:schemeClr val="accent1"/>
-          </a:effectRef>
-          <a:fontRef idx="minor">
-            <a:schemeClr val="lt1"/>
-          </a:fontRef>
-        </p:style>
-        <p:txBody>
-          <a:bodyPr rtlCol="0" anchor="ctr"/>
-          <a:lstStyle/>
-          <a:p>
-            <a:pPr algn="ctr"/>
-          </a:p>
-        </p:txBody>
-      </p:sp>
-      <p:sp>
-        <p:nvSpPr>
-          <p:cNvPr id="15" name="TextBox 14"/>
-          <p:cNvSpPr txBox="1"/>
-          <p:nvPr/>
-        </p:nvSpPr>
-        <p:spPr>
-          <a:xfrm>
-            <a:off x="594360" y="3575304"/>
-            <a:ext cx="438912" cy="438912"/>
-          </a:xfrm>
-          <a:prstGeom prst="rect">
-            <a:avLst/>
-          </a:prstGeom>
-          <a:noFill/>
-        </p:spPr>
-        <p:txBody>
-          <a:bodyPr wrap="square" anchor="ctr"/>
-          <a:lstStyle/>
-          <a:p>
-            <a:pPr algn="ctr"/>
-            <a:r>
-              <a:rPr sz="1600" b="1" i="0">
-                <a:solidFill>
-                  <a:srgbClr val="FFFFFF"/>
-                </a:solidFill>
-                <a:latin typeface="Calibri"/>
-              </a:rPr>
-              <a:t>3</a:t>
-            </a:r>
-          </a:p>
-        </p:txBody>
-      </p:sp>
-      <p:sp>
-        <p:nvSpPr>
-          <p:cNvPr id="16" name="TextBox 15"/>
-          <p:cNvSpPr txBox="1"/>
-          <p:nvPr/>
-        </p:nvSpPr>
-        <p:spPr>
-          <a:xfrm>
-            <a:off x="1188720" y="3410712"/>
-            <a:ext cx="10271455" cy="786384"/>
-          </a:xfrm>
-          <a:prstGeom prst="rect">
-            <a:avLst/>
-          </a:prstGeom>
-          <a:noFill/>
-        </p:spPr>
-        <p:txBody>
-          <a:bodyPr wrap="square" anchor="ctr"/>
-          <a:lstStyle/>
-          <a:p>
-            <a:r>
-              <a:rPr sz="1500" b="1" i="0">
-                <a:solidFill>
-                  <a:srgbClr val="095292"/>
-                </a:solidFill>
-                <a:latin typeface="Calibri"/>
-              </a:rPr>
-              <a:t>Paso 3: escriba 2 o 3 criterios de aceptacion por historia en Dado-Cuando-Entonces, e incluya obligatoriamente un criterio de camino alterno o de error en al menos cuatro de las ocho historias.</a:t>
-            </a:r>
-          </a:p>
-        </p:txBody>
-      </p:sp>
-      <p:sp>
-        <p:nvSpPr>
-          <p:cNvPr id="17" name="Rounded Rectangle 16"/>
-          <p:cNvSpPr/>
-          <p:nvPr/>
-        </p:nvSpPr>
-        <p:spPr>
-          <a:xfrm>
-            <a:off x="457200" y="4361688"/>
-            <a:ext cx="11277295" cy="950976"/>
-          </a:xfrm>
-          <a:prstGeom prst="roundRect">
-            <a:avLst>
-              <a:gd name="adj" fmla="val 12000"/>
-            </a:avLst>
-          </a:prstGeom>
-          <a:solidFill>
-            <a:srgbClr val="E8F4FA"/>
-          </a:solidFill>
-          <a:ln>
-            <a:noFill/>
-          </a:ln>
-        </p:spPr>
-        <p:style>
-          <a:lnRef idx="1">
-            <a:schemeClr val="accent1"/>
-          </a:lnRef>
-          <a:fillRef idx="3">
-            <a:schemeClr val="accent1"/>
-          </a:fillRef>
-          <a:effectRef idx="2">
-            <a:schemeClr val="accent1"/>
-          </a:effectRef>
-          <a:fontRef idx="minor">
-            <a:schemeClr val="lt1"/>
-          </a:fontRef>
-        </p:style>
-        <p:txBody>
-          <a:bodyPr rtlCol="0" anchor="ctr"/>
-          <a:lstStyle/>
-          <a:p>
-            <a:pPr algn="ctr"/>
-          </a:p>
-        </p:txBody>
-      </p:sp>
-      <p:sp>
-        <p:nvSpPr>
-          <p:cNvPr id="18" name="Rounded Rectangle 17"/>
-          <p:cNvSpPr/>
-          <p:nvPr/>
-        </p:nvSpPr>
-        <p:spPr>
-          <a:xfrm>
-            <a:off x="594360" y="4617720"/>
-            <a:ext cx="438912" cy="438912"/>
-          </a:xfrm>
-          <a:prstGeom prst="roundRect">
-            <a:avLst>
-              <a:gd name="adj" fmla="val 12000"/>
-            </a:avLst>
-          </a:prstGeom>
-          <a:solidFill>
-            <a:srgbClr val="095292"/>
-          </a:solidFill>
-          <a:ln>
-            <a:noFill/>
-          </a:ln>
-        </p:spPr>
-        <p:style>
-          <a:lnRef idx="1">
-            <a:schemeClr val="accent1"/>
-          </a:lnRef>
-          <a:fillRef idx="3">
-            <a:schemeClr val="accent1"/>
-          </a:fillRef>
-          <a:effectRef idx="2">
-            <a:schemeClr val="accent1"/>
-          </a:effectRef>
-          <a:fontRef idx="minor">
-            <a:schemeClr val="lt1"/>
-          </a:fontRef>
-        </p:style>
-        <p:txBody>
-          <a:bodyPr rtlCol="0" anchor="ctr"/>
-          <a:lstStyle/>
-          <a:p>
-            <a:pPr algn="ctr"/>
-          </a:p>
-        </p:txBody>
-      </p:sp>
-      <p:sp>
-        <p:nvSpPr>
-          <p:cNvPr id="19" name="TextBox 18"/>
-          <p:cNvSpPr txBox="1"/>
-          <p:nvPr/>
-        </p:nvSpPr>
-        <p:spPr>
-          <a:xfrm>
-            <a:off x="594360" y="4617720"/>
-            <a:ext cx="438912" cy="438912"/>
-          </a:xfrm>
-          <a:prstGeom prst="rect">
-            <a:avLst/>
-          </a:prstGeom>
-          <a:noFill/>
-        </p:spPr>
-        <p:txBody>
-          <a:bodyPr wrap="square" anchor="ctr"/>
-          <a:lstStyle/>
-          <a:p>
-            <a:pPr algn="ctr"/>
-            <a:r>
-              <a:rPr sz="1600" b="1" i="0">
-                <a:solidFill>
-                  <a:srgbClr val="FFFFFF"/>
-                </a:solidFill>
-                <a:latin typeface="Calibri"/>
-              </a:rPr>
-              <a:t>4</a:t>
-            </a:r>
-          </a:p>
-        </p:txBody>
-      </p:sp>
-      <p:sp>
-        <p:nvSpPr>
-          <p:cNvPr id="20" name="TextBox 19"/>
-          <p:cNvSpPr txBox="1"/>
-          <p:nvPr/>
-        </p:nvSpPr>
-        <p:spPr>
-          <a:xfrm>
-            <a:off x="1188720" y="4453128"/>
-            <a:ext cx="10271455" cy="786384"/>
-          </a:xfrm>
-          <a:prstGeom prst="rect">
-            <a:avLst/>
-          </a:prstGeom>
-          <a:noFill/>
-        </p:spPr>
-        <p:txBody>
-          <a:bodyPr wrap="square" anchor="ctr"/>
-          <a:lstStyle/>
-          <a:p>
-            <a:r>
-              <a:rPr sz="1500" b="1" i="0">
-                <a:solidFill>
-                  <a:srgbClr val="095292"/>
-                </a:solidFill>
-                <a:latin typeface="Calibri"/>
-              </a:rPr>
-              <a:t>Paso 4: revise cada historia contra INVEST marcando las seis letras con si o no; toda historia que falle dos o mas letras debe reescribirse o partirse antes de continuar.</a:t>
-            </a:r>
-          </a:p>
-        </p:txBody>
-      </p:sp>
-      <p:sp>
-        <p:nvSpPr>
-          <p:cNvPr id="21" name="Rounded Rectangle 20"/>
-          <p:cNvSpPr/>
-          <p:nvPr/>
-        </p:nvSpPr>
-        <p:spPr>
-          <a:xfrm>
-            <a:off x="457200" y="5404104"/>
-            <a:ext cx="11277295" cy="950976"/>
-          </a:xfrm>
-          <a:prstGeom prst="roundRect">
-            <a:avLst>
-              <a:gd name="adj" fmla="val 12000"/>
-            </a:avLst>
-          </a:prstGeom>
-          <a:solidFill>
-            <a:srgbClr val="F2F2F2"/>
-          </a:solidFill>
-          <a:ln>
-            <a:noFill/>
-          </a:ln>
-        </p:spPr>
-        <p:style>
-          <a:lnRef idx="1">
-            <a:schemeClr val="accent1"/>
-          </a:lnRef>
-          <a:fillRef idx="3">
-            <a:schemeClr val="accent1"/>
-          </a:fillRef>
-          <a:effectRef idx="2">
-            <a:schemeClr val="accent1"/>
-          </a:effectRef>
-          <a:fontRef idx="minor">
-            <a:schemeClr val="lt1"/>
-          </a:fontRef>
-        </p:style>
-        <p:txBody>
-          <a:bodyPr rtlCol="0" anchor="ctr"/>
-          <a:lstStyle/>
-          <a:p>
-            <a:pPr algn="ctr"/>
-          </a:p>
-        </p:txBody>
-      </p:sp>
-      <p:sp>
-        <p:nvSpPr>
-          <p:cNvPr id="22" name="Rounded Rectangle 21"/>
-          <p:cNvSpPr/>
-          <p:nvPr/>
-        </p:nvSpPr>
-        <p:spPr>
-          <a:xfrm>
-            <a:off x="594360" y="5660136"/>
-            <a:ext cx="438912" cy="438912"/>
-          </a:xfrm>
-          <a:prstGeom prst="roundRect">
-            <a:avLst>
-              <a:gd name="adj" fmla="val 12000"/>
-            </a:avLst>
-          </a:prstGeom>
-          <a:solidFill>
-            <a:srgbClr val="095292"/>
-          </a:solidFill>
-          <a:ln>
-            <a:noFill/>
-          </a:ln>
-        </p:spPr>
-        <p:style>
-          <a:lnRef idx="1">
-            <a:schemeClr val="accent1"/>
-          </a:lnRef>
-          <a:fillRef idx="3">
-            <a:schemeClr val="accent1"/>
-          </a:fillRef>
-          <a:effectRef idx="2">
-            <a:schemeClr val="accent1"/>
-          </a:effectRef>
-          <a:fontRef idx="minor">
-            <a:schemeClr val="lt1"/>
-          </a:fontRef>
-        </p:style>
-        <p:txBody>
-          <a:bodyPr rtlCol="0" anchor="ctr"/>
-          <a:lstStyle/>
-          <a:p>
-            <a:pPr algn="ctr"/>
-          </a:p>
-        </p:txBody>
-      </p:sp>
-      <p:sp>
-        <p:nvSpPr>
-          <p:cNvPr id="23" name="TextBox 22"/>
-          <p:cNvSpPr txBox="1"/>
-          <p:nvPr/>
-        </p:nvSpPr>
-        <p:spPr>
-          <a:xfrm>
-            <a:off x="594360" y="5660136"/>
-            <a:ext cx="438912" cy="438912"/>
-          </a:xfrm>
-          <a:prstGeom prst="rect">
-            <a:avLst/>
-          </a:prstGeom>
-          <a:noFill/>
-        </p:spPr>
-        <p:txBody>
-          <a:bodyPr wrap="square" anchor="ctr"/>
-          <a:lstStyle/>
-          <a:p>
-            <a:pPr algn="ctr"/>
-            <a:r>
-              <a:rPr sz="1600" b="1" i="0">
-                <a:solidFill>
-                  <a:srgbClr val="FFFFFF"/>
-                </a:solidFill>
-                <a:latin typeface="Calibri"/>
-              </a:rPr>
-              <a:t>5</a:t>
-            </a:r>
-          </a:p>
-        </p:txBody>
-      </p:sp>
-      <p:sp>
-        <p:nvSpPr>
-          <p:cNvPr id="24" name="TextBox 23"/>
-          <p:cNvSpPr txBox="1"/>
-          <p:nvPr/>
-        </p:nvSpPr>
-        <p:spPr>
-          <a:xfrm>
-            <a:off x="1188720" y="5495544"/>
-            <a:ext cx="10271455" cy="786384"/>
-          </a:xfrm>
-          <a:prstGeom prst="rect">
-            <a:avLst/>
-          </a:prstGeom>
-          <a:noFill/>
-        </p:spPr>
-        <p:txBody>
-          <a:bodyPr wrap="square" anchor="ctr"/>
-          <a:lstStyle/>
-          <a:p>
-            <a:r>
-              <a:rPr sz="1500" b="1" i="0">
-                <a:solidFill>
-                  <a:srgbClr val="095292"/>
-                </a:solidFill>
-                <a:latin typeface="Calibri"/>
-              </a:rPr>
-              <a:t>Paso 5: estime en puntos con la escala 1, 2, 3, 5, 8 tomando 'registrar un dueno = 3' como referencia, ordene el backlog de mayor a menor prioridad, agregue la columna de trazabilidad al RF de origen y suba el tablero a la plataforma del curso.</a:t>
-            </a:r>
-          </a:p>
-        </p:txBody>
-      </p:sp>
-      <p:sp>
-        <p:nvSpPr>
-          <p:cNvPr id="25" name="TextBox 24"/>
+          <a:bodyPr wrap="square">
+            <a:spAutoFit/>
+          </a:bodyPr>
+          <a:lstStyle/>
+          <a:p>
+            <a:pPr>
+              <a:spcAft>
+                <a:spcPts val="800"/>
+              </a:spcAft>
+            </a:pPr>
+            <a:r>
+              <a:rPr sz="2000" b="0" i="0">
+                <a:solidFill>
+                  <a:srgbClr val="333333"/>
+                </a:solidFill>
+                <a:latin typeface="Calibri"/>
+              </a:rPr>
+              <a:t>–   </a:t>
+            </a:r>
+            <a:r>
+              <a:rPr sz="2000" b="1" i="0">
+                <a:solidFill>
+                  <a:srgbClr val="333333"/>
+                </a:solidFill>
+                <a:latin typeface="Calibri"/>
+              </a:rPr>
+              <a:t>Por que importa al PI:</a:t>
+            </a:r>
+            <a:r>
+              <a:rPr sz="2000" b="0" i="0">
+                <a:solidFill>
+                  <a:srgbClr val="333333"/>
+                </a:solidFill>
+                <a:latin typeface="Calibri"/>
+              </a:rPr>
+              <a:t> el backlog es la version ejecutable del catalogo de requisitos; es la lista con la que se decide que se disena primero y, en Programacion II, que se codifica primero.</a:t>
+            </a:r>
+          </a:p>
+          <a:p>
+            <a:pPr>
+              <a:spcAft>
+                <a:spcPts val="800"/>
+              </a:spcAft>
+            </a:pPr>
+            <a:r>
+              <a:rPr sz="2000" b="0" i="0">
+                <a:solidFill>
+                  <a:srgbClr val="333333"/>
+                </a:solidFill>
+                <a:latin typeface="Calibri"/>
+              </a:rPr>
+              <a:t>–   Los criterios de aceptacion que escriba hoy se vuelven literalmente el guion de revision del prototipo navegable y de las pruebas del sistema.</a:t>
+            </a:r>
+          </a:p>
+          <a:p>
+            <a:pPr>
+              <a:spcAft>
+                <a:spcPts val="800"/>
+              </a:spcAft>
+            </a:pPr>
+            <a:r>
+              <a:rPr sz="2000" b="0" i="0">
+                <a:solidFill>
+                  <a:srgbClr val="333333"/>
+                </a:solidFill>
+                <a:latin typeface="Calibri"/>
+              </a:rPr>
+              <a:t>–   Una historia sin beneficio claro es una funcionalidad que nadie va a extranar si no se hace: aqui es donde se justifica cada pantalla de VetCare.</a:t>
+            </a:r>
+          </a:p>
+        </p:txBody>
+      </p:sp>
+      <p:sp>
+        <p:nvSpPr>
+          <p:cNvPr id="6" name="TextBox 5"/>
           <p:cNvSpPr txBox="1"/>
           <p:nvPr/>
         </p:nvSpPr>
@@ -8095,154 +8001,21 @@
                 </a:solidFill>
                 <a:latin typeface="Calibri"/>
               </a:rPr>
-              <a:t>Antes de entregar — autochequeo</a:t>
-            </a:r>
-          </a:p>
-        </p:txBody>
-      </p:sp>
-      <p:sp>
-        <p:nvSpPr>
-          <p:cNvPr id="5" name="Rounded Rectangle 4"/>
-          <p:cNvSpPr/>
-          <p:nvPr/>
-        </p:nvSpPr>
-        <p:spPr>
-          <a:xfrm>
-            <a:off x="457200" y="1261872"/>
-            <a:ext cx="11277295" cy="566928"/>
-          </a:xfrm>
-          <a:prstGeom prst="roundRect">
-            <a:avLst>
-              <a:gd name="adj" fmla="val 12000"/>
-            </a:avLst>
-          </a:prstGeom>
-          <a:solidFill>
-            <a:srgbClr val="F2F2F2"/>
-          </a:solidFill>
-          <a:ln>
-            <a:noFill/>
-          </a:ln>
-        </p:spPr>
-        <p:style>
-          <a:lnRef idx="1">
-            <a:schemeClr val="accent1"/>
-          </a:lnRef>
-          <a:fillRef idx="3">
-            <a:schemeClr val="accent1"/>
-          </a:fillRef>
-          <a:effectRef idx="2">
-            <a:schemeClr val="accent1"/>
-          </a:effectRef>
-          <a:fontRef idx="minor">
-            <a:schemeClr val="lt1"/>
-          </a:fontRef>
-        </p:style>
-        <p:txBody>
-          <a:bodyPr rtlCol="0" anchor="ctr"/>
-          <a:lstStyle/>
-          <a:p>
-            <a:pPr algn="ctr"/>
-          </a:p>
-        </p:txBody>
-      </p:sp>
-      <p:sp>
-        <p:nvSpPr>
-          <p:cNvPr id="6" name="Rectangle 5"/>
-          <p:cNvSpPr/>
-          <p:nvPr/>
-        </p:nvSpPr>
-        <p:spPr>
-          <a:xfrm>
-            <a:off x="640080" y="1408175"/>
-            <a:ext cx="274320" cy="274320"/>
-          </a:xfrm>
-          <a:prstGeom prst="rect">
-            <a:avLst/>
-          </a:prstGeom>
-          <a:solidFill>
-            <a:srgbClr val="FFFFFF"/>
-          </a:solidFill>
-          <a:ln>
-            <a:solidFill>
-              <a:srgbClr val="333333"/>
-            </a:solidFill>
-          </a:ln>
-        </p:spPr>
-        <p:style>
-          <a:lnRef idx="1">
-            <a:schemeClr val="accent1"/>
-          </a:lnRef>
-          <a:fillRef idx="3">
-            <a:schemeClr val="accent1"/>
-          </a:fillRef>
-          <a:effectRef idx="2">
-            <a:schemeClr val="accent1"/>
-          </a:effectRef>
-          <a:fontRef idx="minor">
-            <a:schemeClr val="lt1"/>
-          </a:fontRef>
-        </p:style>
-        <p:txBody>
-          <a:bodyPr rtlCol="0" anchor="ctr"/>
-          <a:lstStyle/>
-          <a:p>
-            <a:pPr algn="ctr"/>
-          </a:p>
-        </p:txBody>
-      </p:sp>
-      <p:sp>
-        <p:nvSpPr>
-          <p:cNvPr id="7" name="Rectangle 6"/>
-          <p:cNvSpPr/>
-          <p:nvPr/>
-        </p:nvSpPr>
-        <p:spPr>
-          <a:xfrm>
-            <a:off x="640080" y="1408175"/>
-            <a:ext cx="73152" cy="274320"/>
-          </a:xfrm>
-          <a:prstGeom prst="rect">
-            <a:avLst/>
-          </a:prstGeom>
-          <a:solidFill>
-            <a:srgbClr val="269CCB"/>
-          </a:solidFill>
-          <a:ln>
-            <a:noFill/>
-          </a:ln>
-        </p:spPr>
-        <p:style>
-          <a:lnRef idx="1">
-            <a:schemeClr val="accent1"/>
-          </a:lnRef>
-          <a:fillRef idx="3">
-            <a:schemeClr val="accent1"/>
-          </a:fillRef>
-          <a:effectRef idx="2">
-            <a:schemeClr val="accent1"/>
-          </a:effectRef>
-          <a:fontRef idx="minor">
-            <a:schemeClr val="lt1"/>
-          </a:fontRef>
-        </p:style>
-        <p:txBody>
-          <a:bodyPr rtlCol="0" anchor="ctr"/>
-          <a:lstStyle/>
-          <a:p>
-            <a:pPr algn="ctr"/>
-          </a:p>
-        </p:txBody>
-      </p:sp>
-      <p:sp>
-        <p:nvSpPr>
-          <p:cNvPr id="8" name="TextBox 7"/>
+              <a:t>Taller PI — punto de partida</a:t>
+            </a:r>
+          </a:p>
+        </p:txBody>
+      </p:sp>
+      <p:sp>
+        <p:nvSpPr>
+          <p:cNvPr id="5" name="TextBox 4"/>
           <p:cNvSpPr txBox="1"/>
           <p:nvPr/>
         </p:nvSpPr>
         <p:spPr>
           <a:xfrm>
-            <a:off x="1097280" y="1353312"/>
-            <a:ext cx="10362895" cy="402336"/>
+            <a:off x="457200" y="1170432"/>
+            <a:ext cx="11277295" cy="5230368"/>
           </a:xfrm>
           <a:prstGeom prst="rect">
             <a:avLst/>
@@ -8250,354 +8023,63 @@
           <a:noFill/>
         </p:spPr>
         <p:txBody>
-          <a:bodyPr wrap="square" anchor="ctr"/>
-          <a:lstStyle/>
-          <a:p>
-            <a:r>
-              <a:rPr sz="1500" b="0" i="0">
+          <a:bodyPr wrap="square">
+            <a:spAutoFit/>
+          </a:bodyPr>
+          <a:lstStyle/>
+          <a:p>
+            <a:pPr>
+              <a:spcAft>
+                <a:spcPts val="800"/>
+              </a:spcAft>
+            </a:pPr>
+            <a:r>
+              <a:rPr sz="2000" b="0" i="0">
                 <a:solidFill>
                   <a:srgbClr val="333333"/>
                 </a:solidFill>
                 <a:latin typeface="Calibri"/>
               </a:rPr>
-              <a:t>Si le leo esta historia al Dr. Ramirez sin explicarle nada, entiende quien gana algo y que gana, o solo entiende que hay una pantalla nueva?</a:t>
-            </a:r>
-          </a:p>
-        </p:txBody>
-      </p:sp>
-      <p:sp>
-        <p:nvSpPr>
-          <p:cNvPr id="9" name="Rounded Rectangle 8"/>
-          <p:cNvSpPr/>
-          <p:nvPr/>
-        </p:nvSpPr>
-        <p:spPr>
-          <a:xfrm>
-            <a:off x="457200" y="1938528"/>
-            <a:ext cx="11277295" cy="566928"/>
-          </a:xfrm>
-          <a:prstGeom prst="roundRect">
-            <a:avLst>
-              <a:gd name="adj" fmla="val 12000"/>
-            </a:avLst>
-          </a:prstGeom>
-          <a:solidFill>
-            <a:srgbClr val="F2F2F2"/>
-          </a:solidFill>
-          <a:ln>
-            <a:noFill/>
-          </a:ln>
-        </p:spPr>
-        <p:style>
-          <a:lnRef idx="1">
-            <a:schemeClr val="accent1"/>
-          </a:lnRef>
-          <a:fillRef idx="3">
-            <a:schemeClr val="accent1"/>
-          </a:fillRef>
-          <a:effectRef idx="2">
-            <a:schemeClr val="accent1"/>
-          </a:effectRef>
-          <a:fontRef idx="minor">
-            <a:schemeClr val="lt1"/>
-          </a:fontRef>
-        </p:style>
-        <p:txBody>
-          <a:bodyPr rtlCol="0" anchor="ctr"/>
-          <a:lstStyle/>
-          <a:p>
-            <a:pPr algn="ctr"/>
-          </a:p>
-        </p:txBody>
-      </p:sp>
-      <p:sp>
-        <p:nvSpPr>
-          <p:cNvPr id="10" name="Rectangle 9"/>
-          <p:cNvSpPr/>
-          <p:nvPr/>
-        </p:nvSpPr>
-        <p:spPr>
-          <a:xfrm>
-            <a:off x="640080" y="2084832"/>
-            <a:ext cx="274320" cy="274320"/>
-          </a:xfrm>
-          <a:prstGeom prst="rect">
-            <a:avLst/>
-          </a:prstGeom>
-          <a:solidFill>
-            <a:srgbClr val="FFFFFF"/>
-          </a:solidFill>
-          <a:ln>
-            <a:solidFill>
-              <a:srgbClr val="333333"/>
-            </a:solidFill>
-          </a:ln>
-        </p:spPr>
-        <p:style>
-          <a:lnRef idx="1">
-            <a:schemeClr val="accent1"/>
-          </a:lnRef>
-          <a:fillRef idx="3">
-            <a:schemeClr val="accent1"/>
-          </a:fillRef>
-          <a:effectRef idx="2">
-            <a:schemeClr val="accent1"/>
-          </a:effectRef>
-          <a:fontRef idx="minor">
-            <a:schemeClr val="lt1"/>
-          </a:fontRef>
-        </p:style>
-        <p:txBody>
-          <a:bodyPr rtlCol="0" anchor="ctr"/>
-          <a:lstStyle/>
-          <a:p>
-            <a:pPr algn="ctr"/>
-          </a:p>
-        </p:txBody>
-      </p:sp>
-      <p:sp>
-        <p:nvSpPr>
-          <p:cNvPr id="11" name="Rectangle 10"/>
-          <p:cNvSpPr/>
-          <p:nvPr/>
-        </p:nvSpPr>
-        <p:spPr>
-          <a:xfrm>
-            <a:off x="640080" y="2084832"/>
-            <a:ext cx="73152" cy="274320"/>
-          </a:xfrm>
-          <a:prstGeom prst="rect">
-            <a:avLst/>
-          </a:prstGeom>
-          <a:solidFill>
-            <a:srgbClr val="269CCB"/>
-          </a:solidFill>
-          <a:ln>
-            <a:noFill/>
-          </a:ln>
-        </p:spPr>
-        <p:style>
-          <a:lnRef idx="1">
-            <a:schemeClr val="accent1"/>
-          </a:lnRef>
-          <a:fillRef idx="3">
-            <a:schemeClr val="accent1"/>
-          </a:fillRef>
-          <a:effectRef idx="2">
-            <a:schemeClr val="accent1"/>
-          </a:effectRef>
-          <a:fontRef idx="minor">
-            <a:schemeClr val="lt1"/>
-          </a:fontRef>
-        </p:style>
-        <p:txBody>
-          <a:bodyPr rtlCol="0" anchor="ctr"/>
-          <a:lstStyle/>
-          <a:p>
-            <a:pPr algn="ctr"/>
-          </a:p>
-        </p:txBody>
-      </p:sp>
-      <p:sp>
-        <p:nvSpPr>
-          <p:cNvPr id="12" name="TextBox 11"/>
-          <p:cNvSpPr txBox="1"/>
-          <p:nvPr/>
-        </p:nvSpPr>
-        <p:spPr>
-          <a:xfrm>
-            <a:off x="1097280" y="2029968"/>
-            <a:ext cx="10362895" cy="402336"/>
-          </a:xfrm>
-          <a:prstGeom prst="rect">
-            <a:avLst/>
-          </a:prstGeom>
-          <a:noFill/>
-        </p:spPr>
-        <p:txBody>
-          <a:bodyPr wrap="square" anchor="ctr"/>
-          <a:lstStyle/>
-          <a:p>
-            <a:r>
-              <a:rPr sz="1500" b="0" i="0">
+              <a:t>–   Ya existe el catalogo de requisitos de VetCare con RF, RNF, prioridades MoSCoW y matriz de trazabilidad aprobados en la clase anterior.</a:t>
+            </a:r>
+          </a:p>
+          <a:p>
+            <a:pPr>
+              <a:spcAft>
+                <a:spcPts val="800"/>
+              </a:spcAft>
+            </a:pPr>
+            <a:r>
+              <a:rPr sz="2000" b="0" i="0">
                 <a:solidFill>
                   <a:srgbClr val="333333"/>
                 </a:solidFill>
                 <a:latin typeface="Calibri"/>
               </a:rPr>
-              <a:t>El 'para' de mi historia esta repitiendo la accion con otras palabras, o dice de verdad el beneficio para la clinica?</a:t>
-            </a:r>
-          </a:p>
-        </p:txBody>
-      </p:sp>
-      <p:sp>
-        <p:nvSpPr>
-          <p:cNvPr id="13" name="Rounded Rectangle 12"/>
-          <p:cNvSpPr/>
-          <p:nvPr/>
-        </p:nvSpPr>
-        <p:spPr>
-          <a:xfrm>
-            <a:off x="457200" y="2615184"/>
-            <a:ext cx="11277295" cy="566928"/>
-          </a:xfrm>
-          <a:prstGeom prst="roundRect">
-            <a:avLst>
-              <a:gd name="adj" fmla="val 12000"/>
-            </a:avLst>
-          </a:prstGeom>
-          <a:solidFill>
-            <a:srgbClr val="F2F2F2"/>
-          </a:solidFill>
-          <a:ln>
-            <a:noFill/>
-          </a:ln>
-        </p:spPr>
-        <p:style>
-          <a:lnRef idx="1">
-            <a:schemeClr val="accent1"/>
-          </a:lnRef>
-          <a:fillRef idx="3">
-            <a:schemeClr val="accent1"/>
-          </a:fillRef>
-          <a:effectRef idx="2">
-            <a:schemeClr val="accent1"/>
-          </a:effectRef>
-          <a:fontRef idx="minor">
-            <a:schemeClr val="lt1"/>
-          </a:fontRef>
-        </p:style>
-        <p:txBody>
-          <a:bodyPr rtlCol="0" anchor="ctr"/>
-          <a:lstStyle/>
-          <a:p>
-            <a:pPr algn="ctr"/>
-          </a:p>
-        </p:txBody>
-      </p:sp>
-      <p:sp>
-        <p:nvSpPr>
-          <p:cNvPr id="14" name="Rectangle 13"/>
-          <p:cNvSpPr/>
-          <p:nvPr/>
-        </p:nvSpPr>
-        <p:spPr>
-          <a:xfrm>
-            <a:off x="640080" y="2761488"/>
-            <a:ext cx="274320" cy="274320"/>
-          </a:xfrm>
-          <a:prstGeom prst="rect">
-            <a:avLst/>
-          </a:prstGeom>
-          <a:solidFill>
-            <a:srgbClr val="FFFFFF"/>
-          </a:solidFill>
-          <a:ln>
-            <a:solidFill>
-              <a:srgbClr val="333333"/>
-            </a:solidFill>
-          </a:ln>
-        </p:spPr>
-        <p:style>
-          <a:lnRef idx="1">
-            <a:schemeClr val="accent1"/>
-          </a:lnRef>
-          <a:fillRef idx="3">
-            <a:schemeClr val="accent1"/>
-          </a:fillRef>
-          <a:effectRef idx="2">
-            <a:schemeClr val="accent1"/>
-          </a:effectRef>
-          <a:fontRef idx="minor">
-            <a:schemeClr val="lt1"/>
-          </a:fontRef>
-        </p:style>
-        <p:txBody>
-          <a:bodyPr rtlCol="0" anchor="ctr"/>
-          <a:lstStyle/>
-          <a:p>
-            <a:pPr algn="ctr"/>
-          </a:p>
-        </p:txBody>
-      </p:sp>
-      <p:sp>
-        <p:nvSpPr>
-          <p:cNvPr id="15" name="Rectangle 14"/>
-          <p:cNvSpPr/>
-          <p:nvPr/>
-        </p:nvSpPr>
-        <p:spPr>
-          <a:xfrm>
-            <a:off x="640080" y="2761488"/>
-            <a:ext cx="73152" cy="274320"/>
-          </a:xfrm>
-          <a:prstGeom prst="rect">
-            <a:avLst/>
-          </a:prstGeom>
-          <a:solidFill>
-            <a:srgbClr val="269CCB"/>
-          </a:solidFill>
-          <a:ln>
-            <a:noFill/>
-          </a:ln>
-        </p:spPr>
-        <p:style>
-          <a:lnRef idx="1">
-            <a:schemeClr val="accent1"/>
-          </a:lnRef>
-          <a:fillRef idx="3">
-            <a:schemeClr val="accent1"/>
-          </a:fillRef>
-          <a:effectRef idx="2">
-            <a:schemeClr val="accent1"/>
-          </a:effectRef>
-          <a:fontRef idx="minor">
-            <a:schemeClr val="lt1"/>
-          </a:fontRef>
-        </p:style>
-        <p:txBody>
-          <a:bodyPr rtlCol="0" anchor="ctr"/>
-          <a:lstStyle/>
-          <a:p>
-            <a:pPr algn="ctr"/>
-          </a:p>
-        </p:txBody>
-      </p:sp>
-      <p:sp>
-        <p:nvSpPr>
-          <p:cNvPr id="16" name="TextBox 15"/>
-          <p:cNvSpPr txBox="1"/>
-          <p:nvPr/>
-        </p:nvSpPr>
-        <p:spPr>
-          <a:xfrm>
-            <a:off x="1097280" y="2706624"/>
-            <a:ext cx="10362895" cy="402336"/>
-          </a:xfrm>
-          <a:prstGeom prst="rect">
-            <a:avLst/>
-          </a:prstGeom>
-          <a:noFill/>
-        </p:spPr>
-        <p:txBody>
-          <a:bodyPr wrap="square" anchor="ctr"/>
-          <a:lstStyle/>
-          <a:p>
-            <a:r>
-              <a:rPr sz="1500" b="0" i="0">
+              <a:t>–   Ese catalogo esta escrito en lenguaje formal de analista y todavia no permite decidir por donde arrancar ni cuanto pesa cada pieza.</a:t>
+            </a:r>
+          </a:p>
+          <a:p>
+            <a:pPr>
+              <a:spcAft>
+                <a:spcPts val="800"/>
+              </a:spcAft>
+            </a:pPr>
+            <a:r>
+              <a:rPr sz="2000" b="0" i="0">
                 <a:solidFill>
                   <a:srgbClr val="333333"/>
                 </a:solidFill>
                 <a:latin typeface="Calibri"/>
               </a:rPr>
-              <a:t>Si esta historia se entregara sola, sin ninguna otra, el usuario podria hacer algo completo de principio a fin?</a:t>
-            </a:r>
-          </a:p>
-        </p:txBody>
-      </p:sp>
-      <p:sp>
-        <p:nvSpPr>
-          <p:cNvPr id="17" name="TextBox 16"/>
+              <a:t>–   El equipo del Proyecto Integrador necesita una lista ordenada de trabajo para poder repartirse las siguientes semanas entre diseno y construccion.</a:t>
+            </a:r>
+          </a:p>
+        </p:txBody>
+      </p:sp>
+      <p:sp>
+        <p:nvSpPr>
+          <p:cNvPr id="6" name="TextBox 5"/>
           <p:cNvSpPr txBox="1"/>
           <p:nvPr/>
         </p:nvSpPr>
@@ -8771,21 +8253,111 @@
                 </a:solidFill>
                 <a:latin typeface="Calibri"/>
               </a:rPr>
-              <a:t>Criterios de exito / entregable</a:t>
-            </a:r>
-          </a:p>
-        </p:txBody>
-      </p:sp>
-      <p:sp>
-        <p:nvSpPr>
-          <p:cNvPr id="5" name="TextBox 4"/>
+              <a:t>Taller PI — pasos guiados</a:t>
+            </a:r>
+          </a:p>
+        </p:txBody>
+      </p:sp>
+      <p:sp>
+        <p:nvSpPr>
+          <p:cNvPr id="5" name="Rounded Rectangle 4"/>
+          <p:cNvSpPr/>
+          <p:nvPr/>
+        </p:nvSpPr>
+        <p:spPr>
+          <a:xfrm>
+            <a:off x="457200" y="1234440"/>
+            <a:ext cx="11277295" cy="950976"/>
+          </a:xfrm>
+          <a:prstGeom prst="roundRect">
+            <a:avLst>
+              <a:gd name="adj" fmla="val 12000"/>
+            </a:avLst>
+          </a:prstGeom>
+          <a:solidFill>
+            <a:srgbClr val="F2F2F2"/>
+          </a:solidFill>
+          <a:ln>
+            <a:noFill/>
+          </a:ln>
+        </p:spPr>
+        <p:style>
+          <a:lnRef idx="1">
+            <a:schemeClr val="accent1"/>
+          </a:lnRef>
+          <a:fillRef idx="3">
+            <a:schemeClr val="accent1"/>
+          </a:fillRef>
+          <a:effectRef idx="2">
+            <a:schemeClr val="accent1"/>
+          </a:effectRef>
+          <a:fontRef idx="minor">
+            <a:schemeClr val="lt1"/>
+          </a:fontRef>
+        </p:style>
+        <p:txBody>
+          <a:bodyPr rtlCol="0" anchor="ctr"/>
+          <a:lstStyle/>
+          <a:p>
+            <a:pPr algn="ctr"/>
+          </a:p>
+        </p:txBody>
+      </p:sp>
+      <p:sp>
+        <p:nvSpPr>
+          <p:cNvPr id="6" name="Rounded Rectangle 5"/>
+          <p:cNvSpPr/>
+          <p:nvPr/>
+        </p:nvSpPr>
+        <p:spPr>
+          <a:xfrm>
+            <a:off x="594360" y="1490472"/>
+            <a:ext cx="438912" cy="438912"/>
+          </a:xfrm>
+          <a:prstGeom prst="roundRect">
+            <a:avLst>
+              <a:gd name="adj" fmla="val 12000"/>
+            </a:avLst>
+          </a:prstGeom>
+          <a:solidFill>
+            <a:srgbClr val="095292"/>
+          </a:solidFill>
+          <a:ln>
+            <a:noFill/>
+          </a:ln>
+        </p:spPr>
+        <p:style>
+          <a:lnRef idx="1">
+            <a:schemeClr val="accent1"/>
+          </a:lnRef>
+          <a:fillRef idx="3">
+            <a:schemeClr val="accent1"/>
+          </a:fillRef>
+          <a:effectRef idx="2">
+            <a:schemeClr val="accent1"/>
+          </a:effectRef>
+          <a:fontRef idx="minor">
+            <a:schemeClr val="lt1"/>
+          </a:fontRef>
+        </p:style>
+        <p:txBody>
+          <a:bodyPr rtlCol="0" anchor="ctr"/>
+          <a:lstStyle/>
+          <a:p>
+            <a:pPr algn="ctr"/>
+          </a:p>
+        </p:txBody>
+      </p:sp>
+      <p:sp>
+        <p:nvSpPr>
+          <p:cNvPr id="7" name="TextBox 6"/>
           <p:cNvSpPr txBox="1"/>
           <p:nvPr/>
         </p:nvSpPr>
         <p:spPr>
           <a:xfrm>
-            <a:off x="457200" y="1170432"/>
-            <a:ext cx="11277295" cy="5230368"/>
+            <a:off x="594360" y="1490472"/>
+            <a:ext cx="438912" cy="438912"/>
           </a:xfrm>
           <a:prstGeom prst="rect">
             <a:avLst/>
@@ -8793,219 +8365,677 @@
           <a:noFill/>
         </p:spPr>
         <p:txBody>
-          <a:bodyPr wrap="square">
-            <a:spAutoFit/>
-          </a:bodyPr>
-          <a:lstStyle/>
-          <a:p>
-            <a:pPr>
-              <a:spcAft>
-                <a:spcPts val="800"/>
-              </a:spcAft>
-            </a:pPr>
-            <a:r>
-              <a:rPr sz="2000" b="0" i="0">
-                <a:solidFill>
-                  <a:srgbClr val="333333"/>
-                </a:solidFill>
-                <a:latin typeface="Calibri"/>
-              </a:rPr>
-              <a:t>–   </a:t>
-            </a:r>
-            <a:r>
-              <a:rPr sz="2000" b="1" i="0">
-                <a:solidFill>
-                  <a:srgbClr val="333333"/>
-                </a:solidFill>
-                <a:latin typeface="Calibri"/>
-              </a:rPr>
-              <a:t>Entregable:</a:t>
-            </a:r>
-            <a:r>
-              <a:rPr sz="2000" b="0" i="0">
-                <a:solidFill>
-                  <a:srgbClr val="333333"/>
-                </a:solidFill>
-                <a:latin typeface="Calibri"/>
-              </a:rPr>
-              <a:t> Tablero de backlog con 8 historias en formato Como/quiero/para, cada una con 2 o 3 criterios de aceptacion en Dado-Cuando-Entonces, estimacion en puntos y trazabilidad al RF de la clase 6, subido a la plataforma del curso.</a:t>
-            </a:r>
-          </a:p>
-          <a:p>
-            <a:pPr>
-              <a:spcAft>
-                <a:spcPts val="800"/>
-              </a:spcAft>
-            </a:pPr>
-            <a:r>
-              <a:rPr sz="2000" b="0" i="0">
-                <a:solidFill>
-                  <a:srgbClr val="333333"/>
-                </a:solidFill>
-                <a:latin typeface="Calibri"/>
-              </a:rPr>
-              <a:t>–   </a:t>
-            </a:r>
-            <a:r>
-              <a:rPr sz="2000" b="1" i="0">
-                <a:solidFill>
-                  <a:srgbClr val="333333"/>
-                </a:solidFill>
-                <a:latin typeface="Calibri"/>
-              </a:rPr>
-              <a:t>Exito:</a:t>
-            </a:r>
-            <a:r>
-              <a:rPr sz="2000" b="0" i="0">
-                <a:solidFill>
-                  <a:srgbClr val="333333"/>
-                </a:solidFill>
-                <a:latin typeface="Calibri"/>
-              </a:rPr>
-              <a:t> Las 8 historias usan roles concretos de la clinica Huellitas y ninguna emplea el rol generico usuario.</a:t>
-            </a:r>
-          </a:p>
-          <a:p>
-            <a:pPr>
-              <a:spcAft>
-                <a:spcPts val="800"/>
-              </a:spcAft>
-            </a:pPr>
-            <a:r>
-              <a:rPr sz="2000" b="0" i="0">
-                <a:solidFill>
-                  <a:srgbClr val="333333"/>
-                </a:solidFill>
-                <a:latin typeface="Calibri"/>
-              </a:rPr>
-              <a:t>–   </a:t>
-            </a:r>
-            <a:r>
-              <a:rPr sz="2000" b="1" i="0">
-                <a:solidFill>
-                  <a:srgbClr val="333333"/>
-                </a:solidFill>
-                <a:latin typeface="Calibri"/>
-              </a:rPr>
-              <a:t>Exito:</a:t>
-            </a:r>
-            <a:r>
-              <a:rPr sz="2000" b="0" i="0">
-                <a:solidFill>
-                  <a:srgbClr val="333333"/>
-                </a:solidFill>
-                <a:latin typeface="Calibri"/>
-              </a:rPr>
-              <a:t> Cada historia tiene minimo 2 criterios de aceptacion en Dado-Cuando-Entonces y al menos cuatro incluyen un camino alterno o de error.</a:t>
-            </a:r>
-          </a:p>
-          <a:p>
-            <a:pPr>
-              <a:spcAft>
-                <a:spcPts val="800"/>
-              </a:spcAft>
-            </a:pPr>
-            <a:r>
-              <a:rPr sz="2000" b="0" i="0">
-                <a:solidFill>
-                  <a:srgbClr val="333333"/>
-                </a:solidFill>
-                <a:latin typeface="Calibri"/>
-              </a:rPr>
-              <a:t>–   </a:t>
-            </a:r>
-            <a:r>
-              <a:rPr sz="2000" b="1" i="0">
-                <a:solidFill>
-                  <a:srgbClr val="333333"/>
-                </a:solidFill>
-                <a:latin typeface="Calibri"/>
-              </a:rPr>
-              <a:t>Exito:</a:t>
-            </a:r>
-            <a:r>
-              <a:rPr sz="2000" b="0" i="0">
-                <a:solidFill>
-                  <a:srgbClr val="333333"/>
-                </a:solidFill>
-                <a:latin typeface="Calibri"/>
-              </a:rPr>
-              <a:t> Todas las historias pasan INVEST con al menos cinco de las seis letras en si, y ninguna esta cortada por capas tecnicas.</a:t>
-            </a:r>
-          </a:p>
-          <a:p>
-            <a:pPr>
-              <a:spcAft>
-                <a:spcPts val="800"/>
-              </a:spcAft>
-            </a:pPr>
-            <a:r>
-              <a:rPr sz="2000" b="0" i="0">
-                <a:solidFill>
-                  <a:srgbClr val="333333"/>
-                </a:solidFill>
-                <a:latin typeface="Calibri"/>
-              </a:rPr>
-              <a:t>–   </a:t>
-            </a:r>
-            <a:r>
-              <a:rPr sz="2000" b="1" i="0">
-                <a:solidFill>
-                  <a:srgbClr val="333333"/>
-                </a:solidFill>
-                <a:latin typeface="Calibri"/>
-              </a:rPr>
-              <a:t>Exito:</a:t>
-            </a:r>
-            <a:r>
-              <a:rPr sz="2000" b="0" i="0">
-                <a:solidFill>
-                  <a:srgbClr val="333333"/>
-                </a:solidFill>
-                <a:latin typeface="Calibri"/>
-              </a:rPr>
-              <a:t> Cada historia trae estimacion en puntos, prioridad y el RF de origen; ninguna historia supera los 8 puntos sin partirse.</a:t>
-            </a:r>
-          </a:p>
-          <a:p>
-            <a:pPr>
-              <a:spcAft>
-                <a:spcPts val="800"/>
-              </a:spcAft>
-            </a:pPr>
-            <a:r>
-              <a:rPr sz="2000" b="0" i="0">
-                <a:solidFill>
-                  <a:srgbClr val="333333"/>
-                </a:solidFill>
-                <a:latin typeface="Calibri"/>
-              </a:rPr>
-              <a:t>–   </a:t>
-            </a:r>
-            <a:r>
-              <a:rPr sz="2000" b="1" i="0">
-                <a:solidFill>
-                  <a:srgbClr val="333333"/>
-                </a:solidFill>
-                <a:latin typeface="Calibri"/>
-              </a:rPr>
-              <a:t>Entrega en la plataforma del curso</a:t>
-            </a:r>
-            <a:r>
-              <a:rPr sz="2000" b="0" i="0">
-                <a:solidFill>
-                  <a:srgbClr val="333333"/>
-                </a:solidFill>
-                <a:latin typeface="Calibri"/>
-              </a:rPr>
-              <a:t> — en la fecha que indique el docente.</a:t>
-            </a:r>
-          </a:p>
-        </p:txBody>
-      </p:sp>
-      <p:sp>
-        <p:nvSpPr>
-          <p:cNvPr id="6" name="TextBox 5"/>
+          <a:bodyPr wrap="square" anchor="ctr"/>
+          <a:lstStyle/>
+          <a:p>
+            <a:pPr algn="ctr"/>
+            <a:r>
+              <a:rPr sz="1600" b="1" i="0">
+                <a:solidFill>
+                  <a:srgbClr val="FFFFFF"/>
+                </a:solidFill>
+                <a:latin typeface="Calibri"/>
+              </a:rPr>
+              <a:t>1</a:t>
+            </a:r>
+          </a:p>
+        </p:txBody>
+      </p:sp>
+      <p:sp>
+        <p:nvSpPr>
+          <p:cNvPr id="8" name="TextBox 7"/>
+          <p:cNvSpPr txBox="1"/>
+          <p:nvPr/>
+        </p:nvSpPr>
+        <p:spPr>
+          <a:xfrm>
+            <a:off x="1188720" y="1325880"/>
+            <a:ext cx="10271455" cy="786384"/>
+          </a:xfrm>
+          <a:prstGeom prst="rect">
+            <a:avLst/>
+          </a:prstGeom>
+          <a:noFill/>
+        </p:spPr>
+        <p:txBody>
+          <a:bodyPr wrap="square" anchor="ctr"/>
+          <a:lstStyle/>
+          <a:p>
+            <a:r>
+              <a:rPr sz="1500" b="1" i="0">
+                <a:solidFill>
+                  <a:srgbClr val="095292"/>
+                </a:solidFill>
+                <a:latin typeface="Calibri"/>
+              </a:rPr>
+              <a:t>Paso 1: agrupe los RF del catalogo de la clase 6 en dos epicas de VetCare (por ejemplo Gestion de pacientes e Historial y agenda) y escriba el nombre y el objetivo de cada epica en una linea.</a:t>
+            </a:r>
+          </a:p>
+        </p:txBody>
+      </p:sp>
+      <p:sp>
+        <p:nvSpPr>
+          <p:cNvPr id="9" name="Rounded Rectangle 8"/>
+          <p:cNvSpPr/>
+          <p:nvPr/>
+        </p:nvSpPr>
+        <p:spPr>
+          <a:xfrm>
+            <a:off x="457200" y="2276856"/>
+            <a:ext cx="11277295" cy="950976"/>
+          </a:xfrm>
+          <a:prstGeom prst="roundRect">
+            <a:avLst>
+              <a:gd name="adj" fmla="val 12000"/>
+            </a:avLst>
+          </a:prstGeom>
+          <a:solidFill>
+            <a:srgbClr val="E8F4FA"/>
+          </a:solidFill>
+          <a:ln>
+            <a:noFill/>
+          </a:ln>
+        </p:spPr>
+        <p:style>
+          <a:lnRef idx="1">
+            <a:schemeClr val="accent1"/>
+          </a:lnRef>
+          <a:fillRef idx="3">
+            <a:schemeClr val="accent1"/>
+          </a:fillRef>
+          <a:effectRef idx="2">
+            <a:schemeClr val="accent1"/>
+          </a:effectRef>
+          <a:fontRef idx="minor">
+            <a:schemeClr val="lt1"/>
+          </a:fontRef>
+        </p:style>
+        <p:txBody>
+          <a:bodyPr rtlCol="0" anchor="ctr"/>
+          <a:lstStyle/>
+          <a:p>
+            <a:pPr algn="ctr"/>
+          </a:p>
+        </p:txBody>
+      </p:sp>
+      <p:sp>
+        <p:nvSpPr>
+          <p:cNvPr id="10" name="Rounded Rectangle 9"/>
+          <p:cNvSpPr/>
+          <p:nvPr/>
+        </p:nvSpPr>
+        <p:spPr>
+          <a:xfrm>
+            <a:off x="594360" y="2532888"/>
+            <a:ext cx="438912" cy="438912"/>
+          </a:xfrm>
+          <a:prstGeom prst="roundRect">
+            <a:avLst>
+              <a:gd name="adj" fmla="val 12000"/>
+            </a:avLst>
+          </a:prstGeom>
+          <a:solidFill>
+            <a:srgbClr val="095292"/>
+          </a:solidFill>
+          <a:ln>
+            <a:noFill/>
+          </a:ln>
+        </p:spPr>
+        <p:style>
+          <a:lnRef idx="1">
+            <a:schemeClr val="accent1"/>
+          </a:lnRef>
+          <a:fillRef idx="3">
+            <a:schemeClr val="accent1"/>
+          </a:fillRef>
+          <a:effectRef idx="2">
+            <a:schemeClr val="accent1"/>
+          </a:effectRef>
+          <a:fontRef idx="minor">
+            <a:schemeClr val="lt1"/>
+          </a:fontRef>
+        </p:style>
+        <p:txBody>
+          <a:bodyPr rtlCol="0" anchor="ctr"/>
+          <a:lstStyle/>
+          <a:p>
+            <a:pPr algn="ctr"/>
+          </a:p>
+        </p:txBody>
+      </p:sp>
+      <p:sp>
+        <p:nvSpPr>
+          <p:cNvPr id="11" name="TextBox 10"/>
+          <p:cNvSpPr txBox="1"/>
+          <p:nvPr/>
+        </p:nvSpPr>
+        <p:spPr>
+          <a:xfrm>
+            <a:off x="594360" y="2532888"/>
+            <a:ext cx="438912" cy="438912"/>
+          </a:xfrm>
+          <a:prstGeom prst="rect">
+            <a:avLst/>
+          </a:prstGeom>
+          <a:noFill/>
+        </p:spPr>
+        <p:txBody>
+          <a:bodyPr wrap="square" anchor="ctr"/>
+          <a:lstStyle/>
+          <a:p>
+            <a:pPr algn="ctr"/>
+            <a:r>
+              <a:rPr sz="1600" b="1" i="0">
+                <a:solidFill>
+                  <a:srgbClr val="FFFFFF"/>
+                </a:solidFill>
+                <a:latin typeface="Calibri"/>
+              </a:rPr>
+              <a:t>2</a:t>
+            </a:r>
+          </a:p>
+        </p:txBody>
+      </p:sp>
+      <p:sp>
+        <p:nvSpPr>
+          <p:cNvPr id="12" name="TextBox 11"/>
+          <p:cNvSpPr txBox="1"/>
+          <p:nvPr/>
+        </p:nvSpPr>
+        <p:spPr>
+          <a:xfrm>
+            <a:off x="1188720" y="2368296"/>
+            <a:ext cx="10271455" cy="786384"/>
+          </a:xfrm>
+          <a:prstGeom prst="rect">
+            <a:avLst/>
+          </a:prstGeom>
+          <a:noFill/>
+        </p:spPr>
+        <p:txBody>
+          <a:bodyPr wrap="square" anchor="ctr"/>
+          <a:lstStyle/>
+          <a:p>
+            <a:r>
+              <a:rPr sz="1500" b="1" i="0">
+                <a:solidFill>
+                  <a:srgbClr val="095292"/>
+                </a:solidFill>
+                <a:latin typeface="Calibri"/>
+              </a:rPr>
+              <a:t>Paso 2: descomponga las dos epicas en 8 historias con el formato Como &lt;rol de la clinica Huellitas&gt; quiero &lt;accion&gt; para &lt;beneficio&gt;, usando roles concretos (auxiliar, veterinario, administrador) y nunca la palabra usuario.</a:t>
+            </a:r>
+          </a:p>
+        </p:txBody>
+      </p:sp>
+      <p:sp>
+        <p:nvSpPr>
+          <p:cNvPr id="13" name="Rounded Rectangle 12"/>
+          <p:cNvSpPr/>
+          <p:nvPr/>
+        </p:nvSpPr>
+        <p:spPr>
+          <a:xfrm>
+            <a:off x="457200" y="3319272"/>
+            <a:ext cx="11277295" cy="950976"/>
+          </a:xfrm>
+          <a:prstGeom prst="roundRect">
+            <a:avLst>
+              <a:gd name="adj" fmla="val 12000"/>
+            </a:avLst>
+          </a:prstGeom>
+          <a:solidFill>
+            <a:srgbClr val="F2F2F2"/>
+          </a:solidFill>
+          <a:ln>
+            <a:noFill/>
+          </a:ln>
+        </p:spPr>
+        <p:style>
+          <a:lnRef idx="1">
+            <a:schemeClr val="accent1"/>
+          </a:lnRef>
+          <a:fillRef idx="3">
+            <a:schemeClr val="accent1"/>
+          </a:fillRef>
+          <a:effectRef idx="2">
+            <a:schemeClr val="accent1"/>
+          </a:effectRef>
+          <a:fontRef idx="minor">
+            <a:schemeClr val="lt1"/>
+          </a:fontRef>
+        </p:style>
+        <p:txBody>
+          <a:bodyPr rtlCol="0" anchor="ctr"/>
+          <a:lstStyle/>
+          <a:p>
+            <a:pPr algn="ctr"/>
+          </a:p>
+        </p:txBody>
+      </p:sp>
+      <p:sp>
+        <p:nvSpPr>
+          <p:cNvPr id="14" name="Rounded Rectangle 13"/>
+          <p:cNvSpPr/>
+          <p:nvPr/>
+        </p:nvSpPr>
+        <p:spPr>
+          <a:xfrm>
+            <a:off x="594360" y="3575304"/>
+            <a:ext cx="438912" cy="438912"/>
+          </a:xfrm>
+          <a:prstGeom prst="roundRect">
+            <a:avLst>
+              <a:gd name="adj" fmla="val 12000"/>
+            </a:avLst>
+          </a:prstGeom>
+          <a:solidFill>
+            <a:srgbClr val="095292"/>
+          </a:solidFill>
+          <a:ln>
+            <a:noFill/>
+          </a:ln>
+        </p:spPr>
+        <p:style>
+          <a:lnRef idx="1">
+            <a:schemeClr val="accent1"/>
+          </a:lnRef>
+          <a:fillRef idx="3">
+            <a:schemeClr val="accent1"/>
+          </a:fillRef>
+          <a:effectRef idx="2">
+            <a:schemeClr val="accent1"/>
+          </a:effectRef>
+          <a:fontRef idx="minor">
+            <a:schemeClr val="lt1"/>
+          </a:fontRef>
+        </p:style>
+        <p:txBody>
+          <a:bodyPr rtlCol="0" anchor="ctr"/>
+          <a:lstStyle/>
+          <a:p>
+            <a:pPr algn="ctr"/>
+          </a:p>
+        </p:txBody>
+      </p:sp>
+      <p:sp>
+        <p:nvSpPr>
+          <p:cNvPr id="15" name="TextBox 14"/>
+          <p:cNvSpPr txBox="1"/>
+          <p:nvPr/>
+        </p:nvSpPr>
+        <p:spPr>
+          <a:xfrm>
+            <a:off x="594360" y="3575304"/>
+            <a:ext cx="438912" cy="438912"/>
+          </a:xfrm>
+          <a:prstGeom prst="rect">
+            <a:avLst/>
+          </a:prstGeom>
+          <a:noFill/>
+        </p:spPr>
+        <p:txBody>
+          <a:bodyPr wrap="square" anchor="ctr"/>
+          <a:lstStyle/>
+          <a:p>
+            <a:pPr algn="ctr"/>
+            <a:r>
+              <a:rPr sz="1600" b="1" i="0">
+                <a:solidFill>
+                  <a:srgbClr val="FFFFFF"/>
+                </a:solidFill>
+                <a:latin typeface="Calibri"/>
+              </a:rPr>
+              <a:t>3</a:t>
+            </a:r>
+          </a:p>
+        </p:txBody>
+      </p:sp>
+      <p:sp>
+        <p:nvSpPr>
+          <p:cNvPr id="16" name="TextBox 15"/>
+          <p:cNvSpPr txBox="1"/>
+          <p:nvPr/>
+        </p:nvSpPr>
+        <p:spPr>
+          <a:xfrm>
+            <a:off x="1188720" y="3410712"/>
+            <a:ext cx="10271455" cy="786384"/>
+          </a:xfrm>
+          <a:prstGeom prst="rect">
+            <a:avLst/>
+          </a:prstGeom>
+          <a:noFill/>
+        </p:spPr>
+        <p:txBody>
+          <a:bodyPr wrap="square" anchor="ctr"/>
+          <a:lstStyle/>
+          <a:p>
+            <a:r>
+              <a:rPr sz="1500" b="1" i="0">
+                <a:solidFill>
+                  <a:srgbClr val="095292"/>
+                </a:solidFill>
+                <a:latin typeface="Calibri"/>
+              </a:rPr>
+              <a:t>Paso 3: escriba 2 o 3 criterios de aceptacion por historia en Dado-Cuando-Entonces, e incluya obligatoriamente un criterio de camino alterno o de error en al menos cuatro de las ocho historias.</a:t>
+            </a:r>
+          </a:p>
+        </p:txBody>
+      </p:sp>
+      <p:sp>
+        <p:nvSpPr>
+          <p:cNvPr id="17" name="Rounded Rectangle 16"/>
+          <p:cNvSpPr/>
+          <p:nvPr/>
+        </p:nvSpPr>
+        <p:spPr>
+          <a:xfrm>
+            <a:off x="457200" y="4361688"/>
+            <a:ext cx="11277295" cy="950976"/>
+          </a:xfrm>
+          <a:prstGeom prst="roundRect">
+            <a:avLst>
+              <a:gd name="adj" fmla="val 12000"/>
+            </a:avLst>
+          </a:prstGeom>
+          <a:solidFill>
+            <a:srgbClr val="E8F4FA"/>
+          </a:solidFill>
+          <a:ln>
+            <a:noFill/>
+          </a:ln>
+        </p:spPr>
+        <p:style>
+          <a:lnRef idx="1">
+            <a:schemeClr val="accent1"/>
+          </a:lnRef>
+          <a:fillRef idx="3">
+            <a:schemeClr val="accent1"/>
+          </a:fillRef>
+          <a:effectRef idx="2">
+            <a:schemeClr val="accent1"/>
+          </a:effectRef>
+          <a:fontRef idx="minor">
+            <a:schemeClr val="lt1"/>
+          </a:fontRef>
+        </p:style>
+        <p:txBody>
+          <a:bodyPr rtlCol="0" anchor="ctr"/>
+          <a:lstStyle/>
+          <a:p>
+            <a:pPr algn="ctr"/>
+          </a:p>
+        </p:txBody>
+      </p:sp>
+      <p:sp>
+        <p:nvSpPr>
+          <p:cNvPr id="18" name="Rounded Rectangle 17"/>
+          <p:cNvSpPr/>
+          <p:nvPr/>
+        </p:nvSpPr>
+        <p:spPr>
+          <a:xfrm>
+            <a:off x="594360" y="4617720"/>
+            <a:ext cx="438912" cy="438912"/>
+          </a:xfrm>
+          <a:prstGeom prst="roundRect">
+            <a:avLst>
+              <a:gd name="adj" fmla="val 12000"/>
+            </a:avLst>
+          </a:prstGeom>
+          <a:solidFill>
+            <a:srgbClr val="095292"/>
+          </a:solidFill>
+          <a:ln>
+            <a:noFill/>
+          </a:ln>
+        </p:spPr>
+        <p:style>
+          <a:lnRef idx="1">
+            <a:schemeClr val="accent1"/>
+          </a:lnRef>
+          <a:fillRef idx="3">
+            <a:schemeClr val="accent1"/>
+          </a:fillRef>
+          <a:effectRef idx="2">
+            <a:schemeClr val="accent1"/>
+          </a:effectRef>
+          <a:fontRef idx="minor">
+            <a:schemeClr val="lt1"/>
+          </a:fontRef>
+        </p:style>
+        <p:txBody>
+          <a:bodyPr rtlCol="0" anchor="ctr"/>
+          <a:lstStyle/>
+          <a:p>
+            <a:pPr algn="ctr"/>
+          </a:p>
+        </p:txBody>
+      </p:sp>
+      <p:sp>
+        <p:nvSpPr>
+          <p:cNvPr id="19" name="TextBox 18"/>
+          <p:cNvSpPr txBox="1"/>
+          <p:nvPr/>
+        </p:nvSpPr>
+        <p:spPr>
+          <a:xfrm>
+            <a:off x="594360" y="4617720"/>
+            <a:ext cx="438912" cy="438912"/>
+          </a:xfrm>
+          <a:prstGeom prst="rect">
+            <a:avLst/>
+          </a:prstGeom>
+          <a:noFill/>
+        </p:spPr>
+        <p:txBody>
+          <a:bodyPr wrap="square" anchor="ctr"/>
+          <a:lstStyle/>
+          <a:p>
+            <a:pPr algn="ctr"/>
+            <a:r>
+              <a:rPr sz="1600" b="1" i="0">
+                <a:solidFill>
+                  <a:srgbClr val="FFFFFF"/>
+                </a:solidFill>
+                <a:latin typeface="Calibri"/>
+              </a:rPr>
+              <a:t>4</a:t>
+            </a:r>
+          </a:p>
+        </p:txBody>
+      </p:sp>
+      <p:sp>
+        <p:nvSpPr>
+          <p:cNvPr id="20" name="TextBox 19"/>
+          <p:cNvSpPr txBox="1"/>
+          <p:nvPr/>
+        </p:nvSpPr>
+        <p:spPr>
+          <a:xfrm>
+            <a:off x="1188720" y="4453128"/>
+            <a:ext cx="10271455" cy="786384"/>
+          </a:xfrm>
+          <a:prstGeom prst="rect">
+            <a:avLst/>
+          </a:prstGeom>
+          <a:noFill/>
+        </p:spPr>
+        <p:txBody>
+          <a:bodyPr wrap="square" anchor="ctr"/>
+          <a:lstStyle/>
+          <a:p>
+            <a:r>
+              <a:rPr sz="1500" b="1" i="0">
+                <a:solidFill>
+                  <a:srgbClr val="095292"/>
+                </a:solidFill>
+                <a:latin typeface="Calibri"/>
+              </a:rPr>
+              <a:t>Paso 4: revise cada historia contra INVEST marcando las seis letras con si o no; toda historia que falle dos o mas letras debe reescribirse o partirse antes de continuar.</a:t>
+            </a:r>
+          </a:p>
+        </p:txBody>
+      </p:sp>
+      <p:sp>
+        <p:nvSpPr>
+          <p:cNvPr id="21" name="Rounded Rectangle 20"/>
+          <p:cNvSpPr/>
+          <p:nvPr/>
+        </p:nvSpPr>
+        <p:spPr>
+          <a:xfrm>
+            <a:off x="457200" y="5404104"/>
+            <a:ext cx="11277295" cy="950976"/>
+          </a:xfrm>
+          <a:prstGeom prst="roundRect">
+            <a:avLst>
+              <a:gd name="adj" fmla="val 12000"/>
+            </a:avLst>
+          </a:prstGeom>
+          <a:solidFill>
+            <a:srgbClr val="F2F2F2"/>
+          </a:solidFill>
+          <a:ln>
+            <a:noFill/>
+          </a:ln>
+        </p:spPr>
+        <p:style>
+          <a:lnRef idx="1">
+            <a:schemeClr val="accent1"/>
+          </a:lnRef>
+          <a:fillRef idx="3">
+            <a:schemeClr val="accent1"/>
+          </a:fillRef>
+          <a:effectRef idx="2">
+            <a:schemeClr val="accent1"/>
+          </a:effectRef>
+          <a:fontRef idx="minor">
+            <a:schemeClr val="lt1"/>
+          </a:fontRef>
+        </p:style>
+        <p:txBody>
+          <a:bodyPr rtlCol="0" anchor="ctr"/>
+          <a:lstStyle/>
+          <a:p>
+            <a:pPr algn="ctr"/>
+          </a:p>
+        </p:txBody>
+      </p:sp>
+      <p:sp>
+        <p:nvSpPr>
+          <p:cNvPr id="22" name="Rounded Rectangle 21"/>
+          <p:cNvSpPr/>
+          <p:nvPr/>
+        </p:nvSpPr>
+        <p:spPr>
+          <a:xfrm>
+            <a:off x="594360" y="5660136"/>
+            <a:ext cx="438912" cy="438912"/>
+          </a:xfrm>
+          <a:prstGeom prst="roundRect">
+            <a:avLst>
+              <a:gd name="adj" fmla="val 12000"/>
+            </a:avLst>
+          </a:prstGeom>
+          <a:solidFill>
+            <a:srgbClr val="095292"/>
+          </a:solidFill>
+          <a:ln>
+            <a:noFill/>
+          </a:ln>
+        </p:spPr>
+        <p:style>
+          <a:lnRef idx="1">
+            <a:schemeClr val="accent1"/>
+          </a:lnRef>
+          <a:fillRef idx="3">
+            <a:schemeClr val="accent1"/>
+          </a:fillRef>
+          <a:effectRef idx="2">
+            <a:schemeClr val="accent1"/>
+          </a:effectRef>
+          <a:fontRef idx="minor">
+            <a:schemeClr val="lt1"/>
+          </a:fontRef>
+        </p:style>
+        <p:txBody>
+          <a:bodyPr rtlCol="0" anchor="ctr"/>
+          <a:lstStyle/>
+          <a:p>
+            <a:pPr algn="ctr"/>
+          </a:p>
+        </p:txBody>
+      </p:sp>
+      <p:sp>
+        <p:nvSpPr>
+          <p:cNvPr id="23" name="TextBox 22"/>
+          <p:cNvSpPr txBox="1"/>
+          <p:nvPr/>
+        </p:nvSpPr>
+        <p:spPr>
+          <a:xfrm>
+            <a:off x="594360" y="5660136"/>
+            <a:ext cx="438912" cy="438912"/>
+          </a:xfrm>
+          <a:prstGeom prst="rect">
+            <a:avLst/>
+          </a:prstGeom>
+          <a:noFill/>
+        </p:spPr>
+        <p:txBody>
+          <a:bodyPr wrap="square" anchor="ctr"/>
+          <a:lstStyle/>
+          <a:p>
+            <a:pPr algn="ctr"/>
+            <a:r>
+              <a:rPr sz="1600" b="1" i="0">
+                <a:solidFill>
+                  <a:srgbClr val="FFFFFF"/>
+                </a:solidFill>
+                <a:latin typeface="Calibri"/>
+              </a:rPr>
+              <a:t>5</a:t>
+            </a:r>
+          </a:p>
+        </p:txBody>
+      </p:sp>
+      <p:sp>
+        <p:nvSpPr>
+          <p:cNvPr id="24" name="TextBox 23"/>
+          <p:cNvSpPr txBox="1"/>
+          <p:nvPr/>
+        </p:nvSpPr>
+        <p:spPr>
+          <a:xfrm>
+            <a:off x="1188720" y="5495544"/>
+            <a:ext cx="10271455" cy="786384"/>
+          </a:xfrm>
+          <a:prstGeom prst="rect">
+            <a:avLst/>
+          </a:prstGeom>
+          <a:noFill/>
+        </p:spPr>
+        <p:txBody>
+          <a:bodyPr wrap="square" anchor="ctr"/>
+          <a:lstStyle/>
+          <a:p>
+            <a:r>
+              <a:rPr sz="1500" b="1" i="0">
+                <a:solidFill>
+                  <a:srgbClr val="095292"/>
+                </a:solidFill>
+                <a:latin typeface="Calibri"/>
+              </a:rPr>
+              <a:t>Paso 5: estime en puntos con la escala 1, 2, 3, 5, 8 tomando 'registrar un dueno = 3' como referencia, ordene el backlog de mayor a menor prioridad, agregue la columna de trazabilidad al RF de origen y suba el tablero a la plataforma del curso.</a:t>
+            </a:r>
+          </a:p>
+        </p:txBody>
+      </p:sp>
+      <p:sp>
+        <p:nvSpPr>
+          <p:cNvPr id="25" name="TextBox 24"/>
           <p:cNvSpPr txBox="1"/>
           <p:nvPr/>
         </p:nvSpPr>
@@ -9179,7 +9209,7 @@
                 </a:solidFill>
                 <a:latin typeface="Calibri"/>
               </a:rPr>
-              <a:t>Para el PI esta semana</a:t>
+              <a:t>Antes de entregar — autochequeo</a:t>
             </a:r>
           </a:p>
         </p:txBody>
@@ -9193,7 +9223,7 @@
         <p:spPr>
           <a:xfrm>
             <a:off x="457200" y="1261872"/>
-            <a:ext cx="11277295" cy="1051560"/>
+            <a:ext cx="11277295" cy="566928"/>
           </a:xfrm>
           <a:prstGeom prst="roundRect">
             <a:avLst>
@@ -9201,7 +9231,7 @@
             </a:avLst>
           </a:prstGeom>
           <a:solidFill>
-            <a:srgbClr val="E8F4FA"/>
+            <a:srgbClr val="F2F2F2"/>
           </a:solidFill>
           <a:ln>
             <a:noFill/>
@@ -9237,8 +9267,53 @@
         </p:nvSpPr>
         <p:spPr>
           <a:xfrm>
-            <a:off x="457200" y="1261872"/>
-            <a:ext cx="128016" cy="1051560"/>
+            <a:off x="640080" y="1408175"/>
+            <a:ext cx="274320" cy="274320"/>
+          </a:xfrm>
+          <a:prstGeom prst="rect">
+            <a:avLst/>
+          </a:prstGeom>
+          <a:solidFill>
+            <a:srgbClr val="FFFFFF"/>
+          </a:solidFill>
+          <a:ln>
+            <a:solidFill>
+              <a:srgbClr val="333333"/>
+            </a:solidFill>
+          </a:ln>
+        </p:spPr>
+        <p:style>
+          <a:lnRef idx="1">
+            <a:schemeClr val="accent1"/>
+          </a:lnRef>
+          <a:fillRef idx="3">
+            <a:schemeClr val="accent1"/>
+          </a:fillRef>
+          <a:effectRef idx="2">
+            <a:schemeClr val="accent1"/>
+          </a:effectRef>
+          <a:fontRef idx="minor">
+            <a:schemeClr val="lt1"/>
+          </a:fontRef>
+        </p:style>
+        <p:txBody>
+          <a:bodyPr rtlCol="0" anchor="ctr"/>
+          <a:lstStyle/>
+          <a:p>
+            <a:pPr algn="ctr"/>
+          </a:p>
+        </p:txBody>
+      </p:sp>
+      <p:sp>
+        <p:nvSpPr>
+          <p:cNvPr id="7" name="Rectangle 6"/>
+          <p:cNvSpPr/>
+          <p:nvPr/>
+        </p:nvSpPr>
+        <p:spPr>
+          <a:xfrm>
+            <a:off x="640080" y="1408175"/>
+            <a:ext cx="73152" cy="274320"/>
           </a:xfrm>
           <a:prstGeom prst="rect">
             <a:avLst/>
@@ -9274,14 +9349,14 @@
       </p:sp>
       <p:sp>
         <p:nvSpPr>
-          <p:cNvPr id="7" name="TextBox 6"/>
+          <p:cNvPr id="8" name="TextBox 7"/>
           <p:cNvSpPr txBox="1"/>
           <p:nvPr/>
         </p:nvSpPr>
         <p:spPr>
           <a:xfrm>
-            <a:off x="777240" y="1399031"/>
-            <a:ext cx="10774375" cy="822959"/>
+            <a:off x="1097280" y="1353312"/>
+            <a:ext cx="10362895" cy="402336"/>
           </a:xfrm>
           <a:prstGeom prst="rect">
             <a:avLst/>
@@ -9289,49 +9364,31 @@
           <a:noFill/>
         </p:spPr>
         <p:txBody>
-          <a:bodyPr wrap="square">
-            <a:spAutoFit/>
-          </a:bodyPr>
-          <a:lstStyle/>
-          <a:p>
-            <a:r>
-              <a:rPr sz="1200" b="1" i="0">
-                <a:solidFill>
-                  <a:srgbClr val="269CCB"/>
-                </a:solidFill>
-                <a:latin typeface="Calibri"/>
-              </a:rPr>
-              <a:t>Info</a:t>
-            </a:r>
-          </a:p>
-          <a:p>
-            <a:pPr>
-              <a:spcBef>
-                <a:spcPts val="400"/>
-              </a:spcBef>
-            </a:pPr>
-            <a:r>
-              <a:rPr sz="1400" b="0" i="0">
+          <a:bodyPr wrap="square" anchor="ctr"/>
+          <a:lstStyle/>
+          <a:p>
+            <a:r>
+              <a:rPr sz="1500" b="0" i="0">
                 <a:solidFill>
                   <a:srgbClr val="333333"/>
                 </a:solidFill>
                 <a:latin typeface="Calibri"/>
               </a:rPr>
-              <a:t>Hito: Queda listo el backlog inicial de VetCare: dos epicas descompuestas en ocho historias priorizadas, con criterios de aceptacion y talla en puntos.</a:t>
-            </a:r>
-          </a:p>
-        </p:txBody>
-      </p:sp>
-      <p:sp>
-        <p:nvSpPr>
-          <p:cNvPr id="8" name="Rounded Rectangle 7"/>
+              <a:t>Si le leo esta historia al Dr. Ramirez sin explicarle nada, entiende quien gana algo y que gana, o solo entiende que hay una pantalla nueva?</a:t>
+            </a:r>
+          </a:p>
+        </p:txBody>
+      </p:sp>
+      <p:sp>
+        <p:nvSpPr>
+          <p:cNvPr id="9" name="Rounded Rectangle 8"/>
           <p:cNvSpPr/>
           <p:nvPr/>
         </p:nvSpPr>
         <p:spPr>
           <a:xfrm>
-            <a:off x="457200" y="2478024"/>
-            <a:ext cx="11277295" cy="1051560"/>
+            <a:off x="457200" y="1938528"/>
+            <a:ext cx="11277295" cy="566928"/>
           </a:xfrm>
           <a:prstGeom prst="roundRect">
             <a:avLst>
@@ -9339,7 +9396,7 @@
             </a:avLst>
           </a:prstGeom>
           <a:solidFill>
-            <a:srgbClr val="FFF8E1"/>
+            <a:srgbClr val="F2F2F2"/>
           </a:solidFill>
           <a:ln>
             <a:noFill/>
@@ -9369,23 +9426,25 @@
       </p:sp>
       <p:sp>
         <p:nvSpPr>
-          <p:cNvPr id="9" name="Rectangle 8"/>
+          <p:cNvPr id="10" name="Rectangle 9"/>
           <p:cNvSpPr/>
           <p:nvPr/>
         </p:nvSpPr>
         <p:spPr>
           <a:xfrm>
-            <a:off x="457200" y="2478024"/>
-            <a:ext cx="128016" cy="1051560"/>
+            <a:off x="640080" y="2084832"/>
+            <a:ext cx="274320" cy="274320"/>
           </a:xfrm>
           <a:prstGeom prst="rect">
             <a:avLst/>
           </a:prstGeom>
           <a:solidFill>
-            <a:srgbClr val="FFD000"/>
+            <a:srgbClr val="FFFFFF"/>
           </a:solidFill>
           <a:ln>
-            <a:noFill/>
+            <a:solidFill>
+              <a:srgbClr val="333333"/>
+            </a:solidFill>
           </a:ln>
         </p:spPr>
         <p:style>
@@ -9412,72 +9471,20 @@
       </p:sp>
       <p:sp>
         <p:nvSpPr>
-          <p:cNvPr id="10" name="TextBox 9"/>
-          <p:cNvSpPr txBox="1"/>
-          <p:nvPr/>
-        </p:nvSpPr>
-        <p:spPr>
-          <a:xfrm>
-            <a:off x="777240" y="2615184"/>
-            <a:ext cx="10774375" cy="822959"/>
-          </a:xfrm>
-          <a:prstGeom prst="rect">
-            <a:avLst/>
-          </a:prstGeom>
-          <a:noFill/>
-        </p:spPr>
-        <p:txBody>
-          <a:bodyPr wrap="square">
-            <a:spAutoFit/>
-          </a:bodyPr>
-          <a:lstStyle/>
-          <a:p>
-            <a:r>
-              <a:rPr sz="1200" b="1" i="0">
-                <a:solidFill>
-                  <a:srgbClr val="FFD000"/>
-                </a:solidFill>
-                <a:latin typeface="Calibri"/>
-              </a:rPr>
-              <a:t>Aclaración</a:t>
-            </a:r>
-          </a:p>
-          <a:p>
-            <a:pPr>
-              <a:spcBef>
-                <a:spcPts val="400"/>
-              </a:spcBef>
-            </a:pPr>
-            <a:r>
-              <a:rPr sz="1400" b="0" i="0">
-                <a:solidFill>
-                  <a:srgbClr val="333333"/>
-                </a:solidFill>
-                <a:latin typeface="Calibri"/>
-              </a:rPr>
-              <a:t>Enunciado completo: Clases/Proyecto Integrador/ (VetCare).</a:t>
-            </a:r>
-          </a:p>
-        </p:txBody>
-      </p:sp>
-      <p:sp>
-        <p:nvSpPr>
-          <p:cNvPr id="11" name="Rounded Rectangle 10"/>
+          <p:cNvPr id="11" name="Rectangle 10"/>
           <p:cNvSpPr/>
           <p:nvPr/>
         </p:nvSpPr>
         <p:spPr>
           <a:xfrm>
-            <a:off x="457200" y="3694176"/>
-            <a:ext cx="11277295" cy="1051560"/>
-          </a:xfrm>
-          <a:prstGeom prst="roundRect">
-            <a:avLst>
-              <a:gd name="adj" fmla="val 12000"/>
-            </a:avLst>
+            <a:off x="640080" y="2084832"/>
+            <a:ext cx="73152" cy="274320"/>
+          </a:xfrm>
+          <a:prstGeom prst="rect">
+            <a:avLst/>
           </a:prstGeom>
           <a:solidFill>
-            <a:srgbClr val="FBE4E4"/>
+            <a:srgbClr val="269CCB"/>
           </a:solidFill>
           <a:ln>
             <a:noFill/>
@@ -9507,20 +9514,54 @@
       </p:sp>
       <p:sp>
         <p:nvSpPr>
-          <p:cNvPr id="12" name="Rectangle 11"/>
+          <p:cNvPr id="12" name="TextBox 11"/>
+          <p:cNvSpPr txBox="1"/>
+          <p:nvPr/>
+        </p:nvSpPr>
+        <p:spPr>
+          <a:xfrm>
+            <a:off x="1097280" y="2029968"/>
+            <a:ext cx="10362895" cy="402336"/>
+          </a:xfrm>
+          <a:prstGeom prst="rect">
+            <a:avLst/>
+          </a:prstGeom>
+          <a:noFill/>
+        </p:spPr>
+        <p:txBody>
+          <a:bodyPr wrap="square" anchor="ctr"/>
+          <a:lstStyle/>
+          <a:p>
+            <a:r>
+              <a:rPr sz="1500" b="0" i="0">
+                <a:solidFill>
+                  <a:srgbClr val="333333"/>
+                </a:solidFill>
+                <a:latin typeface="Calibri"/>
+              </a:rPr>
+              <a:t>El 'para' de mi historia esta repitiendo la accion con otras palabras, o dice de verdad el beneficio para la clinica?</a:t>
+            </a:r>
+          </a:p>
+        </p:txBody>
+      </p:sp>
+      <p:sp>
+        <p:nvSpPr>
+          <p:cNvPr id="13" name="Rounded Rectangle 12"/>
           <p:cNvSpPr/>
           <p:nvPr/>
         </p:nvSpPr>
         <p:spPr>
           <a:xfrm>
-            <a:off x="457200" y="3694176"/>
-            <a:ext cx="128016" cy="1051560"/>
-          </a:xfrm>
-          <a:prstGeom prst="rect">
-            <a:avLst/>
+            <a:off x="457200" y="2615184"/>
+            <a:ext cx="11277295" cy="566928"/>
+          </a:xfrm>
+          <a:prstGeom prst="roundRect">
+            <a:avLst>
+              <a:gd name="adj" fmla="val 12000"/>
+            </a:avLst>
           </a:prstGeom>
           <a:solidFill>
-            <a:srgbClr val="A02030"/>
+            <a:srgbClr val="F2F2F2"/>
           </a:solidFill>
           <a:ln>
             <a:noFill/>
@@ -9550,14 +9591,102 @@
       </p:sp>
       <p:sp>
         <p:nvSpPr>
-          <p:cNvPr id="13" name="TextBox 12"/>
+          <p:cNvPr id="14" name="Rectangle 13"/>
+          <p:cNvSpPr/>
+          <p:nvPr/>
+        </p:nvSpPr>
+        <p:spPr>
+          <a:xfrm>
+            <a:off x="640080" y="2761488"/>
+            <a:ext cx="274320" cy="274320"/>
+          </a:xfrm>
+          <a:prstGeom prst="rect">
+            <a:avLst/>
+          </a:prstGeom>
+          <a:solidFill>
+            <a:srgbClr val="FFFFFF"/>
+          </a:solidFill>
+          <a:ln>
+            <a:solidFill>
+              <a:srgbClr val="333333"/>
+            </a:solidFill>
+          </a:ln>
+        </p:spPr>
+        <p:style>
+          <a:lnRef idx="1">
+            <a:schemeClr val="accent1"/>
+          </a:lnRef>
+          <a:fillRef idx="3">
+            <a:schemeClr val="accent1"/>
+          </a:fillRef>
+          <a:effectRef idx="2">
+            <a:schemeClr val="accent1"/>
+          </a:effectRef>
+          <a:fontRef idx="minor">
+            <a:schemeClr val="lt1"/>
+          </a:fontRef>
+        </p:style>
+        <p:txBody>
+          <a:bodyPr rtlCol="0" anchor="ctr"/>
+          <a:lstStyle/>
+          <a:p>
+            <a:pPr algn="ctr"/>
+          </a:p>
+        </p:txBody>
+      </p:sp>
+      <p:sp>
+        <p:nvSpPr>
+          <p:cNvPr id="15" name="Rectangle 14"/>
+          <p:cNvSpPr/>
+          <p:nvPr/>
+        </p:nvSpPr>
+        <p:spPr>
+          <a:xfrm>
+            <a:off x="640080" y="2761488"/>
+            <a:ext cx="73152" cy="274320"/>
+          </a:xfrm>
+          <a:prstGeom prst="rect">
+            <a:avLst/>
+          </a:prstGeom>
+          <a:solidFill>
+            <a:srgbClr val="269CCB"/>
+          </a:solidFill>
+          <a:ln>
+            <a:noFill/>
+          </a:ln>
+        </p:spPr>
+        <p:style>
+          <a:lnRef idx="1">
+            <a:schemeClr val="accent1"/>
+          </a:lnRef>
+          <a:fillRef idx="3">
+            <a:schemeClr val="accent1"/>
+          </a:fillRef>
+          <a:effectRef idx="2">
+            <a:schemeClr val="accent1"/>
+          </a:effectRef>
+          <a:fontRef idx="minor">
+            <a:schemeClr val="lt1"/>
+          </a:fontRef>
+        </p:style>
+        <p:txBody>
+          <a:bodyPr rtlCol="0" anchor="ctr"/>
+          <a:lstStyle/>
+          <a:p>
+            <a:pPr algn="ctr"/>
+          </a:p>
+        </p:txBody>
+      </p:sp>
+      <p:sp>
+        <p:nvSpPr>
+          <p:cNvPr id="16" name="TextBox 15"/>
           <p:cNvSpPr txBox="1"/>
           <p:nvPr/>
         </p:nvSpPr>
         <p:spPr>
           <a:xfrm>
-            <a:off x="777240" y="3831336"/>
-            <a:ext cx="10774375" cy="822959"/>
+            <a:off x="1097280" y="2706624"/>
+            <a:ext cx="10362895" cy="402336"/>
           </a:xfrm>
           <a:prstGeom prst="rect">
             <a:avLst/>
@@ -9565,42 +9694,24 @@
           <a:noFill/>
         </p:spPr>
         <p:txBody>
-          <a:bodyPr wrap="square">
-            <a:spAutoFit/>
-          </a:bodyPr>
-          <a:lstStyle/>
-          <a:p>
-            <a:r>
-              <a:rPr sz="1200" b="1" i="0">
-                <a:solidFill>
-                  <a:srgbClr val="A02030"/>
-                </a:solidFill>
-                <a:latin typeface="Calibri"/>
-              </a:rPr>
-              <a:t>Atención</a:t>
-            </a:r>
-          </a:p>
-          <a:p>
-            <a:pPr>
-              <a:spcBef>
-                <a:spcPts val="400"/>
-              </a:spcBef>
-            </a:pPr>
-            <a:r>
-              <a:rPr sz="1400" b="0" i="0">
+          <a:bodyPr wrap="square" anchor="ctr"/>
+          <a:lstStyle/>
+          <a:p>
+            <a:r>
+              <a:rPr sz="1500" b="0" i="0">
                 <a:solidFill>
                   <a:srgbClr val="333333"/>
                 </a:solidFill>
                 <a:latin typeface="Calibri"/>
               </a:rPr>
-              <a:t>Entrega del taller, si el docente lo asigna · en la fecha que indique el docente.</a:t>
-            </a:r>
-          </a:p>
-        </p:txBody>
-      </p:sp>
-      <p:sp>
-        <p:nvSpPr>
-          <p:cNvPr id="14" name="TextBox 13"/>
+              <a:t>Si esta historia se entregara sola, sin ninguna otra, el usuario podria hacer algo completo de principio a fin?</a:t>
+            </a:r>
+          </a:p>
+        </p:txBody>
+      </p:sp>
+      <p:sp>
+        <p:nvSpPr>
+          <p:cNvPr id="17" name="TextBox 16"/>
           <p:cNvSpPr txBox="1"/>
           <p:nvPr/>
         </p:nvSpPr>
@@ -9642,6 +9753,1009 @@
 </file>
 
 <file path=ppt/slides/slide23.xml><?xml version="1.0" encoding="utf-8"?>
+<p:sld xmlns:a="http://schemas.openxmlformats.org/drawingml/2006/main" xmlns:p="http://schemas.openxmlformats.org/presentationml/2006/main" xmlns:r="http://schemas.openxmlformats.org/officeDocument/2006/relationships">
+  <p:cSld>
+    <p:bg>
+      <p:bgPr>
+        <a:solidFill>
+          <a:srgbClr val="FFFFFF"/>
+        </a:solidFill>
+        <a:effectLst/>
+      </p:bgPr>
+    </p:bg>
+    <p:spTree>
+      <p:nvGrpSpPr>
+        <p:cNvPr id="1" name=""/>
+        <p:cNvGrpSpPr/>
+        <p:nvPr/>
+      </p:nvGrpSpPr>
+      <p:grpSpPr/>
+      <p:sp>
+        <p:nvSpPr>
+          <p:cNvPr id="2" name="Rectangle 1"/>
+          <p:cNvSpPr/>
+          <p:nvPr/>
+        </p:nvSpPr>
+        <p:spPr>
+          <a:xfrm>
+            <a:off x="0" y="0"/>
+            <a:ext cx="12191695" cy="960120"/>
+          </a:xfrm>
+          <a:prstGeom prst="rect">
+            <a:avLst/>
+          </a:prstGeom>
+          <a:solidFill>
+            <a:srgbClr val="095292"/>
+          </a:solidFill>
+          <a:ln>
+            <a:noFill/>
+          </a:ln>
+        </p:spPr>
+        <p:style>
+          <a:lnRef idx="1">
+            <a:schemeClr val="accent1"/>
+          </a:lnRef>
+          <a:fillRef idx="3">
+            <a:schemeClr val="accent1"/>
+          </a:fillRef>
+          <a:effectRef idx="2">
+            <a:schemeClr val="accent1"/>
+          </a:effectRef>
+          <a:fontRef idx="minor">
+            <a:schemeClr val="lt1"/>
+          </a:fontRef>
+        </p:style>
+        <p:txBody>
+          <a:bodyPr rtlCol="0" anchor="ctr"/>
+          <a:lstStyle/>
+          <a:p>
+            <a:pPr algn="ctr"/>
+          </a:p>
+        </p:txBody>
+      </p:sp>
+      <p:sp>
+        <p:nvSpPr>
+          <p:cNvPr id="3" name="Rectangle 2"/>
+          <p:cNvSpPr/>
+          <p:nvPr/>
+        </p:nvSpPr>
+        <p:spPr>
+          <a:xfrm>
+            <a:off x="0" y="960120"/>
+            <a:ext cx="12191695" cy="41148"/>
+          </a:xfrm>
+          <a:prstGeom prst="rect">
+            <a:avLst/>
+          </a:prstGeom>
+          <a:solidFill>
+            <a:srgbClr val="FFD000"/>
+          </a:solidFill>
+          <a:ln>
+            <a:noFill/>
+          </a:ln>
+        </p:spPr>
+        <p:style>
+          <a:lnRef idx="1">
+            <a:schemeClr val="accent1"/>
+          </a:lnRef>
+          <a:fillRef idx="3">
+            <a:schemeClr val="accent1"/>
+          </a:fillRef>
+          <a:effectRef idx="2">
+            <a:schemeClr val="accent1"/>
+          </a:effectRef>
+          <a:fontRef idx="minor">
+            <a:schemeClr val="lt1"/>
+          </a:fontRef>
+        </p:style>
+        <p:txBody>
+          <a:bodyPr rtlCol="0" anchor="ctr"/>
+          <a:lstStyle/>
+          <a:p>
+            <a:pPr algn="ctr"/>
+          </a:p>
+        </p:txBody>
+      </p:sp>
+      <p:sp>
+        <p:nvSpPr>
+          <p:cNvPr id="4" name="TextBox 3"/>
+          <p:cNvSpPr txBox="1"/>
+          <p:nvPr/>
+        </p:nvSpPr>
+        <p:spPr>
+          <a:xfrm>
+            <a:off x="457200" y="164592"/>
+            <a:ext cx="11277295" cy="502920"/>
+          </a:xfrm>
+          <a:prstGeom prst="rect">
+            <a:avLst/>
+          </a:prstGeom>
+          <a:noFill/>
+        </p:spPr>
+        <p:txBody>
+          <a:bodyPr wrap="square">
+            <a:spAutoFit/>
+          </a:bodyPr>
+          <a:lstStyle/>
+          <a:p>
+            <a:r>
+              <a:rPr sz="2600" b="1" i="0">
+                <a:solidFill>
+                  <a:srgbClr val="FFFFFF"/>
+                </a:solidFill>
+                <a:latin typeface="Calibri"/>
+              </a:rPr>
+              <a:t>Criterios de exito / entregable</a:t>
+            </a:r>
+          </a:p>
+        </p:txBody>
+      </p:sp>
+      <p:sp>
+        <p:nvSpPr>
+          <p:cNvPr id="5" name="TextBox 4"/>
+          <p:cNvSpPr txBox="1"/>
+          <p:nvPr/>
+        </p:nvSpPr>
+        <p:spPr>
+          <a:xfrm>
+            <a:off x="457200" y="1170432"/>
+            <a:ext cx="11277295" cy="5230368"/>
+          </a:xfrm>
+          <a:prstGeom prst="rect">
+            <a:avLst/>
+          </a:prstGeom>
+          <a:noFill/>
+        </p:spPr>
+        <p:txBody>
+          <a:bodyPr wrap="square">
+            <a:spAutoFit/>
+          </a:bodyPr>
+          <a:lstStyle/>
+          <a:p>
+            <a:pPr>
+              <a:spcAft>
+                <a:spcPts val="800"/>
+              </a:spcAft>
+            </a:pPr>
+            <a:r>
+              <a:rPr sz="2000" b="0" i="0">
+                <a:solidFill>
+                  <a:srgbClr val="333333"/>
+                </a:solidFill>
+                <a:latin typeface="Calibri"/>
+              </a:rPr>
+              <a:t>–   </a:t>
+            </a:r>
+            <a:r>
+              <a:rPr sz="2000" b="1" i="0">
+                <a:solidFill>
+                  <a:srgbClr val="333333"/>
+                </a:solidFill>
+                <a:latin typeface="Calibri"/>
+              </a:rPr>
+              <a:t>Entregable:</a:t>
+            </a:r>
+            <a:r>
+              <a:rPr sz="2000" b="0" i="0">
+                <a:solidFill>
+                  <a:srgbClr val="333333"/>
+                </a:solidFill>
+                <a:latin typeface="Calibri"/>
+              </a:rPr>
+              <a:t> Tablero de backlog con 8 historias en formato Como/quiero/para, cada una con 2 o 3 criterios de aceptacion en Dado-Cuando-Entonces, estimacion en puntos y trazabilidad al RF de la clase 6, subido a la plataforma del curso.</a:t>
+            </a:r>
+          </a:p>
+          <a:p>
+            <a:pPr>
+              <a:spcAft>
+                <a:spcPts val="800"/>
+              </a:spcAft>
+            </a:pPr>
+            <a:r>
+              <a:rPr sz="2000" b="0" i="0">
+                <a:solidFill>
+                  <a:srgbClr val="333333"/>
+                </a:solidFill>
+                <a:latin typeface="Calibri"/>
+              </a:rPr>
+              <a:t>–   </a:t>
+            </a:r>
+            <a:r>
+              <a:rPr sz="2000" b="1" i="0">
+                <a:solidFill>
+                  <a:srgbClr val="333333"/>
+                </a:solidFill>
+                <a:latin typeface="Calibri"/>
+              </a:rPr>
+              <a:t>Exito:</a:t>
+            </a:r>
+            <a:r>
+              <a:rPr sz="2000" b="0" i="0">
+                <a:solidFill>
+                  <a:srgbClr val="333333"/>
+                </a:solidFill>
+                <a:latin typeface="Calibri"/>
+              </a:rPr>
+              <a:t> Las 8 historias usan roles concretos de la clinica Huellitas y ninguna emplea el rol generico usuario.</a:t>
+            </a:r>
+          </a:p>
+          <a:p>
+            <a:pPr>
+              <a:spcAft>
+                <a:spcPts val="800"/>
+              </a:spcAft>
+            </a:pPr>
+            <a:r>
+              <a:rPr sz="2000" b="0" i="0">
+                <a:solidFill>
+                  <a:srgbClr val="333333"/>
+                </a:solidFill>
+                <a:latin typeface="Calibri"/>
+              </a:rPr>
+              <a:t>–   </a:t>
+            </a:r>
+            <a:r>
+              <a:rPr sz="2000" b="1" i="0">
+                <a:solidFill>
+                  <a:srgbClr val="333333"/>
+                </a:solidFill>
+                <a:latin typeface="Calibri"/>
+              </a:rPr>
+              <a:t>Exito:</a:t>
+            </a:r>
+            <a:r>
+              <a:rPr sz="2000" b="0" i="0">
+                <a:solidFill>
+                  <a:srgbClr val="333333"/>
+                </a:solidFill>
+                <a:latin typeface="Calibri"/>
+              </a:rPr>
+              <a:t> Cada historia tiene minimo 2 criterios de aceptacion en Dado-Cuando-Entonces y al menos cuatro incluyen un camino alterno o de error.</a:t>
+            </a:r>
+          </a:p>
+          <a:p>
+            <a:pPr>
+              <a:spcAft>
+                <a:spcPts val="800"/>
+              </a:spcAft>
+            </a:pPr>
+            <a:r>
+              <a:rPr sz="2000" b="0" i="0">
+                <a:solidFill>
+                  <a:srgbClr val="333333"/>
+                </a:solidFill>
+                <a:latin typeface="Calibri"/>
+              </a:rPr>
+              <a:t>–   </a:t>
+            </a:r>
+            <a:r>
+              <a:rPr sz="2000" b="1" i="0">
+                <a:solidFill>
+                  <a:srgbClr val="333333"/>
+                </a:solidFill>
+                <a:latin typeface="Calibri"/>
+              </a:rPr>
+              <a:t>Exito:</a:t>
+            </a:r>
+            <a:r>
+              <a:rPr sz="2000" b="0" i="0">
+                <a:solidFill>
+                  <a:srgbClr val="333333"/>
+                </a:solidFill>
+                <a:latin typeface="Calibri"/>
+              </a:rPr>
+              <a:t> Todas las historias pasan INVEST con al menos cinco de las seis letras en si, y ninguna esta cortada por capas tecnicas.</a:t>
+            </a:r>
+          </a:p>
+          <a:p>
+            <a:pPr>
+              <a:spcAft>
+                <a:spcPts val="800"/>
+              </a:spcAft>
+            </a:pPr>
+            <a:r>
+              <a:rPr sz="2000" b="0" i="0">
+                <a:solidFill>
+                  <a:srgbClr val="333333"/>
+                </a:solidFill>
+                <a:latin typeface="Calibri"/>
+              </a:rPr>
+              <a:t>–   </a:t>
+            </a:r>
+            <a:r>
+              <a:rPr sz="2000" b="1" i="0">
+                <a:solidFill>
+                  <a:srgbClr val="333333"/>
+                </a:solidFill>
+                <a:latin typeface="Calibri"/>
+              </a:rPr>
+              <a:t>Exito:</a:t>
+            </a:r>
+            <a:r>
+              <a:rPr sz="2000" b="0" i="0">
+                <a:solidFill>
+                  <a:srgbClr val="333333"/>
+                </a:solidFill>
+                <a:latin typeface="Calibri"/>
+              </a:rPr>
+              <a:t> Cada historia trae estimacion en puntos, prioridad y el RF de origen; ninguna historia supera los 8 puntos sin partirse.</a:t>
+            </a:r>
+          </a:p>
+          <a:p>
+            <a:pPr>
+              <a:spcAft>
+                <a:spcPts val="800"/>
+              </a:spcAft>
+            </a:pPr>
+            <a:r>
+              <a:rPr sz="2000" b="0" i="0">
+                <a:solidFill>
+                  <a:srgbClr val="333333"/>
+                </a:solidFill>
+                <a:latin typeface="Calibri"/>
+              </a:rPr>
+              <a:t>–   </a:t>
+            </a:r>
+            <a:r>
+              <a:rPr sz="2000" b="1" i="0">
+                <a:solidFill>
+                  <a:srgbClr val="333333"/>
+                </a:solidFill>
+                <a:latin typeface="Calibri"/>
+              </a:rPr>
+              <a:t>Entrega en la plataforma del curso</a:t>
+            </a:r>
+            <a:r>
+              <a:rPr sz="2000" b="0" i="0">
+                <a:solidFill>
+                  <a:srgbClr val="333333"/>
+                </a:solidFill>
+                <a:latin typeface="Calibri"/>
+              </a:rPr>
+              <a:t> — en la fecha que indique el docente.</a:t>
+            </a:r>
+          </a:p>
+        </p:txBody>
+      </p:sp>
+      <p:sp>
+        <p:nvSpPr>
+          <p:cNvPr id="6" name="TextBox 5"/>
+          <p:cNvSpPr txBox="1"/>
+          <p:nvPr/>
+        </p:nvSpPr>
+        <p:spPr>
+          <a:xfrm>
+            <a:off x="11185855" y="6473952"/>
+            <a:ext cx="640080" cy="274320"/>
+          </a:xfrm>
+          <a:prstGeom prst="rect">
+            <a:avLst/>
+          </a:prstGeom>
+          <a:noFill/>
+        </p:spPr>
+        <p:txBody>
+          <a:bodyPr wrap="square">
+            <a:spAutoFit/>
+          </a:bodyPr>
+          <a:lstStyle/>
+          <a:p>
+            <a:pPr algn="r"/>
+            <a:r>
+              <a:rPr sz="1100" b="0" i="0">
+                <a:solidFill>
+                  <a:srgbClr val="666666"/>
+                </a:solidFill>
+                <a:latin typeface="Calibri"/>
+              </a:rPr>
+              <a:t>23</a:t>
+            </a:r>
+          </a:p>
+        </p:txBody>
+      </p:sp>
+    </p:spTree>
+  </p:cSld>
+  <p:clrMapOvr>
+    <a:masterClrMapping/>
+  </p:clrMapOvr>
+</p:sld>
+</file>
+
+<file path=ppt/slides/slide24.xml><?xml version="1.0" encoding="utf-8"?>
+<p:sld xmlns:a="http://schemas.openxmlformats.org/drawingml/2006/main" xmlns:p="http://schemas.openxmlformats.org/presentationml/2006/main" xmlns:r="http://schemas.openxmlformats.org/officeDocument/2006/relationships">
+  <p:cSld>
+    <p:bg>
+      <p:bgPr>
+        <a:solidFill>
+          <a:srgbClr val="FFFFFF"/>
+        </a:solidFill>
+        <a:effectLst/>
+      </p:bgPr>
+    </p:bg>
+    <p:spTree>
+      <p:nvGrpSpPr>
+        <p:cNvPr id="1" name=""/>
+        <p:cNvGrpSpPr/>
+        <p:nvPr/>
+      </p:nvGrpSpPr>
+      <p:grpSpPr/>
+      <p:sp>
+        <p:nvSpPr>
+          <p:cNvPr id="2" name="Rectangle 1"/>
+          <p:cNvSpPr/>
+          <p:nvPr/>
+        </p:nvSpPr>
+        <p:spPr>
+          <a:xfrm>
+            <a:off x="0" y="0"/>
+            <a:ext cx="12191695" cy="960120"/>
+          </a:xfrm>
+          <a:prstGeom prst="rect">
+            <a:avLst/>
+          </a:prstGeom>
+          <a:solidFill>
+            <a:srgbClr val="095292"/>
+          </a:solidFill>
+          <a:ln>
+            <a:noFill/>
+          </a:ln>
+        </p:spPr>
+        <p:style>
+          <a:lnRef idx="1">
+            <a:schemeClr val="accent1"/>
+          </a:lnRef>
+          <a:fillRef idx="3">
+            <a:schemeClr val="accent1"/>
+          </a:fillRef>
+          <a:effectRef idx="2">
+            <a:schemeClr val="accent1"/>
+          </a:effectRef>
+          <a:fontRef idx="minor">
+            <a:schemeClr val="lt1"/>
+          </a:fontRef>
+        </p:style>
+        <p:txBody>
+          <a:bodyPr rtlCol="0" anchor="ctr"/>
+          <a:lstStyle/>
+          <a:p>
+            <a:pPr algn="ctr"/>
+          </a:p>
+        </p:txBody>
+      </p:sp>
+      <p:sp>
+        <p:nvSpPr>
+          <p:cNvPr id="3" name="Rectangle 2"/>
+          <p:cNvSpPr/>
+          <p:nvPr/>
+        </p:nvSpPr>
+        <p:spPr>
+          <a:xfrm>
+            <a:off x="0" y="960120"/>
+            <a:ext cx="12191695" cy="41148"/>
+          </a:xfrm>
+          <a:prstGeom prst="rect">
+            <a:avLst/>
+          </a:prstGeom>
+          <a:solidFill>
+            <a:srgbClr val="FFD000"/>
+          </a:solidFill>
+          <a:ln>
+            <a:noFill/>
+          </a:ln>
+        </p:spPr>
+        <p:style>
+          <a:lnRef idx="1">
+            <a:schemeClr val="accent1"/>
+          </a:lnRef>
+          <a:fillRef idx="3">
+            <a:schemeClr val="accent1"/>
+          </a:fillRef>
+          <a:effectRef idx="2">
+            <a:schemeClr val="accent1"/>
+          </a:effectRef>
+          <a:fontRef idx="minor">
+            <a:schemeClr val="lt1"/>
+          </a:fontRef>
+        </p:style>
+        <p:txBody>
+          <a:bodyPr rtlCol="0" anchor="ctr"/>
+          <a:lstStyle/>
+          <a:p>
+            <a:pPr algn="ctr"/>
+          </a:p>
+        </p:txBody>
+      </p:sp>
+      <p:sp>
+        <p:nvSpPr>
+          <p:cNvPr id="4" name="TextBox 3"/>
+          <p:cNvSpPr txBox="1"/>
+          <p:nvPr/>
+        </p:nvSpPr>
+        <p:spPr>
+          <a:xfrm>
+            <a:off x="457200" y="164592"/>
+            <a:ext cx="11277295" cy="502920"/>
+          </a:xfrm>
+          <a:prstGeom prst="rect">
+            <a:avLst/>
+          </a:prstGeom>
+          <a:noFill/>
+        </p:spPr>
+        <p:txBody>
+          <a:bodyPr wrap="square">
+            <a:spAutoFit/>
+          </a:bodyPr>
+          <a:lstStyle/>
+          <a:p>
+            <a:r>
+              <a:rPr sz="2600" b="1" i="0">
+                <a:solidFill>
+                  <a:srgbClr val="FFFFFF"/>
+                </a:solidFill>
+                <a:latin typeface="Calibri"/>
+              </a:rPr>
+              <a:t>Para el PI esta semana</a:t>
+            </a:r>
+          </a:p>
+        </p:txBody>
+      </p:sp>
+      <p:sp>
+        <p:nvSpPr>
+          <p:cNvPr id="5" name="Rounded Rectangle 4"/>
+          <p:cNvSpPr/>
+          <p:nvPr/>
+        </p:nvSpPr>
+        <p:spPr>
+          <a:xfrm>
+            <a:off x="457200" y="1261872"/>
+            <a:ext cx="11277295" cy="1051560"/>
+          </a:xfrm>
+          <a:prstGeom prst="roundRect">
+            <a:avLst>
+              <a:gd name="adj" fmla="val 12000"/>
+            </a:avLst>
+          </a:prstGeom>
+          <a:solidFill>
+            <a:srgbClr val="E8F4FA"/>
+          </a:solidFill>
+          <a:ln>
+            <a:noFill/>
+          </a:ln>
+        </p:spPr>
+        <p:style>
+          <a:lnRef idx="1">
+            <a:schemeClr val="accent1"/>
+          </a:lnRef>
+          <a:fillRef idx="3">
+            <a:schemeClr val="accent1"/>
+          </a:fillRef>
+          <a:effectRef idx="2">
+            <a:schemeClr val="accent1"/>
+          </a:effectRef>
+          <a:fontRef idx="minor">
+            <a:schemeClr val="lt1"/>
+          </a:fontRef>
+        </p:style>
+        <p:txBody>
+          <a:bodyPr rtlCol="0" anchor="ctr"/>
+          <a:lstStyle/>
+          <a:p>
+            <a:pPr algn="ctr"/>
+          </a:p>
+        </p:txBody>
+      </p:sp>
+      <p:sp>
+        <p:nvSpPr>
+          <p:cNvPr id="6" name="Rectangle 5"/>
+          <p:cNvSpPr/>
+          <p:nvPr/>
+        </p:nvSpPr>
+        <p:spPr>
+          <a:xfrm>
+            <a:off x="457200" y="1261872"/>
+            <a:ext cx="128016" cy="1051560"/>
+          </a:xfrm>
+          <a:prstGeom prst="rect">
+            <a:avLst/>
+          </a:prstGeom>
+          <a:solidFill>
+            <a:srgbClr val="269CCB"/>
+          </a:solidFill>
+          <a:ln>
+            <a:noFill/>
+          </a:ln>
+        </p:spPr>
+        <p:style>
+          <a:lnRef idx="1">
+            <a:schemeClr val="accent1"/>
+          </a:lnRef>
+          <a:fillRef idx="3">
+            <a:schemeClr val="accent1"/>
+          </a:fillRef>
+          <a:effectRef idx="2">
+            <a:schemeClr val="accent1"/>
+          </a:effectRef>
+          <a:fontRef idx="minor">
+            <a:schemeClr val="lt1"/>
+          </a:fontRef>
+        </p:style>
+        <p:txBody>
+          <a:bodyPr rtlCol="0" anchor="ctr"/>
+          <a:lstStyle/>
+          <a:p>
+            <a:pPr algn="ctr"/>
+          </a:p>
+        </p:txBody>
+      </p:sp>
+      <p:sp>
+        <p:nvSpPr>
+          <p:cNvPr id="7" name="TextBox 6"/>
+          <p:cNvSpPr txBox="1"/>
+          <p:nvPr/>
+        </p:nvSpPr>
+        <p:spPr>
+          <a:xfrm>
+            <a:off x="777240" y="1399031"/>
+            <a:ext cx="10774375" cy="822959"/>
+          </a:xfrm>
+          <a:prstGeom prst="rect">
+            <a:avLst/>
+          </a:prstGeom>
+          <a:noFill/>
+        </p:spPr>
+        <p:txBody>
+          <a:bodyPr wrap="square">
+            <a:spAutoFit/>
+          </a:bodyPr>
+          <a:lstStyle/>
+          <a:p>
+            <a:r>
+              <a:rPr sz="1200" b="1" i="0">
+                <a:solidFill>
+                  <a:srgbClr val="269CCB"/>
+                </a:solidFill>
+                <a:latin typeface="Calibri"/>
+              </a:rPr>
+              <a:t>Info</a:t>
+            </a:r>
+          </a:p>
+          <a:p>
+            <a:pPr>
+              <a:spcBef>
+                <a:spcPts val="400"/>
+              </a:spcBef>
+            </a:pPr>
+            <a:r>
+              <a:rPr sz="1400" b="0" i="0">
+                <a:solidFill>
+                  <a:srgbClr val="333333"/>
+                </a:solidFill>
+                <a:latin typeface="Calibri"/>
+              </a:rPr>
+              <a:t>Hito: Queda listo el backlog inicial de VetCare: dos epicas descompuestas en ocho historias priorizadas, con criterios de aceptacion y talla en puntos.</a:t>
+            </a:r>
+          </a:p>
+        </p:txBody>
+      </p:sp>
+      <p:sp>
+        <p:nvSpPr>
+          <p:cNvPr id="8" name="Rounded Rectangle 7"/>
+          <p:cNvSpPr/>
+          <p:nvPr/>
+        </p:nvSpPr>
+        <p:spPr>
+          <a:xfrm>
+            <a:off x="457200" y="2478024"/>
+            <a:ext cx="11277295" cy="1051560"/>
+          </a:xfrm>
+          <a:prstGeom prst="roundRect">
+            <a:avLst>
+              <a:gd name="adj" fmla="val 12000"/>
+            </a:avLst>
+          </a:prstGeom>
+          <a:solidFill>
+            <a:srgbClr val="FFF8E1"/>
+          </a:solidFill>
+          <a:ln>
+            <a:noFill/>
+          </a:ln>
+        </p:spPr>
+        <p:style>
+          <a:lnRef idx="1">
+            <a:schemeClr val="accent1"/>
+          </a:lnRef>
+          <a:fillRef idx="3">
+            <a:schemeClr val="accent1"/>
+          </a:fillRef>
+          <a:effectRef idx="2">
+            <a:schemeClr val="accent1"/>
+          </a:effectRef>
+          <a:fontRef idx="minor">
+            <a:schemeClr val="lt1"/>
+          </a:fontRef>
+        </p:style>
+        <p:txBody>
+          <a:bodyPr rtlCol="0" anchor="ctr"/>
+          <a:lstStyle/>
+          <a:p>
+            <a:pPr algn="ctr"/>
+          </a:p>
+        </p:txBody>
+      </p:sp>
+      <p:sp>
+        <p:nvSpPr>
+          <p:cNvPr id="9" name="Rectangle 8"/>
+          <p:cNvSpPr/>
+          <p:nvPr/>
+        </p:nvSpPr>
+        <p:spPr>
+          <a:xfrm>
+            <a:off x="457200" y="2478024"/>
+            <a:ext cx="128016" cy="1051560"/>
+          </a:xfrm>
+          <a:prstGeom prst="rect">
+            <a:avLst/>
+          </a:prstGeom>
+          <a:solidFill>
+            <a:srgbClr val="FFD000"/>
+          </a:solidFill>
+          <a:ln>
+            <a:noFill/>
+          </a:ln>
+        </p:spPr>
+        <p:style>
+          <a:lnRef idx="1">
+            <a:schemeClr val="accent1"/>
+          </a:lnRef>
+          <a:fillRef idx="3">
+            <a:schemeClr val="accent1"/>
+          </a:fillRef>
+          <a:effectRef idx="2">
+            <a:schemeClr val="accent1"/>
+          </a:effectRef>
+          <a:fontRef idx="minor">
+            <a:schemeClr val="lt1"/>
+          </a:fontRef>
+        </p:style>
+        <p:txBody>
+          <a:bodyPr rtlCol="0" anchor="ctr"/>
+          <a:lstStyle/>
+          <a:p>
+            <a:pPr algn="ctr"/>
+          </a:p>
+        </p:txBody>
+      </p:sp>
+      <p:sp>
+        <p:nvSpPr>
+          <p:cNvPr id="10" name="TextBox 9"/>
+          <p:cNvSpPr txBox="1"/>
+          <p:nvPr/>
+        </p:nvSpPr>
+        <p:spPr>
+          <a:xfrm>
+            <a:off x="777240" y="2615184"/>
+            <a:ext cx="10774375" cy="822959"/>
+          </a:xfrm>
+          <a:prstGeom prst="rect">
+            <a:avLst/>
+          </a:prstGeom>
+          <a:noFill/>
+        </p:spPr>
+        <p:txBody>
+          <a:bodyPr wrap="square">
+            <a:spAutoFit/>
+          </a:bodyPr>
+          <a:lstStyle/>
+          <a:p>
+            <a:r>
+              <a:rPr sz="1200" b="1" i="0">
+                <a:solidFill>
+                  <a:srgbClr val="FFD000"/>
+                </a:solidFill>
+                <a:latin typeface="Calibri"/>
+              </a:rPr>
+              <a:t>Aclaración</a:t>
+            </a:r>
+          </a:p>
+          <a:p>
+            <a:pPr>
+              <a:spcBef>
+                <a:spcPts val="400"/>
+              </a:spcBef>
+            </a:pPr>
+            <a:r>
+              <a:rPr sz="1400" b="0" i="0">
+                <a:solidFill>
+                  <a:srgbClr val="333333"/>
+                </a:solidFill>
+                <a:latin typeface="Calibri"/>
+              </a:rPr>
+              <a:t>Enunciado completo: Clases/Proyecto Integrador/ (VetCare).</a:t>
+            </a:r>
+          </a:p>
+        </p:txBody>
+      </p:sp>
+      <p:sp>
+        <p:nvSpPr>
+          <p:cNvPr id="11" name="Rounded Rectangle 10"/>
+          <p:cNvSpPr/>
+          <p:nvPr/>
+        </p:nvSpPr>
+        <p:spPr>
+          <a:xfrm>
+            <a:off x="457200" y="3694176"/>
+            <a:ext cx="11277295" cy="1051560"/>
+          </a:xfrm>
+          <a:prstGeom prst="roundRect">
+            <a:avLst>
+              <a:gd name="adj" fmla="val 12000"/>
+            </a:avLst>
+          </a:prstGeom>
+          <a:solidFill>
+            <a:srgbClr val="FBE4E4"/>
+          </a:solidFill>
+          <a:ln>
+            <a:noFill/>
+          </a:ln>
+        </p:spPr>
+        <p:style>
+          <a:lnRef idx="1">
+            <a:schemeClr val="accent1"/>
+          </a:lnRef>
+          <a:fillRef idx="3">
+            <a:schemeClr val="accent1"/>
+          </a:fillRef>
+          <a:effectRef idx="2">
+            <a:schemeClr val="accent1"/>
+          </a:effectRef>
+          <a:fontRef idx="minor">
+            <a:schemeClr val="lt1"/>
+          </a:fontRef>
+        </p:style>
+        <p:txBody>
+          <a:bodyPr rtlCol="0" anchor="ctr"/>
+          <a:lstStyle/>
+          <a:p>
+            <a:pPr algn="ctr"/>
+          </a:p>
+        </p:txBody>
+      </p:sp>
+      <p:sp>
+        <p:nvSpPr>
+          <p:cNvPr id="12" name="Rectangle 11"/>
+          <p:cNvSpPr/>
+          <p:nvPr/>
+        </p:nvSpPr>
+        <p:spPr>
+          <a:xfrm>
+            <a:off x="457200" y="3694176"/>
+            <a:ext cx="128016" cy="1051560"/>
+          </a:xfrm>
+          <a:prstGeom prst="rect">
+            <a:avLst/>
+          </a:prstGeom>
+          <a:solidFill>
+            <a:srgbClr val="A02030"/>
+          </a:solidFill>
+          <a:ln>
+            <a:noFill/>
+          </a:ln>
+        </p:spPr>
+        <p:style>
+          <a:lnRef idx="1">
+            <a:schemeClr val="accent1"/>
+          </a:lnRef>
+          <a:fillRef idx="3">
+            <a:schemeClr val="accent1"/>
+          </a:fillRef>
+          <a:effectRef idx="2">
+            <a:schemeClr val="accent1"/>
+          </a:effectRef>
+          <a:fontRef idx="minor">
+            <a:schemeClr val="lt1"/>
+          </a:fontRef>
+        </p:style>
+        <p:txBody>
+          <a:bodyPr rtlCol="0" anchor="ctr"/>
+          <a:lstStyle/>
+          <a:p>
+            <a:pPr algn="ctr"/>
+          </a:p>
+        </p:txBody>
+      </p:sp>
+      <p:sp>
+        <p:nvSpPr>
+          <p:cNvPr id="13" name="TextBox 12"/>
+          <p:cNvSpPr txBox="1"/>
+          <p:nvPr/>
+        </p:nvSpPr>
+        <p:spPr>
+          <a:xfrm>
+            <a:off x="777240" y="3831336"/>
+            <a:ext cx="10774375" cy="822959"/>
+          </a:xfrm>
+          <a:prstGeom prst="rect">
+            <a:avLst/>
+          </a:prstGeom>
+          <a:noFill/>
+        </p:spPr>
+        <p:txBody>
+          <a:bodyPr wrap="square">
+            <a:spAutoFit/>
+          </a:bodyPr>
+          <a:lstStyle/>
+          <a:p>
+            <a:r>
+              <a:rPr sz="1200" b="1" i="0">
+                <a:solidFill>
+                  <a:srgbClr val="A02030"/>
+                </a:solidFill>
+                <a:latin typeface="Calibri"/>
+              </a:rPr>
+              <a:t>Atención</a:t>
+            </a:r>
+          </a:p>
+          <a:p>
+            <a:pPr>
+              <a:spcBef>
+                <a:spcPts val="400"/>
+              </a:spcBef>
+            </a:pPr>
+            <a:r>
+              <a:rPr sz="1400" b="0" i="0">
+                <a:solidFill>
+                  <a:srgbClr val="333333"/>
+                </a:solidFill>
+                <a:latin typeface="Calibri"/>
+              </a:rPr>
+              <a:t>Entrega del taller, si el docente lo asigna · en la fecha que indique el docente.</a:t>
+            </a:r>
+          </a:p>
+        </p:txBody>
+      </p:sp>
+      <p:sp>
+        <p:nvSpPr>
+          <p:cNvPr id="14" name="TextBox 13"/>
+          <p:cNvSpPr txBox="1"/>
+          <p:nvPr/>
+        </p:nvSpPr>
+        <p:spPr>
+          <a:xfrm>
+            <a:off x="11185855" y="6473952"/>
+            <a:ext cx="640080" cy="274320"/>
+          </a:xfrm>
+          <a:prstGeom prst="rect">
+            <a:avLst/>
+          </a:prstGeom>
+          <a:noFill/>
+        </p:spPr>
+        <p:txBody>
+          <a:bodyPr wrap="square">
+            <a:spAutoFit/>
+          </a:bodyPr>
+          <a:lstStyle/>
+          <a:p>
+            <a:pPr algn="r"/>
+            <a:r>
+              <a:rPr sz="1100" b="0" i="0">
+                <a:solidFill>
+                  <a:srgbClr val="666666"/>
+                </a:solidFill>
+                <a:latin typeface="Calibri"/>
+              </a:rPr>
+              <a:t>24</a:t>
+            </a:r>
+          </a:p>
+        </p:txBody>
+      </p:sp>
+    </p:spTree>
+  </p:cSld>
+  <p:clrMapOvr>
+    <a:masterClrMapping/>
+  </p:clrMapOvr>
+</p:sld>
+</file>
+
+<file path=ppt/slides/slide25.xml><?xml version="1.0" encoding="utf-8"?>
 <p:sld xmlns:a="http://schemas.openxmlformats.org/drawingml/2006/main" xmlns:p="http://schemas.openxmlformats.org/presentationml/2006/main" xmlns:r="http://schemas.openxmlformats.org/officeDocument/2006/relationships">
   <p:cSld>
     <p:bg>

--- a/Seminario de Sistemas/Clases/Clase 7 - Historias de usuario/Presentacion.pptx
+++ b/Seminario de Sistemas/Clases/Clase 7 - Historias de usuario/Presentacion.pptx
@@ -9,27 +9,20 @@
     <p:sldId id="257" r:id="rId8"/>
     <p:sldId id="258" r:id="rId9"/>
     <p:sldId id="259" r:id="rId10"/>
-    <p:sldId id="260" r:id="rId11"/>
-    <p:sldId id="261" r:id="rId12"/>
-    <p:sldId id="262" r:id="rId13"/>
-    <p:sldId id="263" r:id="rId14"/>
-    <p:sldId id="264" r:id="rId15"/>
-    <p:sldId id="265" r:id="rId16"/>
-    <p:sldId id="266" r:id="rId17"/>
-    <p:sldId id="267" r:id="rId18"/>
-    <p:sldId id="268" r:id="rId19"/>
-    <p:sldId id="269" r:id="rId20"/>
-    <p:sldId id="270" r:id="rId21"/>
-    <p:sldId id="271" r:id="rId22"/>
-    <p:sldId id="272" r:id="rId23"/>
-    <p:sldId id="273" r:id="rId24"/>
-    <p:sldId id="274" r:id="rId25"/>
-    <p:sldId id="275" r:id="rId26"/>
-    <p:sldId id="276" r:id="rId27"/>
-    <p:sldId id="277" r:id="rId28"/>
-    <p:sldId id="278" r:id="rId29"/>
-    <p:sldId id="279" r:id="rId30"/>
-    <p:sldId id="280" r:id="rId31"/>
+    <p:sldId id="260" r:id="rId12"/>
+    <p:sldId id="261" r:id="rId13"/>
+    <p:sldId id="262" r:id="rId14"/>
+    <p:sldId id="263" r:id="rId15"/>
+    <p:sldId id="264" r:id="rId16"/>
+    <p:sldId id="265" r:id="rId17"/>
+    <p:sldId id="266" r:id="rId18"/>
+    <p:sldId id="267" r:id="rId19"/>
+    <p:sldId id="268" r:id="rId20"/>
+    <p:sldId id="269" r:id="rId21"/>
+    <p:sldId id="270" r:id="rId22"/>
+    <p:sldId id="271" r:id="rId23"/>
+    <p:sldId id="272" r:id="rId24"/>
+    <p:sldId id="273" r:id="rId25"/>
   </p:sldIdLst>
   <p:sldSz cx="12191695" cy="6858000" type="screen4x3"/>
   <p:notesSz cx="6858000" cy="9144000"/>
@@ -129,6 +122,642 @@
     </a:lvl9pPr>
   </p:defaultTextStyle>
 </p:presentation>
+</file>
+
+<file path=ppt/notesMasters/notesMaster1.xml><?xml version="1.0" encoding="utf-8"?>
+<p:notesMaster xmlns:a="http://schemas.openxmlformats.org/drawingml/2006/main" xmlns:p="http://schemas.openxmlformats.org/presentationml/2006/main" xmlns:r="http://schemas.openxmlformats.org/officeDocument/2006/relationships">
+  <p:cSld>
+    <p:bg>
+      <p:bgRef idx="1001">
+        <a:schemeClr val="bg1"/>
+      </p:bgRef>
+    </p:bg>
+    <p:spTree>
+      <p:nvGrpSpPr>
+        <p:cNvPr id="1" name=""/>
+        <p:cNvGrpSpPr/>
+        <p:nvPr/>
+      </p:nvGrpSpPr>
+      <p:grpSpPr>
+        <a:xfrm>
+          <a:off x="0" y="0"/>
+          <a:ext cx="0" cy="0"/>
+          <a:chOff x="0" y="0"/>
+          <a:chExt cx="0" cy="0"/>
+        </a:xfrm>
+      </p:grpSpPr>
+      <p:sp>
+        <p:nvSpPr>
+          <p:cNvPr id="2" name="Header Placeholder 1"/>
+          <p:cNvSpPr>
+            <a:spLocks noGrp="1"/>
+          </p:cNvSpPr>
+          <p:nvPr>
+            <p:ph type="hdr" sz="quarter"/>
+          </p:nvPr>
+        </p:nvSpPr>
+        <p:spPr>
+          <a:xfrm>
+            <a:off x="0" y="0"/>
+            <a:ext cx="2971800" cy="457200"/>
+          </a:xfrm>
+          <a:prstGeom prst="rect">
+            <a:avLst/>
+          </a:prstGeom>
+        </p:spPr>
+        <p:txBody>
+          <a:bodyPr vert="horz" lIns="91440" tIns="45720" rIns="91440" bIns="45720" rtlCol="0"/>
+          <a:lstStyle>
+            <a:lvl1pPr algn="l">
+              <a:defRPr sz="1200"/>
+            </a:lvl1pPr>
+          </a:lstStyle>
+          <a:p>
+            <a:endParaRPr lang="en-US"/>
+          </a:p>
+        </p:txBody>
+      </p:sp>
+      <p:sp>
+        <p:nvSpPr>
+          <p:cNvPr id="3" name="Date Placeholder 2"/>
+          <p:cNvSpPr>
+            <a:spLocks noGrp="1"/>
+          </p:cNvSpPr>
+          <p:nvPr>
+            <p:ph type="dt" idx="1"/>
+          </p:nvPr>
+        </p:nvSpPr>
+        <p:spPr>
+          <a:xfrm>
+            <a:off x="3884613" y="0"/>
+            <a:ext cx="2971800" cy="457200"/>
+          </a:xfrm>
+          <a:prstGeom prst="rect">
+            <a:avLst/>
+          </a:prstGeom>
+        </p:spPr>
+        <p:txBody>
+          <a:bodyPr vert="horz" lIns="91440" tIns="45720" rIns="91440" bIns="45720" rtlCol="0"/>
+          <a:lstStyle>
+            <a:lvl1pPr algn="r">
+              <a:defRPr sz="1200"/>
+            </a:lvl1pPr>
+          </a:lstStyle>
+          <a:p>
+            <a:fld id="{0F89C1C7-3DCD-1040-A9CF-14679D8B5DDD}" type="datetimeFigureOut">
+              <a:rPr lang="en-US" smtClean="0"/>
+              <a:t>10/17/16</a:t>
+            </a:fld>
+            <a:endParaRPr lang="en-US"/>
+          </a:p>
+        </p:txBody>
+      </p:sp>
+      <p:sp>
+        <p:nvSpPr>
+          <p:cNvPr id="4" name="Slide Image Placeholder 3"/>
+          <p:cNvSpPr>
+            <a:spLocks noGrp="1" noRot="1" noChangeAspect="1"/>
+          </p:cNvSpPr>
+          <p:nvPr>
+            <p:ph type="sldImg" idx="2"/>
+          </p:nvPr>
+        </p:nvSpPr>
+        <p:spPr>
+          <a:xfrm>
+            <a:off x="1143000" y="685800"/>
+            <a:ext cx="4572000" cy="3429000"/>
+          </a:xfrm>
+          <a:prstGeom prst="rect">
+            <a:avLst/>
+          </a:prstGeom>
+          <a:noFill/>
+          <a:ln w="12700">
+            <a:solidFill>
+              <a:prstClr val="black"/>
+            </a:solidFill>
+          </a:ln>
+        </p:spPr>
+        <p:txBody>
+          <a:bodyPr vert="horz" lIns="91440" tIns="45720" rIns="91440" bIns="45720" rtlCol="0" anchor="ctr"/>
+          <a:lstStyle/>
+          <a:p>
+            <a:endParaRPr lang="en-US"/>
+          </a:p>
+        </p:txBody>
+      </p:sp>
+      <p:sp>
+        <p:nvSpPr>
+          <p:cNvPr id="5" name="Notes Placeholder 4"/>
+          <p:cNvSpPr>
+            <a:spLocks noGrp="1"/>
+          </p:cNvSpPr>
+          <p:nvPr>
+            <p:ph type="body" sz="quarter" idx="3"/>
+          </p:nvPr>
+        </p:nvSpPr>
+        <p:spPr>
+          <a:xfrm>
+            <a:off x="685800" y="4343400"/>
+            <a:ext cx="5486400" cy="4114800"/>
+          </a:xfrm>
+          <a:prstGeom prst="rect">
+            <a:avLst/>
+          </a:prstGeom>
+        </p:spPr>
+        <p:txBody>
+          <a:bodyPr vert="horz" lIns="91440" tIns="45720" rIns="91440" bIns="45720" rtlCol="0"/>
+          <a:lstStyle/>
+          <a:p>
+            <a:pPr lvl="0"/>
+            <a:r>
+              <a:rPr lang="en-US" smtClean="0"/>
+              <a:t>Click to edit Master text styles</a:t>
+            </a:r>
+          </a:p>
+          <a:p>
+            <a:pPr lvl="1"/>
+            <a:r>
+              <a:rPr lang="en-US" smtClean="0"/>
+              <a:t>Second level</a:t>
+            </a:r>
+          </a:p>
+          <a:p>
+            <a:pPr lvl="2"/>
+            <a:r>
+              <a:rPr lang="en-US" smtClean="0"/>
+              <a:t>Third level</a:t>
+            </a:r>
+          </a:p>
+          <a:p>
+            <a:pPr lvl="3"/>
+            <a:r>
+              <a:rPr lang="en-US" smtClean="0"/>
+              <a:t>Fourth level</a:t>
+            </a:r>
+          </a:p>
+          <a:p>
+            <a:pPr lvl="4"/>
+            <a:r>
+              <a:rPr lang="en-US" smtClean="0"/>
+              <a:t>Fifth level</a:t>
+            </a:r>
+            <a:endParaRPr lang="en-US"/>
+          </a:p>
+        </p:txBody>
+      </p:sp>
+      <p:sp>
+        <p:nvSpPr>
+          <p:cNvPr id="6" name="Footer Placeholder 5"/>
+          <p:cNvSpPr>
+            <a:spLocks noGrp="1"/>
+          </p:cNvSpPr>
+          <p:nvPr>
+            <p:ph type="ftr" sz="quarter" idx="4"/>
+          </p:nvPr>
+        </p:nvSpPr>
+        <p:spPr>
+          <a:xfrm>
+            <a:off x="0" y="8685213"/>
+            <a:ext cx="2971800" cy="457200"/>
+          </a:xfrm>
+          <a:prstGeom prst="rect">
+            <a:avLst/>
+          </a:prstGeom>
+        </p:spPr>
+        <p:txBody>
+          <a:bodyPr vert="horz" lIns="91440" tIns="45720" rIns="91440" bIns="45720" rtlCol="0" anchor="b"/>
+          <a:lstStyle>
+            <a:lvl1pPr algn="l">
+              <a:defRPr sz="1200"/>
+            </a:lvl1pPr>
+          </a:lstStyle>
+          <a:p>
+            <a:endParaRPr lang="en-US"/>
+          </a:p>
+        </p:txBody>
+      </p:sp>
+      <p:sp>
+        <p:nvSpPr>
+          <p:cNvPr id="7" name="Slide Number Placeholder 6"/>
+          <p:cNvSpPr>
+            <a:spLocks noGrp="1"/>
+          </p:cNvSpPr>
+          <p:nvPr>
+            <p:ph type="sldNum" sz="quarter" idx="5"/>
+          </p:nvPr>
+        </p:nvSpPr>
+        <p:spPr>
+          <a:xfrm>
+            <a:off x="3884613" y="8685213"/>
+            <a:ext cx="2971800" cy="457200"/>
+          </a:xfrm>
+          <a:prstGeom prst="rect">
+            <a:avLst/>
+          </a:prstGeom>
+        </p:spPr>
+        <p:txBody>
+          <a:bodyPr vert="horz" lIns="91440" tIns="45720" rIns="91440" bIns="45720" rtlCol="0" anchor="b"/>
+          <a:lstStyle>
+            <a:lvl1pPr algn="r">
+              <a:defRPr sz="1200"/>
+            </a:lvl1pPr>
+          </a:lstStyle>
+          <a:p>
+            <a:fld id="{BB5E49A5-4136-284D-997B-48E1D791AD67}" type="slidenum">
+              <a:rPr lang="en-US" smtClean="0"/>
+              <a:t>‹#›</a:t>
+            </a:fld>
+            <a:endParaRPr lang="en-US"/>
+          </a:p>
+        </p:txBody>
+      </p:sp>
+    </p:spTree>
+    <p:extLst>
+      <p:ext uri="{BB962C8B-B14F-4D97-AF65-F5344CB8AC3E}">
+        <p14:creationId xmlns:p14="http://schemas.microsoft.com/office/powerpoint/2010/main" val="2623252185"/>
+      </p:ext>
+    </p:extLst>
+  </p:cSld>
+  <p:clrMap bg1="lt1" tx1="dk1" bg2="lt2" tx2="dk2" accent1="accent1" accent2="accent2" accent3="accent3" accent4="accent4" accent5="accent5" accent6="accent6" hlink="hlink" folHlink="folHlink"/>
+  <p:notesStyle>
+    <a:lvl1pPr marL="0" algn="l" defTabSz="457200" rtl="0" eaLnBrk="1" latinLnBrk="0" hangingPunct="1">
+      <a:defRPr sz="1200" kern="1200">
+        <a:solidFill>
+          <a:schemeClr val="tx1"/>
+        </a:solidFill>
+        <a:latin typeface="+mn-lt"/>
+        <a:ea typeface="+mn-ea"/>
+        <a:cs typeface="+mn-cs"/>
+      </a:defRPr>
+    </a:lvl1pPr>
+    <a:lvl2pPr marL="457200" algn="l" defTabSz="457200" rtl="0" eaLnBrk="1" latinLnBrk="0" hangingPunct="1">
+      <a:defRPr sz="1200" kern="1200">
+        <a:solidFill>
+          <a:schemeClr val="tx1"/>
+        </a:solidFill>
+        <a:latin typeface="+mn-lt"/>
+        <a:ea typeface="+mn-ea"/>
+        <a:cs typeface="+mn-cs"/>
+      </a:defRPr>
+    </a:lvl2pPr>
+    <a:lvl3pPr marL="914400" algn="l" defTabSz="457200" rtl="0" eaLnBrk="1" latinLnBrk="0" hangingPunct="1">
+      <a:defRPr sz="1200" kern="1200">
+        <a:solidFill>
+          <a:schemeClr val="tx1"/>
+        </a:solidFill>
+        <a:latin typeface="+mn-lt"/>
+        <a:ea typeface="+mn-ea"/>
+        <a:cs typeface="+mn-cs"/>
+      </a:defRPr>
+    </a:lvl3pPr>
+    <a:lvl4pPr marL="1371600" algn="l" defTabSz="457200" rtl="0" eaLnBrk="1" latinLnBrk="0" hangingPunct="1">
+      <a:defRPr sz="1200" kern="1200">
+        <a:solidFill>
+          <a:schemeClr val="tx1"/>
+        </a:solidFill>
+        <a:latin typeface="+mn-lt"/>
+        <a:ea typeface="+mn-ea"/>
+        <a:cs typeface="+mn-cs"/>
+      </a:defRPr>
+    </a:lvl4pPr>
+    <a:lvl5pPr marL="1828800" algn="l" defTabSz="457200" rtl="0" eaLnBrk="1" latinLnBrk="0" hangingPunct="1">
+      <a:defRPr sz="1200" kern="1200">
+        <a:solidFill>
+          <a:schemeClr val="tx1"/>
+        </a:solidFill>
+        <a:latin typeface="+mn-lt"/>
+        <a:ea typeface="+mn-ea"/>
+        <a:cs typeface="+mn-cs"/>
+      </a:defRPr>
+    </a:lvl5pPr>
+    <a:lvl6pPr marL="2286000" algn="l" defTabSz="457200" rtl="0" eaLnBrk="1" latinLnBrk="0" hangingPunct="1">
+      <a:defRPr sz="1200" kern="1200">
+        <a:solidFill>
+          <a:schemeClr val="tx1"/>
+        </a:solidFill>
+        <a:latin typeface="+mn-lt"/>
+        <a:ea typeface="+mn-ea"/>
+        <a:cs typeface="+mn-cs"/>
+      </a:defRPr>
+    </a:lvl6pPr>
+    <a:lvl7pPr marL="2743200" algn="l" defTabSz="457200" rtl="0" eaLnBrk="1" latinLnBrk="0" hangingPunct="1">
+      <a:defRPr sz="1200" kern="1200">
+        <a:solidFill>
+          <a:schemeClr val="tx1"/>
+        </a:solidFill>
+        <a:latin typeface="+mn-lt"/>
+        <a:ea typeface="+mn-ea"/>
+        <a:cs typeface="+mn-cs"/>
+      </a:defRPr>
+    </a:lvl7pPr>
+    <a:lvl8pPr marL="3200400" algn="l" defTabSz="457200" rtl="0" eaLnBrk="1" latinLnBrk="0" hangingPunct="1">
+      <a:defRPr sz="1200" kern="1200">
+        <a:solidFill>
+          <a:schemeClr val="tx1"/>
+        </a:solidFill>
+        <a:latin typeface="+mn-lt"/>
+        <a:ea typeface="+mn-ea"/>
+        <a:cs typeface="+mn-cs"/>
+      </a:defRPr>
+    </a:lvl8pPr>
+    <a:lvl9pPr marL="3657600" algn="l" defTabSz="457200" rtl="0" eaLnBrk="1" latinLnBrk="0" hangingPunct="1">
+      <a:defRPr sz="1200" kern="1200">
+        <a:solidFill>
+          <a:schemeClr val="tx1"/>
+        </a:solidFill>
+        <a:latin typeface="+mn-lt"/>
+        <a:ea typeface="+mn-ea"/>
+        <a:cs typeface="+mn-cs"/>
+      </a:defRPr>
+    </a:lvl9pPr>
+  </p:notesStyle>
+</p:notesMaster>
+</file>
+
+<file path=ppt/notesSlides/notesSlide1.xml><?xml version="1.0" encoding="utf-8"?>
+<p:notes xmlns:a="http://schemas.openxmlformats.org/drawingml/2006/main" xmlns:p="http://schemas.openxmlformats.org/presentationml/2006/main" xmlns:r="http://schemas.openxmlformats.org/officeDocument/2006/relationships">
+  <p:cSld>
+    <p:spTree>
+      <p:nvGrpSpPr>
+        <p:cNvPr id="1" name=""/>
+        <p:cNvGrpSpPr/>
+        <p:nvPr/>
+      </p:nvGrpSpPr>
+      <p:grpSpPr>
+        <a:xfrm>
+          <a:off x="0" y="0"/>
+          <a:ext cx="0" cy="0"/>
+          <a:chOff x="0" y="0"/>
+          <a:chExt cx="0" cy="0"/>
+        </a:xfrm>
+      </p:grpSpPr>
+      <p:sp>
+        <p:nvSpPr>
+          <p:cNvPr id="2" name="Slide Image Placeholder 1"/>
+          <p:cNvSpPr>
+            <a:spLocks noGrp="1"/>
+          </p:cNvSpPr>
+          <p:nvPr>
+            <p:ph type="sldImg" idx="2"/>
+          </p:nvPr>
+        </p:nvSpPr>
+        <p:spPr/>
+      </p:sp>
+      <p:sp>
+        <p:nvSpPr>
+          <p:cNvPr id="3" name="Notes Placeholder 2"/>
+          <p:cNvSpPr>
+            <a:spLocks noGrp="1"/>
+          </p:cNvSpPr>
+          <p:nvPr>
+            <p:ph type="body" idx="3" sz="quarter"/>
+          </p:nvPr>
+        </p:nvSpPr>
+        <p:spPr/>
+        <p:txBody>
+          <a:bodyPr/>
+          <a:lstStyle/>
+          <a:p>
+            <a:r>
+              <a:t>Conversation, la charla que aclara los detalles; y Confirmation, los criterios de aceptacion.</a:t>
+            </a:r>
+          </a:p>
+        </p:txBody>
+      </p:sp>
+      <p:sp>
+        <p:nvSpPr>
+          <p:cNvPr id="4" name="Slide Number Placeholder 3"/>
+          <p:cNvSpPr>
+            <a:spLocks noGrp="1"/>
+          </p:cNvSpPr>
+          <p:nvPr>
+            <p:ph type="sldNum" idx="5" sz="quarter"/>
+          </p:nvPr>
+        </p:nvSpPr>
+        <p:spPr/>
+      </p:sp>
+    </p:spTree>
+  </p:cSld>
+  <p:clrMapOvr>
+    <a:masterClrMapping/>
+  </p:clrMapOvr>
+</p:notes>
+</file>
+
+<file path=ppt/notesSlides/notesSlide2.xml><?xml version="1.0" encoding="utf-8"?>
+<p:notes xmlns:a="http://schemas.openxmlformats.org/drawingml/2006/main" xmlns:p="http://schemas.openxmlformats.org/presentationml/2006/main" xmlns:r="http://schemas.openxmlformats.org/officeDocument/2006/relationships">
+  <p:cSld>
+    <p:spTree>
+      <p:nvGrpSpPr>
+        <p:cNvPr id="1" name=""/>
+        <p:cNvGrpSpPr/>
+        <p:nvPr/>
+      </p:nvGrpSpPr>
+      <p:grpSpPr>
+        <a:xfrm>
+          <a:off x="0" y="0"/>
+          <a:ext cx="0" cy="0"/>
+          <a:chOff x="0" y="0"/>
+          <a:chExt cx="0" cy="0"/>
+        </a:xfrm>
+      </p:grpSpPr>
+      <p:sp>
+        <p:nvSpPr>
+          <p:cNvPr id="2" name="Slide Image Placeholder 1"/>
+          <p:cNvSpPr>
+            <a:spLocks noGrp="1"/>
+          </p:cNvSpPr>
+          <p:nvPr>
+            <p:ph type="sldImg" idx="2"/>
+          </p:nvPr>
+        </p:nvSpPr>
+        <p:spPr/>
+      </p:sp>
+      <p:sp>
+        <p:nvSpPr>
+          <p:cNvPr id="3" name="Notes Placeholder 2"/>
+          <p:cNvSpPr>
+            <a:spLocks noGrp="1"/>
+          </p:cNvSpPr>
+          <p:nvPr>
+            <p:ph type="body" idx="3" sz="quarter"/>
+          </p:nvPr>
+        </p:nvSpPr>
+        <p:spPr/>
+        <p:txBody>
+          <a:bodyPr/>
+          <a:lstStyle/>
+          <a:p>
+            <a:r>
+              <a:t>Dado que selecciono la mascota Rocky, cuando abro su historial, entonces veo sus atenciones de la mas reciente a la mas antigua</a:t>
+            </a:r>
+          </a:p>
+          <a:p/>
+          <a:p>
+            <a:r>
+              <a:t>Dado un documento que no existe, cuando busco, entonces el sistema muestra un mensaje claro y ofrece crear el dueno.</a:t>
+            </a:r>
+          </a:p>
+        </p:txBody>
+      </p:sp>
+      <p:sp>
+        <p:nvSpPr>
+          <p:cNvPr id="4" name="Slide Number Placeholder 3"/>
+          <p:cNvSpPr>
+            <a:spLocks noGrp="1"/>
+          </p:cNvSpPr>
+          <p:nvPr>
+            <p:ph type="sldNum" idx="5" sz="quarter"/>
+          </p:nvPr>
+        </p:nvSpPr>
+        <p:spPr/>
+      </p:sp>
+    </p:spTree>
+  </p:cSld>
+  <p:clrMapOvr>
+    <a:masterClrMapping/>
+  </p:clrMapOvr>
+</p:notes>
+</file>
+
+<file path=ppt/notesSlides/notesSlide3.xml><?xml version="1.0" encoding="utf-8"?>
+<p:notes xmlns:a="http://schemas.openxmlformats.org/drawingml/2006/main" xmlns:p="http://schemas.openxmlformats.org/presentationml/2006/main" xmlns:r="http://schemas.openxmlformats.org/officeDocument/2006/relationships">
+  <p:cSld>
+    <p:spTree>
+      <p:nvGrpSpPr>
+        <p:cNvPr id="1" name=""/>
+        <p:cNvGrpSpPr/>
+        <p:nvPr/>
+      </p:nvGrpSpPr>
+      <p:grpSpPr>
+        <a:xfrm>
+          <a:off x="0" y="0"/>
+          <a:ext cx="0" cy="0"/>
+          <a:chOff x="0" y="0"/>
+          <a:chExt cx="0" cy="0"/>
+        </a:xfrm>
+      </p:grpSpPr>
+      <p:sp>
+        <p:nvSpPr>
+          <p:cNvPr id="2" name="Slide Image Placeholder 1"/>
+          <p:cNvSpPr>
+            <a:spLocks noGrp="1"/>
+          </p:cNvSpPr>
+          <p:nvPr>
+            <p:ph type="sldImg" idx="2"/>
+          </p:nvPr>
+        </p:nvSpPr>
+        <p:spPr/>
+      </p:sp>
+      <p:sp>
+        <p:nvSpPr>
+          <p:cNvPr id="3" name="Notes Placeholder 2"/>
+          <p:cNvSpPr>
+            <a:spLocks noGrp="1"/>
+          </p:cNvSpPr>
+          <p:nvPr>
+            <p:ph type="body" idx="3" sz="quarter"/>
+          </p:nvPr>
+        </p:nvSpPr>
+        <p:spPr/>
+        <p:txBody>
+          <a:bodyPr/>
+          <a:lstStyle/>
+          <a:p>
+            <a:r>
+              <a:t>El nombre de la epica se conserva como etiqueta en cada historia para no perder el hilo.</a:t>
+            </a:r>
+          </a:p>
+        </p:txBody>
+      </p:sp>
+      <p:sp>
+        <p:nvSpPr>
+          <p:cNvPr id="4" name="Slide Number Placeholder 3"/>
+          <p:cNvSpPr>
+            <a:spLocks noGrp="1"/>
+          </p:cNvSpPr>
+          <p:nvPr>
+            <p:ph type="sldNum" idx="5" sz="quarter"/>
+          </p:nvPr>
+        </p:nvSpPr>
+        <p:spPr/>
+      </p:sp>
+    </p:spTree>
+  </p:cSld>
+  <p:clrMapOvr>
+    <a:masterClrMapping/>
+  </p:clrMapOvr>
+</p:notes>
+</file>
+
+<file path=ppt/notesSlides/notesSlide4.xml><?xml version="1.0" encoding="utf-8"?>
+<p:notes xmlns:a="http://schemas.openxmlformats.org/drawingml/2006/main" xmlns:p="http://schemas.openxmlformats.org/presentationml/2006/main" xmlns:r="http://schemas.openxmlformats.org/officeDocument/2006/relationships">
+  <p:cSld>
+    <p:spTree>
+      <p:nvGrpSpPr>
+        <p:cNvPr id="1" name=""/>
+        <p:cNvGrpSpPr/>
+        <p:nvPr/>
+      </p:nvGrpSpPr>
+      <p:grpSpPr>
+        <a:xfrm>
+          <a:off x="0" y="0"/>
+          <a:ext cx="0" cy="0"/>
+          <a:chOff x="0" y="0"/>
+          <a:chExt cx="0" cy="0"/>
+        </a:xfrm>
+      </p:grpSpPr>
+      <p:sp>
+        <p:nvSpPr>
+          <p:cNvPr id="2" name="Slide Image Placeholder 1"/>
+          <p:cNvSpPr>
+            <a:spLocks noGrp="1"/>
+          </p:cNvSpPr>
+          <p:nvPr>
+            <p:ph type="sldImg" idx="2"/>
+          </p:nvPr>
+        </p:nvSpPr>
+        <p:spPr/>
+      </p:sp>
+      <p:sp>
+        <p:nvSpPr>
+          <p:cNvPr id="3" name="Notes Placeholder 2"/>
+          <p:cNvSpPr>
+            <a:spLocks noGrp="1"/>
+          </p:cNvSpPr>
+          <p:nvPr>
+            <p:ph type="body" idx="3" sz="quarter"/>
+          </p:nvPr>
+        </p:nvSpPr>
+        <p:spPr/>
+        <p:txBody>
+          <a:bodyPr/>
+          <a:lstStyle/>
+          <a:p>
+            <a:r>
+              <a:t>Con dos o tres iteraciones se conoce la velocidad del equipo y recien ahi se puede prometer fechas.</a:t>
+            </a:r>
+          </a:p>
+        </p:txBody>
+      </p:sp>
+      <p:sp>
+        <p:nvSpPr>
+          <p:cNvPr id="4" name="Slide Number Placeholder 3"/>
+          <p:cNvSpPr>
+            <a:spLocks noGrp="1"/>
+          </p:cNvSpPr>
+          <p:nvPr>
+            <p:ph type="sldNum" idx="5" sz="quarter"/>
+          </p:nvPr>
+        </p:nvSpPr>
+        <p:spPr/>
+      </p:sp>
+    </p:spTree>
+  </p:cSld>
+  <p:clrMapOvr>
+    <a:masterClrMapping/>
+  </p:clrMapOvr>
+</p:notes>
 </file>
 
 <file path=ppt/slideLayouts/slideLayout1.xml><?xml version="1.0" encoding="utf-8"?>
@@ -6467,13 +7096,13 @@
         <p:spPr>
           <a:xfrm>
             <a:off x="0" y="0"/>
-            <a:ext cx="12191695" cy="1170432"/>
+            <a:ext cx="12191695" cy="164592"/>
           </a:xfrm>
           <a:prstGeom prst="rect">
             <a:avLst/>
           </a:prstGeom>
           <a:solidFill>
-            <a:srgbClr val="095292"/>
+            <a:srgbClr val="269CCB"/>
           </a:solidFill>
           <a:ln>
             <a:noFill/>
@@ -6501,251 +7130,9 @@
           </a:p>
         </p:txBody>
       </p:sp>
-      <p:sp>
-        <p:nvSpPr>
-          <p:cNvPr id="3" name="Rectangle 2"/>
-          <p:cNvSpPr/>
-          <p:nvPr/>
-        </p:nvSpPr>
-        <p:spPr>
-          <a:xfrm>
-            <a:off x="0" y="1170432"/>
-            <a:ext cx="12191695" cy="41148"/>
-          </a:xfrm>
-          <a:prstGeom prst="rect">
-            <a:avLst/>
-          </a:prstGeom>
-          <a:solidFill>
-            <a:srgbClr val="FFD000"/>
-          </a:solidFill>
-          <a:ln>
-            <a:noFill/>
-          </a:ln>
-        </p:spPr>
-        <p:style>
-          <a:lnRef idx="1">
-            <a:schemeClr val="accent1"/>
-          </a:lnRef>
-          <a:fillRef idx="3">
-            <a:schemeClr val="accent1"/>
-          </a:fillRef>
-          <a:effectRef idx="2">
-            <a:schemeClr val="accent1"/>
-          </a:effectRef>
-          <a:fontRef idx="minor">
-            <a:schemeClr val="lt1"/>
-          </a:fontRef>
-        </p:style>
-        <p:txBody>
-          <a:bodyPr rtlCol="0" anchor="ctr"/>
-          <a:lstStyle/>
-          <a:p>
-            <a:pPr algn="ctr"/>
-          </a:p>
-        </p:txBody>
-      </p:sp>
-      <p:sp>
-        <p:nvSpPr>
-          <p:cNvPr id="4" name="TextBox 3"/>
-          <p:cNvSpPr txBox="1"/>
-          <p:nvPr/>
-        </p:nvSpPr>
-        <p:spPr>
-          <a:xfrm>
-            <a:off x="457200" y="164592"/>
-            <a:ext cx="11277295" cy="384048"/>
-          </a:xfrm>
-          <a:prstGeom prst="rect">
-            <a:avLst/>
-          </a:prstGeom>
-          <a:noFill/>
-        </p:spPr>
-        <p:txBody>
-          <a:bodyPr wrap="square">
-            <a:spAutoFit/>
-          </a:bodyPr>
-          <a:lstStyle/>
-          <a:p>
-            <a:r>
-              <a:rPr sz="2600" b="1" i="0">
-                <a:solidFill>
-                  <a:srgbClr val="FFFFFF"/>
-                </a:solidFill>
-                <a:latin typeface="Calibri"/>
-              </a:rPr>
-              <a:t>Herramientas de hoy</a:t>
-            </a:r>
-          </a:p>
-        </p:txBody>
-      </p:sp>
-      <p:sp>
-        <p:nvSpPr>
-          <p:cNvPr id="5" name="TextBox 4"/>
-          <p:cNvSpPr txBox="1"/>
-          <p:nvPr/>
-        </p:nvSpPr>
-        <p:spPr>
-          <a:xfrm>
-            <a:off x="457200" y="566928"/>
-            <a:ext cx="11277295" cy="411480"/>
-          </a:xfrm>
-          <a:prstGeom prst="rect">
-            <a:avLst/>
-          </a:prstGeom>
-          <a:noFill/>
-        </p:spPr>
-        <p:txBody>
-          <a:bodyPr wrap="square">
-            <a:spAutoFit/>
-          </a:bodyPr>
-          <a:lstStyle/>
-          <a:p>
-            <a:r>
-              <a:rPr sz="1400" b="0" i="0">
-                <a:solidFill>
-                  <a:srgbClr val="B8D8EE"/>
-                </a:solidFill>
-                <a:latin typeface="Calibri"/>
-              </a:rPr>
-              <a:t>Gratis · funcionan en el navegador</a:t>
-            </a:r>
-          </a:p>
-        </p:txBody>
-      </p:sp>
-      <p:sp>
-        <p:nvSpPr>
-          <p:cNvPr id="6" name="Rounded Rectangle 5"/>
-          <p:cNvSpPr/>
-          <p:nvPr/>
-        </p:nvSpPr>
-        <p:spPr>
-          <a:xfrm>
-            <a:off x="457200" y="1591056"/>
-            <a:ext cx="3624986" cy="2331720"/>
-          </a:xfrm>
-          <a:prstGeom prst="roundRect">
-            <a:avLst>
-              <a:gd name="adj" fmla="val 12000"/>
-            </a:avLst>
-          </a:prstGeom>
-          <a:solidFill>
-            <a:srgbClr val="F2F2F2"/>
-          </a:solidFill>
-          <a:ln>
-            <a:noFill/>
-          </a:ln>
-        </p:spPr>
-        <p:style>
-          <a:lnRef idx="1">
-            <a:schemeClr val="accent1"/>
-          </a:lnRef>
-          <a:fillRef idx="3">
-            <a:schemeClr val="accent1"/>
-          </a:fillRef>
-          <a:effectRef idx="2">
-            <a:schemeClr val="accent1"/>
-          </a:effectRef>
-          <a:fontRef idx="minor">
-            <a:schemeClr val="lt1"/>
-          </a:fontRef>
-        </p:style>
-        <p:txBody>
-          <a:bodyPr rtlCol="0" anchor="ctr"/>
-          <a:lstStyle/>
-          <a:p>
-            <a:pPr algn="ctr"/>
-          </a:p>
-        </p:txBody>
-      </p:sp>
-      <p:sp>
-        <p:nvSpPr>
-          <p:cNvPr id="7" name="Rectangle 6"/>
-          <p:cNvSpPr/>
-          <p:nvPr/>
-        </p:nvSpPr>
-        <p:spPr>
-          <a:xfrm>
-            <a:off x="457200" y="1591056"/>
-            <a:ext cx="3624986" cy="64008"/>
-          </a:xfrm>
-          <a:prstGeom prst="rect">
-            <a:avLst/>
-          </a:prstGeom>
-          <a:solidFill>
-            <a:srgbClr val="095292"/>
-          </a:solidFill>
-          <a:ln>
-            <a:noFill/>
-          </a:ln>
-        </p:spPr>
-        <p:style>
-          <a:lnRef idx="1">
-            <a:schemeClr val="accent1"/>
-          </a:lnRef>
-          <a:fillRef idx="3">
-            <a:schemeClr val="accent1"/>
-          </a:fillRef>
-          <a:effectRef idx="2">
-            <a:schemeClr val="accent1"/>
-          </a:effectRef>
-          <a:fontRef idx="minor">
-            <a:schemeClr val="lt1"/>
-          </a:fontRef>
-        </p:style>
-        <p:txBody>
-          <a:bodyPr rtlCol="0" anchor="ctr"/>
-          <a:lstStyle/>
-          <a:p>
-            <a:pPr algn="ctr"/>
-          </a:p>
-        </p:txBody>
-      </p:sp>
-      <p:sp>
-        <p:nvSpPr>
-          <p:cNvPr id="8" name="Rectangle 7"/>
-          <p:cNvSpPr/>
-          <p:nvPr/>
-        </p:nvSpPr>
-        <p:spPr>
-          <a:xfrm>
-            <a:off x="457200" y="1655064"/>
-            <a:ext cx="3624986" cy="27432"/>
-          </a:xfrm>
-          <a:prstGeom prst="rect">
-            <a:avLst/>
-          </a:prstGeom>
-          <a:solidFill>
-            <a:srgbClr val="FFD000"/>
-          </a:solidFill>
-          <a:ln>
-            <a:noFill/>
-          </a:ln>
-        </p:spPr>
-        <p:style>
-          <a:lnRef idx="1">
-            <a:schemeClr val="accent1"/>
-          </a:lnRef>
-          <a:fillRef idx="3">
-            <a:schemeClr val="accent1"/>
-          </a:fillRef>
-          <a:effectRef idx="2">
-            <a:schemeClr val="accent1"/>
-          </a:effectRef>
-          <a:fontRef idx="minor">
-            <a:schemeClr val="lt1"/>
-          </a:fontRef>
-        </p:style>
-        <p:txBody>
-          <a:bodyPr rtlCol="0" anchor="ctr"/>
-          <a:lstStyle/>
-          <a:p>
-            <a:pPr algn="ctr"/>
-          </a:p>
-        </p:txBody>
-      </p:sp>
       <p:pic>
         <p:nvPicPr>
-          <p:cNvPr id="9" name="Picture 8" descr="excalidraw.png"/>
+          <p:cNvPr id="3" name="Picture 2" descr="logo_uniajc_color.png"/>
           <p:cNvPicPr>
             <a:picLocks noChangeAspect="1"/>
           </p:cNvPicPr>
@@ -6759,8 +7146,8 @@
         </p:blipFill>
         <p:spPr>
           <a:xfrm>
-            <a:off x="1643329" y="1847087"/>
-            <a:ext cx="1252728" cy="1252728"/>
+            <a:off x="10271455" y="5998464"/>
+            <a:ext cx="1463040" cy="643233"/>
           </a:xfrm>
           <a:prstGeom prst="rect">
             <a:avLst/>
@@ -6769,14 +7156,14 @@
       </p:pic>
       <p:sp>
         <p:nvSpPr>
-          <p:cNvPr id="10" name="TextBox 9"/>
+          <p:cNvPr id="4" name="TextBox 3"/>
           <p:cNvSpPr txBox="1"/>
           <p:nvPr/>
         </p:nvSpPr>
         <p:spPr>
           <a:xfrm>
-            <a:off x="530352" y="3191256"/>
-            <a:ext cx="3478682" cy="621792"/>
+            <a:off x="457200" y="1737360"/>
+            <a:ext cx="11277295" cy="1097280"/>
           </a:xfrm>
           <a:prstGeom prst="rect">
             <a:avLst/>
@@ -6784,456 +7171,32 @@
           <a:noFill/>
         </p:spPr>
         <p:txBody>
-          <a:bodyPr wrap="square" anchor="t"/>
+          <a:bodyPr wrap="square" anchor="ctr"/>
           <a:lstStyle/>
           <a:p>
             <a:pPr algn="ctr"/>
             <a:r>
-              <a:rPr sz="1300" b="1" i="0">
+              <a:rPr sz="3400" b="1" i="0">
                 <a:solidFill>
                   <a:srgbClr val="095292"/>
                 </a:solidFill>
                 <a:latin typeface="Calibri"/>
               </a:rPr>
-              <a:t>Excalidraw</a:t>
-            </a:r>
-          </a:p>
-          <a:p>
-            <a:pPr algn="ctr">
-              <a:spcBef>
-                <a:spcPts val="200"/>
-              </a:spcBef>
-            </a:pPr>
-            <a:r>
-              <a:rPr sz="1000" b="0" i="0">
-                <a:solidFill>
-                  <a:srgbClr val="666666"/>
-                </a:solidFill>
-                <a:latin typeface="Calibri"/>
-              </a:rPr>
-              <a:t>Bocetos rapidos a mano alzada</a:t>
-            </a:r>
-          </a:p>
-        </p:txBody>
-      </p:sp>
-      <p:sp>
-        <p:nvSpPr>
-          <p:cNvPr id="11" name="Rounded Rectangle 10"/>
-          <p:cNvSpPr/>
-          <p:nvPr/>
-        </p:nvSpPr>
-        <p:spPr>
-          <a:xfrm>
-            <a:off x="4283354" y="1591056"/>
-            <a:ext cx="3624986" cy="2331720"/>
-          </a:xfrm>
-          <a:prstGeom prst="roundRect">
-            <a:avLst>
-              <a:gd name="adj" fmla="val 12000"/>
-            </a:avLst>
-          </a:prstGeom>
-          <a:solidFill>
-            <a:srgbClr val="F2F2F2"/>
-          </a:solidFill>
-          <a:ln>
-            <a:noFill/>
-          </a:ln>
-        </p:spPr>
-        <p:style>
-          <a:lnRef idx="1">
-            <a:schemeClr val="accent1"/>
-          </a:lnRef>
-          <a:fillRef idx="3">
-            <a:schemeClr val="accent1"/>
-          </a:fillRef>
-          <a:effectRef idx="2">
-            <a:schemeClr val="accent1"/>
-          </a:effectRef>
-          <a:fontRef idx="minor">
-            <a:schemeClr val="lt1"/>
-          </a:fontRef>
-        </p:style>
-        <p:txBody>
-          <a:bodyPr rtlCol="0" anchor="ctr"/>
-          <a:lstStyle/>
-          <a:p>
-            <a:pPr algn="ctr"/>
-          </a:p>
-        </p:txBody>
-      </p:sp>
-      <p:sp>
-        <p:nvSpPr>
-          <p:cNvPr id="12" name="Rectangle 11"/>
-          <p:cNvSpPr/>
-          <p:nvPr/>
-        </p:nvSpPr>
-        <p:spPr>
-          <a:xfrm>
-            <a:off x="4283354" y="1591056"/>
-            <a:ext cx="3624986" cy="64008"/>
-          </a:xfrm>
-          <a:prstGeom prst="rect">
-            <a:avLst/>
-          </a:prstGeom>
-          <a:solidFill>
-            <a:srgbClr val="095292"/>
-          </a:solidFill>
-          <a:ln>
-            <a:noFill/>
-          </a:ln>
-        </p:spPr>
-        <p:style>
-          <a:lnRef idx="1">
-            <a:schemeClr val="accent1"/>
-          </a:lnRef>
-          <a:fillRef idx="3">
-            <a:schemeClr val="accent1"/>
-          </a:fillRef>
-          <a:effectRef idx="2">
-            <a:schemeClr val="accent1"/>
-          </a:effectRef>
-          <a:fontRef idx="minor">
-            <a:schemeClr val="lt1"/>
-          </a:fontRef>
-        </p:style>
-        <p:txBody>
-          <a:bodyPr rtlCol="0" anchor="ctr"/>
-          <a:lstStyle/>
-          <a:p>
-            <a:pPr algn="ctr"/>
-          </a:p>
-        </p:txBody>
-      </p:sp>
-      <p:sp>
-        <p:nvSpPr>
-          <p:cNvPr id="13" name="Rectangle 12"/>
-          <p:cNvSpPr/>
-          <p:nvPr/>
-        </p:nvSpPr>
-        <p:spPr>
-          <a:xfrm>
-            <a:off x="4283354" y="1655064"/>
-            <a:ext cx="3624986" cy="27432"/>
-          </a:xfrm>
-          <a:prstGeom prst="rect">
-            <a:avLst/>
-          </a:prstGeom>
-          <a:solidFill>
-            <a:srgbClr val="FFD000"/>
-          </a:solidFill>
-          <a:ln>
-            <a:noFill/>
-          </a:ln>
-        </p:spPr>
-        <p:style>
-          <a:lnRef idx="1">
-            <a:schemeClr val="accent1"/>
-          </a:lnRef>
-          <a:fillRef idx="3">
-            <a:schemeClr val="accent1"/>
-          </a:fillRef>
-          <a:effectRef idx="2">
-            <a:schemeClr val="accent1"/>
-          </a:effectRef>
-          <a:fontRef idx="minor">
-            <a:schemeClr val="lt1"/>
-          </a:fontRef>
-        </p:style>
-        <p:txBody>
-          <a:bodyPr rtlCol="0" anchor="ctr"/>
-          <a:lstStyle/>
-          <a:p>
-            <a:pPr algn="ctr"/>
-          </a:p>
-        </p:txBody>
-      </p:sp>
-      <p:pic>
-        <p:nvPicPr>
-          <p:cNvPr id="14" name="Picture 13" descr="google_docs.png"/>
-          <p:cNvPicPr>
-            <a:picLocks noChangeAspect="1"/>
-          </p:cNvPicPr>
-          <p:nvPr/>
-        </p:nvPicPr>
-        <p:blipFill>
-          <a:blip r:embed="rId3"/>
-          <a:stretch>
-            <a:fillRect/>
-          </a:stretch>
-        </p:blipFill>
-        <p:spPr>
-          <a:xfrm>
-            <a:off x="5469483" y="1847087"/>
-            <a:ext cx="1252728" cy="1252728"/>
-          </a:xfrm>
-          <a:prstGeom prst="rect">
-            <a:avLst/>
-          </a:prstGeom>
-        </p:spPr>
-      </p:pic>
-      <p:sp>
-        <p:nvSpPr>
-          <p:cNvPr id="15" name="TextBox 14"/>
+              <a:t>Clase 7 · Historias de usuario</a:t>
+            </a:r>
+          </a:p>
+        </p:txBody>
+      </p:sp>
+      <p:sp>
+        <p:nvSpPr>
+          <p:cNvPr id="5" name="TextBox 4"/>
           <p:cNvSpPr txBox="1"/>
           <p:nvPr/>
         </p:nvSpPr>
         <p:spPr>
           <a:xfrm>
-            <a:off x="4356506" y="3191256"/>
-            <a:ext cx="3478682" cy="621792"/>
-          </a:xfrm>
-          <a:prstGeom prst="rect">
-            <a:avLst/>
-          </a:prstGeom>
-          <a:noFill/>
-        </p:spPr>
-        <p:txBody>
-          <a:bodyPr wrap="square" anchor="t"/>
-          <a:lstStyle/>
-          <a:p>
-            <a:pPr algn="ctr"/>
-            <a:r>
-              <a:rPr sz="1300" b="1" i="0">
-                <a:solidFill>
-                  <a:srgbClr val="095292"/>
-                </a:solidFill>
-                <a:latin typeface="Calibri"/>
-              </a:rPr>
-              <a:t>google docs</a:t>
-            </a:r>
-          </a:p>
-          <a:p>
-            <a:pPr algn="ctr">
-              <a:spcBef>
-                <a:spcPts val="200"/>
-              </a:spcBef>
-            </a:pPr>
-            <a:r>
-              <a:rPr sz="1000" b="0" i="0">
-                <a:solidFill>
-                  <a:srgbClr val="666666"/>
-                </a:solidFill>
-                <a:latin typeface="Calibri"/>
-              </a:rPr>
-              <a:t>Documentos del paquete de diseño</a:t>
-            </a:r>
-          </a:p>
-        </p:txBody>
-      </p:sp>
-      <p:sp>
-        <p:nvSpPr>
-          <p:cNvPr id="16" name="Rounded Rectangle 15"/>
-          <p:cNvSpPr/>
-          <p:nvPr/>
-        </p:nvSpPr>
-        <p:spPr>
-          <a:xfrm>
-            <a:off x="8109508" y="1591056"/>
-            <a:ext cx="3624986" cy="2331720"/>
-          </a:xfrm>
-          <a:prstGeom prst="roundRect">
-            <a:avLst>
-              <a:gd name="adj" fmla="val 12000"/>
-            </a:avLst>
-          </a:prstGeom>
-          <a:solidFill>
-            <a:srgbClr val="F2F2F2"/>
-          </a:solidFill>
-          <a:ln>
-            <a:noFill/>
-          </a:ln>
-        </p:spPr>
-        <p:style>
-          <a:lnRef idx="1">
-            <a:schemeClr val="accent1"/>
-          </a:lnRef>
-          <a:fillRef idx="3">
-            <a:schemeClr val="accent1"/>
-          </a:fillRef>
-          <a:effectRef idx="2">
-            <a:schemeClr val="accent1"/>
-          </a:effectRef>
-          <a:fontRef idx="minor">
-            <a:schemeClr val="lt1"/>
-          </a:fontRef>
-        </p:style>
-        <p:txBody>
-          <a:bodyPr rtlCol="0" anchor="ctr"/>
-          <a:lstStyle/>
-          <a:p>
-            <a:pPr algn="ctr"/>
-          </a:p>
-        </p:txBody>
-      </p:sp>
-      <p:sp>
-        <p:nvSpPr>
-          <p:cNvPr id="17" name="Rectangle 16"/>
-          <p:cNvSpPr/>
-          <p:nvPr/>
-        </p:nvSpPr>
-        <p:spPr>
-          <a:xfrm>
-            <a:off x="8109508" y="1591056"/>
-            <a:ext cx="3624986" cy="64008"/>
-          </a:xfrm>
-          <a:prstGeom prst="rect">
-            <a:avLst/>
-          </a:prstGeom>
-          <a:solidFill>
-            <a:srgbClr val="095292"/>
-          </a:solidFill>
-          <a:ln>
-            <a:noFill/>
-          </a:ln>
-        </p:spPr>
-        <p:style>
-          <a:lnRef idx="1">
-            <a:schemeClr val="accent1"/>
-          </a:lnRef>
-          <a:fillRef idx="3">
-            <a:schemeClr val="accent1"/>
-          </a:fillRef>
-          <a:effectRef idx="2">
-            <a:schemeClr val="accent1"/>
-          </a:effectRef>
-          <a:fontRef idx="minor">
-            <a:schemeClr val="lt1"/>
-          </a:fontRef>
-        </p:style>
-        <p:txBody>
-          <a:bodyPr rtlCol="0" anchor="ctr"/>
-          <a:lstStyle/>
-          <a:p>
-            <a:pPr algn="ctr"/>
-          </a:p>
-        </p:txBody>
-      </p:sp>
-      <p:sp>
-        <p:nvSpPr>
-          <p:cNvPr id="18" name="Rectangle 17"/>
-          <p:cNvSpPr/>
-          <p:nvPr/>
-        </p:nvSpPr>
-        <p:spPr>
-          <a:xfrm>
-            <a:off x="8109508" y="1655064"/>
-            <a:ext cx="3624986" cy="27432"/>
-          </a:xfrm>
-          <a:prstGeom prst="rect">
-            <a:avLst/>
-          </a:prstGeom>
-          <a:solidFill>
-            <a:srgbClr val="FFD000"/>
-          </a:solidFill>
-          <a:ln>
-            <a:noFill/>
-          </a:ln>
-        </p:spPr>
-        <p:style>
-          <a:lnRef idx="1">
-            <a:schemeClr val="accent1"/>
-          </a:lnRef>
-          <a:fillRef idx="3">
-            <a:schemeClr val="accent1"/>
-          </a:fillRef>
-          <a:effectRef idx="2">
-            <a:schemeClr val="accent1"/>
-          </a:effectRef>
-          <a:fontRef idx="minor">
-            <a:schemeClr val="lt1"/>
-          </a:fontRef>
-        </p:style>
-        <p:txBody>
-          <a:bodyPr rtlCol="0" anchor="ctr"/>
-          <a:lstStyle/>
-          <a:p>
-            <a:pPr algn="ctr"/>
-          </a:p>
-        </p:txBody>
-      </p:sp>
-      <p:pic>
-        <p:nvPicPr>
-          <p:cNvPr id="19" name="Picture 18" descr="examlab.png"/>
-          <p:cNvPicPr>
-            <a:picLocks noChangeAspect="1"/>
-          </p:cNvPicPr>
-          <p:nvPr/>
-        </p:nvPicPr>
-        <p:blipFill>
-          <a:blip r:embed="rId4"/>
-          <a:stretch>
-            <a:fillRect/>
-          </a:stretch>
-        </p:blipFill>
-        <p:spPr>
-          <a:xfrm>
-            <a:off x="9295638" y="1847087"/>
-            <a:ext cx="1252728" cy="1252728"/>
-          </a:xfrm>
-          <a:prstGeom prst="rect">
-            <a:avLst/>
-          </a:prstGeom>
-        </p:spPr>
-      </p:pic>
-      <p:sp>
-        <p:nvSpPr>
-          <p:cNvPr id="20" name="TextBox 19"/>
-          <p:cNvSpPr txBox="1"/>
-          <p:nvPr/>
-        </p:nvSpPr>
-        <p:spPr>
-          <a:xfrm>
-            <a:off x="8182660" y="3191256"/>
-            <a:ext cx="3478682" cy="621792"/>
-          </a:xfrm>
-          <a:prstGeom prst="rect">
-            <a:avLst/>
-          </a:prstGeom>
-          <a:noFill/>
-        </p:spPr>
-        <p:txBody>
-          <a:bodyPr wrap="square" anchor="t"/>
-          <a:lstStyle/>
-          <a:p>
-            <a:pPr algn="ctr"/>
-            <a:r>
-              <a:rPr sz="1300" b="1" i="0">
-                <a:solidFill>
-                  <a:srgbClr val="095292"/>
-                </a:solidFill>
-                <a:latin typeface="Calibri"/>
-              </a:rPr>
-              <a:t>la plataforma del curso</a:t>
-            </a:r>
-          </a:p>
-          <a:p>
-            <a:pPr algn="ctr">
-              <a:spcBef>
-                <a:spcPts val="200"/>
-              </a:spcBef>
-            </a:pPr>
-            <a:r>
-              <a:rPr sz="1000" b="0" i="0">
-                <a:solidFill>
-                  <a:srgbClr val="666666"/>
-                </a:solidFill>
-                <a:latin typeface="Calibri"/>
-              </a:rPr>
-              <a:t>Entrega del taller · en la fecha que indique el docente</a:t>
-            </a:r>
-          </a:p>
-        </p:txBody>
-      </p:sp>
-      <p:sp>
-        <p:nvSpPr>
-          <p:cNvPr id="21" name="TextBox 20"/>
-          <p:cNvSpPr txBox="1"/>
-          <p:nvPr/>
-        </p:nvSpPr>
-        <p:spPr>
-          <a:xfrm>
-            <a:off x="11185855" y="6473952"/>
-            <a:ext cx="640080" cy="274320"/>
+            <a:off x="457200" y="3017520"/>
+            <a:ext cx="11277295" cy="1645920"/>
           </a:xfrm>
           <a:prstGeom prst="rect">
             <a:avLst/>
@@ -7246,141 +7209,65 @@
           </a:bodyPr>
           <a:lstStyle/>
           <a:p>
-            <a:pPr algn="r"/>
-            <a:r>
-              <a:rPr sz="1100" b="0" i="0">
-                <a:solidFill>
-                  <a:srgbClr val="666666"/>
-                </a:solidFill>
-                <a:latin typeface="Calibri"/>
-              </a:rPr>
-              <a:t>18</a:t>
-            </a:r>
-          </a:p>
-        </p:txBody>
-      </p:sp>
-    </p:spTree>
-  </p:cSld>
-  <p:clrMapOvr>
-    <a:masterClrMapping/>
-  </p:clrMapOvr>
-</p:sld>
-</file>
-
-<file path=ppt/slides/slide19.xml><?xml version="1.0" encoding="utf-8"?>
-<p:sld xmlns:a="http://schemas.openxmlformats.org/drawingml/2006/main" xmlns:p="http://schemas.openxmlformats.org/presentationml/2006/main" xmlns:r="http://schemas.openxmlformats.org/officeDocument/2006/relationships">
-  <p:cSld>
-    <p:bg>
-      <p:bgPr>
-        <a:solidFill>
-          <a:srgbClr val="FFFFFF"/>
-        </a:solidFill>
-        <a:effectLst/>
-      </p:bgPr>
-    </p:bg>
-    <p:spTree>
-      <p:nvGrpSpPr>
-        <p:cNvPr id="1" name=""/>
-        <p:cNvGrpSpPr/>
-        <p:nvPr/>
-      </p:nvGrpSpPr>
-      <p:grpSpPr/>
-      <p:sp>
-        <p:nvSpPr>
-          <p:cNvPr id="2" name="Rectangle 1"/>
-          <p:cNvSpPr/>
-          <p:nvPr/>
-        </p:nvSpPr>
-        <p:spPr>
-          <a:xfrm>
-            <a:off x="0" y="0"/>
-            <a:ext cx="12191695" cy="960120"/>
-          </a:xfrm>
-          <a:prstGeom prst="rect">
-            <a:avLst/>
-          </a:prstGeom>
-          <a:solidFill>
-            <a:srgbClr val="095292"/>
-          </a:solidFill>
-          <a:ln>
-            <a:noFill/>
-          </a:ln>
-        </p:spPr>
-        <p:style>
-          <a:lnRef idx="1">
-            <a:schemeClr val="accent1"/>
-          </a:lnRef>
-          <a:fillRef idx="3">
-            <a:schemeClr val="accent1"/>
-          </a:fillRef>
-          <a:effectRef idx="2">
-            <a:schemeClr val="accent1"/>
-          </a:effectRef>
-          <a:fontRef idx="minor">
-            <a:schemeClr val="lt1"/>
-          </a:fontRef>
-        </p:style>
-        <p:txBody>
-          <a:bodyPr rtlCol="0" anchor="ctr"/>
-          <a:lstStyle/>
-          <a:p>
-            <a:pPr algn="ctr"/>
-          </a:p>
-        </p:txBody>
-      </p:sp>
-      <p:sp>
-        <p:nvSpPr>
-          <p:cNvPr id="3" name="Rectangle 2"/>
-          <p:cNvSpPr/>
-          <p:nvPr/>
-        </p:nvSpPr>
-        <p:spPr>
-          <a:xfrm>
-            <a:off x="0" y="960120"/>
-            <a:ext cx="12191695" cy="41148"/>
-          </a:xfrm>
-          <a:prstGeom prst="rect">
-            <a:avLst/>
-          </a:prstGeom>
-          <a:solidFill>
-            <a:srgbClr val="FFD000"/>
-          </a:solidFill>
-          <a:ln>
-            <a:noFill/>
-          </a:ln>
-        </p:spPr>
-        <p:style>
-          <a:lnRef idx="1">
-            <a:schemeClr val="accent1"/>
-          </a:lnRef>
-          <a:fillRef idx="3">
-            <a:schemeClr val="accent1"/>
-          </a:fillRef>
-          <a:effectRef idx="2">
-            <a:schemeClr val="accent1"/>
-          </a:effectRef>
-          <a:fontRef idx="minor">
-            <a:schemeClr val="lt1"/>
-          </a:fontRef>
-        </p:style>
-        <p:txBody>
-          <a:bodyPr rtlCol="0" anchor="ctr"/>
-          <a:lstStyle/>
-          <a:p>
-            <a:pPr algn="ctr"/>
-          </a:p>
-        </p:txBody>
-      </p:sp>
-      <p:sp>
-        <p:nvSpPr>
-          <p:cNvPr id="4" name="TextBox 3"/>
+            <a:pPr algn="ctr">
+              <a:spcAft>
+                <a:spcPts val="600"/>
+              </a:spcAft>
+            </a:pPr>
+            <a:r>
+              <a:rPr sz="1600" b="0" i="0">
+                <a:solidFill>
+                  <a:srgbClr val="333333"/>
+                </a:solidFill>
+                <a:latin typeface="Calibri"/>
+              </a:rPr>
+              <a:t>El requisito contado por quien lo necesita y con criterios que se pueden cobrar</a:t>
+            </a:r>
+          </a:p>
+          <a:p>
+            <a:pPr algn="ctr">
+              <a:spcAft>
+                <a:spcPts val="600"/>
+              </a:spcAft>
+            </a:pPr>
+            <a:r>
+              <a:rPr sz="1600" b="0" i="0">
+                <a:solidFill>
+                  <a:srgbClr val="333333"/>
+                </a:solidFill>
+                <a:latin typeface="Calibri"/>
+              </a:rPr>
+              <a:t>Repasen las laminas de teoria: cada concepto esta completo</a:t>
+            </a:r>
+          </a:p>
+          <a:p>
+            <a:pPr algn="ctr">
+              <a:spcAft>
+                <a:spcPts val="600"/>
+              </a:spcAft>
+            </a:pPr>
+            <a:r>
+              <a:rPr sz="1600" b="0" i="0">
+                <a:solidFill>
+                  <a:srgbClr val="333333"/>
+                </a:solidFill>
+                <a:latin typeface="Calibri"/>
+              </a:rPr>
+              <a:t>Siguiente clase: continuamos con el siguiente tema</a:t>
+            </a:r>
+          </a:p>
+        </p:txBody>
+      </p:sp>
+      <p:sp>
+        <p:nvSpPr>
+          <p:cNvPr id="6" name="TextBox 5"/>
           <p:cNvSpPr txBox="1"/>
           <p:nvPr/>
         </p:nvSpPr>
         <p:spPr>
           <a:xfrm>
-            <a:off x="457200" y="164592"/>
-            <a:ext cx="11277295" cy="502920"/>
+            <a:off x="457200" y="4754880"/>
+            <a:ext cx="11277295" cy="640080"/>
           </a:xfrm>
           <a:prstGeom prst="rect">
             <a:avLst/>
@@ -7393,138 +7280,15 @@
           </a:bodyPr>
           <a:lstStyle/>
           <a:p>
-            <a:r>
-              <a:rPr sz="2600" b="1" i="0">
-                <a:solidFill>
-                  <a:srgbClr val="FFFFFF"/>
-                </a:solidFill>
-                <a:latin typeface="Calibri"/>
-              </a:rPr>
-              <a:t>Taller PI — por que importa</a:t>
-            </a:r>
-          </a:p>
-        </p:txBody>
-      </p:sp>
-      <p:sp>
-        <p:nvSpPr>
-          <p:cNvPr id="5" name="TextBox 4"/>
-          <p:cNvSpPr txBox="1"/>
-          <p:nvPr/>
-        </p:nvSpPr>
-        <p:spPr>
-          <a:xfrm>
-            <a:off x="457200" y="1170432"/>
-            <a:ext cx="11277295" cy="5230368"/>
-          </a:xfrm>
-          <a:prstGeom prst="rect">
-            <a:avLst/>
-          </a:prstGeom>
-          <a:noFill/>
-        </p:spPr>
-        <p:txBody>
-          <a:bodyPr wrap="square">
-            <a:spAutoFit/>
-          </a:bodyPr>
-          <a:lstStyle/>
-          <a:p>
-            <a:pPr>
-              <a:spcAft>
-                <a:spcPts val="800"/>
-              </a:spcAft>
-            </a:pPr>
-            <a:r>
-              <a:rPr sz="2000" b="0" i="0">
-                <a:solidFill>
-                  <a:srgbClr val="333333"/>
-                </a:solidFill>
-                <a:latin typeface="Calibri"/>
-              </a:rPr>
-              <a:t>–   </a:t>
-            </a:r>
+            <a:pPr algn="ctr"/>
             <a:r>
               <a:rPr sz="2000" b="1" i="0">
                 <a:solidFill>
-                  <a:srgbClr val="333333"/>
-                </a:solidFill>
-                <a:latin typeface="Calibri"/>
-              </a:rPr>
-              <a:t>Por que importa al PI:</a:t>
-            </a:r>
-            <a:r>
-              <a:rPr sz="2000" b="0" i="0">
-                <a:solidFill>
-                  <a:srgbClr val="333333"/>
-                </a:solidFill>
-                <a:latin typeface="Calibri"/>
-              </a:rPr>
-              <a:t> el backlog es la version ejecutable del catalogo de requisitos; es la lista con la que se decide que se disena primero y, en Programacion II, que se codifica primero.</a:t>
-            </a:r>
-          </a:p>
-          <a:p>
-            <a:pPr>
-              <a:spcAft>
-                <a:spcPts val="800"/>
-              </a:spcAft>
-            </a:pPr>
-            <a:r>
-              <a:rPr sz="2000" b="0" i="0">
-                <a:solidFill>
-                  <a:srgbClr val="333333"/>
-                </a:solidFill>
-                <a:latin typeface="Calibri"/>
-              </a:rPr>
-              <a:t>–   Los criterios de aceptacion que escriba hoy se vuelven literalmente el guion de revision del prototipo navegable y de las pruebas del sistema.</a:t>
-            </a:r>
-          </a:p>
-          <a:p>
-            <a:pPr>
-              <a:spcAft>
-                <a:spcPts val="800"/>
-              </a:spcAft>
-            </a:pPr>
-            <a:r>
-              <a:rPr sz="2000" b="0" i="0">
-                <a:solidFill>
-                  <a:srgbClr val="333333"/>
-                </a:solidFill>
-                <a:latin typeface="Calibri"/>
-              </a:rPr>
-              <a:t>–   Una historia sin beneficio claro es una funcionalidad que nadie va a extranar si no se hace: aqui es donde se justifica cada pantalla de VetCare.</a:t>
-            </a:r>
-          </a:p>
-        </p:txBody>
-      </p:sp>
-      <p:sp>
-        <p:nvSpPr>
-          <p:cNvPr id="6" name="TextBox 5"/>
-          <p:cNvSpPr txBox="1"/>
-          <p:nvPr/>
-        </p:nvSpPr>
-        <p:spPr>
-          <a:xfrm>
-            <a:off x="11185855" y="6473952"/>
-            <a:ext cx="640080" cy="274320"/>
-          </a:xfrm>
-          <a:prstGeom prst="rect">
-            <a:avLst/>
-          </a:prstGeom>
-          <a:noFill/>
-        </p:spPr>
-        <p:txBody>
-          <a:bodyPr wrap="square">
-            <a:spAutoFit/>
-          </a:bodyPr>
-          <a:lstStyle/>
-          <a:p>
-            <a:pPr algn="r"/>
-            <a:r>
-              <a:rPr sz="1100" b="0" i="0">
-                <a:solidFill>
-                  <a:srgbClr val="666666"/>
-                </a:solidFill>
-                <a:latin typeface="Calibri"/>
-              </a:rPr>
-              <a:t>19</a:t>
+                  <a:srgbClr val="269CCB"/>
+                </a:solidFill>
+                <a:latin typeface="Calibri"/>
+              </a:rPr>
+              <a:t>Teoria al servicio del diseño</a:t>
             </a:r>
           </a:p>
         </p:txBody>
@@ -7670,7 +7434,7 @@
                 </a:solidFill>
                 <a:latin typeface="Calibri"/>
               </a:rPr>
-              <a:t>Encuadre de hoy · Objetivo del PI</a:t>
+              <a:t>Encuadre de hoy</a:t>
             </a:r>
           </a:p>
         </p:txBody>
@@ -7718,7 +7482,7 @@
                 </a:solidFill>
                 <a:latin typeface="Calibri"/>
               </a:rPr>
-              <a:t>Hoy avanzamos VetCare en:</a:t>
+              <a:t>Tema:</a:t>
             </a:r>
             <a:r>
               <a:rPr sz="2000" b="0" i="0">
@@ -7727,7 +7491,7 @@
                 </a:solidFill>
                 <a:latin typeface="Calibri"/>
               </a:rPr>
-              <a:t> Queda listo el backlog inicial de VetCare: dos epicas descompuestas en ocho historias priorizadas, con criterios de aceptacion y talla en puntos.</a:t>
+              <a:t> Historias de usuario</a:t>
             </a:r>
           </a:p>
           <a:p>
@@ -7743,34 +7507,7 @@
                 </a:solidFill>
                 <a:latin typeface="Calibri"/>
               </a:rPr>
-              <a:t>–   Herramienta: </a:t>
-            </a:r>
-            <a:r>
-              <a:rPr sz="2000" b="1" i="0">
-                <a:solidFill>
-                  <a:srgbClr val="333333"/>
-                </a:solidFill>
-                <a:latin typeface="Calibri"/>
-              </a:rPr>
-              <a:t>Google Docs · Excalidraw</a:t>
-            </a:r>
-            <a:r>
-              <a:rPr sz="2000" b="0" i="0">
-                <a:solidFill>
-                  <a:srgbClr val="333333"/>
-                </a:solidFill>
-                <a:latin typeface="Calibri"/>
-              </a:rPr>
-              <a:t> · Bloque </a:t>
-            </a:r>
-            <a:r>
-              <a:rPr sz="2000" b="1" i="0">
-                <a:solidFill>
-                  <a:srgbClr val="333333"/>
-                </a:solidFill>
-                <a:latin typeface="Calibri"/>
-              </a:rPr>
-              <a:t>120 min</a:t>
+              <a:t>–   El requisito contado por quien lo necesita y con criterios que se pueden cobrar</a:t>
             </a:r>
           </a:p>
           <a:p>
@@ -7786,7 +7523,7 @@
                 </a:solidFill>
                 <a:latin typeface="Calibri"/>
               </a:rPr>
-              <a:t>–   </a:t>
+              <a:t>–   Herramienta del tema: </a:t>
             </a:r>
             <a:r>
               <a:rPr sz="2000" b="1" i="0">
@@ -7795,7 +7532,7 @@
                 </a:solidFill>
                 <a:latin typeface="Calibri"/>
               </a:rPr>
-              <a:t>Entregable de hoy:</a:t>
+              <a:t>Google Docs · Excalidraw</a:t>
             </a:r>
             <a:r>
               <a:rPr sz="2000" b="0" i="0">
@@ -7804,7 +7541,16 @@
                 </a:solidFill>
                 <a:latin typeface="Calibri"/>
               </a:rPr>
-              <a:t> Tablero de backlog con 8 historias en formato Como/quiero/para, cada una con 2 o 3 criterios de aceptacion en Dado-Cuando-Entonces, estimacion en puntos y trazabilidad al RF de la clase 6, subido a la plataforma del curso.</a:t>
+              <a:t> · Bloque </a:t>
+            </a:r>
+            <a:r>
+              <a:rPr sz="2000" b="1" i="0">
+                <a:solidFill>
+                  <a:srgbClr val="333333"/>
+                </a:solidFill>
+                <a:latin typeface="Calibri"/>
+              </a:rPr>
+              <a:t>120 min</a:t>
             </a:r>
           </a:p>
           <a:p>
@@ -7820,7 +7566,7 @@
                 </a:solidFill>
                 <a:latin typeface="Calibri"/>
               </a:rPr>
-              <a:t>–   La teoria esta al servicio del producto: al salir, VetCare avanzo.</a:t>
+              <a:t>–   Ejemplo de toda la clase: VetCare, el sistema de la clinica «Huellitas».</a:t>
             </a:r>
           </a:p>
         </p:txBody>
@@ -7856,3125 +7602,6 @@
                 <a:latin typeface="Calibri"/>
               </a:rPr>
               <a:t>2</a:t>
-            </a:r>
-          </a:p>
-        </p:txBody>
-      </p:sp>
-    </p:spTree>
-  </p:cSld>
-  <p:clrMapOvr>
-    <a:masterClrMapping/>
-  </p:clrMapOvr>
-</p:sld>
-</file>
-
-<file path=ppt/slides/slide20.xml><?xml version="1.0" encoding="utf-8"?>
-<p:sld xmlns:a="http://schemas.openxmlformats.org/drawingml/2006/main" xmlns:p="http://schemas.openxmlformats.org/presentationml/2006/main" xmlns:r="http://schemas.openxmlformats.org/officeDocument/2006/relationships">
-  <p:cSld>
-    <p:bg>
-      <p:bgPr>
-        <a:solidFill>
-          <a:srgbClr val="FFFFFF"/>
-        </a:solidFill>
-        <a:effectLst/>
-      </p:bgPr>
-    </p:bg>
-    <p:spTree>
-      <p:nvGrpSpPr>
-        <p:cNvPr id="1" name=""/>
-        <p:cNvGrpSpPr/>
-        <p:nvPr/>
-      </p:nvGrpSpPr>
-      <p:grpSpPr/>
-      <p:sp>
-        <p:nvSpPr>
-          <p:cNvPr id="2" name="Rectangle 1"/>
-          <p:cNvSpPr/>
-          <p:nvPr/>
-        </p:nvSpPr>
-        <p:spPr>
-          <a:xfrm>
-            <a:off x="0" y="0"/>
-            <a:ext cx="12191695" cy="960120"/>
-          </a:xfrm>
-          <a:prstGeom prst="rect">
-            <a:avLst/>
-          </a:prstGeom>
-          <a:solidFill>
-            <a:srgbClr val="095292"/>
-          </a:solidFill>
-          <a:ln>
-            <a:noFill/>
-          </a:ln>
-        </p:spPr>
-        <p:style>
-          <a:lnRef idx="1">
-            <a:schemeClr val="accent1"/>
-          </a:lnRef>
-          <a:fillRef idx="3">
-            <a:schemeClr val="accent1"/>
-          </a:fillRef>
-          <a:effectRef idx="2">
-            <a:schemeClr val="accent1"/>
-          </a:effectRef>
-          <a:fontRef idx="minor">
-            <a:schemeClr val="lt1"/>
-          </a:fontRef>
-        </p:style>
-        <p:txBody>
-          <a:bodyPr rtlCol="0" anchor="ctr"/>
-          <a:lstStyle/>
-          <a:p>
-            <a:pPr algn="ctr"/>
-          </a:p>
-        </p:txBody>
-      </p:sp>
-      <p:sp>
-        <p:nvSpPr>
-          <p:cNvPr id="3" name="Rectangle 2"/>
-          <p:cNvSpPr/>
-          <p:nvPr/>
-        </p:nvSpPr>
-        <p:spPr>
-          <a:xfrm>
-            <a:off x="0" y="960120"/>
-            <a:ext cx="12191695" cy="41148"/>
-          </a:xfrm>
-          <a:prstGeom prst="rect">
-            <a:avLst/>
-          </a:prstGeom>
-          <a:solidFill>
-            <a:srgbClr val="FFD000"/>
-          </a:solidFill>
-          <a:ln>
-            <a:noFill/>
-          </a:ln>
-        </p:spPr>
-        <p:style>
-          <a:lnRef idx="1">
-            <a:schemeClr val="accent1"/>
-          </a:lnRef>
-          <a:fillRef idx="3">
-            <a:schemeClr val="accent1"/>
-          </a:fillRef>
-          <a:effectRef idx="2">
-            <a:schemeClr val="accent1"/>
-          </a:effectRef>
-          <a:fontRef idx="minor">
-            <a:schemeClr val="lt1"/>
-          </a:fontRef>
-        </p:style>
-        <p:txBody>
-          <a:bodyPr rtlCol="0" anchor="ctr"/>
-          <a:lstStyle/>
-          <a:p>
-            <a:pPr algn="ctr"/>
-          </a:p>
-        </p:txBody>
-      </p:sp>
-      <p:sp>
-        <p:nvSpPr>
-          <p:cNvPr id="4" name="TextBox 3"/>
-          <p:cNvSpPr txBox="1"/>
-          <p:nvPr/>
-        </p:nvSpPr>
-        <p:spPr>
-          <a:xfrm>
-            <a:off x="457200" y="164592"/>
-            <a:ext cx="11277295" cy="502920"/>
-          </a:xfrm>
-          <a:prstGeom prst="rect">
-            <a:avLst/>
-          </a:prstGeom>
-          <a:noFill/>
-        </p:spPr>
-        <p:txBody>
-          <a:bodyPr wrap="square">
-            <a:spAutoFit/>
-          </a:bodyPr>
-          <a:lstStyle/>
-          <a:p>
-            <a:r>
-              <a:rPr sz="2600" b="1" i="0">
-                <a:solidFill>
-                  <a:srgbClr val="FFFFFF"/>
-                </a:solidFill>
-                <a:latin typeface="Calibri"/>
-              </a:rPr>
-              <a:t>Taller PI — punto de partida</a:t>
-            </a:r>
-          </a:p>
-        </p:txBody>
-      </p:sp>
-      <p:sp>
-        <p:nvSpPr>
-          <p:cNvPr id="5" name="TextBox 4"/>
-          <p:cNvSpPr txBox="1"/>
-          <p:nvPr/>
-        </p:nvSpPr>
-        <p:spPr>
-          <a:xfrm>
-            <a:off x="457200" y="1170432"/>
-            <a:ext cx="11277295" cy="5230368"/>
-          </a:xfrm>
-          <a:prstGeom prst="rect">
-            <a:avLst/>
-          </a:prstGeom>
-          <a:noFill/>
-        </p:spPr>
-        <p:txBody>
-          <a:bodyPr wrap="square">
-            <a:spAutoFit/>
-          </a:bodyPr>
-          <a:lstStyle/>
-          <a:p>
-            <a:pPr>
-              <a:spcAft>
-                <a:spcPts val="800"/>
-              </a:spcAft>
-            </a:pPr>
-            <a:r>
-              <a:rPr sz="2000" b="0" i="0">
-                <a:solidFill>
-                  <a:srgbClr val="333333"/>
-                </a:solidFill>
-                <a:latin typeface="Calibri"/>
-              </a:rPr>
-              <a:t>–   Ya existe el catalogo de requisitos de VetCare con RF, RNF, prioridades MoSCoW y matriz de trazabilidad aprobados en la clase anterior.</a:t>
-            </a:r>
-          </a:p>
-          <a:p>
-            <a:pPr>
-              <a:spcAft>
-                <a:spcPts val="800"/>
-              </a:spcAft>
-            </a:pPr>
-            <a:r>
-              <a:rPr sz="2000" b="0" i="0">
-                <a:solidFill>
-                  <a:srgbClr val="333333"/>
-                </a:solidFill>
-                <a:latin typeface="Calibri"/>
-              </a:rPr>
-              <a:t>–   Ese catalogo esta escrito en lenguaje formal de analista y todavia no permite decidir por donde arrancar ni cuanto pesa cada pieza.</a:t>
-            </a:r>
-          </a:p>
-          <a:p>
-            <a:pPr>
-              <a:spcAft>
-                <a:spcPts val="800"/>
-              </a:spcAft>
-            </a:pPr>
-            <a:r>
-              <a:rPr sz="2000" b="0" i="0">
-                <a:solidFill>
-                  <a:srgbClr val="333333"/>
-                </a:solidFill>
-                <a:latin typeface="Calibri"/>
-              </a:rPr>
-              <a:t>–   El equipo del Proyecto Integrador necesita una lista ordenada de trabajo para poder repartirse las siguientes semanas entre diseno y construccion.</a:t>
-            </a:r>
-          </a:p>
-        </p:txBody>
-      </p:sp>
-      <p:sp>
-        <p:nvSpPr>
-          <p:cNvPr id="6" name="TextBox 5"/>
-          <p:cNvSpPr txBox="1"/>
-          <p:nvPr/>
-        </p:nvSpPr>
-        <p:spPr>
-          <a:xfrm>
-            <a:off x="11185855" y="6473952"/>
-            <a:ext cx="640080" cy="274320"/>
-          </a:xfrm>
-          <a:prstGeom prst="rect">
-            <a:avLst/>
-          </a:prstGeom>
-          <a:noFill/>
-        </p:spPr>
-        <p:txBody>
-          <a:bodyPr wrap="square">
-            <a:spAutoFit/>
-          </a:bodyPr>
-          <a:lstStyle/>
-          <a:p>
-            <a:pPr algn="r"/>
-            <a:r>
-              <a:rPr sz="1100" b="0" i="0">
-                <a:solidFill>
-                  <a:srgbClr val="666666"/>
-                </a:solidFill>
-                <a:latin typeface="Calibri"/>
-              </a:rPr>
-              <a:t>20</a:t>
-            </a:r>
-          </a:p>
-        </p:txBody>
-      </p:sp>
-    </p:spTree>
-  </p:cSld>
-  <p:clrMapOvr>
-    <a:masterClrMapping/>
-  </p:clrMapOvr>
-</p:sld>
-</file>
-
-<file path=ppt/slides/slide21.xml><?xml version="1.0" encoding="utf-8"?>
-<p:sld xmlns:a="http://schemas.openxmlformats.org/drawingml/2006/main" xmlns:p="http://schemas.openxmlformats.org/presentationml/2006/main" xmlns:r="http://schemas.openxmlformats.org/officeDocument/2006/relationships">
-  <p:cSld>
-    <p:bg>
-      <p:bgPr>
-        <a:solidFill>
-          <a:srgbClr val="FFFFFF"/>
-        </a:solidFill>
-        <a:effectLst/>
-      </p:bgPr>
-    </p:bg>
-    <p:spTree>
-      <p:nvGrpSpPr>
-        <p:cNvPr id="1" name=""/>
-        <p:cNvGrpSpPr/>
-        <p:nvPr/>
-      </p:nvGrpSpPr>
-      <p:grpSpPr/>
-      <p:sp>
-        <p:nvSpPr>
-          <p:cNvPr id="2" name="Rectangle 1"/>
-          <p:cNvSpPr/>
-          <p:nvPr/>
-        </p:nvSpPr>
-        <p:spPr>
-          <a:xfrm>
-            <a:off x="0" y="0"/>
-            <a:ext cx="12191695" cy="960120"/>
-          </a:xfrm>
-          <a:prstGeom prst="rect">
-            <a:avLst/>
-          </a:prstGeom>
-          <a:solidFill>
-            <a:srgbClr val="095292"/>
-          </a:solidFill>
-          <a:ln>
-            <a:noFill/>
-          </a:ln>
-        </p:spPr>
-        <p:style>
-          <a:lnRef idx="1">
-            <a:schemeClr val="accent1"/>
-          </a:lnRef>
-          <a:fillRef idx="3">
-            <a:schemeClr val="accent1"/>
-          </a:fillRef>
-          <a:effectRef idx="2">
-            <a:schemeClr val="accent1"/>
-          </a:effectRef>
-          <a:fontRef idx="minor">
-            <a:schemeClr val="lt1"/>
-          </a:fontRef>
-        </p:style>
-        <p:txBody>
-          <a:bodyPr rtlCol="0" anchor="ctr"/>
-          <a:lstStyle/>
-          <a:p>
-            <a:pPr algn="ctr"/>
-          </a:p>
-        </p:txBody>
-      </p:sp>
-      <p:sp>
-        <p:nvSpPr>
-          <p:cNvPr id="3" name="Rectangle 2"/>
-          <p:cNvSpPr/>
-          <p:nvPr/>
-        </p:nvSpPr>
-        <p:spPr>
-          <a:xfrm>
-            <a:off x="0" y="960120"/>
-            <a:ext cx="12191695" cy="41148"/>
-          </a:xfrm>
-          <a:prstGeom prst="rect">
-            <a:avLst/>
-          </a:prstGeom>
-          <a:solidFill>
-            <a:srgbClr val="FFD000"/>
-          </a:solidFill>
-          <a:ln>
-            <a:noFill/>
-          </a:ln>
-        </p:spPr>
-        <p:style>
-          <a:lnRef idx="1">
-            <a:schemeClr val="accent1"/>
-          </a:lnRef>
-          <a:fillRef idx="3">
-            <a:schemeClr val="accent1"/>
-          </a:fillRef>
-          <a:effectRef idx="2">
-            <a:schemeClr val="accent1"/>
-          </a:effectRef>
-          <a:fontRef idx="minor">
-            <a:schemeClr val="lt1"/>
-          </a:fontRef>
-        </p:style>
-        <p:txBody>
-          <a:bodyPr rtlCol="0" anchor="ctr"/>
-          <a:lstStyle/>
-          <a:p>
-            <a:pPr algn="ctr"/>
-          </a:p>
-        </p:txBody>
-      </p:sp>
-      <p:sp>
-        <p:nvSpPr>
-          <p:cNvPr id="4" name="TextBox 3"/>
-          <p:cNvSpPr txBox="1"/>
-          <p:nvPr/>
-        </p:nvSpPr>
-        <p:spPr>
-          <a:xfrm>
-            <a:off x="457200" y="164592"/>
-            <a:ext cx="11277295" cy="502920"/>
-          </a:xfrm>
-          <a:prstGeom prst="rect">
-            <a:avLst/>
-          </a:prstGeom>
-          <a:noFill/>
-        </p:spPr>
-        <p:txBody>
-          <a:bodyPr wrap="square">
-            <a:spAutoFit/>
-          </a:bodyPr>
-          <a:lstStyle/>
-          <a:p>
-            <a:r>
-              <a:rPr sz="2600" b="1" i="0">
-                <a:solidFill>
-                  <a:srgbClr val="FFFFFF"/>
-                </a:solidFill>
-                <a:latin typeface="Calibri"/>
-              </a:rPr>
-              <a:t>Taller PI — pasos guiados</a:t>
-            </a:r>
-          </a:p>
-        </p:txBody>
-      </p:sp>
-      <p:sp>
-        <p:nvSpPr>
-          <p:cNvPr id="5" name="Rounded Rectangle 4"/>
-          <p:cNvSpPr/>
-          <p:nvPr/>
-        </p:nvSpPr>
-        <p:spPr>
-          <a:xfrm>
-            <a:off x="457200" y="1234440"/>
-            <a:ext cx="11277295" cy="950976"/>
-          </a:xfrm>
-          <a:prstGeom prst="roundRect">
-            <a:avLst>
-              <a:gd name="adj" fmla="val 12000"/>
-            </a:avLst>
-          </a:prstGeom>
-          <a:solidFill>
-            <a:srgbClr val="F2F2F2"/>
-          </a:solidFill>
-          <a:ln>
-            <a:noFill/>
-          </a:ln>
-        </p:spPr>
-        <p:style>
-          <a:lnRef idx="1">
-            <a:schemeClr val="accent1"/>
-          </a:lnRef>
-          <a:fillRef idx="3">
-            <a:schemeClr val="accent1"/>
-          </a:fillRef>
-          <a:effectRef idx="2">
-            <a:schemeClr val="accent1"/>
-          </a:effectRef>
-          <a:fontRef idx="minor">
-            <a:schemeClr val="lt1"/>
-          </a:fontRef>
-        </p:style>
-        <p:txBody>
-          <a:bodyPr rtlCol="0" anchor="ctr"/>
-          <a:lstStyle/>
-          <a:p>
-            <a:pPr algn="ctr"/>
-          </a:p>
-        </p:txBody>
-      </p:sp>
-      <p:sp>
-        <p:nvSpPr>
-          <p:cNvPr id="6" name="Rounded Rectangle 5"/>
-          <p:cNvSpPr/>
-          <p:nvPr/>
-        </p:nvSpPr>
-        <p:spPr>
-          <a:xfrm>
-            <a:off x="594360" y="1490472"/>
-            <a:ext cx="438912" cy="438912"/>
-          </a:xfrm>
-          <a:prstGeom prst="roundRect">
-            <a:avLst>
-              <a:gd name="adj" fmla="val 12000"/>
-            </a:avLst>
-          </a:prstGeom>
-          <a:solidFill>
-            <a:srgbClr val="095292"/>
-          </a:solidFill>
-          <a:ln>
-            <a:noFill/>
-          </a:ln>
-        </p:spPr>
-        <p:style>
-          <a:lnRef idx="1">
-            <a:schemeClr val="accent1"/>
-          </a:lnRef>
-          <a:fillRef idx="3">
-            <a:schemeClr val="accent1"/>
-          </a:fillRef>
-          <a:effectRef idx="2">
-            <a:schemeClr val="accent1"/>
-          </a:effectRef>
-          <a:fontRef idx="minor">
-            <a:schemeClr val="lt1"/>
-          </a:fontRef>
-        </p:style>
-        <p:txBody>
-          <a:bodyPr rtlCol="0" anchor="ctr"/>
-          <a:lstStyle/>
-          <a:p>
-            <a:pPr algn="ctr"/>
-          </a:p>
-        </p:txBody>
-      </p:sp>
-      <p:sp>
-        <p:nvSpPr>
-          <p:cNvPr id="7" name="TextBox 6"/>
-          <p:cNvSpPr txBox="1"/>
-          <p:nvPr/>
-        </p:nvSpPr>
-        <p:spPr>
-          <a:xfrm>
-            <a:off x="594360" y="1490472"/>
-            <a:ext cx="438912" cy="438912"/>
-          </a:xfrm>
-          <a:prstGeom prst="rect">
-            <a:avLst/>
-          </a:prstGeom>
-          <a:noFill/>
-        </p:spPr>
-        <p:txBody>
-          <a:bodyPr wrap="square" anchor="ctr"/>
-          <a:lstStyle/>
-          <a:p>
-            <a:pPr algn="ctr"/>
-            <a:r>
-              <a:rPr sz="1600" b="1" i="0">
-                <a:solidFill>
-                  <a:srgbClr val="FFFFFF"/>
-                </a:solidFill>
-                <a:latin typeface="Calibri"/>
-              </a:rPr>
-              <a:t>1</a:t>
-            </a:r>
-          </a:p>
-        </p:txBody>
-      </p:sp>
-      <p:sp>
-        <p:nvSpPr>
-          <p:cNvPr id="8" name="TextBox 7"/>
-          <p:cNvSpPr txBox="1"/>
-          <p:nvPr/>
-        </p:nvSpPr>
-        <p:spPr>
-          <a:xfrm>
-            <a:off x="1188720" y="1325880"/>
-            <a:ext cx="10271455" cy="786384"/>
-          </a:xfrm>
-          <a:prstGeom prst="rect">
-            <a:avLst/>
-          </a:prstGeom>
-          <a:noFill/>
-        </p:spPr>
-        <p:txBody>
-          <a:bodyPr wrap="square" anchor="ctr"/>
-          <a:lstStyle/>
-          <a:p>
-            <a:r>
-              <a:rPr sz="1500" b="1" i="0">
-                <a:solidFill>
-                  <a:srgbClr val="095292"/>
-                </a:solidFill>
-                <a:latin typeface="Calibri"/>
-              </a:rPr>
-              <a:t>Paso 1: agrupe los RF del catalogo de la clase 6 en dos epicas de VetCare (por ejemplo Gestion de pacientes e Historial y agenda) y escriba el nombre y el objetivo de cada epica en una linea.</a:t>
-            </a:r>
-          </a:p>
-        </p:txBody>
-      </p:sp>
-      <p:sp>
-        <p:nvSpPr>
-          <p:cNvPr id="9" name="Rounded Rectangle 8"/>
-          <p:cNvSpPr/>
-          <p:nvPr/>
-        </p:nvSpPr>
-        <p:spPr>
-          <a:xfrm>
-            <a:off x="457200" y="2276856"/>
-            <a:ext cx="11277295" cy="950976"/>
-          </a:xfrm>
-          <a:prstGeom prst="roundRect">
-            <a:avLst>
-              <a:gd name="adj" fmla="val 12000"/>
-            </a:avLst>
-          </a:prstGeom>
-          <a:solidFill>
-            <a:srgbClr val="E8F4FA"/>
-          </a:solidFill>
-          <a:ln>
-            <a:noFill/>
-          </a:ln>
-        </p:spPr>
-        <p:style>
-          <a:lnRef idx="1">
-            <a:schemeClr val="accent1"/>
-          </a:lnRef>
-          <a:fillRef idx="3">
-            <a:schemeClr val="accent1"/>
-          </a:fillRef>
-          <a:effectRef idx="2">
-            <a:schemeClr val="accent1"/>
-          </a:effectRef>
-          <a:fontRef idx="minor">
-            <a:schemeClr val="lt1"/>
-          </a:fontRef>
-        </p:style>
-        <p:txBody>
-          <a:bodyPr rtlCol="0" anchor="ctr"/>
-          <a:lstStyle/>
-          <a:p>
-            <a:pPr algn="ctr"/>
-          </a:p>
-        </p:txBody>
-      </p:sp>
-      <p:sp>
-        <p:nvSpPr>
-          <p:cNvPr id="10" name="Rounded Rectangle 9"/>
-          <p:cNvSpPr/>
-          <p:nvPr/>
-        </p:nvSpPr>
-        <p:spPr>
-          <a:xfrm>
-            <a:off x="594360" y="2532888"/>
-            <a:ext cx="438912" cy="438912"/>
-          </a:xfrm>
-          <a:prstGeom prst="roundRect">
-            <a:avLst>
-              <a:gd name="adj" fmla="val 12000"/>
-            </a:avLst>
-          </a:prstGeom>
-          <a:solidFill>
-            <a:srgbClr val="095292"/>
-          </a:solidFill>
-          <a:ln>
-            <a:noFill/>
-          </a:ln>
-        </p:spPr>
-        <p:style>
-          <a:lnRef idx="1">
-            <a:schemeClr val="accent1"/>
-          </a:lnRef>
-          <a:fillRef idx="3">
-            <a:schemeClr val="accent1"/>
-          </a:fillRef>
-          <a:effectRef idx="2">
-            <a:schemeClr val="accent1"/>
-          </a:effectRef>
-          <a:fontRef idx="minor">
-            <a:schemeClr val="lt1"/>
-          </a:fontRef>
-        </p:style>
-        <p:txBody>
-          <a:bodyPr rtlCol="0" anchor="ctr"/>
-          <a:lstStyle/>
-          <a:p>
-            <a:pPr algn="ctr"/>
-          </a:p>
-        </p:txBody>
-      </p:sp>
-      <p:sp>
-        <p:nvSpPr>
-          <p:cNvPr id="11" name="TextBox 10"/>
-          <p:cNvSpPr txBox="1"/>
-          <p:nvPr/>
-        </p:nvSpPr>
-        <p:spPr>
-          <a:xfrm>
-            <a:off x="594360" y="2532888"/>
-            <a:ext cx="438912" cy="438912"/>
-          </a:xfrm>
-          <a:prstGeom prst="rect">
-            <a:avLst/>
-          </a:prstGeom>
-          <a:noFill/>
-        </p:spPr>
-        <p:txBody>
-          <a:bodyPr wrap="square" anchor="ctr"/>
-          <a:lstStyle/>
-          <a:p>
-            <a:pPr algn="ctr"/>
-            <a:r>
-              <a:rPr sz="1600" b="1" i="0">
-                <a:solidFill>
-                  <a:srgbClr val="FFFFFF"/>
-                </a:solidFill>
-                <a:latin typeface="Calibri"/>
-              </a:rPr>
-              <a:t>2</a:t>
-            </a:r>
-          </a:p>
-        </p:txBody>
-      </p:sp>
-      <p:sp>
-        <p:nvSpPr>
-          <p:cNvPr id="12" name="TextBox 11"/>
-          <p:cNvSpPr txBox="1"/>
-          <p:nvPr/>
-        </p:nvSpPr>
-        <p:spPr>
-          <a:xfrm>
-            <a:off x="1188720" y="2368296"/>
-            <a:ext cx="10271455" cy="786384"/>
-          </a:xfrm>
-          <a:prstGeom prst="rect">
-            <a:avLst/>
-          </a:prstGeom>
-          <a:noFill/>
-        </p:spPr>
-        <p:txBody>
-          <a:bodyPr wrap="square" anchor="ctr"/>
-          <a:lstStyle/>
-          <a:p>
-            <a:r>
-              <a:rPr sz="1500" b="1" i="0">
-                <a:solidFill>
-                  <a:srgbClr val="095292"/>
-                </a:solidFill>
-                <a:latin typeface="Calibri"/>
-              </a:rPr>
-              <a:t>Paso 2: descomponga las dos epicas en 8 historias con el formato Como &lt;rol de la clinica Huellitas&gt; quiero &lt;accion&gt; para &lt;beneficio&gt;, usando roles concretos (auxiliar, veterinario, administrador) y nunca la palabra usuario.</a:t>
-            </a:r>
-          </a:p>
-        </p:txBody>
-      </p:sp>
-      <p:sp>
-        <p:nvSpPr>
-          <p:cNvPr id="13" name="Rounded Rectangle 12"/>
-          <p:cNvSpPr/>
-          <p:nvPr/>
-        </p:nvSpPr>
-        <p:spPr>
-          <a:xfrm>
-            <a:off x="457200" y="3319272"/>
-            <a:ext cx="11277295" cy="950976"/>
-          </a:xfrm>
-          <a:prstGeom prst="roundRect">
-            <a:avLst>
-              <a:gd name="adj" fmla="val 12000"/>
-            </a:avLst>
-          </a:prstGeom>
-          <a:solidFill>
-            <a:srgbClr val="F2F2F2"/>
-          </a:solidFill>
-          <a:ln>
-            <a:noFill/>
-          </a:ln>
-        </p:spPr>
-        <p:style>
-          <a:lnRef idx="1">
-            <a:schemeClr val="accent1"/>
-          </a:lnRef>
-          <a:fillRef idx="3">
-            <a:schemeClr val="accent1"/>
-          </a:fillRef>
-          <a:effectRef idx="2">
-            <a:schemeClr val="accent1"/>
-          </a:effectRef>
-          <a:fontRef idx="minor">
-            <a:schemeClr val="lt1"/>
-          </a:fontRef>
-        </p:style>
-        <p:txBody>
-          <a:bodyPr rtlCol="0" anchor="ctr"/>
-          <a:lstStyle/>
-          <a:p>
-            <a:pPr algn="ctr"/>
-          </a:p>
-        </p:txBody>
-      </p:sp>
-      <p:sp>
-        <p:nvSpPr>
-          <p:cNvPr id="14" name="Rounded Rectangle 13"/>
-          <p:cNvSpPr/>
-          <p:nvPr/>
-        </p:nvSpPr>
-        <p:spPr>
-          <a:xfrm>
-            <a:off x="594360" y="3575304"/>
-            <a:ext cx="438912" cy="438912"/>
-          </a:xfrm>
-          <a:prstGeom prst="roundRect">
-            <a:avLst>
-              <a:gd name="adj" fmla="val 12000"/>
-            </a:avLst>
-          </a:prstGeom>
-          <a:solidFill>
-            <a:srgbClr val="095292"/>
-          </a:solidFill>
-          <a:ln>
-            <a:noFill/>
-          </a:ln>
-        </p:spPr>
-        <p:style>
-          <a:lnRef idx="1">
-            <a:schemeClr val="accent1"/>
-          </a:lnRef>
-          <a:fillRef idx="3">
-            <a:schemeClr val="accent1"/>
-          </a:fillRef>
-          <a:effectRef idx="2">
-            <a:schemeClr val="accent1"/>
-          </a:effectRef>
-          <a:fontRef idx="minor">
-            <a:schemeClr val="lt1"/>
-          </a:fontRef>
-        </p:style>
-        <p:txBody>
-          <a:bodyPr rtlCol="0" anchor="ctr"/>
-          <a:lstStyle/>
-          <a:p>
-            <a:pPr algn="ctr"/>
-          </a:p>
-        </p:txBody>
-      </p:sp>
-      <p:sp>
-        <p:nvSpPr>
-          <p:cNvPr id="15" name="TextBox 14"/>
-          <p:cNvSpPr txBox="1"/>
-          <p:nvPr/>
-        </p:nvSpPr>
-        <p:spPr>
-          <a:xfrm>
-            <a:off x="594360" y="3575304"/>
-            <a:ext cx="438912" cy="438912"/>
-          </a:xfrm>
-          <a:prstGeom prst="rect">
-            <a:avLst/>
-          </a:prstGeom>
-          <a:noFill/>
-        </p:spPr>
-        <p:txBody>
-          <a:bodyPr wrap="square" anchor="ctr"/>
-          <a:lstStyle/>
-          <a:p>
-            <a:pPr algn="ctr"/>
-            <a:r>
-              <a:rPr sz="1600" b="1" i="0">
-                <a:solidFill>
-                  <a:srgbClr val="FFFFFF"/>
-                </a:solidFill>
-                <a:latin typeface="Calibri"/>
-              </a:rPr>
-              <a:t>3</a:t>
-            </a:r>
-          </a:p>
-        </p:txBody>
-      </p:sp>
-      <p:sp>
-        <p:nvSpPr>
-          <p:cNvPr id="16" name="TextBox 15"/>
-          <p:cNvSpPr txBox="1"/>
-          <p:nvPr/>
-        </p:nvSpPr>
-        <p:spPr>
-          <a:xfrm>
-            <a:off x="1188720" y="3410712"/>
-            <a:ext cx="10271455" cy="786384"/>
-          </a:xfrm>
-          <a:prstGeom prst="rect">
-            <a:avLst/>
-          </a:prstGeom>
-          <a:noFill/>
-        </p:spPr>
-        <p:txBody>
-          <a:bodyPr wrap="square" anchor="ctr"/>
-          <a:lstStyle/>
-          <a:p>
-            <a:r>
-              <a:rPr sz="1500" b="1" i="0">
-                <a:solidFill>
-                  <a:srgbClr val="095292"/>
-                </a:solidFill>
-                <a:latin typeface="Calibri"/>
-              </a:rPr>
-              <a:t>Paso 3: escriba 2 o 3 criterios de aceptacion por historia en Dado-Cuando-Entonces, e incluya obligatoriamente un criterio de camino alterno o de error en al menos cuatro de las ocho historias.</a:t>
-            </a:r>
-          </a:p>
-        </p:txBody>
-      </p:sp>
-      <p:sp>
-        <p:nvSpPr>
-          <p:cNvPr id="17" name="Rounded Rectangle 16"/>
-          <p:cNvSpPr/>
-          <p:nvPr/>
-        </p:nvSpPr>
-        <p:spPr>
-          <a:xfrm>
-            <a:off x="457200" y="4361688"/>
-            <a:ext cx="11277295" cy="950976"/>
-          </a:xfrm>
-          <a:prstGeom prst="roundRect">
-            <a:avLst>
-              <a:gd name="adj" fmla="val 12000"/>
-            </a:avLst>
-          </a:prstGeom>
-          <a:solidFill>
-            <a:srgbClr val="E8F4FA"/>
-          </a:solidFill>
-          <a:ln>
-            <a:noFill/>
-          </a:ln>
-        </p:spPr>
-        <p:style>
-          <a:lnRef idx="1">
-            <a:schemeClr val="accent1"/>
-          </a:lnRef>
-          <a:fillRef idx="3">
-            <a:schemeClr val="accent1"/>
-          </a:fillRef>
-          <a:effectRef idx="2">
-            <a:schemeClr val="accent1"/>
-          </a:effectRef>
-          <a:fontRef idx="minor">
-            <a:schemeClr val="lt1"/>
-          </a:fontRef>
-        </p:style>
-        <p:txBody>
-          <a:bodyPr rtlCol="0" anchor="ctr"/>
-          <a:lstStyle/>
-          <a:p>
-            <a:pPr algn="ctr"/>
-          </a:p>
-        </p:txBody>
-      </p:sp>
-      <p:sp>
-        <p:nvSpPr>
-          <p:cNvPr id="18" name="Rounded Rectangle 17"/>
-          <p:cNvSpPr/>
-          <p:nvPr/>
-        </p:nvSpPr>
-        <p:spPr>
-          <a:xfrm>
-            <a:off x="594360" y="4617720"/>
-            <a:ext cx="438912" cy="438912"/>
-          </a:xfrm>
-          <a:prstGeom prst="roundRect">
-            <a:avLst>
-              <a:gd name="adj" fmla="val 12000"/>
-            </a:avLst>
-          </a:prstGeom>
-          <a:solidFill>
-            <a:srgbClr val="095292"/>
-          </a:solidFill>
-          <a:ln>
-            <a:noFill/>
-          </a:ln>
-        </p:spPr>
-        <p:style>
-          <a:lnRef idx="1">
-            <a:schemeClr val="accent1"/>
-          </a:lnRef>
-          <a:fillRef idx="3">
-            <a:schemeClr val="accent1"/>
-          </a:fillRef>
-          <a:effectRef idx="2">
-            <a:schemeClr val="accent1"/>
-          </a:effectRef>
-          <a:fontRef idx="minor">
-            <a:schemeClr val="lt1"/>
-          </a:fontRef>
-        </p:style>
-        <p:txBody>
-          <a:bodyPr rtlCol="0" anchor="ctr"/>
-          <a:lstStyle/>
-          <a:p>
-            <a:pPr algn="ctr"/>
-          </a:p>
-        </p:txBody>
-      </p:sp>
-      <p:sp>
-        <p:nvSpPr>
-          <p:cNvPr id="19" name="TextBox 18"/>
-          <p:cNvSpPr txBox="1"/>
-          <p:nvPr/>
-        </p:nvSpPr>
-        <p:spPr>
-          <a:xfrm>
-            <a:off x="594360" y="4617720"/>
-            <a:ext cx="438912" cy="438912"/>
-          </a:xfrm>
-          <a:prstGeom prst="rect">
-            <a:avLst/>
-          </a:prstGeom>
-          <a:noFill/>
-        </p:spPr>
-        <p:txBody>
-          <a:bodyPr wrap="square" anchor="ctr"/>
-          <a:lstStyle/>
-          <a:p>
-            <a:pPr algn="ctr"/>
-            <a:r>
-              <a:rPr sz="1600" b="1" i="0">
-                <a:solidFill>
-                  <a:srgbClr val="FFFFFF"/>
-                </a:solidFill>
-                <a:latin typeface="Calibri"/>
-              </a:rPr>
-              <a:t>4</a:t>
-            </a:r>
-          </a:p>
-        </p:txBody>
-      </p:sp>
-      <p:sp>
-        <p:nvSpPr>
-          <p:cNvPr id="20" name="TextBox 19"/>
-          <p:cNvSpPr txBox="1"/>
-          <p:nvPr/>
-        </p:nvSpPr>
-        <p:spPr>
-          <a:xfrm>
-            <a:off x="1188720" y="4453128"/>
-            <a:ext cx="10271455" cy="786384"/>
-          </a:xfrm>
-          <a:prstGeom prst="rect">
-            <a:avLst/>
-          </a:prstGeom>
-          <a:noFill/>
-        </p:spPr>
-        <p:txBody>
-          <a:bodyPr wrap="square" anchor="ctr"/>
-          <a:lstStyle/>
-          <a:p>
-            <a:r>
-              <a:rPr sz="1500" b="1" i="0">
-                <a:solidFill>
-                  <a:srgbClr val="095292"/>
-                </a:solidFill>
-                <a:latin typeface="Calibri"/>
-              </a:rPr>
-              <a:t>Paso 4: revise cada historia contra INVEST marcando las seis letras con si o no; toda historia que falle dos o mas letras debe reescribirse o partirse antes de continuar.</a:t>
-            </a:r>
-          </a:p>
-        </p:txBody>
-      </p:sp>
-      <p:sp>
-        <p:nvSpPr>
-          <p:cNvPr id="21" name="Rounded Rectangle 20"/>
-          <p:cNvSpPr/>
-          <p:nvPr/>
-        </p:nvSpPr>
-        <p:spPr>
-          <a:xfrm>
-            <a:off x="457200" y="5404104"/>
-            <a:ext cx="11277295" cy="950976"/>
-          </a:xfrm>
-          <a:prstGeom prst="roundRect">
-            <a:avLst>
-              <a:gd name="adj" fmla="val 12000"/>
-            </a:avLst>
-          </a:prstGeom>
-          <a:solidFill>
-            <a:srgbClr val="F2F2F2"/>
-          </a:solidFill>
-          <a:ln>
-            <a:noFill/>
-          </a:ln>
-        </p:spPr>
-        <p:style>
-          <a:lnRef idx="1">
-            <a:schemeClr val="accent1"/>
-          </a:lnRef>
-          <a:fillRef idx="3">
-            <a:schemeClr val="accent1"/>
-          </a:fillRef>
-          <a:effectRef idx="2">
-            <a:schemeClr val="accent1"/>
-          </a:effectRef>
-          <a:fontRef idx="minor">
-            <a:schemeClr val="lt1"/>
-          </a:fontRef>
-        </p:style>
-        <p:txBody>
-          <a:bodyPr rtlCol="0" anchor="ctr"/>
-          <a:lstStyle/>
-          <a:p>
-            <a:pPr algn="ctr"/>
-          </a:p>
-        </p:txBody>
-      </p:sp>
-      <p:sp>
-        <p:nvSpPr>
-          <p:cNvPr id="22" name="Rounded Rectangle 21"/>
-          <p:cNvSpPr/>
-          <p:nvPr/>
-        </p:nvSpPr>
-        <p:spPr>
-          <a:xfrm>
-            <a:off x="594360" y="5660136"/>
-            <a:ext cx="438912" cy="438912"/>
-          </a:xfrm>
-          <a:prstGeom prst="roundRect">
-            <a:avLst>
-              <a:gd name="adj" fmla="val 12000"/>
-            </a:avLst>
-          </a:prstGeom>
-          <a:solidFill>
-            <a:srgbClr val="095292"/>
-          </a:solidFill>
-          <a:ln>
-            <a:noFill/>
-          </a:ln>
-        </p:spPr>
-        <p:style>
-          <a:lnRef idx="1">
-            <a:schemeClr val="accent1"/>
-          </a:lnRef>
-          <a:fillRef idx="3">
-            <a:schemeClr val="accent1"/>
-          </a:fillRef>
-          <a:effectRef idx="2">
-            <a:schemeClr val="accent1"/>
-          </a:effectRef>
-          <a:fontRef idx="minor">
-            <a:schemeClr val="lt1"/>
-          </a:fontRef>
-        </p:style>
-        <p:txBody>
-          <a:bodyPr rtlCol="0" anchor="ctr"/>
-          <a:lstStyle/>
-          <a:p>
-            <a:pPr algn="ctr"/>
-          </a:p>
-        </p:txBody>
-      </p:sp>
-      <p:sp>
-        <p:nvSpPr>
-          <p:cNvPr id="23" name="TextBox 22"/>
-          <p:cNvSpPr txBox="1"/>
-          <p:nvPr/>
-        </p:nvSpPr>
-        <p:spPr>
-          <a:xfrm>
-            <a:off x="594360" y="5660136"/>
-            <a:ext cx="438912" cy="438912"/>
-          </a:xfrm>
-          <a:prstGeom prst="rect">
-            <a:avLst/>
-          </a:prstGeom>
-          <a:noFill/>
-        </p:spPr>
-        <p:txBody>
-          <a:bodyPr wrap="square" anchor="ctr"/>
-          <a:lstStyle/>
-          <a:p>
-            <a:pPr algn="ctr"/>
-            <a:r>
-              <a:rPr sz="1600" b="1" i="0">
-                <a:solidFill>
-                  <a:srgbClr val="FFFFFF"/>
-                </a:solidFill>
-                <a:latin typeface="Calibri"/>
-              </a:rPr>
-              <a:t>5</a:t>
-            </a:r>
-          </a:p>
-        </p:txBody>
-      </p:sp>
-      <p:sp>
-        <p:nvSpPr>
-          <p:cNvPr id="24" name="TextBox 23"/>
-          <p:cNvSpPr txBox="1"/>
-          <p:nvPr/>
-        </p:nvSpPr>
-        <p:spPr>
-          <a:xfrm>
-            <a:off x="1188720" y="5495544"/>
-            <a:ext cx="10271455" cy="786384"/>
-          </a:xfrm>
-          <a:prstGeom prst="rect">
-            <a:avLst/>
-          </a:prstGeom>
-          <a:noFill/>
-        </p:spPr>
-        <p:txBody>
-          <a:bodyPr wrap="square" anchor="ctr"/>
-          <a:lstStyle/>
-          <a:p>
-            <a:r>
-              <a:rPr sz="1500" b="1" i="0">
-                <a:solidFill>
-                  <a:srgbClr val="095292"/>
-                </a:solidFill>
-                <a:latin typeface="Calibri"/>
-              </a:rPr>
-              <a:t>Paso 5: estime en puntos con la escala 1, 2, 3, 5, 8 tomando 'registrar un dueno = 3' como referencia, ordene el backlog de mayor a menor prioridad, agregue la columna de trazabilidad al RF de origen y suba el tablero a la plataforma del curso.</a:t>
-            </a:r>
-          </a:p>
-        </p:txBody>
-      </p:sp>
-      <p:sp>
-        <p:nvSpPr>
-          <p:cNvPr id="25" name="TextBox 24"/>
-          <p:cNvSpPr txBox="1"/>
-          <p:nvPr/>
-        </p:nvSpPr>
-        <p:spPr>
-          <a:xfrm>
-            <a:off x="11185855" y="6473952"/>
-            <a:ext cx="640080" cy="274320"/>
-          </a:xfrm>
-          <a:prstGeom prst="rect">
-            <a:avLst/>
-          </a:prstGeom>
-          <a:noFill/>
-        </p:spPr>
-        <p:txBody>
-          <a:bodyPr wrap="square">
-            <a:spAutoFit/>
-          </a:bodyPr>
-          <a:lstStyle/>
-          <a:p>
-            <a:pPr algn="r"/>
-            <a:r>
-              <a:rPr sz="1100" b="0" i="0">
-                <a:solidFill>
-                  <a:srgbClr val="666666"/>
-                </a:solidFill>
-                <a:latin typeface="Calibri"/>
-              </a:rPr>
-              <a:t>21</a:t>
-            </a:r>
-          </a:p>
-        </p:txBody>
-      </p:sp>
-    </p:spTree>
-  </p:cSld>
-  <p:clrMapOvr>
-    <a:masterClrMapping/>
-  </p:clrMapOvr>
-</p:sld>
-</file>
-
-<file path=ppt/slides/slide22.xml><?xml version="1.0" encoding="utf-8"?>
-<p:sld xmlns:a="http://schemas.openxmlformats.org/drawingml/2006/main" xmlns:p="http://schemas.openxmlformats.org/presentationml/2006/main" xmlns:r="http://schemas.openxmlformats.org/officeDocument/2006/relationships">
-  <p:cSld>
-    <p:bg>
-      <p:bgPr>
-        <a:solidFill>
-          <a:srgbClr val="FFFFFF"/>
-        </a:solidFill>
-        <a:effectLst/>
-      </p:bgPr>
-    </p:bg>
-    <p:spTree>
-      <p:nvGrpSpPr>
-        <p:cNvPr id="1" name=""/>
-        <p:cNvGrpSpPr/>
-        <p:nvPr/>
-      </p:nvGrpSpPr>
-      <p:grpSpPr/>
-      <p:sp>
-        <p:nvSpPr>
-          <p:cNvPr id="2" name="Rectangle 1"/>
-          <p:cNvSpPr/>
-          <p:nvPr/>
-        </p:nvSpPr>
-        <p:spPr>
-          <a:xfrm>
-            <a:off x="0" y="0"/>
-            <a:ext cx="12191695" cy="960120"/>
-          </a:xfrm>
-          <a:prstGeom prst="rect">
-            <a:avLst/>
-          </a:prstGeom>
-          <a:solidFill>
-            <a:srgbClr val="095292"/>
-          </a:solidFill>
-          <a:ln>
-            <a:noFill/>
-          </a:ln>
-        </p:spPr>
-        <p:style>
-          <a:lnRef idx="1">
-            <a:schemeClr val="accent1"/>
-          </a:lnRef>
-          <a:fillRef idx="3">
-            <a:schemeClr val="accent1"/>
-          </a:fillRef>
-          <a:effectRef idx="2">
-            <a:schemeClr val="accent1"/>
-          </a:effectRef>
-          <a:fontRef idx="minor">
-            <a:schemeClr val="lt1"/>
-          </a:fontRef>
-        </p:style>
-        <p:txBody>
-          <a:bodyPr rtlCol="0" anchor="ctr"/>
-          <a:lstStyle/>
-          <a:p>
-            <a:pPr algn="ctr"/>
-          </a:p>
-        </p:txBody>
-      </p:sp>
-      <p:sp>
-        <p:nvSpPr>
-          <p:cNvPr id="3" name="Rectangle 2"/>
-          <p:cNvSpPr/>
-          <p:nvPr/>
-        </p:nvSpPr>
-        <p:spPr>
-          <a:xfrm>
-            <a:off x="0" y="960120"/>
-            <a:ext cx="12191695" cy="41148"/>
-          </a:xfrm>
-          <a:prstGeom prst="rect">
-            <a:avLst/>
-          </a:prstGeom>
-          <a:solidFill>
-            <a:srgbClr val="FFD000"/>
-          </a:solidFill>
-          <a:ln>
-            <a:noFill/>
-          </a:ln>
-        </p:spPr>
-        <p:style>
-          <a:lnRef idx="1">
-            <a:schemeClr val="accent1"/>
-          </a:lnRef>
-          <a:fillRef idx="3">
-            <a:schemeClr val="accent1"/>
-          </a:fillRef>
-          <a:effectRef idx="2">
-            <a:schemeClr val="accent1"/>
-          </a:effectRef>
-          <a:fontRef idx="minor">
-            <a:schemeClr val="lt1"/>
-          </a:fontRef>
-        </p:style>
-        <p:txBody>
-          <a:bodyPr rtlCol="0" anchor="ctr"/>
-          <a:lstStyle/>
-          <a:p>
-            <a:pPr algn="ctr"/>
-          </a:p>
-        </p:txBody>
-      </p:sp>
-      <p:sp>
-        <p:nvSpPr>
-          <p:cNvPr id="4" name="TextBox 3"/>
-          <p:cNvSpPr txBox="1"/>
-          <p:nvPr/>
-        </p:nvSpPr>
-        <p:spPr>
-          <a:xfrm>
-            <a:off x="457200" y="164592"/>
-            <a:ext cx="11277295" cy="502920"/>
-          </a:xfrm>
-          <a:prstGeom prst="rect">
-            <a:avLst/>
-          </a:prstGeom>
-          <a:noFill/>
-        </p:spPr>
-        <p:txBody>
-          <a:bodyPr wrap="square">
-            <a:spAutoFit/>
-          </a:bodyPr>
-          <a:lstStyle/>
-          <a:p>
-            <a:r>
-              <a:rPr sz="2600" b="1" i="0">
-                <a:solidFill>
-                  <a:srgbClr val="FFFFFF"/>
-                </a:solidFill>
-                <a:latin typeface="Calibri"/>
-              </a:rPr>
-              <a:t>Antes de entregar — autochequeo</a:t>
-            </a:r>
-          </a:p>
-        </p:txBody>
-      </p:sp>
-      <p:sp>
-        <p:nvSpPr>
-          <p:cNvPr id="5" name="Rounded Rectangle 4"/>
-          <p:cNvSpPr/>
-          <p:nvPr/>
-        </p:nvSpPr>
-        <p:spPr>
-          <a:xfrm>
-            <a:off x="457200" y="1261872"/>
-            <a:ext cx="11277295" cy="566928"/>
-          </a:xfrm>
-          <a:prstGeom prst="roundRect">
-            <a:avLst>
-              <a:gd name="adj" fmla="val 12000"/>
-            </a:avLst>
-          </a:prstGeom>
-          <a:solidFill>
-            <a:srgbClr val="F2F2F2"/>
-          </a:solidFill>
-          <a:ln>
-            <a:noFill/>
-          </a:ln>
-        </p:spPr>
-        <p:style>
-          <a:lnRef idx="1">
-            <a:schemeClr val="accent1"/>
-          </a:lnRef>
-          <a:fillRef idx="3">
-            <a:schemeClr val="accent1"/>
-          </a:fillRef>
-          <a:effectRef idx="2">
-            <a:schemeClr val="accent1"/>
-          </a:effectRef>
-          <a:fontRef idx="minor">
-            <a:schemeClr val="lt1"/>
-          </a:fontRef>
-        </p:style>
-        <p:txBody>
-          <a:bodyPr rtlCol="0" anchor="ctr"/>
-          <a:lstStyle/>
-          <a:p>
-            <a:pPr algn="ctr"/>
-          </a:p>
-        </p:txBody>
-      </p:sp>
-      <p:sp>
-        <p:nvSpPr>
-          <p:cNvPr id="6" name="Rectangle 5"/>
-          <p:cNvSpPr/>
-          <p:nvPr/>
-        </p:nvSpPr>
-        <p:spPr>
-          <a:xfrm>
-            <a:off x="640080" y="1408175"/>
-            <a:ext cx="274320" cy="274320"/>
-          </a:xfrm>
-          <a:prstGeom prst="rect">
-            <a:avLst/>
-          </a:prstGeom>
-          <a:solidFill>
-            <a:srgbClr val="FFFFFF"/>
-          </a:solidFill>
-          <a:ln>
-            <a:solidFill>
-              <a:srgbClr val="333333"/>
-            </a:solidFill>
-          </a:ln>
-        </p:spPr>
-        <p:style>
-          <a:lnRef idx="1">
-            <a:schemeClr val="accent1"/>
-          </a:lnRef>
-          <a:fillRef idx="3">
-            <a:schemeClr val="accent1"/>
-          </a:fillRef>
-          <a:effectRef idx="2">
-            <a:schemeClr val="accent1"/>
-          </a:effectRef>
-          <a:fontRef idx="minor">
-            <a:schemeClr val="lt1"/>
-          </a:fontRef>
-        </p:style>
-        <p:txBody>
-          <a:bodyPr rtlCol="0" anchor="ctr"/>
-          <a:lstStyle/>
-          <a:p>
-            <a:pPr algn="ctr"/>
-          </a:p>
-        </p:txBody>
-      </p:sp>
-      <p:sp>
-        <p:nvSpPr>
-          <p:cNvPr id="7" name="Rectangle 6"/>
-          <p:cNvSpPr/>
-          <p:nvPr/>
-        </p:nvSpPr>
-        <p:spPr>
-          <a:xfrm>
-            <a:off x="640080" y="1408175"/>
-            <a:ext cx="73152" cy="274320"/>
-          </a:xfrm>
-          <a:prstGeom prst="rect">
-            <a:avLst/>
-          </a:prstGeom>
-          <a:solidFill>
-            <a:srgbClr val="269CCB"/>
-          </a:solidFill>
-          <a:ln>
-            <a:noFill/>
-          </a:ln>
-        </p:spPr>
-        <p:style>
-          <a:lnRef idx="1">
-            <a:schemeClr val="accent1"/>
-          </a:lnRef>
-          <a:fillRef idx="3">
-            <a:schemeClr val="accent1"/>
-          </a:fillRef>
-          <a:effectRef idx="2">
-            <a:schemeClr val="accent1"/>
-          </a:effectRef>
-          <a:fontRef idx="minor">
-            <a:schemeClr val="lt1"/>
-          </a:fontRef>
-        </p:style>
-        <p:txBody>
-          <a:bodyPr rtlCol="0" anchor="ctr"/>
-          <a:lstStyle/>
-          <a:p>
-            <a:pPr algn="ctr"/>
-          </a:p>
-        </p:txBody>
-      </p:sp>
-      <p:sp>
-        <p:nvSpPr>
-          <p:cNvPr id="8" name="TextBox 7"/>
-          <p:cNvSpPr txBox="1"/>
-          <p:nvPr/>
-        </p:nvSpPr>
-        <p:spPr>
-          <a:xfrm>
-            <a:off x="1097280" y="1353312"/>
-            <a:ext cx="10362895" cy="402336"/>
-          </a:xfrm>
-          <a:prstGeom prst="rect">
-            <a:avLst/>
-          </a:prstGeom>
-          <a:noFill/>
-        </p:spPr>
-        <p:txBody>
-          <a:bodyPr wrap="square" anchor="ctr"/>
-          <a:lstStyle/>
-          <a:p>
-            <a:r>
-              <a:rPr sz="1500" b="0" i="0">
-                <a:solidFill>
-                  <a:srgbClr val="333333"/>
-                </a:solidFill>
-                <a:latin typeface="Calibri"/>
-              </a:rPr>
-              <a:t>Si le leo esta historia al Dr. Ramirez sin explicarle nada, entiende quien gana algo y que gana, o solo entiende que hay una pantalla nueva?</a:t>
-            </a:r>
-          </a:p>
-        </p:txBody>
-      </p:sp>
-      <p:sp>
-        <p:nvSpPr>
-          <p:cNvPr id="9" name="Rounded Rectangle 8"/>
-          <p:cNvSpPr/>
-          <p:nvPr/>
-        </p:nvSpPr>
-        <p:spPr>
-          <a:xfrm>
-            <a:off x="457200" y="1938528"/>
-            <a:ext cx="11277295" cy="566928"/>
-          </a:xfrm>
-          <a:prstGeom prst="roundRect">
-            <a:avLst>
-              <a:gd name="adj" fmla="val 12000"/>
-            </a:avLst>
-          </a:prstGeom>
-          <a:solidFill>
-            <a:srgbClr val="F2F2F2"/>
-          </a:solidFill>
-          <a:ln>
-            <a:noFill/>
-          </a:ln>
-        </p:spPr>
-        <p:style>
-          <a:lnRef idx="1">
-            <a:schemeClr val="accent1"/>
-          </a:lnRef>
-          <a:fillRef idx="3">
-            <a:schemeClr val="accent1"/>
-          </a:fillRef>
-          <a:effectRef idx="2">
-            <a:schemeClr val="accent1"/>
-          </a:effectRef>
-          <a:fontRef idx="minor">
-            <a:schemeClr val="lt1"/>
-          </a:fontRef>
-        </p:style>
-        <p:txBody>
-          <a:bodyPr rtlCol="0" anchor="ctr"/>
-          <a:lstStyle/>
-          <a:p>
-            <a:pPr algn="ctr"/>
-          </a:p>
-        </p:txBody>
-      </p:sp>
-      <p:sp>
-        <p:nvSpPr>
-          <p:cNvPr id="10" name="Rectangle 9"/>
-          <p:cNvSpPr/>
-          <p:nvPr/>
-        </p:nvSpPr>
-        <p:spPr>
-          <a:xfrm>
-            <a:off x="640080" y="2084832"/>
-            <a:ext cx="274320" cy="274320"/>
-          </a:xfrm>
-          <a:prstGeom prst="rect">
-            <a:avLst/>
-          </a:prstGeom>
-          <a:solidFill>
-            <a:srgbClr val="FFFFFF"/>
-          </a:solidFill>
-          <a:ln>
-            <a:solidFill>
-              <a:srgbClr val="333333"/>
-            </a:solidFill>
-          </a:ln>
-        </p:spPr>
-        <p:style>
-          <a:lnRef idx="1">
-            <a:schemeClr val="accent1"/>
-          </a:lnRef>
-          <a:fillRef idx="3">
-            <a:schemeClr val="accent1"/>
-          </a:fillRef>
-          <a:effectRef idx="2">
-            <a:schemeClr val="accent1"/>
-          </a:effectRef>
-          <a:fontRef idx="minor">
-            <a:schemeClr val="lt1"/>
-          </a:fontRef>
-        </p:style>
-        <p:txBody>
-          <a:bodyPr rtlCol="0" anchor="ctr"/>
-          <a:lstStyle/>
-          <a:p>
-            <a:pPr algn="ctr"/>
-          </a:p>
-        </p:txBody>
-      </p:sp>
-      <p:sp>
-        <p:nvSpPr>
-          <p:cNvPr id="11" name="Rectangle 10"/>
-          <p:cNvSpPr/>
-          <p:nvPr/>
-        </p:nvSpPr>
-        <p:spPr>
-          <a:xfrm>
-            <a:off x="640080" y="2084832"/>
-            <a:ext cx="73152" cy="274320"/>
-          </a:xfrm>
-          <a:prstGeom prst="rect">
-            <a:avLst/>
-          </a:prstGeom>
-          <a:solidFill>
-            <a:srgbClr val="269CCB"/>
-          </a:solidFill>
-          <a:ln>
-            <a:noFill/>
-          </a:ln>
-        </p:spPr>
-        <p:style>
-          <a:lnRef idx="1">
-            <a:schemeClr val="accent1"/>
-          </a:lnRef>
-          <a:fillRef idx="3">
-            <a:schemeClr val="accent1"/>
-          </a:fillRef>
-          <a:effectRef idx="2">
-            <a:schemeClr val="accent1"/>
-          </a:effectRef>
-          <a:fontRef idx="minor">
-            <a:schemeClr val="lt1"/>
-          </a:fontRef>
-        </p:style>
-        <p:txBody>
-          <a:bodyPr rtlCol="0" anchor="ctr"/>
-          <a:lstStyle/>
-          <a:p>
-            <a:pPr algn="ctr"/>
-          </a:p>
-        </p:txBody>
-      </p:sp>
-      <p:sp>
-        <p:nvSpPr>
-          <p:cNvPr id="12" name="TextBox 11"/>
-          <p:cNvSpPr txBox="1"/>
-          <p:nvPr/>
-        </p:nvSpPr>
-        <p:spPr>
-          <a:xfrm>
-            <a:off x="1097280" y="2029968"/>
-            <a:ext cx="10362895" cy="402336"/>
-          </a:xfrm>
-          <a:prstGeom prst="rect">
-            <a:avLst/>
-          </a:prstGeom>
-          <a:noFill/>
-        </p:spPr>
-        <p:txBody>
-          <a:bodyPr wrap="square" anchor="ctr"/>
-          <a:lstStyle/>
-          <a:p>
-            <a:r>
-              <a:rPr sz="1500" b="0" i="0">
-                <a:solidFill>
-                  <a:srgbClr val="333333"/>
-                </a:solidFill>
-                <a:latin typeface="Calibri"/>
-              </a:rPr>
-              <a:t>El 'para' de mi historia esta repitiendo la accion con otras palabras, o dice de verdad el beneficio para la clinica?</a:t>
-            </a:r>
-          </a:p>
-        </p:txBody>
-      </p:sp>
-      <p:sp>
-        <p:nvSpPr>
-          <p:cNvPr id="13" name="Rounded Rectangle 12"/>
-          <p:cNvSpPr/>
-          <p:nvPr/>
-        </p:nvSpPr>
-        <p:spPr>
-          <a:xfrm>
-            <a:off x="457200" y="2615184"/>
-            <a:ext cx="11277295" cy="566928"/>
-          </a:xfrm>
-          <a:prstGeom prst="roundRect">
-            <a:avLst>
-              <a:gd name="adj" fmla="val 12000"/>
-            </a:avLst>
-          </a:prstGeom>
-          <a:solidFill>
-            <a:srgbClr val="F2F2F2"/>
-          </a:solidFill>
-          <a:ln>
-            <a:noFill/>
-          </a:ln>
-        </p:spPr>
-        <p:style>
-          <a:lnRef idx="1">
-            <a:schemeClr val="accent1"/>
-          </a:lnRef>
-          <a:fillRef idx="3">
-            <a:schemeClr val="accent1"/>
-          </a:fillRef>
-          <a:effectRef idx="2">
-            <a:schemeClr val="accent1"/>
-          </a:effectRef>
-          <a:fontRef idx="minor">
-            <a:schemeClr val="lt1"/>
-          </a:fontRef>
-        </p:style>
-        <p:txBody>
-          <a:bodyPr rtlCol="0" anchor="ctr"/>
-          <a:lstStyle/>
-          <a:p>
-            <a:pPr algn="ctr"/>
-          </a:p>
-        </p:txBody>
-      </p:sp>
-      <p:sp>
-        <p:nvSpPr>
-          <p:cNvPr id="14" name="Rectangle 13"/>
-          <p:cNvSpPr/>
-          <p:nvPr/>
-        </p:nvSpPr>
-        <p:spPr>
-          <a:xfrm>
-            <a:off x="640080" y="2761488"/>
-            <a:ext cx="274320" cy="274320"/>
-          </a:xfrm>
-          <a:prstGeom prst="rect">
-            <a:avLst/>
-          </a:prstGeom>
-          <a:solidFill>
-            <a:srgbClr val="FFFFFF"/>
-          </a:solidFill>
-          <a:ln>
-            <a:solidFill>
-              <a:srgbClr val="333333"/>
-            </a:solidFill>
-          </a:ln>
-        </p:spPr>
-        <p:style>
-          <a:lnRef idx="1">
-            <a:schemeClr val="accent1"/>
-          </a:lnRef>
-          <a:fillRef idx="3">
-            <a:schemeClr val="accent1"/>
-          </a:fillRef>
-          <a:effectRef idx="2">
-            <a:schemeClr val="accent1"/>
-          </a:effectRef>
-          <a:fontRef idx="minor">
-            <a:schemeClr val="lt1"/>
-          </a:fontRef>
-        </p:style>
-        <p:txBody>
-          <a:bodyPr rtlCol="0" anchor="ctr"/>
-          <a:lstStyle/>
-          <a:p>
-            <a:pPr algn="ctr"/>
-          </a:p>
-        </p:txBody>
-      </p:sp>
-      <p:sp>
-        <p:nvSpPr>
-          <p:cNvPr id="15" name="Rectangle 14"/>
-          <p:cNvSpPr/>
-          <p:nvPr/>
-        </p:nvSpPr>
-        <p:spPr>
-          <a:xfrm>
-            <a:off x="640080" y="2761488"/>
-            <a:ext cx="73152" cy="274320"/>
-          </a:xfrm>
-          <a:prstGeom prst="rect">
-            <a:avLst/>
-          </a:prstGeom>
-          <a:solidFill>
-            <a:srgbClr val="269CCB"/>
-          </a:solidFill>
-          <a:ln>
-            <a:noFill/>
-          </a:ln>
-        </p:spPr>
-        <p:style>
-          <a:lnRef idx="1">
-            <a:schemeClr val="accent1"/>
-          </a:lnRef>
-          <a:fillRef idx="3">
-            <a:schemeClr val="accent1"/>
-          </a:fillRef>
-          <a:effectRef idx="2">
-            <a:schemeClr val="accent1"/>
-          </a:effectRef>
-          <a:fontRef idx="minor">
-            <a:schemeClr val="lt1"/>
-          </a:fontRef>
-        </p:style>
-        <p:txBody>
-          <a:bodyPr rtlCol="0" anchor="ctr"/>
-          <a:lstStyle/>
-          <a:p>
-            <a:pPr algn="ctr"/>
-          </a:p>
-        </p:txBody>
-      </p:sp>
-      <p:sp>
-        <p:nvSpPr>
-          <p:cNvPr id="16" name="TextBox 15"/>
-          <p:cNvSpPr txBox="1"/>
-          <p:nvPr/>
-        </p:nvSpPr>
-        <p:spPr>
-          <a:xfrm>
-            <a:off x="1097280" y="2706624"/>
-            <a:ext cx="10362895" cy="402336"/>
-          </a:xfrm>
-          <a:prstGeom prst="rect">
-            <a:avLst/>
-          </a:prstGeom>
-          <a:noFill/>
-        </p:spPr>
-        <p:txBody>
-          <a:bodyPr wrap="square" anchor="ctr"/>
-          <a:lstStyle/>
-          <a:p>
-            <a:r>
-              <a:rPr sz="1500" b="0" i="0">
-                <a:solidFill>
-                  <a:srgbClr val="333333"/>
-                </a:solidFill>
-                <a:latin typeface="Calibri"/>
-              </a:rPr>
-              <a:t>Si esta historia se entregara sola, sin ninguna otra, el usuario podria hacer algo completo de principio a fin?</a:t>
-            </a:r>
-          </a:p>
-        </p:txBody>
-      </p:sp>
-      <p:sp>
-        <p:nvSpPr>
-          <p:cNvPr id="17" name="TextBox 16"/>
-          <p:cNvSpPr txBox="1"/>
-          <p:nvPr/>
-        </p:nvSpPr>
-        <p:spPr>
-          <a:xfrm>
-            <a:off x="11185855" y="6473952"/>
-            <a:ext cx="640080" cy="274320"/>
-          </a:xfrm>
-          <a:prstGeom prst="rect">
-            <a:avLst/>
-          </a:prstGeom>
-          <a:noFill/>
-        </p:spPr>
-        <p:txBody>
-          <a:bodyPr wrap="square">
-            <a:spAutoFit/>
-          </a:bodyPr>
-          <a:lstStyle/>
-          <a:p>
-            <a:pPr algn="r"/>
-            <a:r>
-              <a:rPr sz="1100" b="0" i="0">
-                <a:solidFill>
-                  <a:srgbClr val="666666"/>
-                </a:solidFill>
-                <a:latin typeface="Calibri"/>
-              </a:rPr>
-              <a:t>22</a:t>
-            </a:r>
-          </a:p>
-        </p:txBody>
-      </p:sp>
-    </p:spTree>
-  </p:cSld>
-  <p:clrMapOvr>
-    <a:masterClrMapping/>
-  </p:clrMapOvr>
-</p:sld>
-</file>
-
-<file path=ppt/slides/slide23.xml><?xml version="1.0" encoding="utf-8"?>
-<p:sld xmlns:a="http://schemas.openxmlformats.org/drawingml/2006/main" xmlns:p="http://schemas.openxmlformats.org/presentationml/2006/main" xmlns:r="http://schemas.openxmlformats.org/officeDocument/2006/relationships">
-  <p:cSld>
-    <p:bg>
-      <p:bgPr>
-        <a:solidFill>
-          <a:srgbClr val="FFFFFF"/>
-        </a:solidFill>
-        <a:effectLst/>
-      </p:bgPr>
-    </p:bg>
-    <p:spTree>
-      <p:nvGrpSpPr>
-        <p:cNvPr id="1" name=""/>
-        <p:cNvGrpSpPr/>
-        <p:nvPr/>
-      </p:nvGrpSpPr>
-      <p:grpSpPr/>
-      <p:sp>
-        <p:nvSpPr>
-          <p:cNvPr id="2" name="Rectangle 1"/>
-          <p:cNvSpPr/>
-          <p:nvPr/>
-        </p:nvSpPr>
-        <p:spPr>
-          <a:xfrm>
-            <a:off x="0" y="0"/>
-            <a:ext cx="12191695" cy="960120"/>
-          </a:xfrm>
-          <a:prstGeom prst="rect">
-            <a:avLst/>
-          </a:prstGeom>
-          <a:solidFill>
-            <a:srgbClr val="095292"/>
-          </a:solidFill>
-          <a:ln>
-            <a:noFill/>
-          </a:ln>
-        </p:spPr>
-        <p:style>
-          <a:lnRef idx="1">
-            <a:schemeClr val="accent1"/>
-          </a:lnRef>
-          <a:fillRef idx="3">
-            <a:schemeClr val="accent1"/>
-          </a:fillRef>
-          <a:effectRef idx="2">
-            <a:schemeClr val="accent1"/>
-          </a:effectRef>
-          <a:fontRef idx="minor">
-            <a:schemeClr val="lt1"/>
-          </a:fontRef>
-        </p:style>
-        <p:txBody>
-          <a:bodyPr rtlCol="0" anchor="ctr"/>
-          <a:lstStyle/>
-          <a:p>
-            <a:pPr algn="ctr"/>
-          </a:p>
-        </p:txBody>
-      </p:sp>
-      <p:sp>
-        <p:nvSpPr>
-          <p:cNvPr id="3" name="Rectangle 2"/>
-          <p:cNvSpPr/>
-          <p:nvPr/>
-        </p:nvSpPr>
-        <p:spPr>
-          <a:xfrm>
-            <a:off x="0" y="960120"/>
-            <a:ext cx="12191695" cy="41148"/>
-          </a:xfrm>
-          <a:prstGeom prst="rect">
-            <a:avLst/>
-          </a:prstGeom>
-          <a:solidFill>
-            <a:srgbClr val="FFD000"/>
-          </a:solidFill>
-          <a:ln>
-            <a:noFill/>
-          </a:ln>
-        </p:spPr>
-        <p:style>
-          <a:lnRef idx="1">
-            <a:schemeClr val="accent1"/>
-          </a:lnRef>
-          <a:fillRef idx="3">
-            <a:schemeClr val="accent1"/>
-          </a:fillRef>
-          <a:effectRef idx="2">
-            <a:schemeClr val="accent1"/>
-          </a:effectRef>
-          <a:fontRef idx="minor">
-            <a:schemeClr val="lt1"/>
-          </a:fontRef>
-        </p:style>
-        <p:txBody>
-          <a:bodyPr rtlCol="0" anchor="ctr"/>
-          <a:lstStyle/>
-          <a:p>
-            <a:pPr algn="ctr"/>
-          </a:p>
-        </p:txBody>
-      </p:sp>
-      <p:sp>
-        <p:nvSpPr>
-          <p:cNvPr id="4" name="TextBox 3"/>
-          <p:cNvSpPr txBox="1"/>
-          <p:nvPr/>
-        </p:nvSpPr>
-        <p:spPr>
-          <a:xfrm>
-            <a:off x="457200" y="164592"/>
-            <a:ext cx="11277295" cy="502920"/>
-          </a:xfrm>
-          <a:prstGeom prst="rect">
-            <a:avLst/>
-          </a:prstGeom>
-          <a:noFill/>
-        </p:spPr>
-        <p:txBody>
-          <a:bodyPr wrap="square">
-            <a:spAutoFit/>
-          </a:bodyPr>
-          <a:lstStyle/>
-          <a:p>
-            <a:r>
-              <a:rPr sz="2600" b="1" i="0">
-                <a:solidFill>
-                  <a:srgbClr val="FFFFFF"/>
-                </a:solidFill>
-                <a:latin typeface="Calibri"/>
-              </a:rPr>
-              <a:t>Criterios de exito / entregable</a:t>
-            </a:r>
-          </a:p>
-        </p:txBody>
-      </p:sp>
-      <p:sp>
-        <p:nvSpPr>
-          <p:cNvPr id="5" name="TextBox 4"/>
-          <p:cNvSpPr txBox="1"/>
-          <p:nvPr/>
-        </p:nvSpPr>
-        <p:spPr>
-          <a:xfrm>
-            <a:off x="457200" y="1170432"/>
-            <a:ext cx="11277295" cy="5230368"/>
-          </a:xfrm>
-          <a:prstGeom prst="rect">
-            <a:avLst/>
-          </a:prstGeom>
-          <a:noFill/>
-        </p:spPr>
-        <p:txBody>
-          <a:bodyPr wrap="square">
-            <a:spAutoFit/>
-          </a:bodyPr>
-          <a:lstStyle/>
-          <a:p>
-            <a:pPr>
-              <a:spcAft>
-                <a:spcPts val="800"/>
-              </a:spcAft>
-            </a:pPr>
-            <a:r>
-              <a:rPr sz="2000" b="0" i="0">
-                <a:solidFill>
-                  <a:srgbClr val="333333"/>
-                </a:solidFill>
-                <a:latin typeface="Calibri"/>
-              </a:rPr>
-              <a:t>–   </a:t>
-            </a:r>
-            <a:r>
-              <a:rPr sz="2000" b="1" i="0">
-                <a:solidFill>
-                  <a:srgbClr val="333333"/>
-                </a:solidFill>
-                <a:latin typeface="Calibri"/>
-              </a:rPr>
-              <a:t>Entregable:</a:t>
-            </a:r>
-            <a:r>
-              <a:rPr sz="2000" b="0" i="0">
-                <a:solidFill>
-                  <a:srgbClr val="333333"/>
-                </a:solidFill>
-                <a:latin typeface="Calibri"/>
-              </a:rPr>
-              <a:t> Tablero de backlog con 8 historias en formato Como/quiero/para, cada una con 2 o 3 criterios de aceptacion en Dado-Cuando-Entonces, estimacion en puntos y trazabilidad al RF de la clase 6, subido a la plataforma del curso.</a:t>
-            </a:r>
-          </a:p>
-          <a:p>
-            <a:pPr>
-              <a:spcAft>
-                <a:spcPts val="800"/>
-              </a:spcAft>
-            </a:pPr>
-            <a:r>
-              <a:rPr sz="2000" b="0" i="0">
-                <a:solidFill>
-                  <a:srgbClr val="333333"/>
-                </a:solidFill>
-                <a:latin typeface="Calibri"/>
-              </a:rPr>
-              <a:t>–   </a:t>
-            </a:r>
-            <a:r>
-              <a:rPr sz="2000" b="1" i="0">
-                <a:solidFill>
-                  <a:srgbClr val="333333"/>
-                </a:solidFill>
-                <a:latin typeface="Calibri"/>
-              </a:rPr>
-              <a:t>Exito:</a:t>
-            </a:r>
-            <a:r>
-              <a:rPr sz="2000" b="0" i="0">
-                <a:solidFill>
-                  <a:srgbClr val="333333"/>
-                </a:solidFill>
-                <a:latin typeface="Calibri"/>
-              </a:rPr>
-              <a:t> Las 8 historias usan roles concretos de la clinica Huellitas y ninguna emplea el rol generico usuario.</a:t>
-            </a:r>
-          </a:p>
-          <a:p>
-            <a:pPr>
-              <a:spcAft>
-                <a:spcPts val="800"/>
-              </a:spcAft>
-            </a:pPr>
-            <a:r>
-              <a:rPr sz="2000" b="0" i="0">
-                <a:solidFill>
-                  <a:srgbClr val="333333"/>
-                </a:solidFill>
-                <a:latin typeface="Calibri"/>
-              </a:rPr>
-              <a:t>–   </a:t>
-            </a:r>
-            <a:r>
-              <a:rPr sz="2000" b="1" i="0">
-                <a:solidFill>
-                  <a:srgbClr val="333333"/>
-                </a:solidFill>
-                <a:latin typeface="Calibri"/>
-              </a:rPr>
-              <a:t>Exito:</a:t>
-            </a:r>
-            <a:r>
-              <a:rPr sz="2000" b="0" i="0">
-                <a:solidFill>
-                  <a:srgbClr val="333333"/>
-                </a:solidFill>
-                <a:latin typeface="Calibri"/>
-              </a:rPr>
-              <a:t> Cada historia tiene minimo 2 criterios de aceptacion en Dado-Cuando-Entonces y al menos cuatro incluyen un camino alterno o de error.</a:t>
-            </a:r>
-          </a:p>
-          <a:p>
-            <a:pPr>
-              <a:spcAft>
-                <a:spcPts val="800"/>
-              </a:spcAft>
-            </a:pPr>
-            <a:r>
-              <a:rPr sz="2000" b="0" i="0">
-                <a:solidFill>
-                  <a:srgbClr val="333333"/>
-                </a:solidFill>
-                <a:latin typeface="Calibri"/>
-              </a:rPr>
-              <a:t>–   </a:t>
-            </a:r>
-            <a:r>
-              <a:rPr sz="2000" b="1" i="0">
-                <a:solidFill>
-                  <a:srgbClr val="333333"/>
-                </a:solidFill>
-                <a:latin typeface="Calibri"/>
-              </a:rPr>
-              <a:t>Exito:</a:t>
-            </a:r>
-            <a:r>
-              <a:rPr sz="2000" b="0" i="0">
-                <a:solidFill>
-                  <a:srgbClr val="333333"/>
-                </a:solidFill>
-                <a:latin typeface="Calibri"/>
-              </a:rPr>
-              <a:t> Todas las historias pasan INVEST con al menos cinco de las seis letras en si, y ninguna esta cortada por capas tecnicas.</a:t>
-            </a:r>
-          </a:p>
-          <a:p>
-            <a:pPr>
-              <a:spcAft>
-                <a:spcPts val="800"/>
-              </a:spcAft>
-            </a:pPr>
-            <a:r>
-              <a:rPr sz="2000" b="0" i="0">
-                <a:solidFill>
-                  <a:srgbClr val="333333"/>
-                </a:solidFill>
-                <a:latin typeface="Calibri"/>
-              </a:rPr>
-              <a:t>–   </a:t>
-            </a:r>
-            <a:r>
-              <a:rPr sz="2000" b="1" i="0">
-                <a:solidFill>
-                  <a:srgbClr val="333333"/>
-                </a:solidFill>
-                <a:latin typeface="Calibri"/>
-              </a:rPr>
-              <a:t>Exito:</a:t>
-            </a:r>
-            <a:r>
-              <a:rPr sz="2000" b="0" i="0">
-                <a:solidFill>
-                  <a:srgbClr val="333333"/>
-                </a:solidFill>
-                <a:latin typeface="Calibri"/>
-              </a:rPr>
-              <a:t> Cada historia trae estimacion en puntos, prioridad y el RF de origen; ninguna historia supera los 8 puntos sin partirse.</a:t>
-            </a:r>
-          </a:p>
-          <a:p>
-            <a:pPr>
-              <a:spcAft>
-                <a:spcPts val="800"/>
-              </a:spcAft>
-            </a:pPr>
-            <a:r>
-              <a:rPr sz="2000" b="0" i="0">
-                <a:solidFill>
-                  <a:srgbClr val="333333"/>
-                </a:solidFill>
-                <a:latin typeface="Calibri"/>
-              </a:rPr>
-              <a:t>–   </a:t>
-            </a:r>
-            <a:r>
-              <a:rPr sz="2000" b="1" i="0">
-                <a:solidFill>
-                  <a:srgbClr val="333333"/>
-                </a:solidFill>
-                <a:latin typeface="Calibri"/>
-              </a:rPr>
-              <a:t>Entrega en la plataforma del curso</a:t>
-            </a:r>
-            <a:r>
-              <a:rPr sz="2000" b="0" i="0">
-                <a:solidFill>
-                  <a:srgbClr val="333333"/>
-                </a:solidFill>
-                <a:latin typeface="Calibri"/>
-              </a:rPr>
-              <a:t> — en la fecha que indique el docente.</a:t>
-            </a:r>
-          </a:p>
-        </p:txBody>
-      </p:sp>
-      <p:sp>
-        <p:nvSpPr>
-          <p:cNvPr id="6" name="TextBox 5"/>
-          <p:cNvSpPr txBox="1"/>
-          <p:nvPr/>
-        </p:nvSpPr>
-        <p:spPr>
-          <a:xfrm>
-            <a:off x="11185855" y="6473952"/>
-            <a:ext cx="640080" cy="274320"/>
-          </a:xfrm>
-          <a:prstGeom prst="rect">
-            <a:avLst/>
-          </a:prstGeom>
-          <a:noFill/>
-        </p:spPr>
-        <p:txBody>
-          <a:bodyPr wrap="square">
-            <a:spAutoFit/>
-          </a:bodyPr>
-          <a:lstStyle/>
-          <a:p>
-            <a:pPr algn="r"/>
-            <a:r>
-              <a:rPr sz="1100" b="0" i="0">
-                <a:solidFill>
-                  <a:srgbClr val="666666"/>
-                </a:solidFill>
-                <a:latin typeface="Calibri"/>
-              </a:rPr>
-              <a:t>23</a:t>
-            </a:r>
-          </a:p>
-        </p:txBody>
-      </p:sp>
-    </p:spTree>
-  </p:cSld>
-  <p:clrMapOvr>
-    <a:masterClrMapping/>
-  </p:clrMapOvr>
-</p:sld>
-</file>
-
-<file path=ppt/slides/slide24.xml><?xml version="1.0" encoding="utf-8"?>
-<p:sld xmlns:a="http://schemas.openxmlformats.org/drawingml/2006/main" xmlns:p="http://schemas.openxmlformats.org/presentationml/2006/main" xmlns:r="http://schemas.openxmlformats.org/officeDocument/2006/relationships">
-  <p:cSld>
-    <p:bg>
-      <p:bgPr>
-        <a:solidFill>
-          <a:srgbClr val="FFFFFF"/>
-        </a:solidFill>
-        <a:effectLst/>
-      </p:bgPr>
-    </p:bg>
-    <p:spTree>
-      <p:nvGrpSpPr>
-        <p:cNvPr id="1" name=""/>
-        <p:cNvGrpSpPr/>
-        <p:nvPr/>
-      </p:nvGrpSpPr>
-      <p:grpSpPr/>
-      <p:sp>
-        <p:nvSpPr>
-          <p:cNvPr id="2" name="Rectangle 1"/>
-          <p:cNvSpPr/>
-          <p:nvPr/>
-        </p:nvSpPr>
-        <p:spPr>
-          <a:xfrm>
-            <a:off x="0" y="0"/>
-            <a:ext cx="12191695" cy="960120"/>
-          </a:xfrm>
-          <a:prstGeom prst="rect">
-            <a:avLst/>
-          </a:prstGeom>
-          <a:solidFill>
-            <a:srgbClr val="095292"/>
-          </a:solidFill>
-          <a:ln>
-            <a:noFill/>
-          </a:ln>
-        </p:spPr>
-        <p:style>
-          <a:lnRef idx="1">
-            <a:schemeClr val="accent1"/>
-          </a:lnRef>
-          <a:fillRef idx="3">
-            <a:schemeClr val="accent1"/>
-          </a:fillRef>
-          <a:effectRef idx="2">
-            <a:schemeClr val="accent1"/>
-          </a:effectRef>
-          <a:fontRef idx="minor">
-            <a:schemeClr val="lt1"/>
-          </a:fontRef>
-        </p:style>
-        <p:txBody>
-          <a:bodyPr rtlCol="0" anchor="ctr"/>
-          <a:lstStyle/>
-          <a:p>
-            <a:pPr algn="ctr"/>
-          </a:p>
-        </p:txBody>
-      </p:sp>
-      <p:sp>
-        <p:nvSpPr>
-          <p:cNvPr id="3" name="Rectangle 2"/>
-          <p:cNvSpPr/>
-          <p:nvPr/>
-        </p:nvSpPr>
-        <p:spPr>
-          <a:xfrm>
-            <a:off x="0" y="960120"/>
-            <a:ext cx="12191695" cy="41148"/>
-          </a:xfrm>
-          <a:prstGeom prst="rect">
-            <a:avLst/>
-          </a:prstGeom>
-          <a:solidFill>
-            <a:srgbClr val="FFD000"/>
-          </a:solidFill>
-          <a:ln>
-            <a:noFill/>
-          </a:ln>
-        </p:spPr>
-        <p:style>
-          <a:lnRef idx="1">
-            <a:schemeClr val="accent1"/>
-          </a:lnRef>
-          <a:fillRef idx="3">
-            <a:schemeClr val="accent1"/>
-          </a:fillRef>
-          <a:effectRef idx="2">
-            <a:schemeClr val="accent1"/>
-          </a:effectRef>
-          <a:fontRef idx="minor">
-            <a:schemeClr val="lt1"/>
-          </a:fontRef>
-        </p:style>
-        <p:txBody>
-          <a:bodyPr rtlCol="0" anchor="ctr"/>
-          <a:lstStyle/>
-          <a:p>
-            <a:pPr algn="ctr"/>
-          </a:p>
-        </p:txBody>
-      </p:sp>
-      <p:sp>
-        <p:nvSpPr>
-          <p:cNvPr id="4" name="TextBox 3"/>
-          <p:cNvSpPr txBox="1"/>
-          <p:nvPr/>
-        </p:nvSpPr>
-        <p:spPr>
-          <a:xfrm>
-            <a:off x="457200" y="164592"/>
-            <a:ext cx="11277295" cy="502920"/>
-          </a:xfrm>
-          <a:prstGeom prst="rect">
-            <a:avLst/>
-          </a:prstGeom>
-          <a:noFill/>
-        </p:spPr>
-        <p:txBody>
-          <a:bodyPr wrap="square">
-            <a:spAutoFit/>
-          </a:bodyPr>
-          <a:lstStyle/>
-          <a:p>
-            <a:r>
-              <a:rPr sz="2600" b="1" i="0">
-                <a:solidFill>
-                  <a:srgbClr val="FFFFFF"/>
-                </a:solidFill>
-                <a:latin typeface="Calibri"/>
-              </a:rPr>
-              <a:t>Para el PI esta semana</a:t>
-            </a:r>
-          </a:p>
-        </p:txBody>
-      </p:sp>
-      <p:sp>
-        <p:nvSpPr>
-          <p:cNvPr id="5" name="Rounded Rectangle 4"/>
-          <p:cNvSpPr/>
-          <p:nvPr/>
-        </p:nvSpPr>
-        <p:spPr>
-          <a:xfrm>
-            <a:off x="457200" y="1261872"/>
-            <a:ext cx="11277295" cy="1051560"/>
-          </a:xfrm>
-          <a:prstGeom prst="roundRect">
-            <a:avLst>
-              <a:gd name="adj" fmla="val 12000"/>
-            </a:avLst>
-          </a:prstGeom>
-          <a:solidFill>
-            <a:srgbClr val="E8F4FA"/>
-          </a:solidFill>
-          <a:ln>
-            <a:noFill/>
-          </a:ln>
-        </p:spPr>
-        <p:style>
-          <a:lnRef idx="1">
-            <a:schemeClr val="accent1"/>
-          </a:lnRef>
-          <a:fillRef idx="3">
-            <a:schemeClr val="accent1"/>
-          </a:fillRef>
-          <a:effectRef idx="2">
-            <a:schemeClr val="accent1"/>
-          </a:effectRef>
-          <a:fontRef idx="minor">
-            <a:schemeClr val="lt1"/>
-          </a:fontRef>
-        </p:style>
-        <p:txBody>
-          <a:bodyPr rtlCol="0" anchor="ctr"/>
-          <a:lstStyle/>
-          <a:p>
-            <a:pPr algn="ctr"/>
-          </a:p>
-        </p:txBody>
-      </p:sp>
-      <p:sp>
-        <p:nvSpPr>
-          <p:cNvPr id="6" name="Rectangle 5"/>
-          <p:cNvSpPr/>
-          <p:nvPr/>
-        </p:nvSpPr>
-        <p:spPr>
-          <a:xfrm>
-            <a:off x="457200" y="1261872"/>
-            <a:ext cx="128016" cy="1051560"/>
-          </a:xfrm>
-          <a:prstGeom prst="rect">
-            <a:avLst/>
-          </a:prstGeom>
-          <a:solidFill>
-            <a:srgbClr val="269CCB"/>
-          </a:solidFill>
-          <a:ln>
-            <a:noFill/>
-          </a:ln>
-        </p:spPr>
-        <p:style>
-          <a:lnRef idx="1">
-            <a:schemeClr val="accent1"/>
-          </a:lnRef>
-          <a:fillRef idx="3">
-            <a:schemeClr val="accent1"/>
-          </a:fillRef>
-          <a:effectRef idx="2">
-            <a:schemeClr val="accent1"/>
-          </a:effectRef>
-          <a:fontRef idx="minor">
-            <a:schemeClr val="lt1"/>
-          </a:fontRef>
-        </p:style>
-        <p:txBody>
-          <a:bodyPr rtlCol="0" anchor="ctr"/>
-          <a:lstStyle/>
-          <a:p>
-            <a:pPr algn="ctr"/>
-          </a:p>
-        </p:txBody>
-      </p:sp>
-      <p:sp>
-        <p:nvSpPr>
-          <p:cNvPr id="7" name="TextBox 6"/>
-          <p:cNvSpPr txBox="1"/>
-          <p:nvPr/>
-        </p:nvSpPr>
-        <p:spPr>
-          <a:xfrm>
-            <a:off x="777240" y="1399031"/>
-            <a:ext cx="10774375" cy="822959"/>
-          </a:xfrm>
-          <a:prstGeom prst="rect">
-            <a:avLst/>
-          </a:prstGeom>
-          <a:noFill/>
-        </p:spPr>
-        <p:txBody>
-          <a:bodyPr wrap="square">
-            <a:spAutoFit/>
-          </a:bodyPr>
-          <a:lstStyle/>
-          <a:p>
-            <a:r>
-              <a:rPr sz="1200" b="1" i="0">
-                <a:solidFill>
-                  <a:srgbClr val="269CCB"/>
-                </a:solidFill>
-                <a:latin typeface="Calibri"/>
-              </a:rPr>
-              <a:t>Info</a:t>
-            </a:r>
-          </a:p>
-          <a:p>
-            <a:pPr>
-              <a:spcBef>
-                <a:spcPts val="400"/>
-              </a:spcBef>
-            </a:pPr>
-            <a:r>
-              <a:rPr sz="1400" b="0" i="0">
-                <a:solidFill>
-                  <a:srgbClr val="333333"/>
-                </a:solidFill>
-                <a:latin typeface="Calibri"/>
-              </a:rPr>
-              <a:t>Hito: Queda listo el backlog inicial de VetCare: dos epicas descompuestas en ocho historias priorizadas, con criterios de aceptacion y talla en puntos.</a:t>
-            </a:r>
-          </a:p>
-        </p:txBody>
-      </p:sp>
-      <p:sp>
-        <p:nvSpPr>
-          <p:cNvPr id="8" name="Rounded Rectangle 7"/>
-          <p:cNvSpPr/>
-          <p:nvPr/>
-        </p:nvSpPr>
-        <p:spPr>
-          <a:xfrm>
-            <a:off x="457200" y="2478024"/>
-            <a:ext cx="11277295" cy="1051560"/>
-          </a:xfrm>
-          <a:prstGeom prst="roundRect">
-            <a:avLst>
-              <a:gd name="adj" fmla="val 12000"/>
-            </a:avLst>
-          </a:prstGeom>
-          <a:solidFill>
-            <a:srgbClr val="FFF8E1"/>
-          </a:solidFill>
-          <a:ln>
-            <a:noFill/>
-          </a:ln>
-        </p:spPr>
-        <p:style>
-          <a:lnRef idx="1">
-            <a:schemeClr val="accent1"/>
-          </a:lnRef>
-          <a:fillRef idx="3">
-            <a:schemeClr val="accent1"/>
-          </a:fillRef>
-          <a:effectRef idx="2">
-            <a:schemeClr val="accent1"/>
-          </a:effectRef>
-          <a:fontRef idx="minor">
-            <a:schemeClr val="lt1"/>
-          </a:fontRef>
-        </p:style>
-        <p:txBody>
-          <a:bodyPr rtlCol="0" anchor="ctr"/>
-          <a:lstStyle/>
-          <a:p>
-            <a:pPr algn="ctr"/>
-          </a:p>
-        </p:txBody>
-      </p:sp>
-      <p:sp>
-        <p:nvSpPr>
-          <p:cNvPr id="9" name="Rectangle 8"/>
-          <p:cNvSpPr/>
-          <p:nvPr/>
-        </p:nvSpPr>
-        <p:spPr>
-          <a:xfrm>
-            <a:off x="457200" y="2478024"/>
-            <a:ext cx="128016" cy="1051560"/>
-          </a:xfrm>
-          <a:prstGeom prst="rect">
-            <a:avLst/>
-          </a:prstGeom>
-          <a:solidFill>
-            <a:srgbClr val="FFD000"/>
-          </a:solidFill>
-          <a:ln>
-            <a:noFill/>
-          </a:ln>
-        </p:spPr>
-        <p:style>
-          <a:lnRef idx="1">
-            <a:schemeClr val="accent1"/>
-          </a:lnRef>
-          <a:fillRef idx="3">
-            <a:schemeClr val="accent1"/>
-          </a:fillRef>
-          <a:effectRef idx="2">
-            <a:schemeClr val="accent1"/>
-          </a:effectRef>
-          <a:fontRef idx="minor">
-            <a:schemeClr val="lt1"/>
-          </a:fontRef>
-        </p:style>
-        <p:txBody>
-          <a:bodyPr rtlCol="0" anchor="ctr"/>
-          <a:lstStyle/>
-          <a:p>
-            <a:pPr algn="ctr"/>
-          </a:p>
-        </p:txBody>
-      </p:sp>
-      <p:sp>
-        <p:nvSpPr>
-          <p:cNvPr id="10" name="TextBox 9"/>
-          <p:cNvSpPr txBox="1"/>
-          <p:nvPr/>
-        </p:nvSpPr>
-        <p:spPr>
-          <a:xfrm>
-            <a:off x="777240" y="2615184"/>
-            <a:ext cx="10774375" cy="822959"/>
-          </a:xfrm>
-          <a:prstGeom prst="rect">
-            <a:avLst/>
-          </a:prstGeom>
-          <a:noFill/>
-        </p:spPr>
-        <p:txBody>
-          <a:bodyPr wrap="square">
-            <a:spAutoFit/>
-          </a:bodyPr>
-          <a:lstStyle/>
-          <a:p>
-            <a:r>
-              <a:rPr sz="1200" b="1" i="0">
-                <a:solidFill>
-                  <a:srgbClr val="FFD000"/>
-                </a:solidFill>
-                <a:latin typeface="Calibri"/>
-              </a:rPr>
-              <a:t>Aclaración</a:t>
-            </a:r>
-          </a:p>
-          <a:p>
-            <a:pPr>
-              <a:spcBef>
-                <a:spcPts val="400"/>
-              </a:spcBef>
-            </a:pPr>
-            <a:r>
-              <a:rPr sz="1400" b="0" i="0">
-                <a:solidFill>
-                  <a:srgbClr val="333333"/>
-                </a:solidFill>
-                <a:latin typeface="Calibri"/>
-              </a:rPr>
-              <a:t>Enunciado completo: Clases/Proyecto Integrador/ (VetCare).</a:t>
-            </a:r>
-          </a:p>
-        </p:txBody>
-      </p:sp>
-      <p:sp>
-        <p:nvSpPr>
-          <p:cNvPr id="11" name="Rounded Rectangle 10"/>
-          <p:cNvSpPr/>
-          <p:nvPr/>
-        </p:nvSpPr>
-        <p:spPr>
-          <a:xfrm>
-            <a:off x="457200" y="3694176"/>
-            <a:ext cx="11277295" cy="1051560"/>
-          </a:xfrm>
-          <a:prstGeom prst="roundRect">
-            <a:avLst>
-              <a:gd name="adj" fmla="val 12000"/>
-            </a:avLst>
-          </a:prstGeom>
-          <a:solidFill>
-            <a:srgbClr val="FBE4E4"/>
-          </a:solidFill>
-          <a:ln>
-            <a:noFill/>
-          </a:ln>
-        </p:spPr>
-        <p:style>
-          <a:lnRef idx="1">
-            <a:schemeClr val="accent1"/>
-          </a:lnRef>
-          <a:fillRef idx="3">
-            <a:schemeClr val="accent1"/>
-          </a:fillRef>
-          <a:effectRef idx="2">
-            <a:schemeClr val="accent1"/>
-          </a:effectRef>
-          <a:fontRef idx="minor">
-            <a:schemeClr val="lt1"/>
-          </a:fontRef>
-        </p:style>
-        <p:txBody>
-          <a:bodyPr rtlCol="0" anchor="ctr"/>
-          <a:lstStyle/>
-          <a:p>
-            <a:pPr algn="ctr"/>
-          </a:p>
-        </p:txBody>
-      </p:sp>
-      <p:sp>
-        <p:nvSpPr>
-          <p:cNvPr id="12" name="Rectangle 11"/>
-          <p:cNvSpPr/>
-          <p:nvPr/>
-        </p:nvSpPr>
-        <p:spPr>
-          <a:xfrm>
-            <a:off x="457200" y="3694176"/>
-            <a:ext cx="128016" cy="1051560"/>
-          </a:xfrm>
-          <a:prstGeom prst="rect">
-            <a:avLst/>
-          </a:prstGeom>
-          <a:solidFill>
-            <a:srgbClr val="A02030"/>
-          </a:solidFill>
-          <a:ln>
-            <a:noFill/>
-          </a:ln>
-        </p:spPr>
-        <p:style>
-          <a:lnRef idx="1">
-            <a:schemeClr val="accent1"/>
-          </a:lnRef>
-          <a:fillRef idx="3">
-            <a:schemeClr val="accent1"/>
-          </a:fillRef>
-          <a:effectRef idx="2">
-            <a:schemeClr val="accent1"/>
-          </a:effectRef>
-          <a:fontRef idx="minor">
-            <a:schemeClr val="lt1"/>
-          </a:fontRef>
-        </p:style>
-        <p:txBody>
-          <a:bodyPr rtlCol="0" anchor="ctr"/>
-          <a:lstStyle/>
-          <a:p>
-            <a:pPr algn="ctr"/>
-          </a:p>
-        </p:txBody>
-      </p:sp>
-      <p:sp>
-        <p:nvSpPr>
-          <p:cNvPr id="13" name="TextBox 12"/>
-          <p:cNvSpPr txBox="1"/>
-          <p:nvPr/>
-        </p:nvSpPr>
-        <p:spPr>
-          <a:xfrm>
-            <a:off x="777240" y="3831336"/>
-            <a:ext cx="10774375" cy="822959"/>
-          </a:xfrm>
-          <a:prstGeom prst="rect">
-            <a:avLst/>
-          </a:prstGeom>
-          <a:noFill/>
-        </p:spPr>
-        <p:txBody>
-          <a:bodyPr wrap="square">
-            <a:spAutoFit/>
-          </a:bodyPr>
-          <a:lstStyle/>
-          <a:p>
-            <a:r>
-              <a:rPr sz="1200" b="1" i="0">
-                <a:solidFill>
-                  <a:srgbClr val="A02030"/>
-                </a:solidFill>
-                <a:latin typeface="Calibri"/>
-              </a:rPr>
-              <a:t>Atención</a:t>
-            </a:r>
-          </a:p>
-          <a:p>
-            <a:pPr>
-              <a:spcBef>
-                <a:spcPts val="400"/>
-              </a:spcBef>
-            </a:pPr>
-            <a:r>
-              <a:rPr sz="1400" b="0" i="0">
-                <a:solidFill>
-                  <a:srgbClr val="333333"/>
-                </a:solidFill>
-                <a:latin typeface="Calibri"/>
-              </a:rPr>
-              <a:t>Entrega del taller, si el docente lo asigna · en la fecha que indique el docente.</a:t>
-            </a:r>
-          </a:p>
-        </p:txBody>
-      </p:sp>
-      <p:sp>
-        <p:nvSpPr>
-          <p:cNvPr id="14" name="TextBox 13"/>
-          <p:cNvSpPr txBox="1"/>
-          <p:nvPr/>
-        </p:nvSpPr>
-        <p:spPr>
-          <a:xfrm>
-            <a:off x="11185855" y="6473952"/>
-            <a:ext cx="640080" cy="274320"/>
-          </a:xfrm>
-          <a:prstGeom prst="rect">
-            <a:avLst/>
-          </a:prstGeom>
-          <a:noFill/>
-        </p:spPr>
-        <p:txBody>
-          <a:bodyPr wrap="square">
-            <a:spAutoFit/>
-          </a:bodyPr>
-          <a:lstStyle/>
-          <a:p>
-            <a:pPr algn="r"/>
-            <a:r>
-              <a:rPr sz="1100" b="0" i="0">
-                <a:solidFill>
-                  <a:srgbClr val="666666"/>
-                </a:solidFill>
-                <a:latin typeface="Calibri"/>
-              </a:rPr>
-              <a:t>24</a:t>
-            </a:r>
-          </a:p>
-        </p:txBody>
-      </p:sp>
-    </p:spTree>
-  </p:cSld>
-  <p:clrMapOvr>
-    <a:masterClrMapping/>
-  </p:clrMapOvr>
-</p:sld>
-</file>
-
-<file path=ppt/slides/slide25.xml><?xml version="1.0" encoding="utf-8"?>
-<p:sld xmlns:a="http://schemas.openxmlformats.org/drawingml/2006/main" xmlns:p="http://schemas.openxmlformats.org/presentationml/2006/main" xmlns:r="http://schemas.openxmlformats.org/officeDocument/2006/relationships">
-  <p:cSld>
-    <p:bg>
-      <p:bgPr>
-        <a:solidFill>
-          <a:srgbClr val="FFFFFF"/>
-        </a:solidFill>
-        <a:effectLst/>
-      </p:bgPr>
-    </p:bg>
-    <p:spTree>
-      <p:nvGrpSpPr>
-        <p:cNvPr id="1" name=""/>
-        <p:cNvGrpSpPr/>
-        <p:nvPr/>
-      </p:nvGrpSpPr>
-      <p:grpSpPr/>
-      <p:sp>
-        <p:nvSpPr>
-          <p:cNvPr id="2" name="Rectangle 1"/>
-          <p:cNvSpPr/>
-          <p:nvPr/>
-        </p:nvSpPr>
-        <p:spPr>
-          <a:xfrm>
-            <a:off x="0" y="0"/>
-            <a:ext cx="12191695" cy="164592"/>
-          </a:xfrm>
-          <a:prstGeom prst="rect">
-            <a:avLst/>
-          </a:prstGeom>
-          <a:solidFill>
-            <a:srgbClr val="269CCB"/>
-          </a:solidFill>
-          <a:ln>
-            <a:noFill/>
-          </a:ln>
-        </p:spPr>
-        <p:style>
-          <a:lnRef idx="1">
-            <a:schemeClr val="accent1"/>
-          </a:lnRef>
-          <a:fillRef idx="3">
-            <a:schemeClr val="accent1"/>
-          </a:fillRef>
-          <a:effectRef idx="2">
-            <a:schemeClr val="accent1"/>
-          </a:effectRef>
-          <a:fontRef idx="minor">
-            <a:schemeClr val="lt1"/>
-          </a:fontRef>
-        </p:style>
-        <p:txBody>
-          <a:bodyPr rtlCol="0" anchor="ctr"/>
-          <a:lstStyle/>
-          <a:p>
-            <a:pPr algn="ctr"/>
-          </a:p>
-        </p:txBody>
-      </p:sp>
-      <p:pic>
-        <p:nvPicPr>
-          <p:cNvPr id="3" name="Picture 2" descr="logo_uniajc_color.png"/>
-          <p:cNvPicPr>
-            <a:picLocks noChangeAspect="1"/>
-          </p:cNvPicPr>
-          <p:nvPr/>
-        </p:nvPicPr>
-        <p:blipFill>
-          <a:blip r:embed="rId2"/>
-          <a:stretch>
-            <a:fillRect/>
-          </a:stretch>
-        </p:blipFill>
-        <p:spPr>
-          <a:xfrm>
-            <a:off x="10271455" y="5998464"/>
-            <a:ext cx="1463040" cy="643233"/>
-          </a:xfrm>
-          <a:prstGeom prst="rect">
-            <a:avLst/>
-          </a:prstGeom>
-        </p:spPr>
-      </p:pic>
-      <p:sp>
-        <p:nvSpPr>
-          <p:cNvPr id="4" name="TextBox 3"/>
-          <p:cNvSpPr txBox="1"/>
-          <p:nvPr/>
-        </p:nvSpPr>
-        <p:spPr>
-          <a:xfrm>
-            <a:off x="457200" y="1737360"/>
-            <a:ext cx="11277295" cy="1097280"/>
-          </a:xfrm>
-          <a:prstGeom prst="rect">
-            <a:avLst/>
-          </a:prstGeom>
-          <a:noFill/>
-        </p:spPr>
-        <p:txBody>
-          <a:bodyPr wrap="square" anchor="ctr"/>
-          <a:lstStyle/>
-          <a:p>
-            <a:pPr algn="ctr"/>
-            <a:r>
-              <a:rPr sz="3400" b="1" i="0">
-                <a:solidFill>
-                  <a:srgbClr val="095292"/>
-                </a:solidFill>
-                <a:latin typeface="Calibri"/>
-              </a:rPr>
-              <a:t>Clase 7 · VetCare avanza</a:t>
-            </a:r>
-          </a:p>
-        </p:txBody>
-      </p:sp>
-      <p:sp>
-        <p:nvSpPr>
-          <p:cNvPr id="5" name="TextBox 4"/>
-          <p:cNvSpPr txBox="1"/>
-          <p:nvPr/>
-        </p:nvSpPr>
-        <p:spPr>
-          <a:xfrm>
-            <a:off x="457200" y="3017520"/>
-            <a:ext cx="11277295" cy="1645920"/>
-          </a:xfrm>
-          <a:prstGeom prst="rect">
-            <a:avLst/>
-          </a:prstGeom>
-          <a:noFill/>
-        </p:spPr>
-        <p:txBody>
-          <a:bodyPr wrap="square">
-            <a:spAutoFit/>
-          </a:bodyPr>
-          <a:lstStyle/>
-          <a:p>
-            <a:pPr algn="ctr">
-              <a:spcAft>
-                <a:spcPts val="600"/>
-              </a:spcAft>
-            </a:pPr>
-            <a:r>
-              <a:rPr sz="1600" b="0" i="0">
-                <a:solidFill>
-                  <a:srgbClr val="333333"/>
-                </a:solidFill>
-                <a:latin typeface="Calibri"/>
-              </a:rPr>
-              <a:t>Queda listo el backlog inicial de VetCare: dos epicas descompuestas en ocho historias priorizadas, con criterios de aceptacion y talla en puntos.</a:t>
-            </a:r>
-          </a:p>
-          <a:p>
-            <a:pPr algn="ctr">
-              <a:spcAft>
-                <a:spcPts val="600"/>
-              </a:spcAft>
-            </a:pPr>
-            <a:r>
-              <a:rPr sz="1600" b="0" i="0">
-                <a:solidFill>
-                  <a:srgbClr val="333333"/>
-                </a:solidFill>
-                <a:latin typeface="Calibri"/>
-              </a:rPr>
-              <a:t>Entregable: Tablero de backlog con 8 historias en formato Como/quiero/para, cada una con 2 o 3 criterios de aceptacion en Dado-Cuando-Entonces, estimacion en puntos y trazabilidad al RF de la clase 6, subido a la plataforma del curso.</a:t>
-            </a:r>
-          </a:p>
-          <a:p>
-            <a:pPr algn="ctr">
-              <a:spcAft>
-                <a:spcPts val="600"/>
-              </a:spcAft>
-            </a:pPr>
-            <a:r>
-              <a:rPr sz="1600" b="0" i="0">
-                <a:solidFill>
-                  <a:srgbClr val="333333"/>
-                </a:solidFill>
-                <a:latin typeface="Calibri"/>
-              </a:rPr>
-              <a:t>Siguiente clase: continuamos el hilo del PI</a:t>
-            </a:r>
-          </a:p>
-        </p:txBody>
-      </p:sp>
-      <p:sp>
-        <p:nvSpPr>
-          <p:cNvPr id="6" name="TextBox 5"/>
-          <p:cNvSpPr txBox="1"/>
-          <p:nvPr/>
-        </p:nvSpPr>
-        <p:spPr>
-          <a:xfrm>
-            <a:off x="457200" y="4754880"/>
-            <a:ext cx="11277295" cy="640080"/>
-          </a:xfrm>
-          <a:prstGeom prst="rect">
-            <a:avLst/>
-          </a:prstGeom>
-          <a:noFill/>
-        </p:spPr>
-        <p:txBody>
-          <a:bodyPr wrap="square">
-            <a:spAutoFit/>
-          </a:bodyPr>
-          <a:lstStyle/>
-          <a:p>
-            <a:pPr algn="ctr"/>
-            <a:r>
-              <a:rPr sz="2000" b="1" i="0">
-                <a:solidFill>
-                  <a:srgbClr val="269CCB"/>
-                </a:solidFill>
-                <a:latin typeface="Calibri"/>
-              </a:rPr>
-              <a:t>Teoria al servicio del proyecto</a:t>
             </a:r>
           </a:p>
         </p:txBody>
@@ -11278,7 +7905,7 @@
                 </a:solidFill>
                 <a:latin typeface="Calibri"/>
               </a:rPr>
-              <a:t>Encuadre y repaso del avance</a:t>
+              <a:t>Encuadre y repaso</a:t>
             </a:r>
           </a:p>
         </p:txBody>
@@ -11623,7 +8250,7 @@
                 </a:solidFill>
                 <a:latin typeface="Calibri"/>
               </a:rPr>
-              <a:t>Taller guiado = avance del PI</a:t>
+              <a:t>Practica (opcional, guia en la carpeta)</a:t>
             </a:r>
           </a:p>
         </p:txBody>
@@ -11738,7 +8365,7 @@
                 </a:solidFill>
                 <a:latin typeface="Calibri"/>
               </a:rPr>
-              <a:t>Criterios de exito y cierre</a:t>
+              <a:t>Sintesis y cierre</a:t>
             </a:r>
           </a:p>
         </p:txBody>
@@ -13765,4 +10392,324 @@
   </a:objectDefaults>
   <a:extraClrSchemeLst/>
 </a:theme>
+</file>
+
+<file path=ppt/theme/theme2.xml><?xml version="1.0" encoding="utf-8"?>
+<a:theme xmlns:a="http://schemas.openxmlformats.org/drawingml/2006/main" name="Office Theme">
+  <a:themeElements>
+    <a:clrScheme name="Office">
+      <a:dk1>
+        <a:sysClr val="windowText" lastClr="000000"/>
+      </a:dk1>
+      <a:lt1>
+        <a:sysClr val="window" lastClr="FFFFFF"/>
+      </a:lt1>
+      <a:dk2>
+        <a:srgbClr val="1F497D"/>
+      </a:dk2>
+      <a:lt2>
+        <a:srgbClr val="EEECE1"/>
+      </a:lt2>
+      <a:accent1>
+        <a:srgbClr val="4F81BD"/>
+      </a:accent1>
+      <a:accent2>
+        <a:srgbClr val="C0504D"/>
+      </a:accent2>
+      <a:accent3>
+        <a:srgbClr val="9BBB59"/>
+      </a:accent3>
+      <a:accent4>
+        <a:srgbClr val="8064A2"/>
+      </a:accent4>
+      <a:accent5>
+        <a:srgbClr val="4BACC6"/>
+      </a:accent5>
+      <a:accent6>
+        <a:srgbClr val="F79646"/>
+      </a:accent6>
+      <a:hlink>
+        <a:srgbClr val="0000FF"/>
+      </a:hlink>
+      <a:folHlink>
+        <a:srgbClr val="800080"/>
+      </a:folHlink>
+    </a:clrScheme>
+    <a:fontScheme name="Office">
+      <a:majorFont>
+        <a:latin typeface="Calibri"/>
+        <a:ea typeface=""/>
+        <a:cs typeface=""/>
+        <a:font script="Jpan" typeface="ＭＳ Ｐゴシック"/>
+        <a:font script="Hang" typeface="맑은 고딕"/>
+        <a:font script="Hans" typeface="宋体"/>
+        <a:font script="Hant" typeface="新細明體"/>
+        <a:font script="Arab" typeface="Times New Roman"/>
+        <a:font script="Hebr" typeface="Times New Roman"/>
+        <a:font script="Thai" typeface="Angsana New"/>
+        <a:font script="Ethi" typeface="Nyala"/>
+        <a:font script="Beng" typeface="Vrinda"/>
+        <a:font script="Gujr" typeface="Shruti"/>
+        <a:font script="Khmr" typeface="MoolBoran"/>
+        <a:font script="Knda" typeface="Tunga"/>
+        <a:font script="Guru" typeface="Raavi"/>
+        <a:font script="Cans" typeface="Euphemia"/>
+        <a:font script="Cher" typeface="Plantagenet Cherokee"/>
+        <a:font script="Yiii" typeface="Microsoft Yi Baiti"/>
+        <a:font script="Tibt" typeface="Microsoft Himalaya"/>
+        <a:font script="Thaa" typeface="MV Boli"/>
+        <a:font script="Deva" typeface="Mangal"/>
+        <a:font script="Telu" typeface="Gautami"/>
+        <a:font script="Taml" typeface="Latha"/>
+        <a:font script="Syrc" typeface="Estrangelo Edessa"/>
+        <a:font script="Orya" typeface="Kalinga"/>
+        <a:font script="Mlym" typeface="Kartika"/>
+        <a:font script="Laoo" typeface="DokChampa"/>
+        <a:font script="Sinh" typeface="Iskoola Pota"/>
+        <a:font script="Mong" typeface="Mongolian Baiti"/>
+        <a:font script="Viet" typeface="Times New Roman"/>
+        <a:font script="Uigh" typeface="Microsoft Uighur"/>
+        <a:font script="Geor" typeface="Sylfaen"/>
+      </a:majorFont>
+      <a:minorFont>
+        <a:latin typeface="Calibri"/>
+        <a:ea typeface=""/>
+        <a:cs typeface=""/>
+        <a:font script="Jpan" typeface="ＭＳ Ｐゴシック"/>
+        <a:font script="Hang" typeface="맑은 고딕"/>
+        <a:font script="Hans" typeface="宋体"/>
+        <a:font script="Hant" typeface="新細明體"/>
+        <a:font script="Arab" typeface="Arial"/>
+        <a:font script="Hebr" typeface="Arial"/>
+        <a:font script="Thai" typeface="Cordia New"/>
+        <a:font script="Ethi" typeface="Nyala"/>
+        <a:font script="Beng" typeface="Vrinda"/>
+        <a:font script="Gujr" typeface="Shruti"/>
+        <a:font script="Khmr" typeface="DaunPenh"/>
+        <a:font script="Knda" typeface="Tunga"/>
+        <a:font script="Guru" typeface="Raavi"/>
+        <a:font script="Cans" typeface="Euphemia"/>
+        <a:font script="Cher" typeface="Plantagenet Cherokee"/>
+        <a:font script="Yiii" typeface="Microsoft Yi Baiti"/>
+        <a:font script="Tibt" typeface="Microsoft Himalaya"/>
+        <a:font script="Thaa" typeface="MV Boli"/>
+        <a:font script="Deva" typeface="Mangal"/>
+        <a:font script="Telu" typeface="Gautami"/>
+        <a:font script="Taml" typeface="Latha"/>
+        <a:font script="Syrc" typeface="Estrangelo Edessa"/>
+        <a:font script="Orya" typeface="Kalinga"/>
+        <a:font script="Mlym" typeface="Kartika"/>
+        <a:font script="Laoo" typeface="DokChampa"/>
+        <a:font script="Sinh" typeface="Iskoola Pota"/>
+        <a:font script="Mong" typeface="Mongolian Baiti"/>
+        <a:font script="Viet" typeface="Arial"/>
+        <a:font script="Uigh" typeface="Microsoft Uighur"/>
+        <a:font script="Geor" typeface="Sylfaen"/>
+      </a:minorFont>
+    </a:fontScheme>
+    <a:fmtScheme name="Office">
+      <a:fillStyleLst>
+        <a:solidFill>
+          <a:schemeClr val="phClr"/>
+        </a:solidFill>
+        <a:gradFill rotWithShape="1">
+          <a:gsLst>
+            <a:gs pos="0">
+              <a:schemeClr val="phClr">
+                <a:tint val="50000"/>
+                <a:satMod val="300000"/>
+              </a:schemeClr>
+            </a:gs>
+            <a:gs pos="35000">
+              <a:schemeClr val="phClr">
+                <a:tint val="37000"/>
+                <a:satMod val="300000"/>
+              </a:schemeClr>
+            </a:gs>
+            <a:gs pos="100000">
+              <a:schemeClr val="phClr">
+                <a:tint val="15000"/>
+                <a:satMod val="350000"/>
+              </a:schemeClr>
+            </a:gs>
+          </a:gsLst>
+          <a:lin ang="16200000" scaled="1"/>
+        </a:gradFill>
+        <a:gradFill rotWithShape="1">
+          <a:gsLst>
+            <a:gs pos="0">
+              <a:schemeClr val="phClr">
+                <a:tint val="100000"/>
+                <a:shade val="100000"/>
+                <a:satMod val="130000"/>
+              </a:schemeClr>
+            </a:gs>
+            <a:gs pos="100000">
+              <a:schemeClr val="phClr">
+                <a:tint val="50000"/>
+                <a:shade val="100000"/>
+                <a:satMod val="350000"/>
+              </a:schemeClr>
+            </a:gs>
+          </a:gsLst>
+          <a:lin ang="16200000" scaled="0"/>
+        </a:gradFill>
+      </a:fillStyleLst>
+      <a:lnStyleLst>
+        <a:ln w="9525" cap="flat" cmpd="sng" algn="ctr">
+          <a:solidFill>
+            <a:schemeClr val="phClr">
+              <a:shade val="95000"/>
+              <a:satMod val="105000"/>
+            </a:schemeClr>
+          </a:solidFill>
+          <a:prstDash val="solid"/>
+        </a:ln>
+        <a:ln w="25400" cap="flat" cmpd="sng" algn="ctr">
+          <a:solidFill>
+            <a:schemeClr val="phClr"/>
+          </a:solidFill>
+          <a:prstDash val="solid"/>
+        </a:ln>
+        <a:ln w="38100" cap="flat" cmpd="sng" algn="ctr">
+          <a:solidFill>
+            <a:schemeClr val="phClr"/>
+          </a:solidFill>
+          <a:prstDash val="solid"/>
+        </a:ln>
+      </a:lnStyleLst>
+      <a:effectStyleLst>
+        <a:effectStyle>
+          <a:effectLst>
+            <a:outerShdw blurRad="40000" dist="20000" dir="5400000" rotWithShape="0">
+              <a:srgbClr val="000000">
+                <a:alpha val="38000"/>
+              </a:srgbClr>
+            </a:outerShdw>
+          </a:effectLst>
+        </a:effectStyle>
+        <a:effectStyle>
+          <a:effectLst>
+            <a:outerShdw blurRad="40000" dist="23000" dir="5400000" rotWithShape="0">
+              <a:srgbClr val="000000">
+                <a:alpha val="35000"/>
+              </a:srgbClr>
+            </a:outerShdw>
+          </a:effectLst>
+        </a:effectStyle>
+        <a:effectStyle>
+          <a:effectLst>
+            <a:outerShdw blurRad="40000" dist="23000" dir="5400000" rotWithShape="0">
+              <a:srgbClr val="000000">
+                <a:alpha val="35000"/>
+              </a:srgbClr>
+            </a:outerShdw>
+          </a:effectLst>
+          <a:scene3d>
+            <a:camera prst="orthographicFront">
+              <a:rot lat="0" lon="0" rev="0"/>
+            </a:camera>
+            <a:lightRig rig="threePt" dir="t">
+              <a:rot lat="0" lon="0" rev="1200000"/>
+            </a:lightRig>
+          </a:scene3d>
+          <a:sp3d>
+            <a:bevelT w="63500" h="25400"/>
+          </a:sp3d>
+        </a:effectStyle>
+      </a:effectStyleLst>
+      <a:bgFillStyleLst>
+        <a:solidFill>
+          <a:schemeClr val="phClr"/>
+        </a:solidFill>
+        <a:gradFill rotWithShape="1">
+          <a:gsLst>
+            <a:gs pos="0">
+              <a:schemeClr val="phClr">
+                <a:tint val="40000"/>
+                <a:satMod val="350000"/>
+              </a:schemeClr>
+            </a:gs>
+            <a:gs pos="40000">
+              <a:schemeClr val="phClr">
+                <a:tint val="45000"/>
+                <a:shade val="99000"/>
+                <a:satMod val="350000"/>
+              </a:schemeClr>
+            </a:gs>
+            <a:gs pos="100000">
+              <a:schemeClr val="phClr">
+                <a:shade val="20000"/>
+                <a:satMod val="255000"/>
+              </a:schemeClr>
+            </a:gs>
+          </a:gsLst>
+          <a:path path="circle">
+            <a:fillToRect l="50000" t="-80000" r="50000" b="180000"/>
+          </a:path>
+        </a:gradFill>
+        <a:gradFill rotWithShape="1">
+          <a:gsLst>
+            <a:gs pos="0">
+              <a:schemeClr val="phClr">
+                <a:tint val="80000"/>
+                <a:satMod val="300000"/>
+              </a:schemeClr>
+            </a:gs>
+            <a:gs pos="100000">
+              <a:schemeClr val="phClr">
+                <a:shade val="30000"/>
+                <a:satMod val="200000"/>
+              </a:schemeClr>
+            </a:gs>
+          </a:gsLst>
+          <a:path path="circle">
+            <a:fillToRect l="50000" t="50000" r="50000" b="50000"/>
+          </a:path>
+        </a:gradFill>
+      </a:bgFillStyleLst>
+    </a:fmtScheme>
+  </a:themeElements>
+  <a:objectDefaults>
+    <a:spDef>
+      <a:spPr/>
+      <a:bodyPr/>
+      <a:lstStyle/>
+      <a:style>
+        <a:lnRef idx="1">
+          <a:schemeClr val="accent1"/>
+        </a:lnRef>
+        <a:fillRef idx="3">
+          <a:schemeClr val="accent1"/>
+        </a:fillRef>
+        <a:effectRef idx="2">
+          <a:schemeClr val="accent1"/>
+        </a:effectRef>
+        <a:fontRef idx="minor">
+          <a:schemeClr val="lt1"/>
+        </a:fontRef>
+      </a:style>
+    </a:spDef>
+    <a:lnDef>
+      <a:spPr/>
+      <a:bodyPr/>
+      <a:lstStyle/>
+      <a:style>
+        <a:lnRef idx="2">
+          <a:schemeClr val="accent1"/>
+        </a:lnRef>
+        <a:fillRef idx="0">
+          <a:schemeClr val="accent1"/>
+        </a:fillRef>
+        <a:effectRef idx="1">
+          <a:schemeClr val="accent1"/>
+        </a:effectRef>
+        <a:fontRef idx="minor">
+          <a:schemeClr val="tx1"/>
+        </a:fontRef>
+      </a:style>
+    </a:lnDef>
+  </a:objectDefaults>
+  <a:extraClrSchemeLst/>
+</a:theme>
 </file>
--- a/Seminario de Sistemas/Clases/Clase 7 - Historias de usuario/Presentacion.pptx
+++ b/Seminario de Sistemas/Clases/Clase 7 - Historias de usuario/Presentacion.pptx
@@ -4550,7 +4550,23 @@
                 </a:solidFill>
                 <a:latin typeface="Calibri"/>
               </a:rPr>
-              <a:t>–   En VetCare la epica Historial clinico se parte en: consultar historial por documento del dueno, registrar una atencion nueva, adjuntar resultados de laboratorio y filtrar el historial por rango de fechas; cada una entregable y demostrable por separado.</a:t>
+              <a:t>–   En el sistema de la clinica la epica Historial clinico se parte en: consultar historial por documento del dueno, registrar una atencion nueva</a:t>
+            </a:r>
+          </a:p>
+          <a:p>
+            <a:pPr>
+              <a:spcAft>
+                <a:spcPts val="800"/>
+              </a:spcAft>
+            </a:pPr>
+            <a:r>
+              <a:rPr sz="2000" b="0" i="0">
+                <a:solidFill>
+                  <a:srgbClr val="333333"/>
+                </a:solidFill>
+                <a:latin typeface="Calibri"/>
+              </a:rPr>
+              <a:t>–   Adjuntar resultados de laboratorio y filtrar el historial por rango de fechas; cada una terminable y demostrable por separado.</a:t>
             </a:r>
           </a:p>
           <a:p>
@@ -5054,7 +5070,7 @@
                 </a:solidFill>
                 <a:latin typeface="Calibri"/>
               </a:rPr>
-              <a:t>–   En el Proyecto Integrador este backlog es la lista de trabajo que se le entrega al companero de Programacion II para que sepa por donde empezar</a:t>
+              <a:t>–   En un proyecto real este backlog es la lista de trabajo que se le entrega al companero de Programacion II para que sepa por donde empezar</a:t>
             </a:r>
           </a:p>
           <a:p>
@@ -6538,7 +6554,7 @@
                 </a:solidFill>
                 <a:latin typeface="Calibri"/>
               </a:rPr>
-              <a:t>Como veterinario de la clinica Huellitas</a:t>
+              <a:t>Como veterinario de la clinica</a:t>
             </a:r>
           </a:p>
           <a:p>
@@ -7021,7 +7037,7 @@
                 </a:solidFill>
                 <a:latin typeface="Calibri"/>
               </a:rPr>
-              <a:t>–   Mismo dominio VetCare — no otro ejemplo. Aqui se diseña, no se programa.</a:t>
+              <a:t>–   Mismo dominio: la clinica veterinaria — no otro ejemplo. Aqui se diseña, no se programa.</a:t>
             </a:r>
           </a:p>
         </p:txBody>
@@ -7566,7 +7582,7 @@
                 </a:solidFill>
                 <a:latin typeface="Calibri"/>
               </a:rPr>
-              <a:t>–   Ejemplo de toda la clase: VetCare, el sistema de la clinica «Huellitas».</a:t>
+              <a:t>–   Ejemplo de toda la clase: el sistema de una clinica veterinaria.</a:t>
             </a:r>
           </a:p>
         </p:txBody>
@@ -8135,7 +8151,7 @@
                 </a:solidFill>
                 <a:latin typeface="Calibri"/>
               </a:rPr>
-              <a:t>Demo en vivo sobre VetCare</a:t>
+              <a:t>Demo en vivo sobre la clinica</a:t>
             </a:r>
           </a:p>
         </p:txBody>
@@ -8922,7 +8938,7 @@
                 </a:solidFill>
                 <a:latin typeface="Calibri"/>
               </a:rPr>
-              <a:t>–   En VetCare, Como auxiliar quiero buscar la ficha de una mascota por el documento del dueno para no revolver la carpeta fisica mientras el paciente espera en el meson se entiende sin traduccion</a:t>
+              <a:t>–   En el sistema de la clinica, Como auxiliar quiero buscar la ficha de una mascota por el documento del dueno para no revolver la carpeta fisica mientras el paciente espera en el meson se entiende sin traduccion</a:t>
             </a:r>
           </a:p>
           <a:p>
@@ -9206,7 +9222,7 @@
                 </a:solidFill>
                 <a:latin typeface="Calibri"/>
               </a:rPr>
-              <a:t>–   Los criterios de aceptacion son la parte que convierte una historia bonita en una historia entregable, y se escriben en el patron Dado &lt;contexto inicial&gt; Cuando &lt;accion del usuario&gt; Entonces &lt;resultado observable&gt;.</a:t>
+              <a:t>–   Los criterios de aceptacion son la parte que convierte una historia bonita en una historia verificable, y se escriben en el patron Dado &lt;contexto inicial&gt; Cuando &lt;accion del usuario&gt; Entonces &lt;resultado observable&gt;.</a:t>
             </a:r>
           </a:p>
           <a:p>
@@ -9238,7 +9254,7 @@
                 </a:solidFill>
                 <a:latin typeface="Calibri"/>
               </a:rPr>
-              <a:t>–   Para la historia de buscar el historial en VetCare los criterios serian: Dado un dueno con tres mascotas registradas, cuando busco por su documento, entonces el sistema lista las tres mascotas con nombre y especie</a:t>
+              <a:t>–   Para la historia de buscar el historial en el sistema de la clinica los criterios serian: Dado un dueno con tres mascotas registradas, cuando busco por su documento, entonces el sistema lista las tres mascotas con nombre y especie</a:t>
             </a:r>
           </a:p>
         </p:txBody>
@@ -9710,7 +9726,7 @@
                 </a:solidFill>
                 <a:latin typeface="Calibri"/>
               </a:rPr>
-              <a:t>–   INVEST es la lista de chequeo para saber si una historia esta bien cortada, y conviene revisarla letra por letra con VetCare en la mano.</a:t>
+              <a:t>–   INVEST es la lista de chequeo para saber si una historia esta bien cortada, y conviene revisarla letra por letra con el caso de la clinica en la mano.</a:t>
             </a:r>
           </a:p>
           <a:p>
@@ -9758,7 +9774,7 @@
                 </a:solidFill>
                 <a:latin typeface="Calibri"/>
               </a:rPr>
-              <a:t>–   Valiosa: alguien de la clinica gana algo real; si nadie de Huellitas nota la diferencia, no es historia sino tarea interna.</a:t>
+              <a:t>–   Valiosa: alguien de la clinica gana algo real; si nadie de la clinica nota la diferencia, no es historia sino tarea interna.</a:t>
             </a:r>
           </a:p>
         </p:txBody>

--- a/Seminario de Sistemas/Clases/Clase 7 - Historias de usuario/Presentacion.pptx
+++ b/Seminario de Sistemas/Clases/Clase 7 - Historias de usuario/Presentacion.pptx
@@ -4550,23 +4550,7 @@
                 </a:solidFill>
                 <a:latin typeface="Calibri"/>
               </a:rPr>
-              <a:t>–   En el sistema de la clinica la epica Historial clinico se parte en: consultar historial por documento del dueno, registrar una atencion nueva</a:t>
-            </a:r>
-          </a:p>
-          <a:p>
-            <a:pPr>
-              <a:spcAft>
-                <a:spcPts val="800"/>
-              </a:spcAft>
-            </a:pPr>
-            <a:r>
-              <a:rPr sz="2000" b="0" i="0">
-                <a:solidFill>
-                  <a:srgbClr val="333333"/>
-                </a:solidFill>
-                <a:latin typeface="Calibri"/>
-              </a:rPr>
-              <a:t>–   Adjuntar resultados de laboratorio y filtrar el historial por rango de fechas; cada una terminable y demostrable por separado.</a:t>
+              <a:t>–   En la clinica la epica Historial clinico se parte en: consultar historial por documento del dueno, registrar una atencion nueva, adjuntar resultados de laboratorio y filtrar el historial por rango de fechas; cada una terminable y demostrable por separado.</a:t>
             </a:r>
           </a:p>
           <a:p>
@@ -7021,7 +7005,7 @@
                 </a:solidFill>
                 <a:latin typeface="Calibri"/>
               </a:rPr>
-              <a:t> El docente toma el RF-03 del catalogo, lo convierte en vivo en historia con criterios y luego muestra una historia partida por capas para tumbarla con INVEST.</a:t>
+              <a:t> Se toma el RF-03 del catalogo, lo convierte en vivo en historia con criterios y luego muestra una historia partida por capas para tumbarla con INVEST.</a:t>
             </a:r>
           </a:p>
           <a:p>
@@ -8938,7 +8922,7 @@
                 </a:solidFill>
                 <a:latin typeface="Calibri"/>
               </a:rPr>
-              <a:t>–   En el sistema de la clinica, Como auxiliar quiero buscar la ficha de una mascota por el documento del dueno para no revolver la carpeta fisica mientras el paciente espera en el meson se entiende sin traduccion</a:t>
+              <a:t>–   En la clinica, Como auxiliar quiero buscar la ficha de una mascota por el documento del dueno para no revolver la carpeta fisica mientras el paciente espera en el meson se entiende sin traduccion</a:t>
             </a:r>
           </a:p>
           <a:p>
@@ -9254,7 +9238,7 @@
                 </a:solidFill>
                 <a:latin typeface="Calibri"/>
               </a:rPr>
-              <a:t>–   Para la historia de buscar el historial en el sistema de la clinica los criterios serian: Dado un dueno con tres mascotas registradas, cuando busco por su documento, entonces el sistema lista las tres mascotas con nombre y especie</a:t>
+              <a:t>–   Para la historia de buscar el historial en la clinica los criterios serian: Dado un dueno con tres mascotas registradas, cuando busco por su documento, entonces el sistema lista las tres mascotas con nombre y especie</a:t>
             </a:r>
           </a:p>
         </p:txBody>

--- a/Seminario de Sistemas/Clases/Clase 7 - Historias de usuario/Presentacion.pptx
+++ b/Seminario de Sistemas/Clases/Clase 7 - Historias de usuario/Presentacion.pptx
@@ -1053,94 +1053,6 @@
           <a:p>
             <a:r>
               <a:t>Con dos o tres iteraciones se conoce la velocidad del equipo y recien ahi se puede prometer fechas.</a:t>
-            </a:r>
-          </a:p>
-        </p:txBody>
-      </p:sp>
-      <p:sp>
-        <p:nvSpPr>
-          <p:cNvPr id="4" name="Slide Number Placeholder 3"/>
-          <p:cNvSpPr>
-            <a:spLocks noGrp="1"/>
-          </p:cNvSpPr>
-          <p:nvPr>
-            <p:ph type="sldNum" idx="5" sz="quarter"/>
-          </p:nvPr>
-        </p:nvSpPr>
-        <p:spPr/>
-      </p:sp>
-    </p:spTree>
-  </p:cSld>
-  <p:clrMapOvr>
-    <a:masterClrMapping/>
-  </p:clrMapOvr>
-</p:notes>
-</file>
-
-<file path=ppt/notesSlides/notesSlide6.xml><?xml version="1.0" encoding="utf-8"?>
-<p:notes xmlns:a="http://schemas.openxmlformats.org/drawingml/2006/main" xmlns:p="http://schemas.openxmlformats.org/presentationml/2006/main" xmlns:r="http://schemas.openxmlformats.org/officeDocument/2006/relationships">
-  <p:cSld>
-    <p:spTree>
-      <p:nvGrpSpPr>
-        <p:cNvPr id="1" name=""/>
-        <p:cNvGrpSpPr/>
-        <p:nvPr/>
-      </p:nvGrpSpPr>
-      <p:grpSpPr>
-        <a:xfrm>
-          <a:off x="0" y="0"/>
-          <a:ext cx="0" cy="0"/>
-          <a:chOff x="0" y="0"/>
-          <a:chExt cx="0" cy="0"/>
-        </a:xfrm>
-      </p:grpSpPr>
-      <p:sp>
-        <p:nvSpPr>
-          <p:cNvPr id="2" name="Slide Image Placeholder 1"/>
-          <p:cNvSpPr>
-            <a:spLocks noGrp="1"/>
-          </p:cNvSpPr>
-          <p:nvPr>
-            <p:ph type="sldImg" idx="2"/>
-          </p:nvPr>
-        </p:nvSpPr>
-        <p:spPr/>
-      </p:sp>
-      <p:sp>
-        <p:nvSpPr>
-          <p:cNvPr id="3" name="Notes Placeholder 2"/>
-          <p:cNvSpPr>
-            <a:spLocks noGrp="1"/>
-          </p:cNvSpPr>
-          <p:nvPr>
-            <p:ph type="body" idx="3" sz="quarter"/>
-          </p:nvPr>
-        </p:nvSpPr>
-        <p:spPr/>
-        <p:txBody>
-          <a:bodyPr/>
-          <a:lstStyle/>
-          <a:p>
-            <a:r>
-              <a:t>TEXTO COMPLETO DE LA LÁMINA (se proyecta resumido):</a:t>
-            </a:r>
-          </a:p>
-          <a:p/>
-          <a:p>
-            <a:r>
-              <a:t>Herramienta: Google Docs · Excalidraw</a:t>
-            </a:r>
-          </a:p>
-          <a:p/>
-          <a:p>
-            <a:r>
-              <a:t>Demo: Se toma el RF-03 del catalogo, lo convierte en vivo en historia con criterios y luego muestra una historia partida por capas para tumbarla con INVEST.</a:t>
-            </a:r>
-          </a:p>
-          <a:p/>
-          <a:p>
-            <a:r>
-              <a:t>Mismo dominio: la clinica veterinaria — no otro ejemplo. Aqui se diseña, no se programa.</a:t>
             </a:r>
           </a:p>
         </p:txBody>
@@ -6975,83 +6887,14 @@
       </p:sp>
       <p:sp>
         <p:nvSpPr>
-          <p:cNvPr id="5" name="Rounded Rectangle 4"/>
-          <p:cNvSpPr/>
+          <p:cNvPr id="5" name="TextBox 4"/>
+          <p:cNvSpPr txBox="1"/>
           <p:nvPr/>
         </p:nvSpPr>
         <p:spPr>
           <a:xfrm>
-            <a:off x="5797149" y="1573813"/>
-            <a:ext cx="6010497" cy="4057845"/>
-          </a:xfrm>
-          <a:prstGeom prst="roundRect">
-            <a:avLst>
-              <a:gd name="adj" fmla="val 4000"/>
-            </a:avLst>
-          </a:prstGeom>
-          <a:solidFill>
-            <a:srgbClr val="E8EEF4"/>
-          </a:solidFill>
-          <a:ln>
-            <a:noFill/>
-          </a:ln>
-        </p:spPr>
-        <p:style>
-          <a:lnRef idx="1">
-            <a:schemeClr val="accent1"/>
-          </a:lnRef>
-          <a:fillRef idx="3">
-            <a:schemeClr val="accent1"/>
-          </a:fillRef>
-          <a:effectRef idx="2">
-            <a:schemeClr val="accent1"/>
-          </a:effectRef>
-          <a:fontRef idx="minor">
-            <a:schemeClr val="lt1"/>
-          </a:fontRef>
-        </p:style>
-        <p:txBody>
-          <a:bodyPr rtlCol="0" anchor="ctr"/>
-          <a:lstStyle/>
-          <a:p>
-            <a:pPr algn="ctr"/>
-          </a:p>
-        </p:txBody>
-      </p:sp>
-      <p:pic>
-        <p:nvPicPr>
-          <p:cNvPr id="6" name="Picture 5" descr="laptop-code-live-demo.jpg"/>
-          <p:cNvPicPr>
-            <a:picLocks noChangeAspect="1"/>
-          </p:cNvPicPr>
-          <p:nvPr/>
-        </p:nvPicPr>
-        <p:blipFill>
-          <a:blip r:embed="rId2"/>
-          <a:stretch>
-            <a:fillRect/>
-          </a:stretch>
-        </p:blipFill>
-        <p:spPr>
-          <a:xfrm>
-            <a:off x="5870301" y="1646965"/>
-            <a:ext cx="5864193" cy="3911541"/>
-          </a:xfrm>
-          <a:prstGeom prst="rect">
-            <a:avLst/>
-          </a:prstGeom>
-        </p:spPr>
-      </p:pic>
-      <p:sp>
-        <p:nvSpPr>
-          <p:cNvPr id="7" name="TextBox 6"/>
-          <p:cNvSpPr txBox="1"/>
-          <p:nvPr/>
-        </p:nvSpPr>
-        <p:spPr>
-          <a:xfrm>
-            <a:off x="5870301" y="5961888"/>
-            <a:ext cx="5864193" cy="320040"/>
+            <a:off x="457200" y="1170432"/>
+            <a:ext cx="11277295" cy="5230368"/>
           </a:xfrm>
           <a:prstGeom prst="rect">
             <a:avLst/>
@@ -7064,41 +6907,6 @@
           </a:bodyPr>
           <a:lstStyle/>
           <a:p>
-            <a:pPr algn="ctr"/>
-            <a:r>
-              <a:rPr sz="1100" b="0" i="1">
-                <a:solidFill>
-                  <a:srgbClr val="666666"/>
-                </a:solidFill>
-                <a:latin typeface="Calibri"/>
-              </a:rPr>
-              <a:t>Foto: olia danilevich · Pexels</a:t>
-            </a:r>
-          </a:p>
-        </p:txBody>
-      </p:sp>
-      <p:sp>
-        <p:nvSpPr>
-          <p:cNvPr id="8" name="TextBox 7"/>
-          <p:cNvSpPr txBox="1"/>
-          <p:nvPr/>
-        </p:nvSpPr>
-        <p:spPr>
-          <a:xfrm>
-            <a:off x="457200" y="1353312"/>
-            <a:ext cx="5093061" cy="5047488"/>
-          </a:xfrm>
-          <a:prstGeom prst="rect">
-            <a:avLst/>
-          </a:prstGeom>
-          <a:noFill/>
-        </p:spPr>
-        <p:txBody>
-          <a:bodyPr wrap="square">
-            <a:spAutoFit/>
-          </a:bodyPr>
-          <a:lstStyle/>
-          <a:p>
             <a:pPr>
               <a:spcAft>
                 <a:spcPts val="800"/>
@@ -7156,6 +6964,15 @@
               </a:rPr>
               <a:t>Demo:</a:t>
             </a:r>
+            <a:r>
+              <a:rPr sz="2000" b="0" i="0">
+                <a:solidFill>
+                  <a:srgbClr val="333333"/>
+                </a:solidFill>
+                <a:latin typeface="Calibri"/>
+              </a:rPr>
+              <a:t> Se toma el RF-03 del catalogo, lo convierte en vivo en historia con criterios y luego muestra una historia partida por capas para tumbarla con INVEST.</a:t>
+            </a:r>
           </a:p>
           <a:p>
             <a:pPr>
@@ -7177,7 +6994,7 @@
       </p:sp>
       <p:sp>
         <p:nvSpPr>
-          <p:cNvPr id="9" name="TextBox 8"/>
+          <p:cNvPr id="6" name="TextBox 5"/>
           <p:cNvSpPr txBox="1"/>
           <p:nvPr/>
         </p:nvSpPr>
@@ -7590,83 +7407,14 @@
       </p:sp>
       <p:sp>
         <p:nvSpPr>
-          <p:cNvPr id="5" name="Rounded Rectangle 4"/>
-          <p:cNvSpPr/>
+          <p:cNvPr id="5" name="TextBox 4"/>
+          <p:cNvSpPr txBox="1"/>
           <p:nvPr/>
         </p:nvSpPr>
         <p:spPr>
           <a:xfrm>
-            <a:off x="5797149" y="1573813"/>
-            <a:ext cx="6010497" cy="4057845"/>
-          </a:xfrm>
-          <a:prstGeom prst="roundRect">
-            <a:avLst>
-              <a:gd name="adj" fmla="val 4000"/>
-            </a:avLst>
-          </a:prstGeom>
-          <a:solidFill>
-            <a:srgbClr val="E8EEF4"/>
-          </a:solidFill>
-          <a:ln>
-            <a:noFill/>
-          </a:ln>
-        </p:spPr>
-        <p:style>
-          <a:lnRef idx="1">
-            <a:schemeClr val="accent1"/>
-          </a:lnRef>
-          <a:fillRef idx="3">
-            <a:schemeClr val="accent1"/>
-          </a:fillRef>
-          <a:effectRef idx="2">
-            <a:schemeClr val="accent1"/>
-          </a:effectRef>
-          <a:fontRef idx="minor">
-            <a:schemeClr val="lt1"/>
-          </a:fontRef>
-        </p:style>
-        <p:txBody>
-          <a:bodyPr rtlCol="0" anchor="ctr"/>
-          <a:lstStyle/>
-          <a:p>
-            <a:pPr algn="ctr"/>
-          </a:p>
-        </p:txBody>
-      </p:sp>
-      <p:pic>
-        <p:nvPicPr>
-          <p:cNvPr id="6" name="Picture 5" descr="notebook-planning-desk-coffee.jpg"/>
-          <p:cNvPicPr>
-            <a:picLocks noChangeAspect="1"/>
-          </p:cNvPicPr>
-          <p:nvPr/>
-        </p:nvPicPr>
-        <p:blipFill>
-          <a:blip r:embed="rId2"/>
-          <a:stretch>
-            <a:fillRect/>
-          </a:stretch>
-        </p:blipFill>
-        <p:spPr>
-          <a:xfrm>
-            <a:off x="5870301" y="1646965"/>
-            <a:ext cx="5864193" cy="3911541"/>
-          </a:xfrm>
-          <a:prstGeom prst="rect">
-            <a:avLst/>
-          </a:prstGeom>
-        </p:spPr>
-      </p:pic>
-      <p:sp>
-        <p:nvSpPr>
-          <p:cNvPr id="7" name="TextBox 6"/>
-          <p:cNvSpPr txBox="1"/>
-          <p:nvPr/>
-        </p:nvSpPr>
-        <p:spPr>
-          <a:xfrm>
-            <a:off x="5870301" y="5961888"/>
-            <a:ext cx="5864193" cy="320040"/>
+            <a:off x="457200" y="1170432"/>
+            <a:ext cx="11277295" cy="5230368"/>
           </a:xfrm>
           <a:prstGeom prst="rect">
             <a:avLst/>
@@ -7679,41 +7427,6 @@
           </a:bodyPr>
           <a:lstStyle/>
           <a:p>
-            <a:pPr algn="ctr"/>
-            <a:r>
-              <a:rPr sz="1100" b="0" i="1">
-                <a:solidFill>
-                  <a:srgbClr val="666666"/>
-                </a:solidFill>
-                <a:latin typeface="Calibri"/>
-              </a:rPr>
-              <a:t>Foto: Cup of  Couple · Pexels</a:t>
-            </a:r>
-          </a:p>
-        </p:txBody>
-      </p:sp>
-      <p:sp>
-        <p:nvSpPr>
-          <p:cNvPr id="8" name="TextBox 7"/>
-          <p:cNvSpPr txBox="1"/>
-          <p:nvPr/>
-        </p:nvSpPr>
-        <p:spPr>
-          <a:xfrm>
-            <a:off x="457200" y="1353312"/>
-            <a:ext cx="5093061" cy="5047488"/>
-          </a:xfrm>
-          <a:prstGeom prst="rect">
-            <a:avLst/>
-          </a:prstGeom>
-          <a:noFill/>
-        </p:spPr>
-        <p:txBody>
-          <a:bodyPr wrap="square">
-            <a:spAutoFit/>
-          </a:bodyPr>
-          <a:lstStyle/>
-          <a:p>
             <a:pPr>
               <a:spcAft>
                 <a:spcPts val="800"/>
@@ -7826,7 +7539,7 @@
       </p:sp>
       <p:sp>
         <p:nvSpPr>
-          <p:cNvPr id="9" name="TextBox 8"/>
+          <p:cNvPr id="6" name="TextBox 5"/>
           <p:cNvSpPr txBox="1"/>
           <p:nvPr/>
         </p:nvSpPr>

--- a/Seminario de Sistemas/Clases/Clase 7 - Historias de usuario/Presentacion.pptx
+++ b/Seminario de Sistemas/Clases/Clase 7 - Historias de usuario/Presentacion.pptx
@@ -1053,6 +1053,94 @@
           <a:p>
             <a:r>
               <a:t>Con dos o tres iteraciones se conoce la velocidad del equipo y recien ahi se puede prometer fechas.</a:t>
+            </a:r>
+          </a:p>
+        </p:txBody>
+      </p:sp>
+      <p:sp>
+        <p:nvSpPr>
+          <p:cNvPr id="4" name="Slide Number Placeholder 3"/>
+          <p:cNvSpPr>
+            <a:spLocks noGrp="1"/>
+          </p:cNvSpPr>
+          <p:nvPr>
+            <p:ph type="sldNum" idx="5" sz="quarter"/>
+          </p:nvPr>
+        </p:nvSpPr>
+        <p:spPr/>
+      </p:sp>
+    </p:spTree>
+  </p:cSld>
+  <p:clrMapOvr>
+    <a:masterClrMapping/>
+  </p:clrMapOvr>
+</p:notes>
+</file>
+
+<file path=ppt/notesSlides/notesSlide6.xml><?xml version="1.0" encoding="utf-8"?>
+<p:notes xmlns:a="http://schemas.openxmlformats.org/drawingml/2006/main" xmlns:p="http://schemas.openxmlformats.org/presentationml/2006/main" xmlns:r="http://schemas.openxmlformats.org/officeDocument/2006/relationships">
+  <p:cSld>
+    <p:spTree>
+      <p:nvGrpSpPr>
+        <p:cNvPr id="1" name=""/>
+        <p:cNvGrpSpPr/>
+        <p:nvPr/>
+      </p:nvGrpSpPr>
+      <p:grpSpPr>
+        <a:xfrm>
+          <a:off x="0" y="0"/>
+          <a:ext cx="0" cy="0"/>
+          <a:chOff x="0" y="0"/>
+          <a:chExt cx="0" cy="0"/>
+        </a:xfrm>
+      </p:grpSpPr>
+      <p:sp>
+        <p:nvSpPr>
+          <p:cNvPr id="2" name="Slide Image Placeholder 1"/>
+          <p:cNvSpPr>
+            <a:spLocks noGrp="1"/>
+          </p:cNvSpPr>
+          <p:nvPr>
+            <p:ph type="sldImg" idx="2"/>
+          </p:nvPr>
+        </p:nvSpPr>
+        <p:spPr/>
+      </p:sp>
+      <p:sp>
+        <p:nvSpPr>
+          <p:cNvPr id="3" name="Notes Placeholder 2"/>
+          <p:cNvSpPr>
+            <a:spLocks noGrp="1"/>
+          </p:cNvSpPr>
+          <p:nvPr>
+            <p:ph type="body" idx="3" sz="quarter"/>
+          </p:nvPr>
+        </p:nvSpPr>
+        <p:spPr/>
+        <p:txBody>
+          <a:bodyPr/>
+          <a:lstStyle/>
+          <a:p>
+            <a:r>
+              <a:t>TEXTO COMPLETO DE LA LÁMINA (se proyecta resumido):</a:t>
+            </a:r>
+          </a:p>
+          <a:p/>
+          <a:p>
+            <a:r>
+              <a:t>Herramienta: Google Docs · Excalidraw</a:t>
+            </a:r>
+          </a:p>
+          <a:p/>
+          <a:p>
+            <a:r>
+              <a:t>Demo: Se toma el RF-03 del catalogo, lo convierte en vivo en historia con criterios y luego muestra una historia partida por capas para tumbarla con INVEST.</a:t>
+            </a:r>
+          </a:p>
+          <a:p/>
+          <a:p>
+            <a:r>
+              <a:t>Mismo dominio: la clinica veterinaria — no otro ejemplo. Aqui se diseña, no se programa.</a:t>
             </a:r>
           </a:p>
         </p:txBody>
@@ -6887,14 +6975,83 @@
       </p:sp>
       <p:sp>
         <p:nvSpPr>
-          <p:cNvPr id="5" name="TextBox 4"/>
+          <p:cNvPr id="5" name="Rounded Rectangle 4"/>
+          <p:cNvSpPr/>
+          <p:nvPr/>
+        </p:nvSpPr>
+        <p:spPr>
+          <a:xfrm>
+            <a:off x="5797149" y="1343926"/>
+            <a:ext cx="6010497" cy="4837658"/>
+          </a:xfrm>
+          <a:prstGeom prst="roundRect">
+            <a:avLst>
+              <a:gd name="adj" fmla="val 4000"/>
+            </a:avLst>
+          </a:prstGeom>
+          <a:solidFill>
+            <a:srgbClr val="E8EEF4"/>
+          </a:solidFill>
+          <a:ln>
+            <a:noFill/>
+          </a:ln>
+        </p:spPr>
+        <p:style>
+          <a:lnRef idx="1">
+            <a:schemeClr val="accent1"/>
+          </a:lnRef>
+          <a:fillRef idx="3">
+            <a:schemeClr val="accent1"/>
+          </a:fillRef>
+          <a:effectRef idx="2">
+            <a:schemeClr val="accent1"/>
+          </a:effectRef>
+          <a:fontRef idx="minor">
+            <a:schemeClr val="lt1"/>
+          </a:fontRef>
+        </p:style>
+        <p:txBody>
+          <a:bodyPr rtlCol="0" anchor="ctr"/>
+          <a:lstStyle/>
+          <a:p>
+            <a:pPr algn="ctr"/>
+          </a:p>
+        </p:txBody>
+      </p:sp>
+      <p:pic>
+        <p:nvPicPr>
+          <p:cNvPr id="6" name="Picture 5" descr="ilus-demo-paso1.png"/>
+          <p:cNvPicPr>
+            <a:picLocks noChangeAspect="1"/>
+          </p:cNvPicPr>
+          <p:nvPr/>
+        </p:nvPicPr>
+        <p:blipFill>
+          <a:blip r:embed="rId2"/>
+          <a:stretch>
+            <a:fillRect/>
+          </a:stretch>
+        </p:blipFill>
+        <p:spPr>
+          <a:xfrm>
+            <a:off x="5870301" y="1417078"/>
+            <a:ext cx="5864193" cy="4691354"/>
+          </a:xfrm>
+          <a:prstGeom prst="rect">
+            <a:avLst/>
+          </a:prstGeom>
+        </p:spPr>
+      </p:pic>
+      <p:sp>
+        <p:nvSpPr>
+          <p:cNvPr id="7" name="TextBox 6"/>
           <p:cNvSpPr txBox="1"/>
           <p:nvPr/>
         </p:nvSpPr>
         <p:spPr>
           <a:xfrm>
-            <a:off x="457200" y="1170432"/>
-            <a:ext cx="11277295" cy="5230368"/>
+            <a:off x="457200" y="1353312"/>
+            <a:ext cx="5093061" cy="5047488"/>
           </a:xfrm>
           <a:prstGeom prst="rect">
             <a:avLst/>
@@ -6971,7 +7128,7 @@
                 </a:solidFill>
                 <a:latin typeface="Calibri"/>
               </a:rPr>
-              <a:t> Se toma el RF-03 del catalogo, lo convierte en vivo en historia con criterios y luego muestra una historia partida por capas para tumbarla con INVEST.</a:t>
+              <a:t> Se toma el RF-03 del catalogo, lo convierte en vivo en historia con criterios y luego muestra una historia partida por capas para tumbarla…</a:t>
             </a:r>
           </a:p>
           <a:p>
@@ -6994,7 +7151,7 @@
       </p:sp>
       <p:sp>
         <p:nvSpPr>
-          <p:cNvPr id="6" name="TextBox 5"/>
+          <p:cNvPr id="8" name="TextBox 7"/>
           <p:cNvSpPr txBox="1"/>
           <p:nvPr/>
         </p:nvSpPr>

--- a/Seminario de Sistemas/Clases/Clase 7 - Historias de usuario/Presentacion.pptx
+++ b/Seminario de Sistemas/Clases/Clase 7 - Historias de usuario/Presentacion.pptx
@@ -5311,7 +5311,7 @@
         <p:spPr>
           <a:xfrm>
             <a:off x="457200" y="1261872"/>
-            <a:ext cx="11277295" cy="4917043"/>
+            <a:ext cx="6991923" cy="3152338"/>
           </a:xfrm>
           <a:prstGeom prst="roundRect">
             <a:avLst>
@@ -5356,7 +5356,7 @@
         <p:spPr>
           <a:xfrm>
             <a:off x="457200" y="1261872"/>
-            <a:ext cx="11277295" cy="365760"/>
+            <a:ext cx="6991923" cy="365760"/>
           </a:xfrm>
           <a:prstGeom prst="rect">
             <a:avLst/>
@@ -5528,7 +5528,7 @@
         <p:spPr>
           <a:xfrm>
             <a:off x="1371600" y="1298448"/>
-            <a:ext cx="10180015" cy="292608"/>
+            <a:ext cx="5894643" cy="292608"/>
           </a:xfrm>
           <a:prstGeom prst="rect">
             <a:avLst/>
@@ -5561,7 +5561,7 @@
         <p:spPr>
           <a:xfrm>
             <a:off x="685800" y="1719072"/>
-            <a:ext cx="502920" cy="4322683"/>
+            <a:ext cx="502920" cy="2557978"/>
           </a:xfrm>
           <a:prstGeom prst="rect">
             <a:avLst/>
@@ -5576,11 +5576,11 @@
           <a:p>
             <a:pPr algn="r">
               <a:spcAft>
-                <a:spcPts val="428"/>
+                <a:spcPts val="364"/>
               </a:spcAft>
             </a:pPr>
             <a:r>
-              <a:rPr sz="2000" i="0" b="0">
+              <a:rPr sz="1700" i="0" b="0">
                 <a:solidFill>
                   <a:srgbClr val="858585"/>
                 </a:solidFill>
@@ -5592,11 +5592,11 @@
           <a:p>
             <a:pPr algn="r">
               <a:spcAft>
-                <a:spcPts val="428"/>
+                <a:spcPts val="364"/>
               </a:spcAft>
             </a:pPr>
             <a:r>
-              <a:rPr sz="2000" i="0" b="0">
+              <a:rPr sz="1700" i="0" b="0">
                 <a:solidFill>
                   <a:srgbClr val="858585"/>
                 </a:solidFill>
@@ -5608,11 +5608,11 @@
           <a:p>
             <a:pPr algn="r">
               <a:spcAft>
-                <a:spcPts val="428"/>
+                <a:spcPts val="364"/>
               </a:spcAft>
             </a:pPr>
             <a:r>
-              <a:rPr sz="2000" i="0" b="0">
+              <a:rPr sz="1700" i="0" b="0">
                 <a:solidFill>
                   <a:srgbClr val="858585"/>
                 </a:solidFill>
@@ -5624,11 +5624,11 @@
           <a:p>
             <a:pPr algn="r">
               <a:spcAft>
-                <a:spcPts val="428"/>
+                <a:spcPts val="364"/>
               </a:spcAft>
             </a:pPr>
             <a:r>
-              <a:rPr sz="2000" i="0" b="0">
+              <a:rPr sz="1700" i="0" b="0">
                 <a:solidFill>
                   <a:srgbClr val="858585"/>
                 </a:solidFill>
@@ -5640,11 +5640,11 @@
           <a:p>
             <a:pPr algn="r">
               <a:spcAft>
-                <a:spcPts val="428"/>
+                <a:spcPts val="364"/>
               </a:spcAft>
             </a:pPr>
             <a:r>
-              <a:rPr sz="2000" i="0" b="0">
+              <a:rPr sz="1700" i="0" b="0">
                 <a:solidFill>
                   <a:srgbClr val="858585"/>
                 </a:solidFill>
@@ -5656,11 +5656,11 @@
           <a:p>
             <a:pPr algn="r">
               <a:spcAft>
-                <a:spcPts val="428"/>
+                <a:spcPts val="364"/>
               </a:spcAft>
             </a:pPr>
             <a:r>
-              <a:rPr sz="2000" i="0" b="0">
+              <a:rPr sz="1700" i="0" b="0">
                 <a:solidFill>
                   <a:srgbClr val="858585"/>
                 </a:solidFill>
@@ -5672,11 +5672,11 @@
           <a:p>
             <a:pPr algn="r">
               <a:spcAft>
-                <a:spcPts val="428"/>
+                <a:spcPts val="364"/>
               </a:spcAft>
             </a:pPr>
             <a:r>
-              <a:rPr sz="2000" i="0" b="0">
+              <a:rPr sz="1700" i="0" b="0">
                 <a:solidFill>
                   <a:srgbClr val="858585"/>
                 </a:solidFill>
@@ -5688,81 +5688,17 @@
           <a:p>
             <a:pPr algn="r">
               <a:spcAft>
-                <a:spcPts val="428"/>
+                <a:spcPts val="364"/>
               </a:spcAft>
             </a:pPr>
             <a:r>
-              <a:rPr sz="2000" i="0" b="0">
+              <a:rPr sz="1700" i="0" b="0">
                 <a:solidFill>
                   <a:srgbClr val="858585"/>
                 </a:solidFill>
                 <a:latin typeface="Consolas"/>
               </a:rPr>
               <a:t>8</a:t>
-            </a:r>
-          </a:p>
-          <a:p>
-            <a:pPr algn="r">
-              <a:spcAft>
-                <a:spcPts val="428"/>
-              </a:spcAft>
-            </a:pPr>
-            <a:r>
-              <a:rPr sz="2000" i="0" b="0">
-                <a:solidFill>
-                  <a:srgbClr val="858585"/>
-                </a:solidFill>
-                <a:latin typeface="Consolas"/>
-              </a:rPr>
-              <a:t>9</a:t>
-            </a:r>
-          </a:p>
-          <a:p>
-            <a:pPr algn="r">
-              <a:spcAft>
-                <a:spcPts val="428"/>
-              </a:spcAft>
-            </a:pPr>
-            <a:r>
-              <a:rPr sz="2000" i="0" b="0">
-                <a:solidFill>
-                  <a:srgbClr val="858585"/>
-                </a:solidFill>
-                <a:latin typeface="Consolas"/>
-              </a:rPr>
-              <a:t>10</a:t>
-            </a:r>
-          </a:p>
-          <a:p>
-            <a:pPr algn="r">
-              <a:spcAft>
-                <a:spcPts val="428"/>
-              </a:spcAft>
-            </a:pPr>
-            <a:r>
-              <a:rPr sz="2000" i="0" b="0">
-                <a:solidFill>
-                  <a:srgbClr val="858585"/>
-                </a:solidFill>
-                <a:latin typeface="Consolas"/>
-              </a:rPr>
-              <a:t>11</a:t>
-            </a:r>
-          </a:p>
-          <a:p>
-            <a:pPr algn="r">
-              <a:spcAft>
-                <a:spcPts val="428"/>
-              </a:spcAft>
-            </a:pPr>
-            <a:r>
-              <a:rPr sz="2000" i="0" b="0">
-                <a:solidFill>
-                  <a:srgbClr val="858585"/>
-                </a:solidFill>
-                <a:latin typeface="Consolas"/>
-              </a:rPr>
-              <a:t>12</a:t>
             </a:r>
           </a:p>
         </p:txBody>
@@ -5776,7 +5712,7 @@
         <p:spPr>
           <a:xfrm>
             <a:off x="1188720" y="1719072"/>
-            <a:ext cx="10271455" cy="4322683"/>
+            <a:ext cx="5986083" cy="2557978"/>
           </a:xfrm>
           <a:prstGeom prst="rect">
             <a:avLst/>
@@ -5791,11 +5727,11 @@
           <a:p>
             <a:pPr>
               <a:spcAft>
-                <a:spcPts val="428"/>
+                <a:spcPts val="364"/>
               </a:spcAft>
             </a:pPr>
             <a:r>
-              <a:rPr sz="2000" i="0" b="0">
+              <a:rPr sz="1700" i="0" b="0">
                 <a:solidFill>
                   <a:srgbClr val="D4D4D4"/>
                 </a:solidFill>
@@ -5804,7 +5740,7 @@
               <a:t>flowchart</a:t>
             </a:r>
             <a:r>
-              <a:rPr sz="2000" i="0" b="0">
+              <a:rPr sz="1700" i="0" b="0">
                 <a:solidFill>
                   <a:srgbClr val="D4D4D4"/>
                 </a:solidFill>
@@ -5813,7 +5749,7 @@
               <a:t> </a:t>
             </a:r>
             <a:r>
-              <a:rPr sz="2000" i="0" b="0">
+              <a:rPr sz="1700" i="0" b="0">
                 <a:solidFill>
                   <a:srgbClr val="D4D4D4"/>
                 </a:solidFill>
@@ -5825,11 +5761,11 @@
           <a:p>
             <a:pPr>
               <a:spcAft>
-                <a:spcPts val="428"/>
+                <a:spcPts val="364"/>
               </a:spcAft>
             </a:pPr>
             <a:r>
-              <a:rPr sz="2000" i="0" b="0">
+              <a:rPr sz="1700" i="0" b="0">
                 <a:solidFill>
                   <a:srgbClr val="D4D4D4"/>
                 </a:solidFill>
@@ -5838,7 +5774,7 @@
               <a:t>  </a:t>
             </a:r>
             <a:r>
-              <a:rPr sz="2000" i="0" b="0">
+              <a:rPr sz="1700" i="0" b="0">
                 <a:solidFill>
                   <a:srgbClr val="D4D4D4"/>
                 </a:solidFill>
@@ -5847,7 +5783,7 @@
               <a:t>E1</a:t>
             </a:r>
             <a:r>
-              <a:rPr sz="2000" i="0" b="0">
+              <a:rPr sz="1700" i="0" b="0">
                 <a:solidFill>
                   <a:srgbClr val="D4D4D4"/>
                 </a:solidFill>
@@ -5856,7 +5792,7 @@
               <a:t>[</a:t>
             </a:r>
             <a:r>
-              <a:rPr sz="2000" i="0" b="0">
+              <a:rPr sz="1700" i="0" b="0">
                 <a:solidFill>
                   <a:srgbClr val="D4D4D4"/>
                 </a:solidFill>
@@ -5865,7 +5801,7 @@
               <a:t>EPICA</a:t>
             </a:r>
             <a:r>
-              <a:rPr sz="2000" i="0" b="0">
+              <a:rPr sz="1700" i="0" b="0">
                 <a:solidFill>
                   <a:srgbClr val="D4D4D4"/>
                 </a:solidFill>
@@ -5874,7 +5810,7 @@
               <a:t> </a:t>
             </a:r>
             <a:r>
-              <a:rPr sz="2000" i="0" b="0">
+              <a:rPr sz="1700" i="0" b="0">
                 <a:solidFill>
                   <a:srgbClr val="B5CEA8"/>
                 </a:solidFill>
@@ -5883,7 +5819,7 @@
               <a:t>1</a:t>
             </a:r>
             <a:r>
-              <a:rPr sz="2000" i="0" b="0">
+              <a:rPr sz="1700" i="0" b="0">
                 <a:solidFill>
                   <a:srgbClr val="D4D4D4"/>
                 </a:solidFill>
@@ -5892,7 +5828,7 @@
               <a:t> - </a:t>
             </a:r>
             <a:r>
-              <a:rPr sz="2000" i="0" b="0">
+              <a:rPr sz="1700" i="0" b="0">
                 <a:solidFill>
                   <a:srgbClr val="D4D4D4"/>
                 </a:solidFill>
@@ -5901,7 +5837,7 @@
               <a:t>Agenda</a:t>
             </a:r>
             <a:r>
-              <a:rPr sz="2000" i="0" b="0">
+              <a:rPr sz="1700" i="0" b="0">
                 <a:solidFill>
                   <a:srgbClr val="D4D4D4"/>
                 </a:solidFill>
@@ -5913,11 +5849,11 @@
           <a:p>
             <a:pPr>
               <a:spcAft>
-                <a:spcPts val="428"/>
+                <a:spcPts val="364"/>
               </a:spcAft>
             </a:pPr>
             <a:r>
-              <a:rPr sz="2000" i="0" b="0">
+              <a:rPr sz="1700" i="0" b="0">
                 <a:solidFill>
                   <a:srgbClr val="D4D4D4"/>
                 </a:solidFill>
@@ -5926,7 +5862,7 @@
               <a:t>  </a:t>
             </a:r>
             <a:r>
-              <a:rPr sz="2000" i="0" b="0">
+              <a:rPr sz="1700" i="0" b="0">
                 <a:solidFill>
                   <a:srgbClr val="D4D4D4"/>
                 </a:solidFill>
@@ -5935,7 +5871,7 @@
               <a:t>E2</a:t>
             </a:r>
             <a:r>
-              <a:rPr sz="2000" i="0" b="0">
+              <a:rPr sz="1700" i="0" b="0">
                 <a:solidFill>
                   <a:srgbClr val="D4D4D4"/>
                 </a:solidFill>
@@ -5944,7 +5880,7 @@
               <a:t>[</a:t>
             </a:r>
             <a:r>
-              <a:rPr sz="2000" i="0" b="0">
+              <a:rPr sz="1700" i="0" b="0">
                 <a:solidFill>
                   <a:srgbClr val="D4D4D4"/>
                 </a:solidFill>
@@ -5953,7 +5889,7 @@
               <a:t>EPICA</a:t>
             </a:r>
             <a:r>
-              <a:rPr sz="2000" i="0" b="0">
+              <a:rPr sz="1700" i="0" b="0">
                 <a:solidFill>
                   <a:srgbClr val="D4D4D4"/>
                 </a:solidFill>
@@ -5962,7 +5898,7 @@
               <a:t> </a:t>
             </a:r>
             <a:r>
-              <a:rPr sz="2000" i="0" b="0">
+              <a:rPr sz="1700" i="0" b="0">
                 <a:solidFill>
                   <a:srgbClr val="B5CEA8"/>
                 </a:solidFill>
@@ -5971,7 +5907,7 @@
               <a:t>2</a:t>
             </a:r>
             <a:r>
-              <a:rPr sz="2000" i="0" b="0">
+              <a:rPr sz="1700" i="0" b="0">
                 <a:solidFill>
                   <a:srgbClr val="D4D4D4"/>
                 </a:solidFill>
@@ -5980,7 +5916,7 @@
               <a:t> - </a:t>
             </a:r>
             <a:r>
-              <a:rPr sz="2000" i="0" b="0">
+              <a:rPr sz="1700" i="0" b="0">
                 <a:solidFill>
                   <a:srgbClr val="D4D4D4"/>
                 </a:solidFill>
@@ -5989,7 +5925,7 @@
               <a:t>Expediente</a:t>
             </a:r>
             <a:r>
-              <a:rPr sz="2000" i="0" b="0">
+              <a:rPr sz="1700" i="0" b="0">
                 <a:solidFill>
                   <a:srgbClr val="D4D4D4"/>
                 </a:solidFill>
@@ -6001,11 +5937,11 @@
           <a:p>
             <a:pPr>
               <a:spcAft>
-                <a:spcPts val="428"/>
+                <a:spcPts val="364"/>
               </a:spcAft>
             </a:pPr>
             <a:r>
-              <a:rPr sz="2000" i="0" b="0">
+              <a:rPr sz="1700" i="0" b="0">
                 <a:solidFill>
                   <a:srgbClr val="D4D4D4"/>
                 </a:solidFill>
@@ -6017,11 +5953,11 @@
           <a:p>
             <a:pPr>
               <a:spcAft>
-                <a:spcPts val="428"/>
+                <a:spcPts val="364"/>
               </a:spcAft>
             </a:pPr>
             <a:r>
-              <a:rPr sz="2000" i="0" b="0">
+              <a:rPr sz="1700" i="0" b="0">
                 <a:solidFill>
                   <a:srgbClr val="D4D4D4"/>
                 </a:solidFill>
@@ -6030,7 +5966,7 @@
               <a:t>  </a:t>
             </a:r>
             <a:r>
-              <a:rPr sz="2000" i="0" b="0">
+              <a:rPr sz="1700" i="0" b="0">
                 <a:solidFill>
                   <a:srgbClr val="D4D4D4"/>
                 </a:solidFill>
@@ -6039,7 +5975,7 @@
               <a:t>E1</a:t>
             </a:r>
             <a:r>
-              <a:rPr sz="2000" i="0" b="0">
+              <a:rPr sz="1700" i="0" b="0">
                 <a:solidFill>
                   <a:srgbClr val="D4D4D4"/>
                 </a:solidFill>
@@ -6048,7 +5984,7 @@
               <a:t> --&gt; </a:t>
             </a:r>
             <a:r>
-              <a:rPr sz="2000" i="0" b="0">
+              <a:rPr sz="1700" i="0" b="0">
                 <a:solidFill>
                   <a:srgbClr val="D4D4D4"/>
                 </a:solidFill>
@@ -6057,7 +5993,7 @@
               <a:t>H1</a:t>
             </a:r>
             <a:r>
-              <a:rPr sz="2000" i="0" b="0">
+              <a:rPr sz="1700" i="0" b="0">
                 <a:solidFill>
                   <a:srgbClr val="D4D4D4"/>
                 </a:solidFill>
@@ -6066,7 +6002,7 @@
               <a:t>[</a:t>
             </a:r>
             <a:r>
-              <a:rPr sz="2000" i="0" b="0">
+              <a:rPr sz="1700" i="0" b="0">
                 <a:solidFill>
                   <a:srgbClr val="D4D4D4"/>
                 </a:solidFill>
@@ -6075,7 +6011,7 @@
               <a:t>HU</a:t>
             </a:r>
             <a:r>
-              <a:rPr sz="2000" i="0" b="0">
+              <a:rPr sz="1700" i="0" b="0">
                 <a:solidFill>
                   <a:srgbClr val="D4D4D4"/>
                 </a:solidFill>
@@ -6084,7 +6020,7 @@
               <a:t>-</a:t>
             </a:r>
             <a:r>
-              <a:rPr sz="2000" i="0" b="0">
+              <a:rPr sz="1700" i="0" b="0">
                 <a:solidFill>
                   <a:srgbClr val="B5CEA8"/>
                 </a:solidFill>
@@ -6093,7 +6029,7 @@
               <a:t>01</a:t>
             </a:r>
             <a:r>
-              <a:rPr sz="2000" i="0" b="0">
+              <a:rPr sz="1700" i="0" b="0">
                 <a:solidFill>
                   <a:srgbClr val="D4D4D4"/>
                 </a:solidFill>
@@ -6102,7 +6038,7 @@
               <a:t> </a:t>
             </a:r>
             <a:r>
-              <a:rPr sz="2000" i="0" b="0">
+              <a:rPr sz="1700" i="0" b="0">
                 <a:solidFill>
                   <a:srgbClr val="D4D4D4"/>
                 </a:solidFill>
@@ -6111,7 +6047,7 @@
               <a:t>Registrar</a:t>
             </a:r>
             <a:r>
-              <a:rPr sz="2000" i="0" b="0">
+              <a:rPr sz="1700" i="0" b="0">
                 <a:solidFill>
                   <a:srgbClr val="D4D4D4"/>
                 </a:solidFill>
@@ -6120,7 +6056,7 @@
               <a:t> </a:t>
             </a:r>
             <a:r>
-              <a:rPr sz="2000" i="0" b="0">
+              <a:rPr sz="1700" i="0" b="0">
                 <a:solidFill>
                   <a:srgbClr val="D4D4D4"/>
                 </a:solidFill>
@@ -6129,7 +6065,7 @@
               <a:t>dueno</a:t>
             </a:r>
             <a:r>
-              <a:rPr sz="2000" i="0" b="0">
+              <a:rPr sz="1700" i="0" b="0">
                 <a:solidFill>
                   <a:srgbClr val="D4D4D4"/>
                 </a:solidFill>
@@ -6138,7 +6074,7 @@
               <a:t>&lt;</a:t>
             </a:r>
             <a:r>
-              <a:rPr sz="2000" i="0" b="0">
+              <a:rPr sz="1700" i="0" b="0">
                 <a:solidFill>
                   <a:srgbClr val="D4D4D4"/>
                 </a:solidFill>
@@ -6147,7 +6083,7 @@
               <a:t>br</a:t>
             </a:r>
             <a:r>
-              <a:rPr sz="2000" i="0" b="0">
+              <a:rPr sz="1700" i="0" b="0">
                 <a:solidFill>
                   <a:srgbClr val="D4D4D4"/>
                 </a:solidFill>
@@ -6156,7 +6092,7 @@
               <a:t>/&gt;</a:t>
             </a:r>
             <a:r>
-              <a:rPr sz="2000" i="0" b="0">
+              <a:rPr sz="1700" i="0" b="0">
                 <a:solidFill>
                   <a:srgbClr val="B5CEA8"/>
                 </a:solidFill>
@@ -6165,7 +6101,7 @@
               <a:t>3</a:t>
             </a:r>
             <a:r>
-              <a:rPr sz="2000" i="0" b="0">
+              <a:rPr sz="1700" i="0" b="0">
                 <a:solidFill>
                   <a:srgbClr val="D4D4D4"/>
                 </a:solidFill>
@@ -6174,7 +6110,7 @@
               <a:t> </a:t>
             </a:r>
             <a:r>
-              <a:rPr sz="2000" i="0" b="0">
+              <a:rPr sz="1700" i="0" b="0">
                 <a:solidFill>
                   <a:srgbClr val="D4D4D4"/>
                 </a:solidFill>
@@ -6183,7 +6119,7 @@
               <a:t>pts</a:t>
             </a:r>
             <a:r>
-              <a:rPr sz="2000" i="0" b="0">
+              <a:rPr sz="1700" i="0" b="0">
                 <a:solidFill>
                   <a:srgbClr val="D4D4D4"/>
                 </a:solidFill>
@@ -6195,11 +6131,11 @@
           <a:p>
             <a:pPr>
               <a:spcAft>
-                <a:spcPts val="428"/>
+                <a:spcPts val="364"/>
               </a:spcAft>
             </a:pPr>
             <a:r>
-              <a:rPr sz="2000" i="0" b="0">
+              <a:rPr sz="1700" i="0" b="0">
                 <a:solidFill>
                   <a:srgbClr val="D4D4D4"/>
                 </a:solidFill>
@@ -6208,7 +6144,7 @@
               <a:t>  </a:t>
             </a:r>
             <a:r>
-              <a:rPr sz="2000" i="0" b="0">
+              <a:rPr sz="1700" i="0" b="0">
                 <a:solidFill>
                   <a:srgbClr val="D4D4D4"/>
                 </a:solidFill>
@@ -6217,7 +6153,7 @@
               <a:t>E1</a:t>
             </a:r>
             <a:r>
-              <a:rPr sz="2000" i="0" b="0">
+              <a:rPr sz="1700" i="0" b="0">
                 <a:solidFill>
                   <a:srgbClr val="D4D4D4"/>
                 </a:solidFill>
@@ -6226,7 +6162,7 @@
               <a:t> --&gt; </a:t>
             </a:r>
             <a:r>
-              <a:rPr sz="2000" i="0" b="0">
+              <a:rPr sz="1700" i="0" b="0">
                 <a:solidFill>
                   <a:srgbClr val="D4D4D4"/>
                 </a:solidFill>
@@ -6235,7 +6171,7 @@
               <a:t>H2</a:t>
             </a:r>
             <a:r>
-              <a:rPr sz="2000" i="0" b="0">
+              <a:rPr sz="1700" i="0" b="0">
                 <a:solidFill>
                   <a:srgbClr val="D4D4D4"/>
                 </a:solidFill>
@@ -6244,7 +6180,7 @@
               <a:t>[</a:t>
             </a:r>
             <a:r>
-              <a:rPr sz="2000" i="0" b="0">
+              <a:rPr sz="1700" i="0" b="0">
                 <a:solidFill>
                   <a:srgbClr val="D4D4D4"/>
                 </a:solidFill>
@@ -6253,7 +6189,7 @@
               <a:t>HU</a:t>
             </a:r>
             <a:r>
-              <a:rPr sz="2000" i="0" b="0">
+              <a:rPr sz="1700" i="0" b="0">
                 <a:solidFill>
                   <a:srgbClr val="D4D4D4"/>
                 </a:solidFill>
@@ -6262,7 +6198,7 @@
               <a:t>-</a:t>
             </a:r>
             <a:r>
-              <a:rPr sz="2000" i="0" b="0">
+              <a:rPr sz="1700" i="0" b="0">
                 <a:solidFill>
                   <a:srgbClr val="B5CEA8"/>
                 </a:solidFill>
@@ -6271,7 +6207,7 @@
               <a:t>02</a:t>
             </a:r>
             <a:r>
-              <a:rPr sz="2000" i="0" b="0">
+              <a:rPr sz="1700" i="0" b="0">
                 <a:solidFill>
                   <a:srgbClr val="D4D4D4"/>
                 </a:solidFill>
@@ -6280,7 +6216,7 @@
               <a:t> </a:t>
             </a:r>
             <a:r>
-              <a:rPr sz="2000" i="0" b="0">
+              <a:rPr sz="1700" i="0" b="0">
                 <a:solidFill>
                   <a:srgbClr val="D4D4D4"/>
                 </a:solidFill>
@@ -6289,7 +6225,7 @@
               <a:t>Registrar</a:t>
             </a:r>
             <a:r>
-              <a:rPr sz="2000" i="0" b="0">
+              <a:rPr sz="1700" i="0" b="0">
                 <a:solidFill>
                   <a:srgbClr val="D4D4D4"/>
                 </a:solidFill>
@@ -6298,7 +6234,7 @@
               <a:t> </a:t>
             </a:r>
             <a:r>
-              <a:rPr sz="2000" i="0" b="0">
+              <a:rPr sz="1700" i="0" b="0">
                 <a:solidFill>
                   <a:srgbClr val="D4D4D4"/>
                 </a:solidFill>
@@ -6307,7 +6243,7 @@
               <a:t>mascota</a:t>
             </a:r>
             <a:r>
-              <a:rPr sz="2000" i="0" b="0">
+              <a:rPr sz="1700" i="0" b="0">
                 <a:solidFill>
                   <a:srgbClr val="D4D4D4"/>
                 </a:solidFill>
@@ -6316,7 +6252,7 @@
               <a:t>&lt;</a:t>
             </a:r>
             <a:r>
-              <a:rPr sz="2000" i="0" b="0">
+              <a:rPr sz="1700" i="0" b="0">
                 <a:solidFill>
                   <a:srgbClr val="D4D4D4"/>
                 </a:solidFill>
@@ -6325,7 +6261,7 @@
               <a:t>br</a:t>
             </a:r>
             <a:r>
-              <a:rPr sz="2000" i="0" b="0">
+              <a:rPr sz="1700" i="0" b="0">
                 <a:solidFill>
                   <a:srgbClr val="D4D4D4"/>
                 </a:solidFill>
@@ -6334,7 +6270,7 @@
               <a:t>/&gt;</a:t>
             </a:r>
             <a:r>
-              <a:rPr sz="2000" i="0" b="0">
+              <a:rPr sz="1700" i="0" b="0">
                 <a:solidFill>
                   <a:srgbClr val="B5CEA8"/>
                 </a:solidFill>
@@ -6343,7 +6279,7 @@
               <a:t>5</a:t>
             </a:r>
             <a:r>
-              <a:rPr sz="2000" i="0" b="0">
+              <a:rPr sz="1700" i="0" b="0">
                 <a:solidFill>
                   <a:srgbClr val="D4D4D4"/>
                 </a:solidFill>
@@ -6352,7 +6288,7 @@
               <a:t> </a:t>
             </a:r>
             <a:r>
-              <a:rPr sz="2000" i="0" b="0">
+              <a:rPr sz="1700" i="0" b="0">
                 <a:solidFill>
                   <a:srgbClr val="D4D4D4"/>
                 </a:solidFill>
@@ -6361,7 +6297,7 @@
               <a:t>pts</a:t>
             </a:r>
             <a:r>
-              <a:rPr sz="2000" i="0" b="0">
+              <a:rPr sz="1700" i="0" b="0">
                 <a:solidFill>
                   <a:srgbClr val="D4D4D4"/>
                 </a:solidFill>
@@ -6373,11 +6309,11 @@
           <a:p>
             <a:pPr>
               <a:spcAft>
-                <a:spcPts val="428"/>
+                <a:spcPts val="364"/>
               </a:spcAft>
             </a:pPr>
             <a:r>
-              <a:rPr sz="2000" i="0" b="0">
+              <a:rPr sz="1700" i="0" b="0">
                 <a:solidFill>
                   <a:srgbClr val="D4D4D4"/>
                 </a:solidFill>
@@ -6386,7 +6322,7 @@
               <a:t>  </a:t>
             </a:r>
             <a:r>
-              <a:rPr sz="2000" i="0" b="0">
+              <a:rPr sz="1700" i="0" b="0">
                 <a:solidFill>
                   <a:srgbClr val="D4D4D4"/>
                 </a:solidFill>
@@ -6395,7 +6331,7 @@
               <a:t>E1</a:t>
             </a:r>
             <a:r>
-              <a:rPr sz="2000" i="0" b="0">
+              <a:rPr sz="1700" i="0" b="0">
                 <a:solidFill>
                   <a:srgbClr val="D4D4D4"/>
                 </a:solidFill>
@@ -6404,7 +6340,7 @@
               <a:t> --&gt; </a:t>
             </a:r>
             <a:r>
-              <a:rPr sz="2000" i="0" b="0">
+              <a:rPr sz="1700" i="0" b="0">
                 <a:solidFill>
                   <a:srgbClr val="D4D4D4"/>
                 </a:solidFill>
@@ -6413,7 +6349,7 @@
               <a:t>H3</a:t>
             </a:r>
             <a:r>
-              <a:rPr sz="2000" i="0" b="0">
+              <a:rPr sz="1700" i="0" b="0">
                 <a:solidFill>
                   <a:srgbClr val="D4D4D4"/>
                 </a:solidFill>
@@ -6422,7 +6358,7 @@
               <a:t>[</a:t>
             </a:r>
             <a:r>
-              <a:rPr sz="2000" i="0" b="0">
+              <a:rPr sz="1700" i="0" b="0">
                 <a:solidFill>
                   <a:srgbClr val="D4D4D4"/>
                 </a:solidFill>
@@ -6431,7 +6367,7 @@
               <a:t>HU</a:t>
             </a:r>
             <a:r>
-              <a:rPr sz="2000" i="0" b="0">
+              <a:rPr sz="1700" i="0" b="0">
                 <a:solidFill>
                   <a:srgbClr val="D4D4D4"/>
                 </a:solidFill>
@@ -6440,7 +6376,7 @@
               <a:t>-</a:t>
             </a:r>
             <a:r>
-              <a:rPr sz="2000" i="0" b="0">
+              <a:rPr sz="1700" i="0" b="0">
                 <a:solidFill>
                   <a:srgbClr val="B5CEA8"/>
                 </a:solidFill>
@@ -6449,7 +6385,7 @@
               <a:t>03</a:t>
             </a:r>
             <a:r>
-              <a:rPr sz="2000" i="0" b="0">
+              <a:rPr sz="1700" i="0" b="0">
                 <a:solidFill>
                   <a:srgbClr val="D4D4D4"/>
                 </a:solidFill>
@@ -6458,7 +6394,7 @@
               <a:t> </a:t>
             </a:r>
             <a:r>
-              <a:rPr sz="2000" i="0" b="0">
+              <a:rPr sz="1700" i="0" b="0">
                 <a:solidFill>
                   <a:srgbClr val="D4D4D4"/>
                 </a:solidFill>
@@ -6467,7 +6403,7 @@
               <a:t>Agendar</a:t>
             </a:r>
             <a:r>
-              <a:rPr sz="2000" i="0" b="0">
+              <a:rPr sz="1700" i="0" b="0">
                 <a:solidFill>
                   <a:srgbClr val="D4D4D4"/>
                 </a:solidFill>
@@ -6476,7 +6412,7 @@
               <a:t> </a:t>
             </a:r>
             <a:r>
-              <a:rPr sz="2000" i="0" b="0">
+              <a:rPr sz="1700" i="0" b="0">
                 <a:solidFill>
                   <a:srgbClr val="D4D4D4"/>
                 </a:solidFill>
@@ -6485,7 +6421,7 @@
               <a:t>cita</a:t>
             </a:r>
             <a:r>
-              <a:rPr sz="2000" i="0" b="0">
+              <a:rPr sz="1700" i="0" b="0">
                 <a:solidFill>
                   <a:srgbClr val="D4D4D4"/>
                 </a:solidFill>
@@ -6494,7 +6430,7 @@
               <a:t>&lt;</a:t>
             </a:r>
             <a:r>
-              <a:rPr sz="2000" i="0" b="0">
+              <a:rPr sz="1700" i="0" b="0">
                 <a:solidFill>
                   <a:srgbClr val="D4D4D4"/>
                 </a:solidFill>
@@ -6503,7 +6439,7 @@
               <a:t>br</a:t>
             </a:r>
             <a:r>
-              <a:rPr sz="2000" i="0" b="0">
+              <a:rPr sz="1700" i="0" b="0">
                 <a:solidFill>
                   <a:srgbClr val="D4D4D4"/>
                 </a:solidFill>
@@ -6512,7 +6448,7 @@
               <a:t>/&gt;</a:t>
             </a:r>
             <a:r>
-              <a:rPr sz="2000" i="0" b="0">
+              <a:rPr sz="1700" i="0" b="0">
                 <a:solidFill>
                   <a:srgbClr val="B5CEA8"/>
                 </a:solidFill>
@@ -6521,7 +6457,7 @@
               <a:t>8</a:t>
             </a:r>
             <a:r>
-              <a:rPr sz="2000" i="0" b="0">
+              <a:rPr sz="1700" i="0" b="0">
                 <a:solidFill>
                   <a:srgbClr val="D4D4D4"/>
                 </a:solidFill>
@@ -6530,7 +6466,7 @@
               <a:t> </a:t>
             </a:r>
             <a:r>
-              <a:rPr sz="2000" i="0" b="0">
+              <a:rPr sz="1700" i="0" b="0">
                 <a:solidFill>
                   <a:srgbClr val="D4D4D4"/>
                 </a:solidFill>
@@ -6539,7 +6475,7 @@
               <a:t>pts</a:t>
             </a:r>
             <a:r>
-              <a:rPr sz="2000" i="0" b="0">
+              <a:rPr sz="1700" i="0" b="0">
                 <a:solidFill>
                   <a:srgbClr val="D4D4D4"/>
                 </a:solidFill>
@@ -6551,11 +6487,11 @@
           <a:p>
             <a:pPr>
               <a:spcAft>
-                <a:spcPts val="428"/>
+                <a:spcPts val="364"/>
               </a:spcAft>
             </a:pPr>
             <a:r>
-              <a:rPr sz="2000" i="0" b="0">
+              <a:rPr sz="1700" i="0" b="0">
                 <a:solidFill>
                   <a:srgbClr val="D4D4D4"/>
                 </a:solidFill>
@@ -6564,7 +6500,7 @@
               <a:t>  </a:t>
             </a:r>
             <a:r>
-              <a:rPr sz="2000" i="0" b="0">
+              <a:rPr sz="1700" i="0" b="0">
                 <a:solidFill>
                   <a:srgbClr val="D4D4D4"/>
                 </a:solidFill>
@@ -6573,7 +6509,7 @@
               <a:t>E2</a:t>
             </a:r>
             <a:r>
-              <a:rPr sz="2000" i="0" b="0">
+              <a:rPr sz="1700" i="0" b="0">
                 <a:solidFill>
                   <a:srgbClr val="D4D4D4"/>
                 </a:solidFill>
@@ -6582,7 +6518,7 @@
               <a:t> --&gt; </a:t>
             </a:r>
             <a:r>
-              <a:rPr sz="2000" i="0" b="0">
+              <a:rPr sz="1700" i="0" b="0">
                 <a:solidFill>
                   <a:srgbClr val="D4D4D4"/>
                 </a:solidFill>
@@ -6591,7 +6527,7 @@
               <a:t>H4</a:t>
             </a:r>
             <a:r>
-              <a:rPr sz="2000" i="0" b="0">
+              <a:rPr sz="1700" i="0" b="0">
                 <a:solidFill>
                   <a:srgbClr val="D4D4D4"/>
                 </a:solidFill>
@@ -6600,7 +6536,7 @@
               <a:t>[</a:t>
             </a:r>
             <a:r>
-              <a:rPr sz="2000" i="0" b="0">
+              <a:rPr sz="1700" i="0" b="0">
                 <a:solidFill>
                   <a:srgbClr val="D4D4D4"/>
                 </a:solidFill>
@@ -6609,7 +6545,7 @@
               <a:t>HU</a:t>
             </a:r>
             <a:r>
-              <a:rPr sz="2000" i="0" b="0">
+              <a:rPr sz="1700" i="0" b="0">
                 <a:solidFill>
                   <a:srgbClr val="D4D4D4"/>
                 </a:solidFill>
@@ -6618,7 +6554,7 @@
               <a:t>-</a:t>
             </a:r>
             <a:r>
-              <a:rPr sz="2000" i="0" b="0">
+              <a:rPr sz="1700" i="0" b="0">
                 <a:solidFill>
                   <a:srgbClr val="B5CEA8"/>
                 </a:solidFill>
@@ -6627,7 +6563,7 @@
               <a:t>04</a:t>
             </a:r>
             <a:r>
-              <a:rPr sz="2000" i="0" b="0">
+              <a:rPr sz="1700" i="0" b="0">
                 <a:solidFill>
                   <a:srgbClr val="D4D4D4"/>
                 </a:solidFill>
@@ -6636,7 +6572,7 @@
               <a:t> </a:t>
             </a:r>
             <a:r>
-              <a:rPr sz="2000" i="0" b="0">
+              <a:rPr sz="1700" i="0" b="0">
                 <a:solidFill>
                   <a:srgbClr val="D4D4D4"/>
                 </a:solidFill>
@@ -6645,7 +6581,7 @@
               <a:t>Abrir</a:t>
             </a:r>
             <a:r>
-              <a:rPr sz="2000" i="0" b="0">
+              <a:rPr sz="1700" i="0" b="0">
                 <a:solidFill>
                   <a:srgbClr val="D4D4D4"/>
                 </a:solidFill>
@@ -6654,7 +6590,7 @@
               <a:t> </a:t>
             </a:r>
             <a:r>
-              <a:rPr sz="2000" i="0" b="0">
+              <a:rPr sz="1700" i="0" b="0">
                 <a:solidFill>
                   <a:srgbClr val="D4D4D4"/>
                 </a:solidFill>
@@ -6663,7 +6599,7 @@
               <a:t>expediente</a:t>
             </a:r>
             <a:r>
-              <a:rPr sz="2000" i="0" b="0">
+              <a:rPr sz="1700" i="0" b="0">
                 <a:solidFill>
                   <a:srgbClr val="D4D4D4"/>
                 </a:solidFill>
@@ -6672,7 +6608,7 @@
               <a:t>&lt;</a:t>
             </a:r>
             <a:r>
-              <a:rPr sz="2000" i="0" b="0">
+              <a:rPr sz="1700" i="0" b="0">
                 <a:solidFill>
                   <a:srgbClr val="D4D4D4"/>
                 </a:solidFill>
@@ -6681,7 +6617,7 @@
               <a:t>br</a:t>
             </a:r>
             <a:r>
-              <a:rPr sz="2000" i="0" b="0">
+              <a:rPr sz="1700" i="0" b="0">
                 <a:solidFill>
                   <a:srgbClr val="D4D4D4"/>
                 </a:solidFill>
@@ -6690,7 +6626,7 @@
               <a:t>/&gt;</a:t>
             </a:r>
             <a:r>
-              <a:rPr sz="2000" i="0" b="0">
+              <a:rPr sz="1700" i="0" b="0">
                 <a:solidFill>
                   <a:srgbClr val="B5CEA8"/>
                 </a:solidFill>
@@ -6699,7 +6635,7 @@
               <a:t>5</a:t>
             </a:r>
             <a:r>
-              <a:rPr sz="2000" i="0" b="0">
+              <a:rPr sz="1700" i="0" b="0">
                 <a:solidFill>
                   <a:srgbClr val="D4D4D4"/>
                 </a:solidFill>
@@ -6708,7 +6644,7 @@
               <a:t> </a:t>
             </a:r>
             <a:r>
-              <a:rPr sz="2000" i="0" b="0">
+              <a:rPr sz="1700" i="0" b="0">
                 <a:solidFill>
                   <a:srgbClr val="D4D4D4"/>
                 </a:solidFill>
@@ -6717,7 +6653,7 @@
               <a:t>pts</a:t>
             </a:r>
             <a:r>
-              <a:rPr sz="2000" i="0" b="0">
+              <a:rPr sz="1700" i="0" b="0">
                 <a:solidFill>
                   <a:srgbClr val="D4D4D4"/>
                 </a:solidFill>
@@ -6726,75 +6662,150 @@
               <a:t>]</a:t>
             </a:r>
           </a:p>
-          <a:p>
-            <a:pPr>
-              <a:spcAft>
-                <a:spcPts val="428"/>
-              </a:spcAft>
-            </a:pPr>
-            <a:r>
-              <a:rPr sz="2000" i="0" b="0">
-                <a:solidFill>
-                  <a:srgbClr val="D4D4D4"/>
-                </a:solidFill>
-                <a:latin typeface="Consolas"/>
-              </a:rPr>
-              <a:t/>
-            </a:r>
-          </a:p>
-          <a:p>
-            <a:pPr>
-              <a:spcAft>
-                <a:spcPts val="428"/>
-              </a:spcAft>
-            </a:pPr>
-            <a:r>
-              <a:rPr sz="2000" i="1" b="0">
-                <a:solidFill>
-                  <a:srgbClr val="6A9955"/>
-                </a:solidFill>
-                <a:latin typeface="Consolas"/>
-              </a:rPr>
-              <a:t>%% Los puntos son RELATIVOS, no horas: HU-03 es «como HU-02 pero mas»,</a:t>
-            </a:r>
-          </a:p>
-          <a:p>
-            <a:pPr>
-              <a:spcAft>
-                <a:spcPts val="428"/>
-              </a:spcAft>
-            </a:pPr>
-            <a:r>
-              <a:rPr sz="2000" i="1" b="0">
-                <a:solidFill>
-                  <a:srgbClr val="6A9955"/>
-                </a:solidFill>
-                <a:latin typeface="Consolas"/>
-              </a:rPr>
-              <a:t>%% y esa comparacion es toda la estimacion que se pide hoy.</a:t>
-            </a:r>
-          </a:p>
-          <a:p>
-            <a:pPr>
-              <a:spcAft>
-                <a:spcPts val="428"/>
-              </a:spcAft>
-            </a:pPr>
-            <a:r>
-              <a:rPr sz="2000" i="1" b="0">
-                <a:solidFill>
-                  <a:srgbClr val="6A9955"/>
-                </a:solidFill>
-                <a:latin typeface="Consolas"/>
-              </a:rPr>
-              <a:t>%% El orden del backlog sale del valor, no del numero de puntos.</a:t>
-            </a:r>
-          </a:p>
-        </p:txBody>
-      </p:sp>
-      <p:sp>
-        <p:nvSpPr>
-          <p:cNvPr id="13" name="TextBox 12"/>
+        </p:txBody>
+      </p:sp>
+      <p:sp>
+        <p:nvSpPr>
+          <p:cNvPr id="13" name="Rounded Rectangle 12"/>
+          <p:cNvSpPr/>
+          <p:nvPr/>
+        </p:nvSpPr>
+        <p:spPr>
+          <a:xfrm>
+            <a:off x="7668579" y="1261872"/>
+            <a:ext cx="4120780" cy="3318569"/>
+          </a:xfrm>
+          <a:prstGeom prst="roundRect">
+            <a:avLst>
+              <a:gd name="adj" fmla="val 4000"/>
+            </a:avLst>
+          </a:prstGeom>
+          <a:solidFill>
+            <a:srgbClr val="E8EEF4"/>
+          </a:solidFill>
+          <a:ln>
+            <a:noFill/>
+          </a:ln>
+        </p:spPr>
+        <p:style>
+          <a:lnRef idx="1">
+            <a:schemeClr val="accent1"/>
+          </a:lnRef>
+          <a:fillRef idx="3">
+            <a:schemeClr val="accent1"/>
+          </a:fillRef>
+          <a:effectRef idx="2">
+            <a:schemeClr val="accent1"/>
+          </a:effectRef>
+          <a:fontRef idx="minor">
+            <a:schemeClr val="lt1"/>
+          </a:fontRef>
+        </p:style>
+        <p:txBody>
+          <a:bodyPr rtlCol="0" anchor="ctr"/>
+          <a:lstStyle/>
+          <a:p>
+            <a:pPr algn="ctr"/>
+          </a:p>
+        </p:txBody>
+      </p:sp>
+      <p:pic>
+        <p:nvPicPr>
+          <p:cNvPr id="14" name="Picture 13" descr="dg-backlog-paso1.png"/>
+          <p:cNvPicPr>
+            <a:picLocks noChangeAspect="1"/>
+          </p:cNvPicPr>
+          <p:nvPr/>
+        </p:nvPicPr>
+        <p:blipFill>
+          <a:blip r:embed="rId2"/>
+          <a:stretch>
+            <a:fillRect/>
+          </a:stretch>
+        </p:blipFill>
+        <p:spPr>
+          <a:xfrm>
+            <a:off x="7723443" y="1316736"/>
+            <a:ext cx="4011052" cy="3208841"/>
+          </a:xfrm>
+          <a:prstGeom prst="rect">
+            <a:avLst/>
+          </a:prstGeom>
+        </p:spPr>
+      </p:pic>
+      <p:sp>
+        <p:nvSpPr>
+          <p:cNvPr id="15" name="TextBox 14"/>
+          <p:cNvSpPr txBox="1"/>
+          <p:nvPr/>
+        </p:nvSpPr>
+        <p:spPr>
+          <a:xfrm>
+            <a:off x="7723443" y="4580441"/>
+            <a:ext cx="4011052" cy="320040"/>
+          </a:xfrm>
+          <a:prstGeom prst="rect">
+            <a:avLst/>
+          </a:prstGeom>
+          <a:noFill/>
+        </p:spPr>
+        <p:txBody>
+          <a:bodyPr wrap="square">
+            <a:spAutoFit/>
+          </a:bodyPr>
+          <a:lstStyle/>
+          <a:p>
+            <a:pPr algn="ctr"/>
+            <a:r>
+              <a:rPr sz="1200" b="0" i="1">
+                <a:solidFill>
+                  <a:srgbClr val="666666"/>
+                </a:solidFill>
+                <a:latin typeface="Calibri"/>
+              </a:rPr>
+              <a:t>Lo que dibuja este código</a:t>
+            </a:r>
+          </a:p>
+        </p:txBody>
+      </p:sp>
+      <p:sp>
+        <p:nvSpPr>
+          <p:cNvPr id="16" name="TextBox 15"/>
+          <p:cNvSpPr txBox="1"/>
+          <p:nvPr/>
+        </p:nvSpPr>
+        <p:spPr>
+          <a:xfrm>
+            <a:off x="457200" y="6035040"/>
+            <a:ext cx="11277295" cy="365760"/>
+          </a:xfrm>
+          <a:prstGeom prst="rect">
+            <a:avLst/>
+          </a:prstGeom>
+          <a:noFill/>
+        </p:spPr>
+        <p:txBody>
+          <a:bodyPr wrap="square">
+            <a:spAutoFit/>
+          </a:bodyPr>
+          <a:lstStyle/>
+          <a:p>
+            <a:pPr algn="ctr"/>
+            <a:r>
+              <a:rPr sz="1300" b="0" i="1">
+                <a:solidFill>
+                  <a:srgbClr val="666666"/>
+                </a:solidFill>
+                <a:latin typeface="Calibri"/>
+              </a:rPr>
+              <a:t>Los puntos son relativos, no horas; el orden del backlog sale del valor, no de los puntos.</a:t>
+            </a:r>
+          </a:p>
+        </p:txBody>
+      </p:sp>
+      <p:sp>
+        <p:nvSpPr>
+          <p:cNvPr id="17" name="TextBox 16"/>
           <p:cNvSpPr txBox="1"/>
           <p:nvPr/>
         </p:nvSpPr>

--- a/Seminario de Sistemas/Clases/Clase 7 - Historias de usuario/Presentacion.pptx
+++ b/Seminario de Sistemas/Clases/Clase 7 - Historias de usuario/Presentacion.pptx
@@ -810,7 +810,7 @@
           <a:p/>
           <a:p>
             <a:r>
-              <a:t>Estimable: el equipo entiende lo suficiente para tallarla; si nadie sabe cuanto pesa, falta conversacion o hace falta investigar aparte.</a:t>
+              <a:t>Estimable: el equipo entiende lo suficiente para estimarla; si nadie sabe cuanto pesa, falta conversacion o hace falta investigar aparte.</a:t>
             </a:r>
           </a:p>
           <a:p/>
